--- a/thesis/presentation/MSA_Detector_Defense_v2.pptx
+++ b/thesis/presentation/MSA_Detector_Defense_v2.pptx
@@ -4,13 +4,16 @@
   <p:sldMasterIdLst>
     <p:sldMasterId id="2147483648" r:id="rId1"/>
   </p:sldMasterIdLst>
+  <p:notesMasterIdLst>
+    <p:notesMasterId r:id="rId14"/>
+  </p:notesMasterIdLst>
   <p:sldIdLst>
     <p:sldId id="256" r:id="rId2"/>
     <p:sldId id="257" r:id="rId3"/>
     <p:sldId id="258" r:id="rId4"/>
     <p:sldId id="259" r:id="rId5"/>
-    <p:sldId id="260" r:id="rId6"/>
-    <p:sldId id="261" r:id="rId7"/>
+    <p:sldId id="261" r:id="rId6"/>
+    <p:sldId id="260" r:id="rId7"/>
     <p:sldId id="262" r:id="rId8"/>
     <p:sldId id="263" r:id="rId9"/>
     <p:sldId id="264" r:id="rId10"/>
@@ -18,10 +21,7 @@
     <p:sldId id="266" r:id="rId12"/>
     <p:sldId id="267" r:id="rId13"/>
   </p:sldIdLst>
-  <p:notesMasterIdLst>
-    <p:notesMasterId r:id="rId14"/>
-  </p:notesMasterIdLst>
-  <p:sldSz cx="9144000" cy="5143500"/>
+  <p:sldSz cx="9144000" cy="5143500" type="screen16x9"/>
   <p:notesSz cx="5143500" cy="9144000"/>
   <p:defaultTextStyle>
     <a:lvl1pPr marL="0" algn="l" defTabSz="914400" rtl="0" eaLnBrk="1" latinLnBrk="0" hangingPunct="1">
@@ -115,13 +115,20 @@
       </a:defRPr>
     </a:lvl9pPr>
   </p:defaultTextStyle>
+  <p:extLst>
+    <p:ext uri="{EFAFB233-063F-42B5-8137-9DF3F51BA10A}">
+      <p15:sldGuideLst xmlns:p15="http://schemas.microsoft.com/office/powerpoint/2012/main"/>
+    </p:ext>
+  </p:extLst>
 </p:presentation>
 </file>
 
 <file path=ppt/charts/chart1.xml><?xml version="1.0" encoding="utf-8"?>
-<c:chartSpace xmlns:c="http://schemas.openxmlformats.org/drawingml/2006/chart" xmlns:a="http://schemas.openxmlformats.org/drawingml/2006/main" xmlns:r="http://schemas.openxmlformats.org/officeDocument/2006/relationships">
+<c:chartSpace xmlns:c="http://schemas.openxmlformats.org/drawingml/2006/chart" xmlns:a="http://schemas.openxmlformats.org/drawingml/2006/main" xmlns:r="http://schemas.openxmlformats.org/officeDocument/2006/relationships" xmlns:c16r2="http://schemas.microsoft.com/office/drawing/2015/06/chart">
   <c:date1904 val="0"/>
+  <c:lang val="en-US"/>
   <c:roundedCorners val="1"/>
+  <c:style val="2"/>
   <c:chart>
     <c:title>
       <c:tx>
@@ -138,7 +145,7 @@
               </a:defRPr>
             </a:pPr>
             <a:r>
-              <a:rPr sz="1200" b="0" i="0" u="none" strike="noStrike">
+              <a:rPr lang="en-US" sz="1200" b="0" i="0" u="none" strike="noStrike">
                 <a:solidFill>
                   <a:srgbClr val="0F2A44"/>
                 </a:solidFill>
@@ -149,7 +156,6 @@
           </a:p>
         </c:rich>
       </c:tx>
-      <c:layout/>
       <c:overlay val="0"/>
     </c:title>
     <c:autoTitleDeleted val="0"/>
@@ -182,18 +188,26 @@
           <c:invertIfNegative val="0"/>
           <c:dLbls>
             <c:numFmt formatCode="#,##0" sourceLinked="0"/>
+            <c:spPr>
+              <a:noFill/>
+              <a:ln>
+                <a:noFill/>
+              </a:ln>
+              <a:effectLst/>
+            </c:spPr>
             <c:txPr>
               <a:bodyPr/>
               <a:lstStyle/>
               <a:p>
                 <a:pPr>
-                  <a:defRPr b="0" i="0" strike="noStrike" sz="900" u="none">
+                  <a:defRPr sz="900" b="0" i="0" u="none" strike="noStrike">
                     <a:solidFill>
                       <a:srgbClr val="1E293B"/>
                     </a:solidFill>
                     <a:latin typeface="Arial"/>
                   </a:defRPr>
                 </a:pPr>
+                <a:endParaRPr lang="en-US"/>
               </a:p>
             </c:txPr>
             <c:showLegendKey val="0"/>
@@ -203,49 +217,52 @@
             <c:showPercent val="0"/>
             <c:showBubbleSize val="0"/>
             <c:showLeaderLines val="0"/>
+            <c:extLst>
+              <c:ext xmlns:c15="http://schemas.microsoft.com/office/drawing/2012/chart" uri="{CE6537A1-D6FC-4f65-9D91-7224C49458BB}">
+                <c15:showLeaderLines val="0"/>
+              </c:ext>
+            </c:extLst>
           </c:dLbls>
           <c:cat>
-            <c:multiLvlStrRef>
+            <c:strRef>
               <c:f>Sheet1!$A$2:$A$12</c:f>
-              <c:multiLvlStrCache>
+              <c:strCache>
                 <c:ptCount val="11"/>
-                <c:lvl>
-                  <c:pt idx="0">
-                    <c:v>MicroSocial</c:v>
-                  </c:pt>
-                  <c:pt idx="1">
-                    <c:v>ftgo</c:v>
-                  </c:pt>
-                  <c:pt idx="2">
-                    <c:v>PiggyMetrics</c:v>
-                  </c:pt>
-                  <c:pt idx="3">
-                    <c:v>RuoYi</c:v>
-                  </c:pt>
-                  <c:pt idx="4">
-                    <c:v>Site-Where</c:v>
-                  </c:pt>
-                  <c:pt idx="5">
-                    <c:v>design-pat.</c:v>
-                  </c:pt>
-                  <c:pt idx="6">
-                    <c:v>NetworkDisk</c:v>
-                  </c:pt>
-                  <c:pt idx="7">
-                    <c:v>piomin</c:v>
-                  </c:pt>
-                  <c:pt idx="8">
-                    <c:v>Train-Ticket</c:v>
-                  </c:pt>
-                  <c:pt idx="9">
-                    <c:v>mall-swarm</c:v>
-                  </c:pt>
-                  <c:pt idx="10">
-                    <c:v>recruit</c:v>
-                  </c:pt>
-                </c:lvl>
-              </c:multiLvlStrCache>
-            </c:multiLvlStrRef>
+                <c:pt idx="0">
+                  <c:v>MicroSocial</c:v>
+                </c:pt>
+                <c:pt idx="1">
+                  <c:v>ftgo</c:v>
+                </c:pt>
+                <c:pt idx="2">
+                  <c:v>PiggyMetrics</c:v>
+                </c:pt>
+                <c:pt idx="3">
+                  <c:v>RuoYi</c:v>
+                </c:pt>
+                <c:pt idx="4">
+                  <c:v>Site-Where</c:v>
+                </c:pt>
+                <c:pt idx="5">
+                  <c:v>design-pat.</c:v>
+                </c:pt>
+                <c:pt idx="6">
+                  <c:v>NetworkDisk</c:v>
+                </c:pt>
+                <c:pt idx="7">
+                  <c:v>piomin</c:v>
+                </c:pt>
+                <c:pt idx="8">
+                  <c:v>Train-Ticket</c:v>
+                </c:pt>
+                <c:pt idx="9">
+                  <c:v>mall-swarm</c:v>
+                </c:pt>
+                <c:pt idx="10">
+                  <c:v>recruit</c:v>
+                </c:pt>
+              </c:strCache>
+            </c:strRef>
           </c:cat>
           <c:val>
             <c:numRef>
@@ -289,36 +306,23 @@
               </c:numCache>
             </c:numRef>
           </c:val>
+          <c:extLst>
+            <c:ext xmlns:c16="http://schemas.microsoft.com/office/drawing/2014/chart" uri="{C3380CC4-5D6E-409C-BE32-E72D297353CC}">
+              <c16:uniqueId val="{00000000-E88F-4B16-8627-297042B24114}"/>
+            </c:ext>
+          </c:extLst>
         </c:ser>
         <c:dLbls>
-          <c:numFmt formatCode="#,##0" sourceLinked="0"/>
-          <c:txPr>
-            <a:bodyPr/>
-            <a:lstStyle/>
-            <a:p>
-              <a:pPr>
-                <a:defRPr b="0" i="0" strike="noStrike" sz="900" u="none">
-                  <a:solidFill>
-                    <a:srgbClr val="1E293B"/>
-                  </a:solidFill>
-                  <a:latin typeface="Arial"/>
-                </a:defRPr>
-              </a:pPr>
-            </a:p>
-          </c:txPr>
           <c:showLegendKey val="0"/>
           <c:showVal val="1"/>
           <c:showCatName val="0"/>
           <c:showSerName val="0"/>
           <c:showPercent val="0"/>
           <c:showBubbleSize val="0"/>
-          <c:showLeaderLines val="0"/>
         </c:dLbls>
         <c:gapWidth val="150"/>
-        <c:overlap val="0"/>
         <c:axId val="2094734554"/>
         <c:axId val="2094734552"/>
-        <c:axId val="2094734556"/>
       </c:barChart>
       <c:catAx>
         <c:axId val="2094734554"/>
@@ -359,6 +363,7 @@
         <c:crosses val="autoZero"/>
         <c:auto val="1"/>
         <c:lblAlgn val="ctr"/>
+        <c:lblOffset val="100"/>
         <c:noMultiLvlLbl val="1"/>
       </c:catAx>
       <c:valAx>
@@ -423,6 +428,7 @@
     </c:plotArea>
     <c:plotVisOnly val="1"/>
     <c:dispBlanksAs val="span"/>
+    <c:showDLblsOverMax val="1"/>
   </c:chart>
   <c:spPr>
     <a:solidFill>
@@ -461,234 +467,10 @@
           <a:chExt cx="0" cy="0"/>
         </a:xfrm>
       </p:grpSpPr>
-      <p:sp>
-        <p:nvSpPr>
-          <p:cNvPr id="2" name="Header Placeholder 1"/>
-          <p:cNvSpPr>
-            <a:spLocks noGrp="1"/>
-          </p:cNvSpPr>
-          <p:nvPr>
-            <p:ph type="hdr" sz="quarter"/>
-          </p:nvPr>
-        </p:nvSpPr>
-        <p:spPr>
-          <a:xfrm>
-            <a:off x="0" y="0"/>
-            <a:ext cx="2971800" cy="458788"/>
-          </a:xfrm>
-          <a:prstGeom prst="rect">
-            <a:avLst/>
-          </a:prstGeom>
-        </p:spPr>
-        <p:txBody>
-          <a:bodyPr vert="horz" lIns="91440" tIns="45720" rIns="91440" bIns="45720" rtlCol="0"/>
-          <a:lstStyle>
-            <a:lvl1pPr algn="l">
-              <a:defRPr sz="1200"/>
-            </a:lvl1pPr>
-          </a:lstStyle>
-          <a:p>
-            <a:endParaRPr lang="en-US"/>
-          </a:p>
-        </p:txBody>
-      </p:sp>
-      <p:sp>
-        <p:nvSpPr>
-          <p:cNvPr id="3" name="Date Placeholder 2"/>
-          <p:cNvSpPr>
-            <a:spLocks noGrp="1"/>
-          </p:cNvSpPr>
-          <p:nvPr>
-            <p:ph type="dt" idx="1"/>
-          </p:nvPr>
-        </p:nvSpPr>
-        <p:spPr>
-          <a:xfrm>
-            <a:off x="3884613" y="0"/>
-            <a:ext cx="2971800" cy="458788"/>
-          </a:xfrm>
-          <a:prstGeom prst="rect">
-            <a:avLst/>
-          </a:prstGeom>
-        </p:spPr>
-        <p:txBody>
-          <a:bodyPr vert="horz" lIns="91440" tIns="45720" rIns="91440" bIns="45720" rtlCol="0"/>
-          <a:lstStyle>
-            <a:lvl1pPr algn="r">
-              <a:defRPr sz="1200"/>
-            </a:lvl1pPr>
-          </a:lstStyle>
-          <a:p>
-            <a:fld id="{5282F153-3F37-0F45-9E97-73ACFA13230C}" type="datetimeFigureOut">
-              <a:rPr lang="en-US"/>
-              <a:t>7/23/19</a:t>
-            </a:fld>
-            <a:endParaRPr lang="en-US"/>
-          </a:p>
-        </p:txBody>
-      </p:sp>
-      <p:sp>
-        <p:nvSpPr>
-          <p:cNvPr id="4" name="Slide Image Placeholder 3"/>
-          <p:cNvSpPr>
-            <a:spLocks noGrp="1" noRot="1" noChangeAspect="1"/>
-          </p:cNvSpPr>
-          <p:nvPr>
-            <p:ph type="sldImg" idx="2"/>
-          </p:nvPr>
-        </p:nvSpPr>
-        <p:spPr>
-          <a:xfrm>
-            <a:off x="685800" y="1143000"/>
-            <a:ext cx="5486400" cy="3086100"/>
-          </a:xfrm>
-          <a:prstGeom prst="rect">
-            <a:avLst/>
-          </a:prstGeom>
-          <a:noFill/>
-          <a:ln w="12700">
-            <a:solidFill>
-              <a:prstClr val="black"/>
-            </a:solidFill>
-          </a:ln>
-        </p:spPr>
-        <p:txBody>
-          <a:bodyPr vert="horz" lIns="91440" tIns="45720" rIns="91440" bIns="45720" rtlCol="0" anchor="ctr"/>
-          <a:lstStyle/>
-          <a:p>
-            <a:endParaRPr lang="en-US"/>
-          </a:p>
-        </p:txBody>
-      </p:sp>
-      <p:sp>
-        <p:nvSpPr>
-          <p:cNvPr id="5" name="Notes Placeholder 4"/>
-          <p:cNvSpPr>
-            <a:spLocks noGrp="1"/>
-          </p:cNvSpPr>
-          <p:nvPr>
-            <p:ph type="body" sz="quarter" idx="3"/>
-          </p:nvPr>
-        </p:nvSpPr>
-        <p:spPr>
-          <a:xfrm>
-            <a:off x="685800" y="4400550"/>
-            <a:ext cx="5486400" cy="3600450"/>
-          </a:xfrm>
-          <a:prstGeom prst="rect">
-            <a:avLst/>
-          </a:prstGeom>
-        </p:spPr>
-        <p:txBody>
-          <a:bodyPr vert="horz" lIns="91440" tIns="45720" rIns="91440" bIns="45720" rtlCol="0"/>
-          <a:lstStyle/>
-          <a:p>
-            <a:pPr lvl="0"/>
-            <a:r>
-              <a:rPr lang="en-US"/>
-              <a:t>Click to edit Master text styles</a:t>
-            </a:r>
-          </a:p>
-          <a:p>
-            <a:pPr lvl="1"/>
-            <a:r>
-              <a:rPr lang="en-US"/>
-              <a:t>Second level</a:t>
-            </a:r>
-          </a:p>
-          <a:p>
-            <a:pPr lvl="2"/>
-            <a:r>
-              <a:rPr lang="en-US"/>
-              <a:t>Third level</a:t>
-            </a:r>
-          </a:p>
-          <a:p>
-            <a:pPr lvl="3"/>
-            <a:r>
-              <a:rPr lang="en-US"/>
-              <a:t>Fourth level</a:t>
-            </a:r>
-          </a:p>
-          <a:p>
-            <a:pPr lvl="4"/>
-            <a:r>
-              <a:rPr lang="en-US"/>
-              <a:t>Fifth level</a:t>
-            </a:r>
-          </a:p>
-        </p:txBody>
-      </p:sp>
-      <p:sp>
-        <p:nvSpPr>
-          <p:cNvPr id="6" name="Footer Placeholder 5"/>
-          <p:cNvSpPr>
-            <a:spLocks noGrp="1"/>
-          </p:cNvSpPr>
-          <p:nvPr>
-            <p:ph type="ftr" sz="quarter" idx="4"/>
-          </p:nvPr>
-        </p:nvSpPr>
-        <p:spPr>
-          <a:xfrm>
-            <a:off x="0" y="8685213"/>
-            <a:ext cx="2971800" cy="458787"/>
-          </a:xfrm>
-          <a:prstGeom prst="rect">
-            <a:avLst/>
-          </a:prstGeom>
-        </p:spPr>
-        <p:txBody>
-          <a:bodyPr vert="horz" lIns="91440" tIns="45720" rIns="91440" bIns="45720" rtlCol="0" anchor="b"/>
-          <a:lstStyle>
-            <a:lvl1pPr algn="l">
-              <a:defRPr sz="1200"/>
-            </a:lvl1pPr>
-          </a:lstStyle>
-          <a:p>
-            <a:endParaRPr lang="en-US"/>
-          </a:p>
-        </p:txBody>
-      </p:sp>
-      <p:sp>
-        <p:nvSpPr>
-          <p:cNvPr id="7" name="Slide Number Placeholder 6"/>
-          <p:cNvSpPr>
-            <a:spLocks noGrp="1"/>
-          </p:cNvSpPr>
-          <p:nvPr>
-            <p:ph type="sldNum" sz="quarter" idx="5"/>
-          </p:nvPr>
-        </p:nvSpPr>
-        <p:spPr>
-          <a:xfrm>
-            <a:off x="3884613" y="8685213"/>
-            <a:ext cx="2971800" cy="458787"/>
-          </a:xfrm>
-          <a:prstGeom prst="rect">
-            <a:avLst/>
-          </a:prstGeom>
-        </p:spPr>
-        <p:txBody>
-          <a:bodyPr vert="horz" lIns="91440" tIns="45720" rIns="91440" bIns="45720" rtlCol="0" anchor="b"/>
-          <a:lstStyle>
-            <a:lvl1pPr algn="r">
-              <a:defRPr sz="1200"/>
-            </a:lvl1pPr>
-          </a:lstStyle>
-          <a:p>
-            <a:fld id="{CE5E9CC1-C706-0F49-92D6-E571CC5EEA8F}" type="slidenum">
-              <a:rPr lang="en-US"/>
-              <a:t>‹#›</a:t>
-            </a:fld>
-            <a:endParaRPr lang="en-US"/>
-          </a:p>
-        </p:txBody>
-      </p:sp>
     </p:spTree>
     <p:extLst>
       <p:ext uri="{BB962C8B-B14F-4D97-AF65-F5344CB8AC3E}">
-        <p14:creationId xmlns:p14="http://schemas.microsoft.com/office/powerpoint/2010/main" val="1024086991"/>
+        <p14:creationId xmlns:p14="http://schemas.microsoft.com/office/powerpoint/2010/main" val="3129392946"/>
       </p:ext>
     </p:extLst>
   </p:cSld>
@@ -834,12 +616,25 @@
           <a:p>
             <a:r>
               <a:rPr lang="en-US" dirty="0"/>
-              <a:t>Open: 'Good morning. My name is Andrei Iacob, and today I'll be defending my dissertation: MSA Detector — a tool for detecting architectural anti-patterns in Java-based microservice systems. My supervisor is Professor Simona Motogna.'
-You can add: 'The core idea is straightforward — as organisations adopt microservices, they often unknowingly introduce structural problems that erode the very benefits they were after. This tool helps catch those problems early, from a source code checkout, before they become production incidents.'
-Keep this short — about 30 seconds. Don't introduce content yet; that's the next slide.
-Breathe, slow down. The committee already knows your name from the schedule, so this is just orientation.</a:t>
-            </a:r>
-            <a:endParaRPr lang="en-US" dirty="0"/>
+              <a:t>Good morning. My name is Andrei Iacob, and today I'll be defending my dissertation: MSA Detector — a tool for detecting architectural anti-patterns in Java-based microservice systems. My supervisor is Professor Simona </a:t>
+            </a:r>
+            <a:r>
+              <a:rPr lang="en-US" dirty="0" err="1"/>
+              <a:t>Motogna</a:t>
+            </a:r>
+            <a:r>
+              <a:rPr lang="en-US" dirty="0"/>
+              <a:t>
+The core idea is straightforward — as </a:t>
+            </a:r>
+            <a:r>
+              <a:rPr lang="en-US" dirty="0" err="1"/>
+              <a:t>organisations</a:t>
+            </a:r>
+            <a:r>
+              <a:rPr lang="en-US" dirty="0"/>
+              <a:t> adopt microservices, they often unknowingly introduce structural problems that erode the very benefits they were after. This tool helps catch those problems early, from a source code checkout, before they become production incidents</a:t>
+            </a:r>
           </a:p>
         </p:txBody>
       </p:sp>
@@ -943,7 +738,6 @@
 • If even the backup fails: 'the deployment is on my laptop and I'd be happy to demo it after the defense — meanwhile, the screenshots in Chapter 4 of the thesis show the same flow.'
 • Move on quickly. Don't burn 90 seconds debugging in front of the committee. The thesis stands on its own.</a:t>
             </a:r>
-            <a:endParaRPr lang="en-US" dirty="0"/>
           </a:p>
         </p:txBody>
       </p:sp>
@@ -1029,16 +823,21 @@
           <a:p>
             <a:r>
               <a:rPr lang="en-US" dirty="0"/>
-              <a:t>Spend ~60 seconds. This is your honesty slide — committee will respect frankness here.
-Talking points:
-• 'The tool has real limitations. The biggest is the Java/Spring Boot restriction — real-world systems are polyglot, and the current tool can't analyse non-Java services.'
+              <a:t>• 'The tool has limitations. The biggest is the Java/Spring Boot restriction — real-world systems are polyglot, and the current tool can't </a:t>
+            </a:r>
+            <a:r>
+              <a:rPr lang="en-US" dirty="0" err="1"/>
+              <a:t>analyse</a:t>
+            </a:r>
+            <a:r>
+              <a:rPr lang="en-US" dirty="0"/>
+              <a:t> non-Java services.'
 • 'Static analysis trades precision for applicability. A distributed tracing approach would give exact runtime call counts but requires the system to be deployed and instrumented — which prevents the tool from running on a fresh checkout.'
 • 'The health score weights aren't empirically validated. They're engineering judgement informed by the literature. Different teams might want different weightings.'
 • 'Future work in priority order: multi-language support, then ML-based detection, then empirical calibration of thresholds.'
 You can add: 'The multi-language extension is actually partially designed already — Chapter 5 describes a roadmap where Docker Compose and Kubernetes manifests provide a language-agnostic dependency graph, and only the intra-service analysis needs per-language adapters. So the architecture is ready for it, even though the implementation is Java-only today.'
 Don't get defensive about limitations. Acknowledging them is more impressive than glossing over them.</a:t>
             </a:r>
-            <a:endParaRPr lang="en-US" dirty="0"/>
           </a:p>
         </p:txBody>
       </p:sp>
@@ -1141,7 +940,6 @@
 • 'Why static instead of dynamic?' → applicability over precision; no deployed system required.
 • 'Why Spring Boot only?' → biggest Java microservice ecosystem; other frameworks future work.</a:t>
             </a:r>
-            <a:endParaRPr lang="en-US" dirty="0"/>
           </a:p>
         </p:txBody>
       </p:sp>
@@ -1227,16 +1025,59 @@
           <a:p>
             <a:r>
               <a:rPr lang="en-US" dirty="0"/>
-              <a:t>Spend ~90 seconds here. This frames why the tool exists.
-Talking points:
-• Microservices have become the default for new large systems. But tooling for architectural quality hasn't kept up.
-• Teams ship anti-patterns — shared DBs, cycles, services that are either too small or too big — and they only find out when deployment friction or cascading failures appear in production.
-• Existing academic tools address important parts of the problem: Arcan detects architectural smells, MicroART visualises recovered architectures, MSANose detects microservice smells, and MARS covers a broader anti-pattern catalogue. They differ in the anti-patterns they cover and in how much developer-facing evidence, scoring, and workflow support they provide.
+              <a:t>• </a:t>
+            </a:r>
+            <a:r>
+              <a:rPr lang="en-US" sz="1200" b="0" i="0" kern="1200" dirty="0">
+                <a:solidFill>
+                  <a:schemeClr val="tx1"/>
+                </a:solidFill>
+                <a:effectLst/>
+                <a:latin typeface="+mn-lt"/>
+                <a:ea typeface="+mn-ea"/>
+                <a:cs typeface="+mn-cs"/>
+              </a:rPr>
+              <a:t>While microservices are widely adopted for new large systems, tooling specifically designed to support architectural quality assurance in these environments remains limited, which leads to developers shipping anti-patterns, unknowingly </a:t>
+            </a:r>
+            <a:r>
+              <a:rPr lang="en-US" dirty="0"/>
+              <a:t>— shared DBs, cycles, services that are either too small or too big — and they only find out when deployment friction or cascading failures appear in production. For instance, a shared database between two services looks harmless at first — both teams just point at the same Postgres instance. But over time, schema changes in one service silently break the other, and you've lost independent </a:t>
+            </a:r>
+            <a:r>
+              <a:rPr lang="en-US" dirty="0" err="1"/>
+              <a:t>deployability</a:t>
+            </a:r>
+            <a:r>
+              <a:rPr lang="en-US" dirty="0"/>
+              <a:t> — arguably the single biggest reason to use microservices in the first place
+• Existing academic tools address important parts of the problem: Arcan detects architectural smells, </a:t>
+            </a:r>
+            <a:r>
+              <a:rPr lang="en-US" dirty="0" err="1"/>
+              <a:t>MicroART</a:t>
+            </a:r>
+            <a:r>
+              <a:rPr lang="en-US" dirty="0"/>
+              <a:t> </a:t>
+            </a:r>
+            <a:r>
+              <a:rPr lang="en-US" dirty="0" err="1"/>
+              <a:t>visualises</a:t>
+            </a:r>
+            <a:r>
+              <a:rPr lang="en-US" dirty="0"/>
+              <a:t> recovered architectures, </a:t>
+            </a:r>
+            <a:r>
+              <a:rPr lang="en-US" dirty="0" err="1"/>
+              <a:t>MSANose</a:t>
+            </a:r>
+            <a:r>
+              <a:rPr lang="en-US" dirty="0"/>
+              <a:t> detects microservice smells, and MARS covers a broader anti-pattern catalogue. They differ in the anti-patterns they cover and in how much developer-facing evidence, scoring, and workflow support they provide.
 • Even when something IS detected, the output is usually an abstract warning. Developers don't act on warnings without code evidence and remediation guidance.
-You can mention a concrete example: 'For instance, a shared database between two services looks harmless at first — both teams just point at the same Postgres instance. But over time, schema changes in one service silently break the other, and you've lost independent deployability — arguably the single biggest reason to use microservices in the first place.'
-Pivot to next slide: 'So the goal of this work was a tool that bridges both levels and outputs actionable findings.'</a:t>
-            </a:r>
-            <a:endParaRPr lang="en-US" dirty="0"/>
+So the goal of this work was a tool that bridges both levels and outputs relevant findings for developers</a:t>
+            </a:r>
           </a:p>
         </p:txBody>
       </p:sp>
@@ -1322,17 +1163,29 @@
           <a:p>
             <a:r>
               <a:rPr lang="en-US" dirty="0"/>
-              <a:t>Spend ~75 seconds here. Don't read the slide — talk to it.
-What to actually say:
-• 'The work has five contributions. The first is the multi-level analysis itself — using code-level structural metrics like class cohesion to flag architectural problems like God Service. That bridge between abstraction levels is the central novelty.'
+              <a:t>• 'The work has five contributions. The first is the multi-level analysis itself — using code-level structural metrics like class cohesion to flag architectural problems like God Service. That bridge between abstraction levels is the central novelty.'
 • 'Second, ten selected anti-patterns across four dimensions — not the largest catalogue, since MARS covers more, but integrated with code-level smell density, evidence snippets, remediation guidance, and a health score.'
-• 'Third, automated microservice boundary detection via a three-signal deployability gate — framework entry points, Dockerfiles, and main methods — with confidence levels. Most existing tools require manual configuration.'
+• 'Third, automated microservice boundary detection via a three-signal </a:t>
+            </a:r>
+            <a:r>
+              <a:rPr lang="en-US" dirty="0" err="1"/>
+              <a:t>deployability</a:t>
+            </a:r>
+            <a:r>
+              <a:rPr lang="en-US" dirty="0"/>
+              <a:t> gate — framework entry points, </a:t>
+            </a:r>
+            <a:r>
+              <a:rPr lang="en-US" dirty="0" err="1"/>
+              <a:t>Dockerfiles</a:t>
+            </a:r>
+            <a:r>
+              <a:rPr lang="en-US" dirty="0"/>
+              <a:t>, and main methods — with confidence levels. Most existing tools require manual configuration.'
 • 'Fourth, a composite health score on 0–100, decomposed into four categories so you can see which dimension is dragging the score down.'
 • 'Fifth, evidence-based reporting — every finding includes the actual code that triggered it.'
-Bridge to next slide: 'To give you a clearer picture of how these pieces fit together, let me walk you through the analysis pipeline — from the moment a project is uploaded to the final report.'
-Don't dwell on each one. They'll see the details later. This slide sets expectations for the rest of the talk.</a:t>
-            </a:r>
-            <a:endParaRPr lang="en-US" dirty="0"/>
+'To give you a clearer picture of how these pieces fit together, let me walk you through the analysis pipeline — from the moment a project is uploaded to the final report.'</a:t>
+            </a:r>
           </a:p>
         </p:txBody>
       </p:sp>
@@ -1418,18 +1271,95 @@
           <a:p>
             <a:r>
               <a:rPr lang="en-US" dirty="0"/>
-              <a:t>Spend ~2 minutes here. This is the spine of the talk — get the pipeline right and everything else follows.
-Walk left to right:
-• Ingest: user uploads a ZIP or pastes a Git URL. The system extracts/clones and creates an analysis job.
-• Service detection: scan for build files — pom.xml, build.gradle, build.gradle.kts. Filter out non-service modules using exclusion keywords and aggregator checks. Then apply a three-signal deployability gate: framework entry point (HIGH), Dockerfile (MEDIUM), main() method (LOW). Only candidates passing at least one signal are kept.
-• Intra-service analysis runs DesigniteJava as a subprocess for code smells. Inter-service uses Spoon AST to find @FeignClient, RestTemplate, WebClient calls and build the dependency graph.
+              <a:t>• Ingest: user uploads a ZIP or pastes a Git URL. The system extracts/clones and creates an analysis job.
+• Service detection: scan for build files — pom.xml, </a:t>
+            </a:r>
+            <a:r>
+              <a:rPr lang="en-US" dirty="0" err="1"/>
+              <a:t>build.gradle</a:t>
+            </a:r>
+            <a:r>
+              <a:rPr lang="en-US" dirty="0"/>
+              <a:t>, </a:t>
+            </a:r>
+            <a:r>
+              <a:rPr lang="en-US" dirty="0" err="1"/>
+              <a:t>build.gradle.kts</a:t>
+            </a:r>
+            <a:r>
+              <a:rPr lang="en-US" dirty="0"/>
+              <a:t>. Filter out non-service modules using exclusion keywords and aggregator checks. Then apply a three-signal </a:t>
+            </a:r>
+            <a:r>
+              <a:rPr lang="en-US" dirty="0" err="1"/>
+              <a:t>deployability</a:t>
+            </a:r>
+            <a:r>
+              <a:rPr lang="en-US" dirty="0"/>
+              <a:t> gate: framework entry point (HIGH) (e.g. @SpringBootApplication etc.), </a:t>
+            </a:r>
+            <a:r>
+              <a:rPr lang="en-US" dirty="0" err="1"/>
+              <a:t>Dockerfile</a:t>
+            </a:r>
+            <a:r>
+              <a:rPr lang="en-US" dirty="0"/>
+              <a:t> (MEDIUM), main() method (LOW). Only candidates passing at least one signal are kept.
+• Intra-service analysis runs </a:t>
+            </a:r>
+            <a:r>
+              <a:rPr lang="en-US" dirty="0" err="1"/>
+              <a:t>DesigniteJava</a:t>
+            </a:r>
+            <a:r>
+              <a:rPr lang="en-US" dirty="0"/>
+              <a:t> as a subprocess for code smells. Inter-service uses Spoon AST to find @FeignClient, </a:t>
+            </a:r>
+            <a:r>
+              <a:rPr lang="en-US" dirty="0" err="1"/>
+              <a:t>RestTemplate</a:t>
+            </a:r>
+            <a:r>
+              <a:rPr lang="en-US" dirty="0"/>
+              <a:t>, </a:t>
+            </a:r>
+            <a:r>
+              <a:rPr lang="en-US" dirty="0" err="1"/>
+              <a:t>WebClient</a:t>
+            </a:r>
+            <a:r>
+              <a:rPr lang="en-US" dirty="0"/>
+              <a:t> calls and build the dependency graph.
 • Then ten detectors run over that graph + the smells. Each is a Spring component implementing a common interface — Strategy pattern.
-• Finally results are assembled, the health score is computed, the dependency graph is serialised to JSON, and everything is persisted.
+• Finally results are assembled, the health score is computed, the dependency graph is </a:t>
+            </a:r>
+            <a:r>
+              <a:rPr lang="en-US" dirty="0" err="1"/>
+              <a:t>serialised</a:t>
+            </a:r>
+            <a:r>
+              <a:rPr lang="en-US" dirty="0"/>
+              <a:t> to JSON, and everything is persisted.
 If asked about why async: 'Analyses on large projects like Activiti take several minutes. Blocking the HTTP request would time out. The frontend polls for status.'
-Worth mentioning: 'The dependency graph construction is the most technically interesting part of this stage. Spoon parses the AST of every Java file and looks for inter-service communication annotations — @FeignClient declarations, RestTemplate.exchange calls, WebClient invocations — then resolves each target to a known service. The result is a directed weighted graph where edge weight represents the number of distinct call sites.'
+Worth mentioning: 'The dependency graph construction is the most technically interesting part of this stage. Spoon parses the AST of every Java file and looks for inter-service communication annotations — @FeignClient declarations, </a:t>
+            </a:r>
+            <a:r>
+              <a:rPr lang="en-US" dirty="0" err="1"/>
+              <a:t>RestTemplate.exchange</a:t>
+            </a:r>
+            <a:r>
+              <a:rPr lang="en-US" dirty="0"/>
+              <a:t> calls, </a:t>
+            </a:r>
+            <a:r>
+              <a:rPr lang="en-US" dirty="0" err="1"/>
+              <a:t>WebClient</a:t>
+            </a:r>
+            <a:r>
+              <a:rPr lang="en-US" dirty="0"/>
+              <a:t> invocations — then resolves each target to a known service. The result is a directed weighted graph where edge weight represents the number of distinct call sites.'
 Don't read the design-choices panel verbatim — mention one or two if you have time.</a:t>
             </a:r>
-            <a:endParaRPr lang="en-US" dirty="0"/>
           </a:p>
         </p:txBody>
       </p:sp>
@@ -1515,17 +1445,43 @@
           <a:p>
             <a:r>
               <a:rPr lang="en-US" dirty="0"/>
-              <a:t>Spend ~90–120 seconds. This is the slide that demonstrates the multi-level claim.
-Talking points:
-• 'I picked God Service as the example because it's the cleanest illustration of how code-level signals feed an architectural-level finding.'
-• Walk through left side: 'For each service, a Spoon-based analysis parses every class and computes structural metrics — field count, public method count, lines of code, import domains, constructor parameters, and class cohesion. The God Service detector flags any microservice containing at least one class identified as a God Class.'
-• Right side: 'A class is flagged as a God Class when it exceeds at least three of the six metrics. Pure data holders such as entities and DTOs are excluded first, since they naturally have many fields and low cohesion without being an anti-pattern.'
-• On TCC: 'Tight Class Cohesion measures the fraction of method pairs that share an instance field access. Low TCC means the methods operate on disjoint state — a sign of unrelated responsibilities packed into one class.'
-EXPECT THIS QUESTION: 'Why does one God Class flag a service?'
-Answer: 'The default is intentionally sensitive. False positives are cheap to dismiss. False negatives — architectural debt growing undetected — are expensive. The threshold is configurable; teams in production would calibrate it. Even one class concentrating that many responsibilities is worth a look.'
-If asked where DesigniteJava fits: 'DesigniteJava runs per service for code smells, but its catalogue is abstraction and modularization smells rather than a literal God Class. So God Service detection is driven by the Spoon structural metrics, and DesigniteJava smell density feeds the code-quality category of the health score instead.'</a:t>
-            </a:r>
-            <a:endParaRPr lang="en-US" dirty="0"/>
+              <a:t>• 'These are the ten detectors, </a:t>
+            </a:r>
+            <a:r>
+              <a:rPr lang="en-US" dirty="0" err="1"/>
+              <a:t>organised</a:t>
+            </a:r>
+            <a:r>
+              <a:rPr lang="en-US" dirty="0"/>
+              <a:t> by architectural dimension. Each is a Spring component implementing a common interface, so adding a new detector means writing one class — no orchestrator changes.'
+• 'Severities feed directly into the health score: critical issues cost 8 points, high cost 5, medium cost 3.'
+• 'The severity levels aren't arbitrary — they reflect how much damage the anti-pattern can cause. Cyclic Dependency and Distributed Monolith are critical because they undermine independent </a:t>
+            </a:r>
+            <a:r>
+              <a:rPr lang="en-US" dirty="0" err="1"/>
+              <a:t>deployability</a:t>
+            </a:r>
+            <a:r>
+              <a:rPr lang="en-US" dirty="0"/>
+              <a:t> entirely. Hardcoded Endpoints and API Versioning are medium because they're easier to fix and their impact is more </a:t>
+            </a:r>
+            <a:r>
+              <a:rPr lang="en-US" dirty="0" err="1"/>
+              <a:t>localised</a:t>
+            </a:r>
+            <a:r>
+              <a:rPr lang="en-US" dirty="0"/>
+              <a:t>.'
+If a committee member asks about a specific detector:
+• Shared DB — group services by spring.datasource.url, flag groups of size &gt; 1
+• Cyclic Dependency — Tarjan's SCC on the dep graph, any SCC &gt; 1 vertex is a cycle
+• Chatty Service — call count per edge ≥ 5 OR a Feign interface with ≥ 5 methods
+• Hardcoded Endpoints — regex scan of .java for http://, localhost:, IP literals (with comment/test exclusions)
+• Distributed Monolith — composite rule on coupling coefficient, connected ratio, shared DB count
+• API Versioning — regex /v\d+[/.] on endpoint paths
+• ESB Misuse — caller/callee ratios + volume-based mediator ratio
+• Wrong Cuts — bidirectional edges between a service pair</a:t>
+            </a:r>
           </a:p>
         </p:txBody>
       </p:sp>
@@ -1611,24 +1567,38 @@
           <a:p>
             <a:r>
               <a:rPr lang="en-US" dirty="0"/>
-              <a:t>Quick slide — about 45 seconds. Don't read every detector aloud.
-What to say:
-• 'These are the ten detectors, organised by architectural dimension. Each is a Spring component implementing a common interface, so adding a new detector means writing one class — no orchestrator changes.'
-• 'Severities feed directly into the health score: critical issues cost 8 points, high cost 5, medium cost 3.'
-• 'I won't walk through each detector — they're in Chapter 3 of the thesis. I'll focus on the scoring mechanism next.'
-If a committee member asks about a specific detector:
-• Shared DB — group services by spring.datasource.url, flag groups of size &gt; 1
-• Cyclic Dependency — Tarjan's SCC on the dep graph, any SCC &gt; 1 vertex is a cycle
-• Chatty Service — call count per edge ≥ 5 OR a Feign interface with ≥ 5 methods
-• Hardcoded Endpoints — regex scan of .java for http://, localhost:, IP literals (with comment/test exclusions)
-• Distributed Monolith — composite rule on coupling coefficient, connected ratio, shared DB count
-• API Versioning — regex /v\d+[/.] on endpoint paths
-• ESB Misuse — caller/callee ratios + volume-based mediator ratio
-• Wrong Cuts — bidirectional edges between a service pair
-Worth saying aloud: 'The severity levels aren't arbitrary — they reflect how much damage the anti-pattern can cause. Cyclic Dependency and Distributed Monolith are critical because they undermine independent deployability entirely. Hardcoded Endpoints and API Versioning are medium because they're easier to fix and their impact is more localised.'
-Don't get defensive about limitations. Acknowledging them is more impressive than glossing over them.</a:t>
-            </a:r>
-            <a:endParaRPr lang="en-US" dirty="0"/>
+              <a:t>• 'I picked God Service as the example because it's the cleanest illustration of how code-level signals feed an architectural-level finding.'
+• 'For each service, a Spoon-based analysis parses every class and computes structural metrics — field count, public method count, lines of code, import domains, constructor parameters, and class cohesion. The God Service detector flags any microservice containing at least one class identified as a God Class.'
+• 'A class is flagged as a God Class when it exceeds at least three of the six metrics. Pure data holders such as entities and DTOs are excluded first, since they naturally have many fields and low cohesion without being an anti-pattern.'
+• 'Tight Class Cohesion measures the fraction of method pairs that share an instance field access. Low TCC means the methods operate on disjoint state — a sign of unrelated responsibilities packed into one class.'
+EXPECT THIS QUESTION: 'Why does one God Class flag a service?'
+Answer: 'The default is intentionally sensitive. False positives are cheap to dismiss. False negatives — architectural debt growing undetected — are expensive. The threshold is configurable; teams in production would calibrate it. Even one class concentrating that many responsibilities is worth a look.'
+If asked where </a:t>
+            </a:r>
+            <a:r>
+              <a:rPr lang="en-US" dirty="0" err="1"/>
+              <a:t>DesigniteJava</a:t>
+            </a:r>
+            <a:r>
+              <a:rPr lang="en-US" dirty="0"/>
+              <a:t> fits: '</a:t>
+            </a:r>
+            <a:r>
+              <a:rPr lang="en-US" dirty="0" err="1"/>
+              <a:t>DesigniteJava</a:t>
+            </a:r>
+            <a:r>
+              <a:rPr lang="en-US" dirty="0"/>
+              <a:t> runs per service for code smells, but its catalogue is abstraction and modularization smells rather than a literal God Class. So God Service detection is driven by the Spoon structural metrics, and </a:t>
+            </a:r>
+            <a:r>
+              <a:rPr lang="en-US" dirty="0" err="1"/>
+              <a:t>DesigniteJava</a:t>
+            </a:r>
+            <a:r>
+              <a:rPr lang="en-US" dirty="0"/>
+              <a:t> smell density feeds the code-quality category of the health score instead.'</a:t>
+            </a:r>
           </a:p>
         </p:txBody>
       </p:sp>
@@ -1714,17 +1684,21 @@
           <a:p>
             <a:r>
               <a:rPr lang="en-US" dirty="0"/>
-              <a:t>Spend ~75 seconds.
-Talking points:
-• 'The composite score is a sum of four independent categories. Each has its own budget — Anti-Patterns is 40 points, Code Quality 20, Architecture 25, Service Sizing 15. Total: 100.'
+              <a:t>• 'The composite score is a sum of four independent categories. Each has its own budget — Anti-Patterns is 40 points, Code Quality 20, Architecture 25, Service Sizing 15. Total: 100. The weights were informed by how other composite metrics work in the literature — SonarQube's maintainability rating, SQALE, and the ISO 25010 quality model. Anti-patterns get the largest budget because they represent architectural-level issues that are expensive to fix after deployment
 • 'Each category clamps at zero, so penalties can't bleed across categories. That's intentional: a code-quality-heavy project shouldn't have its architectural score dragged down.'
-• 'Importantly, the breakdown is preserved in the UI. A developer doesn't just see 45/100 — they see WHICH category is dragging the score down, with itemised deductions.'
-• 'The diff feature compares successive analyses, so a team that fixes a shared DB anti-pattern can see exactly how many points that bought them.'
+• 'Importantly, the breakdown is preserved in the UI. A developer doesn't just see 45/100 — they see WHICH category is dragging the score down, with </a:t>
+            </a:r>
+            <a:r>
+              <a:rPr lang="en-US" dirty="0" err="1"/>
+              <a:t>itemised</a:t>
+            </a:r>
+            <a:r>
+              <a:rPr lang="en-US" dirty="0"/>
+              <a:t> deductions.'
+• 'The diff feature compares successive analyses, so a team that fixes a shared DB anti-pattern can see exactly how many points that bought them.’
 EXPECT THIS QUESTION: 'Doesn't clamping at zero mean you lose discrimination between moderately bad and very bad projects?'
-Answer: 'Yes — that's a known limitation of the category-cap approach, which I note in the threats to validity. A team with 13 nano services and one with 50 would both see Anti-Patterns at zero. The Service Sizing breakdown still preserves the per-issue counts, so the full picture is still visible to the user. A scaled, density-style penalty in the AP category — similar to the Code Quality category — would address this in future work.'
-You can also add: 'The weights were informed by how other composite metrics work in the literature — SonarQube's maintainability rating, SQALE, and the ISO 25010 quality model. Anti-patterns get the largest budget because they represent architectural-level issues that are expensive to fix after deployment.'</a:t>
-            </a:r>
-            <a:endParaRPr lang="en-US" dirty="0"/>
+Answer: 'Yes — that's a known limitation of the category-cap approach, which I note in the threats to validity. A team with 13 nano services and one with 50 would both see Anti-Patterns at zero. The Service Sizing breakdown still preserves the per-issue counts, so the full picture is still visible to the user. A scaled, density-style penalty in the AP category — similar to the Code Quality category — would address this in future work.'</a:t>
+            </a:r>
           </a:p>
         </p:txBody>
       </p:sp>
@@ -1810,19 +1784,21 @@
           <a:p>
             <a:r>
               <a:rPr lang="en-US" dirty="0"/>
-              <a:t>Spend ~75 seconds. This slide makes the scoring reproducible.
-Walk through it:
-• 'Take microservice-recruit — a Spring Cloud recruitment platform. In the anti-pattern category it has 6 API versioning absences, 2 ESB misuse and 2 wrong-cuts findings, 1 cyclic dependency, and 1 hardcoded endpoint — total penalty 49, but the category caps at 40, so it clamps to zero.'
+              <a:t>• 'Take microservice-recruit — a Spring Cloud recruitment platform. In the anti-pattern category it has 6 API versioning absences, 2 ESB misuse and 2 wrong-cuts findings, 1 cyclic dependency, and 1 hardcoded endpoint — total penalty 49, but the category caps at 40, so it clamps to zero.'
 • 'Its single nano service is scored under Service Sizing instead of the anti-pattern category, to avoid double counting — costing 3 points there, leaving 12 of 15.'
 • 'Architecture loses 9 points for the structural coupling of its dependency graph — leaving 16 of 25.'
 • 'Code Quality is scored by smell density: 260 smells over 8.3K LOC is 31.4 per KLOC, an 8-point deduction, leaving 12 of 20.'
 • 'The final composite is 0 + 12 + 16 + 12 = 40 — grade F. Unlike a project whose problems sit in one place, this one loses points in every dimension, which is exactly what the multi-level scoring is meant to surface.'
-This demonstrates that the scoring is transparent and that the breakdown shows exactly what's wrong.
+'What makes this example interesting is that the problems are spread across all four categories — it's not a project with one catastrophic issue, it's a project with consistent low-level neglect across every dimension. That's exactly the kind of systemic debt the multi-category decomposition is designed to surface.’</a:t>
+            </a:r>
+          </a:p>
+          <a:p>
+            <a:r>
+              <a:rPr lang="en-US" dirty="0"/>
+              <a:t>
 EXPECT QUESTION: 'Only 8 points lost on Code Quality with 260 smells — why so little?'
-Answer: 'Code Quality is scored on smell density per 1000 LOC, not raw count, so a codebase isn't punished just for its size. The category is deliberately bounded so that architectural anti-patterns remain the dominant signal in the overall score.'
-If time allows, mention: 'What makes this example interesting is that the problems are spread across all four categories — it's not a project with one catastrophic issue, it's a project with consistent low-level neglect across every dimension. That's exactly the kind of systemic debt the multi-category decomposition is designed to surface.'</a:t>
-            </a:r>
-            <a:endParaRPr lang="en-US" dirty="0"/>
+Answer: 'Code Quality is scored on smell density per 1000 LOC, not raw count, so a codebase isn't punished just for its size. The category is deliberately bounded so that architectural anti-patterns remain the dominant signal in the overall score.'</a:t>
+            </a:r>
           </a:p>
         </p:txBody>
       </p:sp>
@@ -1908,17 +1884,29 @@
           <a:p>
             <a:r>
               <a:rPr lang="en-US" dirty="0"/>
-              <a:t>Spend ~90 seconds.
-Talking points:
-• 'I evaluated on eleven open-source Spring Boot projects, spanning from piomin at 1.3k LOC to mall-swarm at 86k LOC. 130 microservices, about 274k LOC total.'
-• 'Health scores ranged from 40 to 83 — the scoring mechanism produces meaningful spread.'
-• 'The dominant findings are configuration and sizing issues: 37 API versioning absences, 23 nano services, 15 hardcoded endpoints. Cyclic Dependency and Wrong Cuts were detected in microservice-recruit. Adding PiggyMetrics and piomin broadened ESB Misuse and Nano Service coverage.'
-• '98 total anti-pattern instances across 9 distinct types. Only Distributed Monolith was not detected — plausible given these projects' topologies.'
-You can add: 'The score range — 40 to 83 — shows that the metric has useful discriminating power. Projects known to be well-structured like MicroSocial score highest; projects known to have issues like Train-Ticket and microservice-recruit score lowest. If every project scored 70, the metric wouldn't be telling us much.'
+              <a:t>• 'I evaluated on eleven open-source Spring Boot projects, spanning from </a:t>
+            </a:r>
+            <a:r>
+              <a:rPr lang="en-US" dirty="0" err="1"/>
+              <a:t>piomin</a:t>
+            </a:r>
+            <a:r>
+              <a:rPr lang="en-US" dirty="0"/>
+              <a:t> at 1.3k LOC to mall-swarm at 86k LOC. 130 microservices, about 274k LOC total.'
+• 'The score range — 40 to 83 — shows that the metric has useful discriminating power. Projects known to be well-structured like </a:t>
+            </a:r>
+            <a:r>
+              <a:rPr lang="en-US" dirty="0" err="1"/>
+              <a:t>MicroSocial</a:t>
+            </a:r>
+            <a:r>
+              <a:rPr lang="en-US" dirty="0"/>
+              <a:t> score highest; projects known to have issues like Train-Ticket and microservice-recruit score lowest. If every project scored 70, the metric wouldn't be telling us much.'
+• 'The dominant findings are configuration and sizing issues: 37 API versioning absences, 23 nano services, 15 hardcoded endpoints. 
+• '98 total anti-pattern instances across 9 distinct types. Only Distributed Monolith was not detected — plausible given these projects' topologies.’
 EXPECT: 'Only eleven projects, is that enough?'
 Answer: 'Not for a statistical claim. This evaluation is a feasibility demonstration across heterogeneous codebases. A full precision/recall study would need a labelled corpus, which doesn't exist for microservice anti-patterns — that's an open problem in the field. I note this in Threats to Validity.'</a:t>
             </a:r>
-            <a:endParaRPr lang="en-US" dirty="0"/>
           </a:p>
         </p:txBody>
       </p:sp>
@@ -1991,6 +1979,11 @@
 <file path=ppt/slideMasters/slideMaster1.xml><?xml version="1.0" encoding="utf-8"?>
 <p:sldMaster xmlns:a="http://schemas.openxmlformats.org/drawingml/2006/main" xmlns:r="http://schemas.openxmlformats.org/officeDocument/2006/relationships" xmlns:p="http://schemas.openxmlformats.org/presentationml/2006/main">
   <p:cSld>
+    <p:bg>
+      <p:bgRef idx="1001">
+        <a:schemeClr val="bg1"/>
+      </p:bgRef>
+    </p:bg>
     <p:spTree>
       <p:nvGrpSpPr>
         <p:cNvPr id="1" name=""/>
@@ -2273,6 +2266,7 @@
         <a:solidFill>
           <a:srgbClr val="0F2A44"/>
         </a:solidFill>
+        <a:effectLst/>
       </p:bgPr>
     </p:bg>
     <p:spTree>
@@ -2313,6 +2307,13 @@
             <a:prstDash val="solid"/>
           </a:ln>
         </p:spPr>
+        <p:txBody>
+          <a:bodyPr/>
+          <a:lstStyle/>
+          <a:p>
+            <a:endParaRPr lang="en-US"/>
+          </a:p>
+        </p:txBody>
       </p:sp>
       <p:sp>
         <p:nvSpPr>
@@ -2335,7 +2336,7 @@
           <a:bodyPr wrap="square" lIns="0" tIns="0" rIns="0" bIns="0" rtlCol="0" anchor="ctr"/>
           <a:lstStyle/>
           <a:p>
-            <a:pPr indent="0" marL="0">
+            <a:pPr marL="0" indent="0">
               <a:spcAft>
                 <a:spcPts val="400"/>
               </a:spcAft>
@@ -2355,7 +2356,7 @@
             <a:endParaRPr lang="en-US" sz="3200" dirty="0"/>
           </a:p>
           <a:p>
-            <a:pPr indent="0" marL="0">
+            <a:pPr marL="0" indent="0">
               <a:spcAft>
                 <a:spcPts val="400"/>
               </a:spcAft>
@@ -2397,7 +2398,7 @@
           <a:bodyPr wrap="square" lIns="0" tIns="0" rIns="0" bIns="0" rtlCol="0" anchor="ctr"/>
           <a:lstStyle/>
           <a:p>
-            <a:pPr indent="0" marL="0">
+            <a:pPr marL="0" indent="0">
               <a:buNone/>
             </a:pPr>
             <a:r>
@@ -2436,7 +2437,7 @@
           <a:bodyPr wrap="square" lIns="0" tIns="0" rIns="0" bIns="0" rtlCol="0" anchor="ctr"/>
           <a:lstStyle/>
           <a:p>
-            <a:pPr indent="0" marL="0">
+            <a:pPr marL="0" indent="0">
               <a:spcAft>
                 <a:spcPts val="200"/>
               </a:spcAft>
@@ -2456,7 +2457,7 @@
             <a:endParaRPr lang="en-US" sz="1500" dirty="0"/>
           </a:p>
           <a:p>
-            <a:pPr indent="0" marL="0">
+            <a:pPr marL="0" indent="0">
               <a:spcAft>
                 <a:spcPts val="200"/>
               </a:spcAft>
@@ -2476,7 +2477,7 @@
             <a:endParaRPr lang="en-US" sz="1500" dirty="0"/>
           </a:p>
           <a:p>
-            <a:pPr indent="0" marL="0">
+            <a:pPr marL="0" indent="0">
               <a:spcAft>
                 <a:spcPts val="200"/>
               </a:spcAft>
@@ -2496,7 +2497,7 @@
             <a:endParaRPr lang="en-US" sz="1500" dirty="0"/>
           </a:p>
           <a:p>
-            <a:pPr indent="0" marL="0">
+            <a:pPr marL="0" indent="0">
               <a:spcAft>
                 <a:spcPts val="200"/>
               </a:spcAft>
@@ -2533,6 +2534,7 @@
         <a:solidFill>
           <a:srgbClr val="0F2A44"/>
         </a:solidFill>
+        <a:effectLst/>
       </p:bgPr>
     </p:bg>
     <p:spTree>
@@ -2573,6 +2575,13 @@
             <a:prstDash val="solid"/>
           </a:ln>
         </p:spPr>
+        <p:txBody>
+          <a:bodyPr/>
+          <a:lstStyle/>
+          <a:p>
+            <a:endParaRPr lang="en-US"/>
+          </a:p>
+        </p:txBody>
       </p:sp>
       <p:sp>
         <p:nvSpPr>
@@ -2595,7 +2604,7 @@
           <a:bodyPr wrap="square" lIns="0" tIns="0" rIns="0" bIns="0" rtlCol="0" anchor="ctr"/>
           <a:lstStyle/>
           <a:p>
-            <a:pPr indent="0" marL="0">
+            <a:pPr marL="0" indent="0">
               <a:buNone/>
             </a:pPr>
             <a:r>
@@ -2634,7 +2643,7 @@
           <a:bodyPr wrap="square" lIns="0" tIns="0" rIns="0" bIns="0" rtlCol="0" anchor="ctr"/>
           <a:lstStyle/>
           <a:p>
-            <a:pPr indent="0" marL="0">
+            <a:pPr marL="0" indent="0">
               <a:buNone/>
             </a:pPr>
             <a:r>
@@ -2673,7 +2682,7 @@
           <a:bodyPr wrap="square" lIns="0" tIns="0" rIns="0" bIns="0" rtlCol="0" anchor="ctr"/>
           <a:lstStyle/>
           <a:p>
-            <a:pPr indent="0" marL="0">
+            <a:pPr marL="0" indent="0">
               <a:buNone/>
             </a:pPr>
             <a:r>
@@ -2712,7 +2721,7 @@
           <a:bodyPr wrap="square" lIns="0" tIns="0" rIns="0" bIns="0" rtlCol="0" anchor="ctr"/>
           <a:lstStyle/>
           <a:p>
-            <a:pPr indent="0" marL="0">
+            <a:pPr marL="0" indent="0">
               <a:buNone/>
             </a:pPr>
             <a:r>
@@ -2751,7 +2760,7 @@
           <a:bodyPr wrap="square" lIns="0" tIns="0" rIns="0" bIns="0" rtlCol="0" anchor="ctr"/>
           <a:lstStyle/>
           <a:p>
-            <a:pPr indent="0" marL="0">
+            <a:pPr marL="0" indent="0">
               <a:buNone/>
             </a:pPr>
             <a:r>
@@ -2790,7 +2799,7 @@
           <a:bodyPr wrap="square" lIns="0" tIns="0" rIns="0" bIns="0" rtlCol="0" anchor="ctr"/>
           <a:lstStyle/>
           <a:p>
-            <a:pPr indent="0" marL="0">
+            <a:pPr marL="0" indent="0">
               <a:buNone/>
             </a:pPr>
             <a:r>
@@ -2829,7 +2838,7 @@
           <a:bodyPr wrap="square" lIns="0" tIns="0" rIns="0" bIns="0" rtlCol="0" anchor="ctr"/>
           <a:lstStyle/>
           <a:p>
-            <a:pPr indent="0" marL="0">
+            <a:pPr marL="0" indent="0">
               <a:buNone/>
             </a:pPr>
             <a:r>
@@ -2868,7 +2877,7 @@
           <a:bodyPr wrap="square" lIns="0" tIns="0" rIns="0" bIns="0" rtlCol="0" anchor="ctr"/>
           <a:lstStyle/>
           <a:p>
-            <a:pPr indent="0" marL="0">
+            <a:pPr marL="0" indent="0">
               <a:buNone/>
             </a:pPr>
             <a:r>
@@ -2907,7 +2916,7 @@
           <a:bodyPr wrap="square" lIns="0" tIns="0" rIns="0" bIns="0" rtlCol="0" anchor="ctr"/>
           <a:lstStyle/>
           <a:p>
-            <a:pPr indent="0" marL="0">
+            <a:pPr marL="0" indent="0">
               <a:buNone/>
             </a:pPr>
             <a:r>
@@ -2946,7 +2955,7 @@
           <a:bodyPr wrap="square" lIns="0" tIns="0" rIns="0" bIns="0" rtlCol="0" anchor="ctr"/>
           <a:lstStyle/>
           <a:p>
-            <a:pPr indent="0" marL="0">
+            <a:pPr marL="0" indent="0">
               <a:buNone/>
             </a:pPr>
             <a:r>
@@ -2985,7 +2994,7 @@
           <a:bodyPr wrap="square" lIns="0" tIns="0" rIns="0" bIns="0" rtlCol="0" anchor="ctr"/>
           <a:lstStyle/>
           <a:p>
-            <a:pPr indent="0" marL="0">
+            <a:pPr marL="0" indent="0">
               <a:buNone/>
             </a:pPr>
             <a:r>
@@ -3024,7 +3033,7 @@
           <a:bodyPr wrap="square" lIns="0" tIns="0" rIns="0" bIns="0" rtlCol="0" anchor="ctr"/>
           <a:lstStyle/>
           <a:p>
-            <a:pPr indent="0" marL="0">
+            <a:pPr marL="0" indent="0">
               <a:buNone/>
             </a:pPr>
             <a:r>
@@ -3063,7 +3072,7 @@
           <a:bodyPr wrap="square" lIns="0" tIns="0" rIns="0" bIns="0" rtlCol="0" anchor="ctr"/>
           <a:lstStyle/>
           <a:p>
-            <a:pPr indent="0" marL="0">
+            <a:pPr marL="0" indent="0">
               <a:buNone/>
             </a:pPr>
             <a:r>
@@ -3102,7 +3111,7 @@
           <a:bodyPr wrap="square" lIns="0" tIns="0" rIns="0" bIns="0" rtlCol="0" anchor="ctr"/>
           <a:lstStyle/>
           <a:p>
-            <a:pPr indent="0" marL="0">
+            <a:pPr marL="0" indent="0">
               <a:buNone/>
             </a:pPr>
             <a:r>
@@ -3141,7 +3150,7 @@
           <a:bodyPr wrap="square" lIns="0" tIns="0" rIns="0" bIns="0" rtlCol="0" anchor="ctr"/>
           <a:lstStyle/>
           <a:p>
-            <a:pPr algn="r" indent="0" marL="0">
+            <a:pPr marL="0" indent="0" algn="r">
               <a:buNone/>
             </a:pPr>
             <a:r>
@@ -3175,6 +3184,7 @@
         <a:solidFill>
           <a:srgbClr val="FFFFFF"/>
         </a:solidFill>
+        <a:effectLst/>
       </p:bgPr>
     </p:bg>
     <p:spTree>
@@ -3212,7 +3222,7 @@
           <a:bodyPr wrap="square" lIns="0" tIns="0" rIns="0" bIns="0" rtlCol="0" anchor="ctr"/>
           <a:lstStyle/>
           <a:p>
-            <a:pPr indent="0" marL="0">
+            <a:pPr marL="0" indent="0">
               <a:buNone/>
             </a:pPr>
             <a:r>
@@ -3254,6 +3264,13 @@
             <a:prstDash val="solid"/>
           </a:ln>
         </p:spPr>
+        <p:txBody>
+          <a:bodyPr/>
+          <a:lstStyle/>
+          <a:p>
+            <a:endParaRPr lang="en-US"/>
+          </a:p>
+        </p:txBody>
       </p:sp>
       <p:sp>
         <p:nvSpPr>
@@ -3276,7 +3293,7 @@
           <a:bodyPr wrap="square" lIns="0" tIns="0" rIns="0" bIns="0" rtlCol="0" anchor="ctr"/>
           <a:lstStyle/>
           <a:p>
-            <a:pPr indent="0" marL="0">
+            <a:pPr marL="0" indent="0">
               <a:buNone/>
             </a:pPr>
             <a:r>
@@ -3318,6 +3335,13 @@
             <a:prstDash val="solid"/>
           </a:ln>
         </p:spPr>
+        <p:txBody>
+          <a:bodyPr/>
+          <a:lstStyle/>
+          <a:p>
+            <a:endParaRPr lang="en-US"/>
+          </a:p>
+        </p:txBody>
       </p:sp>
       <p:sp>
         <p:nvSpPr>
@@ -3444,27 +3468,6 @@
             </a:r>
             <a:endParaRPr lang="en-US" sz="1100" dirty="0"/>
           </a:p>
-          <a:p>
-            <a:pPr marL="342900" indent="-342900">
-              <a:spcAft>
-                <a:spcPts val="600"/>
-              </a:spcAft>
-              <a:buSzPct val="100000"/>
-              <a:buChar char="•"/>
-            </a:pPr>
-            <a:r>
-              <a:rPr lang="en-US" sz="1100" dirty="0">
-                <a:solidFill>
-                  <a:srgbClr val="1E293B"/>
-                </a:solidFill>
-                <a:latin typeface="Calibri" pitchFamily="34" charset="0"/>
-                <a:ea typeface="Calibri" pitchFamily="34" charset="-122"/>
-                <a:cs typeface="Calibri" pitchFamily="34" charset="-120"/>
-              </a:rPr>
-              <a:t>Evaluation on 11 open-source projects; not a statistical claim</a:t>
-            </a:r>
-            <a:endParaRPr lang="en-US" sz="1100" dirty="0"/>
-          </a:p>
         </p:txBody>
       </p:sp>
       <p:sp>
@@ -3488,7 +3491,7 @@
           <a:bodyPr wrap="square" lIns="0" tIns="0" rIns="0" bIns="0" rtlCol="0" anchor="ctr"/>
           <a:lstStyle/>
           <a:p>
-            <a:pPr indent="0" marL="0">
+            <a:pPr marL="0" indent="0">
               <a:buNone/>
             </a:pPr>
             <a:r>
@@ -3530,6 +3533,13 @@
             <a:prstDash val="solid"/>
           </a:ln>
         </p:spPr>
+        <p:txBody>
+          <a:bodyPr/>
+          <a:lstStyle/>
+          <a:p>
+            <a:endParaRPr lang="en-US"/>
+          </a:p>
+        </p:txBody>
       </p:sp>
       <p:sp>
         <p:nvSpPr>
@@ -3658,7 +3668,7 @@
           <a:bodyPr wrap="square" lIns="0" tIns="0" rIns="0" bIns="0" rtlCol="0" anchor="ctr"/>
           <a:lstStyle/>
           <a:p>
-            <a:pPr algn="r" indent="0" marL="0">
+            <a:pPr marL="0" indent="0" algn="r">
               <a:buNone/>
             </a:pPr>
             <a:r>
@@ -3692,6 +3702,7 @@
         <a:solidFill>
           <a:srgbClr val="0F2A44"/>
         </a:solidFill>
+        <a:effectLst/>
       </p:bgPr>
     </p:bg>
     <p:spTree>
@@ -3732,6 +3743,13 @@
             <a:prstDash val="solid"/>
           </a:ln>
         </p:spPr>
+        <p:txBody>
+          <a:bodyPr/>
+          <a:lstStyle/>
+          <a:p>
+            <a:endParaRPr lang="en-US"/>
+          </a:p>
+        </p:txBody>
       </p:sp>
       <p:sp>
         <p:nvSpPr>
@@ -3754,7 +3772,7 @@
           <a:bodyPr wrap="square" lIns="0" tIns="0" rIns="0" bIns="0" rtlCol="0" anchor="ctr"/>
           <a:lstStyle/>
           <a:p>
-            <a:pPr indent="0" marL="0">
+            <a:pPr marL="0" indent="0">
               <a:buNone/>
             </a:pPr>
             <a:r>
@@ -3774,52 +3792,13 @@
       </p:sp>
       <p:sp>
         <p:nvSpPr>
-          <p:cNvPr id="4" name="Text 2"/>
-          <p:cNvSpPr/>
-          <p:nvPr/>
-        </p:nvSpPr>
-        <p:spPr>
-          <a:xfrm>
-            <a:off x="548640" y="1874520"/>
-            <a:ext cx="7863840" cy="411480"/>
-          </a:xfrm>
-          <a:prstGeom prst="rect">
-            <a:avLst/>
-          </a:prstGeom>
-          <a:noFill/>
-          <a:ln/>
-        </p:spPr>
-        <p:txBody>
-          <a:bodyPr wrap="square" lIns="0" tIns="0" rIns="0" bIns="0" rtlCol="0" anchor="ctr"/>
-          <a:lstStyle/>
-          <a:p>
-            <a:pPr indent="0" marL="0">
-              <a:buNone/>
-            </a:pPr>
-            <a:r>
-              <a:rPr lang="en-US" sz="1800" i="1" dirty="0">
-                <a:solidFill>
-                  <a:srgbClr val="DBEAFE"/>
-                </a:solidFill>
-                <a:latin typeface="Calibri" pitchFamily="34" charset="0"/>
-                <a:ea typeface="Calibri" pitchFamily="34" charset="-122"/>
-                <a:cs typeface="Calibri" pitchFamily="34" charset="-120"/>
-              </a:rPr>
-              <a:t>Questions &amp; discussion</a:t>
-            </a:r>
-            <a:endParaRPr lang="en-US" sz="1800" dirty="0"/>
-          </a:p>
-        </p:txBody>
-      </p:sp>
-      <p:sp>
-        <p:nvSpPr>
           <p:cNvPr id="5" name="Text 3"/>
           <p:cNvSpPr/>
           <p:nvPr/>
         </p:nvSpPr>
         <p:spPr>
           <a:xfrm>
-            <a:off x="548640" y="2697480"/>
+            <a:off x="548640" y="2400300"/>
             <a:ext cx="7863840" cy="274320"/>
           </a:xfrm>
           <a:prstGeom prst="rect">
@@ -3832,11 +3811,11 @@
           <a:bodyPr wrap="square" lIns="0" tIns="0" rIns="0" bIns="0" rtlCol="0" anchor="ctr"/>
           <a:lstStyle/>
           <a:p>
-            <a:pPr indent="0" marL="0">
-              <a:buNone/>
-            </a:pPr>
-            <a:r>
-              <a:rPr lang="en-US" sz="1100" b="1" spc="300" kern="0" dirty="0">
+            <a:pPr marL="0" indent="0">
+              <a:buNone/>
+            </a:pPr>
+            <a:r>
+              <a:rPr lang="en-US" sz="1100" b="1" kern="0" spc="300" dirty="0">
                 <a:solidFill>
                   <a:srgbClr val="0D9488"/>
                 </a:solidFill>
@@ -3858,7 +3837,7 @@
         </p:nvSpPr>
         <p:spPr>
           <a:xfrm>
-            <a:off x="731520" y="3017520"/>
+            <a:off x="731520" y="2720340"/>
             <a:ext cx="7680960" cy="1325880"/>
           </a:xfrm>
           <a:prstGeom prst="rect">
@@ -3977,7 +3956,7 @@
           <a:bodyPr wrap="square" lIns="0" tIns="0" rIns="0" bIns="0" rtlCol="0" anchor="ctr"/>
           <a:lstStyle/>
           <a:p>
-            <a:pPr indent="0" marL="0">
+            <a:pPr marL="0" indent="0">
               <a:buNone/>
             </a:pPr>
             <a:r>
@@ -4011,6 +3990,7 @@
         <a:solidFill>
           <a:srgbClr val="FFFFFF"/>
         </a:solidFill>
+        <a:effectLst/>
       </p:bgPr>
     </p:bg>
     <p:spTree>
@@ -4048,7 +4028,7 @@
           <a:bodyPr wrap="square" lIns="0" tIns="0" rIns="0" bIns="0" rtlCol="0" anchor="ctr"/>
           <a:lstStyle/>
           <a:p>
-            <a:pPr indent="0" marL="0">
+            <a:pPr marL="0" indent="0">
               <a:buNone/>
             </a:pPr>
             <a:r>
@@ -4090,6 +4070,13 @@
             <a:prstDash val="solid"/>
           </a:ln>
         </p:spPr>
+        <p:txBody>
+          <a:bodyPr/>
+          <a:lstStyle/>
+          <a:p>
+            <a:endParaRPr lang="en-US"/>
+          </a:p>
+        </p:txBody>
       </p:sp>
       <p:sp>
         <p:nvSpPr>
@@ -4112,7 +4099,7 @@
           <a:bodyPr wrap="square" lIns="0" tIns="0" rIns="0" bIns="0" rtlCol="0" anchor="ctr"/>
           <a:lstStyle/>
           <a:p>
-            <a:pPr indent="0" marL="0">
+            <a:pPr marL="0" indent="0">
               <a:buNone/>
             </a:pPr>
             <a:r>
@@ -4151,7 +4138,7 @@
           <a:bodyPr wrap="square" lIns="0" tIns="0" rIns="0" bIns="0" rtlCol="0" anchor="ctr"/>
           <a:lstStyle/>
           <a:p>
-            <a:pPr indent="0" marL="0">
+            <a:pPr marL="0" indent="0">
               <a:buNone/>
             </a:pPr>
             <a:r>
@@ -4190,7 +4177,7 @@
           <a:bodyPr wrap="square" lIns="0" tIns="0" rIns="0" bIns="0" rtlCol="0" anchor="ctr"/>
           <a:lstStyle/>
           <a:p>
-            <a:pPr indent="0" marL="0">
+            <a:pPr marL="0" indent="0">
               <a:buNone/>
             </a:pPr>
             <a:r>
@@ -4229,7 +4216,7 @@
           <a:bodyPr wrap="square" lIns="0" tIns="0" rIns="0" bIns="0" rtlCol="0" anchor="ctr"/>
           <a:lstStyle/>
           <a:p>
-            <a:pPr indent="0" marL="0">
+            <a:pPr marL="0" indent="0">
               <a:buNone/>
             </a:pPr>
             <a:r>
@@ -4268,7 +4255,7 @@
           <a:bodyPr wrap="square" lIns="0" tIns="0" rIns="0" bIns="0" rtlCol="0" anchor="ctr"/>
           <a:lstStyle/>
           <a:p>
-            <a:pPr indent="0" marL="0">
+            <a:pPr marL="0" indent="0">
               <a:buNone/>
             </a:pPr>
             <a:r>
@@ -4307,7 +4294,7 @@
           <a:bodyPr wrap="square" lIns="0" tIns="0" rIns="0" bIns="0" rtlCol="0" anchor="ctr"/>
           <a:lstStyle/>
           <a:p>
-            <a:pPr indent="0" marL="0">
+            <a:pPr marL="0" indent="0">
               <a:buNone/>
             </a:pPr>
             <a:r>
@@ -4346,7 +4333,7 @@
           <a:bodyPr wrap="square" lIns="0" tIns="0" rIns="0" bIns="0" rtlCol="0" anchor="ctr"/>
           <a:lstStyle/>
           <a:p>
-            <a:pPr indent="0" marL="0">
+            <a:pPr marL="0" indent="0">
               <a:buNone/>
             </a:pPr>
             <a:r>
@@ -4385,7 +4372,7 @@
           <a:bodyPr wrap="square" lIns="0" tIns="0" rIns="0" bIns="0" rtlCol="0" anchor="ctr"/>
           <a:lstStyle/>
           <a:p>
-            <a:pPr indent="0" marL="0">
+            <a:pPr marL="0" indent="0">
               <a:buNone/>
             </a:pPr>
             <a:r>
@@ -4424,7 +4411,7 @@
           <a:bodyPr wrap="square" lIns="0" tIns="0" rIns="0" bIns="0" rtlCol="0" anchor="ctr"/>
           <a:lstStyle/>
           <a:p>
-            <a:pPr indent="0" marL="0">
+            <a:pPr marL="0" indent="0">
               <a:buNone/>
             </a:pPr>
             <a:r>
@@ -4463,7 +4450,7 @@
           <a:bodyPr wrap="square" lIns="0" tIns="0" rIns="0" bIns="0" rtlCol="0" anchor="ctr"/>
           <a:lstStyle/>
           <a:p>
-            <a:pPr indent="0" marL="0">
+            <a:pPr marL="0" indent="0">
               <a:buNone/>
             </a:pPr>
             <a:r>
@@ -4505,6 +4492,13 @@
             <a:prstDash val="solid"/>
           </a:ln>
         </p:spPr>
+        <p:txBody>
+          <a:bodyPr/>
+          <a:lstStyle/>
+          <a:p>
+            <a:endParaRPr lang="en-US"/>
+          </a:p>
+        </p:txBody>
       </p:sp>
       <p:sp>
         <p:nvSpPr>
@@ -4527,7 +4521,7 @@
           <a:bodyPr wrap="square" lIns="0" tIns="0" rIns="0" bIns="0" rtlCol="0" anchor="ctr"/>
           <a:lstStyle/>
           <a:p>
-            <a:pPr indent="0" marL="0">
+            <a:pPr marL="0" indent="0">
               <a:buNone/>
             </a:pPr>
             <a:r>
@@ -4566,7 +4560,7 @@
           <a:bodyPr wrap="square" lIns="0" tIns="0" rIns="0" bIns="0" rtlCol="0" anchor="ctr"/>
           <a:lstStyle/>
           <a:p>
-            <a:pPr algn="r" indent="0" marL="0">
+            <a:pPr marL="0" indent="0" algn="r">
               <a:buNone/>
             </a:pPr>
             <a:r>
@@ -4600,6 +4594,7 @@
         <a:solidFill>
           <a:srgbClr val="FFFFFF"/>
         </a:solidFill>
+        <a:effectLst/>
       </p:bgPr>
     </p:bg>
     <p:spTree>
@@ -4637,7 +4632,7 @@
           <a:bodyPr wrap="square" lIns="0" tIns="0" rIns="0" bIns="0" rtlCol="0" anchor="ctr"/>
           <a:lstStyle/>
           <a:p>
-            <a:pPr indent="0" marL="0">
+            <a:pPr marL="0" indent="0">
               <a:buNone/>
             </a:pPr>
             <a:r>
@@ -4679,6 +4674,13 @@
             <a:prstDash val="solid"/>
           </a:ln>
         </p:spPr>
+        <p:txBody>
+          <a:bodyPr/>
+          <a:lstStyle/>
+          <a:p>
+            <a:endParaRPr lang="en-US"/>
+          </a:p>
+        </p:txBody>
       </p:sp>
       <p:sp>
         <p:nvSpPr>
@@ -4701,7 +4703,7 @@
           <a:bodyPr wrap="square" lIns="0" tIns="0" rIns="0" bIns="0" rtlCol="0" anchor="ctr"/>
           <a:lstStyle/>
           <a:p>
-            <a:pPr indent="0" marL="0">
+            <a:pPr marL="0" indent="0">
               <a:buNone/>
             </a:pPr>
             <a:r>
@@ -4740,7 +4742,7 @@
           <a:bodyPr wrap="square" lIns="0" tIns="0" rIns="0" bIns="0" rtlCol="0" anchor="ctr"/>
           <a:lstStyle/>
           <a:p>
-            <a:pPr indent="0" marL="0">
+            <a:pPr marL="0" indent="0">
               <a:buNone/>
             </a:pPr>
             <a:r>
@@ -4779,7 +4781,7 @@
           <a:bodyPr wrap="square" lIns="0" tIns="0" rIns="0" bIns="0" rtlCol="0" anchor="ctr"/>
           <a:lstStyle/>
           <a:p>
-            <a:pPr indent="0" marL="0">
+            <a:pPr marL="0" indent="0">
               <a:buNone/>
             </a:pPr>
             <a:r>
@@ -4818,7 +4820,7 @@
           <a:bodyPr wrap="square" lIns="0" tIns="0" rIns="0" bIns="0" rtlCol="0" anchor="ctr"/>
           <a:lstStyle/>
           <a:p>
-            <a:pPr indent="0" marL="0">
+            <a:pPr marL="0" indent="0">
               <a:buNone/>
             </a:pPr>
             <a:r>
@@ -4857,7 +4859,7 @@
           <a:bodyPr wrap="square" lIns="0" tIns="0" rIns="0" bIns="0" rtlCol="0" anchor="ctr"/>
           <a:lstStyle/>
           <a:p>
-            <a:pPr indent="0" marL="0">
+            <a:pPr marL="0" indent="0">
               <a:buNone/>
             </a:pPr>
             <a:r>
@@ -4896,7 +4898,7 @@
           <a:bodyPr wrap="square" lIns="0" tIns="0" rIns="0" bIns="0" rtlCol="0" anchor="ctr"/>
           <a:lstStyle/>
           <a:p>
-            <a:pPr indent="0" marL="0">
+            <a:pPr marL="0" indent="0">
               <a:buNone/>
             </a:pPr>
             <a:r>
@@ -4935,7 +4937,7 @@
           <a:bodyPr wrap="square" lIns="0" tIns="0" rIns="0" bIns="0" rtlCol="0" anchor="ctr"/>
           <a:lstStyle/>
           <a:p>
-            <a:pPr indent="0" marL="0">
+            <a:pPr marL="0" indent="0">
               <a:buNone/>
             </a:pPr>
             <a:r>
@@ -4974,7 +4976,7 @@
           <a:bodyPr wrap="square" lIns="0" tIns="0" rIns="0" bIns="0" rtlCol="0" anchor="ctr"/>
           <a:lstStyle/>
           <a:p>
-            <a:pPr indent="0" marL="0">
+            <a:pPr marL="0" indent="0">
               <a:buNone/>
             </a:pPr>
             <a:r>
@@ -5013,7 +5015,7 @@
           <a:bodyPr wrap="square" lIns="0" tIns="0" rIns="0" bIns="0" rtlCol="0" anchor="ctr"/>
           <a:lstStyle/>
           <a:p>
-            <a:pPr indent="0" marL="0">
+            <a:pPr marL="0" indent="0">
               <a:buNone/>
             </a:pPr>
             <a:r>
@@ -5052,7 +5054,7 @@
           <a:bodyPr wrap="square" lIns="0" tIns="0" rIns="0" bIns="0" rtlCol="0" anchor="ctr"/>
           <a:lstStyle/>
           <a:p>
-            <a:pPr indent="0" marL="0">
+            <a:pPr marL="0" indent="0">
               <a:buNone/>
             </a:pPr>
             <a:r>
@@ -5091,7 +5093,7 @@
           <a:bodyPr wrap="square" lIns="0" tIns="0" rIns="0" bIns="0" rtlCol="0" anchor="ctr"/>
           <a:lstStyle/>
           <a:p>
-            <a:pPr indent="0" marL="0">
+            <a:pPr marL="0" indent="0">
               <a:buNone/>
             </a:pPr>
             <a:r>
@@ -5130,7 +5132,7 @@
           <a:bodyPr wrap="square" lIns="0" tIns="0" rIns="0" bIns="0" rtlCol="0" anchor="ctr"/>
           <a:lstStyle/>
           <a:p>
-            <a:pPr indent="0" marL="0">
+            <a:pPr marL="0" indent="0">
               <a:buNone/>
             </a:pPr>
             <a:r>
@@ -5169,7 +5171,7 @@
           <a:bodyPr wrap="square" lIns="0" tIns="0" rIns="0" bIns="0" rtlCol="0" anchor="ctr"/>
           <a:lstStyle/>
           <a:p>
-            <a:pPr indent="0" marL="0">
+            <a:pPr marL="0" indent="0">
               <a:buNone/>
             </a:pPr>
             <a:r>
@@ -5208,7 +5210,7 @@
           <a:bodyPr wrap="square" lIns="0" tIns="0" rIns="0" bIns="0" rtlCol="0" anchor="ctr"/>
           <a:lstStyle/>
           <a:p>
-            <a:pPr indent="0" marL="0">
+            <a:pPr marL="0" indent="0">
               <a:buNone/>
             </a:pPr>
             <a:r>
@@ -5247,7 +5249,7 @@
           <a:bodyPr wrap="square" lIns="0" tIns="0" rIns="0" bIns="0" rtlCol="0" anchor="ctr"/>
           <a:lstStyle/>
           <a:p>
-            <a:pPr indent="0" marL="0">
+            <a:pPr marL="0" indent="0">
               <a:buNone/>
             </a:pPr>
             <a:r>
@@ -5286,7 +5288,7 @@
           <a:bodyPr wrap="square" lIns="0" tIns="0" rIns="0" bIns="0" rtlCol="0" anchor="ctr"/>
           <a:lstStyle/>
           <a:p>
-            <a:pPr algn="r" indent="0" marL="0">
+            <a:pPr marL="0" indent="0" algn="r">
               <a:buNone/>
             </a:pPr>
             <a:r>
@@ -5320,6 +5322,7 @@
         <a:solidFill>
           <a:srgbClr val="FFFFFF"/>
         </a:solidFill>
+        <a:effectLst/>
       </p:bgPr>
     </p:bg>
     <p:spTree>
@@ -5357,7 +5360,7 @@
           <a:bodyPr wrap="square" lIns="0" tIns="0" rIns="0" bIns="0" rtlCol="0" anchor="ctr"/>
           <a:lstStyle/>
           <a:p>
-            <a:pPr indent="0" marL="0">
+            <a:pPr marL="0" indent="0">
               <a:buNone/>
             </a:pPr>
             <a:r>
@@ -5399,6 +5402,13 @@
             <a:prstDash val="solid"/>
           </a:ln>
         </p:spPr>
+        <p:txBody>
+          <a:bodyPr/>
+          <a:lstStyle/>
+          <a:p>
+            <a:endParaRPr lang="en-US"/>
+          </a:p>
+        </p:txBody>
       </p:sp>
       <p:sp>
         <p:nvSpPr>
@@ -5424,6 +5434,13 @@
             <a:prstDash val="solid"/>
           </a:ln>
         </p:spPr>
+        <p:txBody>
+          <a:bodyPr/>
+          <a:lstStyle/>
+          <a:p>
+            <a:endParaRPr lang="en-US"/>
+          </a:p>
+        </p:txBody>
       </p:sp>
       <p:sp>
         <p:nvSpPr>
@@ -5449,6 +5466,13 @@
             <a:prstDash val="solid"/>
           </a:ln>
         </p:spPr>
+        <p:txBody>
+          <a:bodyPr/>
+          <a:lstStyle/>
+          <a:p>
+            <a:endParaRPr lang="en-US"/>
+          </a:p>
+        </p:txBody>
       </p:sp>
       <p:sp>
         <p:nvSpPr>
@@ -5471,7 +5495,7 @@
           <a:bodyPr wrap="square" lIns="0" tIns="0" rIns="0" bIns="0" rtlCol="0" anchor="ctr"/>
           <a:lstStyle/>
           <a:p>
-            <a:pPr indent="0" marL="0">
+            <a:pPr marL="0" indent="0">
               <a:buNone/>
             </a:pPr>
             <a:r>
@@ -5510,7 +5534,7 @@
           <a:bodyPr wrap="square" lIns="0" tIns="0" rIns="0" bIns="0" rtlCol="0" anchor="ctr"/>
           <a:lstStyle/>
           <a:p>
-            <a:pPr indent="0" marL="0">
+            <a:pPr marL="0" indent="0">
               <a:buNone/>
             </a:pPr>
             <a:r>
@@ -5549,7 +5573,7 @@
           <a:bodyPr wrap="square" lIns="0" tIns="0" rIns="0" bIns="0" rtlCol="0" anchor="ctr"/>
           <a:lstStyle/>
           <a:p>
-            <a:pPr indent="0" marL="0">
+            <a:pPr marL="0" indent="0">
               <a:buNone/>
             </a:pPr>
             <a:r>
@@ -5588,7 +5612,7 @@
           <a:bodyPr wrap="square" lIns="0" tIns="0" rIns="0" bIns="0" rtlCol="0" anchor="ctr"/>
           <a:lstStyle/>
           <a:p>
-            <a:pPr algn="ctr" indent="0" marL="0">
+            <a:pPr marL="0" indent="0" algn="ctr">
               <a:buNone/>
             </a:pPr>
             <a:r>
@@ -5630,6 +5654,13 @@
             <a:prstDash val="solid"/>
           </a:ln>
         </p:spPr>
+        <p:txBody>
+          <a:bodyPr/>
+          <a:lstStyle/>
+          <a:p>
+            <a:endParaRPr lang="en-US"/>
+          </a:p>
+        </p:txBody>
       </p:sp>
       <p:sp>
         <p:nvSpPr>
@@ -5655,6 +5686,13 @@
             <a:prstDash val="solid"/>
           </a:ln>
         </p:spPr>
+        <p:txBody>
+          <a:bodyPr/>
+          <a:lstStyle/>
+          <a:p>
+            <a:endParaRPr lang="en-US"/>
+          </a:p>
+        </p:txBody>
       </p:sp>
       <p:sp>
         <p:nvSpPr>
@@ -5677,7 +5715,7 @@
           <a:bodyPr wrap="square" lIns="0" tIns="0" rIns="0" bIns="0" rtlCol="0" anchor="ctr"/>
           <a:lstStyle/>
           <a:p>
-            <a:pPr indent="0" marL="0">
+            <a:pPr marL="0" indent="0">
               <a:buNone/>
             </a:pPr>
             <a:r>
@@ -5716,7 +5754,7 @@
           <a:bodyPr wrap="square" lIns="0" tIns="0" rIns="0" bIns="0" rtlCol="0" anchor="ctr"/>
           <a:lstStyle/>
           <a:p>
-            <a:pPr indent="0" marL="0">
+            <a:pPr marL="0" indent="0">
               <a:buNone/>
             </a:pPr>
             <a:r>
@@ -5755,7 +5793,7 @@
           <a:bodyPr wrap="square" lIns="0" tIns="0" rIns="0" bIns="0" rtlCol="0" anchor="ctr"/>
           <a:lstStyle/>
           <a:p>
-            <a:pPr indent="0" marL="0">
+            <a:pPr marL="0" indent="0">
               <a:buNone/>
             </a:pPr>
             <a:r>
@@ -5794,7 +5832,7 @@
           <a:bodyPr wrap="square" lIns="0" tIns="0" rIns="0" bIns="0" rtlCol="0" anchor="ctr"/>
           <a:lstStyle/>
           <a:p>
-            <a:pPr algn="ctr" indent="0" marL="0">
+            <a:pPr marL="0" indent="0" algn="ctr">
               <a:buNone/>
             </a:pPr>
             <a:r>
@@ -5836,6 +5874,13 @@
             <a:prstDash val="solid"/>
           </a:ln>
         </p:spPr>
+        <p:txBody>
+          <a:bodyPr/>
+          <a:lstStyle/>
+          <a:p>
+            <a:endParaRPr lang="en-US"/>
+          </a:p>
+        </p:txBody>
       </p:sp>
       <p:sp>
         <p:nvSpPr>
@@ -5861,6 +5906,13 @@
             <a:prstDash val="solid"/>
           </a:ln>
         </p:spPr>
+        <p:txBody>
+          <a:bodyPr/>
+          <a:lstStyle/>
+          <a:p>
+            <a:endParaRPr lang="en-US"/>
+          </a:p>
+        </p:txBody>
       </p:sp>
       <p:sp>
         <p:nvSpPr>
@@ -5883,7 +5935,7 @@
           <a:bodyPr wrap="square" lIns="0" tIns="0" rIns="0" bIns="0" rtlCol="0" anchor="ctr"/>
           <a:lstStyle/>
           <a:p>
-            <a:pPr indent="0" marL="0">
+            <a:pPr marL="0" indent="0">
               <a:buNone/>
             </a:pPr>
             <a:r>
@@ -5922,7 +5974,7 @@
           <a:bodyPr wrap="square" lIns="0" tIns="0" rIns="0" bIns="0" rtlCol="0" anchor="ctr"/>
           <a:lstStyle/>
           <a:p>
-            <a:pPr indent="0" marL="0">
+            <a:pPr marL="0" indent="0">
               <a:buNone/>
             </a:pPr>
             <a:r>
@@ -5961,7 +6013,7 @@
           <a:bodyPr wrap="square" lIns="0" tIns="0" rIns="0" bIns="0" rtlCol="0" anchor="ctr"/>
           <a:lstStyle/>
           <a:p>
-            <a:pPr indent="0" marL="0">
+            <a:pPr marL="0" indent="0">
               <a:buNone/>
             </a:pPr>
             <a:r>
@@ -6000,7 +6052,7 @@
           <a:bodyPr wrap="square" lIns="0" tIns="0" rIns="0" bIns="0" rtlCol="0" anchor="ctr"/>
           <a:lstStyle/>
           <a:p>
-            <a:pPr algn="ctr" indent="0" marL="0">
+            <a:pPr marL="0" indent="0" algn="ctr">
               <a:buNone/>
             </a:pPr>
             <a:r>
@@ -6042,6 +6094,13 @@
             <a:prstDash val="solid"/>
           </a:ln>
         </p:spPr>
+        <p:txBody>
+          <a:bodyPr/>
+          <a:lstStyle/>
+          <a:p>
+            <a:endParaRPr lang="en-US"/>
+          </a:p>
+        </p:txBody>
       </p:sp>
       <p:sp>
         <p:nvSpPr>
@@ -6067,6 +6126,13 @@
             <a:prstDash val="solid"/>
           </a:ln>
         </p:spPr>
+        <p:txBody>
+          <a:bodyPr/>
+          <a:lstStyle/>
+          <a:p>
+            <a:endParaRPr lang="en-US"/>
+          </a:p>
+        </p:txBody>
       </p:sp>
       <p:sp>
         <p:nvSpPr>
@@ -6089,7 +6155,7 @@
           <a:bodyPr wrap="square" lIns="0" tIns="0" rIns="0" bIns="0" rtlCol="0" anchor="ctr"/>
           <a:lstStyle/>
           <a:p>
-            <a:pPr indent="0" marL="0">
+            <a:pPr marL="0" indent="0">
               <a:buNone/>
             </a:pPr>
             <a:r>
@@ -6128,7 +6194,7 @@
           <a:bodyPr wrap="square" lIns="0" tIns="0" rIns="0" bIns="0" rtlCol="0" anchor="ctr"/>
           <a:lstStyle/>
           <a:p>
-            <a:pPr indent="0" marL="0">
+            <a:pPr marL="0" indent="0">
               <a:buNone/>
             </a:pPr>
             <a:r>
@@ -6167,7 +6233,7 @@
           <a:bodyPr wrap="square" lIns="0" tIns="0" rIns="0" bIns="0" rtlCol="0" anchor="ctr"/>
           <a:lstStyle/>
           <a:p>
-            <a:pPr indent="0" marL="0">
+            <a:pPr marL="0" indent="0">
               <a:buNone/>
             </a:pPr>
             <a:r>
@@ -6206,7 +6272,7 @@
           <a:bodyPr wrap="square" lIns="0" tIns="0" rIns="0" bIns="0" rtlCol="0" anchor="ctr"/>
           <a:lstStyle/>
           <a:p>
-            <a:pPr algn="ctr" indent="0" marL="0">
+            <a:pPr marL="0" indent="0" algn="ctr">
               <a:buNone/>
             </a:pPr>
             <a:r>
@@ -6248,6 +6314,13 @@
             <a:prstDash val="solid"/>
           </a:ln>
         </p:spPr>
+        <p:txBody>
+          <a:bodyPr/>
+          <a:lstStyle/>
+          <a:p>
+            <a:endParaRPr lang="en-US"/>
+          </a:p>
+        </p:txBody>
       </p:sp>
       <p:sp>
         <p:nvSpPr>
@@ -6273,6 +6346,13 @@
             <a:prstDash val="solid"/>
           </a:ln>
         </p:spPr>
+        <p:txBody>
+          <a:bodyPr/>
+          <a:lstStyle/>
+          <a:p>
+            <a:endParaRPr lang="en-US"/>
+          </a:p>
+        </p:txBody>
       </p:sp>
       <p:sp>
         <p:nvSpPr>
@@ -6295,7 +6375,7 @@
           <a:bodyPr wrap="square" lIns="0" tIns="0" rIns="0" bIns="0" rtlCol="0" anchor="ctr"/>
           <a:lstStyle/>
           <a:p>
-            <a:pPr indent="0" marL="0">
+            <a:pPr marL="0" indent="0">
               <a:buNone/>
             </a:pPr>
             <a:r>
@@ -6334,7 +6414,7 @@
           <a:bodyPr wrap="square" lIns="0" tIns="0" rIns="0" bIns="0" rtlCol="0" anchor="ctr"/>
           <a:lstStyle/>
           <a:p>
-            <a:pPr indent="0" marL="0">
+            <a:pPr marL="0" indent="0">
               <a:buNone/>
             </a:pPr>
             <a:r>
@@ -6373,7 +6453,7 @@
           <a:bodyPr wrap="square" lIns="0" tIns="0" rIns="0" bIns="0" rtlCol="0" anchor="ctr"/>
           <a:lstStyle/>
           <a:p>
-            <a:pPr indent="0" marL="0">
+            <a:pPr marL="0" indent="0">
               <a:buNone/>
             </a:pPr>
             <a:r>
@@ -6415,6 +6495,13 @@
             <a:prstDash val="solid"/>
           </a:ln>
         </p:spPr>
+        <p:txBody>
+          <a:bodyPr/>
+          <a:lstStyle/>
+          <a:p>
+            <a:endParaRPr lang="en-US"/>
+          </a:p>
+        </p:txBody>
       </p:sp>
       <p:sp>
         <p:nvSpPr>
@@ -6437,7 +6524,7 @@
           <a:bodyPr wrap="square" lIns="0" tIns="0" rIns="0" bIns="0" rtlCol="0" anchor="ctr"/>
           <a:lstStyle/>
           <a:p>
-            <a:pPr indent="0" marL="0">
+            <a:pPr marL="0" indent="0">
               <a:buNone/>
             </a:pPr>
             <a:r>
@@ -6561,7 +6648,7 @@
           <a:bodyPr wrap="square" lIns="0" tIns="0" rIns="0" bIns="0" rtlCol="0" anchor="ctr"/>
           <a:lstStyle/>
           <a:p>
-            <a:pPr algn="r" indent="0" marL="0">
+            <a:pPr marL="0" indent="0" algn="r">
               <a:buNone/>
             </a:pPr>
             <a:r>
@@ -6589,12 +6676,13 @@
 
 <file path=ppt/slides/slide5.xml><?xml version="1.0" encoding="utf-8"?>
 <p:sld xmlns:a="http://schemas.openxmlformats.org/drawingml/2006/main" xmlns:r="http://schemas.openxmlformats.org/officeDocument/2006/relationships" xmlns:p="http://schemas.openxmlformats.org/presentationml/2006/main">
-  <p:cSld name="Slide 5">
+  <p:cSld name="Slide 6">
     <p:bg>
       <p:bgPr>
         <a:solidFill>
           <a:srgbClr val="FFFFFF"/>
         </a:solidFill>
+        <a:effectLst/>
       </p:bgPr>
     </p:bg>
     <p:spTree>
@@ -6632,7 +6720,7 @@
           <a:bodyPr wrap="square" lIns="0" tIns="0" rIns="0" bIns="0" rtlCol="0" anchor="ctr"/>
           <a:lstStyle/>
           <a:p>
-            <a:pPr indent="0" marL="0">
+            <a:pPr marL="0" indent="0">
               <a:buNone/>
             </a:pPr>
             <a:r>
@@ -6644,7 +6732,7 @@
                 <a:ea typeface="Calibri" pitchFamily="34" charset="-122"/>
                 <a:cs typeface="Calibri" pitchFamily="34" charset="-120"/>
               </a:rPr>
-              <a:t>Spotlight: God Service detection</a:t>
+              <a:t>Ten detectors across four dimensions</a:t>
             </a:r>
             <a:endParaRPr lang="en-US" sz="2500" dirty="0"/>
           </a:p>
@@ -6674,6 +6762,13 @@
             <a:prstDash val="solid"/>
           </a:ln>
         </p:spPr>
+        <p:txBody>
+          <a:bodyPr/>
+          <a:lstStyle/>
+          <a:p>
+            <a:endParaRPr lang="en-US"/>
+          </a:p>
+        </p:txBody>
       </p:sp>
       <p:sp>
         <p:nvSpPr>
@@ -6683,24 +6778,118 @@
         </p:nvSpPr>
         <p:spPr>
           <a:xfrm>
-            <a:off x="548640" y="987552"/>
-            <a:ext cx="3657600" cy="292608"/>
-          </a:xfrm>
-          <a:prstGeom prst="rect">
-            <a:avLst/>
-          </a:prstGeom>
-          <a:noFill/>
-          <a:ln/>
-        </p:spPr>
-        <p:txBody>
-          <a:bodyPr wrap="square" lIns="0" tIns="0" rIns="0" bIns="0" rtlCol="0" anchor="ctr"/>
-          <a:lstStyle/>
-          <a:p>
-            <a:pPr indent="0" marL="0">
-              <a:buNone/>
-            </a:pPr>
-            <a:r>
-              <a:rPr lang="en-US" sz="1300" b="1" dirty="0">
+            <a:off x="548640" y="969264"/>
+            <a:ext cx="8046720" cy="274320"/>
+          </a:xfrm>
+          <a:prstGeom prst="rect">
+            <a:avLst/>
+          </a:prstGeom>
+          <a:noFill/>
+          <a:ln/>
+        </p:spPr>
+        <p:txBody>
+          <a:bodyPr wrap="square" lIns="0" tIns="0" rIns="0" bIns="0" rtlCol="0" anchor="ctr"/>
+          <a:lstStyle/>
+          <a:p>
+            <a:pPr marL="0" indent="0">
+              <a:buNone/>
+            </a:pPr>
+            <a:r>
+              <a:rPr lang="en-US" sz="1000" dirty="0">
+                <a:solidFill>
+                  <a:srgbClr val="DC2626"/>
+                </a:solidFill>
+                <a:latin typeface="Calibri" pitchFamily="34" charset="0"/>
+                <a:ea typeface="Calibri" pitchFamily="34" charset="-122"/>
+                <a:cs typeface="Calibri" pitchFamily="34" charset="-120"/>
+              </a:rPr>
+              <a:t>● </a:t>
+            </a:r>
+            <a:r>
+              <a:rPr lang="en-US" sz="1000" dirty="0">
+                <a:solidFill>
+                  <a:srgbClr val="64748B"/>
+                </a:solidFill>
+                <a:latin typeface="Calibri" pitchFamily="34" charset="0"/>
+                <a:ea typeface="Calibri" pitchFamily="34" charset="-122"/>
+                <a:cs typeface="Calibri" pitchFamily="34" charset="-120"/>
+              </a:rPr>
+              <a:t>critical (−8 pts)      </a:t>
+            </a:r>
+            <a:r>
+              <a:rPr lang="en-US" sz="1000" dirty="0">
+                <a:solidFill>
+                  <a:srgbClr val="D97706"/>
+                </a:solidFill>
+                <a:latin typeface="Calibri" pitchFamily="34" charset="0"/>
+                <a:ea typeface="Calibri" pitchFamily="34" charset="-122"/>
+                <a:cs typeface="Calibri" pitchFamily="34" charset="-120"/>
+              </a:rPr>
+              <a:t>● </a:t>
+            </a:r>
+            <a:r>
+              <a:rPr lang="en-US" sz="1000" dirty="0">
+                <a:solidFill>
+                  <a:srgbClr val="64748B"/>
+                </a:solidFill>
+                <a:latin typeface="Calibri" pitchFamily="34" charset="0"/>
+                <a:ea typeface="Calibri" pitchFamily="34" charset="-122"/>
+                <a:cs typeface="Calibri" pitchFamily="34" charset="-120"/>
+              </a:rPr>
+              <a:t>high (−5 pts)      </a:t>
+            </a:r>
+            <a:r>
+              <a:rPr lang="en-US" sz="1000" dirty="0">
+                <a:solidFill>
+                  <a:srgbClr val="1C4E80"/>
+                </a:solidFill>
+                <a:latin typeface="Calibri" pitchFamily="34" charset="0"/>
+                <a:ea typeface="Calibri" pitchFamily="34" charset="-122"/>
+                <a:cs typeface="Calibri" pitchFamily="34" charset="-120"/>
+              </a:rPr>
+              <a:t>● </a:t>
+            </a:r>
+            <a:r>
+              <a:rPr lang="en-US" sz="1000" dirty="0">
+                <a:solidFill>
+                  <a:srgbClr val="64748B"/>
+                </a:solidFill>
+                <a:latin typeface="Calibri" pitchFamily="34" charset="0"/>
+                <a:ea typeface="Calibri" pitchFamily="34" charset="-122"/>
+                <a:cs typeface="Calibri" pitchFamily="34" charset="-120"/>
+              </a:rPr>
+              <a:t>medium (−3 pts)</a:t>
+            </a:r>
+            <a:endParaRPr lang="en-US" sz="1000" dirty="0"/>
+          </a:p>
+        </p:txBody>
+      </p:sp>
+      <p:sp>
+        <p:nvSpPr>
+          <p:cNvPr id="5" name="Text 3"/>
+          <p:cNvSpPr/>
+          <p:nvPr/>
+        </p:nvSpPr>
+        <p:spPr>
+          <a:xfrm>
+            <a:off x="548640" y="1371600"/>
+            <a:ext cx="4023360" cy="256032"/>
+          </a:xfrm>
+          <a:prstGeom prst="rect">
+            <a:avLst/>
+          </a:prstGeom>
+          <a:noFill/>
+          <a:ln/>
+        </p:spPr>
+        <p:txBody>
+          <a:bodyPr wrap="square" lIns="0" tIns="0" rIns="0" bIns="0" rtlCol="0" anchor="ctr"/>
+          <a:lstStyle/>
+          <a:p>
+            <a:pPr marL="0" indent="0">
+              <a:buNone/>
+            </a:pPr>
+            <a:r>
+              <a:rPr lang="en-US" sz="1050" b="1" kern="0" spc="200" dirty="0">
                 <a:solidFill>
                   <a:srgbClr val="0F2A44"/>
                 </a:solidFill>
@@ -6708,98 +6897,75 @@
                 <a:ea typeface="Calibri" pitchFamily="34" charset="-122"/>
                 <a:cs typeface="Calibri" pitchFamily="34" charset="-120"/>
               </a:rPr>
-              <a:t>Multi-level bridge in action</a:t>
-            </a:r>
-            <a:endParaRPr lang="en-US" sz="1300" dirty="0"/>
-          </a:p>
-        </p:txBody>
-      </p:sp>
-      <p:sp>
-        <p:nvSpPr>
-          <p:cNvPr id="5" name="Shape 3"/>
-          <p:cNvSpPr/>
-          <p:nvPr/>
-        </p:nvSpPr>
-        <p:spPr>
-          <a:xfrm>
-            <a:off x="548640" y="1371600"/>
-            <a:ext cx="3657600" cy="914400"/>
-          </a:xfrm>
-          <a:prstGeom prst="rect">
-            <a:avLst/>
+              <a:t>SERVICE DESIGN</a:t>
+            </a:r>
+            <a:endParaRPr lang="en-US" sz="1050" dirty="0"/>
+          </a:p>
+        </p:txBody>
+      </p:sp>
+      <p:sp>
+        <p:nvSpPr>
+          <p:cNvPr id="6" name="Shape 4"/>
+          <p:cNvSpPr/>
+          <p:nvPr/>
+        </p:nvSpPr>
+        <p:spPr>
+          <a:xfrm>
+            <a:off x="548640" y="1673352"/>
+            <a:ext cx="1325880" cy="402336"/>
+          </a:xfrm>
+          <a:prstGeom prst="roundRect">
+            <a:avLst>
+              <a:gd name="adj" fmla="val 22727"/>
+            </a:avLst>
           </a:prstGeom>
           <a:solidFill>
-            <a:srgbClr val="FFFFFF"/>
+            <a:srgbClr val="DBEAFE"/>
           </a:solidFill>
           <a:ln w="12700">
             <a:solidFill>
-              <a:srgbClr val="D8DEE6"/>
+              <a:srgbClr val="DBEAFE"/>
             </a:solidFill>
             <a:prstDash val="solid"/>
           </a:ln>
         </p:spPr>
-      </p:sp>
-      <p:sp>
-        <p:nvSpPr>
-          <p:cNvPr id="6" name="Shape 4"/>
-          <p:cNvSpPr/>
-          <p:nvPr/>
-        </p:nvSpPr>
-        <p:spPr>
-          <a:xfrm>
-            <a:off x="548640" y="1371600"/>
-            <a:ext cx="41148" cy="914400"/>
-          </a:xfrm>
-          <a:prstGeom prst="rect">
+        <p:txBody>
+          <a:bodyPr/>
+          <a:lstStyle/>
+          <a:p>
+            <a:endParaRPr lang="en-US"/>
+          </a:p>
+        </p:txBody>
+      </p:sp>
+      <p:sp>
+        <p:nvSpPr>
+          <p:cNvPr id="7" name="Shape 5"/>
+          <p:cNvSpPr/>
+          <p:nvPr/>
+        </p:nvSpPr>
+        <p:spPr>
+          <a:xfrm>
+            <a:off x="685800" y="1833372"/>
+            <a:ext cx="82296" cy="82296"/>
+          </a:xfrm>
+          <a:prstGeom prst="ellipse">
             <a:avLst/>
           </a:prstGeom>
           <a:solidFill>
-            <a:srgbClr val="0F2A44"/>
+            <a:srgbClr val="1C4E80"/>
           </a:solidFill>
           <a:ln w="12700">
             <a:solidFill>
-              <a:srgbClr val="0F2A44"/>
+              <a:srgbClr val="1C4E80"/>
             </a:solidFill>
             <a:prstDash val="solid"/>
           </a:ln>
         </p:spPr>
-      </p:sp>
-      <p:sp>
-        <p:nvSpPr>
-          <p:cNvPr id="7" name="Text 5"/>
-          <p:cNvSpPr/>
-          <p:nvPr/>
-        </p:nvSpPr>
-        <p:spPr>
-          <a:xfrm>
-            <a:off x="713232" y="1463040"/>
-            <a:ext cx="3383280" cy="219456"/>
-          </a:xfrm>
-          <a:prstGeom prst="rect">
-            <a:avLst/>
-          </a:prstGeom>
-          <a:noFill/>
-          <a:ln/>
-        </p:spPr>
-        <p:txBody>
-          <a:bodyPr wrap="square" lIns="0" tIns="0" rIns="0" bIns="0" rtlCol="0" anchor="ctr"/>
-          <a:lstStyle/>
-          <a:p>
-            <a:pPr indent="0" marL="0">
-              <a:buNone/>
-            </a:pPr>
-            <a:r>
-              <a:rPr lang="en-US" sz="900" b="1" spc="200" kern="0" dirty="0">
-                <a:solidFill>
-                  <a:srgbClr val="64748B"/>
-                </a:solidFill>
-                <a:latin typeface="Calibri" pitchFamily="34" charset="0"/>
-                <a:ea typeface="Calibri" pitchFamily="34" charset="-122"/>
-                <a:cs typeface="Calibri" pitchFamily="34" charset="-120"/>
-              </a:rPr>
-              <a:t>CODE LEVEL</a:t>
-            </a:r>
-            <a:endParaRPr lang="en-US" sz="900" dirty="0"/>
+        <p:txBody>
+          <a:bodyPr/>
+          <a:lstStyle/>
+          <a:p>
+            <a:endParaRPr lang="en-US"/>
           </a:p>
         </p:txBody>
       </p:sp>
@@ -6811,24 +6977,24 @@
         </p:nvSpPr>
         <p:spPr>
           <a:xfrm>
-            <a:off x="713232" y="1691640"/>
-            <a:ext cx="3383280" cy="274320"/>
-          </a:xfrm>
-          <a:prstGeom prst="rect">
-            <a:avLst/>
-          </a:prstGeom>
-          <a:noFill/>
-          <a:ln/>
-        </p:spPr>
-        <p:txBody>
-          <a:bodyPr wrap="square" lIns="0" tIns="0" rIns="0" bIns="0" rtlCol="0" anchor="ctr"/>
-          <a:lstStyle/>
-          <a:p>
-            <a:pPr indent="0" marL="0">
-              <a:buNone/>
-            </a:pPr>
-            <a:r>
-              <a:rPr lang="en-US" sz="1250" b="1" dirty="0">
+            <a:off x="822960" y="1673352"/>
+            <a:ext cx="1033272" cy="402336"/>
+          </a:xfrm>
+          <a:prstGeom prst="rect">
+            <a:avLst/>
+          </a:prstGeom>
+          <a:noFill/>
+          <a:ln/>
+        </p:spPr>
+        <p:txBody>
+          <a:bodyPr wrap="square" lIns="0" tIns="0" rIns="0" bIns="0" rtlCol="0" anchor="ctr"/>
+          <a:lstStyle/>
+          <a:p>
+            <a:pPr marL="0" indent="0">
+              <a:buNone/>
+            </a:pPr>
+            <a:r>
+              <a:rPr lang="en-US" sz="1050" dirty="0">
                 <a:solidFill>
                   <a:srgbClr val="1E293B"/>
                 </a:solidFill>
@@ -6836,110 +7002,1084 @@
                 <a:ea typeface="Calibri" pitchFamily="34" charset="-122"/>
                 <a:cs typeface="Calibri" pitchFamily="34" charset="-120"/>
               </a:rPr>
-              <a:t>Structural class metrics (per class)</a:t>
-            </a:r>
-            <a:endParaRPr lang="en-US" sz="1250" dirty="0"/>
-          </a:p>
-        </p:txBody>
-      </p:sp>
-      <p:sp>
-        <p:nvSpPr>
-          <p:cNvPr id="9" name="Text 7"/>
-          <p:cNvSpPr/>
-          <p:nvPr/>
-        </p:nvSpPr>
-        <p:spPr>
-          <a:xfrm>
-            <a:off x="713232" y="1965960"/>
-            <a:ext cx="3383280" cy="274320"/>
-          </a:xfrm>
-          <a:prstGeom prst="rect">
-            <a:avLst/>
-          </a:prstGeom>
-          <a:noFill/>
-          <a:ln/>
-        </p:spPr>
-        <p:txBody>
-          <a:bodyPr wrap="square" lIns="0" tIns="0" rIns="0" bIns="0" rtlCol="0" anchor="ctr"/>
-          <a:lstStyle/>
-          <a:p>
-            <a:pPr indent="0" marL="0">
-              <a:buNone/>
-            </a:pPr>
-            <a:r>
-              <a:rPr lang="en-US" sz="1000" i="1" dirty="0">
-                <a:solidFill>
-                  <a:srgbClr val="64748B"/>
-                </a:solidFill>
-                <a:latin typeface="Calibri" pitchFamily="34" charset="0"/>
-                <a:ea typeface="Calibri" pitchFamily="34" charset="-122"/>
-                <a:cs typeface="Calibri" pitchFamily="34" charset="-120"/>
-              </a:rPr>
-              <a:t>Computed from the Spoon AST: fields, methods, LOC, cohesion</a:t>
-            </a:r>
-            <a:endParaRPr lang="en-US" sz="1000" dirty="0"/>
-          </a:p>
-        </p:txBody>
-      </p:sp>
-      <p:sp>
-        <p:nvSpPr>
-          <p:cNvPr id="10" name="Shape 8"/>
-          <p:cNvSpPr/>
-          <p:nvPr/>
-        </p:nvSpPr>
-        <p:spPr>
-          <a:xfrm>
-            <a:off x="2377440" y="2359152"/>
-            <a:ext cx="0" cy="292608"/>
-          </a:xfrm>
-          <a:prstGeom prst="line">
-            <a:avLst/>
-          </a:prstGeom>
-          <a:noFill/>
-          <a:ln w="28575">
-            <a:solidFill>
-              <a:srgbClr val="0D9488"/>
-            </a:solidFill>
-            <a:prstDash val="solid"/>
-            <a:tailEnd type="triangle"/>
-          </a:ln>
-        </p:spPr>
-      </p:sp>
-      <p:sp>
-        <p:nvSpPr>
-          <p:cNvPr id="11" name="Shape 9"/>
-          <p:cNvSpPr/>
-          <p:nvPr/>
-        </p:nvSpPr>
-        <p:spPr>
-          <a:xfrm>
-            <a:off x="548640" y="2724912"/>
-            <a:ext cx="3657600" cy="914400"/>
-          </a:xfrm>
-          <a:prstGeom prst="rect">
-            <a:avLst/>
+              <a:t>Nano Service</a:t>
+            </a:r>
+            <a:endParaRPr lang="en-US" sz="1050" dirty="0"/>
+          </a:p>
+        </p:txBody>
+      </p:sp>
+      <p:sp>
+        <p:nvSpPr>
+          <p:cNvPr id="9" name="Shape 7"/>
+          <p:cNvSpPr/>
+          <p:nvPr/>
+        </p:nvSpPr>
+        <p:spPr>
+          <a:xfrm>
+            <a:off x="2011680" y="1673352"/>
+            <a:ext cx="1280160" cy="402336"/>
+          </a:xfrm>
+          <a:prstGeom prst="roundRect">
+            <a:avLst>
+              <a:gd name="adj" fmla="val 22727"/>
+            </a:avLst>
           </a:prstGeom>
           <a:solidFill>
-            <a:srgbClr val="FFFFFF"/>
+            <a:srgbClr val="FEF3C7"/>
           </a:solidFill>
           <a:ln w="12700">
             <a:solidFill>
-              <a:srgbClr val="D8DEE6"/>
+              <a:srgbClr val="FEF3C7"/>
             </a:solidFill>
             <a:prstDash val="solid"/>
           </a:ln>
         </p:spPr>
-      </p:sp>
-      <p:sp>
-        <p:nvSpPr>
-          <p:cNvPr id="12" name="Shape 10"/>
-          <p:cNvSpPr/>
-          <p:nvPr/>
-        </p:nvSpPr>
-        <p:spPr>
-          <a:xfrm>
-            <a:off x="548640" y="2724912"/>
-            <a:ext cx="41148" cy="914400"/>
+        <p:txBody>
+          <a:bodyPr/>
+          <a:lstStyle/>
+          <a:p>
+            <a:endParaRPr lang="en-US"/>
+          </a:p>
+        </p:txBody>
+      </p:sp>
+      <p:sp>
+        <p:nvSpPr>
+          <p:cNvPr id="10" name="Shape 8"/>
+          <p:cNvSpPr/>
+          <p:nvPr/>
+        </p:nvSpPr>
+        <p:spPr>
+          <a:xfrm>
+            <a:off x="2148840" y="1833372"/>
+            <a:ext cx="82296" cy="82296"/>
+          </a:xfrm>
+          <a:prstGeom prst="ellipse">
+            <a:avLst/>
+          </a:prstGeom>
+          <a:solidFill>
+            <a:srgbClr val="D97706"/>
+          </a:solidFill>
+          <a:ln w="12700">
+            <a:solidFill>
+              <a:srgbClr val="D97706"/>
+            </a:solidFill>
+            <a:prstDash val="solid"/>
+          </a:ln>
+        </p:spPr>
+        <p:txBody>
+          <a:bodyPr/>
+          <a:lstStyle/>
+          <a:p>
+            <a:endParaRPr lang="en-US"/>
+          </a:p>
+        </p:txBody>
+      </p:sp>
+      <p:sp>
+        <p:nvSpPr>
+          <p:cNvPr id="11" name="Text 9"/>
+          <p:cNvSpPr/>
+          <p:nvPr/>
+        </p:nvSpPr>
+        <p:spPr>
+          <a:xfrm>
+            <a:off x="2286000" y="1673352"/>
+            <a:ext cx="987552" cy="402336"/>
+          </a:xfrm>
+          <a:prstGeom prst="rect">
+            <a:avLst/>
+          </a:prstGeom>
+          <a:noFill/>
+          <a:ln/>
+        </p:spPr>
+        <p:txBody>
+          <a:bodyPr wrap="square" lIns="0" tIns="0" rIns="0" bIns="0" rtlCol="0" anchor="ctr"/>
+          <a:lstStyle/>
+          <a:p>
+            <a:pPr marL="0" indent="0">
+              <a:buNone/>
+            </a:pPr>
+            <a:r>
+              <a:rPr lang="en-US" sz="1050" dirty="0">
+                <a:solidFill>
+                  <a:srgbClr val="1E293B"/>
+                </a:solidFill>
+                <a:latin typeface="Calibri" pitchFamily="34" charset="0"/>
+                <a:ea typeface="Calibri" pitchFamily="34" charset="-122"/>
+                <a:cs typeface="Calibri" pitchFamily="34" charset="-120"/>
+              </a:rPr>
+              <a:t>God Service</a:t>
+            </a:r>
+            <a:endParaRPr lang="en-US" sz="1050" dirty="0"/>
+          </a:p>
+        </p:txBody>
+      </p:sp>
+      <p:sp>
+        <p:nvSpPr>
+          <p:cNvPr id="12" name="Text 10"/>
+          <p:cNvSpPr/>
+          <p:nvPr/>
+        </p:nvSpPr>
+        <p:spPr>
+          <a:xfrm>
+            <a:off x="4754880" y="1371600"/>
+            <a:ext cx="4023360" cy="256032"/>
+          </a:xfrm>
+          <a:prstGeom prst="rect">
+            <a:avLst/>
+          </a:prstGeom>
+          <a:noFill/>
+          <a:ln/>
+        </p:spPr>
+        <p:txBody>
+          <a:bodyPr wrap="square" lIns="0" tIns="0" rIns="0" bIns="0" rtlCol="0" anchor="ctr"/>
+          <a:lstStyle/>
+          <a:p>
+            <a:pPr marL="0" indent="0">
+              <a:buNone/>
+            </a:pPr>
+            <a:r>
+              <a:rPr lang="en-US" sz="1050" b="1" kern="0" spc="200" dirty="0">
+                <a:solidFill>
+                  <a:srgbClr val="0F2A44"/>
+                </a:solidFill>
+                <a:latin typeface="Calibri" pitchFamily="34" charset="0"/>
+                <a:ea typeface="Calibri" pitchFamily="34" charset="-122"/>
+                <a:cs typeface="Calibri" pitchFamily="34" charset="-120"/>
+              </a:rPr>
+              <a:t>DATA MANAGEMENT</a:t>
+            </a:r>
+            <a:endParaRPr lang="en-US" sz="1050" dirty="0"/>
+          </a:p>
+        </p:txBody>
+      </p:sp>
+      <p:sp>
+        <p:nvSpPr>
+          <p:cNvPr id="13" name="Shape 11"/>
+          <p:cNvSpPr/>
+          <p:nvPr/>
+        </p:nvSpPr>
+        <p:spPr>
+          <a:xfrm>
+            <a:off x="4754880" y="1673352"/>
+            <a:ext cx="1554480" cy="402336"/>
+          </a:xfrm>
+          <a:prstGeom prst="roundRect">
+            <a:avLst>
+              <a:gd name="adj" fmla="val 22727"/>
+            </a:avLst>
+          </a:prstGeom>
+          <a:solidFill>
+            <a:srgbClr val="FEF3C7"/>
+          </a:solidFill>
+          <a:ln w="12700">
+            <a:solidFill>
+              <a:srgbClr val="FEF3C7"/>
+            </a:solidFill>
+            <a:prstDash val="solid"/>
+          </a:ln>
+        </p:spPr>
+        <p:txBody>
+          <a:bodyPr/>
+          <a:lstStyle/>
+          <a:p>
+            <a:endParaRPr lang="en-US"/>
+          </a:p>
+        </p:txBody>
+      </p:sp>
+      <p:sp>
+        <p:nvSpPr>
+          <p:cNvPr id="14" name="Shape 12"/>
+          <p:cNvSpPr/>
+          <p:nvPr/>
+        </p:nvSpPr>
+        <p:spPr>
+          <a:xfrm>
+            <a:off x="4892040" y="1833372"/>
+            <a:ext cx="82296" cy="82296"/>
+          </a:xfrm>
+          <a:prstGeom prst="ellipse">
+            <a:avLst/>
+          </a:prstGeom>
+          <a:solidFill>
+            <a:srgbClr val="D97706"/>
+          </a:solidFill>
+          <a:ln w="12700">
+            <a:solidFill>
+              <a:srgbClr val="D97706"/>
+            </a:solidFill>
+            <a:prstDash val="solid"/>
+          </a:ln>
+        </p:spPr>
+        <p:txBody>
+          <a:bodyPr/>
+          <a:lstStyle/>
+          <a:p>
+            <a:endParaRPr lang="en-US"/>
+          </a:p>
+        </p:txBody>
+      </p:sp>
+      <p:sp>
+        <p:nvSpPr>
+          <p:cNvPr id="15" name="Text 13"/>
+          <p:cNvSpPr/>
+          <p:nvPr/>
+        </p:nvSpPr>
+        <p:spPr>
+          <a:xfrm>
+            <a:off x="5029200" y="1673352"/>
+            <a:ext cx="1261872" cy="402336"/>
+          </a:xfrm>
+          <a:prstGeom prst="rect">
+            <a:avLst/>
+          </a:prstGeom>
+          <a:noFill/>
+          <a:ln/>
+        </p:spPr>
+        <p:txBody>
+          <a:bodyPr wrap="square" lIns="0" tIns="0" rIns="0" bIns="0" rtlCol="0" anchor="ctr"/>
+          <a:lstStyle/>
+          <a:p>
+            <a:pPr marL="0" indent="0">
+              <a:buNone/>
+            </a:pPr>
+            <a:r>
+              <a:rPr lang="en-US" sz="1050" dirty="0">
+                <a:solidFill>
+                  <a:srgbClr val="1E293B"/>
+                </a:solidFill>
+                <a:latin typeface="Calibri" pitchFamily="34" charset="0"/>
+                <a:ea typeface="Calibri" pitchFamily="34" charset="-122"/>
+                <a:cs typeface="Calibri" pitchFamily="34" charset="-120"/>
+              </a:rPr>
+              <a:t>Shared Database</a:t>
+            </a:r>
+            <a:endParaRPr lang="en-US" sz="1050" dirty="0"/>
+          </a:p>
+        </p:txBody>
+      </p:sp>
+      <p:sp>
+        <p:nvSpPr>
+          <p:cNvPr id="16" name="Text 14"/>
+          <p:cNvSpPr/>
+          <p:nvPr/>
+        </p:nvSpPr>
+        <p:spPr>
+          <a:xfrm>
+            <a:off x="548640" y="2468880"/>
+            <a:ext cx="4023360" cy="256032"/>
+          </a:xfrm>
+          <a:prstGeom prst="rect">
+            <a:avLst/>
+          </a:prstGeom>
+          <a:noFill/>
+          <a:ln/>
+        </p:spPr>
+        <p:txBody>
+          <a:bodyPr wrap="square" lIns="0" tIns="0" rIns="0" bIns="0" rtlCol="0" anchor="ctr"/>
+          <a:lstStyle/>
+          <a:p>
+            <a:pPr marL="0" indent="0">
+              <a:buNone/>
+            </a:pPr>
+            <a:r>
+              <a:rPr lang="en-US" sz="1050" b="1" kern="0" spc="200" dirty="0">
+                <a:solidFill>
+                  <a:srgbClr val="0F2A44"/>
+                </a:solidFill>
+                <a:latin typeface="Calibri" pitchFamily="34" charset="0"/>
+                <a:ea typeface="Calibri" pitchFamily="34" charset="-122"/>
+                <a:cs typeface="Calibri" pitchFamily="34" charset="-120"/>
+              </a:rPr>
+              <a:t>COMMUNICATION</a:t>
+            </a:r>
+            <a:endParaRPr lang="en-US" sz="1050" dirty="0"/>
+          </a:p>
+        </p:txBody>
+      </p:sp>
+      <p:sp>
+        <p:nvSpPr>
+          <p:cNvPr id="17" name="Shape 15"/>
+          <p:cNvSpPr/>
+          <p:nvPr/>
+        </p:nvSpPr>
+        <p:spPr>
+          <a:xfrm>
+            <a:off x="548640" y="2770632"/>
+            <a:ext cx="1463040" cy="402336"/>
+          </a:xfrm>
+          <a:prstGeom prst="roundRect">
+            <a:avLst>
+              <a:gd name="adj" fmla="val 22727"/>
+            </a:avLst>
+          </a:prstGeom>
+          <a:solidFill>
+            <a:srgbClr val="FEF3C7"/>
+          </a:solidFill>
+          <a:ln w="12700">
+            <a:solidFill>
+              <a:srgbClr val="FEF3C7"/>
+            </a:solidFill>
+            <a:prstDash val="solid"/>
+          </a:ln>
+        </p:spPr>
+        <p:txBody>
+          <a:bodyPr/>
+          <a:lstStyle/>
+          <a:p>
+            <a:endParaRPr lang="en-US"/>
+          </a:p>
+        </p:txBody>
+      </p:sp>
+      <p:sp>
+        <p:nvSpPr>
+          <p:cNvPr id="18" name="Shape 16"/>
+          <p:cNvSpPr/>
+          <p:nvPr/>
+        </p:nvSpPr>
+        <p:spPr>
+          <a:xfrm>
+            <a:off x="685800" y="2930652"/>
+            <a:ext cx="82296" cy="82296"/>
+          </a:xfrm>
+          <a:prstGeom prst="ellipse">
+            <a:avLst/>
+          </a:prstGeom>
+          <a:solidFill>
+            <a:srgbClr val="D97706"/>
+          </a:solidFill>
+          <a:ln w="12700">
+            <a:solidFill>
+              <a:srgbClr val="D97706"/>
+            </a:solidFill>
+            <a:prstDash val="solid"/>
+          </a:ln>
+        </p:spPr>
+        <p:txBody>
+          <a:bodyPr/>
+          <a:lstStyle/>
+          <a:p>
+            <a:endParaRPr lang="en-US"/>
+          </a:p>
+        </p:txBody>
+      </p:sp>
+      <p:sp>
+        <p:nvSpPr>
+          <p:cNvPr id="19" name="Text 17"/>
+          <p:cNvSpPr/>
+          <p:nvPr/>
+        </p:nvSpPr>
+        <p:spPr>
+          <a:xfrm>
+            <a:off x="822960" y="2770632"/>
+            <a:ext cx="1170432" cy="402336"/>
+          </a:xfrm>
+          <a:prstGeom prst="rect">
+            <a:avLst/>
+          </a:prstGeom>
+          <a:noFill/>
+          <a:ln/>
+        </p:spPr>
+        <p:txBody>
+          <a:bodyPr wrap="square" lIns="0" tIns="0" rIns="0" bIns="0" rtlCol="0" anchor="ctr"/>
+          <a:lstStyle/>
+          <a:p>
+            <a:pPr marL="0" indent="0">
+              <a:buNone/>
+            </a:pPr>
+            <a:r>
+              <a:rPr lang="en-US" sz="1050" dirty="0">
+                <a:solidFill>
+                  <a:srgbClr val="1E293B"/>
+                </a:solidFill>
+                <a:latin typeface="Calibri" pitchFamily="34" charset="0"/>
+                <a:ea typeface="Calibri" pitchFamily="34" charset="-122"/>
+                <a:cs typeface="Calibri" pitchFamily="34" charset="-120"/>
+              </a:rPr>
+              <a:t>Chatty Service</a:t>
+            </a:r>
+            <a:endParaRPr lang="en-US" sz="1050" dirty="0"/>
+          </a:p>
+        </p:txBody>
+      </p:sp>
+      <p:sp>
+        <p:nvSpPr>
+          <p:cNvPr id="20" name="Shape 18"/>
+          <p:cNvSpPr/>
+          <p:nvPr/>
+        </p:nvSpPr>
+        <p:spPr>
+          <a:xfrm>
+            <a:off x="2148840" y="2770632"/>
+            <a:ext cx="1691640" cy="402336"/>
+          </a:xfrm>
+          <a:prstGeom prst="roundRect">
+            <a:avLst>
+              <a:gd name="adj" fmla="val 22727"/>
+            </a:avLst>
+          </a:prstGeom>
+          <a:solidFill>
+            <a:srgbClr val="FEE2E2"/>
+          </a:solidFill>
+          <a:ln w="12700">
+            <a:solidFill>
+              <a:srgbClr val="FEE2E2"/>
+            </a:solidFill>
+            <a:prstDash val="solid"/>
+          </a:ln>
+        </p:spPr>
+        <p:txBody>
+          <a:bodyPr/>
+          <a:lstStyle/>
+          <a:p>
+            <a:endParaRPr lang="en-US"/>
+          </a:p>
+        </p:txBody>
+      </p:sp>
+      <p:sp>
+        <p:nvSpPr>
+          <p:cNvPr id="21" name="Shape 19"/>
+          <p:cNvSpPr/>
+          <p:nvPr/>
+        </p:nvSpPr>
+        <p:spPr>
+          <a:xfrm>
+            <a:off x="2286000" y="2930652"/>
+            <a:ext cx="82296" cy="82296"/>
+          </a:xfrm>
+          <a:prstGeom prst="ellipse">
+            <a:avLst/>
+          </a:prstGeom>
+          <a:solidFill>
+            <a:srgbClr val="DC2626"/>
+          </a:solidFill>
+          <a:ln w="12700">
+            <a:solidFill>
+              <a:srgbClr val="DC2626"/>
+            </a:solidFill>
+            <a:prstDash val="solid"/>
+          </a:ln>
+        </p:spPr>
+        <p:txBody>
+          <a:bodyPr/>
+          <a:lstStyle/>
+          <a:p>
+            <a:endParaRPr lang="en-US"/>
+          </a:p>
+        </p:txBody>
+      </p:sp>
+      <p:sp>
+        <p:nvSpPr>
+          <p:cNvPr id="22" name="Text 20"/>
+          <p:cNvSpPr/>
+          <p:nvPr/>
+        </p:nvSpPr>
+        <p:spPr>
+          <a:xfrm>
+            <a:off x="2423160" y="2770632"/>
+            <a:ext cx="1399032" cy="402336"/>
+          </a:xfrm>
+          <a:prstGeom prst="rect">
+            <a:avLst/>
+          </a:prstGeom>
+          <a:noFill/>
+          <a:ln/>
+        </p:spPr>
+        <p:txBody>
+          <a:bodyPr wrap="square" lIns="0" tIns="0" rIns="0" bIns="0" rtlCol="0" anchor="ctr"/>
+          <a:lstStyle/>
+          <a:p>
+            <a:pPr marL="0" indent="0">
+              <a:buNone/>
+            </a:pPr>
+            <a:r>
+              <a:rPr lang="en-US" sz="1050" dirty="0">
+                <a:solidFill>
+                  <a:srgbClr val="1E293B"/>
+                </a:solidFill>
+                <a:latin typeface="Calibri" pitchFamily="34" charset="0"/>
+                <a:ea typeface="Calibri" pitchFamily="34" charset="-122"/>
+                <a:cs typeface="Calibri" pitchFamily="34" charset="-120"/>
+              </a:rPr>
+              <a:t>Cyclic Dependency</a:t>
+            </a:r>
+            <a:endParaRPr lang="en-US" sz="1050" dirty="0"/>
+          </a:p>
+        </p:txBody>
+      </p:sp>
+      <p:sp>
+        <p:nvSpPr>
+          <p:cNvPr id="23" name="Shape 21"/>
+          <p:cNvSpPr/>
+          <p:nvPr/>
+        </p:nvSpPr>
+        <p:spPr>
+          <a:xfrm>
+            <a:off x="3977640" y="2770632"/>
+            <a:ext cx="1828800" cy="402336"/>
+          </a:xfrm>
+          <a:prstGeom prst="roundRect">
+            <a:avLst>
+              <a:gd name="adj" fmla="val 22727"/>
+            </a:avLst>
+          </a:prstGeom>
+          <a:solidFill>
+            <a:srgbClr val="DBEAFE"/>
+          </a:solidFill>
+          <a:ln w="12700">
+            <a:solidFill>
+              <a:srgbClr val="DBEAFE"/>
+            </a:solidFill>
+            <a:prstDash val="solid"/>
+          </a:ln>
+        </p:spPr>
+        <p:txBody>
+          <a:bodyPr/>
+          <a:lstStyle/>
+          <a:p>
+            <a:endParaRPr lang="en-US"/>
+          </a:p>
+        </p:txBody>
+      </p:sp>
+      <p:sp>
+        <p:nvSpPr>
+          <p:cNvPr id="24" name="Shape 22"/>
+          <p:cNvSpPr/>
+          <p:nvPr/>
+        </p:nvSpPr>
+        <p:spPr>
+          <a:xfrm>
+            <a:off x="4114800" y="2930652"/>
+            <a:ext cx="82296" cy="82296"/>
+          </a:xfrm>
+          <a:prstGeom prst="ellipse">
+            <a:avLst/>
+          </a:prstGeom>
+          <a:solidFill>
+            <a:srgbClr val="1C4E80"/>
+          </a:solidFill>
+          <a:ln w="12700">
+            <a:solidFill>
+              <a:srgbClr val="1C4E80"/>
+            </a:solidFill>
+            <a:prstDash val="solid"/>
+          </a:ln>
+        </p:spPr>
+        <p:txBody>
+          <a:bodyPr/>
+          <a:lstStyle/>
+          <a:p>
+            <a:endParaRPr lang="en-US"/>
+          </a:p>
+        </p:txBody>
+      </p:sp>
+      <p:sp>
+        <p:nvSpPr>
+          <p:cNvPr id="25" name="Text 23"/>
+          <p:cNvSpPr/>
+          <p:nvPr/>
+        </p:nvSpPr>
+        <p:spPr>
+          <a:xfrm>
+            <a:off x="4251960" y="2770632"/>
+            <a:ext cx="1536192" cy="402336"/>
+          </a:xfrm>
+          <a:prstGeom prst="rect">
+            <a:avLst/>
+          </a:prstGeom>
+          <a:noFill/>
+          <a:ln/>
+        </p:spPr>
+        <p:txBody>
+          <a:bodyPr wrap="square" lIns="0" tIns="0" rIns="0" bIns="0" rtlCol="0" anchor="ctr"/>
+          <a:lstStyle/>
+          <a:p>
+            <a:pPr marL="0" indent="0">
+              <a:buNone/>
+            </a:pPr>
+            <a:r>
+              <a:rPr lang="en-US" sz="1050" dirty="0">
+                <a:solidFill>
+                  <a:srgbClr val="1E293B"/>
+                </a:solidFill>
+                <a:latin typeface="Calibri" pitchFamily="34" charset="0"/>
+                <a:ea typeface="Calibri" pitchFamily="34" charset="-122"/>
+                <a:cs typeface="Calibri" pitchFamily="34" charset="-120"/>
+              </a:rPr>
+              <a:t>Hardcoded Endpoints</a:t>
+            </a:r>
+            <a:endParaRPr lang="en-US" sz="1050" dirty="0"/>
+          </a:p>
+        </p:txBody>
+      </p:sp>
+      <p:sp>
+        <p:nvSpPr>
+          <p:cNvPr id="26" name="Shape 24"/>
+          <p:cNvSpPr/>
+          <p:nvPr/>
+        </p:nvSpPr>
+        <p:spPr>
+          <a:xfrm>
+            <a:off x="5943600" y="2770632"/>
+            <a:ext cx="1188720" cy="402336"/>
+          </a:xfrm>
+          <a:prstGeom prst="roundRect">
+            <a:avLst>
+              <a:gd name="adj" fmla="val 22727"/>
+            </a:avLst>
+          </a:prstGeom>
+          <a:solidFill>
+            <a:srgbClr val="FEF3C7"/>
+          </a:solidFill>
+          <a:ln w="12700">
+            <a:solidFill>
+              <a:srgbClr val="FEF3C7"/>
+            </a:solidFill>
+            <a:prstDash val="solid"/>
+          </a:ln>
+        </p:spPr>
+        <p:txBody>
+          <a:bodyPr/>
+          <a:lstStyle/>
+          <a:p>
+            <a:endParaRPr lang="en-US"/>
+          </a:p>
+        </p:txBody>
+      </p:sp>
+      <p:sp>
+        <p:nvSpPr>
+          <p:cNvPr id="27" name="Shape 25"/>
+          <p:cNvSpPr/>
+          <p:nvPr/>
+        </p:nvSpPr>
+        <p:spPr>
+          <a:xfrm>
+            <a:off x="6080760" y="2930652"/>
+            <a:ext cx="82296" cy="82296"/>
+          </a:xfrm>
+          <a:prstGeom prst="ellipse">
+            <a:avLst/>
+          </a:prstGeom>
+          <a:solidFill>
+            <a:srgbClr val="D97706"/>
+          </a:solidFill>
+          <a:ln w="12700">
+            <a:solidFill>
+              <a:srgbClr val="D97706"/>
+            </a:solidFill>
+            <a:prstDash val="solid"/>
+          </a:ln>
+        </p:spPr>
+        <p:txBody>
+          <a:bodyPr/>
+          <a:lstStyle/>
+          <a:p>
+            <a:endParaRPr lang="en-US"/>
+          </a:p>
+        </p:txBody>
+      </p:sp>
+      <p:sp>
+        <p:nvSpPr>
+          <p:cNvPr id="28" name="Text 26"/>
+          <p:cNvSpPr/>
+          <p:nvPr/>
+        </p:nvSpPr>
+        <p:spPr>
+          <a:xfrm>
+            <a:off x="6217920" y="2770632"/>
+            <a:ext cx="896112" cy="402336"/>
+          </a:xfrm>
+          <a:prstGeom prst="rect">
+            <a:avLst/>
+          </a:prstGeom>
+          <a:noFill/>
+          <a:ln/>
+        </p:spPr>
+        <p:txBody>
+          <a:bodyPr wrap="square" lIns="0" tIns="0" rIns="0" bIns="0" rtlCol="0" anchor="ctr"/>
+          <a:lstStyle/>
+          <a:p>
+            <a:pPr marL="0" indent="0">
+              <a:buNone/>
+            </a:pPr>
+            <a:r>
+              <a:rPr lang="en-US" sz="1050" dirty="0">
+                <a:solidFill>
+                  <a:srgbClr val="1E293B"/>
+                </a:solidFill>
+                <a:latin typeface="Calibri" pitchFamily="34" charset="0"/>
+                <a:ea typeface="Calibri" pitchFamily="34" charset="-122"/>
+                <a:cs typeface="Calibri" pitchFamily="34" charset="-120"/>
+              </a:rPr>
+              <a:t>ESB Misuse</a:t>
+            </a:r>
+            <a:endParaRPr lang="en-US" sz="1050" dirty="0"/>
+          </a:p>
+        </p:txBody>
+      </p:sp>
+      <p:sp>
+        <p:nvSpPr>
+          <p:cNvPr id="29" name="Text 27"/>
+          <p:cNvSpPr/>
+          <p:nvPr/>
+        </p:nvSpPr>
+        <p:spPr>
+          <a:xfrm>
+            <a:off x="548640" y="3566160"/>
+            <a:ext cx="4023360" cy="256032"/>
+          </a:xfrm>
+          <a:prstGeom prst="rect">
+            <a:avLst/>
+          </a:prstGeom>
+          <a:noFill/>
+          <a:ln/>
+        </p:spPr>
+        <p:txBody>
+          <a:bodyPr wrap="square" lIns="0" tIns="0" rIns="0" bIns="0" rtlCol="0" anchor="ctr"/>
+          <a:lstStyle/>
+          <a:p>
+            <a:pPr marL="0" indent="0">
+              <a:buNone/>
+            </a:pPr>
+            <a:r>
+              <a:rPr lang="en-US" sz="1050" b="1" kern="0" spc="200" dirty="0">
+                <a:solidFill>
+                  <a:srgbClr val="0F2A44"/>
+                </a:solidFill>
+                <a:latin typeface="Calibri" pitchFamily="34" charset="0"/>
+                <a:ea typeface="Calibri" pitchFamily="34" charset="-122"/>
+                <a:cs typeface="Calibri" pitchFamily="34" charset="-120"/>
+              </a:rPr>
+              <a:t>DEPLOYMENT &amp; COUPLING</a:t>
+            </a:r>
+            <a:endParaRPr lang="en-US" sz="1050" dirty="0"/>
+          </a:p>
+        </p:txBody>
+      </p:sp>
+      <p:sp>
+        <p:nvSpPr>
+          <p:cNvPr id="30" name="Shape 28"/>
+          <p:cNvSpPr/>
+          <p:nvPr/>
+        </p:nvSpPr>
+        <p:spPr>
+          <a:xfrm>
+            <a:off x="548640" y="3867912"/>
+            <a:ext cx="1828800" cy="402336"/>
+          </a:xfrm>
+          <a:prstGeom prst="roundRect">
+            <a:avLst>
+              <a:gd name="adj" fmla="val 22727"/>
+            </a:avLst>
+          </a:prstGeom>
+          <a:solidFill>
+            <a:srgbClr val="FEE2E2"/>
+          </a:solidFill>
+          <a:ln w="12700">
+            <a:solidFill>
+              <a:srgbClr val="FEE2E2"/>
+            </a:solidFill>
+            <a:prstDash val="solid"/>
+          </a:ln>
+        </p:spPr>
+        <p:txBody>
+          <a:bodyPr/>
+          <a:lstStyle/>
+          <a:p>
+            <a:endParaRPr lang="en-US"/>
+          </a:p>
+        </p:txBody>
+      </p:sp>
+      <p:sp>
+        <p:nvSpPr>
+          <p:cNvPr id="31" name="Shape 29"/>
+          <p:cNvSpPr/>
+          <p:nvPr/>
+        </p:nvSpPr>
+        <p:spPr>
+          <a:xfrm>
+            <a:off x="685800" y="4027932"/>
+            <a:ext cx="82296" cy="82296"/>
+          </a:xfrm>
+          <a:prstGeom prst="ellipse">
+            <a:avLst/>
+          </a:prstGeom>
+          <a:solidFill>
+            <a:srgbClr val="DC2626"/>
+          </a:solidFill>
+          <a:ln w="12700">
+            <a:solidFill>
+              <a:srgbClr val="DC2626"/>
+            </a:solidFill>
+            <a:prstDash val="solid"/>
+          </a:ln>
+        </p:spPr>
+        <p:txBody>
+          <a:bodyPr/>
+          <a:lstStyle/>
+          <a:p>
+            <a:endParaRPr lang="en-US"/>
+          </a:p>
+        </p:txBody>
+      </p:sp>
+      <p:sp>
+        <p:nvSpPr>
+          <p:cNvPr id="32" name="Text 30"/>
+          <p:cNvSpPr/>
+          <p:nvPr/>
+        </p:nvSpPr>
+        <p:spPr>
+          <a:xfrm>
+            <a:off x="822960" y="3867912"/>
+            <a:ext cx="1536192" cy="402336"/>
+          </a:xfrm>
+          <a:prstGeom prst="rect">
+            <a:avLst/>
+          </a:prstGeom>
+          <a:noFill/>
+          <a:ln/>
+        </p:spPr>
+        <p:txBody>
+          <a:bodyPr wrap="square" lIns="0" tIns="0" rIns="0" bIns="0" rtlCol="0" anchor="ctr"/>
+          <a:lstStyle/>
+          <a:p>
+            <a:pPr marL="0" indent="0">
+              <a:buNone/>
+            </a:pPr>
+            <a:r>
+              <a:rPr lang="en-US" sz="1050" dirty="0">
+                <a:solidFill>
+                  <a:srgbClr val="1E293B"/>
+                </a:solidFill>
+                <a:latin typeface="Calibri" pitchFamily="34" charset="0"/>
+                <a:ea typeface="Calibri" pitchFamily="34" charset="-122"/>
+                <a:cs typeface="Calibri" pitchFamily="34" charset="-120"/>
+              </a:rPr>
+              <a:t>Distributed Monolith</a:t>
+            </a:r>
+            <a:endParaRPr lang="en-US" sz="1050" dirty="0"/>
+          </a:p>
+        </p:txBody>
+      </p:sp>
+      <p:sp>
+        <p:nvSpPr>
+          <p:cNvPr id="33" name="Shape 31"/>
+          <p:cNvSpPr/>
+          <p:nvPr/>
+        </p:nvSpPr>
+        <p:spPr>
+          <a:xfrm>
+            <a:off x="2514600" y="3867912"/>
+            <a:ext cx="2057400" cy="402336"/>
+          </a:xfrm>
+          <a:prstGeom prst="roundRect">
+            <a:avLst>
+              <a:gd name="adj" fmla="val 22727"/>
+            </a:avLst>
+          </a:prstGeom>
+          <a:solidFill>
+            <a:srgbClr val="DBEAFE"/>
+          </a:solidFill>
+          <a:ln w="12700">
+            <a:solidFill>
+              <a:srgbClr val="DBEAFE"/>
+            </a:solidFill>
+            <a:prstDash val="solid"/>
+          </a:ln>
+        </p:spPr>
+        <p:txBody>
+          <a:bodyPr/>
+          <a:lstStyle/>
+          <a:p>
+            <a:endParaRPr lang="en-US"/>
+          </a:p>
+        </p:txBody>
+      </p:sp>
+      <p:sp>
+        <p:nvSpPr>
+          <p:cNvPr id="34" name="Shape 32"/>
+          <p:cNvSpPr/>
+          <p:nvPr/>
+        </p:nvSpPr>
+        <p:spPr>
+          <a:xfrm>
+            <a:off x="2651760" y="4027932"/>
+            <a:ext cx="82296" cy="82296"/>
+          </a:xfrm>
+          <a:prstGeom prst="ellipse">
+            <a:avLst/>
+          </a:prstGeom>
+          <a:solidFill>
+            <a:srgbClr val="1C4E80"/>
+          </a:solidFill>
+          <a:ln w="12700">
+            <a:solidFill>
+              <a:srgbClr val="1C4E80"/>
+            </a:solidFill>
+            <a:prstDash val="solid"/>
+          </a:ln>
+        </p:spPr>
+        <p:txBody>
+          <a:bodyPr/>
+          <a:lstStyle/>
+          <a:p>
+            <a:endParaRPr lang="en-US"/>
+          </a:p>
+        </p:txBody>
+      </p:sp>
+      <p:sp>
+        <p:nvSpPr>
+          <p:cNvPr id="35" name="Text 33"/>
+          <p:cNvSpPr/>
+          <p:nvPr/>
+        </p:nvSpPr>
+        <p:spPr>
+          <a:xfrm>
+            <a:off x="2788920" y="3867912"/>
+            <a:ext cx="1764792" cy="402336"/>
+          </a:xfrm>
+          <a:prstGeom prst="rect">
+            <a:avLst/>
+          </a:prstGeom>
+          <a:noFill/>
+          <a:ln/>
+        </p:spPr>
+        <p:txBody>
+          <a:bodyPr wrap="square" lIns="0" tIns="0" rIns="0" bIns="0" rtlCol="0" anchor="ctr"/>
+          <a:lstStyle/>
+          <a:p>
+            <a:pPr marL="0" indent="0">
+              <a:buNone/>
+            </a:pPr>
+            <a:r>
+              <a:rPr lang="en-US" sz="1050" dirty="0">
+                <a:solidFill>
+                  <a:srgbClr val="1E293B"/>
+                </a:solidFill>
+                <a:latin typeface="Calibri" pitchFamily="34" charset="0"/>
+                <a:ea typeface="Calibri" pitchFamily="34" charset="-122"/>
+                <a:cs typeface="Calibri" pitchFamily="34" charset="-120"/>
+              </a:rPr>
+              <a:t>API Versioning Absence</a:t>
+            </a:r>
+            <a:endParaRPr lang="en-US" sz="1050" dirty="0"/>
+          </a:p>
+        </p:txBody>
+      </p:sp>
+      <p:sp>
+        <p:nvSpPr>
+          <p:cNvPr id="36" name="Shape 34"/>
+          <p:cNvSpPr/>
+          <p:nvPr/>
+        </p:nvSpPr>
+        <p:spPr>
+          <a:xfrm>
+            <a:off x="4709160" y="3867912"/>
+            <a:ext cx="1188720" cy="402336"/>
+          </a:xfrm>
+          <a:prstGeom prst="roundRect">
+            <a:avLst>
+              <a:gd name="adj" fmla="val 22727"/>
+            </a:avLst>
+          </a:prstGeom>
+          <a:solidFill>
+            <a:srgbClr val="FEF3C7"/>
+          </a:solidFill>
+          <a:ln w="12700">
+            <a:solidFill>
+              <a:srgbClr val="FEF3C7"/>
+            </a:solidFill>
+            <a:prstDash val="solid"/>
+          </a:ln>
+        </p:spPr>
+        <p:txBody>
+          <a:bodyPr/>
+          <a:lstStyle/>
+          <a:p>
+            <a:endParaRPr lang="en-US"/>
+          </a:p>
+        </p:txBody>
+      </p:sp>
+      <p:sp>
+        <p:nvSpPr>
+          <p:cNvPr id="37" name="Shape 35"/>
+          <p:cNvSpPr/>
+          <p:nvPr/>
+        </p:nvSpPr>
+        <p:spPr>
+          <a:xfrm>
+            <a:off x="4846320" y="4027932"/>
+            <a:ext cx="82296" cy="82296"/>
+          </a:xfrm>
+          <a:prstGeom prst="ellipse">
+            <a:avLst/>
+          </a:prstGeom>
+          <a:solidFill>
+            <a:srgbClr val="D97706"/>
+          </a:solidFill>
+          <a:ln w="12700">
+            <a:solidFill>
+              <a:srgbClr val="D97706"/>
+            </a:solidFill>
+            <a:prstDash val="solid"/>
+          </a:ln>
+        </p:spPr>
+        <p:txBody>
+          <a:bodyPr/>
+          <a:lstStyle/>
+          <a:p>
+            <a:endParaRPr lang="en-US"/>
+          </a:p>
+        </p:txBody>
+      </p:sp>
+      <p:sp>
+        <p:nvSpPr>
+          <p:cNvPr id="38" name="Text 36"/>
+          <p:cNvSpPr/>
+          <p:nvPr/>
+        </p:nvSpPr>
+        <p:spPr>
+          <a:xfrm>
+            <a:off x="4983480" y="3867912"/>
+            <a:ext cx="896112" cy="402336"/>
+          </a:xfrm>
+          <a:prstGeom prst="rect">
+            <a:avLst/>
+          </a:prstGeom>
+          <a:noFill/>
+          <a:ln/>
+        </p:spPr>
+        <p:txBody>
+          <a:bodyPr wrap="square" lIns="0" tIns="0" rIns="0" bIns="0" rtlCol="0" anchor="ctr"/>
+          <a:lstStyle/>
+          <a:p>
+            <a:pPr marL="0" indent="0">
+              <a:buNone/>
+            </a:pPr>
+            <a:r>
+              <a:rPr lang="en-US" sz="1050" dirty="0">
+                <a:solidFill>
+                  <a:srgbClr val="1E293B"/>
+                </a:solidFill>
+                <a:latin typeface="Calibri" pitchFamily="34" charset="0"/>
+                <a:ea typeface="Calibri" pitchFamily="34" charset="-122"/>
+                <a:cs typeface="Calibri" pitchFamily="34" charset="-120"/>
+              </a:rPr>
+              <a:t>Wrong Cuts</a:t>
+            </a:r>
+            <a:endParaRPr lang="en-US" sz="1050" dirty="0"/>
+          </a:p>
+        </p:txBody>
+      </p:sp>
+      <p:sp>
+        <p:nvSpPr>
+          <p:cNvPr id="39" name="Shape 37"/>
+          <p:cNvSpPr/>
+          <p:nvPr/>
+        </p:nvSpPr>
+        <p:spPr>
+          <a:xfrm>
+            <a:off x="548640" y="4434840"/>
+            <a:ext cx="457200" cy="36576"/>
           </a:xfrm>
           <a:prstGeom prst="rect">
             <a:avLst/>
@@ -6954,189 +8094,40 @@
             <a:prstDash val="solid"/>
           </a:ln>
         </p:spPr>
-      </p:sp>
-      <p:sp>
-        <p:nvSpPr>
-          <p:cNvPr id="13" name="Text 11"/>
-          <p:cNvSpPr/>
-          <p:nvPr/>
-        </p:nvSpPr>
-        <p:spPr>
-          <a:xfrm>
-            <a:off x="713232" y="2816352"/>
-            <a:ext cx="3383280" cy="219456"/>
-          </a:xfrm>
-          <a:prstGeom prst="rect">
-            <a:avLst/>
-          </a:prstGeom>
-          <a:noFill/>
-          <a:ln/>
-        </p:spPr>
-        <p:txBody>
-          <a:bodyPr wrap="square" lIns="0" tIns="0" rIns="0" bIns="0" rtlCol="0" anchor="ctr"/>
-          <a:lstStyle/>
-          <a:p>
-            <a:pPr indent="0" marL="0">
-              <a:buNone/>
-            </a:pPr>
-            <a:r>
-              <a:rPr lang="en-US" sz="900" b="1" spc="200" kern="0" dirty="0">
-                <a:solidFill>
-                  <a:srgbClr val="64748B"/>
-                </a:solidFill>
-                <a:latin typeface="Calibri" pitchFamily="34" charset="0"/>
-                <a:ea typeface="Calibri" pitchFamily="34" charset="-122"/>
-                <a:cs typeface="Calibri" pitchFamily="34" charset="-120"/>
-              </a:rPr>
-              <a:t>ARCHITECTURAL LEVEL</a:t>
-            </a:r>
-            <a:endParaRPr lang="en-US" sz="900" dirty="0"/>
-          </a:p>
-        </p:txBody>
-      </p:sp>
-      <p:sp>
-        <p:nvSpPr>
-          <p:cNvPr id="14" name="Text 12"/>
-          <p:cNvSpPr/>
-          <p:nvPr/>
-        </p:nvSpPr>
-        <p:spPr>
-          <a:xfrm>
-            <a:off x="713232" y="3044952"/>
-            <a:ext cx="3383280" cy="274320"/>
-          </a:xfrm>
-          <a:prstGeom prst="rect">
-            <a:avLst/>
-          </a:prstGeom>
-          <a:noFill/>
-          <a:ln/>
-        </p:spPr>
-        <p:txBody>
-          <a:bodyPr wrap="square" lIns="0" tIns="0" rIns="0" bIns="0" rtlCol="0" anchor="ctr"/>
-          <a:lstStyle/>
-          <a:p>
-            <a:pPr indent="0" marL="0">
-              <a:buNone/>
-            </a:pPr>
-            <a:r>
-              <a:rPr lang="en-US" sz="1250" b="1" dirty="0">
-                <a:solidFill>
-                  <a:srgbClr val="1E293B"/>
-                </a:solidFill>
-                <a:latin typeface="Calibri" pitchFamily="34" charset="0"/>
-                <a:ea typeface="Calibri" pitchFamily="34" charset="-122"/>
-                <a:cs typeface="Calibri" pitchFamily="34" charset="-120"/>
-              </a:rPr>
-              <a:t>God Service (per microservice)</a:t>
-            </a:r>
-            <a:endParaRPr lang="en-US" sz="1250" dirty="0"/>
-          </a:p>
-        </p:txBody>
-      </p:sp>
-      <p:sp>
-        <p:nvSpPr>
-          <p:cNvPr id="15" name="Text 13"/>
-          <p:cNvSpPr/>
-          <p:nvPr/>
-        </p:nvSpPr>
-        <p:spPr>
-          <a:xfrm>
-            <a:off x="713232" y="3319272"/>
-            <a:ext cx="3383280" cy="274320"/>
-          </a:xfrm>
-          <a:prstGeom prst="rect">
-            <a:avLst/>
-          </a:prstGeom>
-          <a:noFill/>
-          <a:ln/>
-        </p:spPr>
-        <p:txBody>
-          <a:bodyPr wrap="square" lIns="0" tIns="0" rIns="0" bIns="0" rtlCol="0" anchor="ctr"/>
-          <a:lstStyle/>
-          <a:p>
-            <a:pPr indent="0" marL="0">
-              <a:buNone/>
-            </a:pPr>
-            <a:r>
-              <a:rPr lang="en-US" sz="1000" i="1" dirty="0">
-                <a:solidFill>
-                  <a:srgbClr val="64748B"/>
-                </a:solidFill>
-                <a:latin typeface="Calibri" pitchFamily="34" charset="0"/>
-                <a:ea typeface="Calibri" pitchFamily="34" charset="-122"/>
-                <a:cs typeface="Calibri" pitchFamily="34" charset="-120"/>
-              </a:rPr>
-              <a:t>Flag service if it contains at least one God Class</a:t>
-            </a:r>
-            <a:endParaRPr lang="en-US" sz="1000" dirty="0"/>
-          </a:p>
-        </p:txBody>
-      </p:sp>
-      <p:sp>
-        <p:nvSpPr>
-          <p:cNvPr id="16" name="Text 14"/>
-          <p:cNvSpPr/>
-          <p:nvPr/>
-        </p:nvSpPr>
-        <p:spPr>
-          <a:xfrm>
-            <a:off x="548640" y="3886200"/>
-            <a:ext cx="3657600" cy="320040"/>
-          </a:xfrm>
-          <a:prstGeom prst="rect">
-            <a:avLst/>
-          </a:prstGeom>
-          <a:noFill/>
-          <a:ln/>
-        </p:spPr>
-        <p:txBody>
-          <a:bodyPr wrap="square" lIns="0" tIns="0" rIns="0" bIns="0" rtlCol="0" anchor="ctr"/>
-          <a:lstStyle/>
-          <a:p>
-            <a:pPr indent="0" marL="0">
-              <a:buNone/>
-            </a:pPr>
-            <a:r>
-              <a:rPr lang="en-US" sz="1050" i="1" dirty="0">
-                <a:solidFill>
-                  <a:srgbClr val="64748B"/>
-                </a:solidFill>
-                <a:latin typeface="Calibri" pitchFamily="34" charset="0"/>
-                <a:ea typeface="Calibri" pitchFamily="34" charset="-122"/>
-                <a:cs typeface="Calibri" pitchFamily="34" charset="-120"/>
-              </a:rPr>
-              <a:t>Code-level evidence → architectural-level finding</a:t>
-            </a:r>
-            <a:endParaRPr lang="en-US" sz="1050" dirty="0"/>
-          </a:p>
-        </p:txBody>
-      </p:sp>
-      <p:sp>
-        <p:nvSpPr>
-          <p:cNvPr id="17" name="Text 15"/>
-          <p:cNvSpPr/>
-          <p:nvPr/>
-        </p:nvSpPr>
-        <p:spPr>
-          <a:xfrm>
-            <a:off x="4754880" y="987552"/>
-            <a:ext cx="3840480" cy="292608"/>
-          </a:xfrm>
-          <a:prstGeom prst="rect">
-            <a:avLst/>
-          </a:prstGeom>
-          <a:noFill/>
-          <a:ln/>
-        </p:spPr>
-        <p:txBody>
-          <a:bodyPr wrap="square" lIns="0" tIns="0" rIns="0" bIns="0" rtlCol="0" anchor="ctr"/>
-          <a:lstStyle/>
-          <a:p>
-            <a:pPr indent="0" marL="0">
-              <a:buNone/>
-            </a:pPr>
-            <a:r>
-              <a:rPr lang="en-US" sz="1300" b="1" dirty="0">
+        <p:txBody>
+          <a:bodyPr/>
+          <a:lstStyle/>
+          <a:p>
+            <a:endParaRPr lang="en-US"/>
+          </a:p>
+        </p:txBody>
+      </p:sp>
+      <p:sp>
+        <p:nvSpPr>
+          <p:cNvPr id="40" name="Text 38"/>
+          <p:cNvSpPr/>
+          <p:nvPr/>
+        </p:nvSpPr>
+        <p:spPr>
+          <a:xfrm>
+            <a:off x="548640" y="4526280"/>
+            <a:ext cx="8046720" cy="292608"/>
+          </a:xfrm>
+          <a:prstGeom prst="rect">
+            <a:avLst/>
+          </a:prstGeom>
+          <a:noFill/>
+          <a:ln/>
+        </p:spPr>
+        <p:txBody>
+          <a:bodyPr wrap="square" lIns="0" tIns="0" rIns="0" bIns="0" rtlCol="0" anchor="ctr"/>
+          <a:lstStyle/>
+          <a:p>
+            <a:pPr marL="0" indent="0">
+              <a:buNone/>
+            </a:pPr>
+            <a:r>
+              <a:rPr lang="en-US" sz="1150" dirty="0">
                 <a:solidFill>
                   <a:srgbClr val="0F2A44"/>
                 </a:solidFill>
@@ -7144,258 +8135,7 @@
                 <a:ea typeface="Calibri" pitchFamily="34" charset="-122"/>
                 <a:cs typeface="Calibri" pitchFamily="34" charset="-120"/>
               </a:rPr>
-              <a:t>Six structural metrics</a:t>
-            </a:r>
-            <a:endParaRPr lang="en-US" sz="1300" dirty="0"/>
-          </a:p>
-        </p:txBody>
-      </p:sp>
-      <p:sp>
-        <p:nvSpPr>
-          <p:cNvPr id="18" name="Text 16"/>
-          <p:cNvSpPr/>
-          <p:nvPr/>
-        </p:nvSpPr>
-        <p:spPr>
-          <a:xfrm>
-            <a:off x="4754880" y="1316736"/>
-            <a:ext cx="3840480" cy="475488"/>
-          </a:xfrm>
-          <a:prstGeom prst="rect">
-            <a:avLst/>
-          </a:prstGeom>
-          <a:noFill/>
-          <a:ln/>
-        </p:spPr>
-        <p:txBody>
-          <a:bodyPr wrap="square" lIns="0" tIns="0" rIns="0" bIns="0" rtlCol="0" anchor="ctr"/>
-          <a:lstStyle/>
-          <a:p>
-            <a:pPr indent="0" marL="0">
-              <a:buNone/>
-            </a:pPr>
-            <a:r>
-              <a:rPr lang="en-US" sz="1100" dirty="0">
-                <a:solidFill>
-                  <a:srgbClr val="1E293B"/>
-                </a:solidFill>
-                <a:latin typeface="Calibri" pitchFamily="34" charset="0"/>
-                <a:ea typeface="Calibri" pitchFamily="34" charset="-122"/>
-                <a:cs typeface="Calibri" pitchFamily="34" charset="-120"/>
-              </a:rPr>
-              <a:t>Each non-data class is evaluated against six thresholds computed from its AST:</a:t>
-            </a:r>
-            <a:endParaRPr lang="en-US" sz="1100" dirty="0"/>
-          </a:p>
-        </p:txBody>
-      </p:sp>
-      <p:sp>
-        <p:nvSpPr>
-          <p:cNvPr id="19" name="Text 17"/>
-          <p:cNvSpPr/>
-          <p:nvPr/>
-        </p:nvSpPr>
-        <p:spPr>
-          <a:xfrm>
-            <a:off x="4846320" y="1828800"/>
-            <a:ext cx="3749040" cy="1783080"/>
-          </a:xfrm>
-          <a:prstGeom prst="rect">
-            <a:avLst/>
-          </a:prstGeom>
-          <a:noFill/>
-          <a:ln/>
-        </p:spPr>
-        <p:txBody>
-          <a:bodyPr wrap="square" lIns="0" tIns="0" rIns="0" bIns="0" rtlCol="0" anchor="ctr"/>
-          <a:lstStyle/>
-          <a:p>
-            <a:pPr marL="342900" indent="-342900">
-              <a:spcAft>
-                <a:spcPts val="300"/>
-              </a:spcAft>
-              <a:buSzPct val="100000"/>
-              <a:buChar char="•"/>
-            </a:pPr>
-            <a:r>
-              <a:rPr lang="en-US" sz="1100" dirty="0">
-                <a:solidFill>
-                  <a:srgbClr val="1E293B"/>
-                </a:solidFill>
-                <a:latin typeface="Calibri" pitchFamily="34" charset="0"/>
-                <a:ea typeface="Calibri" pitchFamily="34" charset="-122"/>
-                <a:cs typeface="Calibri" pitchFamily="34" charset="-120"/>
-              </a:rPr>
-              <a:t>≥ 25 fields</a:t>
-            </a:r>
-            <a:endParaRPr lang="en-US" sz="1100" dirty="0"/>
-          </a:p>
-          <a:p>
-            <a:pPr marL="342900" indent="-342900">
-              <a:spcAft>
-                <a:spcPts val="300"/>
-              </a:spcAft>
-              <a:buSzPct val="100000"/>
-              <a:buChar char="•"/>
-            </a:pPr>
-            <a:r>
-              <a:rPr lang="en-US" sz="1100" dirty="0">
-                <a:solidFill>
-                  <a:srgbClr val="1E293B"/>
-                </a:solidFill>
-                <a:latin typeface="Calibri" pitchFamily="34" charset="0"/>
-                <a:ea typeface="Calibri" pitchFamily="34" charset="-122"/>
-                <a:cs typeface="Calibri" pitchFamily="34" charset="-120"/>
-              </a:rPr>
-              <a:t>≥ 30 public methods</a:t>
-            </a:r>
-            <a:endParaRPr lang="en-US" sz="1100" dirty="0"/>
-          </a:p>
-          <a:p>
-            <a:pPr marL="342900" indent="-342900">
-              <a:spcAft>
-                <a:spcPts val="300"/>
-              </a:spcAft>
-              <a:buSzPct val="100000"/>
-              <a:buChar char="•"/>
-            </a:pPr>
-            <a:r>
-              <a:rPr lang="en-US" sz="1100" dirty="0">
-                <a:solidFill>
-                  <a:srgbClr val="1E293B"/>
-                </a:solidFill>
-                <a:latin typeface="Calibri" pitchFamily="34" charset="0"/>
-                <a:ea typeface="Calibri" pitchFamily="34" charset="-122"/>
-                <a:cs typeface="Calibri" pitchFamily="34" charset="-120"/>
-              </a:rPr>
-              <a:t>≥ 1000 lines of code</a:t>
-            </a:r>
-            <a:endParaRPr lang="en-US" sz="1100" dirty="0"/>
-          </a:p>
-          <a:p>
-            <a:pPr marL="342900" indent="-342900">
-              <a:spcAft>
-                <a:spcPts val="300"/>
-              </a:spcAft>
-              <a:buSzPct val="100000"/>
-              <a:buChar char="•"/>
-            </a:pPr>
-            <a:r>
-              <a:rPr lang="en-US" sz="1100" dirty="0">
-                <a:solidFill>
-                  <a:srgbClr val="1E293B"/>
-                </a:solidFill>
-                <a:latin typeface="Calibri" pitchFamily="34" charset="0"/>
-                <a:ea typeface="Calibri" pitchFamily="34" charset="-122"/>
-                <a:cs typeface="Calibri" pitchFamily="34" charset="-120"/>
-              </a:rPr>
-              <a:t>≥ 20 distinct import domains</a:t>
-            </a:r>
-            <a:endParaRPr lang="en-US" sz="1100" dirty="0"/>
-          </a:p>
-          <a:p>
-            <a:pPr marL="342900" indent="-342900">
-              <a:spcAft>
-                <a:spcPts val="300"/>
-              </a:spcAft>
-              <a:buSzPct val="100000"/>
-              <a:buChar char="•"/>
-            </a:pPr>
-            <a:r>
-              <a:rPr lang="en-US" sz="1100" dirty="0">
-                <a:solidFill>
-                  <a:srgbClr val="1E293B"/>
-                </a:solidFill>
-                <a:latin typeface="Calibri" pitchFamily="34" charset="0"/>
-                <a:ea typeface="Calibri" pitchFamily="34" charset="-122"/>
-                <a:cs typeface="Calibri" pitchFamily="34" charset="-120"/>
-              </a:rPr>
-              <a:t>≥ 12 constructor parameters</a:t>
-            </a:r>
-            <a:endParaRPr lang="en-US" sz="1100" dirty="0"/>
-          </a:p>
-          <a:p>
-            <a:pPr marL="342900" indent="-342900">
-              <a:spcAft>
-                <a:spcPts val="300"/>
-              </a:spcAft>
-              <a:buSzPct val="100000"/>
-              <a:buChar char="•"/>
-            </a:pPr>
-            <a:r>
-              <a:rPr lang="en-US" sz="1100" dirty="0">
-                <a:solidFill>
-                  <a:srgbClr val="1E293B"/>
-                </a:solidFill>
-                <a:latin typeface="Calibri" pitchFamily="34" charset="0"/>
-                <a:ea typeface="Calibri" pitchFamily="34" charset="-122"/>
-                <a:cs typeface="Calibri" pitchFamily="34" charset="-120"/>
-              </a:rPr>
-              <a:t>TCC &lt; 0.5  (Bieman &amp; Kang, 1995)</a:t>
-            </a:r>
-            <a:endParaRPr lang="en-US" sz="1100" dirty="0"/>
-          </a:p>
-        </p:txBody>
-      </p:sp>
-      <p:sp>
-        <p:nvSpPr>
-          <p:cNvPr id="20" name="Shape 18"/>
-          <p:cNvSpPr/>
-          <p:nvPr/>
-        </p:nvSpPr>
-        <p:spPr>
-          <a:xfrm>
-            <a:off x="4754880" y="3767328"/>
-            <a:ext cx="457200" cy="36576"/>
-          </a:xfrm>
-          <a:prstGeom prst="rect">
-            <a:avLst/>
-          </a:prstGeom>
-          <a:solidFill>
-            <a:srgbClr val="0D9488"/>
-          </a:solidFill>
-          <a:ln w="12700">
-            <a:solidFill>
-              <a:srgbClr val="0D9488"/>
-            </a:solidFill>
-            <a:prstDash val="solid"/>
-          </a:ln>
-        </p:spPr>
-      </p:sp>
-      <p:sp>
-        <p:nvSpPr>
-          <p:cNvPr id="21" name="Text 19"/>
-          <p:cNvSpPr/>
-          <p:nvPr/>
-        </p:nvSpPr>
-        <p:spPr>
-          <a:xfrm>
-            <a:off x="4754880" y="3886200"/>
-            <a:ext cx="3840480" cy="457200"/>
-          </a:xfrm>
-          <a:prstGeom prst="rect">
-            <a:avLst/>
-          </a:prstGeom>
-          <a:noFill/>
-          <a:ln/>
-        </p:spPr>
-        <p:txBody>
-          <a:bodyPr wrap="square" lIns="0" tIns="0" rIns="0" bIns="0" rtlCol="0" anchor="ctr"/>
-          <a:lstStyle/>
-          <a:p>
-            <a:pPr indent="0" marL="0">
-              <a:buNone/>
-            </a:pPr>
-            <a:r>
-              <a:rPr lang="en-US" sz="1150" b="1" dirty="0">
-                <a:solidFill>
-                  <a:srgbClr val="0F2A44"/>
-                </a:solidFill>
-                <a:latin typeface="Calibri" pitchFamily="34" charset="0"/>
-                <a:ea typeface="Calibri" pitchFamily="34" charset="-122"/>
-                <a:cs typeface="Calibri" pitchFamily="34" charset="-120"/>
-              </a:rPr>
-              <a:t>Flag class as God Class if ≥ 3 of 6 thresholds are exceeded</a:t>
+              <a:t>All detectors are pluggable Strategy components with configurable thresholds</a:t>
             </a:r>
             <a:endParaRPr lang="en-US" sz="1150" dirty="0"/>
           </a:p>
@@ -7403,7 +8143,7 @@
       </p:sp>
       <p:sp>
         <p:nvSpPr>
-          <p:cNvPr id="22" name="Text 20"/>
+          <p:cNvPr id="41" name="Text 39"/>
           <p:cNvSpPr/>
           <p:nvPr/>
         </p:nvSpPr>
@@ -7422,7 +8162,7 @@
           <a:bodyPr wrap="square" lIns="0" tIns="0" rIns="0" bIns="0" rtlCol="0" anchor="ctr"/>
           <a:lstStyle/>
           <a:p>
-            <a:pPr algn="r" indent="0" marL="0">
+            <a:pPr marL="0" indent="0" algn="r">
               <a:buNone/>
             </a:pPr>
             <a:r>
@@ -7434,7 +8174,7 @@
                 <a:ea typeface="Calibri" pitchFamily="34" charset="-122"/>
                 <a:cs typeface="Calibri" pitchFamily="34" charset="-120"/>
               </a:rPr>
-              <a:t>5 / 12</a:t>
+              <a:t>6 / 12</a:t>
             </a:r>
             <a:endParaRPr lang="en-US" sz="900" dirty="0"/>
           </a:p>
@@ -7450,12 +8190,13 @@
 
 <file path=ppt/slides/slide6.xml><?xml version="1.0" encoding="utf-8"?>
 <p:sld xmlns:a="http://schemas.openxmlformats.org/drawingml/2006/main" xmlns:r="http://schemas.openxmlformats.org/officeDocument/2006/relationships" xmlns:p="http://schemas.openxmlformats.org/presentationml/2006/main">
-  <p:cSld name="Slide 6">
+  <p:cSld name="Slide 5">
     <p:bg>
       <p:bgPr>
         <a:solidFill>
           <a:srgbClr val="FFFFFF"/>
         </a:solidFill>
+        <a:effectLst/>
       </p:bgPr>
     </p:bg>
     <p:spTree>
@@ -7493,7 +8234,7 @@
           <a:bodyPr wrap="square" lIns="0" tIns="0" rIns="0" bIns="0" rtlCol="0" anchor="ctr"/>
           <a:lstStyle/>
           <a:p>
-            <a:pPr indent="0" marL="0">
+            <a:pPr marL="0" indent="0">
               <a:buNone/>
             </a:pPr>
             <a:r>
@@ -7505,7 +8246,7 @@
                 <a:ea typeface="Calibri" pitchFamily="34" charset="-122"/>
                 <a:cs typeface="Calibri" pitchFamily="34" charset="-120"/>
               </a:rPr>
-              <a:t>Ten detectors across four dimensions</a:t>
+              <a:t>Spotlight: God Service detection</a:t>
             </a:r>
             <a:endParaRPr lang="en-US" sz="2500" dirty="0"/>
           </a:p>
@@ -7535,6 +8276,13 @@
             <a:prstDash val="solid"/>
           </a:ln>
         </p:spPr>
+        <p:txBody>
+          <a:bodyPr/>
+          <a:lstStyle/>
+          <a:p>
+            <a:endParaRPr lang="en-US"/>
+          </a:p>
+        </p:txBody>
       </p:sp>
       <p:sp>
         <p:nvSpPr>
@@ -7544,197 +8292,139 @@
         </p:nvSpPr>
         <p:spPr>
           <a:xfrm>
-            <a:off x="548640" y="969264"/>
-            <a:ext cx="8046720" cy="274320"/>
-          </a:xfrm>
-          <a:prstGeom prst="rect">
-            <a:avLst/>
-          </a:prstGeom>
-          <a:noFill/>
-          <a:ln/>
-        </p:spPr>
-        <p:txBody>
-          <a:bodyPr wrap="square" lIns="0" tIns="0" rIns="0" bIns="0" rtlCol="0" anchor="ctr"/>
-          <a:lstStyle/>
-          <a:p>
-            <a:pPr indent="0" marL="0">
-              <a:buNone/>
-            </a:pPr>
-            <a:r>
-              <a:rPr lang="en-US" sz="1000" dirty="0">
-                <a:solidFill>
-                  <a:srgbClr val="DC2626"/>
-                </a:solidFill>
-                <a:latin typeface="Calibri" pitchFamily="34" charset="0"/>
-                <a:ea typeface="Calibri" pitchFamily="34" charset="-122"/>
-                <a:cs typeface="Calibri" pitchFamily="34" charset="-120"/>
-              </a:rPr>
-              <a:t>● </a:t>
-            </a:r>
-            <a:pPr indent="0" marL="0">
-              <a:buNone/>
-            </a:pPr>
-            <a:r>
-              <a:rPr lang="en-US" sz="1000" dirty="0">
-                <a:solidFill>
-                  <a:srgbClr val="64748B"/>
-                </a:solidFill>
-                <a:latin typeface="Calibri" pitchFamily="34" charset="0"/>
-                <a:ea typeface="Calibri" pitchFamily="34" charset="-122"/>
-                <a:cs typeface="Calibri" pitchFamily="34" charset="-120"/>
-              </a:rPr>
-              <a:t>critical (−8 pts)      </a:t>
-            </a:r>
-            <a:pPr indent="0" marL="0">
-              <a:buNone/>
-            </a:pPr>
-            <a:r>
-              <a:rPr lang="en-US" sz="1000" dirty="0">
-                <a:solidFill>
-                  <a:srgbClr val="D97706"/>
-                </a:solidFill>
-                <a:latin typeface="Calibri" pitchFamily="34" charset="0"/>
-                <a:ea typeface="Calibri" pitchFamily="34" charset="-122"/>
-                <a:cs typeface="Calibri" pitchFamily="34" charset="-120"/>
-              </a:rPr>
-              <a:t>● </a:t>
-            </a:r>
-            <a:pPr indent="0" marL="0">
-              <a:buNone/>
-            </a:pPr>
-            <a:r>
-              <a:rPr lang="en-US" sz="1000" dirty="0">
-                <a:solidFill>
-                  <a:srgbClr val="64748B"/>
-                </a:solidFill>
-                <a:latin typeface="Calibri" pitchFamily="34" charset="0"/>
-                <a:ea typeface="Calibri" pitchFamily="34" charset="-122"/>
-                <a:cs typeface="Calibri" pitchFamily="34" charset="-120"/>
-              </a:rPr>
-              <a:t>high (−5 pts)      </a:t>
-            </a:r>
-            <a:pPr indent="0" marL="0">
-              <a:buNone/>
-            </a:pPr>
-            <a:r>
-              <a:rPr lang="en-US" sz="1000" dirty="0">
-                <a:solidFill>
-                  <a:srgbClr val="1C4E80"/>
-                </a:solidFill>
-                <a:latin typeface="Calibri" pitchFamily="34" charset="0"/>
-                <a:ea typeface="Calibri" pitchFamily="34" charset="-122"/>
-                <a:cs typeface="Calibri" pitchFamily="34" charset="-120"/>
-              </a:rPr>
-              <a:t>● </a:t>
-            </a:r>
-            <a:pPr indent="0" marL="0">
-              <a:buNone/>
-            </a:pPr>
-            <a:r>
-              <a:rPr lang="en-US" sz="1000" dirty="0">
-                <a:solidFill>
-                  <a:srgbClr val="64748B"/>
-                </a:solidFill>
-                <a:latin typeface="Calibri" pitchFamily="34" charset="0"/>
-                <a:ea typeface="Calibri" pitchFamily="34" charset="-122"/>
-                <a:cs typeface="Calibri" pitchFamily="34" charset="-120"/>
-              </a:rPr>
-              <a:t>medium (−3 pts)</a:t>
-            </a:r>
-            <a:endParaRPr lang="en-US" sz="1000" dirty="0"/>
-          </a:p>
-        </p:txBody>
-      </p:sp>
-      <p:sp>
-        <p:nvSpPr>
-          <p:cNvPr id="5" name="Text 3"/>
+            <a:off x="548640" y="987552"/>
+            <a:ext cx="3657600" cy="292608"/>
+          </a:xfrm>
+          <a:prstGeom prst="rect">
+            <a:avLst/>
+          </a:prstGeom>
+          <a:noFill/>
+          <a:ln/>
+        </p:spPr>
+        <p:txBody>
+          <a:bodyPr wrap="square" lIns="0" tIns="0" rIns="0" bIns="0" rtlCol="0" anchor="ctr"/>
+          <a:lstStyle/>
+          <a:p>
+            <a:pPr marL="0" indent="0">
+              <a:buNone/>
+            </a:pPr>
+            <a:r>
+              <a:rPr lang="en-US" sz="1300" b="1" dirty="0">
+                <a:solidFill>
+                  <a:srgbClr val="0F2A44"/>
+                </a:solidFill>
+                <a:latin typeface="Calibri" pitchFamily="34" charset="0"/>
+                <a:ea typeface="Calibri" pitchFamily="34" charset="-122"/>
+                <a:cs typeface="Calibri" pitchFamily="34" charset="-120"/>
+              </a:rPr>
+              <a:t>Multi-level bridge in action</a:t>
+            </a:r>
+            <a:endParaRPr lang="en-US" sz="1300" dirty="0"/>
+          </a:p>
+        </p:txBody>
+      </p:sp>
+      <p:sp>
+        <p:nvSpPr>
+          <p:cNvPr id="5" name="Shape 3"/>
           <p:cNvSpPr/>
           <p:nvPr/>
         </p:nvSpPr>
         <p:spPr>
           <a:xfrm>
             <a:off x="548640" y="1371600"/>
-            <a:ext cx="4023360" cy="256032"/>
-          </a:xfrm>
-          <a:prstGeom prst="rect">
-            <a:avLst/>
-          </a:prstGeom>
-          <a:noFill/>
-          <a:ln/>
-        </p:spPr>
-        <p:txBody>
-          <a:bodyPr wrap="square" lIns="0" tIns="0" rIns="0" bIns="0" rtlCol="0" anchor="ctr"/>
-          <a:lstStyle/>
-          <a:p>
-            <a:pPr indent="0" marL="0">
-              <a:buNone/>
-            </a:pPr>
-            <a:r>
-              <a:rPr lang="en-US" sz="1050" b="1" spc="200" kern="0" dirty="0">
-                <a:solidFill>
-                  <a:srgbClr val="0F2A44"/>
-                </a:solidFill>
-                <a:latin typeface="Calibri" pitchFamily="34" charset="0"/>
-                <a:ea typeface="Calibri" pitchFamily="34" charset="-122"/>
-                <a:cs typeface="Calibri" pitchFamily="34" charset="-120"/>
-              </a:rPr>
-              <a:t>SERVICE DESIGN</a:t>
-            </a:r>
-            <a:endParaRPr lang="en-US" sz="1050" dirty="0"/>
-          </a:p>
-        </p:txBody>
-      </p:sp>
-      <p:sp>
-        <p:nvSpPr>
-          <p:cNvPr id="6" name="Shape 4"/>
-          <p:cNvSpPr/>
-          <p:nvPr/>
-        </p:nvSpPr>
-        <p:spPr>
-          <a:xfrm>
-            <a:off x="548640" y="1673352"/>
-            <a:ext cx="1325880" cy="402336"/>
-          </a:xfrm>
-          <a:prstGeom prst="roundRect">
-            <a:avLst>
-              <a:gd name="adj" fmla="val 22727"/>
-            </a:avLst>
+            <a:ext cx="3657600" cy="914400"/>
+          </a:xfrm>
+          <a:prstGeom prst="rect">
+            <a:avLst/>
           </a:prstGeom>
           <a:solidFill>
-            <a:srgbClr val="DBEAFE"/>
+            <a:srgbClr val="FFFFFF"/>
           </a:solidFill>
           <a:ln w="12700">
             <a:solidFill>
-              <a:srgbClr val="DBEAFE"/>
+              <a:srgbClr val="D8DEE6"/>
             </a:solidFill>
             <a:prstDash val="solid"/>
           </a:ln>
         </p:spPr>
-      </p:sp>
-      <p:sp>
-        <p:nvSpPr>
-          <p:cNvPr id="7" name="Shape 5"/>
-          <p:cNvSpPr/>
-          <p:nvPr/>
-        </p:nvSpPr>
-        <p:spPr>
-          <a:xfrm>
-            <a:off x="685800" y="1833372"/>
-            <a:ext cx="82296" cy="82296"/>
-          </a:xfrm>
-          <a:prstGeom prst="ellipse">
+        <p:txBody>
+          <a:bodyPr/>
+          <a:lstStyle/>
+          <a:p>
+            <a:endParaRPr lang="en-US"/>
+          </a:p>
+        </p:txBody>
+      </p:sp>
+      <p:sp>
+        <p:nvSpPr>
+          <p:cNvPr id="6" name="Shape 4"/>
+          <p:cNvSpPr/>
+          <p:nvPr/>
+        </p:nvSpPr>
+        <p:spPr>
+          <a:xfrm>
+            <a:off x="548640" y="1371600"/>
+            <a:ext cx="41148" cy="914400"/>
+          </a:xfrm>
+          <a:prstGeom prst="rect">
             <a:avLst/>
           </a:prstGeom>
           <a:solidFill>
-            <a:srgbClr val="1C4E80"/>
+            <a:srgbClr val="0F2A44"/>
           </a:solidFill>
           <a:ln w="12700">
             <a:solidFill>
-              <a:srgbClr val="1C4E80"/>
+              <a:srgbClr val="0F2A44"/>
             </a:solidFill>
             <a:prstDash val="solid"/>
           </a:ln>
         </p:spPr>
+        <p:txBody>
+          <a:bodyPr/>
+          <a:lstStyle/>
+          <a:p>
+            <a:endParaRPr lang="en-US"/>
+          </a:p>
+        </p:txBody>
+      </p:sp>
+      <p:sp>
+        <p:nvSpPr>
+          <p:cNvPr id="7" name="Text 5"/>
+          <p:cNvSpPr/>
+          <p:nvPr/>
+        </p:nvSpPr>
+        <p:spPr>
+          <a:xfrm>
+            <a:off x="713232" y="1463040"/>
+            <a:ext cx="3383280" cy="219456"/>
+          </a:xfrm>
+          <a:prstGeom prst="rect">
+            <a:avLst/>
+          </a:prstGeom>
+          <a:noFill/>
+          <a:ln/>
+        </p:spPr>
+        <p:txBody>
+          <a:bodyPr wrap="square" lIns="0" tIns="0" rIns="0" bIns="0" rtlCol="0" anchor="ctr"/>
+          <a:lstStyle/>
+          <a:p>
+            <a:pPr marL="0" indent="0">
+              <a:buNone/>
+            </a:pPr>
+            <a:r>
+              <a:rPr lang="en-US" sz="900" b="1" kern="0" spc="200" dirty="0">
+                <a:solidFill>
+                  <a:srgbClr val="64748B"/>
+                </a:solidFill>
+                <a:latin typeface="Calibri" pitchFamily="34" charset="0"/>
+                <a:ea typeface="Calibri" pitchFamily="34" charset="-122"/>
+                <a:cs typeface="Calibri" pitchFamily="34" charset="-120"/>
+              </a:rPr>
+              <a:t>CODE LEVEL</a:t>
+            </a:r>
+            <a:endParaRPr lang="en-US" sz="900" dirty="0"/>
+          </a:p>
+        </p:txBody>
       </p:sp>
       <p:sp>
         <p:nvSpPr>
@@ -7744,24 +8434,24 @@
         </p:nvSpPr>
         <p:spPr>
           <a:xfrm>
-            <a:off x="822960" y="1673352"/>
-            <a:ext cx="1033272" cy="402336"/>
-          </a:xfrm>
-          <a:prstGeom prst="rect">
-            <a:avLst/>
-          </a:prstGeom>
-          <a:noFill/>
-          <a:ln/>
-        </p:spPr>
-        <p:txBody>
-          <a:bodyPr wrap="square" lIns="0" tIns="0" rIns="0" bIns="0" rtlCol="0" anchor="ctr"/>
-          <a:lstStyle/>
-          <a:p>
-            <a:pPr indent="0" marL="0">
-              <a:buNone/>
-            </a:pPr>
-            <a:r>
-              <a:rPr lang="en-US" sz="1050" dirty="0">
+            <a:off x="713232" y="1691640"/>
+            <a:ext cx="3383280" cy="274320"/>
+          </a:xfrm>
+          <a:prstGeom prst="rect">
+            <a:avLst/>
+          </a:prstGeom>
+          <a:noFill/>
+          <a:ln/>
+        </p:spPr>
+        <p:txBody>
+          <a:bodyPr wrap="square" lIns="0" tIns="0" rIns="0" bIns="0" rtlCol="0" anchor="ctr"/>
+          <a:lstStyle/>
+          <a:p>
+            <a:pPr marL="0" indent="0">
+              <a:buNone/>
+            </a:pPr>
+            <a:r>
+              <a:rPr lang="en-US" sz="1250" b="1" dirty="0">
                 <a:solidFill>
                   <a:srgbClr val="1E293B"/>
                 </a:solidFill>
@@ -7769,958 +8459,124 @@
                 <a:ea typeface="Calibri" pitchFamily="34" charset="-122"/>
                 <a:cs typeface="Calibri" pitchFamily="34" charset="-120"/>
               </a:rPr>
-              <a:t>Nano Service</a:t>
-            </a:r>
-            <a:endParaRPr lang="en-US" sz="1050" dirty="0"/>
-          </a:p>
-        </p:txBody>
-      </p:sp>
-      <p:sp>
-        <p:nvSpPr>
-          <p:cNvPr id="9" name="Shape 7"/>
-          <p:cNvSpPr/>
-          <p:nvPr/>
-        </p:nvSpPr>
-        <p:spPr>
-          <a:xfrm>
-            <a:off x="2011680" y="1673352"/>
-            <a:ext cx="1280160" cy="402336"/>
-          </a:xfrm>
-          <a:prstGeom prst="roundRect">
-            <a:avLst>
-              <a:gd name="adj" fmla="val 22727"/>
-            </a:avLst>
+              <a:t>Structural class metrics (per class)</a:t>
+            </a:r>
+            <a:endParaRPr lang="en-US" sz="1250" dirty="0"/>
+          </a:p>
+        </p:txBody>
+      </p:sp>
+      <p:sp>
+        <p:nvSpPr>
+          <p:cNvPr id="9" name="Text 7"/>
+          <p:cNvSpPr/>
+          <p:nvPr/>
+        </p:nvSpPr>
+        <p:spPr>
+          <a:xfrm>
+            <a:off x="713232" y="1965960"/>
+            <a:ext cx="3383280" cy="274320"/>
+          </a:xfrm>
+          <a:prstGeom prst="rect">
+            <a:avLst/>
+          </a:prstGeom>
+          <a:noFill/>
+          <a:ln/>
+        </p:spPr>
+        <p:txBody>
+          <a:bodyPr wrap="square" lIns="0" tIns="0" rIns="0" bIns="0" rtlCol="0" anchor="ctr"/>
+          <a:lstStyle/>
+          <a:p>
+            <a:pPr marL="0" indent="0">
+              <a:buNone/>
+            </a:pPr>
+            <a:r>
+              <a:rPr lang="en-US" sz="1000" i="1" dirty="0">
+                <a:solidFill>
+                  <a:srgbClr val="64748B"/>
+                </a:solidFill>
+                <a:latin typeface="Calibri" pitchFamily="34" charset="0"/>
+                <a:ea typeface="Calibri" pitchFamily="34" charset="-122"/>
+                <a:cs typeface="Calibri" pitchFamily="34" charset="-120"/>
+              </a:rPr>
+              <a:t>Computed from the Spoon AST: fields, methods, LOC, cohesion</a:t>
+            </a:r>
+            <a:endParaRPr lang="en-US" sz="1000" dirty="0"/>
+          </a:p>
+        </p:txBody>
+      </p:sp>
+      <p:sp>
+        <p:nvSpPr>
+          <p:cNvPr id="10" name="Shape 8"/>
+          <p:cNvSpPr/>
+          <p:nvPr/>
+        </p:nvSpPr>
+        <p:spPr>
+          <a:xfrm>
+            <a:off x="2377440" y="2359152"/>
+            <a:ext cx="0" cy="292608"/>
+          </a:xfrm>
+          <a:prstGeom prst="line">
+            <a:avLst/>
+          </a:prstGeom>
+          <a:noFill/>
+          <a:ln w="28575">
+            <a:solidFill>
+              <a:srgbClr val="0D9488"/>
+            </a:solidFill>
+            <a:prstDash val="solid"/>
+            <a:tailEnd type="triangle"/>
+          </a:ln>
+        </p:spPr>
+        <p:txBody>
+          <a:bodyPr/>
+          <a:lstStyle/>
+          <a:p>
+            <a:endParaRPr lang="en-US"/>
+          </a:p>
+        </p:txBody>
+      </p:sp>
+      <p:sp>
+        <p:nvSpPr>
+          <p:cNvPr id="11" name="Shape 9"/>
+          <p:cNvSpPr/>
+          <p:nvPr/>
+        </p:nvSpPr>
+        <p:spPr>
+          <a:xfrm>
+            <a:off x="548640" y="2724912"/>
+            <a:ext cx="3657600" cy="914400"/>
+          </a:xfrm>
+          <a:prstGeom prst="rect">
+            <a:avLst/>
           </a:prstGeom>
           <a:solidFill>
-            <a:srgbClr val="FEF3C7"/>
+            <a:srgbClr val="FFFFFF"/>
           </a:solidFill>
           <a:ln w="12700">
             <a:solidFill>
-              <a:srgbClr val="FEF3C7"/>
+              <a:srgbClr val="D8DEE6"/>
             </a:solidFill>
             <a:prstDash val="solid"/>
           </a:ln>
         </p:spPr>
-      </p:sp>
-      <p:sp>
-        <p:nvSpPr>
-          <p:cNvPr id="10" name="Shape 8"/>
-          <p:cNvSpPr/>
-          <p:nvPr/>
-        </p:nvSpPr>
-        <p:spPr>
-          <a:xfrm>
-            <a:off x="2148840" y="1833372"/>
-            <a:ext cx="82296" cy="82296"/>
-          </a:xfrm>
-          <a:prstGeom prst="ellipse">
-            <a:avLst/>
-          </a:prstGeom>
-          <a:solidFill>
-            <a:srgbClr val="D97706"/>
-          </a:solidFill>
-          <a:ln w="12700">
-            <a:solidFill>
-              <a:srgbClr val="D97706"/>
-            </a:solidFill>
-            <a:prstDash val="solid"/>
-          </a:ln>
-        </p:spPr>
-      </p:sp>
-      <p:sp>
-        <p:nvSpPr>
-          <p:cNvPr id="11" name="Text 9"/>
-          <p:cNvSpPr/>
-          <p:nvPr/>
-        </p:nvSpPr>
-        <p:spPr>
-          <a:xfrm>
-            <a:off x="2286000" y="1673352"/>
-            <a:ext cx="987552" cy="402336"/>
-          </a:xfrm>
-          <a:prstGeom prst="rect">
-            <a:avLst/>
-          </a:prstGeom>
-          <a:noFill/>
-          <a:ln/>
-        </p:spPr>
-        <p:txBody>
-          <a:bodyPr wrap="square" lIns="0" tIns="0" rIns="0" bIns="0" rtlCol="0" anchor="ctr"/>
-          <a:lstStyle/>
-          <a:p>
-            <a:pPr indent="0" marL="0">
-              <a:buNone/>
-            </a:pPr>
-            <a:r>
-              <a:rPr lang="en-US" sz="1050" dirty="0">
-                <a:solidFill>
-                  <a:srgbClr val="1E293B"/>
-                </a:solidFill>
-                <a:latin typeface="Calibri" pitchFamily="34" charset="0"/>
-                <a:ea typeface="Calibri" pitchFamily="34" charset="-122"/>
-                <a:cs typeface="Calibri" pitchFamily="34" charset="-120"/>
-              </a:rPr>
-              <a:t>God Service</a:t>
-            </a:r>
-            <a:endParaRPr lang="en-US" sz="1050" dirty="0"/>
-          </a:p>
-        </p:txBody>
-      </p:sp>
-      <p:sp>
-        <p:nvSpPr>
-          <p:cNvPr id="12" name="Text 10"/>
-          <p:cNvSpPr/>
-          <p:nvPr/>
-        </p:nvSpPr>
-        <p:spPr>
-          <a:xfrm>
-            <a:off x="4754880" y="1371600"/>
-            <a:ext cx="4023360" cy="256032"/>
-          </a:xfrm>
-          <a:prstGeom prst="rect">
-            <a:avLst/>
-          </a:prstGeom>
-          <a:noFill/>
-          <a:ln/>
-        </p:spPr>
-        <p:txBody>
-          <a:bodyPr wrap="square" lIns="0" tIns="0" rIns="0" bIns="0" rtlCol="0" anchor="ctr"/>
-          <a:lstStyle/>
-          <a:p>
-            <a:pPr indent="0" marL="0">
-              <a:buNone/>
-            </a:pPr>
-            <a:r>
-              <a:rPr lang="en-US" sz="1050" b="1" spc="200" kern="0" dirty="0">
-                <a:solidFill>
-                  <a:srgbClr val="0F2A44"/>
-                </a:solidFill>
-                <a:latin typeface="Calibri" pitchFamily="34" charset="0"/>
-                <a:ea typeface="Calibri" pitchFamily="34" charset="-122"/>
-                <a:cs typeface="Calibri" pitchFamily="34" charset="-120"/>
-              </a:rPr>
-              <a:t>DATA MANAGEMENT</a:t>
-            </a:r>
-            <a:endParaRPr lang="en-US" sz="1050" dirty="0"/>
-          </a:p>
-        </p:txBody>
-      </p:sp>
-      <p:sp>
-        <p:nvSpPr>
-          <p:cNvPr id="13" name="Shape 11"/>
-          <p:cNvSpPr/>
-          <p:nvPr/>
-        </p:nvSpPr>
-        <p:spPr>
-          <a:xfrm>
-            <a:off x="4754880" y="1673352"/>
-            <a:ext cx="1554480" cy="402336"/>
-          </a:xfrm>
-          <a:prstGeom prst="roundRect">
-            <a:avLst>
-              <a:gd name="adj" fmla="val 22727"/>
-            </a:avLst>
-          </a:prstGeom>
-          <a:solidFill>
-            <a:srgbClr val="FEF3C7"/>
-          </a:solidFill>
-          <a:ln w="12700">
-            <a:solidFill>
-              <a:srgbClr val="FEF3C7"/>
-            </a:solidFill>
-            <a:prstDash val="solid"/>
-          </a:ln>
-        </p:spPr>
-      </p:sp>
-      <p:sp>
-        <p:nvSpPr>
-          <p:cNvPr id="14" name="Shape 12"/>
-          <p:cNvSpPr/>
-          <p:nvPr/>
-        </p:nvSpPr>
-        <p:spPr>
-          <a:xfrm>
-            <a:off x="4892040" y="1833372"/>
-            <a:ext cx="82296" cy="82296"/>
-          </a:xfrm>
-          <a:prstGeom prst="ellipse">
-            <a:avLst/>
-          </a:prstGeom>
-          <a:solidFill>
-            <a:srgbClr val="D97706"/>
-          </a:solidFill>
-          <a:ln w="12700">
-            <a:solidFill>
-              <a:srgbClr val="D97706"/>
-            </a:solidFill>
-            <a:prstDash val="solid"/>
-          </a:ln>
-        </p:spPr>
-      </p:sp>
-      <p:sp>
-        <p:nvSpPr>
-          <p:cNvPr id="15" name="Text 13"/>
-          <p:cNvSpPr/>
-          <p:nvPr/>
-        </p:nvSpPr>
-        <p:spPr>
-          <a:xfrm>
-            <a:off x="5029200" y="1673352"/>
-            <a:ext cx="1261872" cy="402336"/>
-          </a:xfrm>
-          <a:prstGeom prst="rect">
-            <a:avLst/>
-          </a:prstGeom>
-          <a:noFill/>
-          <a:ln/>
-        </p:spPr>
-        <p:txBody>
-          <a:bodyPr wrap="square" lIns="0" tIns="0" rIns="0" bIns="0" rtlCol="0" anchor="ctr"/>
-          <a:lstStyle/>
-          <a:p>
-            <a:pPr indent="0" marL="0">
-              <a:buNone/>
-            </a:pPr>
-            <a:r>
-              <a:rPr lang="en-US" sz="1050" dirty="0">
-                <a:solidFill>
-                  <a:srgbClr val="1E293B"/>
-                </a:solidFill>
-                <a:latin typeface="Calibri" pitchFamily="34" charset="0"/>
-                <a:ea typeface="Calibri" pitchFamily="34" charset="-122"/>
-                <a:cs typeface="Calibri" pitchFamily="34" charset="-120"/>
-              </a:rPr>
-              <a:t>Shared Database</a:t>
-            </a:r>
-            <a:endParaRPr lang="en-US" sz="1050" dirty="0"/>
-          </a:p>
-        </p:txBody>
-      </p:sp>
-      <p:sp>
-        <p:nvSpPr>
-          <p:cNvPr id="16" name="Text 14"/>
-          <p:cNvSpPr/>
-          <p:nvPr/>
-        </p:nvSpPr>
-        <p:spPr>
-          <a:xfrm>
-            <a:off x="548640" y="2468880"/>
-            <a:ext cx="4023360" cy="256032"/>
-          </a:xfrm>
-          <a:prstGeom prst="rect">
-            <a:avLst/>
-          </a:prstGeom>
-          <a:noFill/>
-          <a:ln/>
-        </p:spPr>
-        <p:txBody>
-          <a:bodyPr wrap="square" lIns="0" tIns="0" rIns="0" bIns="0" rtlCol="0" anchor="ctr"/>
-          <a:lstStyle/>
-          <a:p>
-            <a:pPr indent="0" marL="0">
-              <a:buNone/>
-            </a:pPr>
-            <a:r>
-              <a:rPr lang="en-US" sz="1050" b="1" spc="200" kern="0" dirty="0">
-                <a:solidFill>
-                  <a:srgbClr val="0F2A44"/>
-                </a:solidFill>
-                <a:latin typeface="Calibri" pitchFamily="34" charset="0"/>
-                <a:ea typeface="Calibri" pitchFamily="34" charset="-122"/>
-                <a:cs typeface="Calibri" pitchFamily="34" charset="-120"/>
-              </a:rPr>
-              <a:t>COMMUNICATION</a:t>
-            </a:r>
-            <a:endParaRPr lang="en-US" sz="1050" dirty="0"/>
-          </a:p>
-        </p:txBody>
-      </p:sp>
-      <p:sp>
-        <p:nvSpPr>
-          <p:cNvPr id="17" name="Shape 15"/>
-          <p:cNvSpPr/>
-          <p:nvPr/>
-        </p:nvSpPr>
-        <p:spPr>
-          <a:xfrm>
-            <a:off x="548640" y="2770632"/>
-            <a:ext cx="1463040" cy="402336"/>
-          </a:xfrm>
-          <a:prstGeom prst="roundRect">
-            <a:avLst>
-              <a:gd name="adj" fmla="val 22727"/>
-            </a:avLst>
-          </a:prstGeom>
-          <a:solidFill>
-            <a:srgbClr val="FEF3C7"/>
-          </a:solidFill>
-          <a:ln w="12700">
-            <a:solidFill>
-              <a:srgbClr val="FEF3C7"/>
-            </a:solidFill>
-            <a:prstDash val="solid"/>
-          </a:ln>
-        </p:spPr>
-      </p:sp>
-      <p:sp>
-        <p:nvSpPr>
-          <p:cNvPr id="18" name="Shape 16"/>
-          <p:cNvSpPr/>
-          <p:nvPr/>
-        </p:nvSpPr>
-        <p:spPr>
-          <a:xfrm>
-            <a:off x="685800" y="2930652"/>
-            <a:ext cx="82296" cy="82296"/>
-          </a:xfrm>
-          <a:prstGeom prst="ellipse">
-            <a:avLst/>
-          </a:prstGeom>
-          <a:solidFill>
-            <a:srgbClr val="D97706"/>
-          </a:solidFill>
-          <a:ln w="12700">
-            <a:solidFill>
-              <a:srgbClr val="D97706"/>
-            </a:solidFill>
-            <a:prstDash val="solid"/>
-          </a:ln>
-        </p:spPr>
-      </p:sp>
-      <p:sp>
-        <p:nvSpPr>
-          <p:cNvPr id="19" name="Text 17"/>
-          <p:cNvSpPr/>
-          <p:nvPr/>
-        </p:nvSpPr>
-        <p:spPr>
-          <a:xfrm>
-            <a:off x="822960" y="2770632"/>
-            <a:ext cx="1170432" cy="402336"/>
-          </a:xfrm>
-          <a:prstGeom prst="rect">
-            <a:avLst/>
-          </a:prstGeom>
-          <a:noFill/>
-          <a:ln/>
-        </p:spPr>
-        <p:txBody>
-          <a:bodyPr wrap="square" lIns="0" tIns="0" rIns="0" bIns="0" rtlCol="0" anchor="ctr"/>
-          <a:lstStyle/>
-          <a:p>
-            <a:pPr indent="0" marL="0">
-              <a:buNone/>
-            </a:pPr>
-            <a:r>
-              <a:rPr lang="en-US" sz="1050" dirty="0">
-                <a:solidFill>
-                  <a:srgbClr val="1E293B"/>
-                </a:solidFill>
-                <a:latin typeface="Calibri" pitchFamily="34" charset="0"/>
-                <a:ea typeface="Calibri" pitchFamily="34" charset="-122"/>
-                <a:cs typeface="Calibri" pitchFamily="34" charset="-120"/>
-              </a:rPr>
-              <a:t>Chatty Service</a:t>
-            </a:r>
-            <a:endParaRPr lang="en-US" sz="1050" dirty="0"/>
-          </a:p>
-        </p:txBody>
-      </p:sp>
-      <p:sp>
-        <p:nvSpPr>
-          <p:cNvPr id="20" name="Shape 18"/>
-          <p:cNvSpPr/>
-          <p:nvPr/>
-        </p:nvSpPr>
-        <p:spPr>
-          <a:xfrm>
-            <a:off x="2148840" y="2770632"/>
-            <a:ext cx="1691640" cy="402336"/>
-          </a:xfrm>
-          <a:prstGeom prst="roundRect">
-            <a:avLst>
-              <a:gd name="adj" fmla="val 22727"/>
-            </a:avLst>
-          </a:prstGeom>
-          <a:solidFill>
-            <a:srgbClr val="FEE2E2"/>
-          </a:solidFill>
-          <a:ln w="12700">
-            <a:solidFill>
-              <a:srgbClr val="FEE2E2"/>
-            </a:solidFill>
-            <a:prstDash val="solid"/>
-          </a:ln>
-        </p:spPr>
-      </p:sp>
-      <p:sp>
-        <p:nvSpPr>
-          <p:cNvPr id="21" name="Shape 19"/>
-          <p:cNvSpPr/>
-          <p:nvPr/>
-        </p:nvSpPr>
-        <p:spPr>
-          <a:xfrm>
-            <a:off x="2286000" y="2930652"/>
-            <a:ext cx="82296" cy="82296"/>
-          </a:xfrm>
-          <a:prstGeom prst="ellipse">
-            <a:avLst/>
-          </a:prstGeom>
-          <a:solidFill>
-            <a:srgbClr val="DC2626"/>
-          </a:solidFill>
-          <a:ln w="12700">
-            <a:solidFill>
-              <a:srgbClr val="DC2626"/>
-            </a:solidFill>
-            <a:prstDash val="solid"/>
-          </a:ln>
-        </p:spPr>
-      </p:sp>
-      <p:sp>
-        <p:nvSpPr>
-          <p:cNvPr id="22" name="Text 20"/>
-          <p:cNvSpPr/>
-          <p:nvPr/>
-        </p:nvSpPr>
-        <p:spPr>
-          <a:xfrm>
-            <a:off x="2423160" y="2770632"/>
-            <a:ext cx="1399032" cy="402336"/>
-          </a:xfrm>
-          <a:prstGeom prst="rect">
-            <a:avLst/>
-          </a:prstGeom>
-          <a:noFill/>
-          <a:ln/>
-        </p:spPr>
-        <p:txBody>
-          <a:bodyPr wrap="square" lIns="0" tIns="0" rIns="0" bIns="0" rtlCol="0" anchor="ctr"/>
-          <a:lstStyle/>
-          <a:p>
-            <a:pPr indent="0" marL="0">
-              <a:buNone/>
-            </a:pPr>
-            <a:r>
-              <a:rPr lang="en-US" sz="1050" dirty="0">
-                <a:solidFill>
-                  <a:srgbClr val="1E293B"/>
-                </a:solidFill>
-                <a:latin typeface="Calibri" pitchFamily="34" charset="0"/>
-                <a:ea typeface="Calibri" pitchFamily="34" charset="-122"/>
-                <a:cs typeface="Calibri" pitchFamily="34" charset="-120"/>
-              </a:rPr>
-              <a:t>Cyclic Dependency</a:t>
-            </a:r>
-            <a:endParaRPr lang="en-US" sz="1050" dirty="0"/>
-          </a:p>
-        </p:txBody>
-      </p:sp>
-      <p:sp>
-        <p:nvSpPr>
-          <p:cNvPr id="23" name="Shape 21"/>
-          <p:cNvSpPr/>
-          <p:nvPr/>
-        </p:nvSpPr>
-        <p:spPr>
-          <a:xfrm>
-            <a:off x="3977640" y="2770632"/>
-            <a:ext cx="1828800" cy="402336"/>
-          </a:xfrm>
-          <a:prstGeom prst="roundRect">
-            <a:avLst>
-              <a:gd name="adj" fmla="val 22727"/>
-            </a:avLst>
-          </a:prstGeom>
-          <a:solidFill>
-            <a:srgbClr val="DBEAFE"/>
-          </a:solidFill>
-          <a:ln w="12700">
-            <a:solidFill>
-              <a:srgbClr val="DBEAFE"/>
-            </a:solidFill>
-            <a:prstDash val="solid"/>
-          </a:ln>
-        </p:spPr>
-      </p:sp>
-      <p:sp>
-        <p:nvSpPr>
-          <p:cNvPr id="24" name="Shape 22"/>
-          <p:cNvSpPr/>
-          <p:nvPr/>
-        </p:nvSpPr>
-        <p:spPr>
-          <a:xfrm>
-            <a:off x="4114800" y="2930652"/>
-            <a:ext cx="82296" cy="82296"/>
-          </a:xfrm>
-          <a:prstGeom prst="ellipse">
-            <a:avLst/>
-          </a:prstGeom>
-          <a:solidFill>
-            <a:srgbClr val="1C4E80"/>
-          </a:solidFill>
-          <a:ln w="12700">
-            <a:solidFill>
-              <a:srgbClr val="1C4E80"/>
-            </a:solidFill>
-            <a:prstDash val="solid"/>
-          </a:ln>
-        </p:spPr>
-      </p:sp>
-      <p:sp>
-        <p:nvSpPr>
-          <p:cNvPr id="25" name="Text 23"/>
-          <p:cNvSpPr/>
-          <p:nvPr/>
-        </p:nvSpPr>
-        <p:spPr>
-          <a:xfrm>
-            <a:off x="4251960" y="2770632"/>
-            <a:ext cx="1536192" cy="402336"/>
-          </a:xfrm>
-          <a:prstGeom prst="rect">
-            <a:avLst/>
-          </a:prstGeom>
-          <a:noFill/>
-          <a:ln/>
-        </p:spPr>
-        <p:txBody>
-          <a:bodyPr wrap="square" lIns="0" tIns="0" rIns="0" bIns="0" rtlCol="0" anchor="ctr"/>
-          <a:lstStyle/>
-          <a:p>
-            <a:pPr indent="0" marL="0">
-              <a:buNone/>
-            </a:pPr>
-            <a:r>
-              <a:rPr lang="en-US" sz="1050" dirty="0">
-                <a:solidFill>
-                  <a:srgbClr val="1E293B"/>
-                </a:solidFill>
-                <a:latin typeface="Calibri" pitchFamily="34" charset="0"/>
-                <a:ea typeface="Calibri" pitchFamily="34" charset="-122"/>
-                <a:cs typeface="Calibri" pitchFamily="34" charset="-120"/>
-              </a:rPr>
-              <a:t>Hardcoded Endpoints</a:t>
-            </a:r>
-            <a:endParaRPr lang="en-US" sz="1050" dirty="0"/>
-          </a:p>
-        </p:txBody>
-      </p:sp>
-      <p:sp>
-        <p:nvSpPr>
-          <p:cNvPr id="26" name="Shape 24"/>
-          <p:cNvSpPr/>
-          <p:nvPr/>
-        </p:nvSpPr>
-        <p:spPr>
-          <a:xfrm>
-            <a:off x="5943600" y="2770632"/>
-            <a:ext cx="1188720" cy="402336"/>
-          </a:xfrm>
-          <a:prstGeom prst="roundRect">
-            <a:avLst>
-              <a:gd name="adj" fmla="val 22727"/>
-            </a:avLst>
-          </a:prstGeom>
-          <a:solidFill>
-            <a:srgbClr val="FEF3C7"/>
-          </a:solidFill>
-          <a:ln w="12700">
-            <a:solidFill>
-              <a:srgbClr val="FEF3C7"/>
-            </a:solidFill>
-            <a:prstDash val="solid"/>
-          </a:ln>
-        </p:spPr>
-      </p:sp>
-      <p:sp>
-        <p:nvSpPr>
-          <p:cNvPr id="27" name="Shape 25"/>
-          <p:cNvSpPr/>
-          <p:nvPr/>
-        </p:nvSpPr>
-        <p:spPr>
-          <a:xfrm>
-            <a:off x="6080760" y="2930652"/>
-            <a:ext cx="82296" cy="82296"/>
-          </a:xfrm>
-          <a:prstGeom prst="ellipse">
-            <a:avLst/>
-          </a:prstGeom>
-          <a:solidFill>
-            <a:srgbClr val="D97706"/>
-          </a:solidFill>
-          <a:ln w="12700">
-            <a:solidFill>
-              <a:srgbClr val="D97706"/>
-            </a:solidFill>
-            <a:prstDash val="solid"/>
-          </a:ln>
-        </p:spPr>
-      </p:sp>
-      <p:sp>
-        <p:nvSpPr>
-          <p:cNvPr id="28" name="Text 26"/>
-          <p:cNvSpPr/>
-          <p:nvPr/>
-        </p:nvSpPr>
-        <p:spPr>
-          <a:xfrm>
-            <a:off x="6217920" y="2770632"/>
-            <a:ext cx="896112" cy="402336"/>
-          </a:xfrm>
-          <a:prstGeom prst="rect">
-            <a:avLst/>
-          </a:prstGeom>
-          <a:noFill/>
-          <a:ln/>
-        </p:spPr>
-        <p:txBody>
-          <a:bodyPr wrap="square" lIns="0" tIns="0" rIns="0" bIns="0" rtlCol="0" anchor="ctr"/>
-          <a:lstStyle/>
-          <a:p>
-            <a:pPr indent="0" marL="0">
-              <a:buNone/>
-            </a:pPr>
-            <a:r>
-              <a:rPr lang="en-US" sz="1050" dirty="0">
-                <a:solidFill>
-                  <a:srgbClr val="1E293B"/>
-                </a:solidFill>
-                <a:latin typeface="Calibri" pitchFamily="34" charset="0"/>
-                <a:ea typeface="Calibri" pitchFamily="34" charset="-122"/>
-                <a:cs typeface="Calibri" pitchFamily="34" charset="-120"/>
-              </a:rPr>
-              <a:t>ESB Misuse</a:t>
-            </a:r>
-            <a:endParaRPr lang="en-US" sz="1050" dirty="0"/>
-          </a:p>
-        </p:txBody>
-      </p:sp>
-      <p:sp>
-        <p:nvSpPr>
-          <p:cNvPr id="29" name="Text 27"/>
-          <p:cNvSpPr/>
-          <p:nvPr/>
-        </p:nvSpPr>
-        <p:spPr>
-          <a:xfrm>
-            <a:off x="548640" y="3566160"/>
-            <a:ext cx="4023360" cy="256032"/>
-          </a:xfrm>
-          <a:prstGeom prst="rect">
-            <a:avLst/>
-          </a:prstGeom>
-          <a:noFill/>
-          <a:ln/>
-        </p:spPr>
-        <p:txBody>
-          <a:bodyPr wrap="square" lIns="0" tIns="0" rIns="0" bIns="0" rtlCol="0" anchor="ctr"/>
-          <a:lstStyle/>
-          <a:p>
-            <a:pPr indent="0" marL="0">
-              <a:buNone/>
-            </a:pPr>
-            <a:r>
-              <a:rPr lang="en-US" sz="1050" b="1" spc="200" kern="0" dirty="0">
-                <a:solidFill>
-                  <a:srgbClr val="0F2A44"/>
-                </a:solidFill>
-                <a:latin typeface="Calibri" pitchFamily="34" charset="0"/>
-                <a:ea typeface="Calibri" pitchFamily="34" charset="-122"/>
-                <a:cs typeface="Calibri" pitchFamily="34" charset="-120"/>
-              </a:rPr>
-              <a:t>DEPLOYMENT &amp; COUPLING</a:t>
-            </a:r>
-            <a:endParaRPr lang="en-US" sz="1050" dirty="0"/>
-          </a:p>
-        </p:txBody>
-      </p:sp>
-      <p:sp>
-        <p:nvSpPr>
-          <p:cNvPr id="30" name="Shape 28"/>
-          <p:cNvSpPr/>
-          <p:nvPr/>
-        </p:nvSpPr>
-        <p:spPr>
-          <a:xfrm>
-            <a:off x="548640" y="3867912"/>
-            <a:ext cx="1828800" cy="402336"/>
-          </a:xfrm>
-          <a:prstGeom prst="roundRect">
-            <a:avLst>
-              <a:gd name="adj" fmla="val 22727"/>
-            </a:avLst>
-          </a:prstGeom>
-          <a:solidFill>
-            <a:srgbClr val="FEE2E2"/>
-          </a:solidFill>
-          <a:ln w="12700">
-            <a:solidFill>
-              <a:srgbClr val="FEE2E2"/>
-            </a:solidFill>
-            <a:prstDash val="solid"/>
-          </a:ln>
-        </p:spPr>
-      </p:sp>
-      <p:sp>
-        <p:nvSpPr>
-          <p:cNvPr id="31" name="Shape 29"/>
-          <p:cNvSpPr/>
-          <p:nvPr/>
-        </p:nvSpPr>
-        <p:spPr>
-          <a:xfrm>
-            <a:off x="685800" y="4027932"/>
-            <a:ext cx="82296" cy="82296"/>
-          </a:xfrm>
-          <a:prstGeom prst="ellipse">
-            <a:avLst/>
-          </a:prstGeom>
-          <a:solidFill>
-            <a:srgbClr val="DC2626"/>
-          </a:solidFill>
-          <a:ln w="12700">
-            <a:solidFill>
-              <a:srgbClr val="DC2626"/>
-            </a:solidFill>
-            <a:prstDash val="solid"/>
-          </a:ln>
-        </p:spPr>
-      </p:sp>
-      <p:sp>
-        <p:nvSpPr>
-          <p:cNvPr id="32" name="Text 30"/>
-          <p:cNvSpPr/>
-          <p:nvPr/>
-        </p:nvSpPr>
-        <p:spPr>
-          <a:xfrm>
-            <a:off x="822960" y="3867912"/>
-            <a:ext cx="1536192" cy="402336"/>
-          </a:xfrm>
-          <a:prstGeom prst="rect">
-            <a:avLst/>
-          </a:prstGeom>
-          <a:noFill/>
-          <a:ln/>
-        </p:spPr>
-        <p:txBody>
-          <a:bodyPr wrap="square" lIns="0" tIns="0" rIns="0" bIns="0" rtlCol="0" anchor="ctr"/>
-          <a:lstStyle/>
-          <a:p>
-            <a:pPr indent="0" marL="0">
-              <a:buNone/>
-            </a:pPr>
-            <a:r>
-              <a:rPr lang="en-US" sz="1050" dirty="0">
-                <a:solidFill>
-                  <a:srgbClr val="1E293B"/>
-                </a:solidFill>
-                <a:latin typeface="Calibri" pitchFamily="34" charset="0"/>
-                <a:ea typeface="Calibri" pitchFamily="34" charset="-122"/>
-                <a:cs typeface="Calibri" pitchFamily="34" charset="-120"/>
-              </a:rPr>
-              <a:t>Distributed Monolith</a:t>
-            </a:r>
-            <a:endParaRPr lang="en-US" sz="1050" dirty="0"/>
-          </a:p>
-        </p:txBody>
-      </p:sp>
-      <p:sp>
-        <p:nvSpPr>
-          <p:cNvPr id="33" name="Shape 31"/>
-          <p:cNvSpPr/>
-          <p:nvPr/>
-        </p:nvSpPr>
-        <p:spPr>
-          <a:xfrm>
-            <a:off x="2514600" y="3867912"/>
-            <a:ext cx="2057400" cy="402336"/>
-          </a:xfrm>
-          <a:prstGeom prst="roundRect">
-            <a:avLst>
-              <a:gd name="adj" fmla="val 22727"/>
-            </a:avLst>
-          </a:prstGeom>
-          <a:solidFill>
-            <a:srgbClr val="DBEAFE"/>
-          </a:solidFill>
-          <a:ln w="12700">
-            <a:solidFill>
-              <a:srgbClr val="DBEAFE"/>
-            </a:solidFill>
-            <a:prstDash val="solid"/>
-          </a:ln>
-        </p:spPr>
-      </p:sp>
-      <p:sp>
-        <p:nvSpPr>
-          <p:cNvPr id="34" name="Shape 32"/>
-          <p:cNvSpPr/>
-          <p:nvPr/>
-        </p:nvSpPr>
-        <p:spPr>
-          <a:xfrm>
-            <a:off x="2651760" y="4027932"/>
-            <a:ext cx="82296" cy="82296"/>
-          </a:xfrm>
-          <a:prstGeom prst="ellipse">
-            <a:avLst/>
-          </a:prstGeom>
-          <a:solidFill>
-            <a:srgbClr val="1C4E80"/>
-          </a:solidFill>
-          <a:ln w="12700">
-            <a:solidFill>
-              <a:srgbClr val="1C4E80"/>
-            </a:solidFill>
-            <a:prstDash val="solid"/>
-          </a:ln>
-        </p:spPr>
-      </p:sp>
-      <p:sp>
-        <p:nvSpPr>
-          <p:cNvPr id="35" name="Text 33"/>
-          <p:cNvSpPr/>
-          <p:nvPr/>
-        </p:nvSpPr>
-        <p:spPr>
-          <a:xfrm>
-            <a:off x="2788920" y="3867912"/>
-            <a:ext cx="1764792" cy="402336"/>
-          </a:xfrm>
-          <a:prstGeom prst="rect">
-            <a:avLst/>
-          </a:prstGeom>
-          <a:noFill/>
-          <a:ln/>
-        </p:spPr>
-        <p:txBody>
-          <a:bodyPr wrap="square" lIns="0" tIns="0" rIns="0" bIns="0" rtlCol="0" anchor="ctr"/>
-          <a:lstStyle/>
-          <a:p>
-            <a:pPr indent="0" marL="0">
-              <a:buNone/>
-            </a:pPr>
-            <a:r>
-              <a:rPr lang="en-US" sz="1050" dirty="0">
-                <a:solidFill>
-                  <a:srgbClr val="1E293B"/>
-                </a:solidFill>
-                <a:latin typeface="Calibri" pitchFamily="34" charset="0"/>
-                <a:ea typeface="Calibri" pitchFamily="34" charset="-122"/>
-                <a:cs typeface="Calibri" pitchFamily="34" charset="-120"/>
-              </a:rPr>
-              <a:t>API Versioning Absence</a:t>
-            </a:r>
-            <a:endParaRPr lang="en-US" sz="1050" dirty="0"/>
-          </a:p>
-        </p:txBody>
-      </p:sp>
-      <p:sp>
-        <p:nvSpPr>
-          <p:cNvPr id="36" name="Shape 34"/>
-          <p:cNvSpPr/>
-          <p:nvPr/>
-        </p:nvSpPr>
-        <p:spPr>
-          <a:xfrm>
-            <a:off x="4709160" y="3867912"/>
-            <a:ext cx="1188720" cy="402336"/>
-          </a:xfrm>
-          <a:prstGeom prst="roundRect">
-            <a:avLst>
-              <a:gd name="adj" fmla="val 22727"/>
-            </a:avLst>
-          </a:prstGeom>
-          <a:solidFill>
-            <a:srgbClr val="FEF3C7"/>
-          </a:solidFill>
-          <a:ln w="12700">
-            <a:solidFill>
-              <a:srgbClr val="FEF3C7"/>
-            </a:solidFill>
-            <a:prstDash val="solid"/>
-          </a:ln>
-        </p:spPr>
-      </p:sp>
-      <p:sp>
-        <p:nvSpPr>
-          <p:cNvPr id="37" name="Shape 35"/>
-          <p:cNvSpPr/>
-          <p:nvPr/>
-        </p:nvSpPr>
-        <p:spPr>
-          <a:xfrm>
-            <a:off x="4846320" y="4027932"/>
-            <a:ext cx="82296" cy="82296"/>
-          </a:xfrm>
-          <a:prstGeom prst="ellipse">
-            <a:avLst/>
-          </a:prstGeom>
-          <a:solidFill>
-            <a:srgbClr val="D97706"/>
-          </a:solidFill>
-          <a:ln w="12700">
-            <a:solidFill>
-              <a:srgbClr val="D97706"/>
-            </a:solidFill>
-            <a:prstDash val="solid"/>
-          </a:ln>
-        </p:spPr>
-      </p:sp>
-      <p:sp>
-        <p:nvSpPr>
-          <p:cNvPr id="38" name="Text 36"/>
-          <p:cNvSpPr/>
-          <p:nvPr/>
-        </p:nvSpPr>
-        <p:spPr>
-          <a:xfrm>
-            <a:off x="4983480" y="3867912"/>
-            <a:ext cx="896112" cy="402336"/>
-          </a:xfrm>
-          <a:prstGeom prst="rect">
-            <a:avLst/>
-          </a:prstGeom>
-          <a:noFill/>
-          <a:ln/>
-        </p:spPr>
-        <p:txBody>
-          <a:bodyPr wrap="square" lIns="0" tIns="0" rIns="0" bIns="0" rtlCol="0" anchor="ctr"/>
-          <a:lstStyle/>
-          <a:p>
-            <a:pPr indent="0" marL="0">
-              <a:buNone/>
-            </a:pPr>
-            <a:r>
-              <a:rPr lang="en-US" sz="1050" dirty="0">
-                <a:solidFill>
-                  <a:srgbClr val="1E293B"/>
-                </a:solidFill>
-                <a:latin typeface="Calibri" pitchFamily="34" charset="0"/>
-                <a:ea typeface="Calibri" pitchFamily="34" charset="-122"/>
-                <a:cs typeface="Calibri" pitchFamily="34" charset="-120"/>
-              </a:rPr>
-              <a:t>Wrong Cuts</a:t>
-            </a:r>
-            <a:endParaRPr lang="en-US" sz="1050" dirty="0"/>
-          </a:p>
-        </p:txBody>
-      </p:sp>
-      <p:sp>
-        <p:nvSpPr>
-          <p:cNvPr id="39" name="Shape 37"/>
-          <p:cNvSpPr/>
-          <p:nvPr/>
-        </p:nvSpPr>
-        <p:spPr>
-          <a:xfrm>
-            <a:off x="548640" y="4434840"/>
-            <a:ext cx="457200" cy="36576"/>
+        <p:txBody>
+          <a:bodyPr/>
+          <a:lstStyle/>
+          <a:p>
+            <a:endParaRPr lang="en-US"/>
+          </a:p>
+        </p:txBody>
+      </p:sp>
+      <p:sp>
+        <p:nvSpPr>
+          <p:cNvPr id="12" name="Shape 10"/>
+          <p:cNvSpPr/>
+          <p:nvPr/>
+        </p:nvSpPr>
+        <p:spPr>
+          <a:xfrm>
+            <a:off x="548640" y="2724912"/>
+            <a:ext cx="41148" cy="914400"/>
           </a:xfrm>
           <a:prstGeom prst="rect">
             <a:avLst/>
@@ -8735,33 +8591,196 @@
             <a:prstDash val="solid"/>
           </a:ln>
         </p:spPr>
-      </p:sp>
-      <p:sp>
-        <p:nvSpPr>
-          <p:cNvPr id="40" name="Text 38"/>
-          <p:cNvSpPr/>
-          <p:nvPr/>
-        </p:nvSpPr>
-        <p:spPr>
-          <a:xfrm>
-            <a:off x="548640" y="4526280"/>
-            <a:ext cx="8046720" cy="292608"/>
-          </a:xfrm>
-          <a:prstGeom prst="rect">
-            <a:avLst/>
-          </a:prstGeom>
-          <a:noFill/>
-          <a:ln/>
-        </p:spPr>
-        <p:txBody>
-          <a:bodyPr wrap="square" lIns="0" tIns="0" rIns="0" bIns="0" rtlCol="0" anchor="ctr"/>
-          <a:lstStyle/>
-          <a:p>
-            <a:pPr indent="0" marL="0">
-              <a:buNone/>
-            </a:pPr>
-            <a:r>
-              <a:rPr lang="en-US" sz="1150" dirty="0">
+        <p:txBody>
+          <a:bodyPr/>
+          <a:lstStyle/>
+          <a:p>
+            <a:endParaRPr lang="en-US"/>
+          </a:p>
+        </p:txBody>
+      </p:sp>
+      <p:sp>
+        <p:nvSpPr>
+          <p:cNvPr id="13" name="Text 11"/>
+          <p:cNvSpPr/>
+          <p:nvPr/>
+        </p:nvSpPr>
+        <p:spPr>
+          <a:xfrm>
+            <a:off x="713232" y="2816352"/>
+            <a:ext cx="3383280" cy="219456"/>
+          </a:xfrm>
+          <a:prstGeom prst="rect">
+            <a:avLst/>
+          </a:prstGeom>
+          <a:noFill/>
+          <a:ln/>
+        </p:spPr>
+        <p:txBody>
+          <a:bodyPr wrap="square" lIns="0" tIns="0" rIns="0" bIns="0" rtlCol="0" anchor="ctr"/>
+          <a:lstStyle/>
+          <a:p>
+            <a:pPr marL="0" indent="0">
+              <a:buNone/>
+            </a:pPr>
+            <a:r>
+              <a:rPr lang="en-US" sz="900" b="1" kern="0" spc="200" dirty="0">
+                <a:solidFill>
+                  <a:srgbClr val="64748B"/>
+                </a:solidFill>
+                <a:latin typeface="Calibri" pitchFamily="34" charset="0"/>
+                <a:ea typeface="Calibri" pitchFamily="34" charset="-122"/>
+                <a:cs typeface="Calibri" pitchFamily="34" charset="-120"/>
+              </a:rPr>
+              <a:t>ARCHITECTURAL LEVEL</a:t>
+            </a:r>
+            <a:endParaRPr lang="en-US" sz="900" dirty="0"/>
+          </a:p>
+        </p:txBody>
+      </p:sp>
+      <p:sp>
+        <p:nvSpPr>
+          <p:cNvPr id="14" name="Text 12"/>
+          <p:cNvSpPr/>
+          <p:nvPr/>
+        </p:nvSpPr>
+        <p:spPr>
+          <a:xfrm>
+            <a:off x="713232" y="3044952"/>
+            <a:ext cx="3383280" cy="274320"/>
+          </a:xfrm>
+          <a:prstGeom prst="rect">
+            <a:avLst/>
+          </a:prstGeom>
+          <a:noFill/>
+          <a:ln/>
+        </p:spPr>
+        <p:txBody>
+          <a:bodyPr wrap="square" lIns="0" tIns="0" rIns="0" bIns="0" rtlCol="0" anchor="ctr"/>
+          <a:lstStyle/>
+          <a:p>
+            <a:pPr marL="0" indent="0">
+              <a:buNone/>
+            </a:pPr>
+            <a:r>
+              <a:rPr lang="en-US" sz="1250" b="1" dirty="0">
+                <a:solidFill>
+                  <a:srgbClr val="1E293B"/>
+                </a:solidFill>
+                <a:latin typeface="Calibri" pitchFamily="34" charset="0"/>
+                <a:ea typeface="Calibri" pitchFamily="34" charset="-122"/>
+                <a:cs typeface="Calibri" pitchFamily="34" charset="-120"/>
+              </a:rPr>
+              <a:t>God Service (per microservice)</a:t>
+            </a:r>
+            <a:endParaRPr lang="en-US" sz="1250" dirty="0"/>
+          </a:p>
+        </p:txBody>
+      </p:sp>
+      <p:sp>
+        <p:nvSpPr>
+          <p:cNvPr id="15" name="Text 13"/>
+          <p:cNvSpPr/>
+          <p:nvPr/>
+        </p:nvSpPr>
+        <p:spPr>
+          <a:xfrm>
+            <a:off x="713232" y="3319272"/>
+            <a:ext cx="3383280" cy="274320"/>
+          </a:xfrm>
+          <a:prstGeom prst="rect">
+            <a:avLst/>
+          </a:prstGeom>
+          <a:noFill/>
+          <a:ln/>
+        </p:spPr>
+        <p:txBody>
+          <a:bodyPr wrap="square" lIns="0" tIns="0" rIns="0" bIns="0" rtlCol="0" anchor="ctr"/>
+          <a:lstStyle/>
+          <a:p>
+            <a:pPr marL="0" indent="0">
+              <a:buNone/>
+            </a:pPr>
+            <a:r>
+              <a:rPr lang="en-US" sz="1000" i="1" dirty="0">
+                <a:solidFill>
+                  <a:srgbClr val="64748B"/>
+                </a:solidFill>
+                <a:latin typeface="Calibri" pitchFamily="34" charset="0"/>
+                <a:ea typeface="Calibri" pitchFamily="34" charset="-122"/>
+                <a:cs typeface="Calibri" pitchFamily="34" charset="-120"/>
+              </a:rPr>
+              <a:t>Flag service if it contains at least one God Class</a:t>
+            </a:r>
+            <a:endParaRPr lang="en-US" sz="1000" dirty="0"/>
+          </a:p>
+        </p:txBody>
+      </p:sp>
+      <p:sp>
+        <p:nvSpPr>
+          <p:cNvPr id="16" name="Text 14"/>
+          <p:cNvSpPr/>
+          <p:nvPr/>
+        </p:nvSpPr>
+        <p:spPr>
+          <a:xfrm>
+            <a:off x="548640" y="3886200"/>
+            <a:ext cx="3657600" cy="320040"/>
+          </a:xfrm>
+          <a:prstGeom prst="rect">
+            <a:avLst/>
+          </a:prstGeom>
+          <a:noFill/>
+          <a:ln/>
+        </p:spPr>
+        <p:txBody>
+          <a:bodyPr wrap="square" lIns="0" tIns="0" rIns="0" bIns="0" rtlCol="0" anchor="ctr"/>
+          <a:lstStyle/>
+          <a:p>
+            <a:pPr marL="0" indent="0">
+              <a:buNone/>
+            </a:pPr>
+            <a:r>
+              <a:rPr lang="en-US" sz="1050" i="1" dirty="0">
+                <a:solidFill>
+                  <a:srgbClr val="64748B"/>
+                </a:solidFill>
+                <a:latin typeface="Calibri" pitchFamily="34" charset="0"/>
+                <a:ea typeface="Calibri" pitchFamily="34" charset="-122"/>
+                <a:cs typeface="Calibri" pitchFamily="34" charset="-120"/>
+              </a:rPr>
+              <a:t>Code-level evidence → architectural-level finding</a:t>
+            </a:r>
+            <a:endParaRPr lang="en-US" sz="1050" dirty="0"/>
+          </a:p>
+        </p:txBody>
+      </p:sp>
+      <p:sp>
+        <p:nvSpPr>
+          <p:cNvPr id="17" name="Text 15"/>
+          <p:cNvSpPr/>
+          <p:nvPr/>
+        </p:nvSpPr>
+        <p:spPr>
+          <a:xfrm>
+            <a:off x="4754880" y="987552"/>
+            <a:ext cx="3840480" cy="292608"/>
+          </a:xfrm>
+          <a:prstGeom prst="rect">
+            <a:avLst/>
+          </a:prstGeom>
+          <a:noFill/>
+          <a:ln/>
+        </p:spPr>
+        <p:txBody>
+          <a:bodyPr wrap="square" lIns="0" tIns="0" rIns="0" bIns="0" rtlCol="0" anchor="ctr"/>
+          <a:lstStyle/>
+          <a:p>
+            <a:pPr marL="0" indent="0">
+              <a:buNone/>
+            </a:pPr>
+            <a:r>
+              <a:rPr lang="en-US" sz="1300" b="1" dirty="0">
                 <a:solidFill>
                   <a:srgbClr val="0F2A44"/>
                 </a:solidFill>
@@ -8769,7 +8788,265 @@
                 <a:ea typeface="Calibri" pitchFamily="34" charset="-122"/>
                 <a:cs typeface="Calibri" pitchFamily="34" charset="-120"/>
               </a:rPr>
-              <a:t>All detectors are pluggable Strategy components with configurable thresholds</a:t>
+              <a:t>Six structural metrics</a:t>
+            </a:r>
+            <a:endParaRPr lang="en-US" sz="1300" dirty="0"/>
+          </a:p>
+        </p:txBody>
+      </p:sp>
+      <p:sp>
+        <p:nvSpPr>
+          <p:cNvPr id="18" name="Text 16"/>
+          <p:cNvSpPr/>
+          <p:nvPr/>
+        </p:nvSpPr>
+        <p:spPr>
+          <a:xfrm>
+            <a:off x="4754880" y="1316736"/>
+            <a:ext cx="3840480" cy="475488"/>
+          </a:xfrm>
+          <a:prstGeom prst="rect">
+            <a:avLst/>
+          </a:prstGeom>
+          <a:noFill/>
+          <a:ln/>
+        </p:spPr>
+        <p:txBody>
+          <a:bodyPr wrap="square" lIns="0" tIns="0" rIns="0" bIns="0" rtlCol="0" anchor="ctr"/>
+          <a:lstStyle/>
+          <a:p>
+            <a:pPr marL="0" indent="0">
+              <a:buNone/>
+            </a:pPr>
+            <a:r>
+              <a:rPr lang="en-US" sz="1100" dirty="0">
+                <a:solidFill>
+                  <a:srgbClr val="1E293B"/>
+                </a:solidFill>
+                <a:latin typeface="Calibri" pitchFamily="34" charset="0"/>
+                <a:ea typeface="Calibri" pitchFamily="34" charset="-122"/>
+                <a:cs typeface="Calibri" pitchFamily="34" charset="-120"/>
+              </a:rPr>
+              <a:t>Each non-data class is evaluated against six thresholds computed from its AST:</a:t>
+            </a:r>
+            <a:endParaRPr lang="en-US" sz="1100" dirty="0"/>
+          </a:p>
+        </p:txBody>
+      </p:sp>
+      <p:sp>
+        <p:nvSpPr>
+          <p:cNvPr id="19" name="Text 17"/>
+          <p:cNvSpPr/>
+          <p:nvPr/>
+        </p:nvSpPr>
+        <p:spPr>
+          <a:xfrm>
+            <a:off x="4846320" y="1828800"/>
+            <a:ext cx="3749040" cy="1783080"/>
+          </a:xfrm>
+          <a:prstGeom prst="rect">
+            <a:avLst/>
+          </a:prstGeom>
+          <a:noFill/>
+          <a:ln/>
+        </p:spPr>
+        <p:txBody>
+          <a:bodyPr wrap="square" lIns="0" tIns="0" rIns="0" bIns="0" rtlCol="0" anchor="ctr"/>
+          <a:lstStyle/>
+          <a:p>
+            <a:pPr marL="342900" indent="-342900">
+              <a:spcAft>
+                <a:spcPts val="300"/>
+              </a:spcAft>
+              <a:buSzPct val="100000"/>
+              <a:buChar char="•"/>
+            </a:pPr>
+            <a:r>
+              <a:rPr lang="en-US" sz="1100" dirty="0">
+                <a:solidFill>
+                  <a:srgbClr val="1E293B"/>
+                </a:solidFill>
+                <a:latin typeface="Calibri" pitchFamily="34" charset="0"/>
+                <a:ea typeface="Calibri" pitchFamily="34" charset="-122"/>
+                <a:cs typeface="Calibri" pitchFamily="34" charset="-120"/>
+              </a:rPr>
+              <a:t>≥ 25 fields</a:t>
+            </a:r>
+            <a:endParaRPr lang="en-US" sz="1100" dirty="0"/>
+          </a:p>
+          <a:p>
+            <a:pPr marL="342900" indent="-342900">
+              <a:spcAft>
+                <a:spcPts val="300"/>
+              </a:spcAft>
+              <a:buSzPct val="100000"/>
+              <a:buChar char="•"/>
+            </a:pPr>
+            <a:r>
+              <a:rPr lang="en-US" sz="1100" dirty="0">
+                <a:solidFill>
+                  <a:srgbClr val="1E293B"/>
+                </a:solidFill>
+                <a:latin typeface="Calibri" pitchFamily="34" charset="0"/>
+                <a:ea typeface="Calibri" pitchFamily="34" charset="-122"/>
+                <a:cs typeface="Calibri" pitchFamily="34" charset="-120"/>
+              </a:rPr>
+              <a:t>≥ 30 public methods</a:t>
+            </a:r>
+            <a:endParaRPr lang="en-US" sz="1100" dirty="0"/>
+          </a:p>
+          <a:p>
+            <a:pPr marL="342900" indent="-342900">
+              <a:spcAft>
+                <a:spcPts val="300"/>
+              </a:spcAft>
+              <a:buSzPct val="100000"/>
+              <a:buChar char="•"/>
+            </a:pPr>
+            <a:r>
+              <a:rPr lang="en-US" sz="1100" dirty="0">
+                <a:solidFill>
+                  <a:srgbClr val="1E293B"/>
+                </a:solidFill>
+                <a:latin typeface="Calibri" pitchFamily="34" charset="0"/>
+                <a:ea typeface="Calibri" pitchFamily="34" charset="-122"/>
+                <a:cs typeface="Calibri" pitchFamily="34" charset="-120"/>
+              </a:rPr>
+              <a:t>≥ 1000 lines of code</a:t>
+            </a:r>
+            <a:endParaRPr lang="en-US" sz="1100" dirty="0"/>
+          </a:p>
+          <a:p>
+            <a:pPr marL="342900" indent="-342900">
+              <a:spcAft>
+                <a:spcPts val="300"/>
+              </a:spcAft>
+              <a:buSzPct val="100000"/>
+              <a:buChar char="•"/>
+            </a:pPr>
+            <a:r>
+              <a:rPr lang="en-US" sz="1100" dirty="0">
+                <a:solidFill>
+                  <a:srgbClr val="1E293B"/>
+                </a:solidFill>
+                <a:latin typeface="Calibri" pitchFamily="34" charset="0"/>
+                <a:ea typeface="Calibri" pitchFamily="34" charset="-122"/>
+                <a:cs typeface="Calibri" pitchFamily="34" charset="-120"/>
+              </a:rPr>
+              <a:t>≥ 20 distinct import domains</a:t>
+            </a:r>
+            <a:endParaRPr lang="en-US" sz="1100" dirty="0"/>
+          </a:p>
+          <a:p>
+            <a:pPr marL="342900" indent="-342900">
+              <a:spcAft>
+                <a:spcPts val="300"/>
+              </a:spcAft>
+              <a:buSzPct val="100000"/>
+              <a:buChar char="•"/>
+            </a:pPr>
+            <a:r>
+              <a:rPr lang="en-US" sz="1100" dirty="0">
+                <a:solidFill>
+                  <a:srgbClr val="1E293B"/>
+                </a:solidFill>
+                <a:latin typeface="Calibri" pitchFamily="34" charset="0"/>
+                <a:ea typeface="Calibri" pitchFamily="34" charset="-122"/>
+                <a:cs typeface="Calibri" pitchFamily="34" charset="-120"/>
+              </a:rPr>
+              <a:t>≥ 12 constructor parameters</a:t>
+            </a:r>
+            <a:endParaRPr lang="en-US" sz="1100" dirty="0"/>
+          </a:p>
+          <a:p>
+            <a:pPr marL="342900" indent="-342900">
+              <a:spcAft>
+                <a:spcPts val="300"/>
+              </a:spcAft>
+              <a:buSzPct val="100000"/>
+              <a:buChar char="•"/>
+            </a:pPr>
+            <a:r>
+              <a:rPr lang="en-US" sz="1100" dirty="0">
+                <a:solidFill>
+                  <a:srgbClr val="1E293B"/>
+                </a:solidFill>
+                <a:latin typeface="Calibri" pitchFamily="34" charset="0"/>
+                <a:ea typeface="Calibri" pitchFamily="34" charset="-122"/>
+                <a:cs typeface="Calibri" pitchFamily="34" charset="-120"/>
+              </a:rPr>
+              <a:t>TCC &lt; 0.5  (Bieman &amp; Kang, 1995)</a:t>
+            </a:r>
+            <a:endParaRPr lang="en-US" sz="1100" dirty="0"/>
+          </a:p>
+        </p:txBody>
+      </p:sp>
+      <p:sp>
+        <p:nvSpPr>
+          <p:cNvPr id="20" name="Shape 18"/>
+          <p:cNvSpPr/>
+          <p:nvPr/>
+        </p:nvSpPr>
+        <p:spPr>
+          <a:xfrm>
+            <a:off x="4754880" y="3767328"/>
+            <a:ext cx="457200" cy="36576"/>
+          </a:xfrm>
+          <a:prstGeom prst="rect">
+            <a:avLst/>
+          </a:prstGeom>
+          <a:solidFill>
+            <a:srgbClr val="0D9488"/>
+          </a:solidFill>
+          <a:ln w="12700">
+            <a:solidFill>
+              <a:srgbClr val="0D9488"/>
+            </a:solidFill>
+            <a:prstDash val="solid"/>
+          </a:ln>
+        </p:spPr>
+        <p:txBody>
+          <a:bodyPr/>
+          <a:lstStyle/>
+          <a:p>
+            <a:endParaRPr lang="en-US"/>
+          </a:p>
+        </p:txBody>
+      </p:sp>
+      <p:sp>
+        <p:nvSpPr>
+          <p:cNvPr id="21" name="Text 19"/>
+          <p:cNvSpPr/>
+          <p:nvPr/>
+        </p:nvSpPr>
+        <p:spPr>
+          <a:xfrm>
+            <a:off x="4754880" y="3886200"/>
+            <a:ext cx="3840480" cy="457200"/>
+          </a:xfrm>
+          <a:prstGeom prst="rect">
+            <a:avLst/>
+          </a:prstGeom>
+          <a:noFill/>
+          <a:ln/>
+        </p:spPr>
+        <p:txBody>
+          <a:bodyPr wrap="square" lIns="0" tIns="0" rIns="0" bIns="0" rtlCol="0" anchor="ctr"/>
+          <a:lstStyle/>
+          <a:p>
+            <a:pPr marL="0" indent="0">
+              <a:buNone/>
+            </a:pPr>
+            <a:r>
+              <a:rPr lang="en-US" sz="1150" b="1" dirty="0">
+                <a:solidFill>
+                  <a:srgbClr val="0F2A44"/>
+                </a:solidFill>
+                <a:latin typeface="Calibri" pitchFamily="34" charset="0"/>
+                <a:ea typeface="Calibri" pitchFamily="34" charset="-122"/>
+                <a:cs typeface="Calibri" pitchFamily="34" charset="-120"/>
+              </a:rPr>
+              <a:t>Flag class as God Class if ≥ 3 of 6 thresholds are exceeded</a:t>
             </a:r>
             <a:endParaRPr lang="en-US" sz="1150" dirty="0"/>
           </a:p>
@@ -8777,7 +9054,7 @@
       </p:sp>
       <p:sp>
         <p:nvSpPr>
-          <p:cNvPr id="41" name="Text 39"/>
+          <p:cNvPr id="22" name="Text 20"/>
           <p:cNvSpPr/>
           <p:nvPr/>
         </p:nvSpPr>
@@ -8796,7 +9073,7 @@
           <a:bodyPr wrap="square" lIns="0" tIns="0" rIns="0" bIns="0" rtlCol="0" anchor="ctr"/>
           <a:lstStyle/>
           <a:p>
-            <a:pPr algn="r" indent="0" marL="0">
+            <a:pPr marL="0" indent="0" algn="r">
               <a:buNone/>
             </a:pPr>
             <a:r>
@@ -8808,7 +9085,7 @@
                 <a:ea typeface="Calibri" pitchFamily="34" charset="-122"/>
                 <a:cs typeface="Calibri" pitchFamily="34" charset="-120"/>
               </a:rPr>
-              <a:t>6 / 12</a:t>
+              <a:t>5 / 12</a:t>
             </a:r>
             <a:endParaRPr lang="en-US" sz="900" dirty="0"/>
           </a:p>
@@ -8830,6 +9107,7 @@
         <a:solidFill>
           <a:srgbClr val="FFFFFF"/>
         </a:solidFill>
+        <a:effectLst/>
       </p:bgPr>
     </p:bg>
     <p:spTree>
@@ -8867,7 +9145,7 @@
           <a:bodyPr wrap="square" lIns="0" tIns="0" rIns="0" bIns="0" rtlCol="0" anchor="ctr"/>
           <a:lstStyle/>
           <a:p>
-            <a:pPr indent="0" marL="0">
+            <a:pPr marL="0" indent="0">
               <a:buNone/>
             </a:pPr>
             <a:r>
@@ -8909,6 +9187,13 @@
             <a:prstDash val="solid"/>
           </a:ln>
         </p:spPr>
+        <p:txBody>
+          <a:bodyPr/>
+          <a:lstStyle/>
+          <a:p>
+            <a:endParaRPr lang="en-US"/>
+          </a:p>
+        </p:txBody>
       </p:sp>
       <p:sp>
         <p:nvSpPr>
@@ -8934,6 +9219,13 @@
             <a:prstDash val="solid"/>
           </a:ln>
         </p:spPr>
+        <p:txBody>
+          <a:bodyPr/>
+          <a:lstStyle/>
+          <a:p>
+            <a:endParaRPr lang="en-US"/>
+          </a:p>
+        </p:txBody>
       </p:sp>
       <p:sp>
         <p:nvSpPr>
@@ -8956,7 +9248,7 @@
           <a:bodyPr wrap="square" lIns="0" tIns="0" rIns="0" bIns="0" rtlCol="0" anchor="ctr"/>
           <a:lstStyle/>
           <a:p>
-            <a:pPr indent="0" marL="0">
+            <a:pPr marL="0" indent="0">
               <a:buNone/>
             </a:pPr>
             <a:r>
@@ -8995,7 +9287,7 @@
           <a:bodyPr wrap="square" lIns="0" tIns="0" rIns="0" bIns="0" rtlCol="0" anchor="ctr"/>
           <a:lstStyle/>
           <a:p>
-            <a:pPr indent="0" marL="0">
+            <a:pPr marL="0" indent="0">
               <a:buNone/>
             </a:pPr>
             <a:r>
@@ -9034,7 +9326,7 @@
           <a:bodyPr wrap="square" lIns="0" tIns="0" rIns="0" bIns="0" rtlCol="0" anchor="ctr"/>
           <a:lstStyle/>
           <a:p>
-            <a:pPr indent="0" marL="0">
+            <a:pPr marL="0" indent="0">
               <a:buNone/>
             </a:pPr>
             <a:r>
@@ -9076,6 +9368,13 @@
             <a:prstDash val="solid"/>
           </a:ln>
         </p:spPr>
+        <p:txBody>
+          <a:bodyPr/>
+          <a:lstStyle/>
+          <a:p>
+            <a:endParaRPr lang="en-US"/>
+          </a:p>
+        </p:txBody>
       </p:sp>
       <p:sp>
         <p:nvSpPr>
@@ -9098,7 +9397,7 @@
           <a:bodyPr wrap="square" lIns="0" tIns="0" rIns="0" bIns="0" rtlCol="0" anchor="ctr"/>
           <a:lstStyle/>
           <a:p>
-            <a:pPr indent="0" marL="0">
+            <a:pPr marL="0" indent="0">
               <a:buNone/>
             </a:pPr>
             <a:r>
@@ -9137,7 +9436,7 @@
           <a:bodyPr wrap="square" lIns="0" tIns="0" rIns="0" bIns="0" rtlCol="0" anchor="ctr"/>
           <a:lstStyle/>
           <a:p>
-            <a:pPr indent="0" marL="0">
+            <a:pPr marL="0" indent="0">
               <a:buNone/>
             </a:pPr>
             <a:r>
@@ -9176,7 +9475,7 @@
           <a:bodyPr wrap="square" lIns="0" tIns="0" rIns="0" bIns="0" rtlCol="0" anchor="ctr"/>
           <a:lstStyle/>
           <a:p>
-            <a:pPr indent="0" marL="0">
+            <a:pPr marL="0" indent="0">
               <a:buNone/>
             </a:pPr>
             <a:r>
@@ -9218,6 +9517,13 @@
             <a:prstDash val="solid"/>
           </a:ln>
         </p:spPr>
+        <p:txBody>
+          <a:bodyPr/>
+          <a:lstStyle/>
+          <a:p>
+            <a:endParaRPr lang="en-US"/>
+          </a:p>
+        </p:txBody>
       </p:sp>
       <p:sp>
         <p:nvSpPr>
@@ -9240,7 +9546,7 @@
           <a:bodyPr wrap="square" lIns="0" tIns="0" rIns="0" bIns="0" rtlCol="0" anchor="ctr"/>
           <a:lstStyle/>
           <a:p>
-            <a:pPr indent="0" marL="0">
+            <a:pPr marL="0" indent="0">
               <a:buNone/>
             </a:pPr>
             <a:r>
@@ -9279,7 +9585,7 @@
           <a:bodyPr wrap="square" lIns="0" tIns="0" rIns="0" bIns="0" rtlCol="0" anchor="ctr"/>
           <a:lstStyle/>
           <a:p>
-            <a:pPr indent="0" marL="0">
+            <a:pPr marL="0" indent="0">
               <a:buNone/>
             </a:pPr>
             <a:r>
@@ -9318,7 +9624,7 @@
           <a:bodyPr wrap="square" lIns="0" tIns="0" rIns="0" bIns="0" rtlCol="0" anchor="ctr"/>
           <a:lstStyle/>
           <a:p>
-            <a:pPr indent="0" marL="0">
+            <a:pPr marL="0" indent="0">
               <a:buNone/>
             </a:pPr>
             <a:r>
@@ -9360,6 +9666,13 @@
             <a:prstDash val="solid"/>
           </a:ln>
         </p:spPr>
+        <p:txBody>
+          <a:bodyPr/>
+          <a:lstStyle/>
+          <a:p>
+            <a:endParaRPr lang="en-US"/>
+          </a:p>
+        </p:txBody>
       </p:sp>
       <p:sp>
         <p:nvSpPr>
@@ -9382,7 +9695,7 @@
           <a:bodyPr wrap="square" lIns="0" tIns="0" rIns="0" bIns="0" rtlCol="0" anchor="ctr"/>
           <a:lstStyle/>
           <a:p>
-            <a:pPr indent="0" marL="0">
+            <a:pPr marL="0" indent="0">
               <a:buNone/>
             </a:pPr>
             <a:r>
@@ -9421,7 +9734,7 @@
           <a:bodyPr wrap="square" lIns="0" tIns="0" rIns="0" bIns="0" rtlCol="0" anchor="ctr"/>
           <a:lstStyle/>
           <a:p>
-            <a:pPr indent="0" marL="0">
+            <a:pPr marL="0" indent="0">
               <a:buNone/>
             </a:pPr>
             <a:r>
@@ -9460,7 +9773,7 @@
           <a:bodyPr wrap="square" lIns="0" tIns="0" rIns="0" bIns="0" rtlCol="0" anchor="ctr"/>
           <a:lstStyle/>
           <a:p>
-            <a:pPr indent="0" marL="0">
+            <a:pPr marL="0" indent="0">
               <a:buNone/>
             </a:pPr>
             <a:r>
@@ -9499,7 +9812,7 @@
           <a:bodyPr wrap="square" lIns="0" tIns="0" rIns="0" bIns="0" rtlCol="0" anchor="ctr"/>
           <a:lstStyle/>
           <a:p>
-            <a:pPr indent="0" marL="0">
+            <a:pPr marL="0" indent="0">
               <a:buNone/>
             </a:pPr>
             <a:r>
@@ -9541,6 +9854,13 @@
             <a:prstDash val="solid"/>
           </a:ln>
         </p:spPr>
+        <p:txBody>
+          <a:bodyPr/>
+          <a:lstStyle/>
+          <a:p>
+            <a:endParaRPr lang="en-US"/>
+          </a:p>
+        </p:txBody>
       </p:sp>
       <p:sp>
         <p:nvSpPr>
@@ -9563,7 +9883,7 @@
           <a:bodyPr wrap="square" lIns="0" tIns="0" rIns="0" bIns="0" rtlCol="0" anchor="ctr"/>
           <a:lstStyle/>
           <a:p>
-            <a:pPr indent="0" marL="0">
+            <a:pPr marL="0" indent="0">
               <a:buNone/>
             </a:pPr>
             <a:r>
@@ -9577,9 +9897,6 @@
               </a:rPr>
               <a:t>A  </a:t>
             </a:r>
-            <a:pPr indent="0" marL="0">
-              <a:buNone/>
-            </a:pPr>
             <a:r>
               <a:rPr lang="en-US" sz="1100" dirty="0">
                 <a:solidFill>
@@ -9619,6 +9936,13 @@
             <a:prstDash val="solid"/>
           </a:ln>
         </p:spPr>
+        <p:txBody>
+          <a:bodyPr/>
+          <a:lstStyle/>
+          <a:p>
+            <a:endParaRPr lang="en-US"/>
+          </a:p>
+        </p:txBody>
       </p:sp>
       <p:sp>
         <p:nvSpPr>
@@ -9641,7 +9965,7 @@
           <a:bodyPr wrap="square" lIns="0" tIns="0" rIns="0" bIns="0" rtlCol="0" anchor="ctr"/>
           <a:lstStyle/>
           <a:p>
-            <a:pPr indent="0" marL="0">
+            <a:pPr marL="0" indent="0">
               <a:buNone/>
             </a:pPr>
             <a:r>
@@ -9655,9 +9979,6 @@
               </a:rPr>
               <a:t>B  </a:t>
             </a:r>
-            <a:pPr indent="0" marL="0">
-              <a:buNone/>
-            </a:pPr>
             <a:r>
               <a:rPr lang="en-US" sz="1100" dirty="0">
                 <a:solidFill>
@@ -9697,6 +10018,13 @@
             <a:prstDash val="solid"/>
           </a:ln>
         </p:spPr>
+        <p:txBody>
+          <a:bodyPr/>
+          <a:lstStyle/>
+          <a:p>
+            <a:endParaRPr lang="en-US"/>
+          </a:p>
+        </p:txBody>
       </p:sp>
       <p:sp>
         <p:nvSpPr>
@@ -9719,7 +10047,7 @@
           <a:bodyPr wrap="square" lIns="0" tIns="0" rIns="0" bIns="0" rtlCol="0" anchor="ctr"/>
           <a:lstStyle/>
           <a:p>
-            <a:pPr indent="0" marL="0">
+            <a:pPr marL="0" indent="0">
               <a:buNone/>
             </a:pPr>
             <a:r>
@@ -9733,9 +10061,6 @@
               </a:rPr>
               <a:t>C  </a:t>
             </a:r>
-            <a:pPr indent="0" marL="0">
-              <a:buNone/>
-            </a:pPr>
             <a:r>
               <a:rPr lang="en-US" sz="1100" dirty="0">
                 <a:solidFill>
@@ -9775,6 +10100,13 @@
             <a:prstDash val="solid"/>
           </a:ln>
         </p:spPr>
+        <p:txBody>
+          <a:bodyPr/>
+          <a:lstStyle/>
+          <a:p>
+            <a:endParaRPr lang="en-US"/>
+          </a:p>
+        </p:txBody>
       </p:sp>
       <p:sp>
         <p:nvSpPr>
@@ -9797,7 +10129,7 @@
           <a:bodyPr wrap="square" lIns="0" tIns="0" rIns="0" bIns="0" rtlCol="0" anchor="ctr"/>
           <a:lstStyle/>
           <a:p>
-            <a:pPr indent="0" marL="0">
+            <a:pPr marL="0" indent="0">
               <a:buNone/>
             </a:pPr>
             <a:r>
@@ -9811,9 +10143,6 @@
               </a:rPr>
               <a:t>D  </a:t>
             </a:r>
-            <a:pPr indent="0" marL="0">
-              <a:buNone/>
-            </a:pPr>
             <a:r>
               <a:rPr lang="en-US" sz="1100" dirty="0">
                 <a:solidFill>
@@ -9853,6 +10182,13 @@
             <a:prstDash val="solid"/>
           </a:ln>
         </p:spPr>
+        <p:txBody>
+          <a:bodyPr/>
+          <a:lstStyle/>
+          <a:p>
+            <a:endParaRPr lang="en-US"/>
+          </a:p>
+        </p:txBody>
       </p:sp>
       <p:sp>
         <p:nvSpPr>
@@ -9875,7 +10211,7 @@
           <a:bodyPr wrap="square" lIns="0" tIns="0" rIns="0" bIns="0" rtlCol="0" anchor="ctr"/>
           <a:lstStyle/>
           <a:p>
-            <a:pPr indent="0" marL="0">
+            <a:pPr marL="0" indent="0">
               <a:buNone/>
             </a:pPr>
             <a:r>
@@ -9889,9 +10225,6 @@
               </a:rPr>
               <a:t>F  </a:t>
             </a:r>
-            <a:pPr indent="0" marL="0">
-              <a:buNone/>
-            </a:pPr>
             <a:r>
               <a:rPr lang="en-US" sz="1100" dirty="0">
                 <a:solidFill>
@@ -9928,7 +10261,7 @@
           <a:bodyPr wrap="square" lIns="0" tIns="0" rIns="0" bIns="0" rtlCol="0" anchor="ctr"/>
           <a:lstStyle/>
           <a:p>
-            <a:pPr indent="0" marL="0">
+            <a:pPr marL="0" indent="0">
               <a:buNone/>
             </a:pPr>
             <a:r>
@@ -9967,7 +10300,7 @@
           <a:bodyPr wrap="square" lIns="0" tIns="0" rIns="0" bIns="0" rtlCol="0" anchor="ctr"/>
           <a:lstStyle/>
           <a:p>
-            <a:pPr indent="0" marL="0">
+            <a:pPr marL="0" indent="0">
               <a:buNone/>
             </a:pPr>
             <a:r>
@@ -10006,7 +10339,7 @@
           <a:bodyPr wrap="square" lIns="0" tIns="0" rIns="0" bIns="0" rtlCol="0" anchor="ctr"/>
           <a:lstStyle/>
           <a:p>
-            <a:pPr algn="r" indent="0" marL="0">
+            <a:pPr marL="0" indent="0" algn="r">
               <a:buNone/>
             </a:pPr>
             <a:r>
@@ -10040,6 +10373,7 @@
         <a:solidFill>
           <a:srgbClr val="FFFFFF"/>
         </a:solidFill>
+        <a:effectLst/>
       </p:bgPr>
     </p:bg>
     <p:spTree>
@@ -10077,7 +10411,7 @@
           <a:bodyPr wrap="square" lIns="0" tIns="0" rIns="0" bIns="0" rtlCol="0" anchor="ctr"/>
           <a:lstStyle/>
           <a:p>
-            <a:pPr indent="0" marL="0">
+            <a:pPr marL="0" indent="0">
               <a:buNone/>
             </a:pPr>
             <a:r>
@@ -10119,6 +10453,13 @@
             <a:prstDash val="solid"/>
           </a:ln>
         </p:spPr>
+        <p:txBody>
+          <a:bodyPr/>
+          <a:lstStyle/>
+          <a:p>
+            <a:endParaRPr lang="en-US"/>
+          </a:p>
+        </p:txBody>
       </p:sp>
       <p:sp>
         <p:nvSpPr>
@@ -10141,7 +10482,7 @@
           <a:bodyPr wrap="square" lIns="0" tIns="0" rIns="0" bIns="0" rtlCol="0" anchor="ctr"/>
           <a:lstStyle/>
           <a:p>
-            <a:pPr indent="0" marL="0">
+            <a:pPr marL="0" indent="0">
               <a:buNone/>
             </a:pPr>
             <a:r>
@@ -10180,7 +10521,7 @@
           <a:bodyPr wrap="square" lIns="0" tIns="0" rIns="0" bIns="0" rtlCol="0" anchor="ctr"/>
           <a:lstStyle/>
           <a:p>
-            <a:pPr indent="0" marL="0">
+            <a:pPr marL="0" indent="0">
               <a:buNone/>
             </a:pPr>
             <a:r>
@@ -10219,7 +10560,7 @@
           <a:bodyPr wrap="square" lIns="0" tIns="0" rIns="0" bIns="0" rtlCol="0" anchor="ctr"/>
           <a:lstStyle/>
           <a:p>
-            <a:pPr indent="0" marL="0">
+            <a:pPr marL="0" indent="0">
               <a:buNone/>
             </a:pPr>
             <a:r>
@@ -10258,7 +10599,7 @@
           <a:bodyPr wrap="square" lIns="0" tIns="0" rIns="0" bIns="0" rtlCol="0" anchor="ctr"/>
           <a:lstStyle/>
           <a:p>
-            <a:pPr algn="r" indent="0" marL="0">
+            <a:pPr marL="0" indent="0" algn="r">
               <a:buNone/>
             </a:pPr>
             <a:r>
@@ -10300,6 +10641,13 @@
             <a:prstDash val="solid"/>
           </a:ln>
         </p:spPr>
+        <p:txBody>
+          <a:bodyPr/>
+          <a:lstStyle/>
+          <a:p>
+            <a:endParaRPr lang="en-US"/>
+          </a:p>
+        </p:txBody>
       </p:sp>
       <p:sp>
         <p:nvSpPr>
@@ -10322,7 +10670,7 @@
           <a:bodyPr wrap="square" lIns="0" tIns="0" rIns="0" bIns="0" rtlCol="0" anchor="ctr"/>
           <a:lstStyle/>
           <a:p>
-            <a:pPr indent="0" marL="0">
+            <a:pPr marL="0" indent="0">
               <a:buNone/>
             </a:pPr>
             <a:r>
@@ -10361,7 +10709,7 @@
           <a:bodyPr wrap="square" lIns="0" tIns="0" rIns="0" bIns="0" rtlCol="0" anchor="ctr"/>
           <a:lstStyle/>
           <a:p>
-            <a:pPr indent="0" marL="0">
+            <a:pPr marL="0" indent="0">
               <a:buNone/>
             </a:pPr>
             <a:r>
@@ -10400,7 +10748,7 @@
           <a:bodyPr wrap="square" lIns="0" tIns="0" rIns="0" bIns="0" rtlCol="0" anchor="ctr"/>
           <a:lstStyle/>
           <a:p>
-            <a:pPr algn="r" indent="0" marL="0">
+            <a:pPr marL="0" indent="0" algn="r">
               <a:buNone/>
             </a:pPr>
             <a:r>
@@ -10442,6 +10790,13 @@
             <a:prstDash val="solid"/>
           </a:ln>
         </p:spPr>
+        <p:txBody>
+          <a:bodyPr/>
+          <a:lstStyle/>
+          <a:p>
+            <a:endParaRPr lang="en-US"/>
+          </a:p>
+        </p:txBody>
       </p:sp>
       <p:sp>
         <p:nvSpPr>
@@ -10464,7 +10819,7 @@
           <a:bodyPr wrap="square" lIns="0" tIns="0" rIns="0" bIns="0" rtlCol="0" anchor="ctr"/>
           <a:lstStyle/>
           <a:p>
-            <a:pPr indent="0" marL="0">
+            <a:pPr marL="0" indent="0">
               <a:buNone/>
             </a:pPr>
             <a:r>
@@ -10503,7 +10858,7 @@
           <a:bodyPr wrap="square" lIns="0" tIns="0" rIns="0" bIns="0" rtlCol="0" anchor="ctr"/>
           <a:lstStyle/>
           <a:p>
-            <a:pPr indent="0" marL="0">
+            <a:pPr marL="0" indent="0">
               <a:buNone/>
             </a:pPr>
             <a:r>
@@ -10542,7 +10897,7 @@
           <a:bodyPr wrap="square" lIns="0" tIns="0" rIns="0" bIns="0" rtlCol="0" anchor="ctr"/>
           <a:lstStyle/>
           <a:p>
-            <a:pPr algn="r" indent="0" marL="0">
+            <a:pPr marL="0" indent="0" algn="r">
               <a:buNone/>
             </a:pPr>
             <a:r>
@@ -10584,6 +10939,13 @@
             <a:prstDash val="solid"/>
           </a:ln>
         </p:spPr>
+        <p:txBody>
+          <a:bodyPr/>
+          <a:lstStyle/>
+          <a:p>
+            <a:endParaRPr lang="en-US"/>
+          </a:p>
+        </p:txBody>
       </p:sp>
       <p:sp>
         <p:nvSpPr>
@@ -10606,7 +10968,7 @@
           <a:bodyPr wrap="square" lIns="0" tIns="0" rIns="0" bIns="0" rtlCol="0" anchor="ctr"/>
           <a:lstStyle/>
           <a:p>
-            <a:pPr indent="0" marL="0">
+            <a:pPr marL="0" indent="0">
               <a:buNone/>
             </a:pPr>
             <a:r>
@@ -10645,7 +11007,7 @@
           <a:bodyPr wrap="square" lIns="0" tIns="0" rIns="0" bIns="0" rtlCol="0" anchor="ctr"/>
           <a:lstStyle/>
           <a:p>
-            <a:pPr indent="0" marL="0">
+            <a:pPr marL="0" indent="0">
               <a:buNone/>
             </a:pPr>
             <a:r>
@@ -10684,7 +11046,7 @@
           <a:bodyPr wrap="square" lIns="0" tIns="0" rIns="0" bIns="0" rtlCol="0" anchor="ctr"/>
           <a:lstStyle/>
           <a:p>
-            <a:pPr algn="r" indent="0" marL="0">
+            <a:pPr marL="0" indent="0" algn="r">
               <a:buNone/>
             </a:pPr>
             <a:r>
@@ -10726,6 +11088,13 @@
             <a:prstDash val="solid"/>
           </a:ln>
         </p:spPr>
+        <p:txBody>
+          <a:bodyPr/>
+          <a:lstStyle/>
+          <a:p>
+            <a:endParaRPr lang="en-US"/>
+          </a:p>
+        </p:txBody>
       </p:sp>
       <p:sp>
         <p:nvSpPr>
@@ -10748,7 +11117,7 @@
           <a:bodyPr wrap="square" lIns="0" tIns="0" rIns="0" bIns="0" rtlCol="0" anchor="ctr"/>
           <a:lstStyle/>
           <a:p>
-            <a:pPr indent="0" marL="0">
+            <a:pPr marL="0" indent="0">
               <a:buNone/>
             </a:pPr>
             <a:r>
@@ -10787,7 +11156,7 @@
           <a:bodyPr wrap="square" lIns="0" tIns="0" rIns="0" bIns="0" rtlCol="0" anchor="ctr"/>
           <a:lstStyle/>
           <a:p>
-            <a:pPr indent="0" marL="0">
+            <a:pPr marL="0" indent="0">
               <a:buNone/>
             </a:pPr>
             <a:r>
@@ -10826,7 +11195,7 @@
           <a:bodyPr wrap="square" lIns="0" tIns="0" rIns="0" bIns="0" rtlCol="0" anchor="ctr"/>
           <a:lstStyle/>
           <a:p>
-            <a:pPr algn="r" indent="0" marL="0">
+            <a:pPr marL="0" indent="0" algn="r">
               <a:buNone/>
             </a:pPr>
             <a:r>
@@ -10868,6 +11237,13 @@
             <a:prstDash val="solid"/>
           </a:ln>
         </p:spPr>
+        <p:txBody>
+          <a:bodyPr/>
+          <a:lstStyle/>
+          <a:p>
+            <a:endParaRPr lang="en-US"/>
+          </a:p>
+        </p:txBody>
       </p:sp>
       <p:sp>
         <p:nvSpPr>
@@ -10890,7 +11266,7 @@
           <a:bodyPr wrap="square" lIns="0" tIns="0" rIns="0" bIns="0" rtlCol="0" anchor="ctr"/>
           <a:lstStyle/>
           <a:p>
-            <a:pPr indent="0" marL="0">
+            <a:pPr marL="0" indent="0">
               <a:buNone/>
             </a:pPr>
             <a:r>
@@ -10929,7 +11305,7 @@
           <a:bodyPr wrap="square" lIns="0" tIns="0" rIns="0" bIns="0" rtlCol="0" anchor="ctr"/>
           <a:lstStyle/>
           <a:p>
-            <a:pPr indent="0" marL="0">
+            <a:pPr marL="0" indent="0">
               <a:buNone/>
             </a:pPr>
             <a:r>
@@ -10941,7 +11317,75 @@
                 <a:ea typeface="Calibri" pitchFamily="34" charset="-122"/>
                 <a:cs typeface="Calibri" pitchFamily="34" charset="-120"/>
               </a:rPr>
-              <a:t>Deductions spread across all four categories: the anti-pattern load clamps AP to 0; Architecture loses 9 to dependency-graph coupling; Code Quality 8 to smell density; Service Sizing 3 to one nano service.</a:t>
+              <a:t>Deductions spread across all four categories: </a:t>
+            </a:r>
+          </a:p>
+          <a:p>
+            <a:pPr marL="171450" indent="-171450">
+              <a:buFont typeface="Arial" panose="020B0604020202020204" pitchFamily="34" charset="0"/>
+              <a:buChar char="•"/>
+            </a:pPr>
+            <a:r>
+              <a:rPr lang="en-US" sz="1000" i="1" dirty="0">
+                <a:solidFill>
+                  <a:srgbClr val="64748B"/>
+                </a:solidFill>
+                <a:latin typeface="Calibri" pitchFamily="34" charset="0"/>
+                <a:ea typeface="Calibri" pitchFamily="34" charset="-122"/>
+                <a:cs typeface="Calibri" pitchFamily="34" charset="-120"/>
+              </a:rPr>
+              <a:t>Anti-pattern load clamps AP to 0</a:t>
+            </a:r>
+          </a:p>
+          <a:p>
+            <a:pPr marL="171450" indent="-171450">
+              <a:buFont typeface="Arial" panose="020B0604020202020204" pitchFamily="34" charset="0"/>
+              <a:buChar char="•"/>
+            </a:pPr>
+            <a:r>
+              <a:rPr lang="en-US" sz="1000" i="1" dirty="0">
+                <a:solidFill>
+                  <a:srgbClr val="64748B"/>
+                </a:solidFill>
+                <a:latin typeface="Calibri" pitchFamily="34" charset="0"/>
+                <a:ea typeface="Calibri" pitchFamily="34" charset="-122"/>
+                <a:cs typeface="Calibri" pitchFamily="34" charset="-120"/>
+              </a:rPr>
+              <a:t>Architecture loses 9 to dependency-graph coupling</a:t>
+            </a:r>
+          </a:p>
+          <a:p>
+            <a:pPr marL="171450" indent="-171450">
+              <a:buFont typeface="Arial" panose="020B0604020202020204" pitchFamily="34" charset="0"/>
+              <a:buChar char="•"/>
+            </a:pPr>
+            <a:r>
+              <a:rPr lang="en-US" sz="1000" i="1" dirty="0">
+                <a:solidFill>
+                  <a:srgbClr val="64748B"/>
+                </a:solidFill>
+                <a:latin typeface="Calibri" pitchFamily="34" charset="0"/>
+                <a:ea typeface="Calibri" pitchFamily="34" charset="-122"/>
+                <a:cs typeface="Calibri" pitchFamily="34" charset="-120"/>
+              </a:rPr>
+              <a:t>Code Quality 8 to smell density</a:t>
+            </a:r>
+          </a:p>
+          <a:p>
+            <a:pPr marL="171450" indent="-171450">
+              <a:buFont typeface="Arial" panose="020B0604020202020204" pitchFamily="34" charset="0"/>
+              <a:buChar char="•"/>
+            </a:pPr>
+            <a:r>
+              <a:rPr lang="en-US" sz="1000" i="1" dirty="0">
+                <a:solidFill>
+                  <a:srgbClr val="64748B"/>
+                </a:solidFill>
+                <a:latin typeface="Calibri" pitchFamily="34" charset="0"/>
+                <a:ea typeface="Calibri" pitchFamily="34" charset="-122"/>
+                <a:cs typeface="Calibri" pitchFamily="34" charset="-120"/>
+              </a:rPr>
+              <a:t>Service Sizing 3 to one nano service</a:t>
             </a:r>
             <a:endParaRPr lang="en-US" sz="1000" dirty="0"/>
           </a:p>
@@ -10968,7 +11412,7 @@
           <a:bodyPr wrap="square" lIns="0" tIns="0" rIns="0" bIns="0" rtlCol="0" anchor="ctr"/>
           <a:lstStyle/>
           <a:p>
-            <a:pPr indent="0" marL="0">
+            <a:pPr marL="0" indent="0">
               <a:buNone/>
             </a:pPr>
             <a:r>
@@ -11007,7 +11451,7 @@
           <a:bodyPr wrap="square" lIns="0" tIns="0" rIns="0" bIns="0" rtlCol="0" anchor="ctr"/>
           <a:lstStyle/>
           <a:p>
-            <a:pPr indent="0" marL="0">
+            <a:pPr marL="0" indent="0">
               <a:buNone/>
             </a:pPr>
             <a:r>
@@ -11049,6 +11493,13 @@
             <a:prstDash val="solid"/>
           </a:ln>
         </p:spPr>
+        <p:txBody>
+          <a:bodyPr/>
+          <a:lstStyle/>
+          <a:p>
+            <a:endParaRPr lang="en-US"/>
+          </a:p>
+        </p:txBody>
       </p:sp>
       <p:sp>
         <p:nvSpPr>
@@ -11071,7 +11522,7 @@
           <a:bodyPr wrap="square" lIns="0" tIns="0" rIns="0" bIns="0" rtlCol="0" anchor="ctr"/>
           <a:lstStyle/>
           <a:p>
-            <a:pPr indent="0" marL="0">
+            <a:pPr marL="0" indent="0">
               <a:buNone/>
             </a:pPr>
             <a:r>
@@ -11110,7 +11561,7 @@
           <a:bodyPr wrap="square" lIns="0" tIns="0" rIns="0" bIns="0" rtlCol="0" anchor="ctr"/>
           <a:lstStyle/>
           <a:p>
-            <a:pPr indent="0" marL="0">
+            <a:pPr marL="0" indent="0">
               <a:buNone/>
             </a:pPr>
             <a:r>
@@ -11152,6 +11603,13 @@
             <a:prstDash val="solid"/>
           </a:ln>
         </p:spPr>
+        <p:txBody>
+          <a:bodyPr/>
+          <a:lstStyle/>
+          <a:p>
+            <a:endParaRPr lang="en-US"/>
+          </a:p>
+        </p:txBody>
       </p:sp>
       <p:sp>
         <p:nvSpPr>
@@ -11177,6 +11635,13 @@
             <a:prstDash val="solid"/>
           </a:ln>
         </p:spPr>
+        <p:txBody>
+          <a:bodyPr/>
+          <a:lstStyle/>
+          <a:p>
+            <a:endParaRPr lang="en-US"/>
+          </a:p>
+        </p:txBody>
       </p:sp>
       <p:sp>
         <p:nvSpPr>
@@ -11199,7 +11664,7 @@
           <a:bodyPr wrap="square" lIns="0" tIns="0" rIns="0" bIns="0" rtlCol="0" anchor="ctr"/>
           <a:lstStyle/>
           <a:p>
-            <a:pPr indent="0" marL="0">
+            <a:pPr marL="0" indent="0">
               <a:buNone/>
             </a:pPr>
             <a:r>
@@ -11238,7 +11703,7 @@
           <a:bodyPr wrap="square" lIns="0" tIns="0" rIns="0" bIns="0" rtlCol="0" anchor="ctr"/>
           <a:lstStyle/>
           <a:p>
-            <a:pPr indent="0" marL="0">
+            <a:pPr marL="0" indent="0">
               <a:buNone/>
             </a:pPr>
             <a:r>
@@ -11280,6 +11745,13 @@
             <a:prstDash val="solid"/>
           </a:ln>
         </p:spPr>
+        <p:txBody>
+          <a:bodyPr/>
+          <a:lstStyle/>
+          <a:p>
+            <a:endParaRPr lang="en-US"/>
+          </a:p>
+        </p:txBody>
       </p:sp>
       <p:sp>
         <p:nvSpPr>
@@ -11305,6 +11777,13 @@
             <a:prstDash val="solid"/>
           </a:ln>
         </p:spPr>
+        <p:txBody>
+          <a:bodyPr/>
+          <a:lstStyle/>
+          <a:p>
+            <a:endParaRPr lang="en-US"/>
+          </a:p>
+        </p:txBody>
       </p:sp>
       <p:sp>
         <p:nvSpPr>
@@ -11327,7 +11806,7 @@
           <a:bodyPr wrap="square" lIns="0" tIns="0" rIns="0" bIns="0" rtlCol="0" anchor="ctr"/>
           <a:lstStyle/>
           <a:p>
-            <a:pPr indent="0" marL="0">
+            <a:pPr marL="0" indent="0">
               <a:buNone/>
             </a:pPr>
             <a:r>
@@ -11366,7 +11845,7 @@
           <a:bodyPr wrap="square" lIns="0" tIns="0" rIns="0" bIns="0" rtlCol="0" anchor="ctr"/>
           <a:lstStyle/>
           <a:p>
-            <a:pPr indent="0" marL="0">
+            <a:pPr marL="0" indent="0">
               <a:buNone/>
             </a:pPr>
             <a:r>
@@ -11408,6 +11887,13 @@
             <a:prstDash val="solid"/>
           </a:ln>
         </p:spPr>
+        <p:txBody>
+          <a:bodyPr/>
+          <a:lstStyle/>
+          <a:p>
+            <a:endParaRPr lang="en-US"/>
+          </a:p>
+        </p:txBody>
       </p:sp>
       <p:sp>
         <p:nvSpPr>
@@ -11433,6 +11919,13 @@
             <a:prstDash val="solid"/>
           </a:ln>
         </p:spPr>
+        <p:txBody>
+          <a:bodyPr/>
+          <a:lstStyle/>
+          <a:p>
+            <a:endParaRPr lang="en-US"/>
+          </a:p>
+        </p:txBody>
       </p:sp>
       <p:sp>
         <p:nvSpPr>
@@ -11455,7 +11948,7 @@
           <a:bodyPr wrap="square" lIns="0" tIns="0" rIns="0" bIns="0" rtlCol="0" anchor="ctr"/>
           <a:lstStyle/>
           <a:p>
-            <a:pPr indent="0" marL="0">
+            <a:pPr marL="0" indent="0">
               <a:buNone/>
             </a:pPr>
             <a:r>
@@ -11494,7 +11987,7 @@
           <a:bodyPr wrap="square" lIns="0" tIns="0" rIns="0" bIns="0" rtlCol="0" anchor="ctr"/>
           <a:lstStyle/>
           <a:p>
-            <a:pPr indent="0" marL="0">
+            <a:pPr marL="0" indent="0">
               <a:buNone/>
             </a:pPr>
             <a:r>
@@ -11508,9 +12001,6 @@
               </a:rPr>
               <a:t>40</a:t>
             </a:r>
-            <a:pPr indent="0" marL="0">
-              <a:buNone/>
-            </a:pPr>
             <a:r>
               <a:rPr lang="en-US" sz="1400" b="1" dirty="0">
                 <a:solidFill>
@@ -11523,45 +12013,6 @@
               <a:t>  / 100  ·  Grade F</a:t>
             </a:r>
             <a:endParaRPr lang="en-US" sz="4000" dirty="0"/>
-          </a:p>
-        </p:txBody>
-      </p:sp>
-      <p:sp>
-        <p:nvSpPr>
-          <p:cNvPr id="44" name="Text 42"/>
-          <p:cNvSpPr/>
-          <p:nvPr/>
-        </p:nvSpPr>
-        <p:spPr>
-          <a:xfrm>
-            <a:off x="4937760" y="4206240"/>
-            <a:ext cx="3657600" cy="274320"/>
-          </a:xfrm>
-          <a:prstGeom prst="rect">
-            <a:avLst/>
-          </a:prstGeom>
-          <a:noFill/>
-          <a:ln/>
-        </p:spPr>
-        <p:txBody>
-          <a:bodyPr wrap="square" lIns="0" tIns="0" rIns="0" bIns="0" rtlCol="0" anchor="ctr"/>
-          <a:lstStyle/>
-          <a:p>
-            <a:pPr indent="0" marL="0">
-              <a:buNone/>
-            </a:pPr>
-            <a:r>
-              <a:rPr lang="en-US" sz="1100" i="1" dirty="0">
-                <a:solidFill>
-                  <a:srgbClr val="64748B"/>
-                </a:solidFill>
-                <a:latin typeface="Calibri" pitchFamily="34" charset="0"/>
-                <a:ea typeface="Calibri" pitchFamily="34" charset="-122"/>
-                <a:cs typeface="Calibri" pitchFamily="34" charset="-120"/>
-              </a:rPr>
-              <a:t>0 + 12 + 16 + 12</a:t>
-            </a:r>
-            <a:endParaRPr lang="en-US" sz="1100" dirty="0"/>
           </a:p>
         </p:txBody>
       </p:sp>
@@ -11586,7 +12037,7 @@
           <a:bodyPr wrap="square" lIns="0" tIns="0" rIns="0" bIns="0" rtlCol="0" anchor="ctr"/>
           <a:lstStyle/>
           <a:p>
-            <a:pPr algn="r" indent="0" marL="0">
+            <a:pPr marL="0" indent="0" algn="r">
               <a:buNone/>
             </a:pPr>
             <a:r>
@@ -11620,6 +12071,7 @@
         <a:solidFill>
           <a:srgbClr val="FFFFFF"/>
         </a:solidFill>
+        <a:effectLst/>
       </p:bgPr>
     </p:bg>
     <p:spTree>
@@ -11657,7 +12109,7 @@
           <a:bodyPr wrap="square" lIns="0" tIns="0" rIns="0" bIns="0" rtlCol="0" anchor="ctr"/>
           <a:lstStyle/>
           <a:p>
-            <a:pPr indent="0" marL="0">
+            <a:pPr marL="0" indent="0">
               <a:buNone/>
             </a:pPr>
             <a:r>
@@ -11699,10 +12151,17 @@
             <a:prstDash val="solid"/>
           </a:ln>
         </p:spPr>
+        <p:txBody>
+          <a:bodyPr/>
+          <a:lstStyle/>
+          <a:p>
+            <a:endParaRPr lang="en-US"/>
+          </a:p>
+        </p:txBody>
       </p:sp>
       <p:graphicFrame>
         <p:nvGraphicFramePr>
-          <p:cNvPr id="4" name="Chart 0" descr=""/>
+          <p:cNvPr id="4" name="Chart 0"/>
           <p:cNvGraphicFramePr/>
           <p:nvPr/>
         </p:nvGraphicFramePr>
@@ -11710,9 +12169,9 @@
           <a:off x="502920" y="960120"/>
           <a:ext cx="5029200" cy="2697480"/>
         </p:xfrm>
-        <a:graphic xmlns:a="http://schemas.openxmlformats.org/drawingml/2006/main">
+        <a:graphic>
           <a:graphicData uri="http://schemas.openxmlformats.org/drawingml/2006/chart">
-            <c:chart xmlns:c="http://schemas.openxmlformats.org/drawingml/2006/chart" r:id="rId1"/>
+            <c:chart xmlns:c="http://schemas.openxmlformats.org/drawingml/2006/chart" xmlns:r="http://schemas.openxmlformats.org/officeDocument/2006/relationships" r:id="rId3"/>
           </a:graphicData>
         </a:graphic>
       </p:graphicFrame>
@@ -11737,7 +12196,7 @@
           <a:bodyPr wrap="square" lIns="0" tIns="0" rIns="0" bIns="0" rtlCol="0" anchor="ctr"/>
           <a:lstStyle/>
           <a:p>
-            <a:pPr indent="0" marL="0">
+            <a:pPr marL="0" indent="0">
               <a:buNone/>
             </a:pPr>
             <a:r>
@@ -11779,6 +12238,13 @@
             <a:prstDash val="solid"/>
           </a:ln>
         </p:spPr>
+        <p:txBody>
+          <a:bodyPr/>
+          <a:lstStyle/>
+          <a:p>
+            <a:endParaRPr lang="en-US"/>
+          </a:p>
+        </p:txBody>
       </p:sp>
       <p:sp>
         <p:nvSpPr>
@@ -11801,7 +12267,7 @@
           <a:bodyPr wrap="square" lIns="0" tIns="0" rIns="0" bIns="0" rtlCol="0" anchor="ctr"/>
           <a:lstStyle/>
           <a:p>
-            <a:pPr indent="0" marL="0">
+            <a:pPr marL="0" indent="0">
               <a:buNone/>
             </a:pPr>
             <a:r>
@@ -11840,7 +12306,7 @@
           <a:bodyPr wrap="square" lIns="0" tIns="0" rIns="0" bIns="0" rtlCol="0" anchor="ctr"/>
           <a:lstStyle/>
           <a:p>
-            <a:pPr algn="ctr" indent="0" marL="0">
+            <a:pPr marL="0" indent="0" algn="ctr">
               <a:buNone/>
             </a:pPr>
             <a:r>
@@ -11879,7 +12345,7 @@
           <a:bodyPr wrap="square" lIns="0" tIns="0" rIns="0" bIns="0" rtlCol="0" anchor="ctr"/>
           <a:lstStyle/>
           <a:p>
-            <a:pPr algn="r" indent="0" marL="0">
+            <a:pPr marL="0" indent="0" algn="r">
               <a:buNone/>
             </a:pPr>
             <a:r>
@@ -11918,7 +12384,7 @@
           <a:bodyPr wrap="square" lIns="0" tIns="0" rIns="0" bIns="0" rtlCol="0" anchor="ctr"/>
           <a:lstStyle/>
           <a:p>
-            <a:pPr indent="0" marL="0">
+            <a:pPr marL="0" indent="0">
               <a:buNone/>
             </a:pPr>
             <a:r>
@@ -11957,7 +12423,7 @@
           <a:bodyPr wrap="square" lIns="0" tIns="0" rIns="0" bIns="0" rtlCol="0" anchor="ctr"/>
           <a:lstStyle/>
           <a:p>
-            <a:pPr algn="ctr" indent="0" marL="0">
+            <a:pPr marL="0" indent="0" algn="ctr">
               <a:buNone/>
             </a:pPr>
             <a:r>
@@ -11996,7 +12462,7 @@
           <a:bodyPr wrap="square" lIns="0" tIns="0" rIns="0" bIns="0" rtlCol="0" anchor="ctr"/>
           <a:lstStyle/>
           <a:p>
-            <a:pPr algn="r" indent="0" marL="0">
+            <a:pPr marL="0" indent="0" algn="r">
               <a:buNone/>
             </a:pPr>
             <a:r>
@@ -12035,7 +12501,7 @@
           <a:bodyPr wrap="square" lIns="0" tIns="0" rIns="0" bIns="0" rtlCol="0" anchor="ctr"/>
           <a:lstStyle/>
           <a:p>
-            <a:pPr indent="0" marL="0">
+            <a:pPr marL="0" indent="0">
               <a:buNone/>
             </a:pPr>
             <a:r>
@@ -12074,7 +12540,7 @@
           <a:bodyPr wrap="square" lIns="0" tIns="0" rIns="0" bIns="0" rtlCol="0" anchor="ctr"/>
           <a:lstStyle/>
           <a:p>
-            <a:pPr algn="ctr" indent="0" marL="0">
+            <a:pPr marL="0" indent="0" algn="ctr">
               <a:buNone/>
             </a:pPr>
             <a:r>
@@ -12113,7 +12579,7 @@
           <a:bodyPr wrap="square" lIns="0" tIns="0" rIns="0" bIns="0" rtlCol="0" anchor="ctr"/>
           <a:lstStyle/>
           <a:p>
-            <a:pPr algn="r" indent="0" marL="0">
+            <a:pPr marL="0" indent="0" algn="r">
               <a:buNone/>
             </a:pPr>
             <a:r>
@@ -12152,7 +12618,7 @@
           <a:bodyPr wrap="square" lIns="0" tIns="0" rIns="0" bIns="0" rtlCol="0" anchor="ctr"/>
           <a:lstStyle/>
           <a:p>
-            <a:pPr indent="0" marL="0">
+            <a:pPr marL="0" indent="0">
               <a:buNone/>
             </a:pPr>
             <a:r>
@@ -12191,7 +12657,7 @@
           <a:bodyPr wrap="square" lIns="0" tIns="0" rIns="0" bIns="0" rtlCol="0" anchor="ctr"/>
           <a:lstStyle/>
           <a:p>
-            <a:pPr algn="ctr" indent="0" marL="0">
+            <a:pPr marL="0" indent="0" algn="ctr">
               <a:buNone/>
             </a:pPr>
             <a:r>
@@ -12230,7 +12696,7 @@
           <a:bodyPr wrap="square" lIns="0" tIns="0" rIns="0" bIns="0" rtlCol="0" anchor="ctr"/>
           <a:lstStyle/>
           <a:p>
-            <a:pPr algn="r" indent="0" marL="0">
+            <a:pPr marL="0" indent="0" algn="r">
               <a:buNone/>
             </a:pPr>
             <a:r>
@@ -12269,7 +12735,7 @@
           <a:bodyPr wrap="square" lIns="0" tIns="0" rIns="0" bIns="0" rtlCol="0" anchor="ctr"/>
           <a:lstStyle/>
           <a:p>
-            <a:pPr indent="0" marL="0">
+            <a:pPr marL="0" indent="0">
               <a:buNone/>
             </a:pPr>
             <a:r>
@@ -12308,7 +12774,7 @@
           <a:bodyPr wrap="square" lIns="0" tIns="0" rIns="0" bIns="0" rtlCol="0" anchor="ctr"/>
           <a:lstStyle/>
           <a:p>
-            <a:pPr algn="ctr" indent="0" marL="0">
+            <a:pPr marL="0" indent="0" algn="ctr">
               <a:buNone/>
             </a:pPr>
             <a:r>
@@ -12347,7 +12813,7 @@
           <a:bodyPr wrap="square" lIns="0" tIns="0" rIns="0" bIns="0" rtlCol="0" anchor="ctr"/>
           <a:lstStyle/>
           <a:p>
-            <a:pPr algn="r" indent="0" marL="0">
+            <a:pPr marL="0" indent="0" algn="r">
               <a:buNone/>
             </a:pPr>
             <a:r>
@@ -12386,7 +12852,7 @@
           <a:bodyPr wrap="square" lIns="0" tIns="0" rIns="0" bIns="0" rtlCol="0" anchor="ctr"/>
           <a:lstStyle/>
           <a:p>
-            <a:pPr indent="0" marL="0">
+            <a:pPr marL="0" indent="0">
               <a:buNone/>
             </a:pPr>
             <a:r>
@@ -12425,7 +12891,7 @@
           <a:bodyPr wrap="square" lIns="0" tIns="0" rIns="0" bIns="0" rtlCol="0" anchor="ctr"/>
           <a:lstStyle/>
           <a:p>
-            <a:pPr algn="ctr" indent="0" marL="0">
+            <a:pPr marL="0" indent="0" algn="ctr">
               <a:buNone/>
             </a:pPr>
             <a:r>
@@ -12464,7 +12930,7 @@
           <a:bodyPr wrap="square" lIns="0" tIns="0" rIns="0" bIns="0" rtlCol="0" anchor="ctr"/>
           <a:lstStyle/>
           <a:p>
-            <a:pPr algn="r" indent="0" marL="0">
+            <a:pPr marL="0" indent="0" algn="r">
               <a:buNone/>
             </a:pPr>
             <a:r>
@@ -12503,7 +12969,7 @@
           <a:bodyPr wrap="square" lIns="0" tIns="0" rIns="0" bIns="0" rtlCol="0" anchor="ctr"/>
           <a:lstStyle/>
           <a:p>
-            <a:pPr indent="0" marL="0">
+            <a:pPr marL="0" indent="0">
               <a:buNone/>
             </a:pPr>
             <a:r>
@@ -12542,7 +13008,7 @@
           <a:bodyPr wrap="square" lIns="0" tIns="0" rIns="0" bIns="0" rtlCol="0" anchor="ctr"/>
           <a:lstStyle/>
           <a:p>
-            <a:pPr algn="ctr" indent="0" marL="0">
+            <a:pPr marL="0" indent="0" algn="ctr">
               <a:buNone/>
             </a:pPr>
             <a:r>
@@ -12581,7 +13047,7 @@
           <a:bodyPr wrap="square" lIns="0" tIns="0" rIns="0" bIns="0" rtlCol="0" anchor="ctr"/>
           <a:lstStyle/>
           <a:p>
-            <a:pPr algn="r" indent="0" marL="0">
+            <a:pPr marL="0" indent="0" algn="r">
               <a:buNone/>
             </a:pPr>
             <a:r>
@@ -12620,7 +13086,7 @@
           <a:bodyPr wrap="square" lIns="0" tIns="0" rIns="0" bIns="0" rtlCol="0" anchor="ctr"/>
           <a:lstStyle/>
           <a:p>
-            <a:pPr indent="0" marL="0">
+            <a:pPr marL="0" indent="0">
               <a:buNone/>
             </a:pPr>
             <a:r>
@@ -12659,7 +13125,7 @@
           <a:bodyPr wrap="square" lIns="0" tIns="0" rIns="0" bIns="0" rtlCol="0" anchor="ctr"/>
           <a:lstStyle/>
           <a:p>
-            <a:pPr algn="ctr" indent="0" marL="0">
+            <a:pPr marL="0" indent="0" algn="ctr">
               <a:buNone/>
             </a:pPr>
             <a:r>
@@ -12698,7 +13164,7 @@
           <a:bodyPr wrap="square" lIns="0" tIns="0" rIns="0" bIns="0" rtlCol="0" anchor="ctr"/>
           <a:lstStyle/>
           <a:p>
-            <a:pPr algn="r" indent="0" marL="0">
+            <a:pPr marL="0" indent="0" algn="r">
               <a:buNone/>
             </a:pPr>
             <a:r>
@@ -12737,7 +13203,7 @@
           <a:bodyPr wrap="square" lIns="0" tIns="0" rIns="0" bIns="0" rtlCol="0" anchor="ctr"/>
           <a:lstStyle/>
           <a:p>
-            <a:pPr indent="0" marL="0">
+            <a:pPr marL="0" indent="0">
               <a:buNone/>
             </a:pPr>
             <a:r>
@@ -12776,7 +13242,7 @@
           <a:bodyPr wrap="square" lIns="0" tIns="0" rIns="0" bIns="0" rtlCol="0" anchor="ctr"/>
           <a:lstStyle/>
           <a:p>
-            <a:pPr algn="ctr" indent="0" marL="0">
+            <a:pPr marL="0" indent="0" algn="ctr">
               <a:buNone/>
             </a:pPr>
             <a:r>
@@ -12815,7 +13281,7 @@
           <a:bodyPr wrap="square" lIns="0" tIns="0" rIns="0" bIns="0" rtlCol="0" anchor="ctr"/>
           <a:lstStyle/>
           <a:p>
-            <a:pPr algn="r" indent="0" marL="0">
+            <a:pPr marL="0" indent="0" algn="r">
               <a:buNone/>
             </a:pPr>
             <a:r>
@@ -12854,7 +13320,7 @@
           <a:bodyPr wrap="square" lIns="0" tIns="0" rIns="0" bIns="0" rtlCol="0" anchor="ctr"/>
           <a:lstStyle/>
           <a:p>
-            <a:pPr indent="0" marL="0">
+            <a:pPr marL="0" indent="0">
               <a:buNone/>
             </a:pPr>
             <a:r>
@@ -12893,7 +13359,7 @@
           <a:bodyPr wrap="square" lIns="0" tIns="0" rIns="0" bIns="0" rtlCol="0" anchor="ctr"/>
           <a:lstStyle/>
           <a:p>
-            <a:pPr algn="ctr" indent="0" marL="0">
+            <a:pPr marL="0" indent="0" algn="ctr">
               <a:buNone/>
             </a:pPr>
             <a:r>
@@ -12932,7 +13398,7 @@
           <a:bodyPr wrap="square" lIns="0" tIns="0" rIns="0" bIns="0" rtlCol="0" anchor="ctr"/>
           <a:lstStyle/>
           <a:p>
-            <a:pPr algn="r" indent="0" marL="0">
+            <a:pPr marL="0" indent="0" algn="r">
               <a:buNone/>
             </a:pPr>
             <a:r>
@@ -12971,7 +13437,7 @@
           <a:bodyPr wrap="square" lIns="0" tIns="0" rIns="0" bIns="0" rtlCol="0" anchor="ctr"/>
           <a:lstStyle/>
           <a:p>
-            <a:pPr indent="0" marL="0">
+            <a:pPr marL="0" indent="0">
               <a:buNone/>
             </a:pPr>
             <a:r>
@@ -13010,7 +13476,7 @@
           <a:bodyPr wrap="square" lIns="0" tIns="0" rIns="0" bIns="0" rtlCol="0" anchor="ctr"/>
           <a:lstStyle/>
           <a:p>
-            <a:pPr algn="ctr" indent="0" marL="0">
+            <a:pPr marL="0" indent="0" algn="ctr">
               <a:buNone/>
             </a:pPr>
             <a:r>
@@ -13049,7 +13515,7 @@
           <a:bodyPr wrap="square" lIns="0" tIns="0" rIns="0" bIns="0" rtlCol="0" anchor="ctr"/>
           <a:lstStyle/>
           <a:p>
-            <a:pPr algn="r" indent="0" marL="0">
+            <a:pPr marL="0" indent="0" algn="r">
               <a:buNone/>
             </a:pPr>
             <a:r>
@@ -13091,6 +13557,13 @@
             <a:prstDash val="solid"/>
           </a:ln>
         </p:spPr>
+        <p:txBody>
+          <a:bodyPr/>
+          <a:lstStyle/>
+          <a:p>
+            <a:endParaRPr lang="en-US"/>
+          </a:p>
+        </p:txBody>
       </p:sp>
       <p:sp>
         <p:nvSpPr>
@@ -13113,7 +13586,7 @@
           <a:bodyPr wrap="square" lIns="0" tIns="0" rIns="0" bIns="0" rtlCol="0" anchor="ctr"/>
           <a:lstStyle/>
           <a:p>
-            <a:pPr indent="0" marL="0">
+            <a:pPr marL="0" indent="0">
               <a:buNone/>
             </a:pPr>
             <a:r>
@@ -13152,7 +13625,7 @@
           <a:bodyPr wrap="square" lIns="0" tIns="0" rIns="0" bIns="0" rtlCol="0" anchor="ctr"/>
           <a:lstStyle/>
           <a:p>
-            <a:pPr algn="ctr" indent="0" marL="0">
+            <a:pPr marL="0" indent="0" algn="ctr">
               <a:buNone/>
             </a:pPr>
             <a:r>
@@ -13191,7 +13664,7 @@
           <a:bodyPr wrap="square" lIns="0" tIns="0" rIns="0" bIns="0" rtlCol="0" anchor="ctr"/>
           <a:lstStyle/>
           <a:p>
-            <a:pPr algn="r" indent="0" marL="0">
+            <a:pPr marL="0" indent="0" algn="r">
               <a:buNone/>
             </a:pPr>
             <a:r>
@@ -13233,6 +13706,13 @@
             <a:prstDash val="solid"/>
           </a:ln>
         </p:spPr>
+        <p:txBody>
+          <a:bodyPr/>
+          <a:lstStyle/>
+          <a:p>
+            <a:endParaRPr lang="en-US"/>
+          </a:p>
+        </p:txBody>
       </p:sp>
       <p:sp>
         <p:nvSpPr>
@@ -13271,9 +13751,8 @@
                 <a:ea typeface="Calibri" pitchFamily="34" charset="-122"/>
                 <a:cs typeface="Calibri" pitchFamily="34" charset="-120"/>
               </a:rPr>
-              <a:t>98 anti-pattern instances across 9 types; API Versioning Absence (37) and Nano Service (23) dominate</a:t>
-            </a:r>
-            <a:endParaRPr lang="en-US" sz="1050" dirty="0"/>
+              <a:t>98 anti-pattern instances across 9 types</a:t>
+            </a:r>
           </a:p>
           <a:p>
             <a:pPr marL="342900" indent="-342900">
@@ -13292,7 +13771,7 @@
                 <a:ea typeface="Calibri" pitchFamily="34" charset="-122"/>
                 <a:cs typeface="Calibri" pitchFamily="34" charset="-120"/>
               </a:rPr>
-              <a:t>PiggyMetrics and piomin broadened ESB Misuse and Nano Service coverage; Cyclic Dependency and Wrong Cuts detected in microservice-recruit</a:t>
+              <a:t>API Versioning Absence (37), Nano Service (23) and Hardcoded Endpoint (15) dominate</a:t>
             </a:r>
             <a:endParaRPr lang="en-US" sz="1050" dirty="0"/>
           </a:p>
@@ -13319,7 +13798,7 @@
           <a:bodyPr wrap="square" lIns="0" tIns="0" rIns="0" bIns="0" rtlCol="0" anchor="ctr"/>
           <a:lstStyle/>
           <a:p>
-            <a:pPr algn="r" indent="0" marL="0">
+            <a:pPr marL="0" indent="0" algn="r">
               <a:buNone/>
             </a:pPr>
             <a:r>
@@ -13638,4 +14117,325 @@
     </a:ext>
   </a:extLst>
 </a:theme>
+</file>
+
+<file path=ppt/theme/theme2.xml><?xml version="1.0" encoding="utf-8"?>
+<a:theme xmlns:a="http://schemas.openxmlformats.org/drawingml/2006/main" name="Office Theme">
+  <a:themeElements>
+    <a:clrScheme name="Office">
+      <a:dk1>
+        <a:sysClr val="windowText" lastClr="000000"/>
+      </a:dk1>
+      <a:lt1>
+        <a:sysClr val="window" lastClr="FFFFFF"/>
+      </a:lt1>
+      <a:dk2>
+        <a:srgbClr val="0E2841"/>
+      </a:dk2>
+      <a:lt2>
+        <a:srgbClr val="E8E8E8"/>
+      </a:lt2>
+      <a:accent1>
+        <a:srgbClr val="156082"/>
+      </a:accent1>
+      <a:accent2>
+        <a:srgbClr val="E97132"/>
+      </a:accent2>
+      <a:accent3>
+        <a:srgbClr val="196B24"/>
+      </a:accent3>
+      <a:accent4>
+        <a:srgbClr val="0F9ED5"/>
+      </a:accent4>
+      <a:accent5>
+        <a:srgbClr val="A02B93"/>
+      </a:accent5>
+      <a:accent6>
+        <a:srgbClr val="4EA72E"/>
+      </a:accent6>
+      <a:hlink>
+        <a:srgbClr val="467886"/>
+      </a:hlink>
+      <a:folHlink>
+        <a:srgbClr val="96607D"/>
+      </a:folHlink>
+    </a:clrScheme>
+    <a:fontScheme name="Office">
+      <a:majorFont>
+        <a:latin typeface="Aptos Display" panose="02110004020202020204"/>
+        <a:ea typeface=""/>
+        <a:cs typeface=""/>
+        <a:font script="Jpan" typeface="游ゴシック Light"/>
+        <a:font script="Hang" typeface="맑은 고딕"/>
+        <a:font script="Hans" typeface="等线 Light"/>
+        <a:font script="Hant" typeface="新細明體"/>
+        <a:font script="Arab" typeface="Times New Roman"/>
+        <a:font script="Hebr" typeface="Times New Roman"/>
+        <a:font script="Thai" typeface="Angsana New"/>
+        <a:font script="Ethi" typeface="Nyala"/>
+        <a:font script="Beng" typeface="Vrinda"/>
+        <a:font script="Gujr" typeface="Shruti"/>
+        <a:font script="Khmr" typeface="MoolBoran"/>
+        <a:font script="Knda" typeface="Tunga"/>
+        <a:font script="Guru" typeface="Raavi"/>
+        <a:font script="Cans" typeface="Euphemia"/>
+        <a:font script="Cher" typeface="Plantagenet Cherokee"/>
+        <a:font script="Yiii" typeface="Microsoft Yi Baiti"/>
+        <a:font script="Tibt" typeface="Microsoft Himalaya"/>
+        <a:font script="Thaa" typeface="MV Boli"/>
+        <a:font script="Deva" typeface="Mangal"/>
+        <a:font script="Telu" typeface="Gautami"/>
+        <a:font script="Taml" typeface="Latha"/>
+        <a:font script="Syrc" typeface="Estrangelo Edessa"/>
+        <a:font script="Orya" typeface="Kalinga"/>
+        <a:font script="Mlym" typeface="Kartika"/>
+        <a:font script="Laoo" typeface="DokChampa"/>
+        <a:font script="Sinh" typeface="Iskoola Pota"/>
+        <a:font script="Mong" typeface="Mongolian Baiti"/>
+        <a:font script="Viet" typeface="Times New Roman"/>
+        <a:font script="Uigh" typeface="Microsoft Uighur"/>
+        <a:font script="Geor" typeface="Sylfaen"/>
+        <a:font script="Armn" typeface="Arial"/>
+        <a:font script="Bugi" typeface="Leelawadee UI"/>
+        <a:font script="Bopo" typeface="Microsoft JhengHei"/>
+        <a:font script="Java" typeface="Javanese Text"/>
+        <a:font script="Lisu" typeface="Segoe UI"/>
+        <a:font script="Mymr" typeface="Myanmar Text"/>
+        <a:font script="Nkoo" typeface="Ebrima"/>
+        <a:font script="Olck" typeface="Nirmala UI"/>
+        <a:font script="Osma" typeface="Ebrima"/>
+        <a:font script="Phag" typeface="Phagspa"/>
+        <a:font script="Syrn" typeface="Estrangelo Edessa"/>
+        <a:font script="Syrj" typeface="Estrangelo Edessa"/>
+        <a:font script="Syre" typeface="Estrangelo Edessa"/>
+        <a:font script="Sora" typeface="Nirmala UI"/>
+        <a:font script="Tale" typeface="Microsoft Tai Le"/>
+        <a:font script="Talu" typeface="Microsoft New Tai Lue"/>
+        <a:font script="Tfng" typeface="Ebrima"/>
+      </a:majorFont>
+      <a:minorFont>
+        <a:latin typeface="Aptos" panose="02110004020202020204"/>
+        <a:ea typeface=""/>
+        <a:cs typeface=""/>
+        <a:font script="Jpan" typeface="游ゴシック"/>
+        <a:font script="Hang" typeface="맑은 고딕"/>
+        <a:font script="Hans" typeface="等线"/>
+        <a:font script="Hant" typeface="新細明體"/>
+        <a:font script="Arab" typeface="Arial"/>
+        <a:font script="Hebr" typeface="Arial"/>
+        <a:font script="Thai" typeface="Cordia New"/>
+        <a:font script="Ethi" typeface="Nyala"/>
+        <a:font script="Beng" typeface="Vrinda"/>
+        <a:font script="Gujr" typeface="Shruti"/>
+        <a:font script="Khmr" typeface="DaunPenh"/>
+        <a:font script="Knda" typeface="Tunga"/>
+        <a:font script="Guru" typeface="Raavi"/>
+        <a:font script="Cans" typeface="Euphemia"/>
+        <a:font script="Cher" typeface="Plantagenet Cherokee"/>
+        <a:font script="Yiii" typeface="Microsoft Yi Baiti"/>
+        <a:font script="Tibt" typeface="Microsoft Himalaya"/>
+        <a:font script="Thaa" typeface="MV Boli"/>
+        <a:font script="Deva" typeface="Mangal"/>
+        <a:font script="Telu" typeface="Gautami"/>
+        <a:font script="Taml" typeface="Latha"/>
+        <a:font script="Syrc" typeface="Estrangelo Edessa"/>
+        <a:font script="Orya" typeface="Kalinga"/>
+        <a:font script="Mlym" typeface="Kartika"/>
+        <a:font script="Laoo" typeface="DokChampa"/>
+        <a:font script="Sinh" typeface="Iskoola Pota"/>
+        <a:font script="Mong" typeface="Mongolian Baiti"/>
+        <a:font script="Viet" typeface="Arial"/>
+        <a:font script="Uigh" typeface="Microsoft Uighur"/>
+        <a:font script="Geor" typeface="Sylfaen"/>
+        <a:font script="Armn" typeface="Arial"/>
+        <a:font script="Bugi" typeface="Leelawadee UI"/>
+        <a:font script="Bopo" typeface="Microsoft JhengHei"/>
+        <a:font script="Java" typeface="Javanese Text"/>
+        <a:font script="Lisu" typeface="Segoe UI"/>
+        <a:font script="Mymr" typeface="Myanmar Text"/>
+        <a:font script="Nkoo" typeface="Ebrima"/>
+        <a:font script="Olck" typeface="Nirmala UI"/>
+        <a:font script="Osma" typeface="Ebrima"/>
+        <a:font script="Phag" typeface="Phagspa"/>
+        <a:font script="Syrn" typeface="Estrangelo Edessa"/>
+        <a:font script="Syrj" typeface="Estrangelo Edessa"/>
+        <a:font script="Syre" typeface="Estrangelo Edessa"/>
+        <a:font script="Sora" typeface="Nirmala UI"/>
+        <a:font script="Tale" typeface="Microsoft Tai Le"/>
+        <a:font script="Talu" typeface="Microsoft New Tai Lue"/>
+        <a:font script="Tfng" typeface="Ebrima"/>
+      </a:minorFont>
+    </a:fontScheme>
+    <a:fmtScheme name="Office">
+      <a:fillStyleLst>
+        <a:solidFill>
+          <a:schemeClr val="phClr"/>
+        </a:solidFill>
+        <a:gradFill rotWithShape="1">
+          <a:gsLst>
+            <a:gs pos="0">
+              <a:schemeClr val="phClr">
+                <a:lumMod val="110000"/>
+                <a:satMod val="105000"/>
+                <a:tint val="67000"/>
+              </a:schemeClr>
+            </a:gs>
+            <a:gs pos="50000">
+              <a:schemeClr val="phClr">
+                <a:lumMod val="105000"/>
+                <a:satMod val="103000"/>
+                <a:tint val="73000"/>
+              </a:schemeClr>
+            </a:gs>
+            <a:gs pos="100000">
+              <a:schemeClr val="phClr">
+                <a:lumMod val="105000"/>
+                <a:satMod val="109000"/>
+                <a:tint val="81000"/>
+              </a:schemeClr>
+            </a:gs>
+          </a:gsLst>
+          <a:lin ang="5400000" scaled="0"/>
+        </a:gradFill>
+        <a:gradFill rotWithShape="1">
+          <a:gsLst>
+            <a:gs pos="0">
+              <a:schemeClr val="phClr">
+                <a:satMod val="103000"/>
+                <a:lumMod val="102000"/>
+                <a:tint val="94000"/>
+              </a:schemeClr>
+            </a:gs>
+            <a:gs pos="50000">
+              <a:schemeClr val="phClr">
+                <a:satMod val="110000"/>
+                <a:lumMod val="100000"/>
+                <a:shade val="100000"/>
+              </a:schemeClr>
+            </a:gs>
+            <a:gs pos="100000">
+              <a:schemeClr val="phClr">
+                <a:lumMod val="99000"/>
+                <a:satMod val="120000"/>
+                <a:shade val="78000"/>
+              </a:schemeClr>
+            </a:gs>
+          </a:gsLst>
+          <a:lin ang="5400000" scaled="0"/>
+        </a:gradFill>
+      </a:fillStyleLst>
+      <a:lnStyleLst>
+        <a:ln w="12700" cap="flat" cmpd="sng" algn="ctr">
+          <a:solidFill>
+            <a:schemeClr val="phClr"/>
+          </a:solidFill>
+          <a:prstDash val="solid"/>
+          <a:miter lim="800000"/>
+        </a:ln>
+        <a:ln w="19050" cap="flat" cmpd="sng" algn="ctr">
+          <a:solidFill>
+            <a:schemeClr val="phClr"/>
+          </a:solidFill>
+          <a:prstDash val="solid"/>
+          <a:miter lim="800000"/>
+        </a:ln>
+        <a:ln w="25400" cap="flat" cmpd="sng" algn="ctr">
+          <a:solidFill>
+            <a:schemeClr val="phClr"/>
+          </a:solidFill>
+          <a:prstDash val="solid"/>
+          <a:miter lim="800000"/>
+        </a:ln>
+      </a:lnStyleLst>
+      <a:effectStyleLst>
+        <a:effectStyle>
+          <a:effectLst/>
+        </a:effectStyle>
+        <a:effectStyle>
+          <a:effectLst/>
+        </a:effectStyle>
+        <a:effectStyle>
+          <a:effectLst>
+            <a:outerShdw blurRad="57150" dist="19050" dir="5400000" algn="ctr" rotWithShape="0">
+              <a:srgbClr val="000000">
+                <a:alpha val="63000"/>
+              </a:srgbClr>
+            </a:outerShdw>
+          </a:effectLst>
+        </a:effectStyle>
+      </a:effectStyleLst>
+      <a:bgFillStyleLst>
+        <a:solidFill>
+          <a:schemeClr val="phClr"/>
+        </a:solidFill>
+        <a:solidFill>
+          <a:schemeClr val="phClr">
+            <a:tint val="95000"/>
+            <a:satMod val="170000"/>
+          </a:schemeClr>
+        </a:solidFill>
+        <a:gradFill rotWithShape="1">
+          <a:gsLst>
+            <a:gs pos="0">
+              <a:schemeClr val="phClr">
+                <a:tint val="93000"/>
+                <a:satMod val="150000"/>
+                <a:shade val="98000"/>
+                <a:lumMod val="102000"/>
+              </a:schemeClr>
+            </a:gs>
+            <a:gs pos="50000">
+              <a:schemeClr val="phClr">
+                <a:tint val="98000"/>
+                <a:satMod val="130000"/>
+                <a:shade val="90000"/>
+                <a:lumMod val="103000"/>
+              </a:schemeClr>
+            </a:gs>
+            <a:gs pos="100000">
+              <a:schemeClr val="phClr">
+                <a:shade val="63000"/>
+                <a:satMod val="120000"/>
+              </a:schemeClr>
+            </a:gs>
+          </a:gsLst>
+          <a:lin ang="5400000" scaled="0"/>
+        </a:gradFill>
+      </a:bgFillStyleLst>
+    </a:fmtScheme>
+  </a:themeElements>
+  <a:objectDefaults>
+    <a:lnDef>
+      <a:spPr/>
+      <a:bodyPr/>
+      <a:lstStyle/>
+      <a:style>
+        <a:lnRef idx="2">
+          <a:schemeClr val="accent1"/>
+        </a:lnRef>
+        <a:fillRef idx="0">
+          <a:schemeClr val="accent1"/>
+        </a:fillRef>
+        <a:effectRef idx="1">
+          <a:schemeClr val="accent1"/>
+        </a:effectRef>
+        <a:fontRef idx="minor">
+          <a:schemeClr val="tx1"/>
+        </a:fontRef>
+      </a:style>
+    </a:lnDef>
+  </a:objectDefaults>
+  <a:extraClrSchemeLst/>
+  <a:extLst>
+    <a:ext uri="{05A4C25C-085E-4340-85A3-A5531E510DB2}">
+      <thm15:themeFamily xmlns:thm15="http://schemas.microsoft.com/office/thememl/2012/main" name="Office Theme" id="{2E142A2C-CD16-42D6-873A-C26D2A0506FA}" vid="{1BDDFF52-6CD6-40A5-AB3C-68EB2F1E4D0A}"/>
+    </a:ext>
+  </a:extLst>
+</a:theme>
+</file>
+
+<file path=docMetadata/LabelInfo.xml><?xml version="1.0" encoding="utf-8"?>
+<clbl:labelList xmlns:clbl="http://schemas.microsoft.com/office/2020/mipLabelMetadata">
+  <clbl:label id="{9d258917-277f-42cd-a3cd-14c4e9ee58bc}" enabled="1" method="Standard" siteId="{38ae3bcd-9579-4fd4-adda-b42e1495d55a}" contentBits="0" removed="0"/>
+</clbl:labelList>
 </file>
--- a/thesis/presentation/MSA_Detector_Defense_v2.pptx
+++ b/thesis/presentation/MSA_Detector_Defense_v2.pptx
@@ -15,8 +15,8 @@
     <p:sldId id="261" r:id="rId6"/>
     <p:sldId id="260" r:id="rId7"/>
     <p:sldId id="262" r:id="rId8"/>
-    <p:sldId id="263" r:id="rId9"/>
-    <p:sldId id="264" r:id="rId10"/>
+    <p:sldId id="264" r:id="rId9"/>
+    <p:sldId id="263" r:id="rId10"/>
     <p:sldId id="265" r:id="rId11"/>
     <p:sldId id="266" r:id="rId12"/>
     <p:sldId id="267" r:id="rId13"/>
@@ -1784,20 +1784,28 @@
           <a:p>
             <a:r>
               <a:rPr lang="en-US" dirty="0"/>
-              <a:t>• 'Take microservice-recruit — a Spring Cloud recruitment platform. In the anti-pattern category it has 6 API versioning absences, 2 ESB misuse and 2 wrong-cuts findings, 1 cyclic dependency, and 1 hardcoded endpoint — total penalty 49, but the category caps at 40, so it clamps to zero.'
-• 'Its single nano service is scored under Service Sizing instead of the anti-pattern category, to avoid double counting — costing 3 points there, leaving 12 of 15.'
-• 'Architecture loses 9 points for the structural coupling of its dependency graph — leaving 16 of 25.'
-• 'Code Quality is scored by smell density: 260 smells over 8.3K LOC is 31.4 per KLOC, an 8-point deduction, leaving 12 of 20.'
-• 'The final composite is 0 + 12 + 16 + 12 = 40 — grade F. Unlike a project whose problems sit in one place, this one loses points in every dimension, which is exactly what the multi-level scoring is meant to surface.'
-'What makes this example interesting is that the problems are spread across all four categories — it's not a project with one catastrophic issue, it's a project with consistent low-level neglect across every dimension. That's exactly the kind of systemic debt the multi-category decomposition is designed to surface.’</a:t>
-            </a:r>
-          </a:p>
-          <a:p>
+              <a:t>• 'I evaluated on eleven open-source Spring Boot projects, spanning from </a:t>
+            </a:r>
+            <a:r>
+              <a:rPr lang="en-US" dirty="0" err="1"/>
+              <a:t>piomin</a:t>
+            </a:r>
             <a:r>
               <a:rPr lang="en-US" dirty="0"/>
-              <a:t>
-EXPECT QUESTION: 'Only 8 points lost on Code Quality with 260 smells — why so little?'
-Answer: 'Code Quality is scored on smell density per 1000 LOC, not raw count, so a codebase isn't punished just for its size. The category is deliberately bounded so that architectural anti-patterns remain the dominant signal in the overall score.'</a:t>
+              <a:t> at 1.3k LOC to mall-swarm at 86k LOC. 130 microservices, about 274k LOC total.'
+• 'The score range — 40 to 83 — shows that the metric has useful discriminating power. Projects known to be well-structured like </a:t>
+            </a:r>
+            <a:r>
+              <a:rPr lang="en-US" dirty="0" err="1"/>
+              <a:t>MicroSocial</a:t>
+            </a:r>
+            <a:r>
+              <a:rPr lang="en-US" dirty="0"/>
+              <a:t> score highest; projects known to have issues like Train-Ticket and microservice-recruit score lowest. If every project scored 70, the metric wouldn't be telling us much.'
+• 'The dominant findings are configuration and sizing issues: 37 API versioning absences, 23 nano services, 15 hardcoded endpoints. 
+• '98 total anti-pattern instances across 9 distinct types. Only Distributed Monolith was not detected — plausible given these projects' topologies.’
+EXPECT: 'Only eleven projects, is that enough?'
+Answer: 'Not for a statistical claim. This evaluation is a feasibility demonstration across heterogeneous codebases. A full precision/recall study would need a labelled corpus, which doesn't exist for microservice anti-patterns — that's an open problem in the field. I note this in Threats to Validity.'</a:t>
             </a:r>
           </a:p>
         </p:txBody>
@@ -1884,28 +1892,29 @@
           <a:p>
             <a:r>
               <a:rPr lang="en-US" dirty="0"/>
-              <a:t>• 'I evaluated on eleven open-source Spring Boot projects, spanning from </a:t>
-            </a:r>
-            <a:r>
-              <a:rPr lang="en-US" dirty="0" err="1"/>
-              <a:t>piomin</a:t>
-            </a:r>
+              <a:t>This slide could just be “presented’ during the live demo, and just shown briefly</a:t>
+            </a:r>
+          </a:p>
+          <a:p>
+            <a:endParaRPr lang="en-US" dirty="0"/>
+          </a:p>
+          <a:p>
             <a:r>
               <a:rPr lang="en-US" dirty="0"/>
-              <a:t> at 1.3k LOC to mall-swarm at 86k LOC. 130 microservices, about 274k LOC total.'
-• 'The score range — 40 to 83 — shows that the metric has useful discriminating power. Projects known to be well-structured like </a:t>
-            </a:r>
-            <a:r>
-              <a:rPr lang="en-US" dirty="0" err="1"/>
-              <a:t>MicroSocial</a:t>
-            </a:r>
+              <a:t>• 'Take microservice-recruit — a Spring Cloud recruitment platform. In the anti-pattern category it has 6 API versioning absences, 2 ESB misuse and 2 wrong-cuts findings, 1 cyclic dependency, and 1 hardcoded endpoint — total penalty 49, but the category caps at 40, so it clamps to zero.'
+• 'Its single nano service is scored under Service Sizing instead of the anti-pattern category, to avoid double counting — costing 3 points there, leaving 12 of 15.'
+• 'Architecture loses 9 points for the structural coupling of its dependency graph — leaving 16 of 25.'
+• 'Code Quality is scored by smell density: 260 smells over 8.3K LOC is 31.4 per KLOC, an 8-point deduction, leaving 12 of 20.'
+• 'The final composite is 0 + 12 + 16 + 12 = 40 — grade F. Unlike a project whose problems sit in one place, this one loses points in every dimension, which is exactly what the multi-level scoring is meant to surface.'
+'What makes this example interesting is that the problems are spread across all four categories — it's not a project with one catastrophic issue, it's a project with consistent low-level neglect across every dimension. That's exactly the kind of systemic debt the multi-category decomposition is designed to surface.’</a:t>
+            </a:r>
+          </a:p>
+          <a:p>
             <a:r>
               <a:rPr lang="en-US" dirty="0"/>
-              <a:t> score highest; projects known to have issues like Train-Ticket and microservice-recruit score lowest. If every project scored 70, the metric wouldn't be telling us much.'
-• 'The dominant findings are configuration and sizing issues: 37 API versioning absences, 23 nano services, 15 hardcoded endpoints. 
-• '98 total anti-pattern instances across 9 distinct types. Only Distributed Monolith was not detected — plausible given these projects' topologies.’
-EXPECT: 'Only eleven projects, is that enough?'
-Answer: 'Not for a statistical claim. This evaluation is a feasibility demonstration across heterogeneous codebases. A full precision/recall study would need a labelled corpus, which doesn't exist for microservice anti-patterns — that's an open problem in the field. I note this in Threats to Validity.'</a:t>
+              <a:t>
+EXPECT QUESTION: 'Only 8 points lost on Code Quality with 260 smells — why so little?'
+Answer: 'Code Quality is scored on smell density per 1000 LOC, not raw count, so a codebase isn't punished just for its size. The category is deliberately bounded so that architectural anti-patterns remain the dominant signal in the overall score.'</a:t>
             </a:r>
           </a:p>
         </p:txBody>
@@ -4644,7 +4653,7 @@
                 <a:ea typeface="Calibri" pitchFamily="34" charset="-122"/>
                 <a:cs typeface="Calibri" pitchFamily="34" charset="-120"/>
               </a:rPr>
-              <a:t>Objectives &amp; contributions</a:t>
+              <a:t>Contributions</a:t>
             </a:r>
             <a:endParaRPr lang="en-US" sz="2500" dirty="0"/>
           </a:p>
@@ -9824,7 +9833,7 @@
                 <a:ea typeface="Calibri" pitchFamily="34" charset="-122"/>
                 <a:cs typeface="Calibri" pitchFamily="34" charset="-120"/>
               </a:rPr>
-              <a:t>Letter grade scale</a:t>
+              <a:t>Grade scale</a:t>
             </a:r>
             <a:endParaRPr lang="en-US" sz="1250" dirty="0"/>
           </a:p>
@@ -10366,6 +10375,1767 @@
 </file>
 
 <file path=ppt/slides/slide8.xml><?xml version="1.0" encoding="utf-8"?>
+<p:sld xmlns:a="http://schemas.openxmlformats.org/drawingml/2006/main" xmlns:r="http://schemas.openxmlformats.org/officeDocument/2006/relationships" xmlns:p="http://schemas.openxmlformats.org/presentationml/2006/main">
+  <p:cSld name="Slide 9">
+    <p:bg>
+      <p:bgPr>
+        <a:solidFill>
+          <a:srgbClr val="FFFFFF"/>
+        </a:solidFill>
+        <a:effectLst/>
+      </p:bgPr>
+    </p:bg>
+    <p:spTree>
+      <p:nvGrpSpPr>
+        <p:cNvPr id="1" name=""/>
+        <p:cNvGrpSpPr/>
+        <p:nvPr/>
+      </p:nvGrpSpPr>
+      <p:grpSpPr>
+        <a:xfrm>
+          <a:off x="0" y="0"/>
+          <a:ext cx="0" cy="0"/>
+          <a:chOff x="0" y="0"/>
+          <a:chExt cx="0" cy="0"/>
+        </a:xfrm>
+      </p:grpSpPr>
+      <p:sp>
+        <p:nvSpPr>
+          <p:cNvPr id="2" name="Text 0"/>
+          <p:cNvSpPr/>
+          <p:nvPr/>
+        </p:nvSpPr>
+        <p:spPr>
+          <a:xfrm>
+            <a:off x="548640" y="256032"/>
+            <a:ext cx="8046720" cy="502920"/>
+          </a:xfrm>
+          <a:prstGeom prst="rect">
+            <a:avLst/>
+          </a:prstGeom>
+          <a:noFill/>
+          <a:ln/>
+        </p:spPr>
+        <p:txBody>
+          <a:bodyPr wrap="square" lIns="0" tIns="0" rIns="0" bIns="0" rtlCol="0" anchor="ctr"/>
+          <a:lstStyle/>
+          <a:p>
+            <a:pPr marL="0" indent="0">
+              <a:buNone/>
+            </a:pPr>
+            <a:r>
+              <a:rPr lang="en-US" sz="2500" b="1" dirty="0">
+                <a:solidFill>
+                  <a:srgbClr val="0F2A44"/>
+                </a:solidFill>
+                <a:latin typeface="Calibri" pitchFamily="34" charset="0"/>
+                <a:ea typeface="Calibri" pitchFamily="34" charset="-122"/>
+                <a:cs typeface="Calibri" pitchFamily="34" charset="-120"/>
+              </a:rPr>
+              <a:t>Evaluation: 11 open-source projects</a:t>
+            </a:r>
+            <a:endParaRPr lang="en-US" sz="2500" dirty="0"/>
+          </a:p>
+        </p:txBody>
+      </p:sp>
+      <p:sp>
+        <p:nvSpPr>
+          <p:cNvPr id="3" name="Shape 1"/>
+          <p:cNvSpPr/>
+          <p:nvPr/>
+        </p:nvSpPr>
+        <p:spPr>
+          <a:xfrm>
+            <a:off x="548640" y="841248"/>
+            <a:ext cx="8046720" cy="13716"/>
+          </a:xfrm>
+          <a:prstGeom prst="rect">
+            <a:avLst/>
+          </a:prstGeom>
+          <a:solidFill>
+            <a:srgbClr val="D8DEE6"/>
+          </a:solidFill>
+          <a:ln w="12700">
+            <a:solidFill>
+              <a:srgbClr val="D8DEE6"/>
+            </a:solidFill>
+            <a:prstDash val="solid"/>
+          </a:ln>
+        </p:spPr>
+        <p:txBody>
+          <a:bodyPr/>
+          <a:lstStyle/>
+          <a:p>
+            <a:endParaRPr lang="en-US"/>
+          </a:p>
+        </p:txBody>
+      </p:sp>
+      <p:graphicFrame>
+        <p:nvGraphicFramePr>
+          <p:cNvPr id="4" name="Chart 0"/>
+          <p:cNvGraphicFramePr/>
+          <p:nvPr/>
+        </p:nvGraphicFramePr>
+        <p:xfrm>
+          <a:off x="502920" y="960120"/>
+          <a:ext cx="5029200" cy="2697480"/>
+        </p:xfrm>
+        <a:graphic>
+          <a:graphicData uri="http://schemas.openxmlformats.org/drawingml/2006/chart">
+            <c:chart xmlns:c="http://schemas.openxmlformats.org/drawingml/2006/chart" xmlns:r="http://schemas.openxmlformats.org/officeDocument/2006/relationships" r:id="rId3"/>
+          </a:graphicData>
+        </a:graphic>
+      </p:graphicFrame>
+      <p:sp>
+        <p:nvSpPr>
+          <p:cNvPr id="5" name="Text 2"/>
+          <p:cNvSpPr/>
+          <p:nvPr/>
+        </p:nvSpPr>
+        <p:spPr>
+          <a:xfrm>
+            <a:off x="5943600" y="960120"/>
+            <a:ext cx="2651760" cy="274320"/>
+          </a:xfrm>
+          <a:prstGeom prst="rect">
+            <a:avLst/>
+          </a:prstGeom>
+          <a:noFill/>
+          <a:ln/>
+        </p:spPr>
+        <p:txBody>
+          <a:bodyPr wrap="square" lIns="0" tIns="0" rIns="0" bIns="0" rtlCol="0" anchor="ctr"/>
+          <a:lstStyle/>
+          <a:p>
+            <a:pPr marL="0" indent="0">
+              <a:buNone/>
+            </a:pPr>
+            <a:r>
+              <a:rPr lang="en-US" sz="1200" b="1" dirty="0">
+                <a:solidFill>
+                  <a:srgbClr val="0F2A44"/>
+                </a:solidFill>
+                <a:latin typeface="Calibri" pitchFamily="34" charset="0"/>
+                <a:ea typeface="Calibri" pitchFamily="34" charset="-122"/>
+                <a:cs typeface="Calibri" pitchFamily="34" charset="-120"/>
+              </a:rPr>
+              <a:t>Dataset (services · LOC)</a:t>
+            </a:r>
+            <a:endParaRPr lang="en-US" sz="1200" dirty="0"/>
+          </a:p>
+        </p:txBody>
+      </p:sp>
+      <p:sp>
+        <p:nvSpPr>
+          <p:cNvPr id="6" name="Shape 3"/>
+          <p:cNvSpPr/>
+          <p:nvPr/>
+        </p:nvSpPr>
+        <p:spPr>
+          <a:xfrm>
+            <a:off x="5943600" y="1261872"/>
+            <a:ext cx="2651760" cy="13716"/>
+          </a:xfrm>
+          <a:prstGeom prst="rect">
+            <a:avLst/>
+          </a:prstGeom>
+          <a:solidFill>
+            <a:srgbClr val="D8DEE6"/>
+          </a:solidFill>
+          <a:ln w="12700">
+            <a:solidFill>
+              <a:srgbClr val="D8DEE6"/>
+            </a:solidFill>
+            <a:prstDash val="solid"/>
+          </a:ln>
+        </p:spPr>
+        <p:txBody>
+          <a:bodyPr/>
+          <a:lstStyle/>
+          <a:p>
+            <a:endParaRPr lang="en-US"/>
+          </a:p>
+        </p:txBody>
+      </p:sp>
+      <p:sp>
+        <p:nvSpPr>
+          <p:cNvPr id="7" name="Text 4"/>
+          <p:cNvSpPr/>
+          <p:nvPr/>
+        </p:nvSpPr>
+        <p:spPr>
+          <a:xfrm>
+            <a:off x="5943600" y="1335024"/>
+            <a:ext cx="1417320" cy="192024"/>
+          </a:xfrm>
+          <a:prstGeom prst="rect">
+            <a:avLst/>
+          </a:prstGeom>
+          <a:noFill/>
+          <a:ln/>
+        </p:spPr>
+        <p:txBody>
+          <a:bodyPr wrap="square" lIns="0" tIns="0" rIns="0" bIns="0" rtlCol="0" anchor="ctr"/>
+          <a:lstStyle/>
+          <a:p>
+            <a:pPr marL="0" indent="0">
+              <a:buNone/>
+            </a:pPr>
+            <a:r>
+              <a:rPr lang="en-US" sz="900" dirty="0">
+                <a:solidFill>
+                  <a:srgbClr val="1E293B"/>
+                </a:solidFill>
+                <a:latin typeface="Calibri" pitchFamily="34" charset="0"/>
+                <a:ea typeface="Calibri" pitchFamily="34" charset="-122"/>
+                <a:cs typeface="Calibri" pitchFamily="34" charset="-120"/>
+              </a:rPr>
+              <a:t>MicroSocial</a:t>
+            </a:r>
+            <a:endParaRPr lang="en-US" sz="900" dirty="0"/>
+          </a:p>
+        </p:txBody>
+      </p:sp>
+      <p:sp>
+        <p:nvSpPr>
+          <p:cNvPr id="8" name="Text 5"/>
+          <p:cNvSpPr/>
+          <p:nvPr/>
+        </p:nvSpPr>
+        <p:spPr>
+          <a:xfrm>
+            <a:off x="7360920" y="1335024"/>
+            <a:ext cx="457200" cy="192024"/>
+          </a:xfrm>
+          <a:prstGeom prst="rect">
+            <a:avLst/>
+          </a:prstGeom>
+          <a:noFill/>
+          <a:ln/>
+        </p:spPr>
+        <p:txBody>
+          <a:bodyPr wrap="square" lIns="0" tIns="0" rIns="0" bIns="0" rtlCol="0" anchor="ctr"/>
+          <a:lstStyle/>
+          <a:p>
+            <a:pPr marL="0" indent="0" algn="ctr">
+              <a:buNone/>
+            </a:pPr>
+            <a:r>
+              <a:rPr lang="en-US" sz="900" dirty="0">
+                <a:solidFill>
+                  <a:srgbClr val="1E293B"/>
+                </a:solidFill>
+                <a:latin typeface="Calibri" pitchFamily="34" charset="0"/>
+                <a:ea typeface="Calibri" pitchFamily="34" charset="-122"/>
+                <a:cs typeface="Calibri" pitchFamily="34" charset="-120"/>
+              </a:rPr>
+              <a:t>4</a:t>
+            </a:r>
+            <a:endParaRPr lang="en-US" sz="900" dirty="0"/>
+          </a:p>
+        </p:txBody>
+      </p:sp>
+      <p:sp>
+        <p:nvSpPr>
+          <p:cNvPr id="9" name="Text 6"/>
+          <p:cNvSpPr/>
+          <p:nvPr/>
+        </p:nvSpPr>
+        <p:spPr>
+          <a:xfrm>
+            <a:off x="7818120" y="1335024"/>
+            <a:ext cx="777240" cy="192024"/>
+          </a:xfrm>
+          <a:prstGeom prst="rect">
+            <a:avLst/>
+          </a:prstGeom>
+          <a:noFill/>
+          <a:ln/>
+        </p:spPr>
+        <p:txBody>
+          <a:bodyPr wrap="square" lIns="0" tIns="0" rIns="0" bIns="0" rtlCol="0" anchor="ctr"/>
+          <a:lstStyle/>
+          <a:p>
+            <a:pPr marL="0" indent="0" algn="r">
+              <a:buNone/>
+            </a:pPr>
+            <a:r>
+              <a:rPr lang="en-US" sz="900" dirty="0">
+                <a:solidFill>
+                  <a:srgbClr val="1E293B"/>
+                </a:solidFill>
+                <a:latin typeface="Calibri" pitchFamily="34" charset="0"/>
+                <a:ea typeface="Calibri" pitchFamily="34" charset="-122"/>
+                <a:cs typeface="Calibri" pitchFamily="34" charset="-120"/>
+              </a:rPr>
+              <a:t>2k</a:t>
+            </a:r>
+            <a:endParaRPr lang="en-US" sz="900" dirty="0"/>
+          </a:p>
+        </p:txBody>
+      </p:sp>
+      <p:sp>
+        <p:nvSpPr>
+          <p:cNvPr id="10" name="Text 7"/>
+          <p:cNvSpPr/>
+          <p:nvPr/>
+        </p:nvSpPr>
+        <p:spPr>
+          <a:xfrm>
+            <a:off x="5943600" y="1531620"/>
+            <a:ext cx="1417320" cy="192024"/>
+          </a:xfrm>
+          <a:prstGeom prst="rect">
+            <a:avLst/>
+          </a:prstGeom>
+          <a:noFill/>
+          <a:ln/>
+        </p:spPr>
+        <p:txBody>
+          <a:bodyPr wrap="square" lIns="0" tIns="0" rIns="0" bIns="0" rtlCol="0" anchor="ctr"/>
+          <a:lstStyle/>
+          <a:p>
+            <a:pPr marL="0" indent="0">
+              <a:buNone/>
+            </a:pPr>
+            <a:r>
+              <a:rPr lang="en-US" sz="900" dirty="0">
+                <a:solidFill>
+                  <a:srgbClr val="1E293B"/>
+                </a:solidFill>
+                <a:latin typeface="Calibri" pitchFamily="34" charset="0"/>
+                <a:ea typeface="Calibri" pitchFamily="34" charset="-122"/>
+                <a:cs typeface="Calibri" pitchFamily="34" charset="-120"/>
+              </a:rPr>
+              <a:t>design-pat.</a:t>
+            </a:r>
+            <a:endParaRPr lang="en-US" sz="900" dirty="0"/>
+          </a:p>
+        </p:txBody>
+      </p:sp>
+      <p:sp>
+        <p:nvSpPr>
+          <p:cNvPr id="11" name="Text 8"/>
+          <p:cNvSpPr/>
+          <p:nvPr/>
+        </p:nvSpPr>
+        <p:spPr>
+          <a:xfrm>
+            <a:off x="7360920" y="1531620"/>
+            <a:ext cx="457200" cy="192024"/>
+          </a:xfrm>
+          <a:prstGeom prst="rect">
+            <a:avLst/>
+          </a:prstGeom>
+          <a:noFill/>
+          <a:ln/>
+        </p:spPr>
+        <p:txBody>
+          <a:bodyPr wrap="square" lIns="0" tIns="0" rIns="0" bIns="0" rtlCol="0" anchor="ctr"/>
+          <a:lstStyle/>
+          <a:p>
+            <a:pPr marL="0" indent="0" algn="ctr">
+              <a:buNone/>
+            </a:pPr>
+            <a:r>
+              <a:rPr lang="en-US" sz="900" dirty="0">
+                <a:solidFill>
+                  <a:srgbClr val="1E293B"/>
+                </a:solidFill>
+                <a:latin typeface="Calibri" pitchFamily="34" charset="0"/>
+                <a:ea typeface="Calibri" pitchFamily="34" charset="-122"/>
+                <a:cs typeface="Calibri" pitchFamily="34" charset="-120"/>
+              </a:rPr>
+              <a:t>16</a:t>
+            </a:r>
+            <a:endParaRPr lang="en-US" sz="900" dirty="0"/>
+          </a:p>
+        </p:txBody>
+      </p:sp>
+      <p:sp>
+        <p:nvSpPr>
+          <p:cNvPr id="12" name="Text 9"/>
+          <p:cNvSpPr/>
+          <p:nvPr/>
+        </p:nvSpPr>
+        <p:spPr>
+          <a:xfrm>
+            <a:off x="7818120" y="1531620"/>
+            <a:ext cx="777240" cy="192024"/>
+          </a:xfrm>
+          <a:prstGeom prst="rect">
+            <a:avLst/>
+          </a:prstGeom>
+          <a:noFill/>
+          <a:ln/>
+        </p:spPr>
+        <p:txBody>
+          <a:bodyPr wrap="square" lIns="0" tIns="0" rIns="0" bIns="0" rtlCol="0" anchor="ctr"/>
+          <a:lstStyle/>
+          <a:p>
+            <a:pPr marL="0" indent="0" algn="r">
+              <a:buNone/>
+            </a:pPr>
+            <a:r>
+              <a:rPr lang="en-US" sz="900" dirty="0">
+                <a:solidFill>
+                  <a:srgbClr val="1E293B"/>
+                </a:solidFill>
+                <a:latin typeface="Calibri" pitchFamily="34" charset="0"/>
+                <a:ea typeface="Calibri" pitchFamily="34" charset="-122"/>
+                <a:cs typeface="Calibri" pitchFamily="34" charset="-120"/>
+              </a:rPr>
+              <a:t>19k</a:t>
+            </a:r>
+            <a:endParaRPr lang="en-US" sz="900" dirty="0"/>
+          </a:p>
+        </p:txBody>
+      </p:sp>
+      <p:sp>
+        <p:nvSpPr>
+          <p:cNvPr id="13" name="Text 10"/>
+          <p:cNvSpPr/>
+          <p:nvPr/>
+        </p:nvSpPr>
+        <p:spPr>
+          <a:xfrm>
+            <a:off x="5943600" y="1728216"/>
+            <a:ext cx="1417320" cy="192024"/>
+          </a:xfrm>
+          <a:prstGeom prst="rect">
+            <a:avLst/>
+          </a:prstGeom>
+          <a:noFill/>
+          <a:ln/>
+        </p:spPr>
+        <p:txBody>
+          <a:bodyPr wrap="square" lIns="0" tIns="0" rIns="0" bIns="0" rtlCol="0" anchor="ctr"/>
+          <a:lstStyle/>
+          <a:p>
+            <a:pPr marL="0" indent="0">
+              <a:buNone/>
+            </a:pPr>
+            <a:r>
+              <a:rPr lang="en-US" sz="900" dirty="0">
+                <a:solidFill>
+                  <a:srgbClr val="1E293B"/>
+                </a:solidFill>
+                <a:latin typeface="Calibri" pitchFamily="34" charset="0"/>
+                <a:ea typeface="Calibri" pitchFamily="34" charset="-122"/>
+                <a:cs typeface="Calibri" pitchFamily="34" charset="-120"/>
+              </a:rPr>
+              <a:t>Site-Where</a:t>
+            </a:r>
+            <a:endParaRPr lang="en-US" sz="900" dirty="0"/>
+          </a:p>
+        </p:txBody>
+      </p:sp>
+      <p:sp>
+        <p:nvSpPr>
+          <p:cNvPr id="14" name="Text 11"/>
+          <p:cNvSpPr/>
+          <p:nvPr/>
+        </p:nvSpPr>
+        <p:spPr>
+          <a:xfrm>
+            <a:off x="7360920" y="1728216"/>
+            <a:ext cx="457200" cy="192024"/>
+          </a:xfrm>
+          <a:prstGeom prst="rect">
+            <a:avLst/>
+          </a:prstGeom>
+          <a:noFill/>
+          <a:ln/>
+        </p:spPr>
+        <p:txBody>
+          <a:bodyPr wrap="square" lIns="0" tIns="0" rIns="0" bIns="0" rtlCol="0" anchor="ctr"/>
+          <a:lstStyle/>
+          <a:p>
+            <a:pPr marL="0" indent="0" algn="ctr">
+              <a:buNone/>
+            </a:pPr>
+            <a:r>
+              <a:rPr lang="en-US" sz="900" dirty="0">
+                <a:solidFill>
+                  <a:srgbClr val="1E293B"/>
+                </a:solidFill>
+                <a:latin typeface="Calibri" pitchFamily="34" charset="0"/>
+                <a:ea typeface="Calibri" pitchFamily="34" charset="-122"/>
+                <a:cs typeface="Calibri" pitchFamily="34" charset="-120"/>
+              </a:rPr>
+              <a:t>15</a:t>
+            </a:r>
+            <a:endParaRPr lang="en-US" sz="900" dirty="0"/>
+          </a:p>
+        </p:txBody>
+      </p:sp>
+      <p:sp>
+        <p:nvSpPr>
+          <p:cNvPr id="15" name="Text 12"/>
+          <p:cNvSpPr/>
+          <p:nvPr/>
+        </p:nvSpPr>
+        <p:spPr>
+          <a:xfrm>
+            <a:off x="7818120" y="1728216"/>
+            <a:ext cx="777240" cy="192024"/>
+          </a:xfrm>
+          <a:prstGeom prst="rect">
+            <a:avLst/>
+          </a:prstGeom>
+          <a:noFill/>
+          <a:ln/>
+        </p:spPr>
+        <p:txBody>
+          <a:bodyPr wrap="square" lIns="0" tIns="0" rIns="0" bIns="0" rtlCol="0" anchor="ctr"/>
+          <a:lstStyle/>
+          <a:p>
+            <a:pPr marL="0" indent="0" algn="r">
+              <a:buNone/>
+            </a:pPr>
+            <a:r>
+              <a:rPr lang="en-US" sz="900" dirty="0">
+                <a:solidFill>
+                  <a:srgbClr val="1E293B"/>
+                </a:solidFill>
+                <a:latin typeface="Calibri" pitchFamily="34" charset="0"/>
+                <a:ea typeface="Calibri" pitchFamily="34" charset="-122"/>
+                <a:cs typeface="Calibri" pitchFamily="34" charset="-120"/>
+              </a:rPr>
+              <a:t>74k</a:t>
+            </a:r>
+            <a:endParaRPr lang="en-US" sz="900" dirty="0"/>
+          </a:p>
+        </p:txBody>
+      </p:sp>
+      <p:sp>
+        <p:nvSpPr>
+          <p:cNvPr id="16" name="Text 13"/>
+          <p:cNvSpPr/>
+          <p:nvPr/>
+        </p:nvSpPr>
+        <p:spPr>
+          <a:xfrm>
+            <a:off x="5943600" y="1924812"/>
+            <a:ext cx="1417320" cy="192024"/>
+          </a:xfrm>
+          <a:prstGeom prst="rect">
+            <a:avLst/>
+          </a:prstGeom>
+          <a:noFill/>
+          <a:ln/>
+        </p:spPr>
+        <p:txBody>
+          <a:bodyPr wrap="square" lIns="0" tIns="0" rIns="0" bIns="0" rtlCol="0" anchor="ctr"/>
+          <a:lstStyle/>
+          <a:p>
+            <a:pPr marL="0" indent="0">
+              <a:buNone/>
+            </a:pPr>
+            <a:r>
+              <a:rPr lang="en-US" sz="900" dirty="0">
+                <a:solidFill>
+                  <a:srgbClr val="1E293B"/>
+                </a:solidFill>
+                <a:latin typeface="Calibri" pitchFamily="34" charset="0"/>
+                <a:ea typeface="Calibri" pitchFamily="34" charset="-122"/>
+                <a:cs typeface="Calibri" pitchFamily="34" charset="-120"/>
+              </a:rPr>
+              <a:t>Train-Ticket</a:t>
+            </a:r>
+            <a:endParaRPr lang="en-US" sz="900" dirty="0"/>
+          </a:p>
+        </p:txBody>
+      </p:sp>
+      <p:sp>
+        <p:nvSpPr>
+          <p:cNvPr id="17" name="Text 14"/>
+          <p:cNvSpPr/>
+          <p:nvPr/>
+        </p:nvSpPr>
+        <p:spPr>
+          <a:xfrm>
+            <a:off x="7360920" y="1924812"/>
+            <a:ext cx="457200" cy="192024"/>
+          </a:xfrm>
+          <a:prstGeom prst="rect">
+            <a:avLst/>
+          </a:prstGeom>
+          <a:noFill/>
+          <a:ln/>
+        </p:spPr>
+        <p:txBody>
+          <a:bodyPr wrap="square" lIns="0" tIns="0" rIns="0" bIns="0" rtlCol="0" anchor="ctr"/>
+          <a:lstStyle/>
+          <a:p>
+            <a:pPr marL="0" indent="0" algn="ctr">
+              <a:buNone/>
+            </a:pPr>
+            <a:r>
+              <a:rPr lang="en-US" sz="900" dirty="0">
+                <a:solidFill>
+                  <a:srgbClr val="1E293B"/>
+                </a:solidFill>
+                <a:latin typeface="Calibri" pitchFamily="34" charset="0"/>
+                <a:ea typeface="Calibri" pitchFamily="34" charset="-122"/>
+                <a:cs typeface="Calibri" pitchFamily="34" charset="-120"/>
+              </a:rPr>
+              <a:t>41</a:t>
+            </a:r>
+            <a:endParaRPr lang="en-US" sz="900" dirty="0"/>
+          </a:p>
+        </p:txBody>
+      </p:sp>
+      <p:sp>
+        <p:nvSpPr>
+          <p:cNvPr id="18" name="Text 15"/>
+          <p:cNvSpPr/>
+          <p:nvPr/>
+        </p:nvSpPr>
+        <p:spPr>
+          <a:xfrm>
+            <a:off x="7818120" y="1924812"/>
+            <a:ext cx="777240" cy="192024"/>
+          </a:xfrm>
+          <a:prstGeom prst="rect">
+            <a:avLst/>
+          </a:prstGeom>
+          <a:noFill/>
+          <a:ln/>
+        </p:spPr>
+        <p:txBody>
+          <a:bodyPr wrap="square" lIns="0" tIns="0" rIns="0" bIns="0" rtlCol="0" anchor="ctr"/>
+          <a:lstStyle/>
+          <a:p>
+            <a:pPr marL="0" indent="0" algn="r">
+              <a:buNone/>
+            </a:pPr>
+            <a:r>
+              <a:rPr lang="en-US" sz="900" dirty="0">
+                <a:solidFill>
+                  <a:srgbClr val="1E293B"/>
+                </a:solidFill>
+                <a:latin typeface="Calibri" pitchFamily="34" charset="0"/>
+                <a:ea typeface="Calibri" pitchFamily="34" charset="-122"/>
+                <a:cs typeface="Calibri" pitchFamily="34" charset="-120"/>
+              </a:rPr>
+              <a:t>36k</a:t>
+            </a:r>
+            <a:endParaRPr lang="en-US" sz="900" dirty="0"/>
+          </a:p>
+        </p:txBody>
+      </p:sp>
+      <p:sp>
+        <p:nvSpPr>
+          <p:cNvPr id="19" name="Text 16"/>
+          <p:cNvSpPr/>
+          <p:nvPr/>
+        </p:nvSpPr>
+        <p:spPr>
+          <a:xfrm>
+            <a:off x="5943600" y="2121408"/>
+            <a:ext cx="1417320" cy="192024"/>
+          </a:xfrm>
+          <a:prstGeom prst="rect">
+            <a:avLst/>
+          </a:prstGeom>
+          <a:noFill/>
+          <a:ln/>
+        </p:spPr>
+        <p:txBody>
+          <a:bodyPr wrap="square" lIns="0" tIns="0" rIns="0" bIns="0" rtlCol="0" anchor="ctr"/>
+          <a:lstStyle/>
+          <a:p>
+            <a:pPr marL="0" indent="0">
+              <a:buNone/>
+            </a:pPr>
+            <a:r>
+              <a:rPr lang="en-US" sz="900" dirty="0">
+                <a:solidFill>
+                  <a:srgbClr val="1E293B"/>
+                </a:solidFill>
+                <a:latin typeface="Calibri" pitchFamily="34" charset="0"/>
+                <a:ea typeface="Calibri" pitchFamily="34" charset="-122"/>
+                <a:cs typeface="Calibri" pitchFamily="34" charset="-120"/>
+              </a:rPr>
+              <a:t>NetworkDisk</a:t>
+            </a:r>
+            <a:endParaRPr lang="en-US" sz="900" dirty="0"/>
+          </a:p>
+        </p:txBody>
+      </p:sp>
+      <p:sp>
+        <p:nvSpPr>
+          <p:cNvPr id="20" name="Text 17"/>
+          <p:cNvSpPr/>
+          <p:nvPr/>
+        </p:nvSpPr>
+        <p:spPr>
+          <a:xfrm>
+            <a:off x="7360920" y="2121408"/>
+            <a:ext cx="457200" cy="192024"/>
+          </a:xfrm>
+          <a:prstGeom prst="rect">
+            <a:avLst/>
+          </a:prstGeom>
+          <a:noFill/>
+          <a:ln/>
+        </p:spPr>
+        <p:txBody>
+          <a:bodyPr wrap="square" lIns="0" tIns="0" rIns="0" bIns="0" rtlCol="0" anchor="ctr"/>
+          <a:lstStyle/>
+          <a:p>
+            <a:pPr marL="0" indent="0" algn="ctr">
+              <a:buNone/>
+            </a:pPr>
+            <a:r>
+              <a:rPr lang="en-US" sz="900" dirty="0">
+                <a:solidFill>
+                  <a:srgbClr val="1E293B"/>
+                </a:solidFill>
+                <a:latin typeface="Calibri" pitchFamily="34" charset="0"/>
+                <a:ea typeface="Calibri" pitchFamily="34" charset="-122"/>
+                <a:cs typeface="Calibri" pitchFamily="34" charset="-120"/>
+              </a:rPr>
+              <a:t>10</a:t>
+            </a:r>
+            <a:endParaRPr lang="en-US" sz="900" dirty="0"/>
+          </a:p>
+        </p:txBody>
+      </p:sp>
+      <p:sp>
+        <p:nvSpPr>
+          <p:cNvPr id="21" name="Text 18"/>
+          <p:cNvSpPr/>
+          <p:nvPr/>
+        </p:nvSpPr>
+        <p:spPr>
+          <a:xfrm>
+            <a:off x="7818120" y="2121408"/>
+            <a:ext cx="777240" cy="192024"/>
+          </a:xfrm>
+          <a:prstGeom prst="rect">
+            <a:avLst/>
+          </a:prstGeom>
+          <a:noFill/>
+          <a:ln/>
+        </p:spPr>
+        <p:txBody>
+          <a:bodyPr wrap="square" lIns="0" tIns="0" rIns="0" bIns="0" rtlCol="0" anchor="ctr"/>
+          <a:lstStyle/>
+          <a:p>
+            <a:pPr marL="0" indent="0" algn="r">
+              <a:buNone/>
+            </a:pPr>
+            <a:r>
+              <a:rPr lang="en-US" sz="900" dirty="0">
+                <a:solidFill>
+                  <a:srgbClr val="1E293B"/>
+                </a:solidFill>
+                <a:latin typeface="Calibri" pitchFamily="34" charset="0"/>
+                <a:ea typeface="Calibri" pitchFamily="34" charset="-122"/>
+                <a:cs typeface="Calibri" pitchFamily="34" charset="-120"/>
+              </a:rPr>
+              <a:t>7k</a:t>
+            </a:r>
+            <a:endParaRPr lang="en-US" sz="900" dirty="0"/>
+          </a:p>
+        </p:txBody>
+      </p:sp>
+      <p:sp>
+        <p:nvSpPr>
+          <p:cNvPr id="22" name="Text 19"/>
+          <p:cNvSpPr/>
+          <p:nvPr/>
+        </p:nvSpPr>
+        <p:spPr>
+          <a:xfrm>
+            <a:off x="5943600" y="2318004"/>
+            <a:ext cx="1417320" cy="192024"/>
+          </a:xfrm>
+          <a:prstGeom prst="rect">
+            <a:avLst/>
+          </a:prstGeom>
+          <a:noFill/>
+          <a:ln/>
+        </p:spPr>
+        <p:txBody>
+          <a:bodyPr wrap="square" lIns="0" tIns="0" rIns="0" bIns="0" rtlCol="0" anchor="ctr"/>
+          <a:lstStyle/>
+          <a:p>
+            <a:pPr marL="0" indent="0">
+              <a:buNone/>
+            </a:pPr>
+            <a:r>
+              <a:rPr lang="en-US" sz="900" dirty="0">
+                <a:solidFill>
+                  <a:srgbClr val="1E293B"/>
+                </a:solidFill>
+                <a:latin typeface="Calibri" pitchFamily="34" charset="0"/>
+                <a:ea typeface="Calibri" pitchFamily="34" charset="-122"/>
+                <a:cs typeface="Calibri" pitchFamily="34" charset="-120"/>
+              </a:rPr>
+              <a:t>recruit</a:t>
+            </a:r>
+            <a:endParaRPr lang="en-US" sz="900" dirty="0"/>
+          </a:p>
+        </p:txBody>
+      </p:sp>
+      <p:sp>
+        <p:nvSpPr>
+          <p:cNvPr id="23" name="Text 20"/>
+          <p:cNvSpPr/>
+          <p:nvPr/>
+        </p:nvSpPr>
+        <p:spPr>
+          <a:xfrm>
+            <a:off x="7360920" y="2318004"/>
+            <a:ext cx="457200" cy="192024"/>
+          </a:xfrm>
+          <a:prstGeom prst="rect">
+            <a:avLst/>
+          </a:prstGeom>
+          <a:noFill/>
+          <a:ln/>
+        </p:spPr>
+        <p:txBody>
+          <a:bodyPr wrap="square" lIns="0" tIns="0" rIns="0" bIns="0" rtlCol="0" anchor="ctr"/>
+          <a:lstStyle/>
+          <a:p>
+            <a:pPr marL="0" indent="0" algn="ctr">
+              <a:buNone/>
+            </a:pPr>
+            <a:r>
+              <a:rPr lang="en-US" sz="900" dirty="0">
+                <a:solidFill>
+                  <a:srgbClr val="1E293B"/>
+                </a:solidFill>
+                <a:latin typeface="Calibri" pitchFamily="34" charset="0"/>
+                <a:ea typeface="Calibri" pitchFamily="34" charset="-122"/>
+                <a:cs typeface="Calibri" pitchFamily="34" charset="-120"/>
+              </a:rPr>
+              <a:t>8</a:t>
+            </a:r>
+            <a:endParaRPr lang="en-US" sz="900" dirty="0"/>
+          </a:p>
+        </p:txBody>
+      </p:sp>
+      <p:sp>
+        <p:nvSpPr>
+          <p:cNvPr id="24" name="Text 21"/>
+          <p:cNvSpPr/>
+          <p:nvPr/>
+        </p:nvSpPr>
+        <p:spPr>
+          <a:xfrm>
+            <a:off x="7818120" y="2318004"/>
+            <a:ext cx="777240" cy="192024"/>
+          </a:xfrm>
+          <a:prstGeom prst="rect">
+            <a:avLst/>
+          </a:prstGeom>
+          <a:noFill/>
+          <a:ln/>
+        </p:spPr>
+        <p:txBody>
+          <a:bodyPr wrap="square" lIns="0" tIns="0" rIns="0" bIns="0" rtlCol="0" anchor="ctr"/>
+          <a:lstStyle/>
+          <a:p>
+            <a:pPr marL="0" indent="0" algn="r">
+              <a:buNone/>
+            </a:pPr>
+            <a:r>
+              <a:rPr lang="en-US" sz="900" dirty="0">
+                <a:solidFill>
+                  <a:srgbClr val="1E293B"/>
+                </a:solidFill>
+                <a:latin typeface="Calibri" pitchFamily="34" charset="0"/>
+                <a:ea typeface="Calibri" pitchFamily="34" charset="-122"/>
+                <a:cs typeface="Calibri" pitchFamily="34" charset="-120"/>
+              </a:rPr>
+              <a:t>8k</a:t>
+            </a:r>
+            <a:endParaRPr lang="en-US" sz="900" dirty="0"/>
+          </a:p>
+        </p:txBody>
+      </p:sp>
+      <p:sp>
+        <p:nvSpPr>
+          <p:cNvPr id="25" name="Text 22"/>
+          <p:cNvSpPr/>
+          <p:nvPr/>
+        </p:nvSpPr>
+        <p:spPr>
+          <a:xfrm>
+            <a:off x="5943600" y="2514600"/>
+            <a:ext cx="1417320" cy="192024"/>
+          </a:xfrm>
+          <a:prstGeom prst="rect">
+            <a:avLst/>
+          </a:prstGeom>
+          <a:noFill/>
+          <a:ln/>
+        </p:spPr>
+        <p:txBody>
+          <a:bodyPr wrap="square" lIns="0" tIns="0" rIns="0" bIns="0" rtlCol="0" anchor="ctr"/>
+          <a:lstStyle/>
+          <a:p>
+            <a:pPr marL="0" indent="0">
+              <a:buNone/>
+            </a:pPr>
+            <a:r>
+              <a:rPr lang="en-US" sz="900" dirty="0">
+                <a:solidFill>
+                  <a:srgbClr val="1E293B"/>
+                </a:solidFill>
+                <a:latin typeface="Calibri" pitchFamily="34" charset="0"/>
+                <a:ea typeface="Calibri" pitchFamily="34" charset="-122"/>
+                <a:cs typeface="Calibri" pitchFamily="34" charset="-120"/>
+              </a:rPr>
+              <a:t>ftgo</a:t>
+            </a:r>
+            <a:endParaRPr lang="en-US" sz="900" dirty="0"/>
+          </a:p>
+        </p:txBody>
+      </p:sp>
+      <p:sp>
+        <p:nvSpPr>
+          <p:cNvPr id="26" name="Text 23"/>
+          <p:cNvSpPr/>
+          <p:nvPr/>
+        </p:nvSpPr>
+        <p:spPr>
+          <a:xfrm>
+            <a:off x="7360920" y="2514600"/>
+            <a:ext cx="457200" cy="192024"/>
+          </a:xfrm>
+          <a:prstGeom prst="rect">
+            <a:avLst/>
+          </a:prstGeom>
+          <a:noFill/>
+          <a:ln/>
+        </p:spPr>
+        <p:txBody>
+          <a:bodyPr wrap="square" lIns="0" tIns="0" rIns="0" bIns="0" rtlCol="0" anchor="ctr"/>
+          <a:lstStyle/>
+          <a:p>
+            <a:pPr marL="0" indent="0" algn="ctr">
+              <a:buNone/>
+            </a:pPr>
+            <a:r>
+              <a:rPr lang="en-US" sz="900" dirty="0">
+                <a:solidFill>
+                  <a:srgbClr val="1E293B"/>
+                </a:solidFill>
+                <a:latin typeface="Calibri" pitchFamily="34" charset="0"/>
+                <a:ea typeface="Calibri" pitchFamily="34" charset="-122"/>
+                <a:cs typeface="Calibri" pitchFamily="34" charset="-120"/>
+              </a:rPr>
+              <a:t>7</a:t>
+            </a:r>
+            <a:endParaRPr lang="en-US" sz="900" dirty="0"/>
+          </a:p>
+        </p:txBody>
+      </p:sp>
+      <p:sp>
+        <p:nvSpPr>
+          <p:cNvPr id="27" name="Text 24"/>
+          <p:cNvSpPr/>
+          <p:nvPr/>
+        </p:nvSpPr>
+        <p:spPr>
+          <a:xfrm>
+            <a:off x="7818120" y="2514600"/>
+            <a:ext cx="777240" cy="192024"/>
+          </a:xfrm>
+          <a:prstGeom prst="rect">
+            <a:avLst/>
+          </a:prstGeom>
+          <a:noFill/>
+          <a:ln/>
+        </p:spPr>
+        <p:txBody>
+          <a:bodyPr wrap="square" lIns="0" tIns="0" rIns="0" bIns="0" rtlCol="0" anchor="ctr"/>
+          <a:lstStyle/>
+          <a:p>
+            <a:pPr marL="0" indent="0" algn="r">
+              <a:buNone/>
+            </a:pPr>
+            <a:r>
+              <a:rPr lang="en-US" sz="900" dirty="0">
+                <a:solidFill>
+                  <a:srgbClr val="1E293B"/>
+                </a:solidFill>
+                <a:latin typeface="Calibri" pitchFamily="34" charset="0"/>
+                <a:ea typeface="Calibri" pitchFamily="34" charset="-122"/>
+                <a:cs typeface="Calibri" pitchFamily="34" charset="-120"/>
+              </a:rPr>
+              <a:t>11k</a:t>
+            </a:r>
+            <a:endParaRPr lang="en-US" sz="900" dirty="0"/>
+          </a:p>
+        </p:txBody>
+      </p:sp>
+      <p:sp>
+        <p:nvSpPr>
+          <p:cNvPr id="28" name="Text 25"/>
+          <p:cNvSpPr/>
+          <p:nvPr/>
+        </p:nvSpPr>
+        <p:spPr>
+          <a:xfrm>
+            <a:off x="5943600" y="2711196"/>
+            <a:ext cx="1417320" cy="192024"/>
+          </a:xfrm>
+          <a:prstGeom prst="rect">
+            <a:avLst/>
+          </a:prstGeom>
+          <a:noFill/>
+          <a:ln/>
+        </p:spPr>
+        <p:txBody>
+          <a:bodyPr wrap="square" lIns="0" tIns="0" rIns="0" bIns="0" rtlCol="0" anchor="ctr"/>
+          <a:lstStyle/>
+          <a:p>
+            <a:pPr marL="0" indent="0">
+              <a:buNone/>
+            </a:pPr>
+            <a:r>
+              <a:rPr lang="en-US" sz="900" dirty="0">
+                <a:solidFill>
+                  <a:srgbClr val="1E293B"/>
+                </a:solidFill>
+                <a:latin typeface="Calibri" pitchFamily="34" charset="0"/>
+                <a:ea typeface="Calibri" pitchFamily="34" charset="-122"/>
+                <a:cs typeface="Calibri" pitchFamily="34" charset="-120"/>
+              </a:rPr>
+              <a:t>mall-swarm</a:t>
+            </a:r>
+            <a:endParaRPr lang="en-US" sz="900" dirty="0"/>
+          </a:p>
+        </p:txBody>
+      </p:sp>
+      <p:sp>
+        <p:nvSpPr>
+          <p:cNvPr id="29" name="Text 26"/>
+          <p:cNvSpPr/>
+          <p:nvPr/>
+        </p:nvSpPr>
+        <p:spPr>
+          <a:xfrm>
+            <a:off x="7360920" y="2711196"/>
+            <a:ext cx="457200" cy="192024"/>
+          </a:xfrm>
+          <a:prstGeom prst="rect">
+            <a:avLst/>
+          </a:prstGeom>
+          <a:noFill/>
+          <a:ln/>
+        </p:spPr>
+        <p:txBody>
+          <a:bodyPr wrap="square" lIns="0" tIns="0" rIns="0" bIns="0" rtlCol="0" anchor="ctr"/>
+          <a:lstStyle/>
+          <a:p>
+            <a:pPr marL="0" indent="0" algn="ctr">
+              <a:buNone/>
+            </a:pPr>
+            <a:r>
+              <a:rPr lang="en-US" sz="900" dirty="0">
+                <a:solidFill>
+                  <a:srgbClr val="1E293B"/>
+                </a:solidFill>
+                <a:latin typeface="Calibri" pitchFamily="34" charset="0"/>
+                <a:ea typeface="Calibri" pitchFamily="34" charset="-122"/>
+                <a:cs typeface="Calibri" pitchFamily="34" charset="-120"/>
+              </a:rPr>
+              <a:t>7</a:t>
+            </a:r>
+            <a:endParaRPr lang="en-US" sz="900" dirty="0"/>
+          </a:p>
+        </p:txBody>
+      </p:sp>
+      <p:sp>
+        <p:nvSpPr>
+          <p:cNvPr id="30" name="Text 27"/>
+          <p:cNvSpPr/>
+          <p:nvPr/>
+        </p:nvSpPr>
+        <p:spPr>
+          <a:xfrm>
+            <a:off x="7818120" y="2711196"/>
+            <a:ext cx="777240" cy="192024"/>
+          </a:xfrm>
+          <a:prstGeom prst="rect">
+            <a:avLst/>
+          </a:prstGeom>
+          <a:noFill/>
+          <a:ln/>
+        </p:spPr>
+        <p:txBody>
+          <a:bodyPr wrap="square" lIns="0" tIns="0" rIns="0" bIns="0" rtlCol="0" anchor="ctr"/>
+          <a:lstStyle/>
+          <a:p>
+            <a:pPr marL="0" indent="0" algn="r">
+              <a:buNone/>
+            </a:pPr>
+            <a:r>
+              <a:rPr lang="en-US" sz="900" dirty="0">
+                <a:solidFill>
+                  <a:srgbClr val="1E293B"/>
+                </a:solidFill>
+                <a:latin typeface="Calibri" pitchFamily="34" charset="0"/>
+                <a:ea typeface="Calibri" pitchFamily="34" charset="-122"/>
+                <a:cs typeface="Calibri" pitchFamily="34" charset="-120"/>
+              </a:rPr>
+              <a:t>86k</a:t>
+            </a:r>
+            <a:endParaRPr lang="en-US" sz="900" dirty="0"/>
+          </a:p>
+        </p:txBody>
+      </p:sp>
+      <p:sp>
+        <p:nvSpPr>
+          <p:cNvPr id="31" name="Text 28"/>
+          <p:cNvSpPr/>
+          <p:nvPr/>
+        </p:nvSpPr>
+        <p:spPr>
+          <a:xfrm>
+            <a:off x="5943600" y="2907792"/>
+            <a:ext cx="1417320" cy="192024"/>
+          </a:xfrm>
+          <a:prstGeom prst="rect">
+            <a:avLst/>
+          </a:prstGeom>
+          <a:noFill/>
+          <a:ln/>
+        </p:spPr>
+        <p:txBody>
+          <a:bodyPr wrap="square" lIns="0" tIns="0" rIns="0" bIns="0" rtlCol="0" anchor="ctr"/>
+          <a:lstStyle/>
+          <a:p>
+            <a:pPr marL="0" indent="0">
+              <a:buNone/>
+            </a:pPr>
+            <a:r>
+              <a:rPr lang="en-US" sz="900" dirty="0">
+                <a:solidFill>
+                  <a:srgbClr val="1E293B"/>
+                </a:solidFill>
+                <a:latin typeface="Calibri" pitchFamily="34" charset="0"/>
+                <a:ea typeface="Calibri" pitchFamily="34" charset="-122"/>
+                <a:cs typeface="Calibri" pitchFamily="34" charset="-120"/>
+              </a:rPr>
+              <a:t>RuoYi</a:t>
+            </a:r>
+            <a:endParaRPr lang="en-US" sz="900" dirty="0"/>
+          </a:p>
+        </p:txBody>
+      </p:sp>
+      <p:sp>
+        <p:nvSpPr>
+          <p:cNvPr id="32" name="Text 29"/>
+          <p:cNvSpPr/>
+          <p:nvPr/>
+        </p:nvSpPr>
+        <p:spPr>
+          <a:xfrm>
+            <a:off x="7360920" y="2907792"/>
+            <a:ext cx="457200" cy="192024"/>
+          </a:xfrm>
+          <a:prstGeom prst="rect">
+            <a:avLst/>
+          </a:prstGeom>
+          <a:noFill/>
+          <a:ln/>
+        </p:spPr>
+        <p:txBody>
+          <a:bodyPr wrap="square" lIns="0" tIns="0" rIns="0" bIns="0" rtlCol="0" anchor="ctr"/>
+          <a:lstStyle/>
+          <a:p>
+            <a:pPr marL="0" indent="0" algn="ctr">
+              <a:buNone/>
+            </a:pPr>
+            <a:r>
+              <a:rPr lang="en-US" sz="900" dirty="0">
+                <a:solidFill>
+                  <a:srgbClr val="1E293B"/>
+                </a:solidFill>
+                <a:latin typeface="Calibri" pitchFamily="34" charset="0"/>
+                <a:ea typeface="Calibri" pitchFamily="34" charset="-122"/>
+                <a:cs typeface="Calibri" pitchFamily="34" charset="-120"/>
+              </a:rPr>
+              <a:t>8</a:t>
+            </a:r>
+            <a:endParaRPr lang="en-US" sz="900" dirty="0"/>
+          </a:p>
+        </p:txBody>
+      </p:sp>
+      <p:sp>
+        <p:nvSpPr>
+          <p:cNvPr id="33" name="Text 30"/>
+          <p:cNvSpPr/>
+          <p:nvPr/>
+        </p:nvSpPr>
+        <p:spPr>
+          <a:xfrm>
+            <a:off x="7818120" y="2907792"/>
+            <a:ext cx="777240" cy="192024"/>
+          </a:xfrm>
+          <a:prstGeom prst="rect">
+            <a:avLst/>
+          </a:prstGeom>
+          <a:noFill/>
+          <a:ln/>
+        </p:spPr>
+        <p:txBody>
+          <a:bodyPr wrap="square" lIns="0" tIns="0" rIns="0" bIns="0" rtlCol="0" anchor="ctr"/>
+          <a:lstStyle/>
+          <a:p>
+            <a:pPr marL="0" indent="0" algn="r">
+              <a:buNone/>
+            </a:pPr>
+            <a:r>
+              <a:rPr lang="en-US" sz="900" dirty="0">
+                <a:solidFill>
+                  <a:srgbClr val="1E293B"/>
+                </a:solidFill>
+                <a:latin typeface="Calibri" pitchFamily="34" charset="0"/>
+                <a:ea typeface="Calibri" pitchFamily="34" charset="-122"/>
+                <a:cs typeface="Calibri" pitchFamily="34" charset="-120"/>
+              </a:rPr>
+              <a:t>27k</a:t>
+            </a:r>
+            <a:endParaRPr lang="en-US" sz="900" dirty="0"/>
+          </a:p>
+        </p:txBody>
+      </p:sp>
+      <p:sp>
+        <p:nvSpPr>
+          <p:cNvPr id="34" name="Text 31"/>
+          <p:cNvSpPr/>
+          <p:nvPr/>
+        </p:nvSpPr>
+        <p:spPr>
+          <a:xfrm>
+            <a:off x="5943600" y="3104388"/>
+            <a:ext cx="1417320" cy="192024"/>
+          </a:xfrm>
+          <a:prstGeom prst="rect">
+            <a:avLst/>
+          </a:prstGeom>
+          <a:noFill/>
+          <a:ln/>
+        </p:spPr>
+        <p:txBody>
+          <a:bodyPr wrap="square" lIns="0" tIns="0" rIns="0" bIns="0" rtlCol="0" anchor="ctr"/>
+          <a:lstStyle/>
+          <a:p>
+            <a:pPr marL="0" indent="0">
+              <a:buNone/>
+            </a:pPr>
+            <a:r>
+              <a:rPr lang="en-US" sz="900" dirty="0">
+                <a:solidFill>
+                  <a:srgbClr val="1E293B"/>
+                </a:solidFill>
+                <a:latin typeface="Calibri" pitchFamily="34" charset="0"/>
+                <a:ea typeface="Calibri" pitchFamily="34" charset="-122"/>
+                <a:cs typeface="Calibri" pitchFamily="34" charset="-120"/>
+              </a:rPr>
+              <a:t>PiggyMetrics</a:t>
+            </a:r>
+            <a:endParaRPr lang="en-US" sz="900" dirty="0"/>
+          </a:p>
+        </p:txBody>
+      </p:sp>
+      <p:sp>
+        <p:nvSpPr>
+          <p:cNvPr id="35" name="Text 32"/>
+          <p:cNvSpPr/>
+          <p:nvPr/>
+        </p:nvSpPr>
+        <p:spPr>
+          <a:xfrm>
+            <a:off x="7360920" y="3104388"/>
+            <a:ext cx="457200" cy="192024"/>
+          </a:xfrm>
+          <a:prstGeom prst="rect">
+            <a:avLst/>
+          </a:prstGeom>
+          <a:noFill/>
+          <a:ln/>
+        </p:spPr>
+        <p:txBody>
+          <a:bodyPr wrap="square" lIns="0" tIns="0" rIns="0" bIns="0" rtlCol="0" anchor="ctr"/>
+          <a:lstStyle/>
+          <a:p>
+            <a:pPr marL="0" indent="0" algn="ctr">
+              <a:buNone/>
+            </a:pPr>
+            <a:r>
+              <a:rPr lang="en-US" sz="900" dirty="0">
+                <a:solidFill>
+                  <a:srgbClr val="1E293B"/>
+                </a:solidFill>
+                <a:latin typeface="Calibri" pitchFamily="34" charset="0"/>
+                <a:ea typeface="Calibri" pitchFamily="34" charset="-122"/>
+                <a:cs typeface="Calibri" pitchFamily="34" charset="-120"/>
+              </a:rPr>
+              <a:t>8</a:t>
+            </a:r>
+            <a:endParaRPr lang="en-US" sz="900" dirty="0"/>
+          </a:p>
+        </p:txBody>
+      </p:sp>
+      <p:sp>
+        <p:nvSpPr>
+          <p:cNvPr id="36" name="Text 33"/>
+          <p:cNvSpPr/>
+          <p:nvPr/>
+        </p:nvSpPr>
+        <p:spPr>
+          <a:xfrm>
+            <a:off x="7818120" y="3104388"/>
+            <a:ext cx="777240" cy="192024"/>
+          </a:xfrm>
+          <a:prstGeom prst="rect">
+            <a:avLst/>
+          </a:prstGeom>
+          <a:noFill/>
+          <a:ln/>
+        </p:spPr>
+        <p:txBody>
+          <a:bodyPr wrap="square" lIns="0" tIns="0" rIns="0" bIns="0" rtlCol="0" anchor="ctr"/>
+          <a:lstStyle/>
+          <a:p>
+            <a:pPr marL="0" indent="0" algn="r">
+              <a:buNone/>
+            </a:pPr>
+            <a:r>
+              <a:rPr lang="en-US" sz="900" dirty="0">
+                <a:solidFill>
+                  <a:srgbClr val="1E293B"/>
+                </a:solidFill>
+                <a:latin typeface="Calibri" pitchFamily="34" charset="0"/>
+                <a:ea typeface="Calibri" pitchFamily="34" charset="-122"/>
+                <a:cs typeface="Calibri" pitchFamily="34" charset="-120"/>
+              </a:rPr>
+              <a:t>4.5k</a:t>
+            </a:r>
+            <a:endParaRPr lang="en-US" sz="900" dirty="0"/>
+          </a:p>
+        </p:txBody>
+      </p:sp>
+      <p:sp>
+        <p:nvSpPr>
+          <p:cNvPr id="37" name="Text 34"/>
+          <p:cNvSpPr/>
+          <p:nvPr/>
+        </p:nvSpPr>
+        <p:spPr>
+          <a:xfrm>
+            <a:off x="5943600" y="3300984"/>
+            <a:ext cx="1417320" cy="192024"/>
+          </a:xfrm>
+          <a:prstGeom prst="rect">
+            <a:avLst/>
+          </a:prstGeom>
+          <a:noFill/>
+          <a:ln/>
+        </p:spPr>
+        <p:txBody>
+          <a:bodyPr wrap="square" lIns="0" tIns="0" rIns="0" bIns="0" rtlCol="0" anchor="ctr"/>
+          <a:lstStyle/>
+          <a:p>
+            <a:pPr marL="0" indent="0">
+              <a:buNone/>
+            </a:pPr>
+            <a:r>
+              <a:rPr lang="en-US" sz="900" dirty="0">
+                <a:solidFill>
+                  <a:srgbClr val="1E293B"/>
+                </a:solidFill>
+                <a:latin typeface="Calibri" pitchFamily="34" charset="0"/>
+                <a:ea typeface="Calibri" pitchFamily="34" charset="-122"/>
+                <a:cs typeface="Calibri" pitchFamily="34" charset="-120"/>
+              </a:rPr>
+              <a:t>piomin</a:t>
+            </a:r>
+            <a:endParaRPr lang="en-US" sz="900" dirty="0"/>
+          </a:p>
+        </p:txBody>
+      </p:sp>
+      <p:sp>
+        <p:nvSpPr>
+          <p:cNvPr id="38" name="Text 35"/>
+          <p:cNvSpPr/>
+          <p:nvPr/>
+        </p:nvSpPr>
+        <p:spPr>
+          <a:xfrm>
+            <a:off x="7360920" y="3300984"/>
+            <a:ext cx="457200" cy="192024"/>
+          </a:xfrm>
+          <a:prstGeom prst="rect">
+            <a:avLst/>
+          </a:prstGeom>
+          <a:noFill/>
+          <a:ln/>
+        </p:spPr>
+        <p:txBody>
+          <a:bodyPr wrap="square" lIns="0" tIns="0" rIns="0" bIns="0" rtlCol="0" anchor="ctr"/>
+          <a:lstStyle/>
+          <a:p>
+            <a:pPr marL="0" indent="0" algn="ctr">
+              <a:buNone/>
+            </a:pPr>
+            <a:r>
+              <a:rPr lang="en-US" sz="900" dirty="0">
+                <a:solidFill>
+                  <a:srgbClr val="1E293B"/>
+                </a:solidFill>
+                <a:latin typeface="Calibri" pitchFamily="34" charset="0"/>
+                <a:ea typeface="Calibri" pitchFamily="34" charset="-122"/>
+                <a:cs typeface="Calibri" pitchFamily="34" charset="-120"/>
+              </a:rPr>
+              <a:t>6</a:t>
+            </a:r>
+            <a:endParaRPr lang="en-US" sz="900" dirty="0"/>
+          </a:p>
+        </p:txBody>
+      </p:sp>
+      <p:sp>
+        <p:nvSpPr>
+          <p:cNvPr id="39" name="Text 36"/>
+          <p:cNvSpPr/>
+          <p:nvPr/>
+        </p:nvSpPr>
+        <p:spPr>
+          <a:xfrm>
+            <a:off x="7818120" y="3300984"/>
+            <a:ext cx="777240" cy="192024"/>
+          </a:xfrm>
+          <a:prstGeom prst="rect">
+            <a:avLst/>
+          </a:prstGeom>
+          <a:noFill/>
+          <a:ln/>
+        </p:spPr>
+        <p:txBody>
+          <a:bodyPr wrap="square" lIns="0" tIns="0" rIns="0" bIns="0" rtlCol="0" anchor="ctr"/>
+          <a:lstStyle/>
+          <a:p>
+            <a:pPr marL="0" indent="0" algn="r">
+              <a:buNone/>
+            </a:pPr>
+            <a:r>
+              <a:rPr lang="en-US" sz="900" dirty="0">
+                <a:solidFill>
+                  <a:srgbClr val="1E293B"/>
+                </a:solidFill>
+                <a:latin typeface="Calibri" pitchFamily="34" charset="0"/>
+                <a:ea typeface="Calibri" pitchFamily="34" charset="-122"/>
+                <a:cs typeface="Calibri" pitchFamily="34" charset="-120"/>
+              </a:rPr>
+              <a:t>1.3k</a:t>
+            </a:r>
+            <a:endParaRPr lang="en-US" sz="900" dirty="0"/>
+          </a:p>
+        </p:txBody>
+      </p:sp>
+      <p:sp>
+        <p:nvSpPr>
+          <p:cNvPr id="40" name="Shape 37"/>
+          <p:cNvSpPr/>
+          <p:nvPr/>
+        </p:nvSpPr>
+        <p:spPr>
+          <a:xfrm>
+            <a:off x="5943600" y="3529584"/>
+            <a:ext cx="2651760" cy="18288"/>
+          </a:xfrm>
+          <a:prstGeom prst="rect">
+            <a:avLst/>
+          </a:prstGeom>
+          <a:solidFill>
+            <a:srgbClr val="0F2A44"/>
+          </a:solidFill>
+          <a:ln w="12700">
+            <a:solidFill>
+              <a:srgbClr val="0F2A44"/>
+            </a:solidFill>
+            <a:prstDash val="solid"/>
+          </a:ln>
+        </p:spPr>
+        <p:txBody>
+          <a:bodyPr/>
+          <a:lstStyle/>
+          <a:p>
+            <a:endParaRPr lang="en-US"/>
+          </a:p>
+        </p:txBody>
+      </p:sp>
+      <p:sp>
+        <p:nvSpPr>
+          <p:cNvPr id="41" name="Text 38"/>
+          <p:cNvSpPr/>
+          <p:nvPr/>
+        </p:nvSpPr>
+        <p:spPr>
+          <a:xfrm>
+            <a:off x="5943600" y="3584448"/>
+            <a:ext cx="1417320" cy="201168"/>
+          </a:xfrm>
+          <a:prstGeom prst="rect">
+            <a:avLst/>
+          </a:prstGeom>
+          <a:noFill/>
+          <a:ln/>
+        </p:spPr>
+        <p:txBody>
+          <a:bodyPr wrap="square" lIns="0" tIns="0" rIns="0" bIns="0" rtlCol="0" anchor="ctr"/>
+          <a:lstStyle/>
+          <a:p>
+            <a:pPr marL="0" indent="0">
+              <a:buNone/>
+            </a:pPr>
+            <a:r>
+              <a:rPr lang="en-US" sz="900" b="1" dirty="0">
+                <a:solidFill>
+                  <a:srgbClr val="0F2A44"/>
+                </a:solidFill>
+                <a:latin typeface="Calibri" pitchFamily="34" charset="0"/>
+                <a:ea typeface="Calibri" pitchFamily="34" charset="-122"/>
+                <a:cs typeface="Calibri" pitchFamily="34" charset="-120"/>
+              </a:rPr>
+              <a:t>Total</a:t>
+            </a:r>
+            <a:endParaRPr lang="en-US" sz="900" dirty="0"/>
+          </a:p>
+        </p:txBody>
+      </p:sp>
+      <p:sp>
+        <p:nvSpPr>
+          <p:cNvPr id="42" name="Text 39"/>
+          <p:cNvSpPr/>
+          <p:nvPr/>
+        </p:nvSpPr>
+        <p:spPr>
+          <a:xfrm>
+            <a:off x="7360920" y="3584448"/>
+            <a:ext cx="457200" cy="201168"/>
+          </a:xfrm>
+          <a:prstGeom prst="rect">
+            <a:avLst/>
+          </a:prstGeom>
+          <a:noFill/>
+          <a:ln/>
+        </p:spPr>
+        <p:txBody>
+          <a:bodyPr wrap="square" lIns="0" tIns="0" rIns="0" bIns="0" rtlCol="0" anchor="ctr"/>
+          <a:lstStyle/>
+          <a:p>
+            <a:pPr marL="0" indent="0" algn="ctr">
+              <a:buNone/>
+            </a:pPr>
+            <a:r>
+              <a:rPr lang="en-US" sz="900" b="1" dirty="0">
+                <a:solidFill>
+                  <a:srgbClr val="0F2A44"/>
+                </a:solidFill>
+                <a:latin typeface="Calibri" pitchFamily="34" charset="0"/>
+                <a:ea typeface="Calibri" pitchFamily="34" charset="-122"/>
+                <a:cs typeface="Calibri" pitchFamily="34" charset="-120"/>
+              </a:rPr>
+              <a:t>130</a:t>
+            </a:r>
+            <a:endParaRPr lang="en-US" sz="900" dirty="0"/>
+          </a:p>
+        </p:txBody>
+      </p:sp>
+      <p:sp>
+        <p:nvSpPr>
+          <p:cNvPr id="43" name="Text 40"/>
+          <p:cNvSpPr/>
+          <p:nvPr/>
+        </p:nvSpPr>
+        <p:spPr>
+          <a:xfrm>
+            <a:off x="7818120" y="3584448"/>
+            <a:ext cx="777240" cy="201168"/>
+          </a:xfrm>
+          <a:prstGeom prst="rect">
+            <a:avLst/>
+          </a:prstGeom>
+          <a:noFill/>
+          <a:ln/>
+        </p:spPr>
+        <p:txBody>
+          <a:bodyPr wrap="square" lIns="0" tIns="0" rIns="0" bIns="0" rtlCol="0" anchor="ctr"/>
+          <a:lstStyle/>
+          <a:p>
+            <a:pPr marL="0" indent="0" algn="r">
+              <a:buNone/>
+            </a:pPr>
+            <a:r>
+              <a:rPr lang="en-US" sz="900" b="1" dirty="0">
+                <a:solidFill>
+                  <a:srgbClr val="0F2A44"/>
+                </a:solidFill>
+                <a:latin typeface="Calibri" pitchFamily="34" charset="0"/>
+                <a:ea typeface="Calibri" pitchFamily="34" charset="-122"/>
+                <a:cs typeface="Calibri" pitchFamily="34" charset="-120"/>
+              </a:rPr>
+              <a:t>274k</a:t>
+            </a:r>
+            <a:endParaRPr lang="en-US" sz="900" dirty="0"/>
+          </a:p>
+        </p:txBody>
+      </p:sp>
+      <p:sp>
+        <p:nvSpPr>
+          <p:cNvPr id="44" name="Shape 41"/>
+          <p:cNvSpPr/>
+          <p:nvPr/>
+        </p:nvSpPr>
+        <p:spPr>
+          <a:xfrm>
+            <a:off x="548640" y="3950208"/>
+            <a:ext cx="457200" cy="36576"/>
+          </a:xfrm>
+          <a:prstGeom prst="rect">
+            <a:avLst/>
+          </a:prstGeom>
+          <a:solidFill>
+            <a:srgbClr val="0D9488"/>
+          </a:solidFill>
+          <a:ln w="12700">
+            <a:solidFill>
+              <a:srgbClr val="0D9488"/>
+            </a:solidFill>
+            <a:prstDash val="solid"/>
+          </a:ln>
+        </p:spPr>
+        <p:txBody>
+          <a:bodyPr/>
+          <a:lstStyle/>
+          <a:p>
+            <a:endParaRPr lang="en-US"/>
+          </a:p>
+        </p:txBody>
+      </p:sp>
+      <p:sp>
+        <p:nvSpPr>
+          <p:cNvPr id="45" name="Text 42"/>
+          <p:cNvSpPr/>
+          <p:nvPr/>
+        </p:nvSpPr>
+        <p:spPr>
+          <a:xfrm>
+            <a:off x="731520" y="4059936"/>
+            <a:ext cx="7863840" cy="640080"/>
+          </a:xfrm>
+          <a:prstGeom prst="rect">
+            <a:avLst/>
+          </a:prstGeom>
+          <a:noFill/>
+          <a:ln/>
+        </p:spPr>
+        <p:txBody>
+          <a:bodyPr wrap="square" lIns="0" tIns="0" rIns="0" bIns="0" rtlCol="0" anchor="ctr"/>
+          <a:lstStyle/>
+          <a:p>
+            <a:pPr marL="342900" indent="-342900">
+              <a:spcAft>
+                <a:spcPts val="200"/>
+              </a:spcAft>
+              <a:buSzPct val="100000"/>
+              <a:buChar char="•"/>
+            </a:pPr>
+            <a:r>
+              <a:rPr lang="en-US" sz="1050" dirty="0">
+                <a:solidFill>
+                  <a:srgbClr val="1E293B"/>
+                </a:solidFill>
+                <a:latin typeface="Calibri" pitchFamily="34" charset="0"/>
+                <a:ea typeface="Calibri" pitchFamily="34" charset="-122"/>
+                <a:cs typeface="Calibri" pitchFamily="34" charset="-120"/>
+              </a:rPr>
+              <a:t>98 anti-pattern instances across 9 types</a:t>
+            </a:r>
+          </a:p>
+          <a:p>
+            <a:pPr marL="342900" indent="-342900">
+              <a:spcAft>
+                <a:spcPts val="200"/>
+              </a:spcAft>
+              <a:buSzPct val="100000"/>
+              <a:buChar char="•"/>
+            </a:pPr>
+            <a:r>
+              <a:rPr lang="en-US" sz="1050" dirty="0">
+                <a:solidFill>
+                  <a:srgbClr val="1E293B"/>
+                </a:solidFill>
+                <a:latin typeface="Calibri" pitchFamily="34" charset="0"/>
+                <a:ea typeface="Calibri" pitchFamily="34" charset="-122"/>
+                <a:cs typeface="Calibri" pitchFamily="34" charset="-120"/>
+              </a:rPr>
+              <a:t>API Versioning Absence (37), Nano Service (23) and Hardcoded Endpoint (15) dominate</a:t>
+            </a:r>
+            <a:endParaRPr lang="en-US" sz="1050" dirty="0"/>
+          </a:p>
+        </p:txBody>
+      </p:sp>
+      <p:sp>
+        <p:nvSpPr>
+          <p:cNvPr id="46" name="Text 43"/>
+          <p:cNvSpPr/>
+          <p:nvPr/>
+        </p:nvSpPr>
+        <p:spPr>
+          <a:xfrm>
+            <a:off x="7955280" y="4864608"/>
+            <a:ext cx="640080" cy="228600"/>
+          </a:xfrm>
+          <a:prstGeom prst="rect">
+            <a:avLst/>
+          </a:prstGeom>
+          <a:noFill/>
+          <a:ln/>
+        </p:spPr>
+        <p:txBody>
+          <a:bodyPr wrap="square" lIns="0" tIns="0" rIns="0" bIns="0" rtlCol="0" anchor="ctr"/>
+          <a:lstStyle/>
+          <a:p>
+            <a:pPr marL="0" indent="0" algn="r">
+              <a:buNone/>
+            </a:pPr>
+            <a:r>
+              <a:rPr lang="en-US" sz="900" dirty="0">
+                <a:solidFill>
+                  <a:srgbClr val="64748B"/>
+                </a:solidFill>
+                <a:latin typeface="Calibri" pitchFamily="34" charset="0"/>
+                <a:ea typeface="Calibri" pitchFamily="34" charset="-122"/>
+                <a:cs typeface="Calibri" pitchFamily="34" charset="-120"/>
+              </a:rPr>
+              <a:t>9 / 12</a:t>
+            </a:r>
+            <a:endParaRPr lang="en-US" sz="900" dirty="0"/>
+          </a:p>
+        </p:txBody>
+      </p:sp>
+    </p:spTree>
+  </p:cSld>
+  <p:clrMapOvr>
+    <a:masterClrMapping/>
+  </p:clrMapOvr>
+</p:sld>
+</file>
+
+<file path=ppt/slides/slide9.xml><?xml version="1.0" encoding="utf-8"?>
 <p:sld xmlns:a="http://schemas.openxmlformats.org/drawingml/2006/main" xmlns:r="http://schemas.openxmlformats.org/officeDocument/2006/relationships" xmlns:p="http://schemas.openxmlformats.org/presentationml/2006/main">
   <p:cSld name="Slide 8">
     <p:bg>
@@ -12050,1767 +13820,6 @@
                 <a:cs typeface="Calibri" pitchFamily="34" charset="-120"/>
               </a:rPr>
               <a:t>8 / 12</a:t>
-            </a:r>
-            <a:endParaRPr lang="en-US" sz="900" dirty="0"/>
-          </a:p>
-        </p:txBody>
-      </p:sp>
-    </p:spTree>
-  </p:cSld>
-  <p:clrMapOvr>
-    <a:masterClrMapping/>
-  </p:clrMapOvr>
-</p:sld>
-</file>
-
-<file path=ppt/slides/slide9.xml><?xml version="1.0" encoding="utf-8"?>
-<p:sld xmlns:a="http://schemas.openxmlformats.org/drawingml/2006/main" xmlns:r="http://schemas.openxmlformats.org/officeDocument/2006/relationships" xmlns:p="http://schemas.openxmlformats.org/presentationml/2006/main">
-  <p:cSld name="Slide 9">
-    <p:bg>
-      <p:bgPr>
-        <a:solidFill>
-          <a:srgbClr val="FFFFFF"/>
-        </a:solidFill>
-        <a:effectLst/>
-      </p:bgPr>
-    </p:bg>
-    <p:spTree>
-      <p:nvGrpSpPr>
-        <p:cNvPr id="1" name=""/>
-        <p:cNvGrpSpPr/>
-        <p:nvPr/>
-      </p:nvGrpSpPr>
-      <p:grpSpPr>
-        <a:xfrm>
-          <a:off x="0" y="0"/>
-          <a:ext cx="0" cy="0"/>
-          <a:chOff x="0" y="0"/>
-          <a:chExt cx="0" cy="0"/>
-        </a:xfrm>
-      </p:grpSpPr>
-      <p:sp>
-        <p:nvSpPr>
-          <p:cNvPr id="2" name="Text 0"/>
-          <p:cNvSpPr/>
-          <p:nvPr/>
-        </p:nvSpPr>
-        <p:spPr>
-          <a:xfrm>
-            <a:off x="548640" y="256032"/>
-            <a:ext cx="8046720" cy="502920"/>
-          </a:xfrm>
-          <a:prstGeom prst="rect">
-            <a:avLst/>
-          </a:prstGeom>
-          <a:noFill/>
-          <a:ln/>
-        </p:spPr>
-        <p:txBody>
-          <a:bodyPr wrap="square" lIns="0" tIns="0" rIns="0" bIns="0" rtlCol="0" anchor="ctr"/>
-          <a:lstStyle/>
-          <a:p>
-            <a:pPr marL="0" indent="0">
-              <a:buNone/>
-            </a:pPr>
-            <a:r>
-              <a:rPr lang="en-US" sz="2500" b="1" dirty="0">
-                <a:solidFill>
-                  <a:srgbClr val="0F2A44"/>
-                </a:solidFill>
-                <a:latin typeface="Calibri" pitchFamily="34" charset="0"/>
-                <a:ea typeface="Calibri" pitchFamily="34" charset="-122"/>
-                <a:cs typeface="Calibri" pitchFamily="34" charset="-120"/>
-              </a:rPr>
-              <a:t>Evaluation: eleven open-source projects</a:t>
-            </a:r>
-            <a:endParaRPr lang="en-US" sz="2500" dirty="0"/>
-          </a:p>
-        </p:txBody>
-      </p:sp>
-      <p:sp>
-        <p:nvSpPr>
-          <p:cNvPr id="3" name="Shape 1"/>
-          <p:cNvSpPr/>
-          <p:nvPr/>
-        </p:nvSpPr>
-        <p:spPr>
-          <a:xfrm>
-            <a:off x="548640" y="841248"/>
-            <a:ext cx="8046720" cy="13716"/>
-          </a:xfrm>
-          <a:prstGeom prst="rect">
-            <a:avLst/>
-          </a:prstGeom>
-          <a:solidFill>
-            <a:srgbClr val="D8DEE6"/>
-          </a:solidFill>
-          <a:ln w="12700">
-            <a:solidFill>
-              <a:srgbClr val="D8DEE6"/>
-            </a:solidFill>
-            <a:prstDash val="solid"/>
-          </a:ln>
-        </p:spPr>
-        <p:txBody>
-          <a:bodyPr/>
-          <a:lstStyle/>
-          <a:p>
-            <a:endParaRPr lang="en-US"/>
-          </a:p>
-        </p:txBody>
-      </p:sp>
-      <p:graphicFrame>
-        <p:nvGraphicFramePr>
-          <p:cNvPr id="4" name="Chart 0"/>
-          <p:cNvGraphicFramePr/>
-          <p:nvPr/>
-        </p:nvGraphicFramePr>
-        <p:xfrm>
-          <a:off x="502920" y="960120"/>
-          <a:ext cx="5029200" cy="2697480"/>
-        </p:xfrm>
-        <a:graphic>
-          <a:graphicData uri="http://schemas.openxmlformats.org/drawingml/2006/chart">
-            <c:chart xmlns:c="http://schemas.openxmlformats.org/drawingml/2006/chart" xmlns:r="http://schemas.openxmlformats.org/officeDocument/2006/relationships" r:id="rId3"/>
-          </a:graphicData>
-        </a:graphic>
-      </p:graphicFrame>
-      <p:sp>
-        <p:nvSpPr>
-          <p:cNvPr id="5" name="Text 2"/>
-          <p:cNvSpPr/>
-          <p:nvPr/>
-        </p:nvSpPr>
-        <p:spPr>
-          <a:xfrm>
-            <a:off x="5943600" y="960120"/>
-            <a:ext cx="2651760" cy="274320"/>
-          </a:xfrm>
-          <a:prstGeom prst="rect">
-            <a:avLst/>
-          </a:prstGeom>
-          <a:noFill/>
-          <a:ln/>
-        </p:spPr>
-        <p:txBody>
-          <a:bodyPr wrap="square" lIns="0" tIns="0" rIns="0" bIns="0" rtlCol="0" anchor="ctr"/>
-          <a:lstStyle/>
-          <a:p>
-            <a:pPr marL="0" indent="0">
-              <a:buNone/>
-            </a:pPr>
-            <a:r>
-              <a:rPr lang="en-US" sz="1200" b="1" dirty="0">
-                <a:solidFill>
-                  <a:srgbClr val="0F2A44"/>
-                </a:solidFill>
-                <a:latin typeface="Calibri" pitchFamily="34" charset="0"/>
-                <a:ea typeface="Calibri" pitchFamily="34" charset="-122"/>
-                <a:cs typeface="Calibri" pitchFamily="34" charset="-120"/>
-              </a:rPr>
-              <a:t>Dataset (services · LOC)</a:t>
-            </a:r>
-            <a:endParaRPr lang="en-US" sz="1200" dirty="0"/>
-          </a:p>
-        </p:txBody>
-      </p:sp>
-      <p:sp>
-        <p:nvSpPr>
-          <p:cNvPr id="6" name="Shape 3"/>
-          <p:cNvSpPr/>
-          <p:nvPr/>
-        </p:nvSpPr>
-        <p:spPr>
-          <a:xfrm>
-            <a:off x="5943600" y="1261872"/>
-            <a:ext cx="2651760" cy="13716"/>
-          </a:xfrm>
-          <a:prstGeom prst="rect">
-            <a:avLst/>
-          </a:prstGeom>
-          <a:solidFill>
-            <a:srgbClr val="D8DEE6"/>
-          </a:solidFill>
-          <a:ln w="12700">
-            <a:solidFill>
-              <a:srgbClr val="D8DEE6"/>
-            </a:solidFill>
-            <a:prstDash val="solid"/>
-          </a:ln>
-        </p:spPr>
-        <p:txBody>
-          <a:bodyPr/>
-          <a:lstStyle/>
-          <a:p>
-            <a:endParaRPr lang="en-US"/>
-          </a:p>
-        </p:txBody>
-      </p:sp>
-      <p:sp>
-        <p:nvSpPr>
-          <p:cNvPr id="7" name="Text 4"/>
-          <p:cNvSpPr/>
-          <p:nvPr/>
-        </p:nvSpPr>
-        <p:spPr>
-          <a:xfrm>
-            <a:off x="5943600" y="1335024"/>
-            <a:ext cx="1417320" cy="192024"/>
-          </a:xfrm>
-          <a:prstGeom prst="rect">
-            <a:avLst/>
-          </a:prstGeom>
-          <a:noFill/>
-          <a:ln/>
-        </p:spPr>
-        <p:txBody>
-          <a:bodyPr wrap="square" lIns="0" tIns="0" rIns="0" bIns="0" rtlCol="0" anchor="ctr"/>
-          <a:lstStyle/>
-          <a:p>
-            <a:pPr marL="0" indent="0">
-              <a:buNone/>
-            </a:pPr>
-            <a:r>
-              <a:rPr lang="en-US" sz="900" dirty="0">
-                <a:solidFill>
-                  <a:srgbClr val="1E293B"/>
-                </a:solidFill>
-                <a:latin typeface="Calibri" pitchFamily="34" charset="0"/>
-                <a:ea typeface="Calibri" pitchFamily="34" charset="-122"/>
-                <a:cs typeface="Calibri" pitchFamily="34" charset="-120"/>
-              </a:rPr>
-              <a:t>MicroSocial</a:t>
-            </a:r>
-            <a:endParaRPr lang="en-US" sz="900" dirty="0"/>
-          </a:p>
-        </p:txBody>
-      </p:sp>
-      <p:sp>
-        <p:nvSpPr>
-          <p:cNvPr id="8" name="Text 5"/>
-          <p:cNvSpPr/>
-          <p:nvPr/>
-        </p:nvSpPr>
-        <p:spPr>
-          <a:xfrm>
-            <a:off x="7360920" y="1335024"/>
-            <a:ext cx="457200" cy="192024"/>
-          </a:xfrm>
-          <a:prstGeom prst="rect">
-            <a:avLst/>
-          </a:prstGeom>
-          <a:noFill/>
-          <a:ln/>
-        </p:spPr>
-        <p:txBody>
-          <a:bodyPr wrap="square" lIns="0" tIns="0" rIns="0" bIns="0" rtlCol="0" anchor="ctr"/>
-          <a:lstStyle/>
-          <a:p>
-            <a:pPr marL="0" indent="0" algn="ctr">
-              <a:buNone/>
-            </a:pPr>
-            <a:r>
-              <a:rPr lang="en-US" sz="900" dirty="0">
-                <a:solidFill>
-                  <a:srgbClr val="1E293B"/>
-                </a:solidFill>
-                <a:latin typeface="Calibri" pitchFamily="34" charset="0"/>
-                <a:ea typeface="Calibri" pitchFamily="34" charset="-122"/>
-                <a:cs typeface="Calibri" pitchFamily="34" charset="-120"/>
-              </a:rPr>
-              <a:t>4</a:t>
-            </a:r>
-            <a:endParaRPr lang="en-US" sz="900" dirty="0"/>
-          </a:p>
-        </p:txBody>
-      </p:sp>
-      <p:sp>
-        <p:nvSpPr>
-          <p:cNvPr id="9" name="Text 6"/>
-          <p:cNvSpPr/>
-          <p:nvPr/>
-        </p:nvSpPr>
-        <p:spPr>
-          <a:xfrm>
-            <a:off x="7818120" y="1335024"/>
-            <a:ext cx="777240" cy="192024"/>
-          </a:xfrm>
-          <a:prstGeom prst="rect">
-            <a:avLst/>
-          </a:prstGeom>
-          <a:noFill/>
-          <a:ln/>
-        </p:spPr>
-        <p:txBody>
-          <a:bodyPr wrap="square" lIns="0" tIns="0" rIns="0" bIns="0" rtlCol="0" anchor="ctr"/>
-          <a:lstStyle/>
-          <a:p>
-            <a:pPr marL="0" indent="0" algn="r">
-              <a:buNone/>
-            </a:pPr>
-            <a:r>
-              <a:rPr lang="en-US" sz="900" dirty="0">
-                <a:solidFill>
-                  <a:srgbClr val="1E293B"/>
-                </a:solidFill>
-                <a:latin typeface="Calibri" pitchFamily="34" charset="0"/>
-                <a:ea typeface="Calibri" pitchFamily="34" charset="-122"/>
-                <a:cs typeface="Calibri" pitchFamily="34" charset="-120"/>
-              </a:rPr>
-              <a:t>2k</a:t>
-            </a:r>
-            <a:endParaRPr lang="en-US" sz="900" dirty="0"/>
-          </a:p>
-        </p:txBody>
-      </p:sp>
-      <p:sp>
-        <p:nvSpPr>
-          <p:cNvPr id="10" name="Text 7"/>
-          <p:cNvSpPr/>
-          <p:nvPr/>
-        </p:nvSpPr>
-        <p:spPr>
-          <a:xfrm>
-            <a:off x="5943600" y="1531620"/>
-            <a:ext cx="1417320" cy="192024"/>
-          </a:xfrm>
-          <a:prstGeom prst="rect">
-            <a:avLst/>
-          </a:prstGeom>
-          <a:noFill/>
-          <a:ln/>
-        </p:spPr>
-        <p:txBody>
-          <a:bodyPr wrap="square" lIns="0" tIns="0" rIns="0" bIns="0" rtlCol="0" anchor="ctr"/>
-          <a:lstStyle/>
-          <a:p>
-            <a:pPr marL="0" indent="0">
-              <a:buNone/>
-            </a:pPr>
-            <a:r>
-              <a:rPr lang="en-US" sz="900" dirty="0">
-                <a:solidFill>
-                  <a:srgbClr val="1E293B"/>
-                </a:solidFill>
-                <a:latin typeface="Calibri" pitchFamily="34" charset="0"/>
-                <a:ea typeface="Calibri" pitchFamily="34" charset="-122"/>
-                <a:cs typeface="Calibri" pitchFamily="34" charset="-120"/>
-              </a:rPr>
-              <a:t>design-pat.</a:t>
-            </a:r>
-            <a:endParaRPr lang="en-US" sz="900" dirty="0"/>
-          </a:p>
-        </p:txBody>
-      </p:sp>
-      <p:sp>
-        <p:nvSpPr>
-          <p:cNvPr id="11" name="Text 8"/>
-          <p:cNvSpPr/>
-          <p:nvPr/>
-        </p:nvSpPr>
-        <p:spPr>
-          <a:xfrm>
-            <a:off x="7360920" y="1531620"/>
-            <a:ext cx="457200" cy="192024"/>
-          </a:xfrm>
-          <a:prstGeom prst="rect">
-            <a:avLst/>
-          </a:prstGeom>
-          <a:noFill/>
-          <a:ln/>
-        </p:spPr>
-        <p:txBody>
-          <a:bodyPr wrap="square" lIns="0" tIns="0" rIns="0" bIns="0" rtlCol="0" anchor="ctr"/>
-          <a:lstStyle/>
-          <a:p>
-            <a:pPr marL="0" indent="0" algn="ctr">
-              <a:buNone/>
-            </a:pPr>
-            <a:r>
-              <a:rPr lang="en-US" sz="900" dirty="0">
-                <a:solidFill>
-                  <a:srgbClr val="1E293B"/>
-                </a:solidFill>
-                <a:latin typeface="Calibri" pitchFamily="34" charset="0"/>
-                <a:ea typeface="Calibri" pitchFamily="34" charset="-122"/>
-                <a:cs typeface="Calibri" pitchFamily="34" charset="-120"/>
-              </a:rPr>
-              <a:t>16</a:t>
-            </a:r>
-            <a:endParaRPr lang="en-US" sz="900" dirty="0"/>
-          </a:p>
-        </p:txBody>
-      </p:sp>
-      <p:sp>
-        <p:nvSpPr>
-          <p:cNvPr id="12" name="Text 9"/>
-          <p:cNvSpPr/>
-          <p:nvPr/>
-        </p:nvSpPr>
-        <p:spPr>
-          <a:xfrm>
-            <a:off x="7818120" y="1531620"/>
-            <a:ext cx="777240" cy="192024"/>
-          </a:xfrm>
-          <a:prstGeom prst="rect">
-            <a:avLst/>
-          </a:prstGeom>
-          <a:noFill/>
-          <a:ln/>
-        </p:spPr>
-        <p:txBody>
-          <a:bodyPr wrap="square" lIns="0" tIns="0" rIns="0" bIns="0" rtlCol="0" anchor="ctr"/>
-          <a:lstStyle/>
-          <a:p>
-            <a:pPr marL="0" indent="0" algn="r">
-              <a:buNone/>
-            </a:pPr>
-            <a:r>
-              <a:rPr lang="en-US" sz="900" dirty="0">
-                <a:solidFill>
-                  <a:srgbClr val="1E293B"/>
-                </a:solidFill>
-                <a:latin typeface="Calibri" pitchFamily="34" charset="0"/>
-                <a:ea typeface="Calibri" pitchFamily="34" charset="-122"/>
-                <a:cs typeface="Calibri" pitchFamily="34" charset="-120"/>
-              </a:rPr>
-              <a:t>19k</a:t>
-            </a:r>
-            <a:endParaRPr lang="en-US" sz="900" dirty="0"/>
-          </a:p>
-        </p:txBody>
-      </p:sp>
-      <p:sp>
-        <p:nvSpPr>
-          <p:cNvPr id="13" name="Text 10"/>
-          <p:cNvSpPr/>
-          <p:nvPr/>
-        </p:nvSpPr>
-        <p:spPr>
-          <a:xfrm>
-            <a:off x="5943600" y="1728216"/>
-            <a:ext cx="1417320" cy="192024"/>
-          </a:xfrm>
-          <a:prstGeom prst="rect">
-            <a:avLst/>
-          </a:prstGeom>
-          <a:noFill/>
-          <a:ln/>
-        </p:spPr>
-        <p:txBody>
-          <a:bodyPr wrap="square" lIns="0" tIns="0" rIns="0" bIns="0" rtlCol="0" anchor="ctr"/>
-          <a:lstStyle/>
-          <a:p>
-            <a:pPr marL="0" indent="0">
-              <a:buNone/>
-            </a:pPr>
-            <a:r>
-              <a:rPr lang="en-US" sz="900" dirty="0">
-                <a:solidFill>
-                  <a:srgbClr val="1E293B"/>
-                </a:solidFill>
-                <a:latin typeface="Calibri" pitchFamily="34" charset="0"/>
-                <a:ea typeface="Calibri" pitchFamily="34" charset="-122"/>
-                <a:cs typeface="Calibri" pitchFamily="34" charset="-120"/>
-              </a:rPr>
-              <a:t>Site-Where</a:t>
-            </a:r>
-            <a:endParaRPr lang="en-US" sz="900" dirty="0"/>
-          </a:p>
-        </p:txBody>
-      </p:sp>
-      <p:sp>
-        <p:nvSpPr>
-          <p:cNvPr id="14" name="Text 11"/>
-          <p:cNvSpPr/>
-          <p:nvPr/>
-        </p:nvSpPr>
-        <p:spPr>
-          <a:xfrm>
-            <a:off x="7360920" y="1728216"/>
-            <a:ext cx="457200" cy="192024"/>
-          </a:xfrm>
-          <a:prstGeom prst="rect">
-            <a:avLst/>
-          </a:prstGeom>
-          <a:noFill/>
-          <a:ln/>
-        </p:spPr>
-        <p:txBody>
-          <a:bodyPr wrap="square" lIns="0" tIns="0" rIns="0" bIns="0" rtlCol="0" anchor="ctr"/>
-          <a:lstStyle/>
-          <a:p>
-            <a:pPr marL="0" indent="0" algn="ctr">
-              <a:buNone/>
-            </a:pPr>
-            <a:r>
-              <a:rPr lang="en-US" sz="900" dirty="0">
-                <a:solidFill>
-                  <a:srgbClr val="1E293B"/>
-                </a:solidFill>
-                <a:latin typeface="Calibri" pitchFamily="34" charset="0"/>
-                <a:ea typeface="Calibri" pitchFamily="34" charset="-122"/>
-                <a:cs typeface="Calibri" pitchFamily="34" charset="-120"/>
-              </a:rPr>
-              <a:t>15</a:t>
-            </a:r>
-            <a:endParaRPr lang="en-US" sz="900" dirty="0"/>
-          </a:p>
-        </p:txBody>
-      </p:sp>
-      <p:sp>
-        <p:nvSpPr>
-          <p:cNvPr id="15" name="Text 12"/>
-          <p:cNvSpPr/>
-          <p:nvPr/>
-        </p:nvSpPr>
-        <p:spPr>
-          <a:xfrm>
-            <a:off x="7818120" y="1728216"/>
-            <a:ext cx="777240" cy="192024"/>
-          </a:xfrm>
-          <a:prstGeom prst="rect">
-            <a:avLst/>
-          </a:prstGeom>
-          <a:noFill/>
-          <a:ln/>
-        </p:spPr>
-        <p:txBody>
-          <a:bodyPr wrap="square" lIns="0" tIns="0" rIns="0" bIns="0" rtlCol="0" anchor="ctr"/>
-          <a:lstStyle/>
-          <a:p>
-            <a:pPr marL="0" indent="0" algn="r">
-              <a:buNone/>
-            </a:pPr>
-            <a:r>
-              <a:rPr lang="en-US" sz="900" dirty="0">
-                <a:solidFill>
-                  <a:srgbClr val="1E293B"/>
-                </a:solidFill>
-                <a:latin typeface="Calibri" pitchFamily="34" charset="0"/>
-                <a:ea typeface="Calibri" pitchFamily="34" charset="-122"/>
-                <a:cs typeface="Calibri" pitchFamily="34" charset="-120"/>
-              </a:rPr>
-              <a:t>74k</a:t>
-            </a:r>
-            <a:endParaRPr lang="en-US" sz="900" dirty="0"/>
-          </a:p>
-        </p:txBody>
-      </p:sp>
-      <p:sp>
-        <p:nvSpPr>
-          <p:cNvPr id="16" name="Text 13"/>
-          <p:cNvSpPr/>
-          <p:nvPr/>
-        </p:nvSpPr>
-        <p:spPr>
-          <a:xfrm>
-            <a:off x="5943600" y="1924812"/>
-            <a:ext cx="1417320" cy="192024"/>
-          </a:xfrm>
-          <a:prstGeom prst="rect">
-            <a:avLst/>
-          </a:prstGeom>
-          <a:noFill/>
-          <a:ln/>
-        </p:spPr>
-        <p:txBody>
-          <a:bodyPr wrap="square" lIns="0" tIns="0" rIns="0" bIns="0" rtlCol="0" anchor="ctr"/>
-          <a:lstStyle/>
-          <a:p>
-            <a:pPr marL="0" indent="0">
-              <a:buNone/>
-            </a:pPr>
-            <a:r>
-              <a:rPr lang="en-US" sz="900" dirty="0">
-                <a:solidFill>
-                  <a:srgbClr val="1E293B"/>
-                </a:solidFill>
-                <a:latin typeface="Calibri" pitchFamily="34" charset="0"/>
-                <a:ea typeface="Calibri" pitchFamily="34" charset="-122"/>
-                <a:cs typeface="Calibri" pitchFamily="34" charset="-120"/>
-              </a:rPr>
-              <a:t>Train-Ticket</a:t>
-            </a:r>
-            <a:endParaRPr lang="en-US" sz="900" dirty="0"/>
-          </a:p>
-        </p:txBody>
-      </p:sp>
-      <p:sp>
-        <p:nvSpPr>
-          <p:cNvPr id="17" name="Text 14"/>
-          <p:cNvSpPr/>
-          <p:nvPr/>
-        </p:nvSpPr>
-        <p:spPr>
-          <a:xfrm>
-            <a:off x="7360920" y="1924812"/>
-            <a:ext cx="457200" cy="192024"/>
-          </a:xfrm>
-          <a:prstGeom prst="rect">
-            <a:avLst/>
-          </a:prstGeom>
-          <a:noFill/>
-          <a:ln/>
-        </p:spPr>
-        <p:txBody>
-          <a:bodyPr wrap="square" lIns="0" tIns="0" rIns="0" bIns="0" rtlCol="0" anchor="ctr"/>
-          <a:lstStyle/>
-          <a:p>
-            <a:pPr marL="0" indent="0" algn="ctr">
-              <a:buNone/>
-            </a:pPr>
-            <a:r>
-              <a:rPr lang="en-US" sz="900" dirty="0">
-                <a:solidFill>
-                  <a:srgbClr val="1E293B"/>
-                </a:solidFill>
-                <a:latin typeface="Calibri" pitchFamily="34" charset="0"/>
-                <a:ea typeface="Calibri" pitchFamily="34" charset="-122"/>
-                <a:cs typeface="Calibri" pitchFamily="34" charset="-120"/>
-              </a:rPr>
-              <a:t>41</a:t>
-            </a:r>
-            <a:endParaRPr lang="en-US" sz="900" dirty="0"/>
-          </a:p>
-        </p:txBody>
-      </p:sp>
-      <p:sp>
-        <p:nvSpPr>
-          <p:cNvPr id="18" name="Text 15"/>
-          <p:cNvSpPr/>
-          <p:nvPr/>
-        </p:nvSpPr>
-        <p:spPr>
-          <a:xfrm>
-            <a:off x="7818120" y="1924812"/>
-            <a:ext cx="777240" cy="192024"/>
-          </a:xfrm>
-          <a:prstGeom prst="rect">
-            <a:avLst/>
-          </a:prstGeom>
-          <a:noFill/>
-          <a:ln/>
-        </p:spPr>
-        <p:txBody>
-          <a:bodyPr wrap="square" lIns="0" tIns="0" rIns="0" bIns="0" rtlCol="0" anchor="ctr"/>
-          <a:lstStyle/>
-          <a:p>
-            <a:pPr marL="0" indent="0" algn="r">
-              <a:buNone/>
-            </a:pPr>
-            <a:r>
-              <a:rPr lang="en-US" sz="900" dirty="0">
-                <a:solidFill>
-                  <a:srgbClr val="1E293B"/>
-                </a:solidFill>
-                <a:latin typeface="Calibri" pitchFamily="34" charset="0"/>
-                <a:ea typeface="Calibri" pitchFamily="34" charset="-122"/>
-                <a:cs typeface="Calibri" pitchFamily="34" charset="-120"/>
-              </a:rPr>
-              <a:t>36k</a:t>
-            </a:r>
-            <a:endParaRPr lang="en-US" sz="900" dirty="0"/>
-          </a:p>
-        </p:txBody>
-      </p:sp>
-      <p:sp>
-        <p:nvSpPr>
-          <p:cNvPr id="19" name="Text 16"/>
-          <p:cNvSpPr/>
-          <p:nvPr/>
-        </p:nvSpPr>
-        <p:spPr>
-          <a:xfrm>
-            <a:off x="5943600" y="2121408"/>
-            <a:ext cx="1417320" cy="192024"/>
-          </a:xfrm>
-          <a:prstGeom prst="rect">
-            <a:avLst/>
-          </a:prstGeom>
-          <a:noFill/>
-          <a:ln/>
-        </p:spPr>
-        <p:txBody>
-          <a:bodyPr wrap="square" lIns="0" tIns="0" rIns="0" bIns="0" rtlCol="0" anchor="ctr"/>
-          <a:lstStyle/>
-          <a:p>
-            <a:pPr marL="0" indent="0">
-              <a:buNone/>
-            </a:pPr>
-            <a:r>
-              <a:rPr lang="en-US" sz="900" dirty="0">
-                <a:solidFill>
-                  <a:srgbClr val="1E293B"/>
-                </a:solidFill>
-                <a:latin typeface="Calibri" pitchFamily="34" charset="0"/>
-                <a:ea typeface="Calibri" pitchFamily="34" charset="-122"/>
-                <a:cs typeface="Calibri" pitchFamily="34" charset="-120"/>
-              </a:rPr>
-              <a:t>NetworkDisk</a:t>
-            </a:r>
-            <a:endParaRPr lang="en-US" sz="900" dirty="0"/>
-          </a:p>
-        </p:txBody>
-      </p:sp>
-      <p:sp>
-        <p:nvSpPr>
-          <p:cNvPr id="20" name="Text 17"/>
-          <p:cNvSpPr/>
-          <p:nvPr/>
-        </p:nvSpPr>
-        <p:spPr>
-          <a:xfrm>
-            <a:off x="7360920" y="2121408"/>
-            <a:ext cx="457200" cy="192024"/>
-          </a:xfrm>
-          <a:prstGeom prst="rect">
-            <a:avLst/>
-          </a:prstGeom>
-          <a:noFill/>
-          <a:ln/>
-        </p:spPr>
-        <p:txBody>
-          <a:bodyPr wrap="square" lIns="0" tIns="0" rIns="0" bIns="0" rtlCol="0" anchor="ctr"/>
-          <a:lstStyle/>
-          <a:p>
-            <a:pPr marL="0" indent="0" algn="ctr">
-              <a:buNone/>
-            </a:pPr>
-            <a:r>
-              <a:rPr lang="en-US" sz="900" dirty="0">
-                <a:solidFill>
-                  <a:srgbClr val="1E293B"/>
-                </a:solidFill>
-                <a:latin typeface="Calibri" pitchFamily="34" charset="0"/>
-                <a:ea typeface="Calibri" pitchFamily="34" charset="-122"/>
-                <a:cs typeface="Calibri" pitchFamily="34" charset="-120"/>
-              </a:rPr>
-              <a:t>10</a:t>
-            </a:r>
-            <a:endParaRPr lang="en-US" sz="900" dirty="0"/>
-          </a:p>
-        </p:txBody>
-      </p:sp>
-      <p:sp>
-        <p:nvSpPr>
-          <p:cNvPr id="21" name="Text 18"/>
-          <p:cNvSpPr/>
-          <p:nvPr/>
-        </p:nvSpPr>
-        <p:spPr>
-          <a:xfrm>
-            <a:off x="7818120" y="2121408"/>
-            <a:ext cx="777240" cy="192024"/>
-          </a:xfrm>
-          <a:prstGeom prst="rect">
-            <a:avLst/>
-          </a:prstGeom>
-          <a:noFill/>
-          <a:ln/>
-        </p:spPr>
-        <p:txBody>
-          <a:bodyPr wrap="square" lIns="0" tIns="0" rIns="0" bIns="0" rtlCol="0" anchor="ctr"/>
-          <a:lstStyle/>
-          <a:p>
-            <a:pPr marL="0" indent="0" algn="r">
-              <a:buNone/>
-            </a:pPr>
-            <a:r>
-              <a:rPr lang="en-US" sz="900" dirty="0">
-                <a:solidFill>
-                  <a:srgbClr val="1E293B"/>
-                </a:solidFill>
-                <a:latin typeface="Calibri" pitchFamily="34" charset="0"/>
-                <a:ea typeface="Calibri" pitchFamily="34" charset="-122"/>
-                <a:cs typeface="Calibri" pitchFamily="34" charset="-120"/>
-              </a:rPr>
-              <a:t>7k</a:t>
-            </a:r>
-            <a:endParaRPr lang="en-US" sz="900" dirty="0"/>
-          </a:p>
-        </p:txBody>
-      </p:sp>
-      <p:sp>
-        <p:nvSpPr>
-          <p:cNvPr id="22" name="Text 19"/>
-          <p:cNvSpPr/>
-          <p:nvPr/>
-        </p:nvSpPr>
-        <p:spPr>
-          <a:xfrm>
-            <a:off x="5943600" y="2318004"/>
-            <a:ext cx="1417320" cy="192024"/>
-          </a:xfrm>
-          <a:prstGeom prst="rect">
-            <a:avLst/>
-          </a:prstGeom>
-          <a:noFill/>
-          <a:ln/>
-        </p:spPr>
-        <p:txBody>
-          <a:bodyPr wrap="square" lIns="0" tIns="0" rIns="0" bIns="0" rtlCol="0" anchor="ctr"/>
-          <a:lstStyle/>
-          <a:p>
-            <a:pPr marL="0" indent="0">
-              <a:buNone/>
-            </a:pPr>
-            <a:r>
-              <a:rPr lang="en-US" sz="900" dirty="0">
-                <a:solidFill>
-                  <a:srgbClr val="1E293B"/>
-                </a:solidFill>
-                <a:latin typeface="Calibri" pitchFamily="34" charset="0"/>
-                <a:ea typeface="Calibri" pitchFamily="34" charset="-122"/>
-                <a:cs typeface="Calibri" pitchFamily="34" charset="-120"/>
-              </a:rPr>
-              <a:t>recruit</a:t>
-            </a:r>
-            <a:endParaRPr lang="en-US" sz="900" dirty="0"/>
-          </a:p>
-        </p:txBody>
-      </p:sp>
-      <p:sp>
-        <p:nvSpPr>
-          <p:cNvPr id="23" name="Text 20"/>
-          <p:cNvSpPr/>
-          <p:nvPr/>
-        </p:nvSpPr>
-        <p:spPr>
-          <a:xfrm>
-            <a:off x="7360920" y="2318004"/>
-            <a:ext cx="457200" cy="192024"/>
-          </a:xfrm>
-          <a:prstGeom prst="rect">
-            <a:avLst/>
-          </a:prstGeom>
-          <a:noFill/>
-          <a:ln/>
-        </p:spPr>
-        <p:txBody>
-          <a:bodyPr wrap="square" lIns="0" tIns="0" rIns="0" bIns="0" rtlCol="0" anchor="ctr"/>
-          <a:lstStyle/>
-          <a:p>
-            <a:pPr marL="0" indent="0" algn="ctr">
-              <a:buNone/>
-            </a:pPr>
-            <a:r>
-              <a:rPr lang="en-US" sz="900" dirty="0">
-                <a:solidFill>
-                  <a:srgbClr val="1E293B"/>
-                </a:solidFill>
-                <a:latin typeface="Calibri" pitchFamily="34" charset="0"/>
-                <a:ea typeface="Calibri" pitchFamily="34" charset="-122"/>
-                <a:cs typeface="Calibri" pitchFamily="34" charset="-120"/>
-              </a:rPr>
-              <a:t>8</a:t>
-            </a:r>
-            <a:endParaRPr lang="en-US" sz="900" dirty="0"/>
-          </a:p>
-        </p:txBody>
-      </p:sp>
-      <p:sp>
-        <p:nvSpPr>
-          <p:cNvPr id="24" name="Text 21"/>
-          <p:cNvSpPr/>
-          <p:nvPr/>
-        </p:nvSpPr>
-        <p:spPr>
-          <a:xfrm>
-            <a:off x="7818120" y="2318004"/>
-            <a:ext cx="777240" cy="192024"/>
-          </a:xfrm>
-          <a:prstGeom prst="rect">
-            <a:avLst/>
-          </a:prstGeom>
-          <a:noFill/>
-          <a:ln/>
-        </p:spPr>
-        <p:txBody>
-          <a:bodyPr wrap="square" lIns="0" tIns="0" rIns="0" bIns="0" rtlCol="0" anchor="ctr"/>
-          <a:lstStyle/>
-          <a:p>
-            <a:pPr marL="0" indent="0" algn="r">
-              <a:buNone/>
-            </a:pPr>
-            <a:r>
-              <a:rPr lang="en-US" sz="900" dirty="0">
-                <a:solidFill>
-                  <a:srgbClr val="1E293B"/>
-                </a:solidFill>
-                <a:latin typeface="Calibri" pitchFamily="34" charset="0"/>
-                <a:ea typeface="Calibri" pitchFamily="34" charset="-122"/>
-                <a:cs typeface="Calibri" pitchFamily="34" charset="-120"/>
-              </a:rPr>
-              <a:t>8k</a:t>
-            </a:r>
-            <a:endParaRPr lang="en-US" sz="900" dirty="0"/>
-          </a:p>
-        </p:txBody>
-      </p:sp>
-      <p:sp>
-        <p:nvSpPr>
-          <p:cNvPr id="25" name="Text 22"/>
-          <p:cNvSpPr/>
-          <p:nvPr/>
-        </p:nvSpPr>
-        <p:spPr>
-          <a:xfrm>
-            <a:off x="5943600" y="2514600"/>
-            <a:ext cx="1417320" cy="192024"/>
-          </a:xfrm>
-          <a:prstGeom prst="rect">
-            <a:avLst/>
-          </a:prstGeom>
-          <a:noFill/>
-          <a:ln/>
-        </p:spPr>
-        <p:txBody>
-          <a:bodyPr wrap="square" lIns="0" tIns="0" rIns="0" bIns="0" rtlCol="0" anchor="ctr"/>
-          <a:lstStyle/>
-          <a:p>
-            <a:pPr marL="0" indent="0">
-              <a:buNone/>
-            </a:pPr>
-            <a:r>
-              <a:rPr lang="en-US" sz="900" dirty="0">
-                <a:solidFill>
-                  <a:srgbClr val="1E293B"/>
-                </a:solidFill>
-                <a:latin typeface="Calibri" pitchFamily="34" charset="0"/>
-                <a:ea typeface="Calibri" pitchFamily="34" charset="-122"/>
-                <a:cs typeface="Calibri" pitchFamily="34" charset="-120"/>
-              </a:rPr>
-              <a:t>ftgo</a:t>
-            </a:r>
-            <a:endParaRPr lang="en-US" sz="900" dirty="0"/>
-          </a:p>
-        </p:txBody>
-      </p:sp>
-      <p:sp>
-        <p:nvSpPr>
-          <p:cNvPr id="26" name="Text 23"/>
-          <p:cNvSpPr/>
-          <p:nvPr/>
-        </p:nvSpPr>
-        <p:spPr>
-          <a:xfrm>
-            <a:off x="7360920" y="2514600"/>
-            <a:ext cx="457200" cy="192024"/>
-          </a:xfrm>
-          <a:prstGeom prst="rect">
-            <a:avLst/>
-          </a:prstGeom>
-          <a:noFill/>
-          <a:ln/>
-        </p:spPr>
-        <p:txBody>
-          <a:bodyPr wrap="square" lIns="0" tIns="0" rIns="0" bIns="0" rtlCol="0" anchor="ctr"/>
-          <a:lstStyle/>
-          <a:p>
-            <a:pPr marL="0" indent="0" algn="ctr">
-              <a:buNone/>
-            </a:pPr>
-            <a:r>
-              <a:rPr lang="en-US" sz="900" dirty="0">
-                <a:solidFill>
-                  <a:srgbClr val="1E293B"/>
-                </a:solidFill>
-                <a:latin typeface="Calibri" pitchFamily="34" charset="0"/>
-                <a:ea typeface="Calibri" pitchFamily="34" charset="-122"/>
-                <a:cs typeface="Calibri" pitchFamily="34" charset="-120"/>
-              </a:rPr>
-              <a:t>7</a:t>
-            </a:r>
-            <a:endParaRPr lang="en-US" sz="900" dirty="0"/>
-          </a:p>
-        </p:txBody>
-      </p:sp>
-      <p:sp>
-        <p:nvSpPr>
-          <p:cNvPr id="27" name="Text 24"/>
-          <p:cNvSpPr/>
-          <p:nvPr/>
-        </p:nvSpPr>
-        <p:spPr>
-          <a:xfrm>
-            <a:off x="7818120" y="2514600"/>
-            <a:ext cx="777240" cy="192024"/>
-          </a:xfrm>
-          <a:prstGeom prst="rect">
-            <a:avLst/>
-          </a:prstGeom>
-          <a:noFill/>
-          <a:ln/>
-        </p:spPr>
-        <p:txBody>
-          <a:bodyPr wrap="square" lIns="0" tIns="0" rIns="0" bIns="0" rtlCol="0" anchor="ctr"/>
-          <a:lstStyle/>
-          <a:p>
-            <a:pPr marL="0" indent="0" algn="r">
-              <a:buNone/>
-            </a:pPr>
-            <a:r>
-              <a:rPr lang="en-US" sz="900" dirty="0">
-                <a:solidFill>
-                  <a:srgbClr val="1E293B"/>
-                </a:solidFill>
-                <a:latin typeface="Calibri" pitchFamily="34" charset="0"/>
-                <a:ea typeface="Calibri" pitchFamily="34" charset="-122"/>
-                <a:cs typeface="Calibri" pitchFamily="34" charset="-120"/>
-              </a:rPr>
-              <a:t>11k</a:t>
-            </a:r>
-            <a:endParaRPr lang="en-US" sz="900" dirty="0"/>
-          </a:p>
-        </p:txBody>
-      </p:sp>
-      <p:sp>
-        <p:nvSpPr>
-          <p:cNvPr id="28" name="Text 25"/>
-          <p:cNvSpPr/>
-          <p:nvPr/>
-        </p:nvSpPr>
-        <p:spPr>
-          <a:xfrm>
-            <a:off x="5943600" y="2711196"/>
-            <a:ext cx="1417320" cy="192024"/>
-          </a:xfrm>
-          <a:prstGeom prst="rect">
-            <a:avLst/>
-          </a:prstGeom>
-          <a:noFill/>
-          <a:ln/>
-        </p:spPr>
-        <p:txBody>
-          <a:bodyPr wrap="square" lIns="0" tIns="0" rIns="0" bIns="0" rtlCol="0" anchor="ctr"/>
-          <a:lstStyle/>
-          <a:p>
-            <a:pPr marL="0" indent="0">
-              <a:buNone/>
-            </a:pPr>
-            <a:r>
-              <a:rPr lang="en-US" sz="900" dirty="0">
-                <a:solidFill>
-                  <a:srgbClr val="1E293B"/>
-                </a:solidFill>
-                <a:latin typeface="Calibri" pitchFamily="34" charset="0"/>
-                <a:ea typeface="Calibri" pitchFamily="34" charset="-122"/>
-                <a:cs typeface="Calibri" pitchFamily="34" charset="-120"/>
-              </a:rPr>
-              <a:t>mall-swarm</a:t>
-            </a:r>
-            <a:endParaRPr lang="en-US" sz="900" dirty="0"/>
-          </a:p>
-        </p:txBody>
-      </p:sp>
-      <p:sp>
-        <p:nvSpPr>
-          <p:cNvPr id="29" name="Text 26"/>
-          <p:cNvSpPr/>
-          <p:nvPr/>
-        </p:nvSpPr>
-        <p:spPr>
-          <a:xfrm>
-            <a:off x="7360920" y="2711196"/>
-            <a:ext cx="457200" cy="192024"/>
-          </a:xfrm>
-          <a:prstGeom prst="rect">
-            <a:avLst/>
-          </a:prstGeom>
-          <a:noFill/>
-          <a:ln/>
-        </p:spPr>
-        <p:txBody>
-          <a:bodyPr wrap="square" lIns="0" tIns="0" rIns="0" bIns="0" rtlCol="0" anchor="ctr"/>
-          <a:lstStyle/>
-          <a:p>
-            <a:pPr marL="0" indent="0" algn="ctr">
-              <a:buNone/>
-            </a:pPr>
-            <a:r>
-              <a:rPr lang="en-US" sz="900" dirty="0">
-                <a:solidFill>
-                  <a:srgbClr val="1E293B"/>
-                </a:solidFill>
-                <a:latin typeface="Calibri" pitchFamily="34" charset="0"/>
-                <a:ea typeface="Calibri" pitchFamily="34" charset="-122"/>
-                <a:cs typeface="Calibri" pitchFamily="34" charset="-120"/>
-              </a:rPr>
-              <a:t>7</a:t>
-            </a:r>
-            <a:endParaRPr lang="en-US" sz="900" dirty="0"/>
-          </a:p>
-        </p:txBody>
-      </p:sp>
-      <p:sp>
-        <p:nvSpPr>
-          <p:cNvPr id="30" name="Text 27"/>
-          <p:cNvSpPr/>
-          <p:nvPr/>
-        </p:nvSpPr>
-        <p:spPr>
-          <a:xfrm>
-            <a:off x="7818120" y="2711196"/>
-            <a:ext cx="777240" cy="192024"/>
-          </a:xfrm>
-          <a:prstGeom prst="rect">
-            <a:avLst/>
-          </a:prstGeom>
-          <a:noFill/>
-          <a:ln/>
-        </p:spPr>
-        <p:txBody>
-          <a:bodyPr wrap="square" lIns="0" tIns="0" rIns="0" bIns="0" rtlCol="0" anchor="ctr"/>
-          <a:lstStyle/>
-          <a:p>
-            <a:pPr marL="0" indent="0" algn="r">
-              <a:buNone/>
-            </a:pPr>
-            <a:r>
-              <a:rPr lang="en-US" sz="900" dirty="0">
-                <a:solidFill>
-                  <a:srgbClr val="1E293B"/>
-                </a:solidFill>
-                <a:latin typeface="Calibri" pitchFamily="34" charset="0"/>
-                <a:ea typeface="Calibri" pitchFamily="34" charset="-122"/>
-                <a:cs typeface="Calibri" pitchFamily="34" charset="-120"/>
-              </a:rPr>
-              <a:t>86k</a:t>
-            </a:r>
-            <a:endParaRPr lang="en-US" sz="900" dirty="0"/>
-          </a:p>
-        </p:txBody>
-      </p:sp>
-      <p:sp>
-        <p:nvSpPr>
-          <p:cNvPr id="31" name="Text 28"/>
-          <p:cNvSpPr/>
-          <p:nvPr/>
-        </p:nvSpPr>
-        <p:spPr>
-          <a:xfrm>
-            <a:off x="5943600" y="2907792"/>
-            <a:ext cx="1417320" cy="192024"/>
-          </a:xfrm>
-          <a:prstGeom prst="rect">
-            <a:avLst/>
-          </a:prstGeom>
-          <a:noFill/>
-          <a:ln/>
-        </p:spPr>
-        <p:txBody>
-          <a:bodyPr wrap="square" lIns="0" tIns="0" rIns="0" bIns="0" rtlCol="0" anchor="ctr"/>
-          <a:lstStyle/>
-          <a:p>
-            <a:pPr marL="0" indent="0">
-              <a:buNone/>
-            </a:pPr>
-            <a:r>
-              <a:rPr lang="en-US" sz="900" dirty="0">
-                <a:solidFill>
-                  <a:srgbClr val="1E293B"/>
-                </a:solidFill>
-                <a:latin typeface="Calibri" pitchFamily="34" charset="0"/>
-                <a:ea typeface="Calibri" pitchFamily="34" charset="-122"/>
-                <a:cs typeface="Calibri" pitchFamily="34" charset="-120"/>
-              </a:rPr>
-              <a:t>RuoYi</a:t>
-            </a:r>
-            <a:endParaRPr lang="en-US" sz="900" dirty="0"/>
-          </a:p>
-        </p:txBody>
-      </p:sp>
-      <p:sp>
-        <p:nvSpPr>
-          <p:cNvPr id="32" name="Text 29"/>
-          <p:cNvSpPr/>
-          <p:nvPr/>
-        </p:nvSpPr>
-        <p:spPr>
-          <a:xfrm>
-            <a:off x="7360920" y="2907792"/>
-            <a:ext cx="457200" cy="192024"/>
-          </a:xfrm>
-          <a:prstGeom prst="rect">
-            <a:avLst/>
-          </a:prstGeom>
-          <a:noFill/>
-          <a:ln/>
-        </p:spPr>
-        <p:txBody>
-          <a:bodyPr wrap="square" lIns="0" tIns="0" rIns="0" bIns="0" rtlCol="0" anchor="ctr"/>
-          <a:lstStyle/>
-          <a:p>
-            <a:pPr marL="0" indent="0" algn="ctr">
-              <a:buNone/>
-            </a:pPr>
-            <a:r>
-              <a:rPr lang="en-US" sz="900" dirty="0">
-                <a:solidFill>
-                  <a:srgbClr val="1E293B"/>
-                </a:solidFill>
-                <a:latin typeface="Calibri" pitchFamily="34" charset="0"/>
-                <a:ea typeface="Calibri" pitchFamily="34" charset="-122"/>
-                <a:cs typeface="Calibri" pitchFamily="34" charset="-120"/>
-              </a:rPr>
-              <a:t>8</a:t>
-            </a:r>
-            <a:endParaRPr lang="en-US" sz="900" dirty="0"/>
-          </a:p>
-        </p:txBody>
-      </p:sp>
-      <p:sp>
-        <p:nvSpPr>
-          <p:cNvPr id="33" name="Text 30"/>
-          <p:cNvSpPr/>
-          <p:nvPr/>
-        </p:nvSpPr>
-        <p:spPr>
-          <a:xfrm>
-            <a:off x="7818120" y="2907792"/>
-            <a:ext cx="777240" cy="192024"/>
-          </a:xfrm>
-          <a:prstGeom prst="rect">
-            <a:avLst/>
-          </a:prstGeom>
-          <a:noFill/>
-          <a:ln/>
-        </p:spPr>
-        <p:txBody>
-          <a:bodyPr wrap="square" lIns="0" tIns="0" rIns="0" bIns="0" rtlCol="0" anchor="ctr"/>
-          <a:lstStyle/>
-          <a:p>
-            <a:pPr marL="0" indent="0" algn="r">
-              <a:buNone/>
-            </a:pPr>
-            <a:r>
-              <a:rPr lang="en-US" sz="900" dirty="0">
-                <a:solidFill>
-                  <a:srgbClr val="1E293B"/>
-                </a:solidFill>
-                <a:latin typeface="Calibri" pitchFamily="34" charset="0"/>
-                <a:ea typeface="Calibri" pitchFamily="34" charset="-122"/>
-                <a:cs typeface="Calibri" pitchFamily="34" charset="-120"/>
-              </a:rPr>
-              <a:t>27k</a:t>
-            </a:r>
-            <a:endParaRPr lang="en-US" sz="900" dirty="0"/>
-          </a:p>
-        </p:txBody>
-      </p:sp>
-      <p:sp>
-        <p:nvSpPr>
-          <p:cNvPr id="34" name="Text 31"/>
-          <p:cNvSpPr/>
-          <p:nvPr/>
-        </p:nvSpPr>
-        <p:spPr>
-          <a:xfrm>
-            <a:off x="5943600" y="3104388"/>
-            <a:ext cx="1417320" cy="192024"/>
-          </a:xfrm>
-          <a:prstGeom prst="rect">
-            <a:avLst/>
-          </a:prstGeom>
-          <a:noFill/>
-          <a:ln/>
-        </p:spPr>
-        <p:txBody>
-          <a:bodyPr wrap="square" lIns="0" tIns="0" rIns="0" bIns="0" rtlCol="0" anchor="ctr"/>
-          <a:lstStyle/>
-          <a:p>
-            <a:pPr marL="0" indent="0">
-              <a:buNone/>
-            </a:pPr>
-            <a:r>
-              <a:rPr lang="en-US" sz="900" dirty="0">
-                <a:solidFill>
-                  <a:srgbClr val="1E293B"/>
-                </a:solidFill>
-                <a:latin typeface="Calibri" pitchFamily="34" charset="0"/>
-                <a:ea typeface="Calibri" pitchFamily="34" charset="-122"/>
-                <a:cs typeface="Calibri" pitchFamily="34" charset="-120"/>
-              </a:rPr>
-              <a:t>PiggyMetrics</a:t>
-            </a:r>
-            <a:endParaRPr lang="en-US" sz="900" dirty="0"/>
-          </a:p>
-        </p:txBody>
-      </p:sp>
-      <p:sp>
-        <p:nvSpPr>
-          <p:cNvPr id="35" name="Text 32"/>
-          <p:cNvSpPr/>
-          <p:nvPr/>
-        </p:nvSpPr>
-        <p:spPr>
-          <a:xfrm>
-            <a:off x="7360920" y="3104388"/>
-            <a:ext cx="457200" cy="192024"/>
-          </a:xfrm>
-          <a:prstGeom prst="rect">
-            <a:avLst/>
-          </a:prstGeom>
-          <a:noFill/>
-          <a:ln/>
-        </p:spPr>
-        <p:txBody>
-          <a:bodyPr wrap="square" lIns="0" tIns="0" rIns="0" bIns="0" rtlCol="0" anchor="ctr"/>
-          <a:lstStyle/>
-          <a:p>
-            <a:pPr marL="0" indent="0" algn="ctr">
-              <a:buNone/>
-            </a:pPr>
-            <a:r>
-              <a:rPr lang="en-US" sz="900" dirty="0">
-                <a:solidFill>
-                  <a:srgbClr val="1E293B"/>
-                </a:solidFill>
-                <a:latin typeface="Calibri" pitchFamily="34" charset="0"/>
-                <a:ea typeface="Calibri" pitchFamily="34" charset="-122"/>
-                <a:cs typeface="Calibri" pitchFamily="34" charset="-120"/>
-              </a:rPr>
-              <a:t>8</a:t>
-            </a:r>
-            <a:endParaRPr lang="en-US" sz="900" dirty="0"/>
-          </a:p>
-        </p:txBody>
-      </p:sp>
-      <p:sp>
-        <p:nvSpPr>
-          <p:cNvPr id="36" name="Text 33"/>
-          <p:cNvSpPr/>
-          <p:nvPr/>
-        </p:nvSpPr>
-        <p:spPr>
-          <a:xfrm>
-            <a:off x="7818120" y="3104388"/>
-            <a:ext cx="777240" cy="192024"/>
-          </a:xfrm>
-          <a:prstGeom prst="rect">
-            <a:avLst/>
-          </a:prstGeom>
-          <a:noFill/>
-          <a:ln/>
-        </p:spPr>
-        <p:txBody>
-          <a:bodyPr wrap="square" lIns="0" tIns="0" rIns="0" bIns="0" rtlCol="0" anchor="ctr"/>
-          <a:lstStyle/>
-          <a:p>
-            <a:pPr marL="0" indent="0" algn="r">
-              <a:buNone/>
-            </a:pPr>
-            <a:r>
-              <a:rPr lang="en-US" sz="900" dirty="0">
-                <a:solidFill>
-                  <a:srgbClr val="1E293B"/>
-                </a:solidFill>
-                <a:latin typeface="Calibri" pitchFamily="34" charset="0"/>
-                <a:ea typeface="Calibri" pitchFamily="34" charset="-122"/>
-                <a:cs typeface="Calibri" pitchFamily="34" charset="-120"/>
-              </a:rPr>
-              <a:t>4.5k</a:t>
-            </a:r>
-            <a:endParaRPr lang="en-US" sz="900" dirty="0"/>
-          </a:p>
-        </p:txBody>
-      </p:sp>
-      <p:sp>
-        <p:nvSpPr>
-          <p:cNvPr id="37" name="Text 34"/>
-          <p:cNvSpPr/>
-          <p:nvPr/>
-        </p:nvSpPr>
-        <p:spPr>
-          <a:xfrm>
-            <a:off x="5943600" y="3300984"/>
-            <a:ext cx="1417320" cy="192024"/>
-          </a:xfrm>
-          <a:prstGeom prst="rect">
-            <a:avLst/>
-          </a:prstGeom>
-          <a:noFill/>
-          <a:ln/>
-        </p:spPr>
-        <p:txBody>
-          <a:bodyPr wrap="square" lIns="0" tIns="0" rIns="0" bIns="0" rtlCol="0" anchor="ctr"/>
-          <a:lstStyle/>
-          <a:p>
-            <a:pPr marL="0" indent="0">
-              <a:buNone/>
-            </a:pPr>
-            <a:r>
-              <a:rPr lang="en-US" sz="900" dirty="0">
-                <a:solidFill>
-                  <a:srgbClr val="1E293B"/>
-                </a:solidFill>
-                <a:latin typeface="Calibri" pitchFamily="34" charset="0"/>
-                <a:ea typeface="Calibri" pitchFamily="34" charset="-122"/>
-                <a:cs typeface="Calibri" pitchFamily="34" charset="-120"/>
-              </a:rPr>
-              <a:t>piomin</a:t>
-            </a:r>
-            <a:endParaRPr lang="en-US" sz="900" dirty="0"/>
-          </a:p>
-        </p:txBody>
-      </p:sp>
-      <p:sp>
-        <p:nvSpPr>
-          <p:cNvPr id="38" name="Text 35"/>
-          <p:cNvSpPr/>
-          <p:nvPr/>
-        </p:nvSpPr>
-        <p:spPr>
-          <a:xfrm>
-            <a:off x="7360920" y="3300984"/>
-            <a:ext cx="457200" cy="192024"/>
-          </a:xfrm>
-          <a:prstGeom prst="rect">
-            <a:avLst/>
-          </a:prstGeom>
-          <a:noFill/>
-          <a:ln/>
-        </p:spPr>
-        <p:txBody>
-          <a:bodyPr wrap="square" lIns="0" tIns="0" rIns="0" bIns="0" rtlCol="0" anchor="ctr"/>
-          <a:lstStyle/>
-          <a:p>
-            <a:pPr marL="0" indent="0" algn="ctr">
-              <a:buNone/>
-            </a:pPr>
-            <a:r>
-              <a:rPr lang="en-US" sz="900" dirty="0">
-                <a:solidFill>
-                  <a:srgbClr val="1E293B"/>
-                </a:solidFill>
-                <a:latin typeface="Calibri" pitchFamily="34" charset="0"/>
-                <a:ea typeface="Calibri" pitchFamily="34" charset="-122"/>
-                <a:cs typeface="Calibri" pitchFamily="34" charset="-120"/>
-              </a:rPr>
-              <a:t>6</a:t>
-            </a:r>
-            <a:endParaRPr lang="en-US" sz="900" dirty="0"/>
-          </a:p>
-        </p:txBody>
-      </p:sp>
-      <p:sp>
-        <p:nvSpPr>
-          <p:cNvPr id="39" name="Text 36"/>
-          <p:cNvSpPr/>
-          <p:nvPr/>
-        </p:nvSpPr>
-        <p:spPr>
-          <a:xfrm>
-            <a:off x="7818120" y="3300984"/>
-            <a:ext cx="777240" cy="192024"/>
-          </a:xfrm>
-          <a:prstGeom prst="rect">
-            <a:avLst/>
-          </a:prstGeom>
-          <a:noFill/>
-          <a:ln/>
-        </p:spPr>
-        <p:txBody>
-          <a:bodyPr wrap="square" lIns="0" tIns="0" rIns="0" bIns="0" rtlCol="0" anchor="ctr"/>
-          <a:lstStyle/>
-          <a:p>
-            <a:pPr marL="0" indent="0" algn="r">
-              <a:buNone/>
-            </a:pPr>
-            <a:r>
-              <a:rPr lang="en-US" sz="900" dirty="0">
-                <a:solidFill>
-                  <a:srgbClr val="1E293B"/>
-                </a:solidFill>
-                <a:latin typeface="Calibri" pitchFamily="34" charset="0"/>
-                <a:ea typeface="Calibri" pitchFamily="34" charset="-122"/>
-                <a:cs typeface="Calibri" pitchFamily="34" charset="-120"/>
-              </a:rPr>
-              <a:t>1.3k</a:t>
-            </a:r>
-            <a:endParaRPr lang="en-US" sz="900" dirty="0"/>
-          </a:p>
-        </p:txBody>
-      </p:sp>
-      <p:sp>
-        <p:nvSpPr>
-          <p:cNvPr id="40" name="Shape 37"/>
-          <p:cNvSpPr/>
-          <p:nvPr/>
-        </p:nvSpPr>
-        <p:spPr>
-          <a:xfrm>
-            <a:off x="5943600" y="3529584"/>
-            <a:ext cx="2651760" cy="18288"/>
-          </a:xfrm>
-          <a:prstGeom prst="rect">
-            <a:avLst/>
-          </a:prstGeom>
-          <a:solidFill>
-            <a:srgbClr val="0F2A44"/>
-          </a:solidFill>
-          <a:ln w="12700">
-            <a:solidFill>
-              <a:srgbClr val="0F2A44"/>
-            </a:solidFill>
-            <a:prstDash val="solid"/>
-          </a:ln>
-        </p:spPr>
-        <p:txBody>
-          <a:bodyPr/>
-          <a:lstStyle/>
-          <a:p>
-            <a:endParaRPr lang="en-US"/>
-          </a:p>
-        </p:txBody>
-      </p:sp>
-      <p:sp>
-        <p:nvSpPr>
-          <p:cNvPr id="41" name="Text 38"/>
-          <p:cNvSpPr/>
-          <p:nvPr/>
-        </p:nvSpPr>
-        <p:spPr>
-          <a:xfrm>
-            <a:off x="5943600" y="3584448"/>
-            <a:ext cx="1417320" cy="201168"/>
-          </a:xfrm>
-          <a:prstGeom prst="rect">
-            <a:avLst/>
-          </a:prstGeom>
-          <a:noFill/>
-          <a:ln/>
-        </p:spPr>
-        <p:txBody>
-          <a:bodyPr wrap="square" lIns="0" tIns="0" rIns="0" bIns="0" rtlCol="0" anchor="ctr"/>
-          <a:lstStyle/>
-          <a:p>
-            <a:pPr marL="0" indent="0">
-              <a:buNone/>
-            </a:pPr>
-            <a:r>
-              <a:rPr lang="en-US" sz="900" b="1" dirty="0">
-                <a:solidFill>
-                  <a:srgbClr val="0F2A44"/>
-                </a:solidFill>
-                <a:latin typeface="Calibri" pitchFamily="34" charset="0"/>
-                <a:ea typeface="Calibri" pitchFamily="34" charset="-122"/>
-                <a:cs typeface="Calibri" pitchFamily="34" charset="-120"/>
-              </a:rPr>
-              <a:t>Total</a:t>
-            </a:r>
-            <a:endParaRPr lang="en-US" sz="900" dirty="0"/>
-          </a:p>
-        </p:txBody>
-      </p:sp>
-      <p:sp>
-        <p:nvSpPr>
-          <p:cNvPr id="42" name="Text 39"/>
-          <p:cNvSpPr/>
-          <p:nvPr/>
-        </p:nvSpPr>
-        <p:spPr>
-          <a:xfrm>
-            <a:off x="7360920" y="3584448"/>
-            <a:ext cx="457200" cy="201168"/>
-          </a:xfrm>
-          <a:prstGeom prst="rect">
-            <a:avLst/>
-          </a:prstGeom>
-          <a:noFill/>
-          <a:ln/>
-        </p:spPr>
-        <p:txBody>
-          <a:bodyPr wrap="square" lIns="0" tIns="0" rIns="0" bIns="0" rtlCol="0" anchor="ctr"/>
-          <a:lstStyle/>
-          <a:p>
-            <a:pPr marL="0" indent="0" algn="ctr">
-              <a:buNone/>
-            </a:pPr>
-            <a:r>
-              <a:rPr lang="en-US" sz="900" b="1" dirty="0">
-                <a:solidFill>
-                  <a:srgbClr val="0F2A44"/>
-                </a:solidFill>
-                <a:latin typeface="Calibri" pitchFamily="34" charset="0"/>
-                <a:ea typeface="Calibri" pitchFamily="34" charset="-122"/>
-                <a:cs typeface="Calibri" pitchFamily="34" charset="-120"/>
-              </a:rPr>
-              <a:t>130</a:t>
-            </a:r>
-            <a:endParaRPr lang="en-US" sz="900" dirty="0"/>
-          </a:p>
-        </p:txBody>
-      </p:sp>
-      <p:sp>
-        <p:nvSpPr>
-          <p:cNvPr id="43" name="Text 40"/>
-          <p:cNvSpPr/>
-          <p:nvPr/>
-        </p:nvSpPr>
-        <p:spPr>
-          <a:xfrm>
-            <a:off x="7818120" y="3584448"/>
-            <a:ext cx="777240" cy="201168"/>
-          </a:xfrm>
-          <a:prstGeom prst="rect">
-            <a:avLst/>
-          </a:prstGeom>
-          <a:noFill/>
-          <a:ln/>
-        </p:spPr>
-        <p:txBody>
-          <a:bodyPr wrap="square" lIns="0" tIns="0" rIns="0" bIns="0" rtlCol="0" anchor="ctr"/>
-          <a:lstStyle/>
-          <a:p>
-            <a:pPr marL="0" indent="0" algn="r">
-              <a:buNone/>
-            </a:pPr>
-            <a:r>
-              <a:rPr lang="en-US" sz="900" b="1" dirty="0">
-                <a:solidFill>
-                  <a:srgbClr val="0F2A44"/>
-                </a:solidFill>
-                <a:latin typeface="Calibri" pitchFamily="34" charset="0"/>
-                <a:ea typeface="Calibri" pitchFamily="34" charset="-122"/>
-                <a:cs typeface="Calibri" pitchFamily="34" charset="-120"/>
-              </a:rPr>
-              <a:t>274k</a:t>
-            </a:r>
-            <a:endParaRPr lang="en-US" sz="900" dirty="0"/>
-          </a:p>
-        </p:txBody>
-      </p:sp>
-      <p:sp>
-        <p:nvSpPr>
-          <p:cNvPr id="44" name="Shape 41"/>
-          <p:cNvSpPr/>
-          <p:nvPr/>
-        </p:nvSpPr>
-        <p:spPr>
-          <a:xfrm>
-            <a:off x="548640" y="3950208"/>
-            <a:ext cx="457200" cy="36576"/>
-          </a:xfrm>
-          <a:prstGeom prst="rect">
-            <a:avLst/>
-          </a:prstGeom>
-          <a:solidFill>
-            <a:srgbClr val="0D9488"/>
-          </a:solidFill>
-          <a:ln w="12700">
-            <a:solidFill>
-              <a:srgbClr val="0D9488"/>
-            </a:solidFill>
-            <a:prstDash val="solid"/>
-          </a:ln>
-        </p:spPr>
-        <p:txBody>
-          <a:bodyPr/>
-          <a:lstStyle/>
-          <a:p>
-            <a:endParaRPr lang="en-US"/>
-          </a:p>
-        </p:txBody>
-      </p:sp>
-      <p:sp>
-        <p:nvSpPr>
-          <p:cNvPr id="45" name="Text 42"/>
-          <p:cNvSpPr/>
-          <p:nvPr/>
-        </p:nvSpPr>
-        <p:spPr>
-          <a:xfrm>
-            <a:off x="731520" y="4059936"/>
-            <a:ext cx="7863840" cy="640080"/>
-          </a:xfrm>
-          <a:prstGeom prst="rect">
-            <a:avLst/>
-          </a:prstGeom>
-          <a:noFill/>
-          <a:ln/>
-        </p:spPr>
-        <p:txBody>
-          <a:bodyPr wrap="square" lIns="0" tIns="0" rIns="0" bIns="0" rtlCol="0" anchor="ctr"/>
-          <a:lstStyle/>
-          <a:p>
-            <a:pPr marL="342900" indent="-342900">
-              <a:spcAft>
-                <a:spcPts val="200"/>
-              </a:spcAft>
-              <a:buSzPct val="100000"/>
-              <a:buChar char="•"/>
-            </a:pPr>
-            <a:r>
-              <a:rPr lang="en-US" sz="1050" dirty="0">
-                <a:solidFill>
-                  <a:srgbClr val="1E293B"/>
-                </a:solidFill>
-                <a:latin typeface="Calibri" pitchFamily="34" charset="0"/>
-                <a:ea typeface="Calibri" pitchFamily="34" charset="-122"/>
-                <a:cs typeface="Calibri" pitchFamily="34" charset="-120"/>
-              </a:rPr>
-              <a:t>98 anti-pattern instances across 9 types</a:t>
-            </a:r>
-          </a:p>
-          <a:p>
-            <a:pPr marL="342900" indent="-342900">
-              <a:spcAft>
-                <a:spcPts val="200"/>
-              </a:spcAft>
-              <a:buSzPct val="100000"/>
-              <a:buChar char="•"/>
-            </a:pPr>
-            <a:r>
-              <a:rPr lang="en-US" sz="1050" dirty="0">
-                <a:solidFill>
-                  <a:srgbClr val="1E293B"/>
-                </a:solidFill>
-                <a:latin typeface="Calibri" pitchFamily="34" charset="0"/>
-                <a:ea typeface="Calibri" pitchFamily="34" charset="-122"/>
-                <a:cs typeface="Calibri" pitchFamily="34" charset="-120"/>
-              </a:rPr>
-              <a:t>API Versioning Absence (37), Nano Service (23) and Hardcoded Endpoint (15) dominate</a:t>
-            </a:r>
-            <a:endParaRPr lang="en-US" sz="1050" dirty="0"/>
-          </a:p>
-        </p:txBody>
-      </p:sp>
-      <p:sp>
-        <p:nvSpPr>
-          <p:cNvPr id="46" name="Text 43"/>
-          <p:cNvSpPr/>
-          <p:nvPr/>
-        </p:nvSpPr>
-        <p:spPr>
-          <a:xfrm>
-            <a:off x="7955280" y="4864608"/>
-            <a:ext cx="640080" cy="228600"/>
-          </a:xfrm>
-          <a:prstGeom prst="rect">
-            <a:avLst/>
-          </a:prstGeom>
-          <a:noFill/>
-          <a:ln/>
-        </p:spPr>
-        <p:txBody>
-          <a:bodyPr wrap="square" lIns="0" tIns="0" rIns="0" bIns="0" rtlCol="0" anchor="ctr"/>
-          <a:lstStyle/>
-          <a:p>
-            <a:pPr marL="0" indent="0" algn="r">
-              <a:buNone/>
-            </a:pPr>
-            <a:r>
-              <a:rPr lang="en-US" sz="900" dirty="0">
-                <a:solidFill>
-                  <a:srgbClr val="64748B"/>
-                </a:solidFill>
-                <a:latin typeface="Calibri" pitchFamily="34" charset="0"/>
-                <a:ea typeface="Calibri" pitchFamily="34" charset="-122"/>
-                <a:cs typeface="Calibri" pitchFamily="34" charset="-120"/>
-              </a:rPr>
-              <a:t>9 / 12</a:t>
             </a:r>
             <a:endParaRPr lang="en-US" sz="900" dirty="0"/>
           </a:p>

--- a/thesis/presentation/MSA_Detector_Defense_v2.pptx
+++ b/thesis/presentation/MSA_Detector_Defense_v2.pptx
@@ -2466,11 +2466,10 @@
             <a:endParaRPr lang="en-US" sz="1500" dirty="0"/>
           </a:p>
           <a:p>
-            <a:pPr marL="0" indent="0">
+            <a:pPr>
               <a:spcAft>
                 <a:spcPts val="200"/>
               </a:spcAft>
-              <a:buNone/>
             </a:pPr>
             <a:r>
               <a:rPr lang="en-US" sz="1150" dirty="0">
@@ -2481,9 +2480,8 @@
                 <a:ea typeface="Calibri" pitchFamily="34" charset="-122"/>
                 <a:cs typeface="Calibri" pitchFamily="34" charset="-120"/>
               </a:rPr>
-              <a:t>Master's Dissertation Defense</a:t>
-            </a:r>
-            <a:endParaRPr lang="en-US" sz="1500" dirty="0"/>
+              <a:t>Diagnosing the Distributed: A Static Analysis Approach to Microservice Anti-Pattern Detection</a:t>
+            </a:r>
           </a:p>
           <a:p>
             <a:pPr marL="0" indent="0">
@@ -2501,7 +2499,18 @@
                 <a:ea typeface="Calibri" pitchFamily="34" charset="-122"/>
                 <a:cs typeface="Calibri" pitchFamily="34" charset="-120"/>
               </a:rPr>
-              <a:t>Supervisor: Prof. Dr. Simona Motogna</a:t>
+              <a:t>Supervisor: Prof. Dr. Simona </a:t>
+            </a:r>
+            <a:r>
+              <a:rPr lang="en-US" sz="1150" dirty="0" err="1">
+                <a:solidFill>
+                  <a:srgbClr val="DBEAFE"/>
+                </a:solidFill>
+                <a:latin typeface="Calibri" pitchFamily="34" charset="0"/>
+                <a:ea typeface="Calibri" pitchFamily="34" charset="-122"/>
+                <a:cs typeface="Calibri" pitchFamily="34" charset="-120"/>
+              </a:rPr>
+              <a:t>Motogna</a:t>
             </a:r>
             <a:endParaRPr lang="en-US" sz="1500" dirty="0"/>
           </a:p>
@@ -3921,27 +3930,6 @@
             </a:r>
             <a:endParaRPr lang="en-US" sz="1250" dirty="0"/>
           </a:p>
-          <a:p>
-            <a:pPr marL="342900" indent="-342900">
-              <a:spcAft>
-                <a:spcPts val="400"/>
-              </a:spcAft>
-              <a:buSzPct val="100000"/>
-              <a:buChar char="•"/>
-            </a:pPr>
-            <a:r>
-              <a:rPr lang="en-US" sz="1250" dirty="0">
-                <a:solidFill>
-                  <a:srgbClr val="FFFFFF"/>
-                </a:solidFill>
-                <a:latin typeface="Calibri" pitchFamily="34" charset="0"/>
-                <a:ea typeface="Calibri" pitchFamily="34" charset="-122"/>
-                <a:cs typeface="Calibri" pitchFamily="34" charset="-120"/>
-              </a:rPr>
-              <a:t>Open-source web application, ready for CI/CD integration</a:t>
-            </a:r>
-            <a:endParaRPr lang="en-US" sz="1250" dirty="0"/>
-          </a:p>
         </p:txBody>
       </p:sp>
       <p:sp>
@@ -6588,7 +6576,7 @@
                 <a:ea typeface="Calibri" pitchFamily="34" charset="-122"/>
                 <a:cs typeface="Calibri" pitchFamily="34" charset="-120"/>
               </a:rPr>
-              <a:t>Async pipeline: long analyses don't block the API; Spring @Async with TransactionSynchronization.afterCommit() ensures consistency</a:t>
+              <a:t>Async pipeline: long analyses don't block the API =&gt; Spring @Async with TransactionSynchronization.afterCommit() ensures consistency</a:t>
             </a:r>
             <a:endParaRPr lang="en-US" sz="1100" dirty="0"/>
           </a:p>
@@ -6609,7 +6597,29 @@
                 <a:ea typeface="Calibri" pitchFamily="34" charset="-122"/>
                 <a:cs typeface="Calibri" pitchFamily="34" charset="-120"/>
               </a:rPr>
-              <a:t>Each detector is a Spring @Component implementing AntiPatternDetector; adding a new detector means no orchestrator changes</a:t>
+              <a:t>Each detector is a Spring @Component implementing </a:t>
+            </a:r>
+            <a:r>
+              <a:rPr lang="en-US" sz="1100" dirty="0" err="1">
+                <a:solidFill>
+                  <a:srgbClr val="1E293B"/>
+                </a:solidFill>
+                <a:latin typeface="Calibri" pitchFamily="34" charset="0"/>
+                <a:ea typeface="Calibri" pitchFamily="34" charset="-122"/>
+                <a:cs typeface="Calibri" pitchFamily="34" charset="-120"/>
+              </a:rPr>
+              <a:t>AntiPatternDetector</a:t>
+            </a:r>
+            <a:r>
+              <a:rPr lang="en-US" sz="1100" dirty="0">
+                <a:solidFill>
+                  <a:srgbClr val="1E293B"/>
+                </a:solidFill>
+                <a:latin typeface="Calibri" pitchFamily="34" charset="0"/>
+                <a:ea typeface="Calibri" pitchFamily="34" charset="-122"/>
+                <a:cs typeface="Calibri" pitchFamily="34" charset="-120"/>
+              </a:rPr>
+              <a:t> =&gt; adding a new detector means no orchestrator changes</a:t>
             </a:r>
             <a:endParaRPr lang="en-US" sz="1100" dirty="0"/>
           </a:p>
@@ -10309,8 +10319,9 @@
           <a:bodyPr wrap="square" lIns="0" tIns="0" rIns="0" bIns="0" rtlCol="0" anchor="ctr"/>
           <a:lstStyle/>
           <a:p>
-            <a:pPr marL="0" indent="0">
-              <a:buNone/>
+            <a:pPr marL="171450" indent="-171450">
+              <a:buFont typeface="Arial" panose="020B0604020202020204" pitchFamily="34" charset="0"/>
+              <a:buChar char="•"/>
             </a:pPr>
             <a:r>
               <a:rPr lang="en-US" sz="1100" dirty="0">
@@ -10321,7 +10332,24 @@
                 <a:ea typeface="Calibri" pitchFamily="34" charset="-122"/>
                 <a:cs typeface="Calibri" pitchFamily="34" charset="-120"/>
               </a:rPr>
-              <a:t>A single number tells teams whether quality is improving; the per-category breakdown tells them which dimension needs attention. Both views are exposed via the analysis-diff feature for tracking over time.</a:t>
+              <a:t>A single number tells teams whether quality is improving = &gt; the per-category breakdown tells them which dimension needs attention</a:t>
+            </a:r>
+          </a:p>
+          <a:p>
+            <a:pPr marL="171450" indent="-171450">
+              <a:buFont typeface="Arial" panose="020B0604020202020204" pitchFamily="34" charset="0"/>
+              <a:buChar char="•"/>
+            </a:pPr>
+            <a:r>
+              <a:rPr lang="en-US" sz="1100" dirty="0">
+                <a:solidFill>
+                  <a:srgbClr val="1E293B"/>
+                </a:solidFill>
+                <a:latin typeface="Calibri" pitchFamily="34" charset="0"/>
+                <a:ea typeface="Calibri" pitchFamily="34" charset="-122"/>
+                <a:cs typeface="Calibri" pitchFamily="34" charset="-120"/>
+              </a:rPr>
+              <a:t>Both views are exposed via the analysis-diff feature for tracking over time</a:t>
             </a:r>
             <a:endParaRPr lang="en-US" sz="1100" dirty="0"/>
           </a:p>

--- a/thesis/presentation/MSA_Detector_Defense_v2.pptx
+++ b/thesis/presentation/MSA_Detector_Defense_v2.pptx
@@ -5,7 +5,7 @@
     <p:sldMasterId id="2147483648" r:id="rId1"/>
   </p:sldMasterIdLst>
   <p:notesMasterIdLst>
-    <p:notesMasterId r:id="rId14"/>
+    <p:notesMasterId r:id="rId18"/>
   </p:notesMasterIdLst>
   <p:sldIdLst>
     <p:sldId id="256" r:id="rId2"/>
@@ -16,10 +16,14 @@
     <p:sldId id="260" r:id="rId7"/>
     <p:sldId id="262" r:id="rId8"/>
     <p:sldId id="264" r:id="rId9"/>
-    <p:sldId id="263" r:id="rId10"/>
-    <p:sldId id="265" r:id="rId11"/>
-    <p:sldId id="266" r:id="rId12"/>
-    <p:sldId id="267" r:id="rId13"/>
+    <p:sldId id="265" r:id="rId10"/>
+    <p:sldId id="266" r:id="rId11"/>
+    <p:sldId id="267" r:id="rId12"/>
+    <p:sldId id="270" r:id="rId13"/>
+    <p:sldId id="269" r:id="rId14"/>
+    <p:sldId id="263" r:id="rId15"/>
+    <p:sldId id="271" r:id="rId16"/>
+    <p:sldId id="272" r:id="rId17"/>
   </p:sldIdLst>
   <p:sldSz cx="9144000" cy="5143500" type="screen16x9"/>
   <p:notesSz cx="5143500" cy="9144000"/>
@@ -720,23 +724,20 @@
           <a:p>
             <a:r>
               <a:rPr lang="en-US" dirty="0"/>
-              <a:t>This is the demo slide — switch to the browser/tool after this title comes up. Aim for ~2 minutes total.
-Before you start:
-• Have the app already running on localhost. Don't start the server live.
-• Be logged in already. Don't waste demo time on the login form.
-• Have a small known-working repo URL ready in your clipboard. MicroservicesSocial is the safest choice — small, fast, and produces a varied set of findings (Shared DB, Nano Service, Hardcoded Endpoint, API Versioning).
-• Have a second browser tab open with a PREVIOUSLY COMPLETED analysis loaded, as a fallback. If the live clone fails or runs slow, switch to that tab and say 'here's a previous run on the same project.'
-Demo script (~2 min):
-1. CLONE (~30 s): 'I'll paste a GitHub URL of a small microservice project and submit it.' Paste, click submit. While it runs: 'the pipeline is now detecting microservices, running DesigniteJava per service, building the dependency graph, and running the ten detectors.'
-2. DASHBOARD (~30 s): When the results page loads, point at the health score gauge. 'Score 83, grade B. The four-category breakdown shows where the deductions came from — mostly Anti-Patterns category.'
-3. DRILL-DOWN (~45 s): Click on the Shared Database finding to expand it. 'You can see the affected services, the actual datasource URL that's being shared, the code snippet from the application.yml file, and remediation guidance.' This is the slide's strongest moment — the committee sees the evidence-based reporting in action.
-4. DEPENDENCY GRAPH (~15 s): Scroll down or switch to the dep-graph view. 'Interactive force-directed graph. Each node is a service, edges show inter-service calls, node size scales with LOC.'
-Then say: 'I'll switch back to the slides.' Click back to slide 11.
-If the demo BREAKS at any point:
-• Don't panic. Say 'looks like the network is being slow — let me switch to a pre-computed run.'
-• Switch to your backup tab.
-• If even the backup fails: 'the deployment is on my laptop and I'd be happy to demo it after the defense — meanwhile, the screenshots in Chapter 4 of the thesis show the same flow.'
-• Move on quickly. Don't burn 90 seconds debugging in front of the committee. The thesis stands on its own.</a:t>
+              <a:t>• 'The tool has limitations. The biggest is the Java/Spring Boot restriction — real-world systems are polyglot, and the current tool can't </a:t>
+            </a:r>
+            <a:r>
+              <a:rPr lang="en-US" dirty="0" err="1"/>
+              <a:t>analyse</a:t>
+            </a:r>
+            <a:r>
+              <a:rPr lang="en-US" dirty="0"/>
+              <a:t> non-Java services.'
+• 'Static analysis trades precision for applicability. A distributed tracing approach would give exact runtime call counts but requires the system to be deployed and instrumented — which prevents the tool from running on a fresh checkout.'
+• 'The health score weights aren't empirically validated. They're engineering judgement informed by the literature. Different teams might want different weightings.'
+• 'Future work in priority order: multi-language support, then ML-based detection, then empirical calibration of thresholds.'
+You can add: 'The multi-language extension is actually partially designed already — Chapter 5 describes a roadmap where Docker Compose and Kubernetes manifests provide a language-agnostic dependency graph, and only the intra-service analysis needs per-language adapters. So the architecture is ready for it, even though the implementation is Java-only today.'
+Don't get defensive about limitations. Acknowledging them is more impressive than glossing over them.</a:t>
             </a:r>
           </a:p>
         </p:txBody>
@@ -823,20 +824,22 @@
           <a:p>
             <a:r>
               <a:rPr lang="en-US" dirty="0"/>
-              <a:t>• 'The tool has limitations. The biggest is the Java/Spring Boot restriction — real-world systems are polyglot, and the current tool can't </a:t>
-            </a:r>
-            <a:r>
-              <a:rPr lang="en-US" dirty="0" err="1"/>
-              <a:t>analyse</a:t>
-            </a:r>
-            <a:r>
-              <a:rPr lang="en-US" dirty="0"/>
-              <a:t> non-Java services.'
-• 'Static analysis trades precision for applicability. A distributed tracing approach would give exact runtime call counts but requires the system to be deployed and instrumented — which prevents the tool from running on a fresh checkout.'
-• 'The health score weights aren't empirically validated. They're engineering judgement informed by the literature. Different teams might want different weightings.'
-• 'Future work in priority order: multi-language support, then ML-based detection, then empirical calibration of thresholds.'
-You can add: 'The multi-language extension is actually partially designed already — Chapter 5 describes a roadmap where Docker Compose and Kubernetes manifests provide a language-agnostic dependency graph, and only the intra-service analysis needs per-language adapters. So the architecture is ready for it, even though the implementation is Java-only today.'
-Don't get defensive about limitations. Acknowledging them is more impressive than glossing over them.</a:t>
+              <a:t>Quick close — about 20 seconds.
+Suggested wording:
+'To recap: the MSA Detector is a multi-level static analysis tool for Java/Spring Boot microservices, with ten anti-pattern detectors, a composite health score, and evidence-based reporting. The full implementation, evaluation data, and dissertation are available. Thank you — I'm happy to take questions.'
+You can also say before 'thank you': 'If there's one thing I'd like you to take away, it's that the bridge between code-level evidence and architectural-level findings is what makes this tool different — it doesn't just say something is wrong, it shows you exactly where in the code the problem lives.'
+Then SHUT UP. Don't fill the silence. Let the committee speak.
+When the first question comes:
+1. Listen to the whole question — don't start composing the answer mid-question.
+2. If unclear, ask for clarification: 'Just to make sure I understand — are you asking about X or about Y?'
+3. Pause for 2 seconds before answering. Looks thoughtful, not nervous.
+4. Answer concisely. If you don't know, say 'I didn't investigate that — my best guess is X but I'd want to verify.'
+Common questions to prepare for:
+• 'Why God Service threshold = 1?' → false positives cheap, false negatives expensive; configurable.
+• 'Why only eleven projects?' → feasibility demo not statistical claim; no labelled corpus exists.
+• 'Score compression at the bottom?' → known limitation, a scaled AP penalty would fix.
+• 'Why static instead of dynamic?' → applicability over precision; no deployed system required.
+• 'Why Spring Boot only?' → biggest Java microservice ecosystem; other frameworks future work.</a:t>
             </a:r>
           </a:p>
         </p:txBody>
@@ -923,22 +926,8 @@
           <a:p>
             <a:r>
               <a:rPr lang="en-US" dirty="0"/>
-              <a:t>Quick close — about 20 seconds.
-Suggested wording:
-'To recap: the MSA Detector is a multi-level static analysis tool for Java/Spring Boot microservices, with ten anti-pattern detectors, a composite health score, and evidence-based reporting. The full implementation, evaluation data, and dissertation are available. Thank you — I'm happy to take questions.'
-You can also say before 'thank you': 'If there's one thing I'd like you to take away, it's that the bridge between code-level evidence and architectural-level findings is what makes this tool different — it doesn't just say something is wrong, it shows you exactly where in the code the problem lives.'
-Then SHUT UP. Don't fill the silence. Let the committee speak.
-When the first question comes:
-1. Listen to the whole question — don't start composing the answer mid-question.
-2. If unclear, ask for clarification: 'Just to make sure I understand — are you asking about X or about Y?'
-3. Pause for 2 seconds before answering. Looks thoughtful, not nervous.
-4. Answer concisely. If you don't know, say 'I didn't investigate that — my best guess is X but I'd want to verify.'
-Common questions to prepare for:
-• 'Why God Service threshold = 1?' → false positives cheap, false negatives expensive; configurable.
-• 'Why only eleven projects?' → feasibility demo not statistical claim; no labelled corpus exists.
-• 'Score compression at the bottom?' → known limitation, a scaled AP penalty would fix.
-• 'Why static instead of dynamic?' → applicability over precision; no deployed system required.
-• 'Why Spring Boot only?' → biggest Java microservice ecosystem; other frameworks future work.</a:t>
+              <a:t>Reference slide only — do not spend presentation time here unless the committee asks about sources.
+If asked, say: 'These are the selected works that shaped the microservice definition, anti-pattern catalogue, static analysis approach, related tools, and graph algorithms used in the implementation. The complete bibliography is in the dissertation.'</a:t>
             </a:r>
           </a:p>
         </p:txBody>
@@ -961,6 +950,298 @@
             <a:fld id="{F7021451-1387-4CA6-816F-3879F97B5CBC}" type="slidenum">
               <a:rPr lang="en-US"/>
               <a:t>12</a:t>
+            </a:fld>
+            <a:endParaRPr lang="en-US"/>
+          </a:p>
+        </p:txBody>
+      </p:sp>
+    </p:spTree>
+    <p:extLst>
+      <p:ext uri="{BB962C8B-B14F-4D97-AF65-F5344CB8AC3E}">
+        <p14:creationId xmlns:p14="http://schemas.microsoft.com/office/powerpoint/2010/main" val="1024086991"/>
+      </p:ext>
+    </p:extLst>
+  </p:cSld>
+  <p:clrMapOvr>
+    <a:masterClrMapping/>
+  </p:clrMapOvr>
+</p:notes>
+</file>
+
+<file path=ppt/notesSlides/notesSlide13.xml><?xml version="1.0" encoding="utf-8"?>
+<p:notes xmlns:a="http://schemas.openxmlformats.org/drawingml/2006/main" xmlns:r="http://schemas.openxmlformats.org/officeDocument/2006/relationships" xmlns:p="http://schemas.openxmlformats.org/presentationml/2006/main">
+  <p:cSld>
+    <p:spTree>
+      <p:nvGrpSpPr>
+        <p:cNvPr id="1" name=""/>
+        <p:cNvGrpSpPr/>
+        <p:nvPr/>
+      </p:nvGrpSpPr>
+      <p:grpSpPr>
+        <a:xfrm>
+          <a:off x="0" y="0"/>
+          <a:ext cx="0" cy="0"/>
+          <a:chOff x="0" y="0"/>
+          <a:chExt cx="0" cy="0"/>
+        </a:xfrm>
+      </p:grpSpPr>
+      <p:sp>
+        <p:nvSpPr>
+          <p:cNvPr id="2" name="Slide Image Placeholder 1"/>
+          <p:cNvSpPr>
+            <a:spLocks noGrp="1" noRot="1" noChangeAspect="1"/>
+          </p:cNvSpPr>
+          <p:nvPr>
+            <p:ph type="sldImg"/>
+          </p:nvPr>
+        </p:nvSpPr>
+        <p:spPr/>
+      </p:sp>
+      <p:sp>
+        <p:nvSpPr>
+          <p:cNvPr id="3" name="Notes Placeholder 2"/>
+          <p:cNvSpPr>
+            <a:spLocks noGrp="1"/>
+          </p:cNvSpPr>
+          <p:nvPr>
+            <p:ph type="body" idx="1"/>
+          </p:nvPr>
+        </p:nvSpPr>
+        <p:spPr/>
+        <p:txBody>
+          <a:bodyPr/>
+          <a:lstStyle/>
+          <a:p>
+            <a:r>
+              <a:rPr lang="en-US" dirty="0"/>
+              <a:t>This slide could just be “presented’ during the live demo, and just shown briefly</a:t>
+            </a:r>
+          </a:p>
+          <a:p>
+            <a:endParaRPr lang="en-US" dirty="0"/>
+          </a:p>
+          <a:p>
+            <a:r>
+              <a:rPr lang="en-US" dirty="0"/>
+              <a:t>• 'Take microservice-recruit — a Spring Cloud recruitment platform. In the anti-pattern category it has 6 API versioning absences, 2 ESB misuse and 2 wrong-cuts findings, 1 cyclic dependency, and 1 hardcoded endpoint — total penalty 49, but the category caps at 40, so it clamps to zero.'
+• 'Its single nano service is scored under Service Sizing instead of the anti-pattern category, to avoid double counting — costing 3 points there, leaving 12 of 15.'
+• 'Architecture loses 9 points for the structural coupling of its dependency graph — leaving 16 of 25.'
+• 'Code Quality is scored by smell density: 260 smells over 8.3K LOC is 31.4 per KLOC, an 8-point deduction, leaving 12 of 20.'
+• 'The final composite is 0 + 12 + 16 + 12 = 40 — grade F. Unlike a project whose problems sit in one place, this one loses points in every dimension, which is exactly what the multi-level scoring is meant to surface.'
+'What makes this example interesting is that the problems are spread across all four categories — it's not a project with one catastrophic issue, it's a project with consistent low-level neglect across every dimension. That's exactly the kind of systemic debt the multi-category decomposition is designed to surface.’</a:t>
+            </a:r>
+          </a:p>
+          <a:p>
+            <a:r>
+              <a:rPr lang="en-US" dirty="0"/>
+              <a:t>
+EXPECT QUESTION: 'Only 8 points lost on Code Quality with 260 smells — why so little?'
+Answer: 'Code Quality is scored on smell density per 1000 LOC, not raw count, so a codebase isn't punished just for its size. The category is deliberately bounded so that architectural anti-patterns remain the dominant signal in the overall score.'</a:t>
+            </a:r>
+          </a:p>
+        </p:txBody>
+      </p:sp>
+      <p:sp>
+        <p:nvSpPr>
+          <p:cNvPr id="4" name="Slide Number Placeholder 3"/>
+          <p:cNvSpPr>
+            <a:spLocks noGrp="1"/>
+          </p:cNvSpPr>
+          <p:nvPr>
+            <p:ph type="sldNum" sz="quarter" idx="10"/>
+          </p:nvPr>
+        </p:nvSpPr>
+        <p:spPr/>
+        <p:txBody>
+          <a:bodyPr/>
+          <a:lstStyle/>
+          <a:p>
+            <a:fld id="{F7021451-1387-4CA6-816F-3879F97B5CBC}" type="slidenum">
+              <a:rPr lang="en-US"/>
+              <a:t>14</a:t>
+            </a:fld>
+            <a:endParaRPr lang="en-US"/>
+          </a:p>
+        </p:txBody>
+      </p:sp>
+    </p:spTree>
+    <p:extLst>
+      <p:ext uri="{BB962C8B-B14F-4D97-AF65-F5344CB8AC3E}">
+        <p14:creationId xmlns:p14="http://schemas.microsoft.com/office/powerpoint/2010/main" val="1024086991"/>
+      </p:ext>
+    </p:extLst>
+  </p:cSld>
+  <p:clrMapOvr>
+    <a:masterClrMapping/>
+  </p:clrMapOvr>
+</p:notes>
+</file>
+
+<file path=ppt/notesSlides/notesSlide14.xml><?xml version="1.0" encoding="utf-8"?>
+<p:notes xmlns:a="http://schemas.openxmlformats.org/drawingml/2006/main" xmlns:r="http://schemas.openxmlformats.org/officeDocument/2006/relationships" xmlns:p="http://schemas.openxmlformats.org/presentationml/2006/main">
+  <p:cSld>
+    <p:spTree>
+      <p:nvGrpSpPr>
+        <p:cNvPr id="1" name=""/>
+        <p:cNvGrpSpPr/>
+        <p:nvPr/>
+      </p:nvGrpSpPr>
+      <p:grpSpPr>
+        <a:xfrm>
+          <a:off x="0" y="0"/>
+          <a:ext cx="0" cy="0"/>
+          <a:chOff x="0" y="0"/>
+          <a:chExt cx="0" cy="0"/>
+        </a:xfrm>
+      </p:grpSpPr>
+      <p:sp>
+        <p:nvSpPr>
+          <p:cNvPr id="2" name="Slide Image Placeholder 1"/>
+          <p:cNvSpPr>
+            <a:spLocks noGrp="1" noRot="1" noChangeAspect="1"/>
+          </p:cNvSpPr>
+          <p:nvPr>
+            <p:ph type="sldImg"/>
+          </p:nvPr>
+        </p:nvSpPr>
+        <p:spPr/>
+      </p:sp>
+      <p:sp>
+        <p:nvSpPr>
+          <p:cNvPr id="3" name="Notes Placeholder 2"/>
+          <p:cNvSpPr>
+            <a:spLocks noGrp="1"/>
+          </p:cNvSpPr>
+          <p:nvPr>
+            <p:ph type="body" idx="1"/>
+          </p:nvPr>
+        </p:nvSpPr>
+        <p:spPr/>
+        <p:txBody>
+          <a:bodyPr/>
+          <a:lstStyle/>
+          <a:p>
+            <a:r>
+              <a:rPr lang="en-US" dirty="0"/>
+              <a:t>Optional slide — about 45 seconds if included in the main talk.
+Talking points:
+• 'The related work is valuable, but each tool emphasises a different slice: architecture smells, recovery, or microservice smell catalogues.'
+• 'The gap I target is the combination: automatically detecting service boundaries from a source checkout, recovering dependencies, linking findings to source-level evidence, and producing a health score with remediation guidance.'
+• 'So the contribution is not simply another detector list. It is an integrated workflow from repository input to actionable architectural diagnosis.'</a:t>
+            </a:r>
+          </a:p>
+        </p:txBody>
+      </p:sp>
+      <p:sp>
+        <p:nvSpPr>
+          <p:cNvPr id="4" name="Slide Number Placeholder 3"/>
+          <p:cNvSpPr>
+            <a:spLocks noGrp="1"/>
+          </p:cNvSpPr>
+          <p:nvPr>
+            <p:ph type="sldNum" sz="quarter" idx="10"/>
+          </p:nvPr>
+        </p:nvSpPr>
+        <p:spPr/>
+        <p:txBody>
+          <a:bodyPr/>
+          <a:lstStyle/>
+          <a:p>
+            <a:fld id="{F7021451-1387-4CA6-816F-3879F97B5CBC}" type="slidenum">
+              <a:rPr lang="en-US"/>
+              <a:t>15</a:t>
+            </a:fld>
+            <a:endParaRPr lang="en-US"/>
+          </a:p>
+        </p:txBody>
+      </p:sp>
+    </p:spTree>
+    <p:extLst>
+      <p:ext uri="{BB962C8B-B14F-4D97-AF65-F5344CB8AC3E}">
+        <p14:creationId xmlns:p14="http://schemas.microsoft.com/office/powerpoint/2010/main" val="1024086991"/>
+      </p:ext>
+    </p:extLst>
+  </p:cSld>
+  <p:clrMapOvr>
+    <a:masterClrMapping/>
+  </p:clrMapOvr>
+</p:notes>
+</file>
+
+<file path=ppt/notesSlides/notesSlide15.xml><?xml version="1.0" encoding="utf-8"?>
+<p:notes xmlns:a="http://schemas.openxmlformats.org/drawingml/2006/main" xmlns:r="http://schemas.openxmlformats.org/officeDocument/2006/relationships" xmlns:p="http://schemas.openxmlformats.org/presentationml/2006/main">
+  <p:cSld>
+    <p:spTree>
+      <p:nvGrpSpPr>
+        <p:cNvPr id="1" name=""/>
+        <p:cNvGrpSpPr/>
+        <p:nvPr/>
+      </p:nvGrpSpPr>
+      <p:grpSpPr>
+        <a:xfrm>
+          <a:off x="0" y="0"/>
+          <a:ext cx="0" cy="0"/>
+          <a:chOff x="0" y="0"/>
+          <a:chExt cx="0" cy="0"/>
+        </a:xfrm>
+      </p:grpSpPr>
+      <p:sp>
+        <p:nvSpPr>
+          <p:cNvPr id="2" name="Slide Image Placeholder 1"/>
+          <p:cNvSpPr>
+            <a:spLocks noGrp="1" noRot="1" noChangeAspect="1"/>
+          </p:cNvSpPr>
+          <p:nvPr>
+            <p:ph type="sldImg"/>
+          </p:nvPr>
+        </p:nvSpPr>
+        <p:spPr/>
+      </p:sp>
+      <p:sp>
+        <p:nvSpPr>
+          <p:cNvPr id="3" name="Notes Placeholder 2"/>
+          <p:cNvSpPr>
+            <a:spLocks noGrp="1"/>
+          </p:cNvSpPr>
+          <p:nvPr>
+            <p:ph type="body" idx="1"/>
+          </p:nvPr>
+        </p:nvSpPr>
+        <p:spPr/>
+        <p:txBody>
+          <a:bodyPr/>
+          <a:lstStyle/>
+          <a:p>
+            <a:r>
+              <a:rPr lang="en-US" dirty="0"/>
+              <a:t>Spend ~45 seconds if included in the main flow.
+Talking points:
+• 'The evaluation is designed as a feasibility study across heterogeneous open-source systems.'
+• 'For each project I measured service count, LOC, anti-pattern findings, dependency graph metrics, smell density, and the resulting health score.'
+• 'I am not claiming statistical precision or recall because that would require a labelled benchmark of microservice anti-patterns. Such a corpus is not generally available, so the claim here is that the pipeline works end to end and produces explainable outputs across varied systems.'
+Bridge: 'With that framing, here are the actual results.'</a:t>
+            </a:r>
+          </a:p>
+        </p:txBody>
+      </p:sp>
+      <p:sp>
+        <p:nvSpPr>
+          <p:cNvPr id="4" name="Slide Number Placeholder 3"/>
+          <p:cNvSpPr>
+            <a:spLocks noGrp="1"/>
+          </p:cNvSpPr>
+          <p:nvPr>
+            <p:ph type="sldNum" sz="quarter" idx="10"/>
+          </p:nvPr>
+        </p:nvSpPr>
+        <p:spPr/>
+        <p:txBody>
+          <a:bodyPr/>
+          <a:lstStyle/>
+          <a:p>
+            <a:fld id="{F7021451-1387-4CA6-816F-3879F97B5CBC}" type="slidenum">
+              <a:rPr lang="en-US"/>
+              <a:t>16</a:t>
             </a:fld>
             <a:endParaRPr lang="en-US"/>
           </a:p>
@@ -1892,29 +2173,23 @@
           <a:p>
             <a:r>
               <a:rPr lang="en-US" dirty="0"/>
-              <a:t>This slide could just be “presented’ during the live demo, and just shown briefly</a:t>
-            </a:r>
-          </a:p>
-          <a:p>
-            <a:endParaRPr lang="en-US" dirty="0"/>
-          </a:p>
-          <a:p>
-            <a:r>
-              <a:rPr lang="en-US" dirty="0"/>
-              <a:t>• 'Take microservice-recruit — a Spring Cloud recruitment platform. In the anti-pattern category it has 6 API versioning absences, 2 ESB misuse and 2 wrong-cuts findings, 1 cyclic dependency, and 1 hardcoded endpoint — total penalty 49, but the category caps at 40, so it clamps to zero.'
-• 'Its single nano service is scored under Service Sizing instead of the anti-pattern category, to avoid double counting — costing 3 points there, leaving 12 of 15.'
-• 'Architecture loses 9 points for the structural coupling of its dependency graph — leaving 16 of 25.'
-• 'Code Quality is scored by smell density: 260 smells over 8.3K LOC is 31.4 per KLOC, an 8-point deduction, leaving 12 of 20.'
-• 'The final composite is 0 + 12 + 16 + 12 = 40 — grade F. Unlike a project whose problems sit in one place, this one loses points in every dimension, which is exactly what the multi-level scoring is meant to surface.'
-'What makes this example interesting is that the problems are spread across all four categories — it's not a project with one catastrophic issue, it's a project with consistent low-level neglect across every dimension. That's exactly the kind of systemic debt the multi-category decomposition is designed to surface.’</a:t>
-            </a:r>
-          </a:p>
-          <a:p>
-            <a:r>
-              <a:rPr lang="en-US" dirty="0"/>
-              <a:t>
-EXPECT QUESTION: 'Only 8 points lost on Code Quality with 260 smells — why so little?'
-Answer: 'Code Quality is scored on smell density per 1000 LOC, not raw count, so a codebase isn't punished just for its size. The category is deliberately bounded so that architectural anti-patterns remain the dominant signal in the overall score.'</a:t>
+              <a:t>This is the demo slide — switch to the browser/tool after this title comes up. Aim for ~2 minutes total.
+Before you start:
+• Have the app already running on localhost. Don't start the server live.
+• Be logged in already. Don't waste demo time on the login form.
+• Have a small known-working repo URL ready in your clipboard. MicroservicesSocial is the safest choice — small, fast, and produces a varied set of findings (Shared DB, Nano Service, Hardcoded Endpoint, API Versioning).
+• Have a second browser tab open with a PREVIOUSLY COMPLETED analysis loaded, as a fallback. If the live clone fails or runs slow, switch to that tab and say 'here's a previous run on the same project.'
+Demo script (~2 min):
+1. CLONE (~30 s): 'I'll paste a GitHub URL of a small microservice project and submit it.' Paste, click submit. While it runs: 'the pipeline is now detecting microservices, running DesigniteJava per service, building the dependency graph, and running the ten detectors.'
+2. DASHBOARD (~30 s): When the results page loads, point at the health score gauge. 'Score 83, grade B. The four-category breakdown shows where the deductions came from — mostly Anti-Patterns category.'
+3. DRILL-DOWN (~45 s): Click on the Shared Database finding to expand it. 'You can see the affected services, the actual datasource URL that's being shared, the code snippet from the application.yml file, and remediation guidance.' This is the slide's strongest moment — the committee sees the evidence-based reporting in action.
+4. DEPENDENCY GRAPH (~15 s): Scroll down or switch to the dep-graph view. 'Interactive force-directed graph. Each node is a service, edges show inter-service calls, node size scales with LOC.'
+Then say: 'I'll switch back to the slides.' Click back to slide 11.
+If the demo BREAKS at any point:
+• Don't panic. Say 'looks like the network is being slow — let me switch to a pre-computed run.'
+• Switch to your backup tab.
+• If even the backup fails: 'the deployment is on my laptop and I'd be happy to demo it after the defense — meanwhile, the screenshots in Chapter 4 of the thesis show the same flow.'
+• Move on quickly. Don't burn 90 seconds debugging in front of the committee. The thesis stands on its own.</a:t>
             </a:r>
           </a:p>
         </p:txBody>
@@ -2546,656 +2821,6 @@
 
 <file path=ppt/slides/slide10.xml><?xml version="1.0" encoding="utf-8"?>
 <p:sld xmlns:a="http://schemas.openxmlformats.org/drawingml/2006/main" xmlns:r="http://schemas.openxmlformats.org/officeDocument/2006/relationships" xmlns:p="http://schemas.openxmlformats.org/presentationml/2006/main">
-  <p:cSld name="Slide 10">
-    <p:bg>
-      <p:bgPr>
-        <a:solidFill>
-          <a:srgbClr val="0F2A44"/>
-        </a:solidFill>
-        <a:effectLst/>
-      </p:bgPr>
-    </p:bg>
-    <p:spTree>
-      <p:nvGrpSpPr>
-        <p:cNvPr id="1" name=""/>
-        <p:cNvGrpSpPr/>
-        <p:nvPr/>
-      </p:nvGrpSpPr>
-      <p:grpSpPr>
-        <a:xfrm>
-          <a:off x="0" y="0"/>
-          <a:ext cx="0" cy="0"/>
-          <a:chOff x="0" y="0"/>
-          <a:chExt cx="0" cy="0"/>
-        </a:xfrm>
-      </p:grpSpPr>
-      <p:sp>
-        <p:nvSpPr>
-          <p:cNvPr id="2" name="Shape 0"/>
-          <p:cNvSpPr/>
-          <p:nvPr/>
-        </p:nvSpPr>
-        <p:spPr>
-          <a:xfrm>
-            <a:off x="548640" y="868680"/>
-            <a:ext cx="640080" cy="41148"/>
-          </a:xfrm>
-          <a:prstGeom prst="rect">
-            <a:avLst/>
-          </a:prstGeom>
-          <a:solidFill>
-            <a:srgbClr val="0D9488"/>
-          </a:solidFill>
-          <a:ln w="12700">
-            <a:solidFill>
-              <a:srgbClr val="0D9488"/>
-            </a:solidFill>
-            <a:prstDash val="solid"/>
-          </a:ln>
-        </p:spPr>
-        <p:txBody>
-          <a:bodyPr/>
-          <a:lstStyle/>
-          <a:p>
-            <a:endParaRPr lang="en-US"/>
-          </a:p>
-        </p:txBody>
-      </p:sp>
-      <p:sp>
-        <p:nvSpPr>
-          <p:cNvPr id="3" name="Text 1"/>
-          <p:cNvSpPr/>
-          <p:nvPr/>
-        </p:nvSpPr>
-        <p:spPr>
-          <a:xfrm>
-            <a:off x="548640" y="1051560"/>
-            <a:ext cx="7863840" cy="777240"/>
-          </a:xfrm>
-          <a:prstGeom prst="rect">
-            <a:avLst/>
-          </a:prstGeom>
-          <a:noFill/>
-          <a:ln/>
-        </p:spPr>
-        <p:txBody>
-          <a:bodyPr wrap="square" lIns="0" tIns="0" rIns="0" bIns="0" rtlCol="0" anchor="ctr"/>
-          <a:lstStyle/>
-          <a:p>
-            <a:pPr marL="0" indent="0">
-              <a:buNone/>
-            </a:pPr>
-            <a:r>
-              <a:rPr lang="en-US" sz="4400" b="1" dirty="0">
-                <a:solidFill>
-                  <a:srgbClr val="FFFFFF"/>
-                </a:solidFill>
-                <a:latin typeface="Calibri" pitchFamily="34" charset="0"/>
-                <a:ea typeface="Calibri" pitchFamily="34" charset="-122"/>
-                <a:cs typeface="Calibri" pitchFamily="34" charset="-120"/>
-              </a:rPr>
-              <a:t>Live demo</a:t>
-            </a:r>
-            <a:endParaRPr lang="en-US" sz="4400" dirty="0"/>
-          </a:p>
-        </p:txBody>
-      </p:sp>
-      <p:sp>
-        <p:nvSpPr>
-          <p:cNvPr id="4" name="Text 2"/>
-          <p:cNvSpPr/>
-          <p:nvPr/>
-        </p:nvSpPr>
-        <p:spPr>
-          <a:xfrm>
-            <a:off x="548640" y="1874520"/>
-            <a:ext cx="7863840" cy="365760"/>
-          </a:xfrm>
-          <a:prstGeom prst="rect">
-            <a:avLst/>
-          </a:prstGeom>
-          <a:noFill/>
-          <a:ln/>
-        </p:spPr>
-        <p:txBody>
-          <a:bodyPr wrap="square" lIns="0" tIns="0" rIns="0" bIns="0" rtlCol="0" anchor="ctr"/>
-          <a:lstStyle/>
-          <a:p>
-            <a:pPr marL="0" indent="0">
-              <a:buNone/>
-            </a:pPr>
-            <a:r>
-              <a:rPr lang="en-US" sz="1600" i="1" dirty="0">
-                <a:solidFill>
-                  <a:srgbClr val="DBEAFE"/>
-                </a:solidFill>
-                <a:latin typeface="Calibri" pitchFamily="34" charset="0"/>
-                <a:ea typeface="Calibri" pitchFamily="34" charset="-122"/>
-                <a:cs typeface="Calibri" pitchFamily="34" charset="-120"/>
-              </a:rPr>
-              <a:t>Cloning and analysing a microservice project in real time</a:t>
-            </a:r>
-            <a:endParaRPr lang="en-US" sz="1600" dirty="0"/>
-          </a:p>
-        </p:txBody>
-      </p:sp>
-      <p:sp>
-        <p:nvSpPr>
-          <p:cNvPr id="5" name="Text 3"/>
-          <p:cNvSpPr/>
-          <p:nvPr/>
-        </p:nvSpPr>
-        <p:spPr>
-          <a:xfrm>
-            <a:off x="548640" y="2560320"/>
-            <a:ext cx="365760" cy="292608"/>
-          </a:xfrm>
-          <a:prstGeom prst="rect">
-            <a:avLst/>
-          </a:prstGeom>
-          <a:noFill/>
-          <a:ln/>
-        </p:spPr>
-        <p:txBody>
-          <a:bodyPr wrap="square" lIns="0" tIns="0" rIns="0" bIns="0" rtlCol="0" anchor="ctr"/>
-          <a:lstStyle/>
-          <a:p>
-            <a:pPr marL="0" indent="0">
-              <a:buNone/>
-            </a:pPr>
-            <a:r>
-              <a:rPr lang="en-US" sz="1600" b="1" dirty="0">
-                <a:solidFill>
-                  <a:srgbClr val="0D9488"/>
-                </a:solidFill>
-                <a:latin typeface="Calibri" pitchFamily="34" charset="0"/>
-                <a:ea typeface="Calibri" pitchFamily="34" charset="-122"/>
-                <a:cs typeface="Calibri" pitchFamily="34" charset="-120"/>
-              </a:rPr>
-              <a:t>1</a:t>
-            </a:r>
-            <a:endParaRPr lang="en-US" sz="1600" dirty="0"/>
-          </a:p>
-        </p:txBody>
-      </p:sp>
-      <p:sp>
-        <p:nvSpPr>
-          <p:cNvPr id="6" name="Text 4"/>
-          <p:cNvSpPr/>
-          <p:nvPr/>
-        </p:nvSpPr>
-        <p:spPr>
-          <a:xfrm>
-            <a:off x="1051560" y="2569464"/>
-            <a:ext cx="7498080" cy="274320"/>
-          </a:xfrm>
-          <a:prstGeom prst="rect">
-            <a:avLst/>
-          </a:prstGeom>
-          <a:noFill/>
-          <a:ln/>
-        </p:spPr>
-        <p:txBody>
-          <a:bodyPr wrap="square" lIns="0" tIns="0" rIns="0" bIns="0" rtlCol="0" anchor="ctr"/>
-          <a:lstStyle/>
-          <a:p>
-            <a:pPr marL="0" indent="0">
-              <a:buNone/>
-            </a:pPr>
-            <a:r>
-              <a:rPr lang="en-US" sz="1400" b="1" dirty="0">
-                <a:solidFill>
-                  <a:srgbClr val="FFFFFF"/>
-                </a:solidFill>
-                <a:latin typeface="Calibri" pitchFamily="34" charset="0"/>
-                <a:ea typeface="Calibri" pitchFamily="34" charset="-122"/>
-                <a:cs typeface="Calibri" pitchFamily="34" charset="-120"/>
-              </a:rPr>
-              <a:t>Clone a small repo</a:t>
-            </a:r>
-            <a:endParaRPr lang="en-US" sz="1400" dirty="0"/>
-          </a:p>
-        </p:txBody>
-      </p:sp>
-      <p:sp>
-        <p:nvSpPr>
-          <p:cNvPr id="7" name="Text 5"/>
-          <p:cNvSpPr/>
-          <p:nvPr/>
-        </p:nvSpPr>
-        <p:spPr>
-          <a:xfrm>
-            <a:off x="1051560" y="2825496"/>
-            <a:ext cx="7498080" cy="237744"/>
-          </a:xfrm>
-          <a:prstGeom prst="rect">
-            <a:avLst/>
-          </a:prstGeom>
-          <a:noFill/>
-          <a:ln/>
-        </p:spPr>
-        <p:txBody>
-          <a:bodyPr wrap="square" lIns="0" tIns="0" rIns="0" bIns="0" rtlCol="0" anchor="ctr"/>
-          <a:lstStyle/>
-          <a:p>
-            <a:pPr marL="0" indent="0">
-              <a:buNone/>
-            </a:pPr>
-            <a:r>
-              <a:rPr lang="en-US" sz="1100" dirty="0">
-                <a:solidFill>
-                  <a:srgbClr val="DBEAFE"/>
-                </a:solidFill>
-                <a:latin typeface="Calibri" pitchFamily="34" charset="0"/>
-                <a:ea typeface="Calibri" pitchFamily="34" charset="-122"/>
-                <a:cs typeface="Calibri" pitchFamily="34" charset="-120"/>
-              </a:rPr>
-              <a:t>Paste a public Git URL, submit, watch the pipeline progress</a:t>
-            </a:r>
-            <a:endParaRPr lang="en-US" sz="1100" dirty="0"/>
-          </a:p>
-        </p:txBody>
-      </p:sp>
-      <p:sp>
-        <p:nvSpPr>
-          <p:cNvPr id="8" name="Text 6"/>
-          <p:cNvSpPr/>
-          <p:nvPr/>
-        </p:nvSpPr>
-        <p:spPr>
-          <a:xfrm>
-            <a:off x="548640" y="3108960"/>
-            <a:ext cx="365760" cy="292608"/>
-          </a:xfrm>
-          <a:prstGeom prst="rect">
-            <a:avLst/>
-          </a:prstGeom>
-          <a:noFill/>
-          <a:ln/>
-        </p:spPr>
-        <p:txBody>
-          <a:bodyPr wrap="square" lIns="0" tIns="0" rIns="0" bIns="0" rtlCol="0" anchor="ctr"/>
-          <a:lstStyle/>
-          <a:p>
-            <a:pPr marL="0" indent="0">
-              <a:buNone/>
-            </a:pPr>
-            <a:r>
-              <a:rPr lang="en-US" sz="1600" b="1" dirty="0">
-                <a:solidFill>
-                  <a:srgbClr val="0D9488"/>
-                </a:solidFill>
-                <a:latin typeface="Calibri" pitchFamily="34" charset="0"/>
-                <a:ea typeface="Calibri" pitchFamily="34" charset="-122"/>
-                <a:cs typeface="Calibri" pitchFamily="34" charset="-120"/>
-              </a:rPr>
-              <a:t>2</a:t>
-            </a:r>
-            <a:endParaRPr lang="en-US" sz="1600" dirty="0"/>
-          </a:p>
-        </p:txBody>
-      </p:sp>
-      <p:sp>
-        <p:nvSpPr>
-          <p:cNvPr id="9" name="Text 7"/>
-          <p:cNvSpPr/>
-          <p:nvPr/>
-        </p:nvSpPr>
-        <p:spPr>
-          <a:xfrm>
-            <a:off x="1051560" y="3118104"/>
-            <a:ext cx="7498080" cy="274320"/>
-          </a:xfrm>
-          <a:prstGeom prst="rect">
-            <a:avLst/>
-          </a:prstGeom>
-          <a:noFill/>
-          <a:ln/>
-        </p:spPr>
-        <p:txBody>
-          <a:bodyPr wrap="square" lIns="0" tIns="0" rIns="0" bIns="0" rtlCol="0" anchor="ctr"/>
-          <a:lstStyle/>
-          <a:p>
-            <a:pPr marL="0" indent="0">
-              <a:buNone/>
-            </a:pPr>
-            <a:r>
-              <a:rPr lang="en-US" sz="1400" b="1" dirty="0">
-                <a:solidFill>
-                  <a:srgbClr val="FFFFFF"/>
-                </a:solidFill>
-                <a:latin typeface="Calibri" pitchFamily="34" charset="0"/>
-                <a:ea typeface="Calibri" pitchFamily="34" charset="-122"/>
-                <a:cs typeface="Calibri" pitchFamily="34" charset="-120"/>
-              </a:rPr>
-              <a:t>Open the results dashboard</a:t>
-            </a:r>
-            <a:endParaRPr lang="en-US" sz="1400" dirty="0"/>
-          </a:p>
-        </p:txBody>
-      </p:sp>
-      <p:sp>
-        <p:nvSpPr>
-          <p:cNvPr id="10" name="Text 8"/>
-          <p:cNvSpPr/>
-          <p:nvPr/>
-        </p:nvSpPr>
-        <p:spPr>
-          <a:xfrm>
-            <a:off x="1051560" y="3374136"/>
-            <a:ext cx="7498080" cy="237744"/>
-          </a:xfrm>
-          <a:prstGeom prst="rect">
-            <a:avLst/>
-          </a:prstGeom>
-          <a:noFill/>
-          <a:ln/>
-        </p:spPr>
-        <p:txBody>
-          <a:bodyPr wrap="square" lIns="0" tIns="0" rIns="0" bIns="0" rtlCol="0" anchor="ctr"/>
-          <a:lstStyle/>
-          <a:p>
-            <a:pPr marL="0" indent="0">
-              <a:buNone/>
-            </a:pPr>
-            <a:r>
-              <a:rPr lang="en-US" sz="1100" dirty="0">
-                <a:solidFill>
-                  <a:srgbClr val="DBEAFE"/>
-                </a:solidFill>
-                <a:latin typeface="Calibri" pitchFamily="34" charset="0"/>
-                <a:ea typeface="Calibri" pitchFamily="34" charset="-122"/>
-                <a:cs typeface="Calibri" pitchFamily="34" charset="-120"/>
-              </a:rPr>
-              <a:t>Health score gauge, four-category breakdown, summary metrics</a:t>
-            </a:r>
-            <a:endParaRPr lang="en-US" sz="1100" dirty="0"/>
-          </a:p>
-        </p:txBody>
-      </p:sp>
-      <p:sp>
-        <p:nvSpPr>
-          <p:cNvPr id="11" name="Text 9"/>
-          <p:cNvSpPr/>
-          <p:nvPr/>
-        </p:nvSpPr>
-        <p:spPr>
-          <a:xfrm>
-            <a:off x="548640" y="3657600"/>
-            <a:ext cx="365760" cy="292608"/>
-          </a:xfrm>
-          <a:prstGeom prst="rect">
-            <a:avLst/>
-          </a:prstGeom>
-          <a:noFill/>
-          <a:ln/>
-        </p:spPr>
-        <p:txBody>
-          <a:bodyPr wrap="square" lIns="0" tIns="0" rIns="0" bIns="0" rtlCol="0" anchor="ctr"/>
-          <a:lstStyle/>
-          <a:p>
-            <a:pPr marL="0" indent="0">
-              <a:buNone/>
-            </a:pPr>
-            <a:r>
-              <a:rPr lang="en-US" sz="1600" b="1" dirty="0">
-                <a:solidFill>
-                  <a:srgbClr val="0D9488"/>
-                </a:solidFill>
-                <a:latin typeface="Calibri" pitchFamily="34" charset="0"/>
-                <a:ea typeface="Calibri" pitchFamily="34" charset="-122"/>
-                <a:cs typeface="Calibri" pitchFamily="34" charset="-120"/>
-              </a:rPr>
-              <a:t>3</a:t>
-            </a:r>
-            <a:endParaRPr lang="en-US" sz="1600" dirty="0"/>
-          </a:p>
-        </p:txBody>
-      </p:sp>
-      <p:sp>
-        <p:nvSpPr>
-          <p:cNvPr id="12" name="Text 10"/>
-          <p:cNvSpPr/>
-          <p:nvPr/>
-        </p:nvSpPr>
-        <p:spPr>
-          <a:xfrm>
-            <a:off x="1051560" y="3666744"/>
-            <a:ext cx="7498080" cy="274320"/>
-          </a:xfrm>
-          <a:prstGeom prst="rect">
-            <a:avLst/>
-          </a:prstGeom>
-          <a:noFill/>
-          <a:ln/>
-        </p:spPr>
-        <p:txBody>
-          <a:bodyPr wrap="square" lIns="0" tIns="0" rIns="0" bIns="0" rtlCol="0" anchor="ctr"/>
-          <a:lstStyle/>
-          <a:p>
-            <a:pPr marL="0" indent="0">
-              <a:buNone/>
-            </a:pPr>
-            <a:r>
-              <a:rPr lang="en-US" sz="1400" b="1" dirty="0">
-                <a:solidFill>
-                  <a:srgbClr val="FFFFFF"/>
-                </a:solidFill>
-                <a:latin typeface="Calibri" pitchFamily="34" charset="0"/>
-                <a:ea typeface="Calibri" pitchFamily="34" charset="-122"/>
-                <a:cs typeface="Calibri" pitchFamily="34" charset="-120"/>
-              </a:rPr>
-              <a:t>Drill into a finding</a:t>
-            </a:r>
-            <a:endParaRPr lang="en-US" sz="1400" dirty="0"/>
-          </a:p>
-        </p:txBody>
-      </p:sp>
-      <p:sp>
-        <p:nvSpPr>
-          <p:cNvPr id="13" name="Text 11"/>
-          <p:cNvSpPr/>
-          <p:nvPr/>
-        </p:nvSpPr>
-        <p:spPr>
-          <a:xfrm>
-            <a:off x="1051560" y="3922776"/>
-            <a:ext cx="7498080" cy="237744"/>
-          </a:xfrm>
-          <a:prstGeom prst="rect">
-            <a:avLst/>
-          </a:prstGeom>
-          <a:noFill/>
-          <a:ln/>
-        </p:spPr>
-        <p:txBody>
-          <a:bodyPr wrap="square" lIns="0" tIns="0" rIns="0" bIns="0" rtlCol="0" anchor="ctr"/>
-          <a:lstStyle/>
-          <a:p>
-            <a:pPr marL="0" indent="0">
-              <a:buNone/>
-            </a:pPr>
-            <a:r>
-              <a:rPr lang="en-US" sz="1100" dirty="0">
-                <a:solidFill>
-                  <a:srgbClr val="DBEAFE"/>
-                </a:solidFill>
-                <a:latin typeface="Calibri" pitchFamily="34" charset="0"/>
-                <a:ea typeface="Calibri" pitchFamily="34" charset="-122"/>
-                <a:cs typeface="Calibri" pitchFamily="34" charset="-120"/>
-              </a:rPr>
-              <a:t>Expand an anti-pattern card to see source-code evidence and remediation</a:t>
-            </a:r>
-            <a:endParaRPr lang="en-US" sz="1100" dirty="0"/>
-          </a:p>
-        </p:txBody>
-      </p:sp>
-      <p:sp>
-        <p:nvSpPr>
-          <p:cNvPr id="14" name="Text 12"/>
-          <p:cNvSpPr/>
-          <p:nvPr/>
-        </p:nvSpPr>
-        <p:spPr>
-          <a:xfrm>
-            <a:off x="548640" y="4206240"/>
-            <a:ext cx="365760" cy="292608"/>
-          </a:xfrm>
-          <a:prstGeom prst="rect">
-            <a:avLst/>
-          </a:prstGeom>
-          <a:noFill/>
-          <a:ln/>
-        </p:spPr>
-        <p:txBody>
-          <a:bodyPr wrap="square" lIns="0" tIns="0" rIns="0" bIns="0" rtlCol="0" anchor="ctr"/>
-          <a:lstStyle/>
-          <a:p>
-            <a:pPr marL="0" indent="0">
-              <a:buNone/>
-            </a:pPr>
-            <a:r>
-              <a:rPr lang="en-US" sz="1600" b="1" dirty="0">
-                <a:solidFill>
-                  <a:srgbClr val="0D9488"/>
-                </a:solidFill>
-                <a:latin typeface="Calibri" pitchFamily="34" charset="0"/>
-                <a:ea typeface="Calibri" pitchFamily="34" charset="-122"/>
-                <a:cs typeface="Calibri" pitchFamily="34" charset="-120"/>
-              </a:rPr>
-              <a:t>4</a:t>
-            </a:r>
-            <a:endParaRPr lang="en-US" sz="1600" dirty="0"/>
-          </a:p>
-        </p:txBody>
-      </p:sp>
-      <p:sp>
-        <p:nvSpPr>
-          <p:cNvPr id="15" name="Text 13"/>
-          <p:cNvSpPr/>
-          <p:nvPr/>
-        </p:nvSpPr>
-        <p:spPr>
-          <a:xfrm>
-            <a:off x="1051560" y="4215384"/>
-            <a:ext cx="7498080" cy="274320"/>
-          </a:xfrm>
-          <a:prstGeom prst="rect">
-            <a:avLst/>
-          </a:prstGeom>
-          <a:noFill/>
-          <a:ln/>
-        </p:spPr>
-        <p:txBody>
-          <a:bodyPr wrap="square" lIns="0" tIns="0" rIns="0" bIns="0" rtlCol="0" anchor="ctr"/>
-          <a:lstStyle/>
-          <a:p>
-            <a:pPr marL="0" indent="0">
-              <a:buNone/>
-            </a:pPr>
-            <a:r>
-              <a:rPr lang="en-US" sz="1400" b="1" dirty="0">
-                <a:solidFill>
-                  <a:srgbClr val="FFFFFF"/>
-                </a:solidFill>
-                <a:latin typeface="Calibri" pitchFamily="34" charset="0"/>
-                <a:ea typeface="Calibri" pitchFamily="34" charset="-122"/>
-                <a:cs typeface="Calibri" pitchFamily="34" charset="-120"/>
-              </a:rPr>
-              <a:t>Explore the dependency graph</a:t>
-            </a:r>
-            <a:endParaRPr lang="en-US" sz="1400" dirty="0"/>
-          </a:p>
-        </p:txBody>
-      </p:sp>
-      <p:sp>
-        <p:nvSpPr>
-          <p:cNvPr id="16" name="Text 14"/>
-          <p:cNvSpPr/>
-          <p:nvPr/>
-        </p:nvSpPr>
-        <p:spPr>
-          <a:xfrm>
-            <a:off x="1051560" y="4471416"/>
-            <a:ext cx="7498080" cy="237744"/>
-          </a:xfrm>
-          <a:prstGeom prst="rect">
-            <a:avLst/>
-          </a:prstGeom>
-          <a:noFill/>
-          <a:ln/>
-        </p:spPr>
-        <p:txBody>
-          <a:bodyPr wrap="square" lIns="0" tIns="0" rIns="0" bIns="0" rtlCol="0" anchor="ctr"/>
-          <a:lstStyle/>
-          <a:p>
-            <a:pPr marL="0" indent="0">
-              <a:buNone/>
-            </a:pPr>
-            <a:r>
-              <a:rPr lang="en-US" sz="1100" dirty="0">
-                <a:solidFill>
-                  <a:srgbClr val="DBEAFE"/>
-                </a:solidFill>
-                <a:latin typeface="Calibri" pitchFamily="34" charset="0"/>
-                <a:ea typeface="Calibri" pitchFamily="34" charset="-122"/>
-                <a:cs typeface="Calibri" pitchFamily="34" charset="-120"/>
-              </a:rPr>
-              <a:t>Interactive Cytoscape view of inter-service edges</a:t>
-            </a:r>
-            <a:endParaRPr lang="en-US" sz="1100" dirty="0"/>
-          </a:p>
-        </p:txBody>
-      </p:sp>
-      <p:sp>
-        <p:nvSpPr>
-          <p:cNvPr id="17" name="Text 15"/>
-          <p:cNvSpPr/>
-          <p:nvPr/>
-        </p:nvSpPr>
-        <p:spPr>
-          <a:xfrm>
-            <a:off x="7955280" y="4864608"/>
-            <a:ext cx="640080" cy="228600"/>
-          </a:xfrm>
-          <a:prstGeom prst="rect">
-            <a:avLst/>
-          </a:prstGeom>
-          <a:noFill/>
-          <a:ln/>
-        </p:spPr>
-        <p:txBody>
-          <a:bodyPr wrap="square" lIns="0" tIns="0" rIns="0" bIns="0" rtlCol="0" anchor="ctr"/>
-          <a:lstStyle/>
-          <a:p>
-            <a:pPr marL="0" indent="0" algn="r">
-              <a:buNone/>
-            </a:pPr>
-            <a:r>
-              <a:rPr lang="en-US" sz="900" dirty="0">
-                <a:solidFill>
-                  <a:srgbClr val="DBEAFE"/>
-                </a:solidFill>
-                <a:latin typeface="Calibri" pitchFamily="34" charset="0"/>
-                <a:ea typeface="Calibri" pitchFamily="34" charset="-122"/>
-                <a:cs typeface="Calibri" pitchFamily="34" charset="-120"/>
-              </a:rPr>
-              <a:t>10 / 12</a:t>
-            </a:r>
-            <a:endParaRPr lang="en-US" sz="900" dirty="0"/>
-          </a:p>
-        </p:txBody>
-      </p:sp>
-    </p:spTree>
-  </p:cSld>
-  <p:clrMapOvr>
-    <a:masterClrMapping/>
-  </p:clrMapOvr>
-</p:sld>
-</file>
-
-<file path=ppt/slides/slide11.xml><?xml version="1.0" encoding="utf-8"?>
-<p:sld xmlns:a="http://schemas.openxmlformats.org/drawingml/2006/main" xmlns:r="http://schemas.openxmlformats.org/officeDocument/2006/relationships" xmlns:p="http://schemas.openxmlformats.org/presentationml/2006/main">
   <p:cSld name="Slide 11">
     <p:bg>
       <p:bgPr>
@@ -3712,7 +3337,7 @@
 </p:sld>
 </file>
 
-<file path=ppt/slides/slide12.xml><?xml version="1.0" encoding="utf-8"?>
+<file path=ppt/slides/slide11.xml><?xml version="1.0" encoding="utf-8"?>
 <p:sld xmlns:a="http://schemas.openxmlformats.org/drawingml/2006/main" xmlns:r="http://schemas.openxmlformats.org/officeDocument/2006/relationships" xmlns:p="http://schemas.openxmlformats.org/presentationml/2006/main">
   <p:cSld name="Slide 12">
     <p:bg>
@@ -3802,7 +3427,7 @@
                 <a:ea typeface="Calibri" pitchFamily="34" charset="-122"/>
                 <a:cs typeface="Calibri" pitchFamily="34" charset="-120"/>
               </a:rPr>
-              <a:t>Thank you</a:t>
+              <a:t>Conclusions</a:t>
             </a:r>
             <a:endParaRPr lang="en-US" sz="4400" dirty="0"/>
           </a:p>
@@ -3878,7 +3503,7 @@
             <a:r>
               <a:rPr lang="en-US" sz="1250" dirty="0">
                 <a:solidFill>
-                  <a:srgbClr val="FFFFFF"/>
+                  <a:schemeClr val="bg1"/>
                 </a:solidFill>
                 <a:latin typeface="Calibri" pitchFamily="34" charset="0"/>
                 <a:ea typeface="Calibri" pitchFamily="34" charset="-122"/>
@@ -3886,7 +3511,11 @@
               </a:rPr>
               <a:t>Multi-level static analysis combining code smells and architectural metrics</a:t>
             </a:r>
-            <a:endParaRPr lang="en-US" sz="1250" dirty="0"/>
+            <a:endParaRPr lang="en-US" sz="1250" dirty="0">
+              <a:solidFill>
+                <a:schemeClr val="bg1"/>
+              </a:solidFill>
+            </a:endParaRPr>
           </a:p>
           <a:p>
             <a:pPr marL="342900" indent="-342900">
@@ -3899,7 +3528,7 @@
             <a:r>
               <a:rPr lang="en-US" sz="1250" dirty="0">
                 <a:solidFill>
-                  <a:srgbClr val="FFFFFF"/>
+                  <a:schemeClr val="bg1"/>
                 </a:solidFill>
                 <a:latin typeface="Calibri" pitchFamily="34" charset="0"/>
                 <a:ea typeface="Calibri" pitchFamily="34" charset="-122"/>
@@ -3907,7 +3536,11 @@
               </a:rPr>
               <a:t>Ten anti-patterns, configurable thresholds, evidence-based reporting</a:t>
             </a:r>
-            <a:endParaRPr lang="en-US" sz="1250" dirty="0"/>
+            <a:endParaRPr lang="en-US" sz="1250" dirty="0">
+              <a:solidFill>
+                <a:schemeClr val="bg1"/>
+              </a:solidFill>
+            </a:endParaRPr>
           </a:p>
           <a:p>
             <a:pPr marL="342900" indent="-342900">
@@ -3920,7 +3553,7 @@
             <a:r>
               <a:rPr lang="en-US" sz="1250" dirty="0">
                 <a:solidFill>
-                  <a:srgbClr val="FFFFFF"/>
+                  <a:schemeClr val="bg1"/>
                 </a:solidFill>
                 <a:latin typeface="Calibri" pitchFamily="34" charset="0"/>
                 <a:ea typeface="Calibri" pitchFamily="34" charset="-122"/>
@@ -3928,7 +3561,39 @@
               </a:rPr>
               <a:t>Composite health score with four-category decomposition and analysis diff</a:t>
             </a:r>
-            <a:endParaRPr lang="en-US" sz="1250" dirty="0"/>
+          </a:p>
+          <a:p>
+            <a:pPr marL="342900" indent="-342900">
+              <a:spcAft>
+                <a:spcPts val="400"/>
+              </a:spcAft>
+              <a:buSzPct val="100000"/>
+              <a:buChar char="•"/>
+            </a:pPr>
+            <a:r>
+              <a:rPr lang="en-US" sz="1250" dirty="0">
+                <a:solidFill>
+                  <a:schemeClr val="bg1"/>
+                </a:solidFill>
+              </a:rPr>
+              <a:t>Evaluated the tool on 11 open-source systems, covering 130 services and </a:t>
+            </a:r>
+            <a:r>
+              <a:rPr lang="en-US" sz="1250" dirty="0" err="1">
+                <a:solidFill>
+                  <a:schemeClr val="bg1"/>
+                </a:solidFill>
+              </a:rPr>
+              <a:t>cca</a:t>
+            </a:r>
+            <a:r>
+              <a:rPr lang="en-US" sz="1250" dirty="0">
+                <a:solidFill>
+                  <a:schemeClr val="bg1"/>
+                </a:solidFill>
+              </a:rPr>
+              <a:t>. 274k LOC</a:t>
+            </a:r>
           </a:p>
         </p:txBody>
       </p:sp>
@@ -3968,6 +3633,5099 @@
               <a:t>Iacob Andrei  ·  Supervisor: Prof. Dr. Simona Motogna  ·  UBB FMI</a:t>
             </a:r>
             <a:endParaRPr lang="en-US" sz="1050" dirty="0"/>
+          </a:p>
+        </p:txBody>
+      </p:sp>
+    </p:spTree>
+  </p:cSld>
+  <p:clrMapOvr>
+    <a:masterClrMapping/>
+  </p:clrMapOvr>
+</p:sld>
+</file>
+
+<file path=ppt/slides/slide12.xml><?xml version="1.0" encoding="utf-8"?>
+<p:sld xmlns:a="http://schemas.openxmlformats.org/drawingml/2006/main" xmlns:r="http://schemas.openxmlformats.org/officeDocument/2006/relationships" xmlns:p="http://schemas.openxmlformats.org/presentationml/2006/main">
+  <p:cSld>
+    <p:spTree>
+      <p:nvGrpSpPr>
+        <p:cNvPr id="1" name=""/>
+        <p:cNvGrpSpPr/>
+        <p:nvPr/>
+      </p:nvGrpSpPr>
+      <p:grpSpPr>
+        <a:xfrm>
+          <a:off x="0" y="0"/>
+          <a:ext cx="0" cy="0"/>
+          <a:chOff x="0" y="0"/>
+          <a:chExt cx="0" cy="0"/>
+        </a:xfrm>
+      </p:grpSpPr>
+      <p:sp>
+        <p:nvSpPr>
+          <p:cNvPr id="2" name="Text 0"/>
+          <p:cNvSpPr/>
+          <p:nvPr/>
+        </p:nvSpPr>
+        <p:spPr>
+          <a:xfrm>
+            <a:off x="548640" y="256032"/>
+            <a:ext cx="8046720" cy="502920"/>
+          </a:xfrm>
+          <a:prstGeom prst="rect">
+            <a:avLst/>
+          </a:prstGeom>
+          <a:noFill/>
+          <a:ln/>
+        </p:spPr>
+        <p:txBody>
+          <a:bodyPr wrap="square" lIns="0" tIns="0" rIns="0" bIns="0" rtlCol="0" anchor="ctr"/>
+          <a:lstStyle/>
+          <a:p>
+            <a:pPr marL="0" indent="0">
+              <a:buNone/>
+            </a:pPr>
+            <a:r>
+              <a:rPr lang="en-US" sz="2500" b="1" dirty="0">
+                <a:solidFill>
+                  <a:srgbClr val="0F2A44"/>
+                </a:solidFill>
+                <a:latin typeface="Calibri" pitchFamily="34" charset="0"/>
+                <a:ea typeface="Calibri" pitchFamily="34" charset="-122"/>
+                <a:cs typeface="Calibri" pitchFamily="34" charset="-120"/>
+              </a:rPr>
+              <a:t>Bibliography</a:t>
+            </a:r>
+            <a:endParaRPr lang="en-US" sz="2500" dirty="0"/>
+          </a:p>
+        </p:txBody>
+      </p:sp>
+      <p:sp>
+        <p:nvSpPr>
+          <p:cNvPr id="3" name="Shape 1"/>
+          <p:cNvSpPr/>
+          <p:nvPr/>
+        </p:nvSpPr>
+        <p:spPr>
+          <a:xfrm>
+            <a:off x="548640" y="841248"/>
+            <a:ext cx="8046720" cy="13716"/>
+          </a:xfrm>
+          <a:prstGeom prst="rect">
+            <a:avLst/>
+          </a:prstGeom>
+          <a:solidFill>
+            <a:srgbClr val="D8DEE6"/>
+          </a:solidFill>
+          <a:ln w="12700">
+            <a:solidFill>
+              <a:srgbClr val="D8DEE6"/>
+            </a:solidFill>
+            <a:prstDash val="solid"/>
+          </a:ln>
+        </p:spPr>
+      </p:sp>
+      <p:sp>
+        <p:nvSpPr>
+          <p:cNvPr id="4" name="Text 2"/>
+          <p:cNvSpPr/>
+          <p:nvPr/>
+        </p:nvSpPr>
+        <p:spPr>
+          <a:xfrm>
+            <a:off x="548640" y="1051560"/>
+            <a:ext cx="3794760" cy="219456"/>
+          </a:xfrm>
+          <a:prstGeom prst="rect">
+            <a:avLst/>
+          </a:prstGeom>
+          <a:noFill/>
+          <a:ln/>
+        </p:spPr>
+        <p:txBody>
+          <a:bodyPr wrap="square" lIns="0" tIns="0" rIns="0" bIns="0" rtlCol="0" anchor="ctr"/>
+          <a:lstStyle/>
+          <a:p>
+            <a:pPr marL="0" indent="0">
+              <a:buNone/>
+            </a:pPr>
+            <a:r>
+              <a:rPr lang="en-US" sz="1050" b="1" dirty="0">
+                <a:solidFill>
+                  <a:srgbClr val="0F2A44"/>
+                </a:solidFill>
+                <a:latin typeface="Calibri" pitchFamily="34" charset="0"/>
+                <a:ea typeface="Calibri" pitchFamily="34" charset="-122"/>
+                <a:cs typeface="Calibri" pitchFamily="34" charset="-120"/>
+              </a:rPr>
+              <a:t>Lewis &amp; Fowler (2014)</a:t>
+            </a:r>
+            <a:endParaRPr lang="en-US" sz="1050" dirty="0"/>
+          </a:p>
+        </p:txBody>
+      </p:sp>
+      <p:sp>
+        <p:nvSpPr>
+          <p:cNvPr id="5" name="Text 3"/>
+          <p:cNvSpPr/>
+          <p:nvPr/>
+        </p:nvSpPr>
+        <p:spPr>
+          <a:xfrm>
+            <a:off x="548640" y="1298448"/>
+            <a:ext cx="3794760" cy="329184"/>
+          </a:xfrm>
+          <a:prstGeom prst="rect">
+            <a:avLst/>
+          </a:prstGeom>
+          <a:noFill/>
+          <a:ln/>
+        </p:spPr>
+        <p:txBody>
+          <a:bodyPr wrap="square" lIns="0" tIns="0" rIns="0" bIns="0" rtlCol="0" anchor="ctr">
+            <a:normAutofit/>
+          </a:bodyPr>
+          <a:lstStyle/>
+          <a:p>
+            <a:pPr marL="0" indent="0">
+              <a:buNone/>
+            </a:pPr>
+            <a:r>
+              <a:rPr lang="en-US" sz="920" dirty="0">
+                <a:solidFill>
+                  <a:srgbClr val="1E293B"/>
+                </a:solidFill>
+                <a:latin typeface="Calibri" pitchFamily="34" charset="0"/>
+                <a:ea typeface="Calibri" pitchFamily="34" charset="-122"/>
+                <a:cs typeface="Calibri" pitchFamily="34" charset="-120"/>
+              </a:rPr>
+              <a:t>Microservices: a definition of this new architectural term</a:t>
+            </a:r>
+            <a:endParaRPr lang="en-US" sz="920" dirty="0"/>
+          </a:p>
+        </p:txBody>
+      </p:sp>
+      <p:sp>
+        <p:nvSpPr>
+          <p:cNvPr id="6" name="Shape 4"/>
+          <p:cNvSpPr/>
+          <p:nvPr/>
+        </p:nvSpPr>
+        <p:spPr>
+          <a:xfrm>
+            <a:off x="548640" y="1664208"/>
+            <a:ext cx="3794760" cy="9144"/>
+          </a:xfrm>
+          <a:prstGeom prst="rect">
+            <a:avLst/>
+          </a:prstGeom>
+          <a:solidFill>
+            <a:srgbClr val="D8DEE6"/>
+          </a:solidFill>
+          <a:ln w="12700">
+            <a:solidFill>
+              <a:srgbClr val="D8DEE6"/>
+            </a:solidFill>
+            <a:prstDash val="solid"/>
+          </a:ln>
+        </p:spPr>
+      </p:sp>
+      <p:sp>
+        <p:nvSpPr>
+          <p:cNvPr id="7" name="Text 5"/>
+          <p:cNvSpPr/>
+          <p:nvPr/>
+        </p:nvSpPr>
+        <p:spPr>
+          <a:xfrm>
+            <a:off x="548640" y="1764792"/>
+            <a:ext cx="3794760" cy="219456"/>
+          </a:xfrm>
+          <a:prstGeom prst="rect">
+            <a:avLst/>
+          </a:prstGeom>
+          <a:noFill/>
+          <a:ln/>
+        </p:spPr>
+        <p:txBody>
+          <a:bodyPr wrap="square" lIns="0" tIns="0" rIns="0" bIns="0" rtlCol="0" anchor="ctr"/>
+          <a:lstStyle/>
+          <a:p>
+            <a:pPr marL="0" indent="0">
+              <a:buNone/>
+            </a:pPr>
+            <a:r>
+              <a:rPr lang="en-US" sz="1050" b="1" dirty="0">
+                <a:solidFill>
+                  <a:srgbClr val="0F2A44"/>
+                </a:solidFill>
+                <a:latin typeface="Calibri" pitchFamily="34" charset="0"/>
+                <a:ea typeface="Calibri" pitchFamily="34" charset="-122"/>
+                <a:cs typeface="Calibri" pitchFamily="34" charset="-120"/>
+              </a:rPr>
+              <a:t>Newman (2015)</a:t>
+            </a:r>
+            <a:endParaRPr lang="en-US" sz="1050" dirty="0"/>
+          </a:p>
+        </p:txBody>
+      </p:sp>
+      <p:sp>
+        <p:nvSpPr>
+          <p:cNvPr id="8" name="Text 6"/>
+          <p:cNvSpPr/>
+          <p:nvPr/>
+        </p:nvSpPr>
+        <p:spPr>
+          <a:xfrm>
+            <a:off x="548640" y="2011680"/>
+            <a:ext cx="3794760" cy="329184"/>
+          </a:xfrm>
+          <a:prstGeom prst="rect">
+            <a:avLst/>
+          </a:prstGeom>
+          <a:noFill/>
+          <a:ln/>
+        </p:spPr>
+        <p:txBody>
+          <a:bodyPr wrap="square" lIns="0" tIns="0" rIns="0" bIns="0" rtlCol="0" anchor="ctr">
+            <a:normAutofit/>
+          </a:bodyPr>
+          <a:lstStyle/>
+          <a:p>
+            <a:pPr marL="0" indent="0">
+              <a:buNone/>
+            </a:pPr>
+            <a:r>
+              <a:rPr lang="en-US" sz="920" dirty="0">
+                <a:solidFill>
+                  <a:srgbClr val="1E293B"/>
+                </a:solidFill>
+                <a:latin typeface="Calibri" pitchFamily="34" charset="0"/>
+                <a:ea typeface="Calibri" pitchFamily="34" charset="-122"/>
+                <a:cs typeface="Calibri" pitchFamily="34" charset="-120"/>
+              </a:rPr>
+              <a:t>Building Microservices: Designing Fine-Grained Systems</a:t>
+            </a:r>
+            <a:endParaRPr lang="en-US" sz="920" dirty="0"/>
+          </a:p>
+        </p:txBody>
+      </p:sp>
+      <p:sp>
+        <p:nvSpPr>
+          <p:cNvPr id="9" name="Shape 7"/>
+          <p:cNvSpPr/>
+          <p:nvPr/>
+        </p:nvSpPr>
+        <p:spPr>
+          <a:xfrm>
+            <a:off x="548640" y="2377440"/>
+            <a:ext cx="3794760" cy="9144"/>
+          </a:xfrm>
+          <a:prstGeom prst="rect">
+            <a:avLst/>
+          </a:prstGeom>
+          <a:solidFill>
+            <a:srgbClr val="D8DEE6"/>
+          </a:solidFill>
+          <a:ln w="12700">
+            <a:solidFill>
+              <a:srgbClr val="D8DEE6"/>
+            </a:solidFill>
+            <a:prstDash val="solid"/>
+          </a:ln>
+        </p:spPr>
+      </p:sp>
+      <p:sp>
+        <p:nvSpPr>
+          <p:cNvPr id="10" name="Text 8"/>
+          <p:cNvSpPr/>
+          <p:nvPr/>
+        </p:nvSpPr>
+        <p:spPr>
+          <a:xfrm>
+            <a:off x="548640" y="2478024"/>
+            <a:ext cx="3794760" cy="219456"/>
+          </a:xfrm>
+          <a:prstGeom prst="rect">
+            <a:avLst/>
+          </a:prstGeom>
+          <a:noFill/>
+          <a:ln/>
+        </p:spPr>
+        <p:txBody>
+          <a:bodyPr wrap="square" lIns="0" tIns="0" rIns="0" bIns="0" rtlCol="0" anchor="ctr"/>
+          <a:lstStyle/>
+          <a:p>
+            <a:pPr marL="0" indent="0">
+              <a:buNone/>
+            </a:pPr>
+            <a:r>
+              <a:rPr lang="en-US" sz="1050" b="1" dirty="0">
+                <a:solidFill>
+                  <a:srgbClr val="0F2A44"/>
+                </a:solidFill>
+                <a:latin typeface="Calibri" pitchFamily="34" charset="0"/>
+                <a:ea typeface="Calibri" pitchFamily="34" charset="-122"/>
+                <a:cs typeface="Calibri" pitchFamily="34" charset="-120"/>
+              </a:rPr>
+              <a:t>Richardson (2018)</a:t>
+            </a:r>
+            <a:endParaRPr lang="en-US" sz="1050" dirty="0"/>
+          </a:p>
+        </p:txBody>
+      </p:sp>
+      <p:sp>
+        <p:nvSpPr>
+          <p:cNvPr id="11" name="Text 9"/>
+          <p:cNvSpPr/>
+          <p:nvPr/>
+        </p:nvSpPr>
+        <p:spPr>
+          <a:xfrm>
+            <a:off x="548640" y="2724912"/>
+            <a:ext cx="3794760" cy="329184"/>
+          </a:xfrm>
+          <a:prstGeom prst="rect">
+            <a:avLst/>
+          </a:prstGeom>
+          <a:noFill/>
+          <a:ln/>
+        </p:spPr>
+        <p:txBody>
+          <a:bodyPr wrap="square" lIns="0" tIns="0" rIns="0" bIns="0" rtlCol="0" anchor="ctr">
+            <a:normAutofit/>
+          </a:bodyPr>
+          <a:lstStyle/>
+          <a:p>
+            <a:pPr marL="0" indent="0">
+              <a:buNone/>
+            </a:pPr>
+            <a:r>
+              <a:rPr lang="en-US" sz="920" dirty="0">
+                <a:solidFill>
+                  <a:srgbClr val="1E293B"/>
+                </a:solidFill>
+                <a:latin typeface="Calibri" pitchFamily="34" charset="0"/>
+                <a:ea typeface="Calibri" pitchFamily="34" charset="-122"/>
+                <a:cs typeface="Calibri" pitchFamily="34" charset="-120"/>
+              </a:rPr>
+              <a:t>Microservices Patterns: With Examples in Java</a:t>
+            </a:r>
+            <a:endParaRPr lang="en-US" sz="920" dirty="0"/>
+          </a:p>
+        </p:txBody>
+      </p:sp>
+      <p:sp>
+        <p:nvSpPr>
+          <p:cNvPr id="12" name="Shape 10"/>
+          <p:cNvSpPr/>
+          <p:nvPr/>
+        </p:nvSpPr>
+        <p:spPr>
+          <a:xfrm>
+            <a:off x="548640" y="3090672"/>
+            <a:ext cx="3794760" cy="9144"/>
+          </a:xfrm>
+          <a:prstGeom prst="rect">
+            <a:avLst/>
+          </a:prstGeom>
+          <a:solidFill>
+            <a:srgbClr val="D8DEE6"/>
+          </a:solidFill>
+          <a:ln w="12700">
+            <a:solidFill>
+              <a:srgbClr val="D8DEE6"/>
+            </a:solidFill>
+            <a:prstDash val="solid"/>
+          </a:ln>
+        </p:spPr>
+      </p:sp>
+      <p:sp>
+        <p:nvSpPr>
+          <p:cNvPr id="13" name="Text 11"/>
+          <p:cNvSpPr/>
+          <p:nvPr/>
+        </p:nvSpPr>
+        <p:spPr>
+          <a:xfrm>
+            <a:off x="548640" y="3191256"/>
+            <a:ext cx="3794760" cy="219456"/>
+          </a:xfrm>
+          <a:prstGeom prst="rect">
+            <a:avLst/>
+          </a:prstGeom>
+          <a:noFill/>
+          <a:ln/>
+        </p:spPr>
+        <p:txBody>
+          <a:bodyPr wrap="square" lIns="0" tIns="0" rIns="0" bIns="0" rtlCol="0" anchor="ctr"/>
+          <a:lstStyle/>
+          <a:p>
+            <a:pPr marL="0" indent="0">
+              <a:buNone/>
+            </a:pPr>
+            <a:r>
+              <a:rPr lang="en-US" sz="1050" b="1" dirty="0">
+                <a:solidFill>
+                  <a:srgbClr val="0F2A44"/>
+                </a:solidFill>
+                <a:latin typeface="Calibri" pitchFamily="34" charset="0"/>
+                <a:ea typeface="Calibri" pitchFamily="34" charset="-122"/>
+                <a:cs typeface="Calibri" pitchFamily="34" charset="-120"/>
+              </a:rPr>
+              <a:t>Taibi &amp; Lenarduzzi (2018)</a:t>
+            </a:r>
+            <a:endParaRPr lang="en-US" sz="1050" dirty="0"/>
+          </a:p>
+        </p:txBody>
+      </p:sp>
+      <p:sp>
+        <p:nvSpPr>
+          <p:cNvPr id="14" name="Text 12"/>
+          <p:cNvSpPr/>
+          <p:nvPr/>
+        </p:nvSpPr>
+        <p:spPr>
+          <a:xfrm>
+            <a:off x="548640" y="3438144"/>
+            <a:ext cx="3794760" cy="329184"/>
+          </a:xfrm>
+          <a:prstGeom prst="rect">
+            <a:avLst/>
+          </a:prstGeom>
+          <a:noFill/>
+          <a:ln/>
+        </p:spPr>
+        <p:txBody>
+          <a:bodyPr wrap="square" lIns="0" tIns="0" rIns="0" bIns="0" rtlCol="0" anchor="ctr">
+            <a:normAutofit/>
+          </a:bodyPr>
+          <a:lstStyle/>
+          <a:p>
+            <a:pPr marL="0" indent="0">
+              <a:buNone/>
+            </a:pPr>
+            <a:r>
+              <a:rPr lang="en-US" sz="920" dirty="0">
+                <a:solidFill>
+                  <a:srgbClr val="1E293B"/>
+                </a:solidFill>
+                <a:latin typeface="Calibri" pitchFamily="34" charset="0"/>
+                <a:ea typeface="Calibri" pitchFamily="34" charset="-122"/>
+                <a:cs typeface="Calibri" pitchFamily="34" charset="-120"/>
+              </a:rPr>
+              <a:t>On the Definition of Microservice Bad Smells</a:t>
+            </a:r>
+            <a:endParaRPr lang="en-US" sz="920" dirty="0"/>
+          </a:p>
+        </p:txBody>
+      </p:sp>
+      <p:sp>
+        <p:nvSpPr>
+          <p:cNvPr id="15" name="Shape 13"/>
+          <p:cNvSpPr/>
+          <p:nvPr/>
+        </p:nvSpPr>
+        <p:spPr>
+          <a:xfrm>
+            <a:off x="548640" y="3803904"/>
+            <a:ext cx="3794760" cy="9144"/>
+          </a:xfrm>
+          <a:prstGeom prst="rect">
+            <a:avLst/>
+          </a:prstGeom>
+          <a:solidFill>
+            <a:srgbClr val="D8DEE6"/>
+          </a:solidFill>
+          <a:ln w="12700">
+            <a:solidFill>
+              <a:srgbClr val="D8DEE6"/>
+            </a:solidFill>
+            <a:prstDash val="solid"/>
+          </a:ln>
+        </p:spPr>
+      </p:sp>
+      <p:sp>
+        <p:nvSpPr>
+          <p:cNvPr id="16" name="Text 14"/>
+          <p:cNvSpPr/>
+          <p:nvPr/>
+        </p:nvSpPr>
+        <p:spPr>
+          <a:xfrm>
+            <a:off x="548640" y="3904488"/>
+            <a:ext cx="3794760" cy="219456"/>
+          </a:xfrm>
+          <a:prstGeom prst="rect">
+            <a:avLst/>
+          </a:prstGeom>
+          <a:noFill/>
+          <a:ln/>
+        </p:spPr>
+        <p:txBody>
+          <a:bodyPr wrap="square" lIns="0" tIns="0" rIns="0" bIns="0" rtlCol="0" anchor="ctr"/>
+          <a:lstStyle/>
+          <a:p>
+            <a:pPr marL="0" indent="0">
+              <a:buNone/>
+            </a:pPr>
+            <a:r>
+              <a:rPr lang="en-US" sz="1050" b="1" dirty="0">
+                <a:solidFill>
+                  <a:srgbClr val="0F2A44"/>
+                </a:solidFill>
+                <a:latin typeface="Calibri" pitchFamily="34" charset="0"/>
+                <a:ea typeface="Calibri" pitchFamily="34" charset="-122"/>
+                <a:cs typeface="Calibri" pitchFamily="34" charset="-120"/>
+              </a:rPr>
+              <a:t>Soldani, Tamburri &amp; Van Den Heuvel (2018)</a:t>
+            </a:r>
+            <a:endParaRPr lang="en-US" sz="1050" dirty="0"/>
+          </a:p>
+        </p:txBody>
+      </p:sp>
+      <p:sp>
+        <p:nvSpPr>
+          <p:cNvPr id="17" name="Text 15"/>
+          <p:cNvSpPr/>
+          <p:nvPr/>
+        </p:nvSpPr>
+        <p:spPr>
+          <a:xfrm>
+            <a:off x="548640" y="4151376"/>
+            <a:ext cx="3794760" cy="329184"/>
+          </a:xfrm>
+          <a:prstGeom prst="rect">
+            <a:avLst/>
+          </a:prstGeom>
+          <a:noFill/>
+          <a:ln/>
+        </p:spPr>
+        <p:txBody>
+          <a:bodyPr wrap="square" lIns="0" tIns="0" rIns="0" bIns="0" rtlCol="0" anchor="ctr">
+            <a:normAutofit/>
+          </a:bodyPr>
+          <a:lstStyle/>
+          <a:p>
+            <a:pPr marL="0" indent="0">
+              <a:buNone/>
+            </a:pPr>
+            <a:r>
+              <a:rPr lang="en-US" sz="920" dirty="0">
+                <a:solidFill>
+                  <a:srgbClr val="1E293B"/>
+                </a:solidFill>
+                <a:latin typeface="Calibri" pitchFamily="34" charset="0"/>
+                <a:ea typeface="Calibri" pitchFamily="34" charset="-122"/>
+                <a:cs typeface="Calibri" pitchFamily="34" charset="-120"/>
+              </a:rPr>
+              <a:t>The Pains and Gains of Microservices</a:t>
+            </a:r>
+            <a:endParaRPr lang="en-US" sz="920" dirty="0"/>
+          </a:p>
+        </p:txBody>
+      </p:sp>
+      <p:sp>
+        <p:nvSpPr>
+          <p:cNvPr id="18" name="Text 16"/>
+          <p:cNvSpPr/>
+          <p:nvPr/>
+        </p:nvSpPr>
+        <p:spPr>
+          <a:xfrm>
+            <a:off x="4617720" y="1051560"/>
+            <a:ext cx="3977640" cy="219456"/>
+          </a:xfrm>
+          <a:prstGeom prst="rect">
+            <a:avLst/>
+          </a:prstGeom>
+          <a:noFill/>
+          <a:ln/>
+        </p:spPr>
+        <p:txBody>
+          <a:bodyPr wrap="square" lIns="0" tIns="0" rIns="0" bIns="0" rtlCol="0" anchor="ctr"/>
+          <a:lstStyle/>
+          <a:p>
+            <a:pPr marL="0" indent="0">
+              <a:buNone/>
+            </a:pPr>
+            <a:r>
+              <a:rPr lang="en-US" sz="1050" b="1" dirty="0">
+                <a:solidFill>
+                  <a:srgbClr val="0F2A44"/>
+                </a:solidFill>
+                <a:latin typeface="Calibri" pitchFamily="34" charset="0"/>
+                <a:ea typeface="Calibri" pitchFamily="34" charset="-122"/>
+                <a:cs typeface="Calibri" pitchFamily="34" charset="-120"/>
+              </a:rPr>
+              <a:t>Neri et al. (2020)</a:t>
+            </a:r>
+            <a:endParaRPr lang="en-US" sz="1050" dirty="0"/>
+          </a:p>
+        </p:txBody>
+      </p:sp>
+      <p:sp>
+        <p:nvSpPr>
+          <p:cNvPr id="19" name="Text 17"/>
+          <p:cNvSpPr/>
+          <p:nvPr/>
+        </p:nvSpPr>
+        <p:spPr>
+          <a:xfrm>
+            <a:off x="4617720" y="1298448"/>
+            <a:ext cx="3977640" cy="329184"/>
+          </a:xfrm>
+          <a:prstGeom prst="rect">
+            <a:avLst/>
+          </a:prstGeom>
+          <a:noFill/>
+          <a:ln/>
+        </p:spPr>
+        <p:txBody>
+          <a:bodyPr wrap="square" lIns="0" tIns="0" rIns="0" bIns="0" rtlCol="0" anchor="ctr">
+            <a:normAutofit/>
+          </a:bodyPr>
+          <a:lstStyle/>
+          <a:p>
+            <a:pPr marL="0" indent="0">
+              <a:buNone/>
+            </a:pPr>
+            <a:r>
+              <a:rPr lang="en-US" sz="920" dirty="0">
+                <a:solidFill>
+                  <a:srgbClr val="1E293B"/>
+                </a:solidFill>
+                <a:latin typeface="Calibri" pitchFamily="34" charset="0"/>
+                <a:ea typeface="Calibri" pitchFamily="34" charset="-122"/>
+                <a:cs typeface="Calibri" pitchFamily="34" charset="-120"/>
+              </a:rPr>
+              <a:t>Design Principles, Architectural Smells and Refactorings for Microservices</a:t>
+            </a:r>
+            <a:endParaRPr lang="en-US" sz="920" dirty="0"/>
+          </a:p>
+        </p:txBody>
+      </p:sp>
+      <p:sp>
+        <p:nvSpPr>
+          <p:cNvPr id="20" name="Shape 18"/>
+          <p:cNvSpPr/>
+          <p:nvPr/>
+        </p:nvSpPr>
+        <p:spPr>
+          <a:xfrm>
+            <a:off x="4617720" y="1664208"/>
+            <a:ext cx="3977640" cy="9144"/>
+          </a:xfrm>
+          <a:prstGeom prst="rect">
+            <a:avLst/>
+          </a:prstGeom>
+          <a:solidFill>
+            <a:srgbClr val="D8DEE6"/>
+          </a:solidFill>
+          <a:ln w="12700">
+            <a:solidFill>
+              <a:srgbClr val="D8DEE6"/>
+            </a:solidFill>
+            <a:prstDash val="solid"/>
+          </a:ln>
+        </p:spPr>
+      </p:sp>
+      <p:sp>
+        <p:nvSpPr>
+          <p:cNvPr id="21" name="Text 19"/>
+          <p:cNvSpPr/>
+          <p:nvPr/>
+        </p:nvSpPr>
+        <p:spPr>
+          <a:xfrm>
+            <a:off x="4617720" y="1764792"/>
+            <a:ext cx="3977640" cy="219456"/>
+          </a:xfrm>
+          <a:prstGeom prst="rect">
+            <a:avLst/>
+          </a:prstGeom>
+          <a:noFill/>
+          <a:ln/>
+        </p:spPr>
+        <p:txBody>
+          <a:bodyPr wrap="square" lIns="0" tIns="0" rIns="0" bIns="0" rtlCol="0" anchor="ctr"/>
+          <a:lstStyle/>
+          <a:p>
+            <a:pPr marL="0" indent="0">
+              <a:buNone/>
+            </a:pPr>
+            <a:r>
+              <a:rPr lang="en-US" sz="1050" b="1" dirty="0">
+                <a:solidFill>
+                  <a:srgbClr val="0F2A44"/>
+                </a:solidFill>
+                <a:latin typeface="Calibri" pitchFamily="34" charset="0"/>
+                <a:ea typeface="Calibri" pitchFamily="34" charset="-122"/>
+                <a:cs typeface="Calibri" pitchFamily="34" charset="-120"/>
+              </a:rPr>
+              <a:t>Pawlak et al. (2016)</a:t>
+            </a:r>
+            <a:endParaRPr lang="en-US" sz="1050" dirty="0"/>
+          </a:p>
+        </p:txBody>
+      </p:sp>
+      <p:sp>
+        <p:nvSpPr>
+          <p:cNvPr id="22" name="Text 20"/>
+          <p:cNvSpPr/>
+          <p:nvPr/>
+        </p:nvSpPr>
+        <p:spPr>
+          <a:xfrm>
+            <a:off x="4617720" y="2011680"/>
+            <a:ext cx="3977640" cy="329184"/>
+          </a:xfrm>
+          <a:prstGeom prst="rect">
+            <a:avLst/>
+          </a:prstGeom>
+          <a:noFill/>
+          <a:ln/>
+        </p:spPr>
+        <p:txBody>
+          <a:bodyPr wrap="square" lIns="0" tIns="0" rIns="0" bIns="0" rtlCol="0" anchor="ctr">
+            <a:normAutofit/>
+          </a:bodyPr>
+          <a:lstStyle/>
+          <a:p>
+            <a:pPr marL="0" indent="0">
+              <a:buNone/>
+            </a:pPr>
+            <a:r>
+              <a:rPr lang="en-US" sz="920" dirty="0">
+                <a:solidFill>
+                  <a:srgbClr val="1E293B"/>
+                </a:solidFill>
+                <a:latin typeface="Calibri" pitchFamily="34" charset="0"/>
+                <a:ea typeface="Calibri" pitchFamily="34" charset="-122"/>
+                <a:cs typeface="Calibri" pitchFamily="34" charset="-120"/>
+              </a:rPr>
+              <a:t>Spoon: A Library for Implementing Analyses and Transformations of Java Source Code</a:t>
+            </a:r>
+            <a:endParaRPr lang="en-US" sz="920" dirty="0"/>
+          </a:p>
+        </p:txBody>
+      </p:sp>
+      <p:sp>
+        <p:nvSpPr>
+          <p:cNvPr id="23" name="Shape 21"/>
+          <p:cNvSpPr/>
+          <p:nvPr/>
+        </p:nvSpPr>
+        <p:spPr>
+          <a:xfrm>
+            <a:off x="4617720" y="2377440"/>
+            <a:ext cx="3977640" cy="9144"/>
+          </a:xfrm>
+          <a:prstGeom prst="rect">
+            <a:avLst/>
+          </a:prstGeom>
+          <a:solidFill>
+            <a:srgbClr val="D8DEE6"/>
+          </a:solidFill>
+          <a:ln w="12700">
+            <a:solidFill>
+              <a:srgbClr val="D8DEE6"/>
+            </a:solidFill>
+            <a:prstDash val="solid"/>
+          </a:ln>
+        </p:spPr>
+      </p:sp>
+      <p:sp>
+        <p:nvSpPr>
+          <p:cNvPr id="24" name="Text 22"/>
+          <p:cNvSpPr/>
+          <p:nvPr/>
+        </p:nvSpPr>
+        <p:spPr>
+          <a:xfrm>
+            <a:off x="4617720" y="2478024"/>
+            <a:ext cx="3977640" cy="219456"/>
+          </a:xfrm>
+          <a:prstGeom prst="rect">
+            <a:avLst/>
+          </a:prstGeom>
+          <a:noFill/>
+          <a:ln/>
+        </p:spPr>
+        <p:txBody>
+          <a:bodyPr wrap="square" lIns="0" tIns="0" rIns="0" bIns="0" rtlCol="0" anchor="ctr"/>
+          <a:lstStyle/>
+          <a:p>
+            <a:pPr marL="0" indent="0">
+              <a:buNone/>
+            </a:pPr>
+            <a:r>
+              <a:rPr lang="en-US" sz="1050" b="1" dirty="0">
+                <a:solidFill>
+                  <a:srgbClr val="0F2A44"/>
+                </a:solidFill>
+                <a:latin typeface="Calibri" pitchFamily="34" charset="0"/>
+                <a:ea typeface="Calibri" pitchFamily="34" charset="-122"/>
+                <a:cs typeface="Calibri" pitchFamily="34" charset="-120"/>
+              </a:rPr>
+              <a:t>Sharma &amp; Spinellis (2018)</a:t>
+            </a:r>
+            <a:endParaRPr lang="en-US" sz="1050" dirty="0"/>
+          </a:p>
+        </p:txBody>
+      </p:sp>
+      <p:sp>
+        <p:nvSpPr>
+          <p:cNvPr id="25" name="Text 23"/>
+          <p:cNvSpPr/>
+          <p:nvPr/>
+        </p:nvSpPr>
+        <p:spPr>
+          <a:xfrm>
+            <a:off x="4617720" y="2724912"/>
+            <a:ext cx="3977640" cy="329184"/>
+          </a:xfrm>
+          <a:prstGeom prst="rect">
+            <a:avLst/>
+          </a:prstGeom>
+          <a:noFill/>
+          <a:ln/>
+        </p:spPr>
+        <p:txBody>
+          <a:bodyPr wrap="square" lIns="0" tIns="0" rIns="0" bIns="0" rtlCol="0" anchor="ctr">
+            <a:normAutofit/>
+          </a:bodyPr>
+          <a:lstStyle/>
+          <a:p>
+            <a:pPr marL="0" indent="0">
+              <a:buNone/>
+            </a:pPr>
+            <a:r>
+              <a:rPr lang="en-US" sz="920" dirty="0">
+                <a:solidFill>
+                  <a:srgbClr val="1E293B"/>
+                </a:solidFill>
+                <a:latin typeface="Calibri" pitchFamily="34" charset="0"/>
+                <a:ea typeface="Calibri" pitchFamily="34" charset="-122"/>
+                <a:cs typeface="Calibri" pitchFamily="34" charset="-120"/>
+              </a:rPr>
+              <a:t>A Survey on Software Smells</a:t>
+            </a:r>
+            <a:endParaRPr lang="en-US" sz="920" dirty="0"/>
+          </a:p>
+        </p:txBody>
+      </p:sp>
+      <p:sp>
+        <p:nvSpPr>
+          <p:cNvPr id="26" name="Shape 24"/>
+          <p:cNvSpPr/>
+          <p:nvPr/>
+        </p:nvSpPr>
+        <p:spPr>
+          <a:xfrm>
+            <a:off x="4617720" y="3090672"/>
+            <a:ext cx="3977640" cy="9144"/>
+          </a:xfrm>
+          <a:prstGeom prst="rect">
+            <a:avLst/>
+          </a:prstGeom>
+          <a:solidFill>
+            <a:srgbClr val="D8DEE6"/>
+          </a:solidFill>
+          <a:ln w="12700">
+            <a:solidFill>
+              <a:srgbClr val="D8DEE6"/>
+            </a:solidFill>
+            <a:prstDash val="solid"/>
+          </a:ln>
+        </p:spPr>
+      </p:sp>
+      <p:sp>
+        <p:nvSpPr>
+          <p:cNvPr id="27" name="Text 25"/>
+          <p:cNvSpPr/>
+          <p:nvPr/>
+        </p:nvSpPr>
+        <p:spPr>
+          <a:xfrm>
+            <a:off x="4617720" y="3191256"/>
+            <a:ext cx="3977640" cy="219456"/>
+          </a:xfrm>
+          <a:prstGeom prst="rect">
+            <a:avLst/>
+          </a:prstGeom>
+          <a:noFill/>
+          <a:ln/>
+        </p:spPr>
+        <p:txBody>
+          <a:bodyPr wrap="square" lIns="0" tIns="0" rIns="0" bIns="0" rtlCol="0" anchor="ctr"/>
+          <a:lstStyle/>
+          <a:p>
+            <a:pPr marL="0" indent="0">
+              <a:buNone/>
+            </a:pPr>
+            <a:r>
+              <a:rPr lang="en-US" sz="1050" b="1" dirty="0">
+                <a:solidFill>
+                  <a:srgbClr val="0F2A44"/>
+                </a:solidFill>
+                <a:latin typeface="Calibri" pitchFamily="34" charset="0"/>
+                <a:ea typeface="Calibri" pitchFamily="34" charset="-122"/>
+                <a:cs typeface="Calibri" pitchFamily="34" charset="-120"/>
+              </a:rPr>
+              <a:t>Arcelli Fontana et al. (2017); Granchelli et al. (2017)</a:t>
+            </a:r>
+            <a:endParaRPr lang="en-US" sz="1050" dirty="0"/>
+          </a:p>
+        </p:txBody>
+      </p:sp>
+      <p:sp>
+        <p:nvSpPr>
+          <p:cNvPr id="28" name="Text 26"/>
+          <p:cNvSpPr/>
+          <p:nvPr/>
+        </p:nvSpPr>
+        <p:spPr>
+          <a:xfrm>
+            <a:off x="4617720" y="3438144"/>
+            <a:ext cx="3977640" cy="329184"/>
+          </a:xfrm>
+          <a:prstGeom prst="rect">
+            <a:avLst/>
+          </a:prstGeom>
+          <a:noFill/>
+          <a:ln/>
+        </p:spPr>
+        <p:txBody>
+          <a:bodyPr wrap="square" lIns="0" tIns="0" rIns="0" bIns="0" rtlCol="0" anchor="ctr">
+            <a:normAutofit/>
+          </a:bodyPr>
+          <a:lstStyle/>
+          <a:p>
+            <a:pPr marL="0" indent="0">
+              <a:buNone/>
+            </a:pPr>
+            <a:r>
+              <a:rPr lang="en-US" sz="920" dirty="0">
+                <a:solidFill>
+                  <a:srgbClr val="1E293B"/>
+                </a:solidFill>
+                <a:latin typeface="Calibri" pitchFamily="34" charset="0"/>
+                <a:ea typeface="Calibri" pitchFamily="34" charset="-122"/>
+                <a:cs typeface="Calibri" pitchFamily="34" charset="-120"/>
+              </a:rPr>
+              <a:t>Arcan and MicroART architectural smell / architecture recovery tools</a:t>
+            </a:r>
+            <a:endParaRPr lang="en-US" sz="920" dirty="0"/>
+          </a:p>
+        </p:txBody>
+      </p:sp>
+      <p:sp>
+        <p:nvSpPr>
+          <p:cNvPr id="29" name="Shape 27"/>
+          <p:cNvSpPr/>
+          <p:nvPr/>
+        </p:nvSpPr>
+        <p:spPr>
+          <a:xfrm>
+            <a:off x="4617720" y="3803904"/>
+            <a:ext cx="3977640" cy="9144"/>
+          </a:xfrm>
+          <a:prstGeom prst="rect">
+            <a:avLst/>
+          </a:prstGeom>
+          <a:solidFill>
+            <a:srgbClr val="D8DEE6"/>
+          </a:solidFill>
+          <a:ln w="12700">
+            <a:solidFill>
+              <a:srgbClr val="D8DEE6"/>
+            </a:solidFill>
+            <a:prstDash val="solid"/>
+          </a:ln>
+        </p:spPr>
+      </p:sp>
+      <p:sp>
+        <p:nvSpPr>
+          <p:cNvPr id="30" name="Text 28"/>
+          <p:cNvSpPr/>
+          <p:nvPr/>
+        </p:nvSpPr>
+        <p:spPr>
+          <a:xfrm>
+            <a:off x="4617720" y="3904488"/>
+            <a:ext cx="3977640" cy="219456"/>
+          </a:xfrm>
+          <a:prstGeom prst="rect">
+            <a:avLst/>
+          </a:prstGeom>
+          <a:noFill/>
+          <a:ln/>
+        </p:spPr>
+        <p:txBody>
+          <a:bodyPr wrap="square" lIns="0" tIns="0" rIns="0" bIns="0" rtlCol="0" anchor="ctr"/>
+          <a:lstStyle/>
+          <a:p>
+            <a:pPr marL="0" indent="0">
+              <a:buNone/>
+            </a:pPr>
+            <a:r>
+              <a:rPr lang="en-US" sz="1050" b="1" dirty="0">
+                <a:solidFill>
+                  <a:srgbClr val="0F2A44"/>
+                </a:solidFill>
+                <a:latin typeface="Calibri" pitchFamily="34" charset="0"/>
+                <a:ea typeface="Calibri" pitchFamily="34" charset="-122"/>
+                <a:cs typeface="Calibri" pitchFamily="34" charset="-120"/>
+              </a:rPr>
+              <a:t>Tarjan (1972); Brandes (2001)</a:t>
+            </a:r>
+            <a:endParaRPr lang="en-US" sz="1050" dirty="0"/>
+          </a:p>
+        </p:txBody>
+      </p:sp>
+      <p:sp>
+        <p:nvSpPr>
+          <p:cNvPr id="31" name="Text 29"/>
+          <p:cNvSpPr/>
+          <p:nvPr/>
+        </p:nvSpPr>
+        <p:spPr>
+          <a:xfrm>
+            <a:off x="4617720" y="4151376"/>
+            <a:ext cx="3977640" cy="329184"/>
+          </a:xfrm>
+          <a:prstGeom prst="rect">
+            <a:avLst/>
+          </a:prstGeom>
+          <a:noFill/>
+          <a:ln/>
+        </p:spPr>
+        <p:txBody>
+          <a:bodyPr wrap="square" lIns="0" tIns="0" rIns="0" bIns="0" rtlCol="0" anchor="ctr">
+            <a:normAutofit/>
+          </a:bodyPr>
+          <a:lstStyle/>
+          <a:p>
+            <a:pPr marL="0" indent="0">
+              <a:buNone/>
+            </a:pPr>
+            <a:r>
+              <a:rPr lang="en-US" sz="920" dirty="0">
+                <a:solidFill>
+                  <a:srgbClr val="1E293B"/>
+                </a:solidFill>
+                <a:latin typeface="Calibri" pitchFamily="34" charset="0"/>
+                <a:ea typeface="Calibri" pitchFamily="34" charset="-122"/>
+                <a:cs typeface="Calibri" pitchFamily="34" charset="-120"/>
+              </a:rPr>
+              <a:t>Strongly connected components and betweenness centrality graph algorithms</a:t>
+            </a:r>
+            <a:endParaRPr lang="en-US" sz="920" dirty="0"/>
+          </a:p>
+        </p:txBody>
+      </p:sp>
+      <p:sp>
+        <p:nvSpPr>
+          <p:cNvPr id="32" name="Shape 30"/>
+          <p:cNvSpPr/>
+          <p:nvPr/>
+        </p:nvSpPr>
+        <p:spPr>
+          <a:xfrm>
+            <a:off x="548640" y="4572000"/>
+            <a:ext cx="457200" cy="36576"/>
+          </a:xfrm>
+          <a:prstGeom prst="rect">
+            <a:avLst/>
+          </a:prstGeom>
+          <a:solidFill>
+            <a:srgbClr val="0D9488"/>
+          </a:solidFill>
+          <a:ln w="12700">
+            <a:solidFill>
+              <a:srgbClr val="0D9488"/>
+            </a:solidFill>
+            <a:prstDash val="solid"/>
+          </a:ln>
+        </p:spPr>
+      </p:sp>
+      <p:sp>
+        <p:nvSpPr>
+          <p:cNvPr id="34" name="Text 32"/>
+          <p:cNvSpPr/>
+          <p:nvPr/>
+        </p:nvSpPr>
+        <p:spPr>
+          <a:xfrm>
+            <a:off x="7955280" y="4864608"/>
+            <a:ext cx="640080" cy="228600"/>
+          </a:xfrm>
+          <a:prstGeom prst="rect">
+            <a:avLst/>
+          </a:prstGeom>
+          <a:noFill/>
+          <a:ln/>
+        </p:spPr>
+        <p:txBody>
+          <a:bodyPr wrap="square" lIns="0" tIns="0" rIns="0" bIns="0" rtlCol="0" anchor="ctr"/>
+          <a:lstStyle/>
+          <a:p>
+            <a:pPr marL="0" indent="0" algn="r">
+              <a:buNone/>
+            </a:pPr>
+            <a:r>
+              <a:rPr lang="en-US" sz="900" dirty="0">
+                <a:solidFill>
+                  <a:srgbClr val="64748B"/>
+                </a:solidFill>
+                <a:latin typeface="Calibri" pitchFamily="34" charset="0"/>
+                <a:ea typeface="Calibri" pitchFamily="34" charset="-122"/>
+                <a:cs typeface="Calibri" pitchFamily="34" charset="-120"/>
+              </a:rPr>
+              <a:t>13 / 13</a:t>
+            </a:r>
+            <a:endParaRPr lang="en-US" sz="900" dirty="0"/>
+          </a:p>
+        </p:txBody>
+      </p:sp>
+    </p:spTree>
+  </p:cSld>
+  <p:clrMapOvr>
+    <a:masterClrMapping/>
+  </p:clrMapOvr>
+</p:sld>
+</file>
+
+<file path=ppt/slides/slide13.xml><?xml version="1.0" encoding="utf-8"?>
+<p:sld xmlns:a="http://schemas.openxmlformats.org/drawingml/2006/main" xmlns:r="http://schemas.openxmlformats.org/officeDocument/2006/relationships" xmlns:p="http://schemas.openxmlformats.org/presentationml/2006/main">
+  <p:cSld>
+    <p:spTree>
+      <p:nvGrpSpPr>
+        <p:cNvPr id="1" name=""/>
+        <p:cNvGrpSpPr/>
+        <p:nvPr/>
+      </p:nvGrpSpPr>
+      <p:grpSpPr>
+        <a:xfrm>
+          <a:off x="0" y="0"/>
+          <a:ext cx="0" cy="0"/>
+          <a:chOff x="0" y="0"/>
+          <a:chExt cx="0" cy="0"/>
+        </a:xfrm>
+      </p:grpSpPr>
+    </p:spTree>
+    <p:extLst>
+      <p:ext uri="{BB962C8B-B14F-4D97-AF65-F5344CB8AC3E}">
+        <p14:creationId xmlns:p14="http://schemas.microsoft.com/office/powerpoint/2010/main" val="453257548"/>
+      </p:ext>
+    </p:extLst>
+  </p:cSld>
+  <p:clrMapOvr>
+    <a:masterClrMapping/>
+  </p:clrMapOvr>
+</p:sld>
+</file>
+
+<file path=ppt/slides/slide14.xml><?xml version="1.0" encoding="utf-8"?>
+<p:sld xmlns:a="http://schemas.openxmlformats.org/drawingml/2006/main" xmlns:r="http://schemas.openxmlformats.org/officeDocument/2006/relationships" xmlns:p="http://schemas.openxmlformats.org/presentationml/2006/main">
+  <p:cSld name="Slide 8">
+    <p:bg>
+      <p:bgPr>
+        <a:solidFill>
+          <a:srgbClr val="FFFFFF"/>
+        </a:solidFill>
+        <a:effectLst/>
+      </p:bgPr>
+    </p:bg>
+    <p:spTree>
+      <p:nvGrpSpPr>
+        <p:cNvPr id="1" name=""/>
+        <p:cNvGrpSpPr/>
+        <p:nvPr/>
+      </p:nvGrpSpPr>
+      <p:grpSpPr>
+        <a:xfrm>
+          <a:off x="0" y="0"/>
+          <a:ext cx="0" cy="0"/>
+          <a:chOff x="0" y="0"/>
+          <a:chExt cx="0" cy="0"/>
+        </a:xfrm>
+      </p:grpSpPr>
+      <p:sp>
+        <p:nvSpPr>
+          <p:cNvPr id="2" name="Text 0"/>
+          <p:cNvSpPr/>
+          <p:nvPr/>
+        </p:nvSpPr>
+        <p:spPr>
+          <a:xfrm>
+            <a:off x="548640" y="256032"/>
+            <a:ext cx="8046720" cy="502920"/>
+          </a:xfrm>
+          <a:prstGeom prst="rect">
+            <a:avLst/>
+          </a:prstGeom>
+          <a:noFill/>
+          <a:ln/>
+        </p:spPr>
+        <p:txBody>
+          <a:bodyPr wrap="square" lIns="0" tIns="0" rIns="0" bIns="0" rtlCol="0" anchor="ctr"/>
+          <a:lstStyle/>
+          <a:p>
+            <a:pPr marL="0" indent="0">
+              <a:buNone/>
+            </a:pPr>
+            <a:r>
+              <a:rPr lang="en-US" sz="2500" b="1" dirty="0">
+                <a:solidFill>
+                  <a:srgbClr val="0F2A44"/>
+                </a:solidFill>
+                <a:latin typeface="Calibri" pitchFamily="34" charset="0"/>
+                <a:ea typeface="Calibri" pitchFamily="34" charset="-122"/>
+                <a:cs typeface="Calibri" pitchFamily="34" charset="-120"/>
+              </a:rPr>
+              <a:t>Worked example: microservice-recruit</a:t>
+            </a:r>
+            <a:endParaRPr lang="en-US" sz="2500" dirty="0"/>
+          </a:p>
+        </p:txBody>
+      </p:sp>
+      <p:sp>
+        <p:nvSpPr>
+          <p:cNvPr id="3" name="Shape 1"/>
+          <p:cNvSpPr/>
+          <p:nvPr/>
+        </p:nvSpPr>
+        <p:spPr>
+          <a:xfrm>
+            <a:off x="548640" y="841248"/>
+            <a:ext cx="8046720" cy="13716"/>
+          </a:xfrm>
+          <a:prstGeom prst="rect">
+            <a:avLst/>
+          </a:prstGeom>
+          <a:solidFill>
+            <a:srgbClr val="D8DEE6"/>
+          </a:solidFill>
+          <a:ln w="12700">
+            <a:solidFill>
+              <a:srgbClr val="D8DEE6"/>
+            </a:solidFill>
+            <a:prstDash val="solid"/>
+          </a:ln>
+        </p:spPr>
+        <p:txBody>
+          <a:bodyPr/>
+          <a:lstStyle/>
+          <a:p>
+            <a:endParaRPr lang="en-US"/>
+          </a:p>
+        </p:txBody>
+      </p:sp>
+      <p:sp>
+        <p:nvSpPr>
+          <p:cNvPr id="4" name="Text 2"/>
+          <p:cNvSpPr/>
+          <p:nvPr/>
+        </p:nvSpPr>
+        <p:spPr>
+          <a:xfrm>
+            <a:off x="548640" y="987552"/>
+            <a:ext cx="3931920" cy="292608"/>
+          </a:xfrm>
+          <a:prstGeom prst="rect">
+            <a:avLst/>
+          </a:prstGeom>
+          <a:noFill/>
+          <a:ln/>
+        </p:spPr>
+        <p:txBody>
+          <a:bodyPr wrap="square" lIns="0" tIns="0" rIns="0" bIns="0" rtlCol="0" anchor="ctr"/>
+          <a:lstStyle/>
+          <a:p>
+            <a:pPr marL="0" indent="0">
+              <a:buNone/>
+            </a:pPr>
+            <a:r>
+              <a:rPr lang="en-US" sz="1300" b="1" dirty="0">
+                <a:solidFill>
+                  <a:srgbClr val="0F2A44"/>
+                </a:solidFill>
+                <a:latin typeface="Calibri" pitchFamily="34" charset="0"/>
+                <a:ea typeface="Calibri" pitchFamily="34" charset="-122"/>
+                <a:cs typeface="Calibri" pitchFamily="34" charset="-120"/>
+              </a:rPr>
+              <a:t>Anti-pattern findings</a:t>
+            </a:r>
+            <a:endParaRPr lang="en-US" sz="1300" dirty="0"/>
+          </a:p>
+        </p:txBody>
+      </p:sp>
+      <p:sp>
+        <p:nvSpPr>
+          <p:cNvPr id="5" name="Text 3"/>
+          <p:cNvSpPr/>
+          <p:nvPr/>
+        </p:nvSpPr>
+        <p:spPr>
+          <a:xfrm>
+            <a:off x="548640" y="1353312"/>
+            <a:ext cx="411480" cy="274320"/>
+          </a:xfrm>
+          <a:prstGeom prst="rect">
+            <a:avLst/>
+          </a:prstGeom>
+          <a:noFill/>
+          <a:ln/>
+        </p:spPr>
+        <p:txBody>
+          <a:bodyPr wrap="square" lIns="0" tIns="0" rIns="0" bIns="0" rtlCol="0" anchor="ctr"/>
+          <a:lstStyle/>
+          <a:p>
+            <a:pPr marL="0" indent="0">
+              <a:buNone/>
+            </a:pPr>
+            <a:r>
+              <a:rPr lang="en-US" sz="1100" b="1" dirty="0">
+                <a:solidFill>
+                  <a:srgbClr val="DC2626"/>
+                </a:solidFill>
+                <a:latin typeface="Calibri" pitchFamily="34" charset="0"/>
+                <a:ea typeface="Calibri" pitchFamily="34" charset="-122"/>
+                <a:cs typeface="Calibri" pitchFamily="34" charset="-120"/>
+              </a:rPr>
+              <a:t>6×</a:t>
+            </a:r>
+            <a:endParaRPr lang="en-US" sz="1100" dirty="0"/>
+          </a:p>
+        </p:txBody>
+      </p:sp>
+      <p:sp>
+        <p:nvSpPr>
+          <p:cNvPr id="6" name="Text 4"/>
+          <p:cNvSpPr/>
+          <p:nvPr/>
+        </p:nvSpPr>
+        <p:spPr>
+          <a:xfrm>
+            <a:off x="1005840" y="1353312"/>
+            <a:ext cx="2240280" cy="274320"/>
+          </a:xfrm>
+          <a:prstGeom prst="rect">
+            <a:avLst/>
+          </a:prstGeom>
+          <a:noFill/>
+          <a:ln/>
+        </p:spPr>
+        <p:txBody>
+          <a:bodyPr wrap="square" lIns="0" tIns="0" rIns="0" bIns="0" rtlCol="0" anchor="ctr"/>
+          <a:lstStyle/>
+          <a:p>
+            <a:pPr marL="0" indent="0">
+              <a:buNone/>
+            </a:pPr>
+            <a:r>
+              <a:rPr lang="en-US" sz="1100" dirty="0">
+                <a:solidFill>
+                  <a:srgbClr val="1E293B"/>
+                </a:solidFill>
+                <a:latin typeface="Calibri" pitchFamily="34" charset="0"/>
+                <a:ea typeface="Calibri" pitchFamily="34" charset="-122"/>
+                <a:cs typeface="Calibri" pitchFamily="34" charset="-120"/>
+              </a:rPr>
+              <a:t>API Versioning Absence</a:t>
+            </a:r>
+            <a:endParaRPr lang="en-US" sz="1100" dirty="0"/>
+          </a:p>
+        </p:txBody>
+      </p:sp>
+      <p:sp>
+        <p:nvSpPr>
+          <p:cNvPr id="7" name="Text 5"/>
+          <p:cNvSpPr/>
+          <p:nvPr/>
+        </p:nvSpPr>
+        <p:spPr>
+          <a:xfrm>
+            <a:off x="3246120" y="1353312"/>
+            <a:ext cx="1234440" cy="274320"/>
+          </a:xfrm>
+          <a:prstGeom prst="rect">
+            <a:avLst/>
+          </a:prstGeom>
+          <a:noFill/>
+          <a:ln/>
+        </p:spPr>
+        <p:txBody>
+          <a:bodyPr wrap="square" lIns="0" tIns="0" rIns="0" bIns="0" rtlCol="0" anchor="ctr"/>
+          <a:lstStyle/>
+          <a:p>
+            <a:pPr marL="0" indent="0" algn="r">
+              <a:buNone/>
+            </a:pPr>
+            <a:r>
+              <a:rPr lang="en-US" sz="1000" dirty="0">
+                <a:solidFill>
+                  <a:srgbClr val="64748B"/>
+                </a:solidFill>
+                <a:latin typeface="Calibri" pitchFamily="34" charset="0"/>
+                <a:ea typeface="Calibri" pitchFamily="34" charset="-122"/>
+                <a:cs typeface="Calibri" pitchFamily="34" charset="-120"/>
+              </a:rPr>
+              <a:t>−3 each = −18</a:t>
+            </a:r>
+            <a:endParaRPr lang="en-US" sz="1000" dirty="0"/>
+          </a:p>
+        </p:txBody>
+      </p:sp>
+      <p:sp>
+        <p:nvSpPr>
+          <p:cNvPr id="8" name="Shape 6"/>
+          <p:cNvSpPr/>
+          <p:nvPr/>
+        </p:nvSpPr>
+        <p:spPr>
+          <a:xfrm>
+            <a:off x="548640" y="1618488"/>
+            <a:ext cx="3931920" cy="10973"/>
+          </a:xfrm>
+          <a:prstGeom prst="rect">
+            <a:avLst/>
+          </a:prstGeom>
+          <a:solidFill>
+            <a:srgbClr val="D8DEE6"/>
+          </a:solidFill>
+          <a:ln w="12700">
+            <a:solidFill>
+              <a:srgbClr val="D8DEE6"/>
+            </a:solidFill>
+            <a:prstDash val="solid"/>
+          </a:ln>
+        </p:spPr>
+        <p:txBody>
+          <a:bodyPr/>
+          <a:lstStyle/>
+          <a:p>
+            <a:endParaRPr lang="en-US"/>
+          </a:p>
+        </p:txBody>
+      </p:sp>
+      <p:sp>
+        <p:nvSpPr>
+          <p:cNvPr id="9" name="Text 7"/>
+          <p:cNvSpPr/>
+          <p:nvPr/>
+        </p:nvSpPr>
+        <p:spPr>
+          <a:xfrm>
+            <a:off x="548640" y="1655064"/>
+            <a:ext cx="411480" cy="274320"/>
+          </a:xfrm>
+          <a:prstGeom prst="rect">
+            <a:avLst/>
+          </a:prstGeom>
+          <a:noFill/>
+          <a:ln/>
+        </p:spPr>
+        <p:txBody>
+          <a:bodyPr wrap="square" lIns="0" tIns="0" rIns="0" bIns="0" rtlCol="0" anchor="ctr"/>
+          <a:lstStyle/>
+          <a:p>
+            <a:pPr marL="0" indent="0">
+              <a:buNone/>
+            </a:pPr>
+            <a:r>
+              <a:rPr lang="en-US" sz="1100" b="1" dirty="0">
+                <a:solidFill>
+                  <a:srgbClr val="DC2626"/>
+                </a:solidFill>
+                <a:latin typeface="Calibri" pitchFamily="34" charset="0"/>
+                <a:ea typeface="Calibri" pitchFamily="34" charset="-122"/>
+                <a:cs typeface="Calibri" pitchFamily="34" charset="-120"/>
+              </a:rPr>
+              <a:t>2×</a:t>
+            </a:r>
+            <a:endParaRPr lang="en-US" sz="1100" dirty="0"/>
+          </a:p>
+        </p:txBody>
+      </p:sp>
+      <p:sp>
+        <p:nvSpPr>
+          <p:cNvPr id="10" name="Text 8"/>
+          <p:cNvSpPr/>
+          <p:nvPr/>
+        </p:nvSpPr>
+        <p:spPr>
+          <a:xfrm>
+            <a:off x="1005840" y="1655064"/>
+            <a:ext cx="2240280" cy="274320"/>
+          </a:xfrm>
+          <a:prstGeom prst="rect">
+            <a:avLst/>
+          </a:prstGeom>
+          <a:noFill/>
+          <a:ln/>
+        </p:spPr>
+        <p:txBody>
+          <a:bodyPr wrap="square" lIns="0" tIns="0" rIns="0" bIns="0" rtlCol="0" anchor="ctr"/>
+          <a:lstStyle/>
+          <a:p>
+            <a:pPr marL="0" indent="0">
+              <a:buNone/>
+            </a:pPr>
+            <a:r>
+              <a:rPr lang="en-US" sz="1100" dirty="0">
+                <a:solidFill>
+                  <a:srgbClr val="1E293B"/>
+                </a:solidFill>
+                <a:latin typeface="Calibri" pitchFamily="34" charset="0"/>
+                <a:ea typeface="Calibri" pitchFamily="34" charset="-122"/>
+                <a:cs typeface="Calibri" pitchFamily="34" charset="-120"/>
+              </a:rPr>
+              <a:t>ESB Misuse</a:t>
+            </a:r>
+            <a:endParaRPr lang="en-US" sz="1100" dirty="0"/>
+          </a:p>
+        </p:txBody>
+      </p:sp>
+      <p:sp>
+        <p:nvSpPr>
+          <p:cNvPr id="11" name="Text 9"/>
+          <p:cNvSpPr/>
+          <p:nvPr/>
+        </p:nvSpPr>
+        <p:spPr>
+          <a:xfrm>
+            <a:off x="3246120" y="1655064"/>
+            <a:ext cx="1234440" cy="274320"/>
+          </a:xfrm>
+          <a:prstGeom prst="rect">
+            <a:avLst/>
+          </a:prstGeom>
+          <a:noFill/>
+          <a:ln/>
+        </p:spPr>
+        <p:txBody>
+          <a:bodyPr wrap="square" lIns="0" tIns="0" rIns="0" bIns="0" rtlCol="0" anchor="ctr"/>
+          <a:lstStyle/>
+          <a:p>
+            <a:pPr marL="0" indent="0" algn="r">
+              <a:buNone/>
+            </a:pPr>
+            <a:r>
+              <a:rPr lang="en-US" sz="1000" dirty="0">
+                <a:solidFill>
+                  <a:srgbClr val="64748B"/>
+                </a:solidFill>
+                <a:latin typeface="Calibri" pitchFamily="34" charset="0"/>
+                <a:ea typeface="Calibri" pitchFamily="34" charset="-122"/>
+                <a:cs typeface="Calibri" pitchFamily="34" charset="-120"/>
+              </a:rPr>
+              <a:t>−5 each = −10</a:t>
+            </a:r>
+            <a:endParaRPr lang="en-US" sz="1000" dirty="0"/>
+          </a:p>
+        </p:txBody>
+      </p:sp>
+      <p:sp>
+        <p:nvSpPr>
+          <p:cNvPr id="12" name="Shape 10"/>
+          <p:cNvSpPr/>
+          <p:nvPr/>
+        </p:nvSpPr>
+        <p:spPr>
+          <a:xfrm>
+            <a:off x="548640" y="1920240"/>
+            <a:ext cx="3931920" cy="10973"/>
+          </a:xfrm>
+          <a:prstGeom prst="rect">
+            <a:avLst/>
+          </a:prstGeom>
+          <a:solidFill>
+            <a:srgbClr val="D8DEE6"/>
+          </a:solidFill>
+          <a:ln w="12700">
+            <a:solidFill>
+              <a:srgbClr val="D8DEE6"/>
+            </a:solidFill>
+            <a:prstDash val="solid"/>
+          </a:ln>
+        </p:spPr>
+        <p:txBody>
+          <a:bodyPr/>
+          <a:lstStyle/>
+          <a:p>
+            <a:endParaRPr lang="en-US"/>
+          </a:p>
+        </p:txBody>
+      </p:sp>
+      <p:sp>
+        <p:nvSpPr>
+          <p:cNvPr id="13" name="Text 11"/>
+          <p:cNvSpPr/>
+          <p:nvPr/>
+        </p:nvSpPr>
+        <p:spPr>
+          <a:xfrm>
+            <a:off x="548640" y="1956816"/>
+            <a:ext cx="411480" cy="274320"/>
+          </a:xfrm>
+          <a:prstGeom prst="rect">
+            <a:avLst/>
+          </a:prstGeom>
+          <a:noFill/>
+          <a:ln/>
+        </p:spPr>
+        <p:txBody>
+          <a:bodyPr wrap="square" lIns="0" tIns="0" rIns="0" bIns="0" rtlCol="0" anchor="ctr"/>
+          <a:lstStyle/>
+          <a:p>
+            <a:pPr marL="0" indent="0">
+              <a:buNone/>
+            </a:pPr>
+            <a:r>
+              <a:rPr lang="en-US" sz="1100" b="1" dirty="0">
+                <a:solidFill>
+                  <a:srgbClr val="DC2626"/>
+                </a:solidFill>
+                <a:latin typeface="Calibri" pitchFamily="34" charset="0"/>
+                <a:ea typeface="Calibri" pitchFamily="34" charset="-122"/>
+                <a:cs typeface="Calibri" pitchFamily="34" charset="-120"/>
+              </a:rPr>
+              <a:t>2×</a:t>
+            </a:r>
+            <a:endParaRPr lang="en-US" sz="1100" dirty="0"/>
+          </a:p>
+        </p:txBody>
+      </p:sp>
+      <p:sp>
+        <p:nvSpPr>
+          <p:cNvPr id="14" name="Text 12"/>
+          <p:cNvSpPr/>
+          <p:nvPr/>
+        </p:nvSpPr>
+        <p:spPr>
+          <a:xfrm>
+            <a:off x="1005840" y="1956816"/>
+            <a:ext cx="2240280" cy="274320"/>
+          </a:xfrm>
+          <a:prstGeom prst="rect">
+            <a:avLst/>
+          </a:prstGeom>
+          <a:noFill/>
+          <a:ln/>
+        </p:spPr>
+        <p:txBody>
+          <a:bodyPr wrap="square" lIns="0" tIns="0" rIns="0" bIns="0" rtlCol="0" anchor="ctr"/>
+          <a:lstStyle/>
+          <a:p>
+            <a:pPr marL="0" indent="0">
+              <a:buNone/>
+            </a:pPr>
+            <a:r>
+              <a:rPr lang="en-US" sz="1100" dirty="0">
+                <a:solidFill>
+                  <a:srgbClr val="1E293B"/>
+                </a:solidFill>
+                <a:latin typeface="Calibri" pitchFamily="34" charset="0"/>
+                <a:ea typeface="Calibri" pitchFamily="34" charset="-122"/>
+                <a:cs typeface="Calibri" pitchFamily="34" charset="-120"/>
+              </a:rPr>
+              <a:t>Wrong Cuts</a:t>
+            </a:r>
+            <a:endParaRPr lang="en-US" sz="1100" dirty="0"/>
+          </a:p>
+        </p:txBody>
+      </p:sp>
+      <p:sp>
+        <p:nvSpPr>
+          <p:cNvPr id="15" name="Text 13"/>
+          <p:cNvSpPr/>
+          <p:nvPr/>
+        </p:nvSpPr>
+        <p:spPr>
+          <a:xfrm>
+            <a:off x="3246120" y="1956816"/>
+            <a:ext cx="1234440" cy="274320"/>
+          </a:xfrm>
+          <a:prstGeom prst="rect">
+            <a:avLst/>
+          </a:prstGeom>
+          <a:noFill/>
+          <a:ln/>
+        </p:spPr>
+        <p:txBody>
+          <a:bodyPr wrap="square" lIns="0" tIns="0" rIns="0" bIns="0" rtlCol="0" anchor="ctr"/>
+          <a:lstStyle/>
+          <a:p>
+            <a:pPr marL="0" indent="0" algn="r">
+              <a:buNone/>
+            </a:pPr>
+            <a:r>
+              <a:rPr lang="en-US" sz="1000" dirty="0">
+                <a:solidFill>
+                  <a:srgbClr val="64748B"/>
+                </a:solidFill>
+                <a:latin typeface="Calibri" pitchFamily="34" charset="0"/>
+                <a:ea typeface="Calibri" pitchFamily="34" charset="-122"/>
+                <a:cs typeface="Calibri" pitchFamily="34" charset="-120"/>
+              </a:rPr>
+              <a:t>−5 each = −10</a:t>
+            </a:r>
+            <a:endParaRPr lang="en-US" sz="1000" dirty="0"/>
+          </a:p>
+        </p:txBody>
+      </p:sp>
+      <p:sp>
+        <p:nvSpPr>
+          <p:cNvPr id="16" name="Shape 14"/>
+          <p:cNvSpPr/>
+          <p:nvPr/>
+        </p:nvSpPr>
+        <p:spPr>
+          <a:xfrm>
+            <a:off x="548640" y="2221992"/>
+            <a:ext cx="3931920" cy="10973"/>
+          </a:xfrm>
+          <a:prstGeom prst="rect">
+            <a:avLst/>
+          </a:prstGeom>
+          <a:solidFill>
+            <a:srgbClr val="D8DEE6"/>
+          </a:solidFill>
+          <a:ln w="12700">
+            <a:solidFill>
+              <a:srgbClr val="D8DEE6"/>
+            </a:solidFill>
+            <a:prstDash val="solid"/>
+          </a:ln>
+        </p:spPr>
+        <p:txBody>
+          <a:bodyPr/>
+          <a:lstStyle/>
+          <a:p>
+            <a:endParaRPr lang="en-US"/>
+          </a:p>
+        </p:txBody>
+      </p:sp>
+      <p:sp>
+        <p:nvSpPr>
+          <p:cNvPr id="17" name="Text 15"/>
+          <p:cNvSpPr/>
+          <p:nvPr/>
+        </p:nvSpPr>
+        <p:spPr>
+          <a:xfrm>
+            <a:off x="548640" y="2258568"/>
+            <a:ext cx="411480" cy="274320"/>
+          </a:xfrm>
+          <a:prstGeom prst="rect">
+            <a:avLst/>
+          </a:prstGeom>
+          <a:noFill/>
+          <a:ln/>
+        </p:spPr>
+        <p:txBody>
+          <a:bodyPr wrap="square" lIns="0" tIns="0" rIns="0" bIns="0" rtlCol="0" anchor="ctr"/>
+          <a:lstStyle/>
+          <a:p>
+            <a:pPr marL="0" indent="0">
+              <a:buNone/>
+            </a:pPr>
+            <a:r>
+              <a:rPr lang="en-US" sz="1100" b="1" dirty="0">
+                <a:solidFill>
+                  <a:srgbClr val="DC2626"/>
+                </a:solidFill>
+                <a:latin typeface="Calibri" pitchFamily="34" charset="0"/>
+                <a:ea typeface="Calibri" pitchFamily="34" charset="-122"/>
+                <a:cs typeface="Calibri" pitchFamily="34" charset="-120"/>
+              </a:rPr>
+              <a:t>1×</a:t>
+            </a:r>
+            <a:endParaRPr lang="en-US" sz="1100" dirty="0"/>
+          </a:p>
+        </p:txBody>
+      </p:sp>
+      <p:sp>
+        <p:nvSpPr>
+          <p:cNvPr id="18" name="Text 16"/>
+          <p:cNvSpPr/>
+          <p:nvPr/>
+        </p:nvSpPr>
+        <p:spPr>
+          <a:xfrm>
+            <a:off x="1005840" y="2258568"/>
+            <a:ext cx="2240280" cy="274320"/>
+          </a:xfrm>
+          <a:prstGeom prst="rect">
+            <a:avLst/>
+          </a:prstGeom>
+          <a:noFill/>
+          <a:ln/>
+        </p:spPr>
+        <p:txBody>
+          <a:bodyPr wrap="square" lIns="0" tIns="0" rIns="0" bIns="0" rtlCol="0" anchor="ctr"/>
+          <a:lstStyle/>
+          <a:p>
+            <a:pPr marL="0" indent="0">
+              <a:buNone/>
+            </a:pPr>
+            <a:r>
+              <a:rPr lang="en-US" sz="1100" dirty="0">
+                <a:solidFill>
+                  <a:srgbClr val="1E293B"/>
+                </a:solidFill>
+                <a:latin typeface="Calibri" pitchFamily="34" charset="0"/>
+                <a:ea typeface="Calibri" pitchFamily="34" charset="-122"/>
+                <a:cs typeface="Calibri" pitchFamily="34" charset="-120"/>
+              </a:rPr>
+              <a:t>Cyclic Dependency</a:t>
+            </a:r>
+            <a:endParaRPr lang="en-US" sz="1100" dirty="0"/>
+          </a:p>
+        </p:txBody>
+      </p:sp>
+      <p:sp>
+        <p:nvSpPr>
+          <p:cNvPr id="19" name="Text 17"/>
+          <p:cNvSpPr/>
+          <p:nvPr/>
+        </p:nvSpPr>
+        <p:spPr>
+          <a:xfrm>
+            <a:off x="3246120" y="2258568"/>
+            <a:ext cx="1234440" cy="274320"/>
+          </a:xfrm>
+          <a:prstGeom prst="rect">
+            <a:avLst/>
+          </a:prstGeom>
+          <a:noFill/>
+          <a:ln/>
+        </p:spPr>
+        <p:txBody>
+          <a:bodyPr wrap="square" lIns="0" tIns="0" rIns="0" bIns="0" rtlCol="0" anchor="ctr"/>
+          <a:lstStyle/>
+          <a:p>
+            <a:pPr marL="0" indent="0" algn="r">
+              <a:buNone/>
+            </a:pPr>
+            <a:r>
+              <a:rPr lang="en-US" sz="1000" dirty="0">
+                <a:solidFill>
+                  <a:srgbClr val="64748B"/>
+                </a:solidFill>
+                <a:latin typeface="Calibri" pitchFamily="34" charset="0"/>
+                <a:ea typeface="Calibri" pitchFamily="34" charset="-122"/>
+                <a:cs typeface="Calibri" pitchFamily="34" charset="-120"/>
+              </a:rPr>
+              <a:t>−8</a:t>
+            </a:r>
+            <a:endParaRPr lang="en-US" sz="1000" dirty="0"/>
+          </a:p>
+        </p:txBody>
+      </p:sp>
+      <p:sp>
+        <p:nvSpPr>
+          <p:cNvPr id="20" name="Shape 18"/>
+          <p:cNvSpPr/>
+          <p:nvPr/>
+        </p:nvSpPr>
+        <p:spPr>
+          <a:xfrm>
+            <a:off x="548640" y="2523744"/>
+            <a:ext cx="3931920" cy="10973"/>
+          </a:xfrm>
+          <a:prstGeom prst="rect">
+            <a:avLst/>
+          </a:prstGeom>
+          <a:solidFill>
+            <a:srgbClr val="D8DEE6"/>
+          </a:solidFill>
+          <a:ln w="12700">
+            <a:solidFill>
+              <a:srgbClr val="D8DEE6"/>
+            </a:solidFill>
+            <a:prstDash val="solid"/>
+          </a:ln>
+        </p:spPr>
+        <p:txBody>
+          <a:bodyPr/>
+          <a:lstStyle/>
+          <a:p>
+            <a:endParaRPr lang="en-US"/>
+          </a:p>
+        </p:txBody>
+      </p:sp>
+      <p:sp>
+        <p:nvSpPr>
+          <p:cNvPr id="21" name="Text 19"/>
+          <p:cNvSpPr/>
+          <p:nvPr/>
+        </p:nvSpPr>
+        <p:spPr>
+          <a:xfrm>
+            <a:off x="548640" y="2560320"/>
+            <a:ext cx="411480" cy="274320"/>
+          </a:xfrm>
+          <a:prstGeom prst="rect">
+            <a:avLst/>
+          </a:prstGeom>
+          <a:noFill/>
+          <a:ln/>
+        </p:spPr>
+        <p:txBody>
+          <a:bodyPr wrap="square" lIns="0" tIns="0" rIns="0" bIns="0" rtlCol="0" anchor="ctr"/>
+          <a:lstStyle/>
+          <a:p>
+            <a:pPr marL="0" indent="0">
+              <a:buNone/>
+            </a:pPr>
+            <a:r>
+              <a:rPr lang="en-US" sz="1100" b="1" dirty="0">
+                <a:solidFill>
+                  <a:srgbClr val="DC2626"/>
+                </a:solidFill>
+                <a:latin typeface="Calibri" pitchFamily="34" charset="0"/>
+                <a:ea typeface="Calibri" pitchFamily="34" charset="-122"/>
+                <a:cs typeface="Calibri" pitchFamily="34" charset="-120"/>
+              </a:rPr>
+              <a:t>1×</a:t>
+            </a:r>
+            <a:endParaRPr lang="en-US" sz="1100" dirty="0"/>
+          </a:p>
+        </p:txBody>
+      </p:sp>
+      <p:sp>
+        <p:nvSpPr>
+          <p:cNvPr id="22" name="Text 20"/>
+          <p:cNvSpPr/>
+          <p:nvPr/>
+        </p:nvSpPr>
+        <p:spPr>
+          <a:xfrm>
+            <a:off x="1005840" y="2560320"/>
+            <a:ext cx="2240280" cy="274320"/>
+          </a:xfrm>
+          <a:prstGeom prst="rect">
+            <a:avLst/>
+          </a:prstGeom>
+          <a:noFill/>
+          <a:ln/>
+        </p:spPr>
+        <p:txBody>
+          <a:bodyPr wrap="square" lIns="0" tIns="0" rIns="0" bIns="0" rtlCol="0" anchor="ctr"/>
+          <a:lstStyle/>
+          <a:p>
+            <a:pPr marL="0" indent="0">
+              <a:buNone/>
+            </a:pPr>
+            <a:r>
+              <a:rPr lang="en-US" sz="1100" dirty="0">
+                <a:solidFill>
+                  <a:srgbClr val="1E293B"/>
+                </a:solidFill>
+                <a:latin typeface="Calibri" pitchFamily="34" charset="0"/>
+                <a:ea typeface="Calibri" pitchFamily="34" charset="-122"/>
+                <a:cs typeface="Calibri" pitchFamily="34" charset="-120"/>
+              </a:rPr>
+              <a:t>Hardcoded Endpoints</a:t>
+            </a:r>
+            <a:endParaRPr lang="en-US" sz="1100" dirty="0"/>
+          </a:p>
+        </p:txBody>
+      </p:sp>
+      <p:sp>
+        <p:nvSpPr>
+          <p:cNvPr id="23" name="Text 21"/>
+          <p:cNvSpPr/>
+          <p:nvPr/>
+        </p:nvSpPr>
+        <p:spPr>
+          <a:xfrm>
+            <a:off x="3246120" y="2560320"/>
+            <a:ext cx="1234440" cy="274320"/>
+          </a:xfrm>
+          <a:prstGeom prst="rect">
+            <a:avLst/>
+          </a:prstGeom>
+          <a:noFill/>
+          <a:ln/>
+        </p:spPr>
+        <p:txBody>
+          <a:bodyPr wrap="square" lIns="0" tIns="0" rIns="0" bIns="0" rtlCol="0" anchor="ctr"/>
+          <a:lstStyle/>
+          <a:p>
+            <a:pPr marL="0" indent="0" algn="r">
+              <a:buNone/>
+            </a:pPr>
+            <a:r>
+              <a:rPr lang="en-US" sz="1000" dirty="0">
+                <a:solidFill>
+                  <a:srgbClr val="64748B"/>
+                </a:solidFill>
+                <a:latin typeface="Calibri" pitchFamily="34" charset="0"/>
+                <a:ea typeface="Calibri" pitchFamily="34" charset="-122"/>
+                <a:cs typeface="Calibri" pitchFamily="34" charset="-120"/>
+              </a:rPr>
+              <a:t>−3</a:t>
+            </a:r>
+            <a:endParaRPr lang="en-US" sz="1000" dirty="0"/>
+          </a:p>
+        </p:txBody>
+      </p:sp>
+      <p:sp>
+        <p:nvSpPr>
+          <p:cNvPr id="24" name="Shape 22"/>
+          <p:cNvSpPr/>
+          <p:nvPr/>
+        </p:nvSpPr>
+        <p:spPr>
+          <a:xfrm>
+            <a:off x="548640" y="2825496"/>
+            <a:ext cx="3931920" cy="10973"/>
+          </a:xfrm>
+          <a:prstGeom prst="rect">
+            <a:avLst/>
+          </a:prstGeom>
+          <a:solidFill>
+            <a:srgbClr val="D8DEE6"/>
+          </a:solidFill>
+          <a:ln w="12700">
+            <a:solidFill>
+              <a:srgbClr val="D8DEE6"/>
+            </a:solidFill>
+            <a:prstDash val="solid"/>
+          </a:ln>
+        </p:spPr>
+        <p:txBody>
+          <a:bodyPr/>
+          <a:lstStyle/>
+          <a:p>
+            <a:endParaRPr lang="en-US"/>
+          </a:p>
+        </p:txBody>
+      </p:sp>
+      <p:sp>
+        <p:nvSpPr>
+          <p:cNvPr id="25" name="Text 23"/>
+          <p:cNvSpPr/>
+          <p:nvPr/>
+        </p:nvSpPr>
+        <p:spPr>
+          <a:xfrm>
+            <a:off x="548640" y="2944368"/>
+            <a:ext cx="3931920" cy="292608"/>
+          </a:xfrm>
+          <a:prstGeom prst="rect">
+            <a:avLst/>
+          </a:prstGeom>
+          <a:noFill/>
+          <a:ln/>
+        </p:spPr>
+        <p:txBody>
+          <a:bodyPr wrap="square" lIns="0" tIns="0" rIns="0" bIns="0" rtlCol="0" anchor="ctr"/>
+          <a:lstStyle/>
+          <a:p>
+            <a:pPr marL="0" indent="0">
+              <a:buNone/>
+            </a:pPr>
+            <a:r>
+              <a:rPr lang="en-US" sz="1150" b="1" dirty="0">
+                <a:solidFill>
+                  <a:srgbClr val="0F2A44"/>
+                </a:solidFill>
+                <a:latin typeface="Calibri" pitchFamily="34" charset="0"/>
+                <a:ea typeface="Calibri" pitchFamily="34" charset="-122"/>
+                <a:cs typeface="Calibri" pitchFamily="34" charset="-120"/>
+              </a:rPr>
+              <a:t>Total penalty 49  →  category clamps at 0 / 40</a:t>
+            </a:r>
+            <a:endParaRPr lang="en-US" sz="1150" dirty="0"/>
+          </a:p>
+        </p:txBody>
+      </p:sp>
+      <p:sp>
+        <p:nvSpPr>
+          <p:cNvPr id="26" name="Text 24"/>
+          <p:cNvSpPr/>
+          <p:nvPr/>
+        </p:nvSpPr>
+        <p:spPr>
+          <a:xfrm>
+            <a:off x="548640" y="3429000"/>
+            <a:ext cx="3931920" cy="1097280"/>
+          </a:xfrm>
+          <a:prstGeom prst="rect">
+            <a:avLst/>
+          </a:prstGeom>
+          <a:noFill/>
+          <a:ln/>
+        </p:spPr>
+        <p:txBody>
+          <a:bodyPr wrap="square" lIns="0" tIns="0" rIns="0" bIns="0" rtlCol="0" anchor="ctr"/>
+          <a:lstStyle/>
+          <a:p>
+            <a:pPr marL="0" indent="0">
+              <a:buNone/>
+            </a:pPr>
+            <a:r>
+              <a:rPr lang="en-US" sz="1000" i="1" dirty="0">
+                <a:solidFill>
+                  <a:srgbClr val="64748B"/>
+                </a:solidFill>
+                <a:latin typeface="Calibri" pitchFamily="34" charset="0"/>
+                <a:ea typeface="Calibri" pitchFamily="34" charset="-122"/>
+                <a:cs typeface="Calibri" pitchFamily="34" charset="-120"/>
+              </a:rPr>
+              <a:t>Deductions spread across all four categories: </a:t>
+            </a:r>
+          </a:p>
+          <a:p>
+            <a:pPr marL="171450" indent="-171450">
+              <a:buFont typeface="Arial" panose="020B0604020202020204" pitchFamily="34" charset="0"/>
+              <a:buChar char="•"/>
+            </a:pPr>
+            <a:r>
+              <a:rPr lang="en-US" sz="1000" i="1" dirty="0">
+                <a:solidFill>
+                  <a:srgbClr val="64748B"/>
+                </a:solidFill>
+                <a:latin typeface="Calibri" pitchFamily="34" charset="0"/>
+                <a:ea typeface="Calibri" pitchFamily="34" charset="-122"/>
+                <a:cs typeface="Calibri" pitchFamily="34" charset="-120"/>
+              </a:rPr>
+              <a:t>Anti-pattern load clamps AP to 0</a:t>
+            </a:r>
+          </a:p>
+          <a:p>
+            <a:pPr marL="171450" indent="-171450">
+              <a:buFont typeface="Arial" panose="020B0604020202020204" pitchFamily="34" charset="0"/>
+              <a:buChar char="•"/>
+            </a:pPr>
+            <a:r>
+              <a:rPr lang="en-US" sz="1000" i="1" dirty="0">
+                <a:solidFill>
+                  <a:srgbClr val="64748B"/>
+                </a:solidFill>
+                <a:latin typeface="Calibri" pitchFamily="34" charset="0"/>
+                <a:ea typeface="Calibri" pitchFamily="34" charset="-122"/>
+                <a:cs typeface="Calibri" pitchFamily="34" charset="-120"/>
+              </a:rPr>
+              <a:t>Architecture loses 9 to dependency-graph coupling</a:t>
+            </a:r>
+          </a:p>
+          <a:p>
+            <a:pPr marL="171450" indent="-171450">
+              <a:buFont typeface="Arial" panose="020B0604020202020204" pitchFamily="34" charset="0"/>
+              <a:buChar char="•"/>
+            </a:pPr>
+            <a:r>
+              <a:rPr lang="en-US" sz="1000" i="1" dirty="0">
+                <a:solidFill>
+                  <a:srgbClr val="64748B"/>
+                </a:solidFill>
+                <a:latin typeface="Calibri" pitchFamily="34" charset="0"/>
+                <a:ea typeface="Calibri" pitchFamily="34" charset="-122"/>
+                <a:cs typeface="Calibri" pitchFamily="34" charset="-120"/>
+              </a:rPr>
+              <a:t>Code Quality 8 to smell density</a:t>
+            </a:r>
+          </a:p>
+          <a:p>
+            <a:pPr marL="171450" indent="-171450">
+              <a:buFont typeface="Arial" panose="020B0604020202020204" pitchFamily="34" charset="0"/>
+              <a:buChar char="•"/>
+            </a:pPr>
+            <a:r>
+              <a:rPr lang="en-US" sz="1000" i="1" dirty="0">
+                <a:solidFill>
+                  <a:srgbClr val="64748B"/>
+                </a:solidFill>
+                <a:latin typeface="Calibri" pitchFamily="34" charset="0"/>
+                <a:ea typeface="Calibri" pitchFamily="34" charset="-122"/>
+                <a:cs typeface="Calibri" pitchFamily="34" charset="-120"/>
+              </a:rPr>
+              <a:t>Service Sizing 3 to one nano service</a:t>
+            </a:r>
+            <a:endParaRPr lang="en-US" sz="1000" dirty="0"/>
+          </a:p>
+        </p:txBody>
+      </p:sp>
+      <p:sp>
+        <p:nvSpPr>
+          <p:cNvPr id="27" name="Text 25"/>
+          <p:cNvSpPr/>
+          <p:nvPr/>
+        </p:nvSpPr>
+        <p:spPr>
+          <a:xfrm>
+            <a:off x="4937760" y="987552"/>
+            <a:ext cx="3657600" cy="292608"/>
+          </a:xfrm>
+          <a:prstGeom prst="rect">
+            <a:avLst/>
+          </a:prstGeom>
+          <a:noFill/>
+          <a:ln/>
+        </p:spPr>
+        <p:txBody>
+          <a:bodyPr wrap="square" lIns="0" tIns="0" rIns="0" bIns="0" rtlCol="0" anchor="ctr"/>
+          <a:lstStyle/>
+          <a:p>
+            <a:pPr marL="0" indent="0">
+              <a:buNone/>
+            </a:pPr>
+            <a:r>
+              <a:rPr lang="en-US" sz="1300" b="1" dirty="0">
+                <a:solidFill>
+                  <a:srgbClr val="0F2A44"/>
+                </a:solidFill>
+                <a:latin typeface="Calibri" pitchFamily="34" charset="0"/>
+                <a:ea typeface="Calibri" pitchFamily="34" charset="-122"/>
+                <a:cs typeface="Calibri" pitchFamily="34" charset="-120"/>
+              </a:rPr>
+              <a:t>Category contributions</a:t>
+            </a:r>
+            <a:endParaRPr lang="en-US" sz="1300" dirty="0"/>
+          </a:p>
+        </p:txBody>
+      </p:sp>
+      <p:sp>
+        <p:nvSpPr>
+          <p:cNvPr id="28" name="Text 26"/>
+          <p:cNvSpPr/>
+          <p:nvPr/>
+        </p:nvSpPr>
+        <p:spPr>
+          <a:xfrm>
+            <a:off x="4937760" y="1353312"/>
+            <a:ext cx="1280160" cy="292608"/>
+          </a:xfrm>
+          <a:prstGeom prst="rect">
+            <a:avLst/>
+          </a:prstGeom>
+          <a:noFill/>
+          <a:ln/>
+        </p:spPr>
+        <p:txBody>
+          <a:bodyPr wrap="square" lIns="0" tIns="0" rIns="0" bIns="0" rtlCol="0" anchor="ctr"/>
+          <a:lstStyle/>
+          <a:p>
+            <a:pPr marL="0" indent="0">
+              <a:buNone/>
+            </a:pPr>
+            <a:r>
+              <a:rPr lang="en-US" sz="1050" dirty="0">
+                <a:solidFill>
+                  <a:srgbClr val="1E293B"/>
+                </a:solidFill>
+                <a:latin typeface="Calibri" pitchFamily="34" charset="0"/>
+                <a:ea typeface="Calibri" pitchFamily="34" charset="-122"/>
+                <a:cs typeface="Calibri" pitchFamily="34" charset="-120"/>
+              </a:rPr>
+              <a:t>Anti-Patterns</a:t>
+            </a:r>
+            <a:endParaRPr lang="en-US" sz="1050" dirty="0"/>
+          </a:p>
+        </p:txBody>
+      </p:sp>
+      <p:sp>
+        <p:nvSpPr>
+          <p:cNvPr id="29" name="Shape 27"/>
+          <p:cNvSpPr/>
+          <p:nvPr/>
+        </p:nvSpPr>
+        <p:spPr>
+          <a:xfrm>
+            <a:off x="6263640" y="1389888"/>
+            <a:ext cx="1691640" cy="219456"/>
+          </a:xfrm>
+          <a:prstGeom prst="rect">
+            <a:avLst/>
+          </a:prstGeom>
+          <a:solidFill>
+            <a:srgbClr val="D8DEE6"/>
+          </a:solidFill>
+          <a:ln w="12700">
+            <a:solidFill>
+              <a:srgbClr val="D8DEE6"/>
+            </a:solidFill>
+            <a:prstDash val="solid"/>
+          </a:ln>
+        </p:spPr>
+        <p:txBody>
+          <a:bodyPr/>
+          <a:lstStyle/>
+          <a:p>
+            <a:endParaRPr lang="en-US"/>
+          </a:p>
+        </p:txBody>
+      </p:sp>
+      <p:sp>
+        <p:nvSpPr>
+          <p:cNvPr id="30" name="Text 28"/>
+          <p:cNvSpPr/>
+          <p:nvPr/>
+        </p:nvSpPr>
+        <p:spPr>
+          <a:xfrm>
+            <a:off x="8028432" y="1353312"/>
+            <a:ext cx="566928" cy="292608"/>
+          </a:xfrm>
+          <a:prstGeom prst="rect">
+            <a:avLst/>
+          </a:prstGeom>
+          <a:noFill/>
+          <a:ln/>
+        </p:spPr>
+        <p:txBody>
+          <a:bodyPr wrap="square" lIns="0" tIns="0" rIns="0" bIns="0" rtlCol="0" anchor="ctr"/>
+          <a:lstStyle/>
+          <a:p>
+            <a:pPr marL="0" indent="0">
+              <a:buNone/>
+            </a:pPr>
+            <a:r>
+              <a:rPr lang="en-US" sz="1000" dirty="0">
+                <a:solidFill>
+                  <a:srgbClr val="64748B"/>
+                </a:solidFill>
+                <a:latin typeface="Calibri" pitchFamily="34" charset="0"/>
+                <a:ea typeface="Calibri" pitchFamily="34" charset="-122"/>
+                <a:cs typeface="Calibri" pitchFamily="34" charset="-120"/>
+              </a:rPr>
+              <a:t>0 / 40</a:t>
+            </a:r>
+            <a:endParaRPr lang="en-US" sz="1000" dirty="0"/>
+          </a:p>
+        </p:txBody>
+      </p:sp>
+      <p:sp>
+        <p:nvSpPr>
+          <p:cNvPr id="31" name="Text 29"/>
+          <p:cNvSpPr/>
+          <p:nvPr/>
+        </p:nvSpPr>
+        <p:spPr>
+          <a:xfrm>
+            <a:off x="4937760" y="1810512"/>
+            <a:ext cx="1280160" cy="292608"/>
+          </a:xfrm>
+          <a:prstGeom prst="rect">
+            <a:avLst/>
+          </a:prstGeom>
+          <a:noFill/>
+          <a:ln/>
+        </p:spPr>
+        <p:txBody>
+          <a:bodyPr wrap="square" lIns="0" tIns="0" rIns="0" bIns="0" rtlCol="0" anchor="ctr"/>
+          <a:lstStyle/>
+          <a:p>
+            <a:pPr marL="0" indent="0">
+              <a:buNone/>
+            </a:pPr>
+            <a:r>
+              <a:rPr lang="en-US" sz="1050" dirty="0">
+                <a:solidFill>
+                  <a:srgbClr val="1E293B"/>
+                </a:solidFill>
+                <a:latin typeface="Calibri" pitchFamily="34" charset="0"/>
+                <a:ea typeface="Calibri" pitchFamily="34" charset="-122"/>
+                <a:cs typeface="Calibri" pitchFamily="34" charset="-120"/>
+              </a:rPr>
+              <a:t>Code Quality</a:t>
+            </a:r>
+            <a:endParaRPr lang="en-US" sz="1050" dirty="0"/>
+          </a:p>
+        </p:txBody>
+      </p:sp>
+      <p:sp>
+        <p:nvSpPr>
+          <p:cNvPr id="32" name="Shape 30"/>
+          <p:cNvSpPr/>
+          <p:nvPr/>
+        </p:nvSpPr>
+        <p:spPr>
+          <a:xfrm>
+            <a:off x="6263640" y="1847088"/>
+            <a:ext cx="1691640" cy="219456"/>
+          </a:xfrm>
+          <a:prstGeom prst="rect">
+            <a:avLst/>
+          </a:prstGeom>
+          <a:solidFill>
+            <a:srgbClr val="D8DEE6"/>
+          </a:solidFill>
+          <a:ln w="12700">
+            <a:solidFill>
+              <a:srgbClr val="D8DEE6"/>
+            </a:solidFill>
+            <a:prstDash val="solid"/>
+          </a:ln>
+        </p:spPr>
+        <p:txBody>
+          <a:bodyPr/>
+          <a:lstStyle/>
+          <a:p>
+            <a:endParaRPr lang="en-US"/>
+          </a:p>
+        </p:txBody>
+      </p:sp>
+      <p:sp>
+        <p:nvSpPr>
+          <p:cNvPr id="33" name="Shape 31"/>
+          <p:cNvSpPr/>
+          <p:nvPr/>
+        </p:nvSpPr>
+        <p:spPr>
+          <a:xfrm>
+            <a:off x="6263640" y="1847088"/>
+            <a:ext cx="1014984" cy="219456"/>
+          </a:xfrm>
+          <a:prstGeom prst="rect">
+            <a:avLst/>
+          </a:prstGeom>
+          <a:solidFill>
+            <a:srgbClr val="D97706"/>
+          </a:solidFill>
+          <a:ln w="12700">
+            <a:solidFill>
+              <a:srgbClr val="D97706"/>
+            </a:solidFill>
+            <a:prstDash val="solid"/>
+          </a:ln>
+        </p:spPr>
+        <p:txBody>
+          <a:bodyPr/>
+          <a:lstStyle/>
+          <a:p>
+            <a:endParaRPr lang="en-US"/>
+          </a:p>
+        </p:txBody>
+      </p:sp>
+      <p:sp>
+        <p:nvSpPr>
+          <p:cNvPr id="34" name="Text 32"/>
+          <p:cNvSpPr/>
+          <p:nvPr/>
+        </p:nvSpPr>
+        <p:spPr>
+          <a:xfrm>
+            <a:off x="8028432" y="1810512"/>
+            <a:ext cx="566928" cy="292608"/>
+          </a:xfrm>
+          <a:prstGeom prst="rect">
+            <a:avLst/>
+          </a:prstGeom>
+          <a:noFill/>
+          <a:ln/>
+        </p:spPr>
+        <p:txBody>
+          <a:bodyPr wrap="square" lIns="0" tIns="0" rIns="0" bIns="0" rtlCol="0" anchor="ctr"/>
+          <a:lstStyle/>
+          <a:p>
+            <a:pPr marL="0" indent="0">
+              <a:buNone/>
+            </a:pPr>
+            <a:r>
+              <a:rPr lang="en-US" sz="1000" dirty="0">
+                <a:solidFill>
+                  <a:srgbClr val="64748B"/>
+                </a:solidFill>
+                <a:latin typeface="Calibri" pitchFamily="34" charset="0"/>
+                <a:ea typeface="Calibri" pitchFamily="34" charset="-122"/>
+                <a:cs typeface="Calibri" pitchFamily="34" charset="-120"/>
+              </a:rPr>
+              <a:t>12 / 20</a:t>
+            </a:r>
+            <a:endParaRPr lang="en-US" sz="1000" dirty="0"/>
+          </a:p>
+        </p:txBody>
+      </p:sp>
+      <p:sp>
+        <p:nvSpPr>
+          <p:cNvPr id="35" name="Text 33"/>
+          <p:cNvSpPr/>
+          <p:nvPr/>
+        </p:nvSpPr>
+        <p:spPr>
+          <a:xfrm>
+            <a:off x="4937760" y="2267712"/>
+            <a:ext cx="1280160" cy="292608"/>
+          </a:xfrm>
+          <a:prstGeom prst="rect">
+            <a:avLst/>
+          </a:prstGeom>
+          <a:noFill/>
+          <a:ln/>
+        </p:spPr>
+        <p:txBody>
+          <a:bodyPr wrap="square" lIns="0" tIns="0" rIns="0" bIns="0" rtlCol="0" anchor="ctr"/>
+          <a:lstStyle/>
+          <a:p>
+            <a:pPr marL="0" indent="0">
+              <a:buNone/>
+            </a:pPr>
+            <a:r>
+              <a:rPr lang="en-US" sz="1050" dirty="0">
+                <a:solidFill>
+                  <a:srgbClr val="1E293B"/>
+                </a:solidFill>
+                <a:latin typeface="Calibri" pitchFamily="34" charset="0"/>
+                <a:ea typeface="Calibri" pitchFamily="34" charset="-122"/>
+                <a:cs typeface="Calibri" pitchFamily="34" charset="-120"/>
+              </a:rPr>
+              <a:t>Architecture</a:t>
+            </a:r>
+            <a:endParaRPr lang="en-US" sz="1050" dirty="0"/>
+          </a:p>
+        </p:txBody>
+      </p:sp>
+      <p:sp>
+        <p:nvSpPr>
+          <p:cNvPr id="36" name="Shape 34"/>
+          <p:cNvSpPr/>
+          <p:nvPr/>
+        </p:nvSpPr>
+        <p:spPr>
+          <a:xfrm>
+            <a:off x="6263640" y="2304288"/>
+            <a:ext cx="1691640" cy="219456"/>
+          </a:xfrm>
+          <a:prstGeom prst="rect">
+            <a:avLst/>
+          </a:prstGeom>
+          <a:solidFill>
+            <a:srgbClr val="D8DEE6"/>
+          </a:solidFill>
+          <a:ln w="12700">
+            <a:solidFill>
+              <a:srgbClr val="D8DEE6"/>
+            </a:solidFill>
+            <a:prstDash val="solid"/>
+          </a:ln>
+        </p:spPr>
+        <p:txBody>
+          <a:bodyPr/>
+          <a:lstStyle/>
+          <a:p>
+            <a:endParaRPr lang="en-US"/>
+          </a:p>
+        </p:txBody>
+      </p:sp>
+      <p:sp>
+        <p:nvSpPr>
+          <p:cNvPr id="37" name="Shape 35"/>
+          <p:cNvSpPr/>
+          <p:nvPr/>
+        </p:nvSpPr>
+        <p:spPr>
+          <a:xfrm>
+            <a:off x="6263640" y="2304288"/>
+            <a:ext cx="1082650" cy="219456"/>
+          </a:xfrm>
+          <a:prstGeom prst="rect">
+            <a:avLst/>
+          </a:prstGeom>
+          <a:solidFill>
+            <a:srgbClr val="1C4E80"/>
+          </a:solidFill>
+          <a:ln w="12700">
+            <a:solidFill>
+              <a:srgbClr val="1C4E80"/>
+            </a:solidFill>
+            <a:prstDash val="solid"/>
+          </a:ln>
+        </p:spPr>
+        <p:txBody>
+          <a:bodyPr/>
+          <a:lstStyle/>
+          <a:p>
+            <a:endParaRPr lang="en-US"/>
+          </a:p>
+        </p:txBody>
+      </p:sp>
+      <p:sp>
+        <p:nvSpPr>
+          <p:cNvPr id="38" name="Text 36"/>
+          <p:cNvSpPr/>
+          <p:nvPr/>
+        </p:nvSpPr>
+        <p:spPr>
+          <a:xfrm>
+            <a:off x="8028432" y="2267712"/>
+            <a:ext cx="566928" cy="292608"/>
+          </a:xfrm>
+          <a:prstGeom prst="rect">
+            <a:avLst/>
+          </a:prstGeom>
+          <a:noFill/>
+          <a:ln/>
+        </p:spPr>
+        <p:txBody>
+          <a:bodyPr wrap="square" lIns="0" tIns="0" rIns="0" bIns="0" rtlCol="0" anchor="ctr"/>
+          <a:lstStyle/>
+          <a:p>
+            <a:pPr marL="0" indent="0">
+              <a:buNone/>
+            </a:pPr>
+            <a:r>
+              <a:rPr lang="en-US" sz="1000" dirty="0">
+                <a:solidFill>
+                  <a:srgbClr val="64748B"/>
+                </a:solidFill>
+                <a:latin typeface="Calibri" pitchFamily="34" charset="0"/>
+                <a:ea typeface="Calibri" pitchFamily="34" charset="-122"/>
+                <a:cs typeface="Calibri" pitchFamily="34" charset="-120"/>
+              </a:rPr>
+              <a:t>16 / 25</a:t>
+            </a:r>
+            <a:endParaRPr lang="en-US" sz="1000" dirty="0"/>
+          </a:p>
+        </p:txBody>
+      </p:sp>
+      <p:sp>
+        <p:nvSpPr>
+          <p:cNvPr id="39" name="Text 37"/>
+          <p:cNvSpPr/>
+          <p:nvPr/>
+        </p:nvSpPr>
+        <p:spPr>
+          <a:xfrm>
+            <a:off x="4937760" y="2724912"/>
+            <a:ext cx="1280160" cy="292608"/>
+          </a:xfrm>
+          <a:prstGeom prst="rect">
+            <a:avLst/>
+          </a:prstGeom>
+          <a:noFill/>
+          <a:ln/>
+        </p:spPr>
+        <p:txBody>
+          <a:bodyPr wrap="square" lIns="0" tIns="0" rIns="0" bIns="0" rtlCol="0" anchor="ctr"/>
+          <a:lstStyle/>
+          <a:p>
+            <a:pPr marL="0" indent="0">
+              <a:buNone/>
+            </a:pPr>
+            <a:r>
+              <a:rPr lang="en-US" sz="1050" dirty="0">
+                <a:solidFill>
+                  <a:srgbClr val="1E293B"/>
+                </a:solidFill>
+                <a:latin typeface="Calibri" pitchFamily="34" charset="0"/>
+                <a:ea typeface="Calibri" pitchFamily="34" charset="-122"/>
+                <a:cs typeface="Calibri" pitchFamily="34" charset="-120"/>
+              </a:rPr>
+              <a:t>Service Sizing</a:t>
+            </a:r>
+            <a:endParaRPr lang="en-US" sz="1050" dirty="0"/>
+          </a:p>
+        </p:txBody>
+      </p:sp>
+      <p:sp>
+        <p:nvSpPr>
+          <p:cNvPr id="40" name="Shape 38"/>
+          <p:cNvSpPr/>
+          <p:nvPr/>
+        </p:nvSpPr>
+        <p:spPr>
+          <a:xfrm>
+            <a:off x="6263640" y="2761488"/>
+            <a:ext cx="1691640" cy="219456"/>
+          </a:xfrm>
+          <a:prstGeom prst="rect">
+            <a:avLst/>
+          </a:prstGeom>
+          <a:solidFill>
+            <a:srgbClr val="D8DEE6"/>
+          </a:solidFill>
+          <a:ln w="12700">
+            <a:solidFill>
+              <a:srgbClr val="D8DEE6"/>
+            </a:solidFill>
+            <a:prstDash val="solid"/>
+          </a:ln>
+        </p:spPr>
+        <p:txBody>
+          <a:bodyPr/>
+          <a:lstStyle/>
+          <a:p>
+            <a:endParaRPr lang="en-US"/>
+          </a:p>
+        </p:txBody>
+      </p:sp>
+      <p:sp>
+        <p:nvSpPr>
+          <p:cNvPr id="41" name="Shape 39"/>
+          <p:cNvSpPr/>
+          <p:nvPr/>
+        </p:nvSpPr>
+        <p:spPr>
+          <a:xfrm>
+            <a:off x="6263640" y="2761488"/>
+            <a:ext cx="1353312" cy="219456"/>
+          </a:xfrm>
+          <a:prstGeom prst="rect">
+            <a:avLst/>
+          </a:prstGeom>
+          <a:solidFill>
+            <a:srgbClr val="0D9488"/>
+          </a:solidFill>
+          <a:ln w="12700">
+            <a:solidFill>
+              <a:srgbClr val="0D9488"/>
+            </a:solidFill>
+            <a:prstDash val="solid"/>
+          </a:ln>
+        </p:spPr>
+        <p:txBody>
+          <a:bodyPr/>
+          <a:lstStyle/>
+          <a:p>
+            <a:endParaRPr lang="en-US"/>
+          </a:p>
+        </p:txBody>
+      </p:sp>
+      <p:sp>
+        <p:nvSpPr>
+          <p:cNvPr id="42" name="Text 40"/>
+          <p:cNvSpPr/>
+          <p:nvPr/>
+        </p:nvSpPr>
+        <p:spPr>
+          <a:xfrm>
+            <a:off x="8028432" y="2724912"/>
+            <a:ext cx="566928" cy="292608"/>
+          </a:xfrm>
+          <a:prstGeom prst="rect">
+            <a:avLst/>
+          </a:prstGeom>
+          <a:noFill/>
+          <a:ln/>
+        </p:spPr>
+        <p:txBody>
+          <a:bodyPr wrap="square" lIns="0" tIns="0" rIns="0" bIns="0" rtlCol="0" anchor="ctr"/>
+          <a:lstStyle/>
+          <a:p>
+            <a:pPr marL="0" indent="0">
+              <a:buNone/>
+            </a:pPr>
+            <a:r>
+              <a:rPr lang="en-US" sz="1000" dirty="0">
+                <a:solidFill>
+                  <a:srgbClr val="64748B"/>
+                </a:solidFill>
+                <a:latin typeface="Calibri" pitchFamily="34" charset="0"/>
+                <a:ea typeface="Calibri" pitchFamily="34" charset="-122"/>
+                <a:cs typeface="Calibri" pitchFamily="34" charset="-120"/>
+              </a:rPr>
+              <a:t>12 / 15</a:t>
+            </a:r>
+            <a:endParaRPr lang="en-US" sz="1000" dirty="0"/>
+          </a:p>
+        </p:txBody>
+      </p:sp>
+      <p:sp>
+        <p:nvSpPr>
+          <p:cNvPr id="43" name="Text 41"/>
+          <p:cNvSpPr/>
+          <p:nvPr/>
+        </p:nvSpPr>
+        <p:spPr>
+          <a:xfrm>
+            <a:off x="4937760" y="3429000"/>
+            <a:ext cx="3657600" cy="777240"/>
+          </a:xfrm>
+          <a:prstGeom prst="rect">
+            <a:avLst/>
+          </a:prstGeom>
+          <a:noFill/>
+          <a:ln/>
+        </p:spPr>
+        <p:txBody>
+          <a:bodyPr wrap="square" lIns="0" tIns="0" rIns="0" bIns="0" rtlCol="0" anchor="ctr"/>
+          <a:lstStyle/>
+          <a:p>
+            <a:pPr marL="0" indent="0">
+              <a:buNone/>
+            </a:pPr>
+            <a:r>
+              <a:rPr lang="en-US" sz="4000" b="1" dirty="0">
+                <a:solidFill>
+                  <a:srgbClr val="DC2626"/>
+                </a:solidFill>
+                <a:latin typeface="Calibri" pitchFamily="34" charset="0"/>
+                <a:ea typeface="Calibri" pitchFamily="34" charset="-122"/>
+                <a:cs typeface="Calibri" pitchFamily="34" charset="-120"/>
+              </a:rPr>
+              <a:t>40</a:t>
+            </a:r>
+            <a:r>
+              <a:rPr lang="en-US" sz="1400" b="1" dirty="0">
+                <a:solidFill>
+                  <a:srgbClr val="0F2A44"/>
+                </a:solidFill>
+                <a:latin typeface="Calibri" pitchFamily="34" charset="0"/>
+                <a:ea typeface="Calibri" pitchFamily="34" charset="-122"/>
+                <a:cs typeface="Calibri" pitchFamily="34" charset="-120"/>
+              </a:rPr>
+              <a:t>  / 100  ·  Grade F</a:t>
+            </a:r>
+            <a:endParaRPr lang="en-US" sz="4000" dirty="0"/>
+          </a:p>
+        </p:txBody>
+      </p:sp>
+      <p:sp>
+        <p:nvSpPr>
+          <p:cNvPr id="45" name="Text 43"/>
+          <p:cNvSpPr/>
+          <p:nvPr/>
+        </p:nvSpPr>
+        <p:spPr>
+          <a:xfrm>
+            <a:off x="7955280" y="4864608"/>
+            <a:ext cx="640080" cy="228600"/>
+          </a:xfrm>
+          <a:prstGeom prst="rect">
+            <a:avLst/>
+          </a:prstGeom>
+          <a:noFill/>
+          <a:ln/>
+        </p:spPr>
+        <p:txBody>
+          <a:bodyPr wrap="square" lIns="0" tIns="0" rIns="0" bIns="0" rtlCol="0" anchor="ctr"/>
+          <a:lstStyle/>
+          <a:p>
+            <a:pPr marL="0" indent="0" algn="r">
+              <a:buNone/>
+            </a:pPr>
+            <a:r>
+              <a:rPr lang="en-US" sz="900" dirty="0">
+                <a:solidFill>
+                  <a:srgbClr val="64748B"/>
+                </a:solidFill>
+                <a:latin typeface="Calibri" pitchFamily="34" charset="0"/>
+                <a:ea typeface="Calibri" pitchFamily="34" charset="-122"/>
+                <a:cs typeface="Calibri" pitchFamily="34" charset="-120"/>
+              </a:rPr>
+              <a:t>8 / 12</a:t>
+            </a:r>
+            <a:endParaRPr lang="en-US" sz="900" dirty="0"/>
+          </a:p>
+        </p:txBody>
+      </p:sp>
+    </p:spTree>
+  </p:cSld>
+  <p:clrMapOvr>
+    <a:masterClrMapping/>
+  </p:clrMapOvr>
+</p:sld>
+</file>
+
+<file path=ppt/slides/slide15.xml><?xml version="1.0" encoding="utf-8"?>
+<p:sld xmlns:a="http://schemas.openxmlformats.org/drawingml/2006/main" xmlns:r="http://schemas.openxmlformats.org/officeDocument/2006/relationships" xmlns:p="http://schemas.openxmlformats.org/presentationml/2006/main">
+  <p:cSld>
+    <p:spTree>
+      <p:nvGrpSpPr>
+        <p:cNvPr id="1" name=""/>
+        <p:cNvGrpSpPr/>
+        <p:nvPr/>
+      </p:nvGrpSpPr>
+      <p:grpSpPr>
+        <a:xfrm>
+          <a:off x="0" y="0"/>
+          <a:ext cx="0" cy="0"/>
+          <a:chOff x="0" y="0"/>
+          <a:chExt cx="0" cy="0"/>
+        </a:xfrm>
+      </p:grpSpPr>
+      <p:sp>
+        <p:nvSpPr>
+          <p:cNvPr id="2" name="Text 0"/>
+          <p:cNvSpPr/>
+          <p:nvPr/>
+        </p:nvSpPr>
+        <p:spPr>
+          <a:xfrm>
+            <a:off x="548640" y="256032"/>
+            <a:ext cx="8046720" cy="502920"/>
+          </a:xfrm>
+          <a:prstGeom prst="rect">
+            <a:avLst/>
+          </a:prstGeom>
+          <a:noFill/>
+          <a:ln/>
+        </p:spPr>
+        <p:txBody>
+          <a:bodyPr wrap="square" lIns="0" tIns="0" rIns="0" bIns="0" rtlCol="0" anchor="ctr"/>
+          <a:lstStyle/>
+          <a:p>
+            <a:pPr marL="0" indent="0">
+              <a:buNone/>
+            </a:pPr>
+            <a:r>
+              <a:rPr lang="en-US" sz="2500" b="1" dirty="0">
+                <a:solidFill>
+                  <a:srgbClr val="0F2A44"/>
+                </a:solidFill>
+                <a:latin typeface="Calibri" pitchFamily="34" charset="0"/>
+                <a:ea typeface="Calibri" pitchFamily="34" charset="-122"/>
+                <a:cs typeface="Calibri" pitchFamily="34" charset="-120"/>
+              </a:rPr>
+              <a:t>Related work positioning</a:t>
+            </a:r>
+            <a:endParaRPr lang="en-US" sz="2500" dirty="0"/>
+          </a:p>
+        </p:txBody>
+      </p:sp>
+      <p:sp>
+        <p:nvSpPr>
+          <p:cNvPr id="3" name="Shape 1"/>
+          <p:cNvSpPr/>
+          <p:nvPr/>
+        </p:nvSpPr>
+        <p:spPr>
+          <a:xfrm>
+            <a:off x="548640" y="841248"/>
+            <a:ext cx="8046720" cy="13716"/>
+          </a:xfrm>
+          <a:prstGeom prst="rect">
+            <a:avLst/>
+          </a:prstGeom>
+          <a:solidFill>
+            <a:srgbClr val="D8DEE6"/>
+          </a:solidFill>
+          <a:ln w="12700">
+            <a:solidFill>
+              <a:srgbClr val="D8DEE6"/>
+            </a:solidFill>
+            <a:prstDash val="solid"/>
+          </a:ln>
+        </p:spPr>
+      </p:sp>
+      <p:sp>
+        <p:nvSpPr>
+          <p:cNvPr id="4" name="Text 2"/>
+          <p:cNvSpPr/>
+          <p:nvPr/>
+        </p:nvSpPr>
+        <p:spPr>
+          <a:xfrm>
+            <a:off x="548640" y="969264"/>
+            <a:ext cx="8046720" cy="310896"/>
+          </a:xfrm>
+          <a:prstGeom prst="rect">
+            <a:avLst/>
+          </a:prstGeom>
+          <a:noFill/>
+          <a:ln/>
+        </p:spPr>
+        <p:txBody>
+          <a:bodyPr wrap="square" lIns="0" tIns="0" rIns="0" bIns="0" rtlCol="0" anchor="ctr"/>
+          <a:lstStyle/>
+          <a:p>
+            <a:pPr marL="0" indent="0">
+              <a:buNone/>
+            </a:pPr>
+            <a:r>
+              <a:rPr lang="en-US" sz="1250" i="1" dirty="0">
+                <a:solidFill>
+                  <a:srgbClr val="64748B"/>
+                </a:solidFill>
+                <a:latin typeface="Calibri" pitchFamily="34" charset="0"/>
+                <a:ea typeface="Calibri" pitchFamily="34" charset="-122"/>
+                <a:cs typeface="Calibri" pitchFamily="34" charset="-120"/>
+              </a:rPr>
+              <a:t>The gap is not detection alone; it is actionable, evidence-based architectural diagnosis</a:t>
+            </a:r>
+            <a:endParaRPr lang="en-US" sz="1250" dirty="0"/>
+          </a:p>
+        </p:txBody>
+      </p:sp>
+      <p:sp>
+        <p:nvSpPr>
+          <p:cNvPr id="5" name="Text 3"/>
+          <p:cNvSpPr/>
+          <p:nvPr/>
+        </p:nvSpPr>
+        <p:spPr>
+          <a:xfrm>
+            <a:off x="548640" y="1536192"/>
+            <a:ext cx="1234440" cy="256032"/>
+          </a:xfrm>
+          <a:prstGeom prst="rect">
+            <a:avLst/>
+          </a:prstGeom>
+          <a:noFill/>
+          <a:ln/>
+        </p:spPr>
+        <p:txBody>
+          <a:bodyPr wrap="square" lIns="0" tIns="0" rIns="0" bIns="0" rtlCol="0" anchor="ctr"/>
+          <a:lstStyle/>
+          <a:p>
+            <a:pPr marL="0" indent="0">
+              <a:buNone/>
+            </a:pPr>
+            <a:r>
+              <a:rPr lang="en-US" sz="850" b="1" kern="0" spc="150" dirty="0">
+                <a:solidFill>
+                  <a:srgbClr val="0F2A44"/>
+                </a:solidFill>
+                <a:latin typeface="Calibri" pitchFamily="34" charset="0"/>
+                <a:ea typeface="Calibri" pitchFamily="34" charset="-122"/>
+                <a:cs typeface="Calibri" pitchFamily="34" charset="-120"/>
+              </a:rPr>
+              <a:t>TOOL</a:t>
+            </a:r>
+            <a:endParaRPr lang="en-US" sz="850" dirty="0"/>
+          </a:p>
+        </p:txBody>
+      </p:sp>
+      <p:sp>
+        <p:nvSpPr>
+          <p:cNvPr id="6" name="Text 4"/>
+          <p:cNvSpPr/>
+          <p:nvPr/>
+        </p:nvSpPr>
+        <p:spPr>
+          <a:xfrm>
+            <a:off x="1783080" y="1536192"/>
+            <a:ext cx="1828800" cy="256032"/>
+          </a:xfrm>
+          <a:prstGeom prst="rect">
+            <a:avLst/>
+          </a:prstGeom>
+          <a:noFill/>
+          <a:ln/>
+        </p:spPr>
+        <p:txBody>
+          <a:bodyPr wrap="square" lIns="0" tIns="0" rIns="0" bIns="0" rtlCol="0" anchor="ctr"/>
+          <a:lstStyle/>
+          <a:p>
+            <a:pPr marL="0" indent="0">
+              <a:buNone/>
+            </a:pPr>
+            <a:r>
+              <a:rPr lang="en-US" sz="850" b="1" kern="0" spc="150" dirty="0">
+                <a:solidFill>
+                  <a:srgbClr val="0F2A44"/>
+                </a:solidFill>
+                <a:latin typeface="Calibri" pitchFamily="34" charset="0"/>
+                <a:ea typeface="Calibri" pitchFamily="34" charset="-122"/>
+                <a:cs typeface="Calibri" pitchFamily="34" charset="-120"/>
+              </a:rPr>
+              <a:t>PRIMARY FOCUS</a:t>
+            </a:r>
+            <a:endParaRPr lang="en-US" sz="850" dirty="0"/>
+          </a:p>
+        </p:txBody>
+      </p:sp>
+      <p:sp>
+        <p:nvSpPr>
+          <p:cNvPr id="7" name="Text 5"/>
+          <p:cNvSpPr/>
+          <p:nvPr/>
+        </p:nvSpPr>
+        <p:spPr>
+          <a:xfrm>
+            <a:off x="3703320" y="1536192"/>
+            <a:ext cx="1600200" cy="256032"/>
+          </a:xfrm>
+          <a:prstGeom prst="rect">
+            <a:avLst/>
+          </a:prstGeom>
+          <a:noFill/>
+          <a:ln/>
+        </p:spPr>
+        <p:txBody>
+          <a:bodyPr wrap="square" lIns="0" tIns="0" rIns="0" bIns="0" rtlCol="0" anchor="ctr"/>
+          <a:lstStyle/>
+          <a:p>
+            <a:pPr marL="0" indent="0">
+              <a:buNone/>
+            </a:pPr>
+            <a:r>
+              <a:rPr lang="en-US" sz="850" b="1" kern="0" spc="150" dirty="0">
+                <a:solidFill>
+                  <a:srgbClr val="0F2A44"/>
+                </a:solidFill>
+                <a:latin typeface="Calibri" pitchFamily="34" charset="0"/>
+                <a:ea typeface="Calibri" pitchFamily="34" charset="-122"/>
+                <a:cs typeface="Calibri" pitchFamily="34" charset="-120"/>
+              </a:rPr>
+              <a:t>SERVICE BOUNDARY</a:t>
+            </a:r>
+            <a:endParaRPr lang="en-US" sz="850" dirty="0"/>
+          </a:p>
+        </p:txBody>
+      </p:sp>
+      <p:sp>
+        <p:nvSpPr>
+          <p:cNvPr id="8" name="Text 6"/>
+          <p:cNvSpPr/>
+          <p:nvPr/>
+        </p:nvSpPr>
+        <p:spPr>
+          <a:xfrm>
+            <a:off x="5440680" y="1536192"/>
+            <a:ext cx="1234440" cy="256032"/>
+          </a:xfrm>
+          <a:prstGeom prst="rect">
+            <a:avLst/>
+          </a:prstGeom>
+          <a:noFill/>
+          <a:ln/>
+        </p:spPr>
+        <p:txBody>
+          <a:bodyPr wrap="square" lIns="0" tIns="0" rIns="0" bIns="0" rtlCol="0" anchor="ctr"/>
+          <a:lstStyle/>
+          <a:p>
+            <a:pPr marL="0" indent="0">
+              <a:buNone/>
+            </a:pPr>
+            <a:r>
+              <a:rPr lang="en-US" sz="850" b="1" kern="0" spc="150" dirty="0">
+                <a:solidFill>
+                  <a:srgbClr val="0F2A44"/>
+                </a:solidFill>
+                <a:latin typeface="Calibri" pitchFamily="34" charset="0"/>
+                <a:ea typeface="Calibri" pitchFamily="34" charset="-122"/>
+                <a:cs typeface="Calibri" pitchFamily="34" charset="-120"/>
+              </a:rPr>
+              <a:t>CODE EVIDENCE</a:t>
+            </a:r>
+            <a:endParaRPr lang="en-US" sz="850" dirty="0"/>
+          </a:p>
+        </p:txBody>
+      </p:sp>
+      <p:sp>
+        <p:nvSpPr>
+          <p:cNvPr id="9" name="Text 7"/>
+          <p:cNvSpPr/>
+          <p:nvPr/>
+        </p:nvSpPr>
+        <p:spPr>
+          <a:xfrm>
+            <a:off x="6720840" y="1536192"/>
+            <a:ext cx="1874520" cy="256032"/>
+          </a:xfrm>
+          <a:prstGeom prst="rect">
+            <a:avLst/>
+          </a:prstGeom>
+          <a:noFill/>
+          <a:ln/>
+        </p:spPr>
+        <p:txBody>
+          <a:bodyPr wrap="square" lIns="0" tIns="0" rIns="0" bIns="0" rtlCol="0" anchor="ctr"/>
+          <a:lstStyle/>
+          <a:p>
+            <a:pPr marL="0" indent="0">
+              <a:buNone/>
+            </a:pPr>
+            <a:r>
+              <a:rPr lang="en-US" sz="850" b="1" kern="0" spc="150" dirty="0">
+                <a:solidFill>
+                  <a:srgbClr val="0F2A44"/>
+                </a:solidFill>
+                <a:latin typeface="Calibri" pitchFamily="34" charset="0"/>
+                <a:ea typeface="Calibri" pitchFamily="34" charset="-122"/>
+                <a:cs typeface="Calibri" pitchFamily="34" charset="-120"/>
+              </a:rPr>
+              <a:t>DEVELOPER OUTPUT</a:t>
+            </a:r>
+            <a:endParaRPr lang="en-US" sz="850" dirty="0"/>
+          </a:p>
+        </p:txBody>
+      </p:sp>
+      <p:sp>
+        <p:nvSpPr>
+          <p:cNvPr id="10" name="Shape 8"/>
+          <p:cNvSpPr/>
+          <p:nvPr/>
+        </p:nvSpPr>
+        <p:spPr>
+          <a:xfrm>
+            <a:off x="548640" y="1847088"/>
+            <a:ext cx="8046720" cy="13716"/>
+          </a:xfrm>
+          <a:prstGeom prst="rect">
+            <a:avLst/>
+          </a:prstGeom>
+          <a:solidFill>
+            <a:srgbClr val="D8DEE6"/>
+          </a:solidFill>
+          <a:ln w="12700">
+            <a:solidFill>
+              <a:srgbClr val="D8DEE6"/>
+            </a:solidFill>
+            <a:prstDash val="solid"/>
+          </a:ln>
+        </p:spPr>
+      </p:sp>
+      <p:sp>
+        <p:nvSpPr>
+          <p:cNvPr id="11" name="Text 9"/>
+          <p:cNvSpPr/>
+          <p:nvPr/>
+        </p:nvSpPr>
+        <p:spPr>
+          <a:xfrm>
+            <a:off x="548640" y="1993392"/>
+            <a:ext cx="1234440" cy="384048"/>
+          </a:xfrm>
+          <a:prstGeom prst="rect">
+            <a:avLst/>
+          </a:prstGeom>
+          <a:noFill/>
+          <a:ln/>
+        </p:spPr>
+        <p:txBody>
+          <a:bodyPr wrap="square" lIns="0" tIns="0" rIns="0" bIns="0" rtlCol="0" anchor="ctr">
+            <a:normAutofit/>
+          </a:bodyPr>
+          <a:lstStyle/>
+          <a:p>
+            <a:pPr marL="0" indent="0">
+              <a:buNone/>
+            </a:pPr>
+            <a:r>
+              <a:rPr lang="en-US" sz="1050" b="1" dirty="0">
+                <a:solidFill>
+                  <a:srgbClr val="1E293B"/>
+                </a:solidFill>
+                <a:latin typeface="Calibri" pitchFamily="34" charset="0"/>
+                <a:ea typeface="Calibri" pitchFamily="34" charset="-122"/>
+                <a:cs typeface="Calibri" pitchFamily="34" charset="-120"/>
+              </a:rPr>
+              <a:t>Arcan</a:t>
+            </a:r>
+            <a:endParaRPr lang="en-US" sz="1050" dirty="0"/>
+          </a:p>
+        </p:txBody>
+      </p:sp>
+      <p:sp>
+        <p:nvSpPr>
+          <p:cNvPr id="12" name="Text 10"/>
+          <p:cNvSpPr/>
+          <p:nvPr/>
+        </p:nvSpPr>
+        <p:spPr>
+          <a:xfrm>
+            <a:off x="1783080" y="1993392"/>
+            <a:ext cx="1828800" cy="384048"/>
+          </a:xfrm>
+          <a:prstGeom prst="rect">
+            <a:avLst/>
+          </a:prstGeom>
+          <a:noFill/>
+          <a:ln/>
+        </p:spPr>
+        <p:txBody>
+          <a:bodyPr wrap="square" lIns="0" tIns="0" rIns="0" bIns="0" rtlCol="0" anchor="ctr">
+            <a:normAutofit/>
+          </a:bodyPr>
+          <a:lstStyle/>
+          <a:p>
+            <a:pPr marL="0" indent="0">
+              <a:buNone/>
+            </a:pPr>
+            <a:r>
+              <a:rPr lang="en-US" sz="950" dirty="0">
+                <a:solidFill>
+                  <a:srgbClr val="1E293B"/>
+                </a:solidFill>
+                <a:latin typeface="Calibri" pitchFamily="34" charset="0"/>
+                <a:ea typeface="Calibri" pitchFamily="34" charset="-122"/>
+                <a:cs typeface="Calibri" pitchFamily="34" charset="-120"/>
+              </a:rPr>
+              <a:t>Architectural smells</a:t>
+            </a:r>
+            <a:endParaRPr lang="en-US" sz="950" dirty="0"/>
+          </a:p>
+        </p:txBody>
+      </p:sp>
+      <p:sp>
+        <p:nvSpPr>
+          <p:cNvPr id="13" name="Text 11"/>
+          <p:cNvSpPr/>
+          <p:nvPr/>
+        </p:nvSpPr>
+        <p:spPr>
+          <a:xfrm>
+            <a:off x="3703320" y="1993392"/>
+            <a:ext cx="1600200" cy="384048"/>
+          </a:xfrm>
+          <a:prstGeom prst="rect">
+            <a:avLst/>
+          </a:prstGeom>
+          <a:noFill/>
+          <a:ln/>
+        </p:spPr>
+        <p:txBody>
+          <a:bodyPr wrap="square" lIns="0" tIns="0" rIns="0" bIns="0" rtlCol="0" anchor="ctr">
+            <a:normAutofit/>
+          </a:bodyPr>
+          <a:lstStyle/>
+          <a:p>
+            <a:pPr marL="0" indent="0">
+              <a:buNone/>
+            </a:pPr>
+            <a:r>
+              <a:rPr lang="en-US" sz="950" dirty="0">
+                <a:solidFill>
+                  <a:srgbClr val="1E293B"/>
+                </a:solidFill>
+                <a:latin typeface="Calibri" pitchFamily="34" charset="0"/>
+                <a:ea typeface="Calibri" pitchFamily="34" charset="-122"/>
+                <a:cs typeface="Calibri" pitchFamily="34" charset="-120"/>
+              </a:rPr>
+              <a:t>Manual/system model</a:t>
+            </a:r>
+            <a:endParaRPr lang="en-US" sz="950" dirty="0"/>
+          </a:p>
+        </p:txBody>
+      </p:sp>
+      <p:sp>
+        <p:nvSpPr>
+          <p:cNvPr id="14" name="Text 12"/>
+          <p:cNvSpPr/>
+          <p:nvPr/>
+        </p:nvSpPr>
+        <p:spPr>
+          <a:xfrm>
+            <a:off x="5440680" y="1993392"/>
+            <a:ext cx="1234440" cy="384048"/>
+          </a:xfrm>
+          <a:prstGeom prst="rect">
+            <a:avLst/>
+          </a:prstGeom>
+          <a:noFill/>
+          <a:ln/>
+        </p:spPr>
+        <p:txBody>
+          <a:bodyPr wrap="square" lIns="0" tIns="0" rIns="0" bIns="0" rtlCol="0" anchor="ctr">
+            <a:normAutofit/>
+          </a:bodyPr>
+          <a:lstStyle/>
+          <a:p>
+            <a:pPr marL="0" indent="0">
+              <a:buNone/>
+            </a:pPr>
+            <a:r>
+              <a:rPr lang="en-US" sz="950" dirty="0">
+                <a:solidFill>
+                  <a:srgbClr val="1E293B"/>
+                </a:solidFill>
+                <a:latin typeface="Calibri" pitchFamily="34" charset="0"/>
+                <a:ea typeface="Calibri" pitchFamily="34" charset="-122"/>
+                <a:cs typeface="Calibri" pitchFamily="34" charset="-120"/>
+              </a:rPr>
+              <a:t>Limited</a:t>
+            </a:r>
+            <a:endParaRPr lang="en-US" sz="950" dirty="0"/>
+          </a:p>
+        </p:txBody>
+      </p:sp>
+      <p:sp>
+        <p:nvSpPr>
+          <p:cNvPr id="15" name="Text 13"/>
+          <p:cNvSpPr/>
+          <p:nvPr/>
+        </p:nvSpPr>
+        <p:spPr>
+          <a:xfrm>
+            <a:off x="6720840" y="1993392"/>
+            <a:ext cx="1874520" cy="384048"/>
+          </a:xfrm>
+          <a:prstGeom prst="rect">
+            <a:avLst/>
+          </a:prstGeom>
+          <a:noFill/>
+          <a:ln/>
+        </p:spPr>
+        <p:txBody>
+          <a:bodyPr wrap="square" lIns="0" tIns="0" rIns="0" bIns="0" rtlCol="0" anchor="ctr">
+            <a:normAutofit/>
+          </a:bodyPr>
+          <a:lstStyle/>
+          <a:p>
+            <a:pPr marL="0" indent="0">
+              <a:buNone/>
+            </a:pPr>
+            <a:r>
+              <a:rPr lang="en-US" sz="950" dirty="0">
+                <a:solidFill>
+                  <a:srgbClr val="1E293B"/>
+                </a:solidFill>
+                <a:latin typeface="Calibri" pitchFamily="34" charset="0"/>
+                <a:ea typeface="Calibri" pitchFamily="34" charset="-122"/>
+                <a:cs typeface="Calibri" pitchFamily="34" charset="-120"/>
+              </a:rPr>
+              <a:t>Tool output</a:t>
+            </a:r>
+            <a:endParaRPr lang="en-US" sz="950" dirty="0"/>
+          </a:p>
+        </p:txBody>
+      </p:sp>
+      <p:sp>
+        <p:nvSpPr>
+          <p:cNvPr id="16" name="Shape 14"/>
+          <p:cNvSpPr/>
+          <p:nvPr/>
+        </p:nvSpPr>
+        <p:spPr>
+          <a:xfrm>
+            <a:off x="548640" y="2432304"/>
+            <a:ext cx="8046720" cy="9144"/>
+          </a:xfrm>
+          <a:prstGeom prst="rect">
+            <a:avLst/>
+          </a:prstGeom>
+          <a:solidFill>
+            <a:srgbClr val="D8DEE6"/>
+          </a:solidFill>
+          <a:ln w="12700">
+            <a:solidFill>
+              <a:srgbClr val="D8DEE6"/>
+            </a:solidFill>
+            <a:prstDash val="solid"/>
+          </a:ln>
+        </p:spPr>
+      </p:sp>
+      <p:sp>
+        <p:nvSpPr>
+          <p:cNvPr id="17" name="Text 15"/>
+          <p:cNvSpPr/>
+          <p:nvPr/>
+        </p:nvSpPr>
+        <p:spPr>
+          <a:xfrm>
+            <a:off x="548640" y="2523744"/>
+            <a:ext cx="1234440" cy="384048"/>
+          </a:xfrm>
+          <a:prstGeom prst="rect">
+            <a:avLst/>
+          </a:prstGeom>
+          <a:noFill/>
+          <a:ln/>
+        </p:spPr>
+        <p:txBody>
+          <a:bodyPr wrap="square" lIns="0" tIns="0" rIns="0" bIns="0" rtlCol="0" anchor="ctr">
+            <a:normAutofit/>
+          </a:bodyPr>
+          <a:lstStyle/>
+          <a:p>
+            <a:pPr marL="0" indent="0">
+              <a:buNone/>
+            </a:pPr>
+            <a:r>
+              <a:rPr lang="en-US" sz="1050" b="1" dirty="0">
+                <a:solidFill>
+                  <a:srgbClr val="1E293B"/>
+                </a:solidFill>
+                <a:latin typeface="Calibri" pitchFamily="34" charset="0"/>
+                <a:ea typeface="Calibri" pitchFamily="34" charset="-122"/>
+                <a:cs typeface="Calibri" pitchFamily="34" charset="-120"/>
+              </a:rPr>
+              <a:t>MicroART</a:t>
+            </a:r>
+            <a:endParaRPr lang="en-US" sz="1050" dirty="0"/>
+          </a:p>
+        </p:txBody>
+      </p:sp>
+      <p:sp>
+        <p:nvSpPr>
+          <p:cNvPr id="18" name="Text 16"/>
+          <p:cNvSpPr/>
+          <p:nvPr/>
+        </p:nvSpPr>
+        <p:spPr>
+          <a:xfrm>
+            <a:off x="1783080" y="2523744"/>
+            <a:ext cx="1828800" cy="384048"/>
+          </a:xfrm>
+          <a:prstGeom prst="rect">
+            <a:avLst/>
+          </a:prstGeom>
+          <a:noFill/>
+          <a:ln/>
+        </p:spPr>
+        <p:txBody>
+          <a:bodyPr wrap="square" lIns="0" tIns="0" rIns="0" bIns="0" rtlCol="0" anchor="ctr">
+            <a:normAutofit/>
+          </a:bodyPr>
+          <a:lstStyle/>
+          <a:p>
+            <a:pPr marL="0" indent="0">
+              <a:buNone/>
+            </a:pPr>
+            <a:r>
+              <a:rPr lang="en-US" sz="950" dirty="0">
+                <a:solidFill>
+                  <a:srgbClr val="1E293B"/>
+                </a:solidFill>
+                <a:latin typeface="Calibri" pitchFamily="34" charset="0"/>
+                <a:ea typeface="Calibri" pitchFamily="34" charset="-122"/>
+                <a:cs typeface="Calibri" pitchFamily="34" charset="-120"/>
+              </a:rPr>
+              <a:t>Architecture recovery</a:t>
+            </a:r>
+            <a:endParaRPr lang="en-US" sz="950" dirty="0"/>
+          </a:p>
+        </p:txBody>
+      </p:sp>
+      <p:sp>
+        <p:nvSpPr>
+          <p:cNvPr id="19" name="Text 17"/>
+          <p:cNvSpPr/>
+          <p:nvPr/>
+        </p:nvSpPr>
+        <p:spPr>
+          <a:xfrm>
+            <a:off x="3703320" y="2523744"/>
+            <a:ext cx="1600200" cy="384048"/>
+          </a:xfrm>
+          <a:prstGeom prst="rect">
+            <a:avLst/>
+          </a:prstGeom>
+          <a:noFill/>
+          <a:ln/>
+        </p:spPr>
+        <p:txBody>
+          <a:bodyPr wrap="square" lIns="0" tIns="0" rIns="0" bIns="0" rtlCol="0" anchor="ctr">
+            <a:normAutofit/>
+          </a:bodyPr>
+          <a:lstStyle/>
+          <a:p>
+            <a:pPr marL="0" indent="0">
+              <a:buNone/>
+            </a:pPr>
+            <a:r>
+              <a:rPr lang="en-US" sz="950" dirty="0">
+                <a:solidFill>
+                  <a:srgbClr val="1E293B"/>
+                </a:solidFill>
+                <a:latin typeface="Calibri" pitchFamily="34" charset="0"/>
+                <a:ea typeface="Calibri" pitchFamily="34" charset="-122"/>
+                <a:cs typeface="Calibri" pitchFamily="34" charset="-120"/>
+              </a:rPr>
+              <a:t>Manual/project metadata</a:t>
+            </a:r>
+            <a:endParaRPr lang="en-US" sz="950" dirty="0"/>
+          </a:p>
+        </p:txBody>
+      </p:sp>
+      <p:sp>
+        <p:nvSpPr>
+          <p:cNvPr id="20" name="Text 18"/>
+          <p:cNvSpPr/>
+          <p:nvPr/>
+        </p:nvSpPr>
+        <p:spPr>
+          <a:xfrm>
+            <a:off x="5440680" y="2523744"/>
+            <a:ext cx="1234440" cy="384048"/>
+          </a:xfrm>
+          <a:prstGeom prst="rect">
+            <a:avLst/>
+          </a:prstGeom>
+          <a:noFill/>
+          <a:ln/>
+        </p:spPr>
+        <p:txBody>
+          <a:bodyPr wrap="square" lIns="0" tIns="0" rIns="0" bIns="0" rtlCol="0" anchor="ctr">
+            <a:normAutofit/>
+          </a:bodyPr>
+          <a:lstStyle/>
+          <a:p>
+            <a:pPr marL="0" indent="0">
+              <a:buNone/>
+            </a:pPr>
+            <a:r>
+              <a:rPr lang="en-US" sz="950" dirty="0">
+                <a:solidFill>
+                  <a:srgbClr val="1E293B"/>
+                </a:solidFill>
+                <a:latin typeface="Calibri" pitchFamily="34" charset="0"/>
+                <a:ea typeface="Calibri" pitchFamily="34" charset="-122"/>
+                <a:cs typeface="Calibri" pitchFamily="34" charset="-120"/>
+              </a:rPr>
+              <a:t>No</a:t>
+            </a:r>
+            <a:endParaRPr lang="en-US" sz="950" dirty="0"/>
+          </a:p>
+        </p:txBody>
+      </p:sp>
+      <p:sp>
+        <p:nvSpPr>
+          <p:cNvPr id="21" name="Text 19"/>
+          <p:cNvSpPr/>
+          <p:nvPr/>
+        </p:nvSpPr>
+        <p:spPr>
+          <a:xfrm>
+            <a:off x="6720840" y="2523744"/>
+            <a:ext cx="1874520" cy="384048"/>
+          </a:xfrm>
+          <a:prstGeom prst="rect">
+            <a:avLst/>
+          </a:prstGeom>
+          <a:noFill/>
+          <a:ln/>
+        </p:spPr>
+        <p:txBody>
+          <a:bodyPr wrap="square" lIns="0" tIns="0" rIns="0" bIns="0" rtlCol="0" anchor="ctr">
+            <a:normAutofit/>
+          </a:bodyPr>
+          <a:lstStyle/>
+          <a:p>
+            <a:pPr marL="0" indent="0">
+              <a:buNone/>
+            </a:pPr>
+            <a:r>
+              <a:rPr lang="en-US" sz="950" dirty="0">
+                <a:solidFill>
+                  <a:srgbClr val="1E293B"/>
+                </a:solidFill>
+                <a:latin typeface="Calibri" pitchFamily="34" charset="0"/>
+                <a:ea typeface="Calibri" pitchFamily="34" charset="-122"/>
+                <a:cs typeface="Calibri" pitchFamily="34" charset="-120"/>
+              </a:rPr>
+              <a:t>Visual recovery</a:t>
+            </a:r>
+            <a:endParaRPr lang="en-US" sz="950" dirty="0"/>
+          </a:p>
+        </p:txBody>
+      </p:sp>
+      <p:sp>
+        <p:nvSpPr>
+          <p:cNvPr id="22" name="Shape 20"/>
+          <p:cNvSpPr/>
+          <p:nvPr/>
+        </p:nvSpPr>
+        <p:spPr>
+          <a:xfrm>
+            <a:off x="548640" y="2962656"/>
+            <a:ext cx="8046720" cy="9144"/>
+          </a:xfrm>
+          <a:prstGeom prst="rect">
+            <a:avLst/>
+          </a:prstGeom>
+          <a:solidFill>
+            <a:srgbClr val="D8DEE6"/>
+          </a:solidFill>
+          <a:ln w="12700">
+            <a:solidFill>
+              <a:srgbClr val="D8DEE6"/>
+            </a:solidFill>
+            <a:prstDash val="solid"/>
+          </a:ln>
+        </p:spPr>
+      </p:sp>
+      <p:sp>
+        <p:nvSpPr>
+          <p:cNvPr id="23" name="Text 21"/>
+          <p:cNvSpPr/>
+          <p:nvPr/>
+        </p:nvSpPr>
+        <p:spPr>
+          <a:xfrm>
+            <a:off x="548640" y="3054096"/>
+            <a:ext cx="1234440" cy="384048"/>
+          </a:xfrm>
+          <a:prstGeom prst="rect">
+            <a:avLst/>
+          </a:prstGeom>
+          <a:noFill/>
+          <a:ln/>
+        </p:spPr>
+        <p:txBody>
+          <a:bodyPr wrap="square" lIns="0" tIns="0" rIns="0" bIns="0" rtlCol="0" anchor="ctr">
+            <a:normAutofit/>
+          </a:bodyPr>
+          <a:lstStyle/>
+          <a:p>
+            <a:pPr marL="0" indent="0">
+              <a:buNone/>
+            </a:pPr>
+            <a:r>
+              <a:rPr lang="en-US" sz="1050" b="1" dirty="0">
+                <a:solidFill>
+                  <a:srgbClr val="1E293B"/>
+                </a:solidFill>
+                <a:latin typeface="Calibri" pitchFamily="34" charset="0"/>
+                <a:ea typeface="Calibri" pitchFamily="34" charset="-122"/>
+                <a:cs typeface="Calibri" pitchFamily="34" charset="-120"/>
+              </a:rPr>
+              <a:t>MSANose / MARS</a:t>
+            </a:r>
+            <a:endParaRPr lang="en-US" sz="1050" dirty="0"/>
+          </a:p>
+        </p:txBody>
+      </p:sp>
+      <p:sp>
+        <p:nvSpPr>
+          <p:cNvPr id="24" name="Text 22"/>
+          <p:cNvSpPr/>
+          <p:nvPr/>
+        </p:nvSpPr>
+        <p:spPr>
+          <a:xfrm>
+            <a:off x="1783080" y="3054096"/>
+            <a:ext cx="1828800" cy="384048"/>
+          </a:xfrm>
+          <a:prstGeom prst="rect">
+            <a:avLst/>
+          </a:prstGeom>
+          <a:noFill/>
+          <a:ln/>
+        </p:spPr>
+        <p:txBody>
+          <a:bodyPr wrap="square" lIns="0" tIns="0" rIns="0" bIns="0" rtlCol="0" anchor="ctr">
+            <a:normAutofit/>
+          </a:bodyPr>
+          <a:lstStyle/>
+          <a:p>
+            <a:pPr marL="0" indent="0">
+              <a:buNone/>
+            </a:pPr>
+            <a:r>
+              <a:rPr lang="en-US" sz="950" dirty="0">
+                <a:solidFill>
+                  <a:srgbClr val="1E293B"/>
+                </a:solidFill>
+                <a:latin typeface="Calibri" pitchFamily="34" charset="0"/>
+                <a:ea typeface="Calibri" pitchFamily="34" charset="-122"/>
+                <a:cs typeface="Calibri" pitchFamily="34" charset="-120"/>
+              </a:rPr>
+              <a:t>Microservice smells</a:t>
+            </a:r>
+            <a:endParaRPr lang="en-US" sz="950" dirty="0"/>
+          </a:p>
+        </p:txBody>
+      </p:sp>
+      <p:sp>
+        <p:nvSpPr>
+          <p:cNvPr id="25" name="Text 23"/>
+          <p:cNvSpPr/>
+          <p:nvPr/>
+        </p:nvSpPr>
+        <p:spPr>
+          <a:xfrm>
+            <a:off x="3703320" y="3054096"/>
+            <a:ext cx="1600200" cy="384048"/>
+          </a:xfrm>
+          <a:prstGeom prst="rect">
+            <a:avLst/>
+          </a:prstGeom>
+          <a:noFill/>
+          <a:ln/>
+        </p:spPr>
+        <p:txBody>
+          <a:bodyPr wrap="square" lIns="0" tIns="0" rIns="0" bIns="0" rtlCol="0" anchor="ctr">
+            <a:normAutofit/>
+          </a:bodyPr>
+          <a:lstStyle/>
+          <a:p>
+            <a:pPr marL="0" indent="0">
+              <a:buNone/>
+            </a:pPr>
+            <a:r>
+              <a:rPr lang="en-US" sz="950" dirty="0">
+                <a:solidFill>
+                  <a:srgbClr val="1E293B"/>
+                </a:solidFill>
+                <a:latin typeface="Calibri" pitchFamily="34" charset="0"/>
+                <a:ea typeface="Calibri" pitchFamily="34" charset="-122"/>
+                <a:cs typeface="Calibri" pitchFamily="34" charset="-120"/>
+              </a:rPr>
+              <a:t>Varies by tool</a:t>
+            </a:r>
+            <a:endParaRPr lang="en-US" sz="950" dirty="0"/>
+          </a:p>
+        </p:txBody>
+      </p:sp>
+      <p:sp>
+        <p:nvSpPr>
+          <p:cNvPr id="26" name="Text 24"/>
+          <p:cNvSpPr/>
+          <p:nvPr/>
+        </p:nvSpPr>
+        <p:spPr>
+          <a:xfrm>
+            <a:off x="5440680" y="3054096"/>
+            <a:ext cx="1234440" cy="384048"/>
+          </a:xfrm>
+          <a:prstGeom prst="rect">
+            <a:avLst/>
+          </a:prstGeom>
+          <a:noFill/>
+          <a:ln/>
+        </p:spPr>
+        <p:txBody>
+          <a:bodyPr wrap="square" lIns="0" tIns="0" rIns="0" bIns="0" rtlCol="0" anchor="ctr">
+            <a:normAutofit/>
+          </a:bodyPr>
+          <a:lstStyle/>
+          <a:p>
+            <a:pPr marL="0" indent="0">
+              <a:buNone/>
+            </a:pPr>
+            <a:r>
+              <a:rPr lang="en-US" sz="950" dirty="0">
+                <a:solidFill>
+                  <a:srgbClr val="1E293B"/>
+                </a:solidFill>
+                <a:latin typeface="Calibri" pitchFamily="34" charset="0"/>
+                <a:ea typeface="Calibri" pitchFamily="34" charset="-122"/>
+                <a:cs typeface="Calibri" pitchFamily="34" charset="-120"/>
+              </a:rPr>
+              <a:t>Partial</a:t>
+            </a:r>
+            <a:endParaRPr lang="en-US" sz="950" dirty="0"/>
+          </a:p>
+        </p:txBody>
+      </p:sp>
+      <p:sp>
+        <p:nvSpPr>
+          <p:cNvPr id="27" name="Text 25"/>
+          <p:cNvSpPr/>
+          <p:nvPr/>
+        </p:nvSpPr>
+        <p:spPr>
+          <a:xfrm>
+            <a:off x="6720840" y="3054096"/>
+            <a:ext cx="1874520" cy="384048"/>
+          </a:xfrm>
+          <a:prstGeom prst="rect">
+            <a:avLst/>
+          </a:prstGeom>
+          <a:noFill/>
+          <a:ln/>
+        </p:spPr>
+        <p:txBody>
+          <a:bodyPr wrap="square" lIns="0" tIns="0" rIns="0" bIns="0" rtlCol="0" anchor="ctr">
+            <a:normAutofit/>
+          </a:bodyPr>
+          <a:lstStyle/>
+          <a:p>
+            <a:pPr marL="0" indent="0">
+              <a:buNone/>
+            </a:pPr>
+            <a:r>
+              <a:rPr lang="en-US" sz="950" dirty="0">
+                <a:solidFill>
+                  <a:srgbClr val="1E293B"/>
+                </a:solidFill>
+                <a:latin typeface="Calibri" pitchFamily="34" charset="0"/>
+                <a:ea typeface="Calibri" pitchFamily="34" charset="-122"/>
+                <a:cs typeface="Calibri" pitchFamily="34" charset="-120"/>
+              </a:rPr>
+              <a:t>Catalogue-driven</a:t>
+            </a:r>
+            <a:endParaRPr lang="en-US" sz="950" dirty="0"/>
+          </a:p>
+        </p:txBody>
+      </p:sp>
+      <p:sp>
+        <p:nvSpPr>
+          <p:cNvPr id="28" name="Shape 26"/>
+          <p:cNvSpPr/>
+          <p:nvPr/>
+        </p:nvSpPr>
+        <p:spPr>
+          <a:xfrm>
+            <a:off x="548640" y="3493008"/>
+            <a:ext cx="8046720" cy="9144"/>
+          </a:xfrm>
+          <a:prstGeom prst="rect">
+            <a:avLst/>
+          </a:prstGeom>
+          <a:solidFill>
+            <a:srgbClr val="D8DEE6"/>
+          </a:solidFill>
+          <a:ln w="12700">
+            <a:solidFill>
+              <a:srgbClr val="D8DEE6"/>
+            </a:solidFill>
+            <a:prstDash val="solid"/>
+          </a:ln>
+        </p:spPr>
+      </p:sp>
+      <p:sp>
+        <p:nvSpPr>
+          <p:cNvPr id="29" name="Shape 27"/>
+          <p:cNvSpPr/>
+          <p:nvPr/>
+        </p:nvSpPr>
+        <p:spPr>
+          <a:xfrm>
+            <a:off x="548640" y="3474720"/>
+            <a:ext cx="8046720" cy="32004"/>
+          </a:xfrm>
+          <a:prstGeom prst="rect">
+            <a:avLst/>
+          </a:prstGeom>
+          <a:solidFill>
+            <a:srgbClr val="0D9488"/>
+          </a:solidFill>
+          <a:ln w="12700">
+            <a:solidFill>
+              <a:srgbClr val="0D9488"/>
+            </a:solidFill>
+            <a:prstDash val="solid"/>
+          </a:ln>
+        </p:spPr>
+      </p:sp>
+      <p:sp>
+        <p:nvSpPr>
+          <p:cNvPr id="30" name="Text 28"/>
+          <p:cNvSpPr/>
+          <p:nvPr/>
+        </p:nvSpPr>
+        <p:spPr>
+          <a:xfrm>
+            <a:off x="548640" y="3584448"/>
+            <a:ext cx="1234440" cy="384048"/>
+          </a:xfrm>
+          <a:prstGeom prst="rect">
+            <a:avLst/>
+          </a:prstGeom>
+          <a:noFill/>
+          <a:ln/>
+        </p:spPr>
+        <p:txBody>
+          <a:bodyPr wrap="square" lIns="0" tIns="0" rIns="0" bIns="0" rtlCol="0" anchor="ctr">
+            <a:normAutofit/>
+          </a:bodyPr>
+          <a:lstStyle/>
+          <a:p>
+            <a:pPr marL="0" indent="0">
+              <a:buNone/>
+            </a:pPr>
+            <a:r>
+              <a:rPr lang="en-US" sz="1050" b="1" dirty="0">
+                <a:solidFill>
+                  <a:srgbClr val="0D9488"/>
+                </a:solidFill>
+                <a:latin typeface="Calibri" pitchFamily="34" charset="0"/>
+                <a:ea typeface="Calibri" pitchFamily="34" charset="-122"/>
+                <a:cs typeface="Calibri" pitchFamily="34" charset="-120"/>
+              </a:rPr>
+              <a:t>MSA Detector</a:t>
+            </a:r>
+            <a:endParaRPr lang="en-US" sz="1050" dirty="0"/>
+          </a:p>
+        </p:txBody>
+      </p:sp>
+      <p:sp>
+        <p:nvSpPr>
+          <p:cNvPr id="31" name="Text 29"/>
+          <p:cNvSpPr/>
+          <p:nvPr/>
+        </p:nvSpPr>
+        <p:spPr>
+          <a:xfrm>
+            <a:off x="1783080" y="3584448"/>
+            <a:ext cx="1828800" cy="384048"/>
+          </a:xfrm>
+          <a:prstGeom prst="rect">
+            <a:avLst/>
+          </a:prstGeom>
+          <a:noFill/>
+          <a:ln/>
+        </p:spPr>
+        <p:txBody>
+          <a:bodyPr wrap="square" lIns="0" tIns="0" rIns="0" bIns="0" rtlCol="0" anchor="ctr">
+            <a:normAutofit/>
+          </a:bodyPr>
+          <a:lstStyle/>
+          <a:p>
+            <a:pPr marL="0" indent="0">
+              <a:buNone/>
+            </a:pPr>
+            <a:r>
+              <a:rPr lang="en-US" sz="950" b="1" dirty="0">
+                <a:solidFill>
+                  <a:srgbClr val="1E293B"/>
+                </a:solidFill>
+                <a:latin typeface="Calibri" pitchFamily="34" charset="0"/>
+                <a:ea typeface="Calibri" pitchFamily="34" charset="-122"/>
+                <a:cs typeface="Calibri" pitchFamily="34" charset="-120"/>
+              </a:rPr>
+              <a:t>Multi-level anti-patterns</a:t>
+            </a:r>
+            <a:endParaRPr lang="en-US" sz="950" dirty="0"/>
+          </a:p>
+        </p:txBody>
+      </p:sp>
+      <p:sp>
+        <p:nvSpPr>
+          <p:cNvPr id="32" name="Text 30"/>
+          <p:cNvSpPr/>
+          <p:nvPr/>
+        </p:nvSpPr>
+        <p:spPr>
+          <a:xfrm>
+            <a:off x="3703320" y="3584448"/>
+            <a:ext cx="1600200" cy="384048"/>
+          </a:xfrm>
+          <a:prstGeom prst="rect">
+            <a:avLst/>
+          </a:prstGeom>
+          <a:noFill/>
+          <a:ln/>
+        </p:spPr>
+        <p:txBody>
+          <a:bodyPr wrap="square" lIns="0" tIns="0" rIns="0" bIns="0" rtlCol="0" anchor="ctr">
+            <a:normAutofit/>
+          </a:bodyPr>
+          <a:lstStyle/>
+          <a:p>
+            <a:pPr marL="0" indent="0">
+              <a:buNone/>
+            </a:pPr>
+            <a:r>
+              <a:rPr lang="en-US" sz="950" b="1" dirty="0">
+                <a:solidFill>
+                  <a:srgbClr val="1E293B"/>
+                </a:solidFill>
+                <a:latin typeface="Calibri" pitchFamily="34" charset="0"/>
+                <a:ea typeface="Calibri" pitchFamily="34" charset="-122"/>
+                <a:cs typeface="Calibri" pitchFamily="34" charset="-120"/>
+              </a:rPr>
+              <a:t>Automated deployability gate</a:t>
+            </a:r>
+            <a:endParaRPr lang="en-US" sz="950" dirty="0"/>
+          </a:p>
+        </p:txBody>
+      </p:sp>
+      <p:sp>
+        <p:nvSpPr>
+          <p:cNvPr id="33" name="Text 31"/>
+          <p:cNvSpPr/>
+          <p:nvPr/>
+        </p:nvSpPr>
+        <p:spPr>
+          <a:xfrm>
+            <a:off x="5440680" y="3584448"/>
+            <a:ext cx="1234440" cy="384048"/>
+          </a:xfrm>
+          <a:prstGeom prst="rect">
+            <a:avLst/>
+          </a:prstGeom>
+          <a:noFill/>
+          <a:ln/>
+        </p:spPr>
+        <p:txBody>
+          <a:bodyPr wrap="square" lIns="0" tIns="0" rIns="0" bIns="0" rtlCol="0" anchor="ctr">
+            <a:normAutofit/>
+          </a:bodyPr>
+          <a:lstStyle/>
+          <a:p>
+            <a:pPr marL="0" indent="0">
+              <a:buNone/>
+            </a:pPr>
+            <a:r>
+              <a:rPr lang="en-US" sz="950" b="1" dirty="0">
+                <a:solidFill>
+                  <a:srgbClr val="1E293B"/>
+                </a:solidFill>
+                <a:latin typeface="Calibri" pitchFamily="34" charset="0"/>
+                <a:ea typeface="Calibri" pitchFamily="34" charset="-122"/>
+                <a:cs typeface="Calibri" pitchFamily="34" charset="-120"/>
+              </a:rPr>
+              <a:t>Source snippets</a:t>
+            </a:r>
+            <a:endParaRPr lang="en-US" sz="950" dirty="0"/>
+          </a:p>
+        </p:txBody>
+      </p:sp>
+      <p:sp>
+        <p:nvSpPr>
+          <p:cNvPr id="34" name="Text 32"/>
+          <p:cNvSpPr/>
+          <p:nvPr/>
+        </p:nvSpPr>
+        <p:spPr>
+          <a:xfrm>
+            <a:off x="6720840" y="3584448"/>
+            <a:ext cx="1874520" cy="384048"/>
+          </a:xfrm>
+          <a:prstGeom prst="rect">
+            <a:avLst/>
+          </a:prstGeom>
+          <a:noFill/>
+          <a:ln/>
+        </p:spPr>
+        <p:txBody>
+          <a:bodyPr wrap="square" lIns="0" tIns="0" rIns="0" bIns="0" rtlCol="0" anchor="ctr">
+            <a:normAutofit/>
+          </a:bodyPr>
+          <a:lstStyle/>
+          <a:p>
+            <a:pPr marL="0" indent="0">
+              <a:buNone/>
+            </a:pPr>
+            <a:r>
+              <a:rPr lang="en-US" sz="950" b="1" dirty="0">
+                <a:solidFill>
+                  <a:srgbClr val="1E293B"/>
+                </a:solidFill>
+                <a:latin typeface="Calibri" pitchFamily="34" charset="0"/>
+                <a:ea typeface="Calibri" pitchFamily="34" charset="-122"/>
+                <a:cs typeface="Calibri" pitchFamily="34" charset="-120"/>
+              </a:rPr>
+              <a:t>Health score + remediation</a:t>
+            </a:r>
+            <a:endParaRPr lang="en-US" sz="950" dirty="0"/>
+          </a:p>
+        </p:txBody>
+      </p:sp>
+      <p:sp>
+        <p:nvSpPr>
+          <p:cNvPr id="35" name="Shape 33"/>
+          <p:cNvSpPr/>
+          <p:nvPr/>
+        </p:nvSpPr>
+        <p:spPr>
+          <a:xfrm>
+            <a:off x="548640" y="4023360"/>
+            <a:ext cx="8046720" cy="9144"/>
+          </a:xfrm>
+          <a:prstGeom prst="rect">
+            <a:avLst/>
+          </a:prstGeom>
+          <a:solidFill>
+            <a:srgbClr val="D8DEE6"/>
+          </a:solidFill>
+          <a:ln w="12700">
+            <a:solidFill>
+              <a:srgbClr val="D8DEE6"/>
+            </a:solidFill>
+            <a:prstDash val="solid"/>
+          </a:ln>
+        </p:spPr>
+      </p:sp>
+      <p:sp>
+        <p:nvSpPr>
+          <p:cNvPr id="36" name="Shape 34"/>
+          <p:cNvSpPr/>
+          <p:nvPr/>
+        </p:nvSpPr>
+        <p:spPr>
+          <a:xfrm>
+            <a:off x="548640" y="4343400"/>
+            <a:ext cx="457200" cy="36576"/>
+          </a:xfrm>
+          <a:prstGeom prst="rect">
+            <a:avLst/>
+          </a:prstGeom>
+          <a:solidFill>
+            <a:srgbClr val="0D9488"/>
+          </a:solidFill>
+          <a:ln w="12700">
+            <a:solidFill>
+              <a:srgbClr val="0D9488"/>
+            </a:solidFill>
+            <a:prstDash val="solid"/>
+          </a:ln>
+        </p:spPr>
+      </p:sp>
+      <p:sp>
+        <p:nvSpPr>
+          <p:cNvPr id="37" name="Text 35"/>
+          <p:cNvSpPr/>
+          <p:nvPr/>
+        </p:nvSpPr>
+        <p:spPr>
+          <a:xfrm>
+            <a:off x="548640" y="4462272"/>
+            <a:ext cx="8046720" cy="310896"/>
+          </a:xfrm>
+          <a:prstGeom prst="rect">
+            <a:avLst/>
+          </a:prstGeom>
+          <a:noFill/>
+          <a:ln/>
+        </p:spPr>
+        <p:txBody>
+          <a:bodyPr wrap="square" lIns="0" tIns="0" rIns="0" bIns="0" rtlCol="0" anchor="ctr"/>
+          <a:lstStyle/>
+          <a:p>
+            <a:pPr marL="0" indent="0">
+              <a:buNone/>
+            </a:pPr>
+            <a:r>
+              <a:rPr lang="en-US" sz="1100" b="1" dirty="0">
+                <a:solidFill>
+                  <a:srgbClr val="0F2A44"/>
+                </a:solidFill>
+                <a:latin typeface="Calibri" pitchFamily="34" charset="0"/>
+                <a:ea typeface="Calibri" pitchFamily="34" charset="-122"/>
+                <a:cs typeface="Calibri" pitchFamily="34" charset="-120"/>
+              </a:rPr>
+              <a:t>Positioning: combine static code analysis, recovered service dependencies, scoring, and source-level evidence in one workflow.</a:t>
+            </a:r>
+            <a:endParaRPr lang="en-US" sz="1100" dirty="0"/>
+          </a:p>
+        </p:txBody>
+      </p:sp>
+      <p:sp>
+        <p:nvSpPr>
+          <p:cNvPr id="38" name="Text 36"/>
+          <p:cNvSpPr/>
+          <p:nvPr/>
+        </p:nvSpPr>
+        <p:spPr>
+          <a:xfrm>
+            <a:off x="7955280" y="4864608"/>
+            <a:ext cx="640080" cy="228600"/>
+          </a:xfrm>
+          <a:prstGeom prst="rect">
+            <a:avLst/>
+          </a:prstGeom>
+          <a:noFill/>
+          <a:ln/>
+        </p:spPr>
+        <p:txBody>
+          <a:bodyPr wrap="square" lIns="0" tIns="0" rIns="0" bIns="0" rtlCol="0" anchor="ctr"/>
+          <a:lstStyle/>
+          <a:p>
+            <a:pPr marL="0" indent="0" algn="r">
+              <a:buNone/>
+            </a:pPr>
+            <a:r>
+              <a:rPr lang="en-US" sz="900" dirty="0">
+                <a:solidFill>
+                  <a:srgbClr val="64748B"/>
+                </a:solidFill>
+                <a:latin typeface="Calibri" pitchFamily="34" charset="0"/>
+                <a:ea typeface="Calibri" pitchFamily="34" charset="-122"/>
+                <a:cs typeface="Calibri" pitchFamily="34" charset="-120"/>
+              </a:rPr>
+              <a:t>3 / 15</a:t>
+            </a:r>
+            <a:endParaRPr lang="en-US" sz="900" dirty="0"/>
+          </a:p>
+        </p:txBody>
+      </p:sp>
+    </p:spTree>
+  </p:cSld>
+  <p:clrMapOvr>
+    <a:masterClrMapping/>
+  </p:clrMapOvr>
+</p:sld>
+</file>
+
+<file path=ppt/slides/slide16.xml><?xml version="1.0" encoding="utf-8"?>
+<p:sld xmlns:a="http://schemas.openxmlformats.org/drawingml/2006/main" xmlns:r="http://schemas.openxmlformats.org/officeDocument/2006/relationships" xmlns:p="http://schemas.openxmlformats.org/presentationml/2006/main">
+  <p:cSld>
+    <p:spTree>
+      <p:nvGrpSpPr>
+        <p:cNvPr id="1" name=""/>
+        <p:cNvGrpSpPr/>
+        <p:nvPr/>
+      </p:nvGrpSpPr>
+      <p:grpSpPr>
+        <a:xfrm>
+          <a:off x="0" y="0"/>
+          <a:ext cx="0" cy="0"/>
+          <a:chOff x="0" y="0"/>
+          <a:chExt cx="0" cy="0"/>
+        </a:xfrm>
+      </p:grpSpPr>
+      <p:sp>
+        <p:nvSpPr>
+          <p:cNvPr id="2" name="Text 0"/>
+          <p:cNvSpPr/>
+          <p:nvPr/>
+        </p:nvSpPr>
+        <p:spPr>
+          <a:xfrm>
+            <a:off x="548640" y="256032"/>
+            <a:ext cx="8046720" cy="502920"/>
+          </a:xfrm>
+          <a:prstGeom prst="rect">
+            <a:avLst/>
+          </a:prstGeom>
+          <a:noFill/>
+          <a:ln/>
+        </p:spPr>
+        <p:txBody>
+          <a:bodyPr wrap="square" lIns="0" tIns="0" rIns="0" bIns="0" rtlCol="0" anchor="ctr"/>
+          <a:lstStyle/>
+          <a:p>
+            <a:pPr marL="0" indent="0">
+              <a:buNone/>
+            </a:pPr>
+            <a:r>
+              <a:rPr lang="en-US" sz="2500" b="1" dirty="0">
+                <a:solidFill>
+                  <a:srgbClr val="0F2A44"/>
+                </a:solidFill>
+                <a:latin typeface="Calibri" pitchFamily="34" charset="0"/>
+                <a:ea typeface="Calibri" pitchFamily="34" charset="-122"/>
+                <a:cs typeface="Calibri" pitchFamily="34" charset="-120"/>
+              </a:rPr>
+              <a:t>Evaluation methodology</a:t>
+            </a:r>
+            <a:endParaRPr lang="en-US" sz="2500" dirty="0"/>
+          </a:p>
+        </p:txBody>
+      </p:sp>
+      <p:sp>
+        <p:nvSpPr>
+          <p:cNvPr id="3" name="Shape 1"/>
+          <p:cNvSpPr/>
+          <p:nvPr/>
+        </p:nvSpPr>
+        <p:spPr>
+          <a:xfrm>
+            <a:off x="548640" y="841248"/>
+            <a:ext cx="8046720" cy="13716"/>
+          </a:xfrm>
+          <a:prstGeom prst="rect">
+            <a:avLst/>
+          </a:prstGeom>
+          <a:solidFill>
+            <a:srgbClr val="D8DEE6"/>
+          </a:solidFill>
+          <a:ln w="12700">
+            <a:solidFill>
+              <a:srgbClr val="D8DEE6"/>
+            </a:solidFill>
+            <a:prstDash val="solid"/>
+          </a:ln>
+        </p:spPr>
+      </p:sp>
+      <p:sp>
+        <p:nvSpPr>
+          <p:cNvPr id="4" name="Text 2"/>
+          <p:cNvSpPr/>
+          <p:nvPr/>
+        </p:nvSpPr>
+        <p:spPr>
+          <a:xfrm>
+            <a:off x="548640" y="969264"/>
+            <a:ext cx="8046720" cy="310896"/>
+          </a:xfrm>
+          <a:prstGeom prst="rect">
+            <a:avLst/>
+          </a:prstGeom>
+          <a:noFill/>
+          <a:ln/>
+        </p:spPr>
+        <p:txBody>
+          <a:bodyPr wrap="square" lIns="0" tIns="0" rIns="0" bIns="0" rtlCol="0" anchor="ctr"/>
+          <a:lstStyle/>
+          <a:p>
+            <a:pPr marL="0" indent="0">
+              <a:buNone/>
+            </a:pPr>
+            <a:r>
+              <a:rPr lang="en-US" sz="1250" i="1" dirty="0">
+                <a:solidFill>
+                  <a:srgbClr val="64748B"/>
+                </a:solidFill>
+                <a:latin typeface="Calibri" pitchFamily="34" charset="0"/>
+                <a:ea typeface="Calibri" pitchFamily="34" charset="-122"/>
+                <a:cs typeface="Calibri" pitchFamily="34" charset="-120"/>
+              </a:rPr>
+              <a:t>Goal: demonstrate feasibility across heterogeneous real-world repositories</a:t>
+            </a:r>
+            <a:endParaRPr lang="en-US" sz="1250" dirty="0"/>
+          </a:p>
+        </p:txBody>
+      </p:sp>
+      <p:sp>
+        <p:nvSpPr>
+          <p:cNvPr id="5" name="Shape 3"/>
+          <p:cNvSpPr/>
+          <p:nvPr/>
+        </p:nvSpPr>
+        <p:spPr>
+          <a:xfrm>
+            <a:off x="548640" y="1481328"/>
+            <a:ext cx="2331720" cy="41148"/>
+          </a:xfrm>
+          <a:prstGeom prst="rect">
+            <a:avLst/>
+          </a:prstGeom>
+          <a:solidFill>
+            <a:srgbClr val="0D9488"/>
+          </a:solidFill>
+          <a:ln w="12700">
+            <a:solidFill>
+              <a:srgbClr val="0D9488"/>
+            </a:solidFill>
+            <a:prstDash val="solid"/>
+          </a:ln>
+        </p:spPr>
+      </p:sp>
+      <p:sp>
+        <p:nvSpPr>
+          <p:cNvPr id="6" name="Text 4"/>
+          <p:cNvSpPr/>
+          <p:nvPr/>
+        </p:nvSpPr>
+        <p:spPr>
+          <a:xfrm>
+            <a:off x="548640" y="1627632"/>
+            <a:ext cx="2331720" cy="502920"/>
+          </a:xfrm>
+          <a:prstGeom prst="rect">
+            <a:avLst/>
+          </a:prstGeom>
+          <a:noFill/>
+          <a:ln/>
+        </p:spPr>
+        <p:txBody>
+          <a:bodyPr wrap="square" lIns="0" tIns="0" rIns="0" bIns="0" rtlCol="0" anchor="ctr"/>
+          <a:lstStyle/>
+          <a:p>
+            <a:pPr marL="0" indent="0">
+              <a:buNone/>
+            </a:pPr>
+            <a:r>
+              <a:rPr lang="en-US" sz="2900" b="1" dirty="0">
+                <a:solidFill>
+                  <a:srgbClr val="0F2A44"/>
+                </a:solidFill>
+                <a:latin typeface="Calibri" pitchFamily="34" charset="0"/>
+                <a:ea typeface="Calibri" pitchFamily="34" charset="-122"/>
+                <a:cs typeface="Calibri" pitchFamily="34" charset="-120"/>
+              </a:rPr>
+              <a:t>11</a:t>
+            </a:r>
+            <a:endParaRPr lang="en-US" sz="2900" dirty="0"/>
+          </a:p>
+        </p:txBody>
+      </p:sp>
+      <p:sp>
+        <p:nvSpPr>
+          <p:cNvPr id="7" name="Text 5"/>
+          <p:cNvSpPr/>
+          <p:nvPr/>
+        </p:nvSpPr>
+        <p:spPr>
+          <a:xfrm>
+            <a:off x="548640" y="2139696"/>
+            <a:ext cx="2331720" cy="274320"/>
+          </a:xfrm>
+          <a:prstGeom prst="rect">
+            <a:avLst/>
+          </a:prstGeom>
+          <a:noFill/>
+          <a:ln/>
+        </p:spPr>
+        <p:txBody>
+          <a:bodyPr wrap="square" lIns="0" tIns="0" rIns="0" bIns="0" rtlCol="0" anchor="ctr"/>
+          <a:lstStyle/>
+          <a:p>
+            <a:pPr marL="0" indent="0">
+              <a:buNone/>
+            </a:pPr>
+            <a:r>
+              <a:rPr lang="en-US" sz="1200" b="1" dirty="0">
+                <a:solidFill>
+                  <a:srgbClr val="0F2A44"/>
+                </a:solidFill>
+                <a:latin typeface="Calibri" pitchFamily="34" charset="0"/>
+                <a:ea typeface="Calibri" pitchFamily="34" charset="-122"/>
+                <a:cs typeface="Calibri" pitchFamily="34" charset="-120"/>
+              </a:rPr>
+              <a:t>Dataset</a:t>
+            </a:r>
+            <a:endParaRPr lang="en-US" sz="1200" dirty="0"/>
+          </a:p>
+        </p:txBody>
+      </p:sp>
+      <p:sp>
+        <p:nvSpPr>
+          <p:cNvPr id="8" name="Text 6"/>
+          <p:cNvSpPr/>
+          <p:nvPr/>
+        </p:nvSpPr>
+        <p:spPr>
+          <a:xfrm>
+            <a:off x="548640" y="2432304"/>
+            <a:ext cx="2331720" cy="530352"/>
+          </a:xfrm>
+          <a:prstGeom prst="rect">
+            <a:avLst/>
+          </a:prstGeom>
+          <a:noFill/>
+          <a:ln/>
+        </p:spPr>
+        <p:txBody>
+          <a:bodyPr wrap="square" lIns="0" tIns="0" rIns="0" bIns="0" rtlCol="0" anchor="ctr"/>
+          <a:lstStyle/>
+          <a:p>
+            <a:pPr marL="0" indent="0">
+              <a:buNone/>
+            </a:pPr>
+            <a:r>
+              <a:rPr lang="en-US" sz="950" dirty="0">
+                <a:solidFill>
+                  <a:srgbClr val="64748B"/>
+                </a:solidFill>
+                <a:latin typeface="Calibri" pitchFamily="34" charset="0"/>
+                <a:ea typeface="Calibri" pitchFamily="34" charset="-122"/>
+                <a:cs typeface="Calibri" pitchFamily="34" charset="-120"/>
+              </a:rPr>
+              <a:t>Open-source Java/Spring Boot microservice systems</a:t>
+            </a:r>
+            <a:endParaRPr lang="en-US" sz="950" dirty="0"/>
+          </a:p>
+        </p:txBody>
+      </p:sp>
+      <p:sp>
+        <p:nvSpPr>
+          <p:cNvPr id="9" name="Shape 7"/>
+          <p:cNvSpPr/>
+          <p:nvPr/>
+        </p:nvSpPr>
+        <p:spPr>
+          <a:xfrm>
+            <a:off x="3291840" y="1481328"/>
+            <a:ext cx="2331720" cy="41148"/>
+          </a:xfrm>
+          <a:prstGeom prst="rect">
+            <a:avLst/>
+          </a:prstGeom>
+          <a:solidFill>
+            <a:srgbClr val="1C4E80"/>
+          </a:solidFill>
+          <a:ln w="12700">
+            <a:solidFill>
+              <a:srgbClr val="1C4E80"/>
+            </a:solidFill>
+            <a:prstDash val="solid"/>
+          </a:ln>
+        </p:spPr>
+      </p:sp>
+      <p:sp>
+        <p:nvSpPr>
+          <p:cNvPr id="10" name="Text 8"/>
+          <p:cNvSpPr/>
+          <p:nvPr/>
+        </p:nvSpPr>
+        <p:spPr>
+          <a:xfrm>
+            <a:off x="3291840" y="1627632"/>
+            <a:ext cx="2331720" cy="502920"/>
+          </a:xfrm>
+          <a:prstGeom prst="rect">
+            <a:avLst/>
+          </a:prstGeom>
+          <a:noFill/>
+          <a:ln/>
+        </p:spPr>
+        <p:txBody>
+          <a:bodyPr wrap="square" lIns="0" tIns="0" rIns="0" bIns="0" rtlCol="0" anchor="ctr"/>
+          <a:lstStyle/>
+          <a:p>
+            <a:pPr marL="0" indent="0">
+              <a:buNone/>
+            </a:pPr>
+            <a:r>
+              <a:rPr lang="en-US" sz="2900" b="1" dirty="0">
+                <a:solidFill>
+                  <a:srgbClr val="0F2A44"/>
+                </a:solidFill>
+                <a:latin typeface="Calibri" pitchFamily="34" charset="0"/>
+                <a:ea typeface="Calibri" pitchFamily="34" charset="-122"/>
+                <a:cs typeface="Calibri" pitchFamily="34" charset="-120"/>
+              </a:rPr>
+              <a:t>130</a:t>
+            </a:r>
+            <a:endParaRPr lang="en-US" sz="2900" dirty="0"/>
+          </a:p>
+        </p:txBody>
+      </p:sp>
+      <p:sp>
+        <p:nvSpPr>
+          <p:cNvPr id="11" name="Text 9"/>
+          <p:cNvSpPr/>
+          <p:nvPr/>
+        </p:nvSpPr>
+        <p:spPr>
+          <a:xfrm>
+            <a:off x="3291840" y="2139696"/>
+            <a:ext cx="2331720" cy="274320"/>
+          </a:xfrm>
+          <a:prstGeom prst="rect">
+            <a:avLst/>
+          </a:prstGeom>
+          <a:noFill/>
+          <a:ln/>
+        </p:spPr>
+        <p:txBody>
+          <a:bodyPr wrap="square" lIns="0" tIns="0" rIns="0" bIns="0" rtlCol="0" anchor="ctr"/>
+          <a:lstStyle/>
+          <a:p>
+            <a:pPr marL="0" indent="0">
+              <a:buNone/>
+            </a:pPr>
+            <a:r>
+              <a:rPr lang="en-US" sz="1200" b="1" dirty="0">
+                <a:solidFill>
+                  <a:srgbClr val="0F2A44"/>
+                </a:solidFill>
+                <a:latin typeface="Calibri" pitchFamily="34" charset="0"/>
+                <a:ea typeface="Calibri" pitchFamily="34" charset="-122"/>
+                <a:cs typeface="Calibri" pitchFamily="34" charset="-120"/>
+              </a:rPr>
+              <a:t>Detected services</a:t>
+            </a:r>
+            <a:endParaRPr lang="en-US" sz="1200" dirty="0"/>
+          </a:p>
+        </p:txBody>
+      </p:sp>
+      <p:sp>
+        <p:nvSpPr>
+          <p:cNvPr id="12" name="Text 10"/>
+          <p:cNvSpPr/>
+          <p:nvPr/>
+        </p:nvSpPr>
+        <p:spPr>
+          <a:xfrm>
+            <a:off x="3291840" y="2432304"/>
+            <a:ext cx="2331720" cy="530352"/>
+          </a:xfrm>
+          <a:prstGeom prst="rect">
+            <a:avLst/>
+          </a:prstGeom>
+          <a:noFill/>
+          <a:ln/>
+        </p:spPr>
+        <p:txBody>
+          <a:bodyPr wrap="square" lIns="0" tIns="0" rIns="0" bIns="0" rtlCol="0" anchor="ctr"/>
+          <a:lstStyle/>
+          <a:p>
+            <a:pPr marL="0" indent="0">
+              <a:buNone/>
+            </a:pPr>
+            <a:r>
+              <a:rPr lang="en-US" sz="950" dirty="0">
+                <a:solidFill>
+                  <a:srgbClr val="64748B"/>
+                </a:solidFill>
+                <a:latin typeface="Calibri" pitchFamily="34" charset="0"/>
+                <a:ea typeface="Calibri" pitchFamily="34" charset="-122"/>
+                <a:cs typeface="Calibri" pitchFamily="34" charset="-120"/>
+              </a:rPr>
+              <a:t>Service modules identified by the deployability gate</a:t>
+            </a:r>
+            <a:endParaRPr lang="en-US" sz="950" dirty="0"/>
+          </a:p>
+        </p:txBody>
+      </p:sp>
+      <p:sp>
+        <p:nvSpPr>
+          <p:cNvPr id="13" name="Shape 11"/>
+          <p:cNvSpPr/>
+          <p:nvPr/>
+        </p:nvSpPr>
+        <p:spPr>
+          <a:xfrm>
+            <a:off x="6035040" y="1481328"/>
+            <a:ext cx="2331720" cy="41148"/>
+          </a:xfrm>
+          <a:prstGeom prst="rect">
+            <a:avLst/>
+          </a:prstGeom>
+          <a:solidFill>
+            <a:srgbClr val="D97706"/>
+          </a:solidFill>
+          <a:ln w="12700">
+            <a:solidFill>
+              <a:srgbClr val="D97706"/>
+            </a:solidFill>
+            <a:prstDash val="solid"/>
+          </a:ln>
+        </p:spPr>
+      </p:sp>
+      <p:sp>
+        <p:nvSpPr>
+          <p:cNvPr id="14" name="Text 12"/>
+          <p:cNvSpPr/>
+          <p:nvPr/>
+        </p:nvSpPr>
+        <p:spPr>
+          <a:xfrm>
+            <a:off x="6035040" y="1627632"/>
+            <a:ext cx="2331720" cy="502920"/>
+          </a:xfrm>
+          <a:prstGeom prst="rect">
+            <a:avLst/>
+          </a:prstGeom>
+          <a:noFill/>
+          <a:ln/>
+        </p:spPr>
+        <p:txBody>
+          <a:bodyPr wrap="square" lIns="0" tIns="0" rIns="0" bIns="0" rtlCol="0" anchor="ctr"/>
+          <a:lstStyle/>
+          <a:p>
+            <a:pPr marL="0" indent="0">
+              <a:buNone/>
+            </a:pPr>
+            <a:r>
+              <a:rPr lang="en-US" sz="2900" b="1" dirty="0">
+                <a:solidFill>
+                  <a:srgbClr val="0F2A44"/>
+                </a:solidFill>
+                <a:latin typeface="Calibri" pitchFamily="34" charset="0"/>
+                <a:ea typeface="Calibri" pitchFamily="34" charset="-122"/>
+                <a:cs typeface="Calibri" pitchFamily="34" charset="-120"/>
+              </a:rPr>
+              <a:t>~274k</a:t>
+            </a:r>
+            <a:endParaRPr lang="en-US" sz="2900" dirty="0"/>
+          </a:p>
+        </p:txBody>
+      </p:sp>
+      <p:sp>
+        <p:nvSpPr>
+          <p:cNvPr id="15" name="Text 13"/>
+          <p:cNvSpPr/>
+          <p:nvPr/>
+        </p:nvSpPr>
+        <p:spPr>
+          <a:xfrm>
+            <a:off x="6035040" y="2139696"/>
+            <a:ext cx="2331720" cy="274320"/>
+          </a:xfrm>
+          <a:prstGeom prst="rect">
+            <a:avLst/>
+          </a:prstGeom>
+          <a:noFill/>
+          <a:ln/>
+        </p:spPr>
+        <p:txBody>
+          <a:bodyPr wrap="square" lIns="0" tIns="0" rIns="0" bIns="0" rtlCol="0" anchor="ctr"/>
+          <a:lstStyle/>
+          <a:p>
+            <a:pPr marL="0" indent="0">
+              <a:buNone/>
+            </a:pPr>
+            <a:r>
+              <a:rPr lang="en-US" sz="1200" b="1" dirty="0">
+                <a:solidFill>
+                  <a:srgbClr val="0F2A44"/>
+                </a:solidFill>
+                <a:latin typeface="Calibri" pitchFamily="34" charset="0"/>
+                <a:ea typeface="Calibri" pitchFamily="34" charset="-122"/>
+                <a:cs typeface="Calibri" pitchFamily="34" charset="-120"/>
+              </a:rPr>
+              <a:t>Code volume</a:t>
+            </a:r>
+            <a:endParaRPr lang="en-US" sz="1200" dirty="0"/>
+          </a:p>
+        </p:txBody>
+      </p:sp>
+      <p:sp>
+        <p:nvSpPr>
+          <p:cNvPr id="16" name="Text 14"/>
+          <p:cNvSpPr/>
+          <p:nvPr/>
+        </p:nvSpPr>
+        <p:spPr>
+          <a:xfrm>
+            <a:off x="6035040" y="2432304"/>
+            <a:ext cx="2331720" cy="530352"/>
+          </a:xfrm>
+          <a:prstGeom prst="rect">
+            <a:avLst/>
+          </a:prstGeom>
+          <a:noFill/>
+          <a:ln/>
+        </p:spPr>
+        <p:txBody>
+          <a:bodyPr wrap="square" lIns="0" tIns="0" rIns="0" bIns="0" rtlCol="0" anchor="ctr"/>
+          <a:lstStyle/>
+          <a:p>
+            <a:pPr marL="0" indent="0">
+              <a:buNone/>
+            </a:pPr>
+            <a:r>
+              <a:rPr lang="en-US" sz="950" dirty="0">
+                <a:solidFill>
+                  <a:srgbClr val="64748B"/>
+                </a:solidFill>
+                <a:latin typeface="Calibri" pitchFamily="34" charset="0"/>
+                <a:ea typeface="Calibri" pitchFamily="34" charset="-122"/>
+                <a:cs typeface="Calibri" pitchFamily="34" charset="-120"/>
+              </a:rPr>
+              <a:t>Lines of Java code analysed across all projects</a:t>
+            </a:r>
+            <a:endParaRPr lang="en-US" sz="950" dirty="0"/>
+          </a:p>
+        </p:txBody>
+      </p:sp>
+      <p:sp>
+        <p:nvSpPr>
+          <p:cNvPr id="17" name="Text 15"/>
+          <p:cNvSpPr/>
+          <p:nvPr/>
+        </p:nvSpPr>
+        <p:spPr>
+          <a:xfrm>
+            <a:off x="548640" y="3218688"/>
+            <a:ext cx="3566160" cy="292608"/>
+          </a:xfrm>
+          <a:prstGeom prst="rect">
+            <a:avLst/>
+          </a:prstGeom>
+          <a:noFill/>
+          <a:ln/>
+        </p:spPr>
+        <p:txBody>
+          <a:bodyPr wrap="square" lIns="0" tIns="0" rIns="0" bIns="0" rtlCol="0" anchor="ctr"/>
+          <a:lstStyle/>
+          <a:p>
+            <a:pPr marL="0" indent="0">
+              <a:buNone/>
+            </a:pPr>
+            <a:r>
+              <a:rPr lang="en-US" sz="1300" b="1" dirty="0">
+                <a:solidFill>
+                  <a:srgbClr val="0F2A44"/>
+                </a:solidFill>
+                <a:latin typeface="Calibri" pitchFamily="34" charset="0"/>
+                <a:ea typeface="Calibri" pitchFamily="34" charset="-122"/>
+                <a:cs typeface="Calibri" pitchFamily="34" charset="-120"/>
+              </a:rPr>
+              <a:t>What was measured</a:t>
+            </a:r>
+            <a:endParaRPr lang="en-US" sz="1300" dirty="0"/>
+          </a:p>
+        </p:txBody>
+      </p:sp>
+      <p:sp>
+        <p:nvSpPr>
+          <p:cNvPr id="18" name="Text 16"/>
+          <p:cNvSpPr/>
+          <p:nvPr/>
+        </p:nvSpPr>
+        <p:spPr>
+          <a:xfrm>
+            <a:off x="749808" y="3566160"/>
+            <a:ext cx="3566160" cy="914400"/>
+          </a:xfrm>
+          <a:prstGeom prst="rect">
+            <a:avLst/>
+          </a:prstGeom>
+          <a:noFill/>
+          <a:ln/>
+        </p:spPr>
+        <p:txBody>
+          <a:bodyPr wrap="square" lIns="0" tIns="0" rIns="0" bIns="0" rtlCol="0" anchor="ctr"/>
+          <a:lstStyle/>
+          <a:p>
+            <a:pPr marL="342900" indent="-342900">
+              <a:spcAft>
+                <a:spcPts val="200"/>
+              </a:spcAft>
+              <a:buSzPct val="100000"/>
+              <a:buChar char="•"/>
+            </a:pPr>
+            <a:r>
+              <a:rPr lang="en-US" sz="1050" dirty="0">
+                <a:solidFill>
+                  <a:srgbClr val="1E293B"/>
+                </a:solidFill>
+                <a:latin typeface="Calibri" pitchFamily="34" charset="0"/>
+                <a:ea typeface="Calibri" pitchFamily="34" charset="-122"/>
+                <a:cs typeface="Calibri" pitchFamily="34" charset="-120"/>
+              </a:rPr>
+              <a:t>service count and Java LOC</a:t>
+            </a:r>
+            <a:endParaRPr lang="en-US" sz="1050" dirty="0"/>
+          </a:p>
+          <a:p>
+            <a:pPr marL="342900" indent="-342900">
+              <a:spcAft>
+                <a:spcPts val="200"/>
+              </a:spcAft>
+              <a:buSzPct val="100000"/>
+              <a:buChar char="•"/>
+            </a:pPr>
+            <a:r>
+              <a:rPr lang="en-US" sz="1050" dirty="0">
+                <a:solidFill>
+                  <a:srgbClr val="1E293B"/>
+                </a:solidFill>
+                <a:latin typeface="Calibri" pitchFamily="34" charset="0"/>
+                <a:ea typeface="Calibri" pitchFamily="34" charset="-122"/>
+                <a:cs typeface="Calibri" pitchFamily="34" charset="-120"/>
+              </a:rPr>
+              <a:t>anti-pattern instances and severity</a:t>
+            </a:r>
+            <a:endParaRPr lang="en-US" sz="1050" dirty="0"/>
+          </a:p>
+          <a:p>
+            <a:pPr marL="342900" indent="-342900">
+              <a:spcAft>
+                <a:spcPts val="200"/>
+              </a:spcAft>
+              <a:buSzPct val="100000"/>
+              <a:buChar char="•"/>
+            </a:pPr>
+            <a:r>
+              <a:rPr lang="en-US" sz="1050" dirty="0">
+                <a:solidFill>
+                  <a:srgbClr val="1E293B"/>
+                </a:solidFill>
+                <a:latin typeface="Calibri" pitchFamily="34" charset="0"/>
+                <a:ea typeface="Calibri" pitchFamily="34" charset="-122"/>
+                <a:cs typeface="Calibri" pitchFamily="34" charset="-120"/>
+              </a:rPr>
+              <a:t>dependency graph metrics and cycle count</a:t>
+            </a:r>
+            <a:endParaRPr lang="en-US" sz="1050" dirty="0"/>
+          </a:p>
+          <a:p>
+            <a:pPr marL="342900" indent="-342900">
+              <a:spcAft>
+                <a:spcPts val="200"/>
+              </a:spcAft>
+              <a:buSzPct val="100000"/>
+              <a:buChar char="•"/>
+            </a:pPr>
+            <a:r>
+              <a:rPr lang="en-US" sz="1050" dirty="0">
+                <a:solidFill>
+                  <a:srgbClr val="1E293B"/>
+                </a:solidFill>
+                <a:latin typeface="Calibri" pitchFamily="34" charset="0"/>
+                <a:ea typeface="Calibri" pitchFamily="34" charset="-122"/>
+                <a:cs typeface="Calibri" pitchFamily="34" charset="-120"/>
+              </a:rPr>
+              <a:t>code-smell density and final health score</a:t>
+            </a:r>
+            <a:endParaRPr lang="en-US" sz="1050" dirty="0"/>
+          </a:p>
+        </p:txBody>
+      </p:sp>
+      <p:sp>
+        <p:nvSpPr>
+          <p:cNvPr id="19" name="Text 17"/>
+          <p:cNvSpPr/>
+          <p:nvPr/>
+        </p:nvSpPr>
+        <p:spPr>
+          <a:xfrm>
+            <a:off x="4754880" y="3218688"/>
+            <a:ext cx="3840480" cy="292608"/>
+          </a:xfrm>
+          <a:prstGeom prst="rect">
+            <a:avLst/>
+          </a:prstGeom>
+          <a:noFill/>
+          <a:ln/>
+        </p:spPr>
+        <p:txBody>
+          <a:bodyPr wrap="square" lIns="0" tIns="0" rIns="0" bIns="0" rtlCol="0" anchor="ctr"/>
+          <a:lstStyle/>
+          <a:p>
+            <a:pPr marL="0" indent="0">
+              <a:buNone/>
+            </a:pPr>
+            <a:r>
+              <a:rPr lang="en-US" sz="1300" b="1" dirty="0">
+                <a:solidFill>
+                  <a:srgbClr val="0F2A44"/>
+                </a:solidFill>
+                <a:latin typeface="Calibri" pitchFamily="34" charset="0"/>
+                <a:ea typeface="Calibri" pitchFamily="34" charset="-122"/>
+                <a:cs typeface="Calibri" pitchFamily="34" charset="-120"/>
+              </a:rPr>
+              <a:t>Interpretation</a:t>
+            </a:r>
+            <a:endParaRPr lang="en-US" sz="1300" dirty="0"/>
+          </a:p>
+        </p:txBody>
+      </p:sp>
+      <p:sp>
+        <p:nvSpPr>
+          <p:cNvPr id="20" name="Text 18"/>
+          <p:cNvSpPr/>
+          <p:nvPr/>
+        </p:nvSpPr>
+        <p:spPr>
+          <a:xfrm>
+            <a:off x="4754880" y="3547872"/>
+            <a:ext cx="3840480" cy="960120"/>
+          </a:xfrm>
+          <a:prstGeom prst="rect">
+            <a:avLst/>
+          </a:prstGeom>
+          <a:noFill/>
+          <a:ln/>
+        </p:spPr>
+        <p:txBody>
+          <a:bodyPr wrap="square" lIns="0" tIns="0" rIns="0" bIns="0" rtlCol="0" anchor="ctr"/>
+          <a:lstStyle/>
+          <a:p>
+            <a:pPr marL="0" indent="0">
+              <a:buNone/>
+            </a:pPr>
+            <a:r>
+              <a:rPr lang="en-US" sz="1050" dirty="0">
+                <a:solidFill>
+                  <a:srgbClr val="1E293B"/>
+                </a:solidFill>
+                <a:latin typeface="Calibri" pitchFamily="34" charset="0"/>
+                <a:ea typeface="Calibri" pitchFamily="34" charset="-122"/>
+                <a:cs typeface="Calibri" pitchFamily="34" charset="-120"/>
+              </a:rPr>
+              <a:t>This is a feasibility study, not a statistical precision/recall claim. A labelled benchmark for microservice anti-patterns is not yet widely available, so the evaluation focuses on whether the full pipeline can process real systems and produce explainable, comparable outputs.</a:t>
+            </a:r>
+            <a:endParaRPr lang="en-US" sz="1050" dirty="0"/>
+          </a:p>
+        </p:txBody>
+      </p:sp>
+      <p:sp>
+        <p:nvSpPr>
+          <p:cNvPr id="21" name="Text 19"/>
+          <p:cNvSpPr/>
+          <p:nvPr/>
+        </p:nvSpPr>
+        <p:spPr>
+          <a:xfrm>
+            <a:off x="7955280" y="4864608"/>
+            <a:ext cx="640080" cy="228600"/>
+          </a:xfrm>
+          <a:prstGeom prst="rect">
+            <a:avLst/>
+          </a:prstGeom>
+          <a:noFill/>
+          <a:ln/>
+        </p:spPr>
+        <p:txBody>
+          <a:bodyPr wrap="square" lIns="0" tIns="0" rIns="0" bIns="0" rtlCol="0" anchor="ctr"/>
+          <a:lstStyle/>
+          <a:p>
+            <a:pPr marL="0" indent="0" algn="r">
+              <a:buNone/>
+            </a:pPr>
+            <a:r>
+              <a:rPr lang="en-US" sz="900" dirty="0">
+                <a:solidFill>
+                  <a:srgbClr val="64748B"/>
+                </a:solidFill>
+                <a:latin typeface="Calibri" pitchFamily="34" charset="0"/>
+                <a:ea typeface="Calibri" pitchFamily="34" charset="-122"/>
+                <a:cs typeface="Calibri" pitchFamily="34" charset="-120"/>
+              </a:rPr>
+              <a:t>10 / 15</a:t>
+            </a:r>
+            <a:endParaRPr lang="en-US" sz="900" dirty="0"/>
           </a:p>
         </p:txBody>
       </p:sp>
@@ -5777,8 +10535,8 @@
         </p:nvSpPr>
         <p:spPr>
           <a:xfrm>
-            <a:off x="2304288" y="1856232"/>
-            <a:ext cx="1243584" cy="457200"/>
+            <a:off x="2246811" y="1856232"/>
+            <a:ext cx="1301061" cy="457200"/>
           </a:xfrm>
           <a:prstGeom prst="rect">
             <a:avLst/>
@@ -6547,7 +11305,7 @@
         </p:nvSpPr>
         <p:spPr>
           <a:xfrm>
-            <a:off x="731520" y="3200400"/>
+            <a:off x="658368" y="3057362"/>
             <a:ext cx="7863840" cy="1280160"/>
           </a:xfrm>
           <a:prstGeom prst="rect">
@@ -6576,9 +11334,30 @@
                 <a:ea typeface="Calibri" pitchFamily="34" charset="-122"/>
                 <a:cs typeface="Calibri" pitchFamily="34" charset="-120"/>
               </a:rPr>
-              <a:t>Async pipeline: long analyses don't block the API =&gt; Spring @Async with TransactionSynchronization.afterCommit() ensures consistency</a:t>
-            </a:r>
-            <a:endParaRPr lang="en-US" sz="1100" dirty="0"/>
+              <a:t>Each detector is a Spring @Component implementing </a:t>
+            </a:r>
+            <a:r>
+              <a:rPr lang="en-US" sz="1100" dirty="0" err="1">
+                <a:solidFill>
+                  <a:srgbClr val="1E293B"/>
+                </a:solidFill>
+                <a:latin typeface="Calibri" pitchFamily="34" charset="0"/>
+                <a:ea typeface="Calibri" pitchFamily="34" charset="-122"/>
+                <a:cs typeface="Calibri" pitchFamily="34" charset="-120"/>
+              </a:rPr>
+              <a:t>AntiPatternDetector</a:t>
+            </a:r>
+            <a:r>
+              <a:rPr lang="en-US" sz="1100" dirty="0">
+                <a:solidFill>
+                  <a:srgbClr val="1E293B"/>
+                </a:solidFill>
+                <a:latin typeface="Calibri" pitchFamily="34" charset="0"/>
+                <a:ea typeface="Calibri" pitchFamily="34" charset="-122"/>
+                <a:cs typeface="Calibri" pitchFamily="34" charset="-120"/>
+              </a:rPr>
+              <a:t> </a:t>
+            </a:r>
           </a:p>
           <a:p>
             <a:pPr marL="342900" indent="-342900">
@@ -6597,29 +11376,7 @@
                 <a:ea typeface="Calibri" pitchFamily="34" charset="-122"/>
                 <a:cs typeface="Calibri" pitchFamily="34" charset="-120"/>
               </a:rPr>
-              <a:t>Each detector is a Spring @Component implementing </a:t>
-            </a:r>
-            <a:r>
-              <a:rPr lang="en-US" sz="1100" dirty="0" err="1">
-                <a:solidFill>
-                  <a:srgbClr val="1E293B"/>
-                </a:solidFill>
-                <a:latin typeface="Calibri" pitchFamily="34" charset="0"/>
-                <a:ea typeface="Calibri" pitchFamily="34" charset="-122"/>
-                <a:cs typeface="Calibri" pitchFamily="34" charset="-120"/>
-              </a:rPr>
-              <a:t>AntiPatternDetector</a:t>
-            </a:r>
-            <a:r>
-              <a:rPr lang="en-US" sz="1100" dirty="0">
-                <a:solidFill>
-                  <a:srgbClr val="1E293B"/>
-                </a:solidFill>
-                <a:latin typeface="Calibri" pitchFamily="34" charset="0"/>
-                <a:ea typeface="Calibri" pitchFamily="34" charset="-122"/>
-                <a:cs typeface="Calibri" pitchFamily="34" charset="-120"/>
-              </a:rPr>
-              <a:t> =&gt; adding a new detector means no orchestrator changes</a:t>
+              <a:t>Adding a new detector means no orchestrator changes</a:t>
             </a:r>
             <a:endParaRPr lang="en-US" sz="1100" dirty="0"/>
           </a:p>
@@ -9326,45 +14083,6 @@
       </p:sp>
       <p:sp>
         <p:nvSpPr>
-          <p:cNvPr id="7" name="Text 5"/>
-          <p:cNvSpPr/>
-          <p:nvPr/>
-        </p:nvSpPr>
-        <p:spPr>
-          <a:xfrm>
-            <a:off x="548640" y="1993392"/>
-            <a:ext cx="1874520" cy="548640"/>
-          </a:xfrm>
-          <a:prstGeom prst="rect">
-            <a:avLst/>
-          </a:prstGeom>
-          <a:noFill/>
-          <a:ln/>
-        </p:spPr>
-        <p:txBody>
-          <a:bodyPr wrap="square" lIns="0" tIns="0" rIns="0" bIns="0" rtlCol="0" anchor="ctr"/>
-          <a:lstStyle/>
-          <a:p>
-            <a:pPr marL="0" indent="0">
-              <a:buNone/>
-            </a:pPr>
-            <a:r>
-              <a:rPr lang="en-US" sz="950" dirty="0">
-                <a:solidFill>
-                  <a:srgbClr val="64748B"/>
-                </a:solidFill>
-                <a:latin typeface="Calibri" pitchFamily="34" charset="0"/>
-                <a:ea typeface="Calibri" pitchFamily="34" charset="-122"/>
-                <a:cs typeface="Calibri" pitchFamily="34" charset="-120"/>
-              </a:rPr>
-              <a:t>−8/−5/−3/−1 per issue (crit/high/med/low)</a:t>
-            </a:r>
-            <a:endParaRPr lang="en-US" sz="950" dirty="0"/>
-          </a:p>
-        </p:txBody>
-      </p:sp>
-      <p:sp>
-        <p:nvSpPr>
           <p:cNvPr id="8" name="Shape 6"/>
           <p:cNvSpPr/>
           <p:nvPr/>
@@ -9475,45 +14193,6 @@
       </p:sp>
       <p:sp>
         <p:nvSpPr>
-          <p:cNvPr id="11" name="Text 9"/>
-          <p:cNvSpPr/>
-          <p:nvPr/>
-        </p:nvSpPr>
-        <p:spPr>
-          <a:xfrm>
-            <a:off x="2606040" y="1993392"/>
-            <a:ext cx="1874520" cy="548640"/>
-          </a:xfrm>
-          <a:prstGeom prst="rect">
-            <a:avLst/>
-          </a:prstGeom>
-          <a:noFill/>
-          <a:ln/>
-        </p:spPr>
-        <p:txBody>
-          <a:bodyPr wrap="square" lIns="0" tIns="0" rIns="0" bIns="0" rtlCol="0" anchor="ctr"/>
-          <a:lstStyle/>
-          <a:p>
-            <a:pPr marL="0" indent="0">
-              <a:buNone/>
-            </a:pPr>
-            <a:r>
-              <a:rPr lang="en-US" sz="950" dirty="0">
-                <a:solidFill>
-                  <a:srgbClr val="64748B"/>
-                </a:solidFill>
-                <a:latin typeface="Calibri" pitchFamily="34" charset="0"/>
-                <a:ea typeface="Calibri" pitchFamily="34" charset="-122"/>
-                <a:cs typeface="Calibri" pitchFamily="34" charset="-120"/>
-              </a:rPr>
-              <a:t>Density-based penalty (smells / KLOC)</a:t>
-            </a:r>
-            <a:endParaRPr lang="en-US" sz="950" dirty="0"/>
-          </a:p>
-        </p:txBody>
-      </p:sp>
-      <p:sp>
-        <p:nvSpPr>
           <p:cNvPr id="12" name="Shape 10"/>
           <p:cNvSpPr/>
           <p:nvPr/>
@@ -9624,45 +14303,6 @@
       </p:sp>
       <p:sp>
         <p:nvSpPr>
-          <p:cNvPr id="15" name="Text 13"/>
-          <p:cNvSpPr/>
-          <p:nvPr/>
-        </p:nvSpPr>
-        <p:spPr>
-          <a:xfrm>
-            <a:off x="4663440" y="1993392"/>
-            <a:ext cx="1874520" cy="548640"/>
-          </a:xfrm>
-          <a:prstGeom prst="rect">
-            <a:avLst/>
-          </a:prstGeom>
-          <a:noFill/>
-          <a:ln/>
-        </p:spPr>
-        <p:txBody>
-          <a:bodyPr wrap="square" lIns="0" tIns="0" rIns="0" bIns="0" rtlCol="0" anchor="ctr"/>
-          <a:lstStyle/>
-          <a:p>
-            <a:pPr marL="0" indent="0">
-              <a:buNone/>
-            </a:pPr>
-            <a:r>
-              <a:rPr lang="en-US" sz="950" dirty="0">
-                <a:solidFill>
-                  <a:srgbClr val="64748B"/>
-                </a:solidFill>
-                <a:latin typeface="Calibri" pitchFamily="34" charset="0"/>
-                <a:ea typeface="Calibri" pitchFamily="34" charset="-122"/>
-                <a:cs typeface="Calibri" pitchFamily="34" charset="-120"/>
-              </a:rPr>
-              <a:t>Coupling coefficient + cycle count</a:t>
-            </a:r>
-            <a:endParaRPr lang="en-US" sz="950" dirty="0"/>
-          </a:p>
-        </p:txBody>
-      </p:sp>
-      <p:sp>
-        <p:nvSpPr>
           <p:cNvPr id="16" name="Shape 14"/>
           <p:cNvSpPr/>
           <p:nvPr/>
@@ -9773,52 +14413,13 @@
       </p:sp>
       <p:sp>
         <p:nvSpPr>
-          <p:cNvPr id="19" name="Text 17"/>
-          <p:cNvSpPr/>
-          <p:nvPr/>
-        </p:nvSpPr>
-        <p:spPr>
-          <a:xfrm>
-            <a:off x="6720840" y="1993392"/>
-            <a:ext cx="1874520" cy="548640"/>
-          </a:xfrm>
-          <a:prstGeom prst="rect">
-            <a:avLst/>
-          </a:prstGeom>
-          <a:noFill/>
-          <a:ln/>
-        </p:spPr>
-        <p:txBody>
-          <a:bodyPr wrap="square" lIns="0" tIns="0" rIns="0" bIns="0" rtlCol="0" anchor="ctr"/>
-          <a:lstStyle/>
-          <a:p>
-            <a:pPr marL="0" indent="0">
-              <a:buNone/>
-            </a:pPr>
-            <a:r>
-              <a:rPr lang="en-US" sz="950" dirty="0">
-                <a:solidFill>
-                  <a:srgbClr val="64748B"/>
-                </a:solidFill>
-                <a:latin typeface="Calibri" pitchFamily="34" charset="0"/>
-                <a:ea typeface="Calibri" pitchFamily="34" charset="-122"/>
-                <a:cs typeface="Calibri" pitchFamily="34" charset="-120"/>
-              </a:rPr>
-              <a:t>Nano (cap 8) + god (cap 10) penalties</a:t>
-            </a:r>
-            <a:endParaRPr lang="en-US" sz="950" dirty="0"/>
-          </a:p>
-        </p:txBody>
-      </p:sp>
-      <p:sp>
-        <p:nvSpPr>
           <p:cNvPr id="20" name="Text 18"/>
           <p:cNvSpPr/>
           <p:nvPr/>
         </p:nvSpPr>
         <p:spPr>
           <a:xfrm>
-            <a:off x="548640" y="2724912"/>
+            <a:off x="548640" y="2269671"/>
             <a:ext cx="8046720" cy="274320"/>
           </a:xfrm>
           <a:prstGeom prst="rect">
@@ -9857,7 +14458,7 @@
         </p:nvSpPr>
         <p:spPr>
           <a:xfrm>
-            <a:off x="548640" y="3035808"/>
+            <a:off x="548640" y="2580567"/>
             <a:ext cx="1572768" cy="457200"/>
           </a:xfrm>
           <a:prstGeom prst="rect">
@@ -9889,7 +14490,7 @@
         </p:nvSpPr>
         <p:spPr>
           <a:xfrm>
-            <a:off x="685800" y="3035808"/>
+            <a:off x="685800" y="2580567"/>
             <a:ext cx="1426464" cy="457200"/>
           </a:xfrm>
           <a:prstGeom prst="rect">
@@ -9939,7 +14540,7 @@
         </p:nvSpPr>
         <p:spPr>
           <a:xfrm>
-            <a:off x="2157984" y="3035808"/>
+            <a:off x="2157984" y="2580567"/>
             <a:ext cx="1572768" cy="457200"/>
           </a:xfrm>
           <a:prstGeom prst="rect">
@@ -9971,7 +14572,7 @@
         </p:nvSpPr>
         <p:spPr>
           <a:xfrm>
-            <a:off x="2295144" y="3035808"/>
+            <a:off x="2295144" y="2580567"/>
             <a:ext cx="1426464" cy="457200"/>
           </a:xfrm>
           <a:prstGeom prst="rect">
@@ -10021,7 +14622,7 @@
         </p:nvSpPr>
         <p:spPr>
           <a:xfrm>
-            <a:off x="3767328" y="3035808"/>
+            <a:off x="3767328" y="2580567"/>
             <a:ext cx="1572768" cy="457200"/>
           </a:xfrm>
           <a:prstGeom prst="rect">
@@ -10053,7 +14654,7 @@
         </p:nvSpPr>
         <p:spPr>
           <a:xfrm>
-            <a:off x="3904488" y="3035808"/>
+            <a:off x="3904488" y="2580567"/>
             <a:ext cx="1426464" cy="457200"/>
           </a:xfrm>
           <a:prstGeom prst="rect">
@@ -10103,7 +14704,7 @@
         </p:nvSpPr>
         <p:spPr>
           <a:xfrm>
-            <a:off x="5376672" y="3035808"/>
+            <a:off x="5376672" y="2580567"/>
             <a:ext cx="1572768" cy="457200"/>
           </a:xfrm>
           <a:prstGeom prst="rect">
@@ -10135,7 +14736,7 @@
         </p:nvSpPr>
         <p:spPr>
           <a:xfrm>
-            <a:off x="5513832" y="3035808"/>
+            <a:off x="5513832" y="2580567"/>
             <a:ext cx="1426464" cy="457200"/>
           </a:xfrm>
           <a:prstGeom prst="rect">
@@ -10185,7 +14786,7 @@
         </p:nvSpPr>
         <p:spPr>
           <a:xfrm>
-            <a:off x="6986016" y="3035808"/>
+            <a:off x="6986016" y="2580567"/>
             <a:ext cx="1572768" cy="457200"/>
           </a:xfrm>
           <a:prstGeom prst="rect">
@@ -10217,7 +14818,7 @@
         </p:nvSpPr>
         <p:spPr>
           <a:xfrm>
-            <a:off x="7123176" y="3035808"/>
+            <a:off x="7123176" y="2580567"/>
             <a:ext cx="1426464" cy="457200"/>
           </a:xfrm>
           <a:prstGeom prst="rect">
@@ -10267,7 +14868,7 @@
         </p:nvSpPr>
         <p:spPr>
           <a:xfrm>
-            <a:off x="548640" y="3822192"/>
+            <a:off x="548640" y="3583794"/>
             <a:ext cx="8046720" cy="274320"/>
           </a:xfrm>
           <a:prstGeom prst="rect">
@@ -10306,7 +14907,7 @@
         </p:nvSpPr>
         <p:spPr>
           <a:xfrm>
-            <a:off x="548640" y="4114800"/>
+            <a:off x="548640" y="3876402"/>
             <a:ext cx="8046720" cy="548640"/>
           </a:xfrm>
           <a:prstGeom prst="rect">
@@ -12165,11 +16766,11 @@
 
 <file path=ppt/slides/slide9.xml><?xml version="1.0" encoding="utf-8"?>
 <p:sld xmlns:a="http://schemas.openxmlformats.org/drawingml/2006/main" xmlns:r="http://schemas.openxmlformats.org/officeDocument/2006/relationships" xmlns:p="http://schemas.openxmlformats.org/presentationml/2006/main">
-  <p:cSld name="Slide 8">
+  <p:cSld name="Slide 10">
     <p:bg>
       <p:bgPr>
         <a:solidFill>
-          <a:srgbClr val="FFFFFF"/>
+          <a:srgbClr val="0F2A44"/>
         </a:solidFill>
         <a:effectLst/>
       </p:bgPr>
@@ -12190,1519 +16791,14 @@
       </p:grpSpPr>
       <p:sp>
         <p:nvSpPr>
-          <p:cNvPr id="2" name="Text 0"/>
-          <p:cNvSpPr/>
-          <p:nvPr/>
-        </p:nvSpPr>
-        <p:spPr>
-          <a:xfrm>
-            <a:off x="548640" y="256032"/>
-            <a:ext cx="8046720" cy="502920"/>
-          </a:xfrm>
-          <a:prstGeom prst="rect">
-            <a:avLst/>
-          </a:prstGeom>
-          <a:noFill/>
-          <a:ln/>
-        </p:spPr>
-        <p:txBody>
-          <a:bodyPr wrap="square" lIns="0" tIns="0" rIns="0" bIns="0" rtlCol="0" anchor="ctr"/>
-          <a:lstStyle/>
-          <a:p>
-            <a:pPr marL="0" indent="0">
-              <a:buNone/>
-            </a:pPr>
-            <a:r>
-              <a:rPr lang="en-US" sz="2500" b="1" dirty="0">
-                <a:solidFill>
-                  <a:srgbClr val="0F2A44"/>
-                </a:solidFill>
-                <a:latin typeface="Calibri" pitchFamily="34" charset="0"/>
-                <a:ea typeface="Calibri" pitchFamily="34" charset="-122"/>
-                <a:cs typeface="Calibri" pitchFamily="34" charset="-120"/>
-              </a:rPr>
-              <a:t>Worked example: microservice-recruit</a:t>
-            </a:r>
-            <a:endParaRPr lang="en-US" sz="2500" dirty="0"/>
-          </a:p>
-        </p:txBody>
-      </p:sp>
-      <p:sp>
-        <p:nvSpPr>
-          <p:cNvPr id="3" name="Shape 1"/>
-          <p:cNvSpPr/>
-          <p:nvPr/>
-        </p:nvSpPr>
-        <p:spPr>
-          <a:xfrm>
-            <a:off x="548640" y="841248"/>
-            <a:ext cx="8046720" cy="13716"/>
-          </a:xfrm>
-          <a:prstGeom prst="rect">
-            <a:avLst/>
-          </a:prstGeom>
-          <a:solidFill>
-            <a:srgbClr val="D8DEE6"/>
-          </a:solidFill>
-          <a:ln w="12700">
-            <a:solidFill>
-              <a:srgbClr val="D8DEE6"/>
-            </a:solidFill>
-            <a:prstDash val="solid"/>
-          </a:ln>
-        </p:spPr>
-        <p:txBody>
-          <a:bodyPr/>
-          <a:lstStyle/>
-          <a:p>
-            <a:endParaRPr lang="en-US"/>
-          </a:p>
-        </p:txBody>
-      </p:sp>
-      <p:sp>
-        <p:nvSpPr>
-          <p:cNvPr id="4" name="Text 2"/>
-          <p:cNvSpPr/>
-          <p:nvPr/>
-        </p:nvSpPr>
-        <p:spPr>
-          <a:xfrm>
-            <a:off x="548640" y="987552"/>
-            <a:ext cx="3931920" cy="292608"/>
-          </a:xfrm>
-          <a:prstGeom prst="rect">
-            <a:avLst/>
-          </a:prstGeom>
-          <a:noFill/>
-          <a:ln/>
-        </p:spPr>
-        <p:txBody>
-          <a:bodyPr wrap="square" lIns="0" tIns="0" rIns="0" bIns="0" rtlCol="0" anchor="ctr"/>
-          <a:lstStyle/>
-          <a:p>
-            <a:pPr marL="0" indent="0">
-              <a:buNone/>
-            </a:pPr>
-            <a:r>
-              <a:rPr lang="en-US" sz="1300" b="1" dirty="0">
-                <a:solidFill>
-                  <a:srgbClr val="0F2A44"/>
-                </a:solidFill>
-                <a:latin typeface="Calibri" pitchFamily="34" charset="0"/>
-                <a:ea typeface="Calibri" pitchFamily="34" charset="-122"/>
-                <a:cs typeface="Calibri" pitchFamily="34" charset="-120"/>
-              </a:rPr>
-              <a:t>Anti-pattern findings</a:t>
-            </a:r>
-            <a:endParaRPr lang="en-US" sz="1300" dirty="0"/>
-          </a:p>
-        </p:txBody>
-      </p:sp>
-      <p:sp>
-        <p:nvSpPr>
-          <p:cNvPr id="5" name="Text 3"/>
-          <p:cNvSpPr/>
-          <p:nvPr/>
-        </p:nvSpPr>
-        <p:spPr>
-          <a:xfrm>
-            <a:off x="548640" y="1353312"/>
-            <a:ext cx="411480" cy="274320"/>
-          </a:xfrm>
-          <a:prstGeom prst="rect">
-            <a:avLst/>
-          </a:prstGeom>
-          <a:noFill/>
-          <a:ln/>
-        </p:spPr>
-        <p:txBody>
-          <a:bodyPr wrap="square" lIns="0" tIns="0" rIns="0" bIns="0" rtlCol="0" anchor="ctr"/>
-          <a:lstStyle/>
-          <a:p>
-            <a:pPr marL="0" indent="0">
-              <a:buNone/>
-            </a:pPr>
-            <a:r>
-              <a:rPr lang="en-US" sz="1100" b="1" dirty="0">
-                <a:solidFill>
-                  <a:srgbClr val="DC2626"/>
-                </a:solidFill>
-                <a:latin typeface="Calibri" pitchFamily="34" charset="0"/>
-                <a:ea typeface="Calibri" pitchFamily="34" charset="-122"/>
-                <a:cs typeface="Calibri" pitchFamily="34" charset="-120"/>
-              </a:rPr>
-              <a:t>6×</a:t>
-            </a:r>
-            <a:endParaRPr lang="en-US" sz="1100" dirty="0"/>
-          </a:p>
-        </p:txBody>
-      </p:sp>
-      <p:sp>
-        <p:nvSpPr>
-          <p:cNvPr id="6" name="Text 4"/>
-          <p:cNvSpPr/>
-          <p:nvPr/>
-        </p:nvSpPr>
-        <p:spPr>
-          <a:xfrm>
-            <a:off x="1005840" y="1353312"/>
-            <a:ext cx="2240280" cy="274320"/>
-          </a:xfrm>
-          <a:prstGeom prst="rect">
-            <a:avLst/>
-          </a:prstGeom>
-          <a:noFill/>
-          <a:ln/>
-        </p:spPr>
-        <p:txBody>
-          <a:bodyPr wrap="square" lIns="0" tIns="0" rIns="0" bIns="0" rtlCol="0" anchor="ctr"/>
-          <a:lstStyle/>
-          <a:p>
-            <a:pPr marL="0" indent="0">
-              <a:buNone/>
-            </a:pPr>
-            <a:r>
-              <a:rPr lang="en-US" sz="1100" dirty="0">
-                <a:solidFill>
-                  <a:srgbClr val="1E293B"/>
-                </a:solidFill>
-                <a:latin typeface="Calibri" pitchFamily="34" charset="0"/>
-                <a:ea typeface="Calibri" pitchFamily="34" charset="-122"/>
-                <a:cs typeface="Calibri" pitchFamily="34" charset="-120"/>
-              </a:rPr>
-              <a:t>API Versioning Absence</a:t>
-            </a:r>
-            <a:endParaRPr lang="en-US" sz="1100" dirty="0"/>
-          </a:p>
-        </p:txBody>
-      </p:sp>
-      <p:sp>
-        <p:nvSpPr>
-          <p:cNvPr id="7" name="Text 5"/>
-          <p:cNvSpPr/>
-          <p:nvPr/>
-        </p:nvSpPr>
-        <p:spPr>
-          <a:xfrm>
-            <a:off x="3246120" y="1353312"/>
-            <a:ext cx="1234440" cy="274320"/>
-          </a:xfrm>
-          <a:prstGeom prst="rect">
-            <a:avLst/>
-          </a:prstGeom>
-          <a:noFill/>
-          <a:ln/>
-        </p:spPr>
-        <p:txBody>
-          <a:bodyPr wrap="square" lIns="0" tIns="0" rIns="0" bIns="0" rtlCol="0" anchor="ctr"/>
-          <a:lstStyle/>
-          <a:p>
-            <a:pPr marL="0" indent="0" algn="r">
-              <a:buNone/>
-            </a:pPr>
-            <a:r>
-              <a:rPr lang="en-US" sz="1000" dirty="0">
-                <a:solidFill>
-                  <a:srgbClr val="64748B"/>
-                </a:solidFill>
-                <a:latin typeface="Calibri" pitchFamily="34" charset="0"/>
-                <a:ea typeface="Calibri" pitchFamily="34" charset="-122"/>
-                <a:cs typeface="Calibri" pitchFamily="34" charset="-120"/>
-              </a:rPr>
-              <a:t>−3 each = −18</a:t>
-            </a:r>
-            <a:endParaRPr lang="en-US" sz="1000" dirty="0"/>
-          </a:p>
-        </p:txBody>
-      </p:sp>
-      <p:sp>
-        <p:nvSpPr>
-          <p:cNvPr id="8" name="Shape 6"/>
-          <p:cNvSpPr/>
-          <p:nvPr/>
-        </p:nvSpPr>
-        <p:spPr>
-          <a:xfrm>
-            <a:off x="548640" y="1618488"/>
-            <a:ext cx="3931920" cy="10973"/>
-          </a:xfrm>
-          <a:prstGeom prst="rect">
-            <a:avLst/>
-          </a:prstGeom>
-          <a:solidFill>
-            <a:srgbClr val="D8DEE6"/>
-          </a:solidFill>
-          <a:ln w="12700">
-            <a:solidFill>
-              <a:srgbClr val="D8DEE6"/>
-            </a:solidFill>
-            <a:prstDash val="solid"/>
-          </a:ln>
-        </p:spPr>
-        <p:txBody>
-          <a:bodyPr/>
-          <a:lstStyle/>
-          <a:p>
-            <a:endParaRPr lang="en-US"/>
-          </a:p>
-        </p:txBody>
-      </p:sp>
-      <p:sp>
-        <p:nvSpPr>
-          <p:cNvPr id="9" name="Text 7"/>
-          <p:cNvSpPr/>
-          <p:nvPr/>
-        </p:nvSpPr>
-        <p:spPr>
-          <a:xfrm>
-            <a:off x="548640" y="1655064"/>
-            <a:ext cx="411480" cy="274320"/>
-          </a:xfrm>
-          <a:prstGeom prst="rect">
-            <a:avLst/>
-          </a:prstGeom>
-          <a:noFill/>
-          <a:ln/>
-        </p:spPr>
-        <p:txBody>
-          <a:bodyPr wrap="square" lIns="0" tIns="0" rIns="0" bIns="0" rtlCol="0" anchor="ctr"/>
-          <a:lstStyle/>
-          <a:p>
-            <a:pPr marL="0" indent="0">
-              <a:buNone/>
-            </a:pPr>
-            <a:r>
-              <a:rPr lang="en-US" sz="1100" b="1" dirty="0">
-                <a:solidFill>
-                  <a:srgbClr val="DC2626"/>
-                </a:solidFill>
-                <a:latin typeface="Calibri" pitchFamily="34" charset="0"/>
-                <a:ea typeface="Calibri" pitchFamily="34" charset="-122"/>
-                <a:cs typeface="Calibri" pitchFamily="34" charset="-120"/>
-              </a:rPr>
-              <a:t>2×</a:t>
-            </a:r>
-            <a:endParaRPr lang="en-US" sz="1100" dirty="0"/>
-          </a:p>
-        </p:txBody>
-      </p:sp>
-      <p:sp>
-        <p:nvSpPr>
-          <p:cNvPr id="10" name="Text 8"/>
-          <p:cNvSpPr/>
-          <p:nvPr/>
-        </p:nvSpPr>
-        <p:spPr>
-          <a:xfrm>
-            <a:off x="1005840" y="1655064"/>
-            <a:ext cx="2240280" cy="274320"/>
-          </a:xfrm>
-          <a:prstGeom prst="rect">
-            <a:avLst/>
-          </a:prstGeom>
-          <a:noFill/>
-          <a:ln/>
-        </p:spPr>
-        <p:txBody>
-          <a:bodyPr wrap="square" lIns="0" tIns="0" rIns="0" bIns="0" rtlCol="0" anchor="ctr"/>
-          <a:lstStyle/>
-          <a:p>
-            <a:pPr marL="0" indent="0">
-              <a:buNone/>
-            </a:pPr>
-            <a:r>
-              <a:rPr lang="en-US" sz="1100" dirty="0">
-                <a:solidFill>
-                  <a:srgbClr val="1E293B"/>
-                </a:solidFill>
-                <a:latin typeface="Calibri" pitchFamily="34" charset="0"/>
-                <a:ea typeface="Calibri" pitchFamily="34" charset="-122"/>
-                <a:cs typeface="Calibri" pitchFamily="34" charset="-120"/>
-              </a:rPr>
-              <a:t>ESB Misuse</a:t>
-            </a:r>
-            <a:endParaRPr lang="en-US" sz="1100" dirty="0"/>
-          </a:p>
-        </p:txBody>
-      </p:sp>
-      <p:sp>
-        <p:nvSpPr>
-          <p:cNvPr id="11" name="Text 9"/>
-          <p:cNvSpPr/>
-          <p:nvPr/>
-        </p:nvSpPr>
-        <p:spPr>
-          <a:xfrm>
-            <a:off x="3246120" y="1655064"/>
-            <a:ext cx="1234440" cy="274320"/>
-          </a:xfrm>
-          <a:prstGeom prst="rect">
-            <a:avLst/>
-          </a:prstGeom>
-          <a:noFill/>
-          <a:ln/>
-        </p:spPr>
-        <p:txBody>
-          <a:bodyPr wrap="square" lIns="0" tIns="0" rIns="0" bIns="0" rtlCol="0" anchor="ctr"/>
-          <a:lstStyle/>
-          <a:p>
-            <a:pPr marL="0" indent="0" algn="r">
-              <a:buNone/>
-            </a:pPr>
-            <a:r>
-              <a:rPr lang="en-US" sz="1000" dirty="0">
-                <a:solidFill>
-                  <a:srgbClr val="64748B"/>
-                </a:solidFill>
-                <a:latin typeface="Calibri" pitchFamily="34" charset="0"/>
-                <a:ea typeface="Calibri" pitchFamily="34" charset="-122"/>
-                <a:cs typeface="Calibri" pitchFamily="34" charset="-120"/>
-              </a:rPr>
-              <a:t>−5 each = −10</a:t>
-            </a:r>
-            <a:endParaRPr lang="en-US" sz="1000" dirty="0"/>
-          </a:p>
-        </p:txBody>
-      </p:sp>
-      <p:sp>
-        <p:nvSpPr>
-          <p:cNvPr id="12" name="Shape 10"/>
-          <p:cNvSpPr/>
-          <p:nvPr/>
-        </p:nvSpPr>
-        <p:spPr>
-          <a:xfrm>
-            <a:off x="548640" y="1920240"/>
-            <a:ext cx="3931920" cy="10973"/>
-          </a:xfrm>
-          <a:prstGeom prst="rect">
-            <a:avLst/>
-          </a:prstGeom>
-          <a:solidFill>
-            <a:srgbClr val="D8DEE6"/>
-          </a:solidFill>
-          <a:ln w="12700">
-            <a:solidFill>
-              <a:srgbClr val="D8DEE6"/>
-            </a:solidFill>
-            <a:prstDash val="solid"/>
-          </a:ln>
-        </p:spPr>
-        <p:txBody>
-          <a:bodyPr/>
-          <a:lstStyle/>
-          <a:p>
-            <a:endParaRPr lang="en-US"/>
-          </a:p>
-        </p:txBody>
-      </p:sp>
-      <p:sp>
-        <p:nvSpPr>
-          <p:cNvPr id="13" name="Text 11"/>
-          <p:cNvSpPr/>
-          <p:nvPr/>
-        </p:nvSpPr>
-        <p:spPr>
-          <a:xfrm>
-            <a:off x="548640" y="1956816"/>
-            <a:ext cx="411480" cy="274320"/>
-          </a:xfrm>
-          <a:prstGeom prst="rect">
-            <a:avLst/>
-          </a:prstGeom>
-          <a:noFill/>
-          <a:ln/>
-        </p:spPr>
-        <p:txBody>
-          <a:bodyPr wrap="square" lIns="0" tIns="0" rIns="0" bIns="0" rtlCol="0" anchor="ctr"/>
-          <a:lstStyle/>
-          <a:p>
-            <a:pPr marL="0" indent="0">
-              <a:buNone/>
-            </a:pPr>
-            <a:r>
-              <a:rPr lang="en-US" sz="1100" b="1" dirty="0">
-                <a:solidFill>
-                  <a:srgbClr val="DC2626"/>
-                </a:solidFill>
-                <a:latin typeface="Calibri" pitchFamily="34" charset="0"/>
-                <a:ea typeface="Calibri" pitchFamily="34" charset="-122"/>
-                <a:cs typeface="Calibri" pitchFamily="34" charset="-120"/>
-              </a:rPr>
-              <a:t>2×</a:t>
-            </a:r>
-            <a:endParaRPr lang="en-US" sz="1100" dirty="0"/>
-          </a:p>
-        </p:txBody>
-      </p:sp>
-      <p:sp>
-        <p:nvSpPr>
-          <p:cNvPr id="14" name="Text 12"/>
-          <p:cNvSpPr/>
-          <p:nvPr/>
-        </p:nvSpPr>
-        <p:spPr>
-          <a:xfrm>
-            <a:off x="1005840" y="1956816"/>
-            <a:ext cx="2240280" cy="274320"/>
-          </a:xfrm>
-          <a:prstGeom prst="rect">
-            <a:avLst/>
-          </a:prstGeom>
-          <a:noFill/>
-          <a:ln/>
-        </p:spPr>
-        <p:txBody>
-          <a:bodyPr wrap="square" lIns="0" tIns="0" rIns="0" bIns="0" rtlCol="0" anchor="ctr"/>
-          <a:lstStyle/>
-          <a:p>
-            <a:pPr marL="0" indent="0">
-              <a:buNone/>
-            </a:pPr>
-            <a:r>
-              <a:rPr lang="en-US" sz="1100" dirty="0">
-                <a:solidFill>
-                  <a:srgbClr val="1E293B"/>
-                </a:solidFill>
-                <a:latin typeface="Calibri" pitchFamily="34" charset="0"/>
-                <a:ea typeface="Calibri" pitchFamily="34" charset="-122"/>
-                <a:cs typeface="Calibri" pitchFamily="34" charset="-120"/>
-              </a:rPr>
-              <a:t>Wrong Cuts</a:t>
-            </a:r>
-            <a:endParaRPr lang="en-US" sz="1100" dirty="0"/>
-          </a:p>
-        </p:txBody>
-      </p:sp>
-      <p:sp>
-        <p:nvSpPr>
-          <p:cNvPr id="15" name="Text 13"/>
-          <p:cNvSpPr/>
-          <p:nvPr/>
-        </p:nvSpPr>
-        <p:spPr>
-          <a:xfrm>
-            <a:off x="3246120" y="1956816"/>
-            <a:ext cx="1234440" cy="274320"/>
-          </a:xfrm>
-          <a:prstGeom prst="rect">
-            <a:avLst/>
-          </a:prstGeom>
-          <a:noFill/>
-          <a:ln/>
-        </p:spPr>
-        <p:txBody>
-          <a:bodyPr wrap="square" lIns="0" tIns="0" rIns="0" bIns="0" rtlCol="0" anchor="ctr"/>
-          <a:lstStyle/>
-          <a:p>
-            <a:pPr marL="0" indent="0" algn="r">
-              <a:buNone/>
-            </a:pPr>
-            <a:r>
-              <a:rPr lang="en-US" sz="1000" dirty="0">
-                <a:solidFill>
-                  <a:srgbClr val="64748B"/>
-                </a:solidFill>
-                <a:latin typeface="Calibri" pitchFamily="34" charset="0"/>
-                <a:ea typeface="Calibri" pitchFamily="34" charset="-122"/>
-                <a:cs typeface="Calibri" pitchFamily="34" charset="-120"/>
-              </a:rPr>
-              <a:t>−5 each = −10</a:t>
-            </a:r>
-            <a:endParaRPr lang="en-US" sz="1000" dirty="0"/>
-          </a:p>
-        </p:txBody>
-      </p:sp>
-      <p:sp>
-        <p:nvSpPr>
-          <p:cNvPr id="16" name="Shape 14"/>
-          <p:cNvSpPr/>
-          <p:nvPr/>
-        </p:nvSpPr>
-        <p:spPr>
-          <a:xfrm>
-            <a:off x="548640" y="2221992"/>
-            <a:ext cx="3931920" cy="10973"/>
-          </a:xfrm>
-          <a:prstGeom prst="rect">
-            <a:avLst/>
-          </a:prstGeom>
-          <a:solidFill>
-            <a:srgbClr val="D8DEE6"/>
-          </a:solidFill>
-          <a:ln w="12700">
-            <a:solidFill>
-              <a:srgbClr val="D8DEE6"/>
-            </a:solidFill>
-            <a:prstDash val="solid"/>
-          </a:ln>
-        </p:spPr>
-        <p:txBody>
-          <a:bodyPr/>
-          <a:lstStyle/>
-          <a:p>
-            <a:endParaRPr lang="en-US"/>
-          </a:p>
-        </p:txBody>
-      </p:sp>
-      <p:sp>
-        <p:nvSpPr>
-          <p:cNvPr id="17" name="Text 15"/>
-          <p:cNvSpPr/>
-          <p:nvPr/>
-        </p:nvSpPr>
-        <p:spPr>
-          <a:xfrm>
-            <a:off x="548640" y="2258568"/>
-            <a:ext cx="411480" cy="274320"/>
-          </a:xfrm>
-          <a:prstGeom prst="rect">
-            <a:avLst/>
-          </a:prstGeom>
-          <a:noFill/>
-          <a:ln/>
-        </p:spPr>
-        <p:txBody>
-          <a:bodyPr wrap="square" lIns="0" tIns="0" rIns="0" bIns="0" rtlCol="0" anchor="ctr"/>
-          <a:lstStyle/>
-          <a:p>
-            <a:pPr marL="0" indent="0">
-              <a:buNone/>
-            </a:pPr>
-            <a:r>
-              <a:rPr lang="en-US" sz="1100" b="1" dirty="0">
-                <a:solidFill>
-                  <a:srgbClr val="DC2626"/>
-                </a:solidFill>
-                <a:latin typeface="Calibri" pitchFamily="34" charset="0"/>
-                <a:ea typeface="Calibri" pitchFamily="34" charset="-122"/>
-                <a:cs typeface="Calibri" pitchFamily="34" charset="-120"/>
-              </a:rPr>
-              <a:t>1×</a:t>
-            </a:r>
-            <a:endParaRPr lang="en-US" sz="1100" dirty="0"/>
-          </a:p>
-        </p:txBody>
-      </p:sp>
-      <p:sp>
-        <p:nvSpPr>
-          <p:cNvPr id="18" name="Text 16"/>
-          <p:cNvSpPr/>
-          <p:nvPr/>
-        </p:nvSpPr>
-        <p:spPr>
-          <a:xfrm>
-            <a:off x="1005840" y="2258568"/>
-            <a:ext cx="2240280" cy="274320"/>
-          </a:xfrm>
-          <a:prstGeom prst="rect">
-            <a:avLst/>
-          </a:prstGeom>
-          <a:noFill/>
-          <a:ln/>
-        </p:spPr>
-        <p:txBody>
-          <a:bodyPr wrap="square" lIns="0" tIns="0" rIns="0" bIns="0" rtlCol="0" anchor="ctr"/>
-          <a:lstStyle/>
-          <a:p>
-            <a:pPr marL="0" indent="0">
-              <a:buNone/>
-            </a:pPr>
-            <a:r>
-              <a:rPr lang="en-US" sz="1100" dirty="0">
-                <a:solidFill>
-                  <a:srgbClr val="1E293B"/>
-                </a:solidFill>
-                <a:latin typeface="Calibri" pitchFamily="34" charset="0"/>
-                <a:ea typeface="Calibri" pitchFamily="34" charset="-122"/>
-                <a:cs typeface="Calibri" pitchFamily="34" charset="-120"/>
-              </a:rPr>
-              <a:t>Cyclic Dependency</a:t>
-            </a:r>
-            <a:endParaRPr lang="en-US" sz="1100" dirty="0"/>
-          </a:p>
-        </p:txBody>
-      </p:sp>
-      <p:sp>
-        <p:nvSpPr>
-          <p:cNvPr id="19" name="Text 17"/>
-          <p:cNvSpPr/>
-          <p:nvPr/>
-        </p:nvSpPr>
-        <p:spPr>
-          <a:xfrm>
-            <a:off x="3246120" y="2258568"/>
-            <a:ext cx="1234440" cy="274320"/>
-          </a:xfrm>
-          <a:prstGeom prst="rect">
-            <a:avLst/>
-          </a:prstGeom>
-          <a:noFill/>
-          <a:ln/>
-        </p:spPr>
-        <p:txBody>
-          <a:bodyPr wrap="square" lIns="0" tIns="0" rIns="0" bIns="0" rtlCol="0" anchor="ctr"/>
-          <a:lstStyle/>
-          <a:p>
-            <a:pPr marL="0" indent="0" algn="r">
-              <a:buNone/>
-            </a:pPr>
-            <a:r>
-              <a:rPr lang="en-US" sz="1000" dirty="0">
-                <a:solidFill>
-                  <a:srgbClr val="64748B"/>
-                </a:solidFill>
-                <a:latin typeface="Calibri" pitchFamily="34" charset="0"/>
-                <a:ea typeface="Calibri" pitchFamily="34" charset="-122"/>
-                <a:cs typeface="Calibri" pitchFamily="34" charset="-120"/>
-              </a:rPr>
-              <a:t>−8</a:t>
-            </a:r>
-            <a:endParaRPr lang="en-US" sz="1000" dirty="0"/>
-          </a:p>
-        </p:txBody>
-      </p:sp>
-      <p:sp>
-        <p:nvSpPr>
-          <p:cNvPr id="20" name="Shape 18"/>
-          <p:cNvSpPr/>
-          <p:nvPr/>
-        </p:nvSpPr>
-        <p:spPr>
-          <a:xfrm>
-            <a:off x="548640" y="2523744"/>
-            <a:ext cx="3931920" cy="10973"/>
-          </a:xfrm>
-          <a:prstGeom prst="rect">
-            <a:avLst/>
-          </a:prstGeom>
-          <a:solidFill>
-            <a:srgbClr val="D8DEE6"/>
-          </a:solidFill>
-          <a:ln w="12700">
-            <a:solidFill>
-              <a:srgbClr val="D8DEE6"/>
-            </a:solidFill>
-            <a:prstDash val="solid"/>
-          </a:ln>
-        </p:spPr>
-        <p:txBody>
-          <a:bodyPr/>
-          <a:lstStyle/>
-          <a:p>
-            <a:endParaRPr lang="en-US"/>
-          </a:p>
-        </p:txBody>
-      </p:sp>
-      <p:sp>
-        <p:nvSpPr>
-          <p:cNvPr id="21" name="Text 19"/>
-          <p:cNvSpPr/>
-          <p:nvPr/>
-        </p:nvSpPr>
-        <p:spPr>
-          <a:xfrm>
-            <a:off x="548640" y="2560320"/>
-            <a:ext cx="411480" cy="274320"/>
-          </a:xfrm>
-          <a:prstGeom prst="rect">
-            <a:avLst/>
-          </a:prstGeom>
-          <a:noFill/>
-          <a:ln/>
-        </p:spPr>
-        <p:txBody>
-          <a:bodyPr wrap="square" lIns="0" tIns="0" rIns="0" bIns="0" rtlCol="0" anchor="ctr"/>
-          <a:lstStyle/>
-          <a:p>
-            <a:pPr marL="0" indent="0">
-              <a:buNone/>
-            </a:pPr>
-            <a:r>
-              <a:rPr lang="en-US" sz="1100" b="1" dirty="0">
-                <a:solidFill>
-                  <a:srgbClr val="DC2626"/>
-                </a:solidFill>
-                <a:latin typeface="Calibri" pitchFamily="34" charset="0"/>
-                <a:ea typeface="Calibri" pitchFamily="34" charset="-122"/>
-                <a:cs typeface="Calibri" pitchFamily="34" charset="-120"/>
-              </a:rPr>
-              <a:t>1×</a:t>
-            </a:r>
-            <a:endParaRPr lang="en-US" sz="1100" dirty="0"/>
-          </a:p>
-        </p:txBody>
-      </p:sp>
-      <p:sp>
-        <p:nvSpPr>
-          <p:cNvPr id="22" name="Text 20"/>
-          <p:cNvSpPr/>
-          <p:nvPr/>
-        </p:nvSpPr>
-        <p:spPr>
-          <a:xfrm>
-            <a:off x="1005840" y="2560320"/>
-            <a:ext cx="2240280" cy="274320"/>
-          </a:xfrm>
-          <a:prstGeom prst="rect">
-            <a:avLst/>
-          </a:prstGeom>
-          <a:noFill/>
-          <a:ln/>
-        </p:spPr>
-        <p:txBody>
-          <a:bodyPr wrap="square" lIns="0" tIns="0" rIns="0" bIns="0" rtlCol="0" anchor="ctr"/>
-          <a:lstStyle/>
-          <a:p>
-            <a:pPr marL="0" indent="0">
-              <a:buNone/>
-            </a:pPr>
-            <a:r>
-              <a:rPr lang="en-US" sz="1100" dirty="0">
-                <a:solidFill>
-                  <a:srgbClr val="1E293B"/>
-                </a:solidFill>
-                <a:latin typeface="Calibri" pitchFamily="34" charset="0"/>
-                <a:ea typeface="Calibri" pitchFamily="34" charset="-122"/>
-                <a:cs typeface="Calibri" pitchFamily="34" charset="-120"/>
-              </a:rPr>
-              <a:t>Hardcoded Endpoints</a:t>
-            </a:r>
-            <a:endParaRPr lang="en-US" sz="1100" dirty="0"/>
-          </a:p>
-        </p:txBody>
-      </p:sp>
-      <p:sp>
-        <p:nvSpPr>
-          <p:cNvPr id="23" name="Text 21"/>
-          <p:cNvSpPr/>
-          <p:nvPr/>
-        </p:nvSpPr>
-        <p:spPr>
-          <a:xfrm>
-            <a:off x="3246120" y="2560320"/>
-            <a:ext cx="1234440" cy="274320"/>
-          </a:xfrm>
-          <a:prstGeom prst="rect">
-            <a:avLst/>
-          </a:prstGeom>
-          <a:noFill/>
-          <a:ln/>
-        </p:spPr>
-        <p:txBody>
-          <a:bodyPr wrap="square" lIns="0" tIns="0" rIns="0" bIns="0" rtlCol="0" anchor="ctr"/>
-          <a:lstStyle/>
-          <a:p>
-            <a:pPr marL="0" indent="0" algn="r">
-              <a:buNone/>
-            </a:pPr>
-            <a:r>
-              <a:rPr lang="en-US" sz="1000" dirty="0">
-                <a:solidFill>
-                  <a:srgbClr val="64748B"/>
-                </a:solidFill>
-                <a:latin typeface="Calibri" pitchFamily="34" charset="0"/>
-                <a:ea typeface="Calibri" pitchFamily="34" charset="-122"/>
-                <a:cs typeface="Calibri" pitchFamily="34" charset="-120"/>
-              </a:rPr>
-              <a:t>−3</a:t>
-            </a:r>
-            <a:endParaRPr lang="en-US" sz="1000" dirty="0"/>
-          </a:p>
-        </p:txBody>
-      </p:sp>
-      <p:sp>
-        <p:nvSpPr>
-          <p:cNvPr id="24" name="Shape 22"/>
-          <p:cNvSpPr/>
-          <p:nvPr/>
-        </p:nvSpPr>
-        <p:spPr>
-          <a:xfrm>
-            <a:off x="548640" y="2825496"/>
-            <a:ext cx="3931920" cy="10973"/>
-          </a:xfrm>
-          <a:prstGeom prst="rect">
-            <a:avLst/>
-          </a:prstGeom>
-          <a:solidFill>
-            <a:srgbClr val="D8DEE6"/>
-          </a:solidFill>
-          <a:ln w="12700">
-            <a:solidFill>
-              <a:srgbClr val="D8DEE6"/>
-            </a:solidFill>
-            <a:prstDash val="solid"/>
-          </a:ln>
-        </p:spPr>
-        <p:txBody>
-          <a:bodyPr/>
-          <a:lstStyle/>
-          <a:p>
-            <a:endParaRPr lang="en-US"/>
-          </a:p>
-        </p:txBody>
-      </p:sp>
-      <p:sp>
-        <p:nvSpPr>
-          <p:cNvPr id="25" name="Text 23"/>
-          <p:cNvSpPr/>
-          <p:nvPr/>
-        </p:nvSpPr>
-        <p:spPr>
-          <a:xfrm>
-            <a:off x="548640" y="2944368"/>
-            <a:ext cx="3931920" cy="292608"/>
-          </a:xfrm>
-          <a:prstGeom prst="rect">
-            <a:avLst/>
-          </a:prstGeom>
-          <a:noFill/>
-          <a:ln/>
-        </p:spPr>
-        <p:txBody>
-          <a:bodyPr wrap="square" lIns="0" tIns="0" rIns="0" bIns="0" rtlCol="0" anchor="ctr"/>
-          <a:lstStyle/>
-          <a:p>
-            <a:pPr marL="0" indent="0">
-              <a:buNone/>
-            </a:pPr>
-            <a:r>
-              <a:rPr lang="en-US" sz="1150" b="1" dirty="0">
-                <a:solidFill>
-                  <a:srgbClr val="0F2A44"/>
-                </a:solidFill>
-                <a:latin typeface="Calibri" pitchFamily="34" charset="0"/>
-                <a:ea typeface="Calibri" pitchFamily="34" charset="-122"/>
-                <a:cs typeface="Calibri" pitchFamily="34" charset="-120"/>
-              </a:rPr>
-              <a:t>Total penalty 49  →  category clamps at 0 / 40</a:t>
-            </a:r>
-            <a:endParaRPr lang="en-US" sz="1150" dirty="0"/>
-          </a:p>
-        </p:txBody>
-      </p:sp>
-      <p:sp>
-        <p:nvSpPr>
-          <p:cNvPr id="26" name="Text 24"/>
-          <p:cNvSpPr/>
-          <p:nvPr/>
-        </p:nvSpPr>
-        <p:spPr>
-          <a:xfrm>
-            <a:off x="548640" y="3429000"/>
-            <a:ext cx="3931920" cy="1097280"/>
-          </a:xfrm>
-          <a:prstGeom prst="rect">
-            <a:avLst/>
-          </a:prstGeom>
-          <a:noFill/>
-          <a:ln/>
-        </p:spPr>
-        <p:txBody>
-          <a:bodyPr wrap="square" lIns="0" tIns="0" rIns="0" bIns="0" rtlCol="0" anchor="ctr"/>
-          <a:lstStyle/>
-          <a:p>
-            <a:pPr marL="0" indent="0">
-              <a:buNone/>
-            </a:pPr>
-            <a:r>
-              <a:rPr lang="en-US" sz="1000" i="1" dirty="0">
-                <a:solidFill>
-                  <a:srgbClr val="64748B"/>
-                </a:solidFill>
-                <a:latin typeface="Calibri" pitchFamily="34" charset="0"/>
-                <a:ea typeface="Calibri" pitchFamily="34" charset="-122"/>
-                <a:cs typeface="Calibri" pitchFamily="34" charset="-120"/>
-              </a:rPr>
-              <a:t>Deductions spread across all four categories: </a:t>
-            </a:r>
-          </a:p>
-          <a:p>
-            <a:pPr marL="171450" indent="-171450">
-              <a:buFont typeface="Arial" panose="020B0604020202020204" pitchFamily="34" charset="0"/>
-              <a:buChar char="•"/>
-            </a:pPr>
-            <a:r>
-              <a:rPr lang="en-US" sz="1000" i="1" dirty="0">
-                <a:solidFill>
-                  <a:srgbClr val="64748B"/>
-                </a:solidFill>
-                <a:latin typeface="Calibri" pitchFamily="34" charset="0"/>
-                <a:ea typeface="Calibri" pitchFamily="34" charset="-122"/>
-                <a:cs typeface="Calibri" pitchFamily="34" charset="-120"/>
-              </a:rPr>
-              <a:t>Anti-pattern load clamps AP to 0</a:t>
-            </a:r>
-          </a:p>
-          <a:p>
-            <a:pPr marL="171450" indent="-171450">
-              <a:buFont typeface="Arial" panose="020B0604020202020204" pitchFamily="34" charset="0"/>
-              <a:buChar char="•"/>
-            </a:pPr>
-            <a:r>
-              <a:rPr lang="en-US" sz="1000" i="1" dirty="0">
-                <a:solidFill>
-                  <a:srgbClr val="64748B"/>
-                </a:solidFill>
-                <a:latin typeface="Calibri" pitchFamily="34" charset="0"/>
-                <a:ea typeface="Calibri" pitchFamily="34" charset="-122"/>
-                <a:cs typeface="Calibri" pitchFamily="34" charset="-120"/>
-              </a:rPr>
-              <a:t>Architecture loses 9 to dependency-graph coupling</a:t>
-            </a:r>
-          </a:p>
-          <a:p>
-            <a:pPr marL="171450" indent="-171450">
-              <a:buFont typeface="Arial" panose="020B0604020202020204" pitchFamily="34" charset="0"/>
-              <a:buChar char="•"/>
-            </a:pPr>
-            <a:r>
-              <a:rPr lang="en-US" sz="1000" i="1" dirty="0">
-                <a:solidFill>
-                  <a:srgbClr val="64748B"/>
-                </a:solidFill>
-                <a:latin typeface="Calibri" pitchFamily="34" charset="0"/>
-                <a:ea typeface="Calibri" pitchFamily="34" charset="-122"/>
-                <a:cs typeface="Calibri" pitchFamily="34" charset="-120"/>
-              </a:rPr>
-              <a:t>Code Quality 8 to smell density</a:t>
-            </a:r>
-          </a:p>
-          <a:p>
-            <a:pPr marL="171450" indent="-171450">
-              <a:buFont typeface="Arial" panose="020B0604020202020204" pitchFamily="34" charset="0"/>
-              <a:buChar char="•"/>
-            </a:pPr>
-            <a:r>
-              <a:rPr lang="en-US" sz="1000" i="1" dirty="0">
-                <a:solidFill>
-                  <a:srgbClr val="64748B"/>
-                </a:solidFill>
-                <a:latin typeface="Calibri" pitchFamily="34" charset="0"/>
-                <a:ea typeface="Calibri" pitchFamily="34" charset="-122"/>
-                <a:cs typeface="Calibri" pitchFamily="34" charset="-120"/>
-              </a:rPr>
-              <a:t>Service Sizing 3 to one nano service</a:t>
-            </a:r>
-            <a:endParaRPr lang="en-US" sz="1000" dirty="0"/>
-          </a:p>
-        </p:txBody>
-      </p:sp>
-      <p:sp>
-        <p:nvSpPr>
-          <p:cNvPr id="27" name="Text 25"/>
-          <p:cNvSpPr/>
-          <p:nvPr/>
-        </p:nvSpPr>
-        <p:spPr>
-          <a:xfrm>
-            <a:off x="4937760" y="987552"/>
-            <a:ext cx="3657600" cy="292608"/>
-          </a:xfrm>
-          <a:prstGeom prst="rect">
-            <a:avLst/>
-          </a:prstGeom>
-          <a:noFill/>
-          <a:ln/>
-        </p:spPr>
-        <p:txBody>
-          <a:bodyPr wrap="square" lIns="0" tIns="0" rIns="0" bIns="0" rtlCol="0" anchor="ctr"/>
-          <a:lstStyle/>
-          <a:p>
-            <a:pPr marL="0" indent="0">
-              <a:buNone/>
-            </a:pPr>
-            <a:r>
-              <a:rPr lang="en-US" sz="1300" b="1" dirty="0">
-                <a:solidFill>
-                  <a:srgbClr val="0F2A44"/>
-                </a:solidFill>
-                <a:latin typeface="Calibri" pitchFamily="34" charset="0"/>
-                <a:ea typeface="Calibri" pitchFamily="34" charset="-122"/>
-                <a:cs typeface="Calibri" pitchFamily="34" charset="-120"/>
-              </a:rPr>
-              <a:t>Category contributions</a:t>
-            </a:r>
-            <a:endParaRPr lang="en-US" sz="1300" dirty="0"/>
-          </a:p>
-        </p:txBody>
-      </p:sp>
-      <p:sp>
-        <p:nvSpPr>
-          <p:cNvPr id="28" name="Text 26"/>
-          <p:cNvSpPr/>
-          <p:nvPr/>
-        </p:nvSpPr>
-        <p:spPr>
-          <a:xfrm>
-            <a:off x="4937760" y="1353312"/>
-            <a:ext cx="1280160" cy="292608"/>
-          </a:xfrm>
-          <a:prstGeom prst="rect">
-            <a:avLst/>
-          </a:prstGeom>
-          <a:noFill/>
-          <a:ln/>
-        </p:spPr>
-        <p:txBody>
-          <a:bodyPr wrap="square" lIns="0" tIns="0" rIns="0" bIns="0" rtlCol="0" anchor="ctr"/>
-          <a:lstStyle/>
-          <a:p>
-            <a:pPr marL="0" indent="0">
-              <a:buNone/>
-            </a:pPr>
-            <a:r>
-              <a:rPr lang="en-US" sz="1050" dirty="0">
-                <a:solidFill>
-                  <a:srgbClr val="1E293B"/>
-                </a:solidFill>
-                <a:latin typeface="Calibri" pitchFamily="34" charset="0"/>
-                <a:ea typeface="Calibri" pitchFamily="34" charset="-122"/>
-                <a:cs typeface="Calibri" pitchFamily="34" charset="-120"/>
-              </a:rPr>
-              <a:t>Anti-Patterns</a:t>
-            </a:r>
-            <a:endParaRPr lang="en-US" sz="1050" dirty="0"/>
-          </a:p>
-        </p:txBody>
-      </p:sp>
-      <p:sp>
-        <p:nvSpPr>
-          <p:cNvPr id="29" name="Shape 27"/>
-          <p:cNvSpPr/>
-          <p:nvPr/>
-        </p:nvSpPr>
-        <p:spPr>
-          <a:xfrm>
-            <a:off x="6263640" y="1389888"/>
-            <a:ext cx="1691640" cy="219456"/>
-          </a:xfrm>
-          <a:prstGeom prst="rect">
-            <a:avLst/>
-          </a:prstGeom>
-          <a:solidFill>
-            <a:srgbClr val="D8DEE6"/>
-          </a:solidFill>
-          <a:ln w="12700">
-            <a:solidFill>
-              <a:srgbClr val="D8DEE6"/>
-            </a:solidFill>
-            <a:prstDash val="solid"/>
-          </a:ln>
-        </p:spPr>
-        <p:txBody>
-          <a:bodyPr/>
-          <a:lstStyle/>
-          <a:p>
-            <a:endParaRPr lang="en-US"/>
-          </a:p>
-        </p:txBody>
-      </p:sp>
-      <p:sp>
-        <p:nvSpPr>
-          <p:cNvPr id="30" name="Text 28"/>
-          <p:cNvSpPr/>
-          <p:nvPr/>
-        </p:nvSpPr>
-        <p:spPr>
-          <a:xfrm>
-            <a:off x="8028432" y="1353312"/>
-            <a:ext cx="566928" cy="292608"/>
-          </a:xfrm>
-          <a:prstGeom prst="rect">
-            <a:avLst/>
-          </a:prstGeom>
-          <a:noFill/>
-          <a:ln/>
-        </p:spPr>
-        <p:txBody>
-          <a:bodyPr wrap="square" lIns="0" tIns="0" rIns="0" bIns="0" rtlCol="0" anchor="ctr"/>
-          <a:lstStyle/>
-          <a:p>
-            <a:pPr marL="0" indent="0">
-              <a:buNone/>
-            </a:pPr>
-            <a:r>
-              <a:rPr lang="en-US" sz="1000" dirty="0">
-                <a:solidFill>
-                  <a:srgbClr val="64748B"/>
-                </a:solidFill>
-                <a:latin typeface="Calibri" pitchFamily="34" charset="0"/>
-                <a:ea typeface="Calibri" pitchFamily="34" charset="-122"/>
-                <a:cs typeface="Calibri" pitchFamily="34" charset="-120"/>
-              </a:rPr>
-              <a:t>0 / 40</a:t>
-            </a:r>
-            <a:endParaRPr lang="en-US" sz="1000" dirty="0"/>
-          </a:p>
-        </p:txBody>
-      </p:sp>
-      <p:sp>
-        <p:nvSpPr>
-          <p:cNvPr id="31" name="Text 29"/>
-          <p:cNvSpPr/>
-          <p:nvPr/>
-        </p:nvSpPr>
-        <p:spPr>
-          <a:xfrm>
-            <a:off x="4937760" y="1810512"/>
-            <a:ext cx="1280160" cy="292608"/>
-          </a:xfrm>
-          <a:prstGeom prst="rect">
-            <a:avLst/>
-          </a:prstGeom>
-          <a:noFill/>
-          <a:ln/>
-        </p:spPr>
-        <p:txBody>
-          <a:bodyPr wrap="square" lIns="0" tIns="0" rIns="0" bIns="0" rtlCol="0" anchor="ctr"/>
-          <a:lstStyle/>
-          <a:p>
-            <a:pPr marL="0" indent="0">
-              <a:buNone/>
-            </a:pPr>
-            <a:r>
-              <a:rPr lang="en-US" sz="1050" dirty="0">
-                <a:solidFill>
-                  <a:srgbClr val="1E293B"/>
-                </a:solidFill>
-                <a:latin typeface="Calibri" pitchFamily="34" charset="0"/>
-                <a:ea typeface="Calibri" pitchFamily="34" charset="-122"/>
-                <a:cs typeface="Calibri" pitchFamily="34" charset="-120"/>
-              </a:rPr>
-              <a:t>Code Quality</a:t>
-            </a:r>
-            <a:endParaRPr lang="en-US" sz="1050" dirty="0"/>
-          </a:p>
-        </p:txBody>
-      </p:sp>
-      <p:sp>
-        <p:nvSpPr>
-          <p:cNvPr id="32" name="Shape 30"/>
-          <p:cNvSpPr/>
-          <p:nvPr/>
-        </p:nvSpPr>
-        <p:spPr>
-          <a:xfrm>
-            <a:off x="6263640" y="1847088"/>
-            <a:ext cx="1691640" cy="219456"/>
-          </a:xfrm>
-          <a:prstGeom prst="rect">
-            <a:avLst/>
-          </a:prstGeom>
-          <a:solidFill>
-            <a:srgbClr val="D8DEE6"/>
-          </a:solidFill>
-          <a:ln w="12700">
-            <a:solidFill>
-              <a:srgbClr val="D8DEE6"/>
-            </a:solidFill>
-            <a:prstDash val="solid"/>
-          </a:ln>
-        </p:spPr>
-        <p:txBody>
-          <a:bodyPr/>
-          <a:lstStyle/>
-          <a:p>
-            <a:endParaRPr lang="en-US"/>
-          </a:p>
-        </p:txBody>
-      </p:sp>
-      <p:sp>
-        <p:nvSpPr>
-          <p:cNvPr id="33" name="Shape 31"/>
-          <p:cNvSpPr/>
-          <p:nvPr/>
-        </p:nvSpPr>
-        <p:spPr>
-          <a:xfrm>
-            <a:off x="6263640" y="1847088"/>
-            <a:ext cx="1014984" cy="219456"/>
-          </a:xfrm>
-          <a:prstGeom prst="rect">
-            <a:avLst/>
-          </a:prstGeom>
-          <a:solidFill>
-            <a:srgbClr val="D97706"/>
-          </a:solidFill>
-          <a:ln w="12700">
-            <a:solidFill>
-              <a:srgbClr val="D97706"/>
-            </a:solidFill>
-            <a:prstDash val="solid"/>
-          </a:ln>
-        </p:spPr>
-        <p:txBody>
-          <a:bodyPr/>
-          <a:lstStyle/>
-          <a:p>
-            <a:endParaRPr lang="en-US"/>
-          </a:p>
-        </p:txBody>
-      </p:sp>
-      <p:sp>
-        <p:nvSpPr>
-          <p:cNvPr id="34" name="Text 32"/>
-          <p:cNvSpPr/>
-          <p:nvPr/>
-        </p:nvSpPr>
-        <p:spPr>
-          <a:xfrm>
-            <a:off x="8028432" y="1810512"/>
-            <a:ext cx="566928" cy="292608"/>
-          </a:xfrm>
-          <a:prstGeom prst="rect">
-            <a:avLst/>
-          </a:prstGeom>
-          <a:noFill/>
-          <a:ln/>
-        </p:spPr>
-        <p:txBody>
-          <a:bodyPr wrap="square" lIns="0" tIns="0" rIns="0" bIns="0" rtlCol="0" anchor="ctr"/>
-          <a:lstStyle/>
-          <a:p>
-            <a:pPr marL="0" indent="0">
-              <a:buNone/>
-            </a:pPr>
-            <a:r>
-              <a:rPr lang="en-US" sz="1000" dirty="0">
-                <a:solidFill>
-                  <a:srgbClr val="64748B"/>
-                </a:solidFill>
-                <a:latin typeface="Calibri" pitchFamily="34" charset="0"/>
-                <a:ea typeface="Calibri" pitchFamily="34" charset="-122"/>
-                <a:cs typeface="Calibri" pitchFamily="34" charset="-120"/>
-              </a:rPr>
-              <a:t>12 / 20</a:t>
-            </a:r>
-            <a:endParaRPr lang="en-US" sz="1000" dirty="0"/>
-          </a:p>
-        </p:txBody>
-      </p:sp>
-      <p:sp>
-        <p:nvSpPr>
-          <p:cNvPr id="35" name="Text 33"/>
-          <p:cNvSpPr/>
-          <p:nvPr/>
-        </p:nvSpPr>
-        <p:spPr>
-          <a:xfrm>
-            <a:off x="4937760" y="2267712"/>
-            <a:ext cx="1280160" cy="292608"/>
-          </a:xfrm>
-          <a:prstGeom prst="rect">
-            <a:avLst/>
-          </a:prstGeom>
-          <a:noFill/>
-          <a:ln/>
-        </p:spPr>
-        <p:txBody>
-          <a:bodyPr wrap="square" lIns="0" tIns="0" rIns="0" bIns="0" rtlCol="0" anchor="ctr"/>
-          <a:lstStyle/>
-          <a:p>
-            <a:pPr marL="0" indent="0">
-              <a:buNone/>
-            </a:pPr>
-            <a:r>
-              <a:rPr lang="en-US" sz="1050" dirty="0">
-                <a:solidFill>
-                  <a:srgbClr val="1E293B"/>
-                </a:solidFill>
-                <a:latin typeface="Calibri" pitchFamily="34" charset="0"/>
-                <a:ea typeface="Calibri" pitchFamily="34" charset="-122"/>
-                <a:cs typeface="Calibri" pitchFamily="34" charset="-120"/>
-              </a:rPr>
-              <a:t>Architecture</a:t>
-            </a:r>
-            <a:endParaRPr lang="en-US" sz="1050" dirty="0"/>
-          </a:p>
-        </p:txBody>
-      </p:sp>
-      <p:sp>
-        <p:nvSpPr>
-          <p:cNvPr id="36" name="Shape 34"/>
-          <p:cNvSpPr/>
-          <p:nvPr/>
-        </p:nvSpPr>
-        <p:spPr>
-          <a:xfrm>
-            <a:off x="6263640" y="2304288"/>
-            <a:ext cx="1691640" cy="219456"/>
-          </a:xfrm>
-          <a:prstGeom prst="rect">
-            <a:avLst/>
-          </a:prstGeom>
-          <a:solidFill>
-            <a:srgbClr val="D8DEE6"/>
-          </a:solidFill>
-          <a:ln w="12700">
-            <a:solidFill>
-              <a:srgbClr val="D8DEE6"/>
-            </a:solidFill>
-            <a:prstDash val="solid"/>
-          </a:ln>
-        </p:spPr>
-        <p:txBody>
-          <a:bodyPr/>
-          <a:lstStyle/>
-          <a:p>
-            <a:endParaRPr lang="en-US"/>
-          </a:p>
-        </p:txBody>
-      </p:sp>
-      <p:sp>
-        <p:nvSpPr>
-          <p:cNvPr id="37" name="Shape 35"/>
-          <p:cNvSpPr/>
-          <p:nvPr/>
-        </p:nvSpPr>
-        <p:spPr>
-          <a:xfrm>
-            <a:off x="6263640" y="2304288"/>
-            <a:ext cx="1082650" cy="219456"/>
-          </a:xfrm>
-          <a:prstGeom prst="rect">
-            <a:avLst/>
-          </a:prstGeom>
-          <a:solidFill>
-            <a:srgbClr val="1C4E80"/>
-          </a:solidFill>
-          <a:ln w="12700">
-            <a:solidFill>
-              <a:srgbClr val="1C4E80"/>
-            </a:solidFill>
-            <a:prstDash val="solid"/>
-          </a:ln>
-        </p:spPr>
-        <p:txBody>
-          <a:bodyPr/>
-          <a:lstStyle/>
-          <a:p>
-            <a:endParaRPr lang="en-US"/>
-          </a:p>
-        </p:txBody>
-      </p:sp>
-      <p:sp>
-        <p:nvSpPr>
-          <p:cNvPr id="38" name="Text 36"/>
-          <p:cNvSpPr/>
-          <p:nvPr/>
-        </p:nvSpPr>
-        <p:spPr>
-          <a:xfrm>
-            <a:off x="8028432" y="2267712"/>
-            <a:ext cx="566928" cy="292608"/>
-          </a:xfrm>
-          <a:prstGeom prst="rect">
-            <a:avLst/>
-          </a:prstGeom>
-          <a:noFill/>
-          <a:ln/>
-        </p:spPr>
-        <p:txBody>
-          <a:bodyPr wrap="square" lIns="0" tIns="0" rIns="0" bIns="0" rtlCol="0" anchor="ctr"/>
-          <a:lstStyle/>
-          <a:p>
-            <a:pPr marL="0" indent="0">
-              <a:buNone/>
-            </a:pPr>
-            <a:r>
-              <a:rPr lang="en-US" sz="1000" dirty="0">
-                <a:solidFill>
-                  <a:srgbClr val="64748B"/>
-                </a:solidFill>
-                <a:latin typeface="Calibri" pitchFamily="34" charset="0"/>
-                <a:ea typeface="Calibri" pitchFamily="34" charset="-122"/>
-                <a:cs typeface="Calibri" pitchFamily="34" charset="-120"/>
-              </a:rPr>
-              <a:t>16 / 25</a:t>
-            </a:r>
-            <a:endParaRPr lang="en-US" sz="1000" dirty="0"/>
-          </a:p>
-        </p:txBody>
-      </p:sp>
-      <p:sp>
-        <p:nvSpPr>
-          <p:cNvPr id="39" name="Text 37"/>
-          <p:cNvSpPr/>
-          <p:nvPr/>
-        </p:nvSpPr>
-        <p:spPr>
-          <a:xfrm>
-            <a:off x="4937760" y="2724912"/>
-            <a:ext cx="1280160" cy="292608"/>
-          </a:xfrm>
-          <a:prstGeom prst="rect">
-            <a:avLst/>
-          </a:prstGeom>
-          <a:noFill/>
-          <a:ln/>
-        </p:spPr>
-        <p:txBody>
-          <a:bodyPr wrap="square" lIns="0" tIns="0" rIns="0" bIns="0" rtlCol="0" anchor="ctr"/>
-          <a:lstStyle/>
-          <a:p>
-            <a:pPr marL="0" indent="0">
-              <a:buNone/>
-            </a:pPr>
-            <a:r>
-              <a:rPr lang="en-US" sz="1050" dirty="0">
-                <a:solidFill>
-                  <a:srgbClr val="1E293B"/>
-                </a:solidFill>
-                <a:latin typeface="Calibri" pitchFamily="34" charset="0"/>
-                <a:ea typeface="Calibri" pitchFamily="34" charset="-122"/>
-                <a:cs typeface="Calibri" pitchFamily="34" charset="-120"/>
-              </a:rPr>
-              <a:t>Service Sizing</a:t>
-            </a:r>
-            <a:endParaRPr lang="en-US" sz="1050" dirty="0"/>
-          </a:p>
-        </p:txBody>
-      </p:sp>
-      <p:sp>
-        <p:nvSpPr>
-          <p:cNvPr id="40" name="Shape 38"/>
-          <p:cNvSpPr/>
-          <p:nvPr/>
-        </p:nvSpPr>
-        <p:spPr>
-          <a:xfrm>
-            <a:off x="6263640" y="2761488"/>
-            <a:ext cx="1691640" cy="219456"/>
-          </a:xfrm>
-          <a:prstGeom prst="rect">
-            <a:avLst/>
-          </a:prstGeom>
-          <a:solidFill>
-            <a:srgbClr val="D8DEE6"/>
-          </a:solidFill>
-          <a:ln w="12700">
-            <a:solidFill>
-              <a:srgbClr val="D8DEE6"/>
-            </a:solidFill>
-            <a:prstDash val="solid"/>
-          </a:ln>
-        </p:spPr>
-        <p:txBody>
-          <a:bodyPr/>
-          <a:lstStyle/>
-          <a:p>
-            <a:endParaRPr lang="en-US"/>
-          </a:p>
-        </p:txBody>
-      </p:sp>
-      <p:sp>
-        <p:nvSpPr>
-          <p:cNvPr id="41" name="Shape 39"/>
-          <p:cNvSpPr/>
-          <p:nvPr/>
-        </p:nvSpPr>
-        <p:spPr>
-          <a:xfrm>
-            <a:off x="6263640" y="2761488"/>
-            <a:ext cx="1353312" cy="219456"/>
+          <p:cNvPr id="2" name="Shape 0"/>
+          <p:cNvSpPr/>
+          <p:nvPr/>
+        </p:nvSpPr>
+        <p:spPr>
+          <a:xfrm>
+            <a:off x="548640" y="868680"/>
+            <a:ext cx="640080" cy="41148"/>
           </a:xfrm>
           <a:prstGeom prst="rect">
             <a:avLst/>
@@ -13727,96 +16823,553 @@
       </p:sp>
       <p:sp>
         <p:nvSpPr>
-          <p:cNvPr id="42" name="Text 40"/>
-          <p:cNvSpPr/>
-          <p:nvPr/>
-        </p:nvSpPr>
-        <p:spPr>
-          <a:xfrm>
-            <a:off x="8028432" y="2724912"/>
-            <a:ext cx="566928" cy="292608"/>
-          </a:xfrm>
-          <a:prstGeom prst="rect">
-            <a:avLst/>
-          </a:prstGeom>
-          <a:noFill/>
-          <a:ln/>
-        </p:spPr>
-        <p:txBody>
-          <a:bodyPr wrap="square" lIns="0" tIns="0" rIns="0" bIns="0" rtlCol="0" anchor="ctr"/>
-          <a:lstStyle/>
-          <a:p>
-            <a:pPr marL="0" indent="0">
-              <a:buNone/>
-            </a:pPr>
-            <a:r>
-              <a:rPr lang="en-US" sz="1000" dirty="0">
-                <a:solidFill>
-                  <a:srgbClr val="64748B"/>
-                </a:solidFill>
-                <a:latin typeface="Calibri" pitchFamily="34" charset="0"/>
-                <a:ea typeface="Calibri" pitchFamily="34" charset="-122"/>
-                <a:cs typeface="Calibri" pitchFamily="34" charset="-120"/>
-              </a:rPr>
-              <a:t>12 / 15</a:t>
-            </a:r>
-            <a:endParaRPr lang="en-US" sz="1000" dirty="0"/>
-          </a:p>
-        </p:txBody>
-      </p:sp>
-      <p:sp>
-        <p:nvSpPr>
-          <p:cNvPr id="43" name="Text 41"/>
-          <p:cNvSpPr/>
-          <p:nvPr/>
-        </p:nvSpPr>
-        <p:spPr>
-          <a:xfrm>
-            <a:off x="4937760" y="3429000"/>
-            <a:ext cx="3657600" cy="777240"/>
-          </a:xfrm>
-          <a:prstGeom prst="rect">
-            <a:avLst/>
-          </a:prstGeom>
-          <a:noFill/>
-          <a:ln/>
-        </p:spPr>
-        <p:txBody>
-          <a:bodyPr wrap="square" lIns="0" tIns="0" rIns="0" bIns="0" rtlCol="0" anchor="ctr"/>
-          <a:lstStyle/>
-          <a:p>
-            <a:pPr marL="0" indent="0">
-              <a:buNone/>
-            </a:pPr>
-            <a:r>
-              <a:rPr lang="en-US" sz="4000" b="1" dirty="0">
-                <a:solidFill>
-                  <a:srgbClr val="DC2626"/>
-                </a:solidFill>
-                <a:latin typeface="Calibri" pitchFamily="34" charset="0"/>
-                <a:ea typeface="Calibri" pitchFamily="34" charset="-122"/>
-                <a:cs typeface="Calibri" pitchFamily="34" charset="-120"/>
-              </a:rPr>
-              <a:t>40</a:t>
-            </a:r>
+          <p:cNvPr id="3" name="Text 1"/>
+          <p:cNvSpPr/>
+          <p:nvPr/>
+        </p:nvSpPr>
+        <p:spPr>
+          <a:xfrm>
+            <a:off x="548640" y="1051560"/>
+            <a:ext cx="7863840" cy="777240"/>
+          </a:xfrm>
+          <a:prstGeom prst="rect">
+            <a:avLst/>
+          </a:prstGeom>
+          <a:noFill/>
+          <a:ln/>
+        </p:spPr>
+        <p:txBody>
+          <a:bodyPr wrap="square" lIns="0" tIns="0" rIns="0" bIns="0" rtlCol="0" anchor="ctr"/>
+          <a:lstStyle/>
+          <a:p>
+            <a:pPr marL="0" indent="0">
+              <a:buNone/>
+            </a:pPr>
+            <a:r>
+              <a:rPr lang="en-US" sz="4400" b="1" dirty="0">
+                <a:solidFill>
+                  <a:srgbClr val="FFFFFF"/>
+                </a:solidFill>
+                <a:latin typeface="Calibri" pitchFamily="34" charset="0"/>
+                <a:ea typeface="Calibri" pitchFamily="34" charset="-122"/>
+                <a:cs typeface="Calibri" pitchFamily="34" charset="-120"/>
+              </a:rPr>
+              <a:t>Live demo</a:t>
+            </a:r>
+            <a:endParaRPr lang="en-US" sz="4400" dirty="0"/>
+          </a:p>
+        </p:txBody>
+      </p:sp>
+      <p:sp>
+        <p:nvSpPr>
+          <p:cNvPr id="4" name="Text 2"/>
+          <p:cNvSpPr/>
+          <p:nvPr/>
+        </p:nvSpPr>
+        <p:spPr>
+          <a:xfrm>
+            <a:off x="548640" y="1874520"/>
+            <a:ext cx="7863840" cy="365760"/>
+          </a:xfrm>
+          <a:prstGeom prst="rect">
+            <a:avLst/>
+          </a:prstGeom>
+          <a:noFill/>
+          <a:ln/>
+        </p:spPr>
+        <p:txBody>
+          <a:bodyPr wrap="square" lIns="0" tIns="0" rIns="0" bIns="0" rtlCol="0" anchor="ctr"/>
+          <a:lstStyle/>
+          <a:p>
+            <a:pPr marL="0" indent="0">
+              <a:buNone/>
+            </a:pPr>
+            <a:r>
+              <a:rPr lang="en-US" sz="1600" i="1" dirty="0">
+                <a:solidFill>
+                  <a:srgbClr val="DBEAFE"/>
+                </a:solidFill>
+                <a:latin typeface="Calibri" pitchFamily="34" charset="0"/>
+                <a:ea typeface="Calibri" pitchFamily="34" charset="-122"/>
+                <a:cs typeface="Calibri" pitchFamily="34" charset="-120"/>
+              </a:rPr>
+              <a:t>Cloning and analysing a microservice project in real time</a:t>
+            </a:r>
+            <a:endParaRPr lang="en-US" sz="1600" dirty="0"/>
+          </a:p>
+        </p:txBody>
+      </p:sp>
+      <p:sp>
+        <p:nvSpPr>
+          <p:cNvPr id="5" name="Text 3"/>
+          <p:cNvSpPr/>
+          <p:nvPr/>
+        </p:nvSpPr>
+        <p:spPr>
+          <a:xfrm>
+            <a:off x="548640" y="2560320"/>
+            <a:ext cx="365760" cy="292608"/>
+          </a:xfrm>
+          <a:prstGeom prst="rect">
+            <a:avLst/>
+          </a:prstGeom>
+          <a:noFill/>
+          <a:ln/>
+        </p:spPr>
+        <p:txBody>
+          <a:bodyPr wrap="square" lIns="0" tIns="0" rIns="0" bIns="0" rtlCol="0" anchor="ctr"/>
+          <a:lstStyle/>
+          <a:p>
+            <a:pPr marL="0" indent="0">
+              <a:buNone/>
+            </a:pPr>
+            <a:r>
+              <a:rPr lang="en-US" sz="1600" b="1" dirty="0">
+                <a:solidFill>
+                  <a:srgbClr val="0D9488"/>
+                </a:solidFill>
+                <a:latin typeface="Calibri" pitchFamily="34" charset="0"/>
+                <a:ea typeface="Calibri" pitchFamily="34" charset="-122"/>
+                <a:cs typeface="Calibri" pitchFamily="34" charset="-120"/>
+              </a:rPr>
+              <a:t>1</a:t>
+            </a:r>
+            <a:endParaRPr lang="en-US" sz="1600" dirty="0"/>
+          </a:p>
+        </p:txBody>
+      </p:sp>
+      <p:sp>
+        <p:nvSpPr>
+          <p:cNvPr id="6" name="Text 4"/>
+          <p:cNvSpPr/>
+          <p:nvPr/>
+        </p:nvSpPr>
+        <p:spPr>
+          <a:xfrm>
+            <a:off x="1051560" y="2569464"/>
+            <a:ext cx="7498080" cy="274320"/>
+          </a:xfrm>
+          <a:prstGeom prst="rect">
+            <a:avLst/>
+          </a:prstGeom>
+          <a:noFill/>
+          <a:ln/>
+        </p:spPr>
+        <p:txBody>
+          <a:bodyPr wrap="square" lIns="0" tIns="0" rIns="0" bIns="0" rtlCol="0" anchor="ctr"/>
+          <a:lstStyle/>
+          <a:p>
+            <a:pPr marL="0" indent="0">
+              <a:buNone/>
+            </a:pPr>
             <a:r>
               <a:rPr lang="en-US" sz="1400" b="1" dirty="0">
                 <a:solidFill>
-                  <a:srgbClr val="0F2A44"/>
-                </a:solidFill>
-                <a:latin typeface="Calibri" pitchFamily="34" charset="0"/>
-                <a:ea typeface="Calibri" pitchFamily="34" charset="-122"/>
-                <a:cs typeface="Calibri" pitchFamily="34" charset="-120"/>
-              </a:rPr>
-              <a:t>  / 100  ·  Grade F</a:t>
-            </a:r>
-            <a:endParaRPr lang="en-US" sz="4000" dirty="0"/>
-          </a:p>
-        </p:txBody>
-      </p:sp>
-      <p:sp>
-        <p:nvSpPr>
-          <p:cNvPr id="45" name="Text 43"/>
+                  <a:srgbClr val="FFFFFF"/>
+                </a:solidFill>
+                <a:latin typeface="Calibri" pitchFamily="34" charset="0"/>
+                <a:ea typeface="Calibri" pitchFamily="34" charset="-122"/>
+                <a:cs typeface="Calibri" pitchFamily="34" charset="-120"/>
+              </a:rPr>
+              <a:t>Clone a small repo</a:t>
+            </a:r>
+            <a:endParaRPr lang="en-US" sz="1400" dirty="0"/>
+          </a:p>
+        </p:txBody>
+      </p:sp>
+      <p:sp>
+        <p:nvSpPr>
+          <p:cNvPr id="7" name="Text 5"/>
+          <p:cNvSpPr/>
+          <p:nvPr/>
+        </p:nvSpPr>
+        <p:spPr>
+          <a:xfrm>
+            <a:off x="1051560" y="2825496"/>
+            <a:ext cx="7498080" cy="237744"/>
+          </a:xfrm>
+          <a:prstGeom prst="rect">
+            <a:avLst/>
+          </a:prstGeom>
+          <a:noFill/>
+          <a:ln/>
+        </p:spPr>
+        <p:txBody>
+          <a:bodyPr wrap="square" lIns="0" tIns="0" rIns="0" bIns="0" rtlCol="0" anchor="ctr"/>
+          <a:lstStyle/>
+          <a:p>
+            <a:pPr marL="0" indent="0">
+              <a:buNone/>
+            </a:pPr>
+            <a:r>
+              <a:rPr lang="en-US" sz="1100" dirty="0">
+                <a:solidFill>
+                  <a:srgbClr val="DBEAFE"/>
+                </a:solidFill>
+                <a:latin typeface="Calibri" pitchFamily="34" charset="0"/>
+                <a:ea typeface="Calibri" pitchFamily="34" charset="-122"/>
+                <a:cs typeface="Calibri" pitchFamily="34" charset="-120"/>
+              </a:rPr>
+              <a:t>Paste a public Git URL, submit, watch the pipeline progress</a:t>
+            </a:r>
+            <a:endParaRPr lang="en-US" sz="1100" dirty="0"/>
+          </a:p>
+        </p:txBody>
+      </p:sp>
+      <p:sp>
+        <p:nvSpPr>
+          <p:cNvPr id="8" name="Text 6"/>
+          <p:cNvSpPr/>
+          <p:nvPr/>
+        </p:nvSpPr>
+        <p:spPr>
+          <a:xfrm>
+            <a:off x="548640" y="3108960"/>
+            <a:ext cx="365760" cy="292608"/>
+          </a:xfrm>
+          <a:prstGeom prst="rect">
+            <a:avLst/>
+          </a:prstGeom>
+          <a:noFill/>
+          <a:ln/>
+        </p:spPr>
+        <p:txBody>
+          <a:bodyPr wrap="square" lIns="0" tIns="0" rIns="0" bIns="0" rtlCol="0" anchor="ctr"/>
+          <a:lstStyle/>
+          <a:p>
+            <a:pPr marL="0" indent="0">
+              <a:buNone/>
+            </a:pPr>
+            <a:r>
+              <a:rPr lang="en-US" sz="1600" b="1" dirty="0">
+                <a:solidFill>
+                  <a:srgbClr val="0D9488"/>
+                </a:solidFill>
+                <a:latin typeface="Calibri" pitchFamily="34" charset="0"/>
+                <a:ea typeface="Calibri" pitchFamily="34" charset="-122"/>
+                <a:cs typeface="Calibri" pitchFamily="34" charset="-120"/>
+              </a:rPr>
+              <a:t>2</a:t>
+            </a:r>
+            <a:endParaRPr lang="en-US" sz="1600" dirty="0"/>
+          </a:p>
+        </p:txBody>
+      </p:sp>
+      <p:sp>
+        <p:nvSpPr>
+          <p:cNvPr id="9" name="Text 7"/>
+          <p:cNvSpPr/>
+          <p:nvPr/>
+        </p:nvSpPr>
+        <p:spPr>
+          <a:xfrm>
+            <a:off x="1051560" y="3118104"/>
+            <a:ext cx="7498080" cy="274320"/>
+          </a:xfrm>
+          <a:prstGeom prst="rect">
+            <a:avLst/>
+          </a:prstGeom>
+          <a:noFill/>
+          <a:ln/>
+        </p:spPr>
+        <p:txBody>
+          <a:bodyPr wrap="square" lIns="0" tIns="0" rIns="0" bIns="0" rtlCol="0" anchor="ctr"/>
+          <a:lstStyle/>
+          <a:p>
+            <a:pPr marL="0" indent="0">
+              <a:buNone/>
+            </a:pPr>
+            <a:r>
+              <a:rPr lang="en-US" sz="1400" b="1" dirty="0">
+                <a:solidFill>
+                  <a:srgbClr val="FFFFFF"/>
+                </a:solidFill>
+                <a:latin typeface="Calibri" pitchFamily="34" charset="0"/>
+                <a:ea typeface="Calibri" pitchFamily="34" charset="-122"/>
+                <a:cs typeface="Calibri" pitchFamily="34" charset="-120"/>
+              </a:rPr>
+              <a:t>Open the results dashboard</a:t>
+            </a:r>
+            <a:endParaRPr lang="en-US" sz="1400" dirty="0"/>
+          </a:p>
+        </p:txBody>
+      </p:sp>
+      <p:sp>
+        <p:nvSpPr>
+          <p:cNvPr id="10" name="Text 8"/>
+          <p:cNvSpPr/>
+          <p:nvPr/>
+        </p:nvSpPr>
+        <p:spPr>
+          <a:xfrm>
+            <a:off x="1051560" y="3374136"/>
+            <a:ext cx="7498080" cy="237744"/>
+          </a:xfrm>
+          <a:prstGeom prst="rect">
+            <a:avLst/>
+          </a:prstGeom>
+          <a:noFill/>
+          <a:ln/>
+        </p:spPr>
+        <p:txBody>
+          <a:bodyPr wrap="square" lIns="0" tIns="0" rIns="0" bIns="0" rtlCol="0" anchor="ctr"/>
+          <a:lstStyle/>
+          <a:p>
+            <a:pPr marL="0" indent="0">
+              <a:buNone/>
+            </a:pPr>
+            <a:r>
+              <a:rPr lang="en-US" sz="1100" dirty="0">
+                <a:solidFill>
+                  <a:srgbClr val="DBEAFE"/>
+                </a:solidFill>
+                <a:latin typeface="Calibri" pitchFamily="34" charset="0"/>
+                <a:ea typeface="Calibri" pitchFamily="34" charset="-122"/>
+                <a:cs typeface="Calibri" pitchFamily="34" charset="-120"/>
+              </a:rPr>
+              <a:t>Health score gauge, four-category breakdown, summary metrics</a:t>
+            </a:r>
+            <a:endParaRPr lang="en-US" sz="1100" dirty="0"/>
+          </a:p>
+        </p:txBody>
+      </p:sp>
+      <p:sp>
+        <p:nvSpPr>
+          <p:cNvPr id="11" name="Text 9"/>
+          <p:cNvSpPr/>
+          <p:nvPr/>
+        </p:nvSpPr>
+        <p:spPr>
+          <a:xfrm>
+            <a:off x="548640" y="3657600"/>
+            <a:ext cx="365760" cy="292608"/>
+          </a:xfrm>
+          <a:prstGeom prst="rect">
+            <a:avLst/>
+          </a:prstGeom>
+          <a:noFill/>
+          <a:ln/>
+        </p:spPr>
+        <p:txBody>
+          <a:bodyPr wrap="square" lIns="0" tIns="0" rIns="0" bIns="0" rtlCol="0" anchor="ctr"/>
+          <a:lstStyle/>
+          <a:p>
+            <a:pPr marL="0" indent="0">
+              <a:buNone/>
+            </a:pPr>
+            <a:r>
+              <a:rPr lang="en-US" sz="1600" b="1" dirty="0">
+                <a:solidFill>
+                  <a:srgbClr val="0D9488"/>
+                </a:solidFill>
+                <a:latin typeface="Calibri" pitchFamily="34" charset="0"/>
+                <a:ea typeface="Calibri" pitchFamily="34" charset="-122"/>
+                <a:cs typeface="Calibri" pitchFamily="34" charset="-120"/>
+              </a:rPr>
+              <a:t>3</a:t>
+            </a:r>
+            <a:endParaRPr lang="en-US" sz="1600" dirty="0"/>
+          </a:p>
+        </p:txBody>
+      </p:sp>
+      <p:sp>
+        <p:nvSpPr>
+          <p:cNvPr id="12" name="Text 10"/>
+          <p:cNvSpPr/>
+          <p:nvPr/>
+        </p:nvSpPr>
+        <p:spPr>
+          <a:xfrm>
+            <a:off x="1051560" y="3666744"/>
+            <a:ext cx="7498080" cy="274320"/>
+          </a:xfrm>
+          <a:prstGeom prst="rect">
+            <a:avLst/>
+          </a:prstGeom>
+          <a:noFill/>
+          <a:ln/>
+        </p:spPr>
+        <p:txBody>
+          <a:bodyPr wrap="square" lIns="0" tIns="0" rIns="0" bIns="0" rtlCol="0" anchor="ctr"/>
+          <a:lstStyle/>
+          <a:p>
+            <a:pPr marL="0" indent="0">
+              <a:buNone/>
+            </a:pPr>
+            <a:r>
+              <a:rPr lang="en-US" sz="1400" b="1" dirty="0">
+                <a:solidFill>
+                  <a:srgbClr val="FFFFFF"/>
+                </a:solidFill>
+                <a:latin typeface="Calibri" pitchFamily="34" charset="0"/>
+                <a:ea typeface="Calibri" pitchFamily="34" charset="-122"/>
+                <a:cs typeface="Calibri" pitchFamily="34" charset="-120"/>
+              </a:rPr>
+              <a:t>Drill into a finding</a:t>
+            </a:r>
+            <a:endParaRPr lang="en-US" sz="1400" dirty="0"/>
+          </a:p>
+        </p:txBody>
+      </p:sp>
+      <p:sp>
+        <p:nvSpPr>
+          <p:cNvPr id="13" name="Text 11"/>
+          <p:cNvSpPr/>
+          <p:nvPr/>
+        </p:nvSpPr>
+        <p:spPr>
+          <a:xfrm>
+            <a:off x="1051560" y="3922776"/>
+            <a:ext cx="7498080" cy="237744"/>
+          </a:xfrm>
+          <a:prstGeom prst="rect">
+            <a:avLst/>
+          </a:prstGeom>
+          <a:noFill/>
+          <a:ln/>
+        </p:spPr>
+        <p:txBody>
+          <a:bodyPr wrap="square" lIns="0" tIns="0" rIns="0" bIns="0" rtlCol="0" anchor="ctr"/>
+          <a:lstStyle/>
+          <a:p>
+            <a:pPr marL="0" indent="0">
+              <a:buNone/>
+            </a:pPr>
+            <a:r>
+              <a:rPr lang="en-US" sz="1100" dirty="0">
+                <a:solidFill>
+                  <a:srgbClr val="DBEAFE"/>
+                </a:solidFill>
+                <a:latin typeface="Calibri" pitchFamily="34" charset="0"/>
+                <a:ea typeface="Calibri" pitchFamily="34" charset="-122"/>
+                <a:cs typeface="Calibri" pitchFamily="34" charset="-120"/>
+              </a:rPr>
+              <a:t>Expand an anti-pattern card to see source-code evidence and remediation</a:t>
+            </a:r>
+            <a:endParaRPr lang="en-US" sz="1100" dirty="0"/>
+          </a:p>
+        </p:txBody>
+      </p:sp>
+      <p:sp>
+        <p:nvSpPr>
+          <p:cNvPr id="14" name="Text 12"/>
+          <p:cNvSpPr/>
+          <p:nvPr/>
+        </p:nvSpPr>
+        <p:spPr>
+          <a:xfrm>
+            <a:off x="548640" y="4206240"/>
+            <a:ext cx="365760" cy="292608"/>
+          </a:xfrm>
+          <a:prstGeom prst="rect">
+            <a:avLst/>
+          </a:prstGeom>
+          <a:noFill/>
+          <a:ln/>
+        </p:spPr>
+        <p:txBody>
+          <a:bodyPr wrap="square" lIns="0" tIns="0" rIns="0" bIns="0" rtlCol="0" anchor="ctr"/>
+          <a:lstStyle/>
+          <a:p>
+            <a:pPr marL="0" indent="0">
+              <a:buNone/>
+            </a:pPr>
+            <a:r>
+              <a:rPr lang="en-US" sz="1600" b="1" dirty="0">
+                <a:solidFill>
+                  <a:srgbClr val="0D9488"/>
+                </a:solidFill>
+                <a:latin typeface="Calibri" pitchFamily="34" charset="0"/>
+                <a:ea typeface="Calibri" pitchFamily="34" charset="-122"/>
+                <a:cs typeface="Calibri" pitchFamily="34" charset="-120"/>
+              </a:rPr>
+              <a:t>4</a:t>
+            </a:r>
+            <a:endParaRPr lang="en-US" sz="1600" dirty="0"/>
+          </a:p>
+        </p:txBody>
+      </p:sp>
+      <p:sp>
+        <p:nvSpPr>
+          <p:cNvPr id="15" name="Text 13"/>
+          <p:cNvSpPr/>
+          <p:nvPr/>
+        </p:nvSpPr>
+        <p:spPr>
+          <a:xfrm>
+            <a:off x="1051560" y="4215384"/>
+            <a:ext cx="7498080" cy="274320"/>
+          </a:xfrm>
+          <a:prstGeom prst="rect">
+            <a:avLst/>
+          </a:prstGeom>
+          <a:noFill/>
+          <a:ln/>
+        </p:spPr>
+        <p:txBody>
+          <a:bodyPr wrap="square" lIns="0" tIns="0" rIns="0" bIns="0" rtlCol="0" anchor="ctr"/>
+          <a:lstStyle/>
+          <a:p>
+            <a:pPr marL="0" indent="0">
+              <a:buNone/>
+            </a:pPr>
+            <a:r>
+              <a:rPr lang="en-US" sz="1400" b="1" dirty="0">
+                <a:solidFill>
+                  <a:srgbClr val="FFFFFF"/>
+                </a:solidFill>
+                <a:latin typeface="Calibri" pitchFamily="34" charset="0"/>
+                <a:ea typeface="Calibri" pitchFamily="34" charset="-122"/>
+                <a:cs typeface="Calibri" pitchFamily="34" charset="-120"/>
+              </a:rPr>
+              <a:t>Explore the dependency graph</a:t>
+            </a:r>
+            <a:endParaRPr lang="en-US" sz="1400" dirty="0"/>
+          </a:p>
+        </p:txBody>
+      </p:sp>
+      <p:sp>
+        <p:nvSpPr>
+          <p:cNvPr id="16" name="Text 14"/>
+          <p:cNvSpPr/>
+          <p:nvPr/>
+        </p:nvSpPr>
+        <p:spPr>
+          <a:xfrm>
+            <a:off x="1051560" y="4471416"/>
+            <a:ext cx="7498080" cy="237744"/>
+          </a:xfrm>
+          <a:prstGeom prst="rect">
+            <a:avLst/>
+          </a:prstGeom>
+          <a:noFill/>
+          <a:ln/>
+        </p:spPr>
+        <p:txBody>
+          <a:bodyPr wrap="square" lIns="0" tIns="0" rIns="0" bIns="0" rtlCol="0" anchor="ctr"/>
+          <a:lstStyle/>
+          <a:p>
+            <a:pPr marL="0" indent="0">
+              <a:buNone/>
+            </a:pPr>
+            <a:r>
+              <a:rPr lang="en-US" sz="1100" dirty="0">
+                <a:solidFill>
+                  <a:srgbClr val="DBEAFE"/>
+                </a:solidFill>
+                <a:latin typeface="Calibri" pitchFamily="34" charset="0"/>
+                <a:ea typeface="Calibri" pitchFamily="34" charset="-122"/>
+                <a:cs typeface="Calibri" pitchFamily="34" charset="-120"/>
+              </a:rPr>
+              <a:t>Interactive Cytoscape view of inter-service edges</a:t>
+            </a:r>
+            <a:endParaRPr lang="en-US" sz="1100" dirty="0"/>
+          </a:p>
+        </p:txBody>
+      </p:sp>
+      <p:sp>
+        <p:nvSpPr>
+          <p:cNvPr id="17" name="Text 15"/>
           <p:cNvSpPr/>
           <p:nvPr/>
         </p:nvSpPr>
@@ -13841,13 +17394,13 @@
             <a:r>
               <a:rPr lang="en-US" sz="900" dirty="0">
                 <a:solidFill>
-                  <a:srgbClr val="64748B"/>
-                </a:solidFill>
-                <a:latin typeface="Calibri" pitchFamily="34" charset="0"/>
-                <a:ea typeface="Calibri" pitchFamily="34" charset="-122"/>
-                <a:cs typeface="Calibri" pitchFamily="34" charset="-120"/>
-              </a:rPr>
-              <a:t>8 / 12</a:t>
+                  <a:srgbClr val="DBEAFE"/>
+                </a:solidFill>
+                <a:latin typeface="Calibri" pitchFamily="34" charset="0"/>
+                <a:ea typeface="Calibri" pitchFamily="34" charset="-122"/>
+                <a:cs typeface="Calibri" pitchFamily="34" charset="-120"/>
+              </a:rPr>
+              <a:t>10 / 12</a:t>
             </a:r>
             <a:endParaRPr lang="en-US" sz="900" dirty="0"/>
           </a:p>

--- a/thesis/presentation/MSA_Detector_Defense_v2.pptx
+++ b/thesis/presentation/MSA_Detector_Defense_v2.pptx
@@ -12197,103 +12197,6 @@
       </p:sp>
       <p:sp>
         <p:nvSpPr>
-          <p:cNvPr id="24" name="Shape 22"/>
-          <p:cNvSpPr/>
-          <p:nvPr/>
-        </p:nvSpPr>
-        <p:spPr>
-          <a:xfrm>
-            <a:off x="548640" y="4498848"/>
-            <a:ext cx="457200" cy="36576"/>
-          </a:xfrm>
-          <a:prstGeom prst="rect">
-            <a:avLst/>
-          </a:prstGeom>
-          <a:solidFill>
-            <a:srgbClr val="0D9488"/>
-          </a:solidFill>
-          <a:ln w="12700">
-            <a:solidFill>
-              <a:srgbClr val="0D9488"/>
-            </a:solidFill>
-            <a:prstDash val="solid"/>
-          </a:ln>
-        </p:spPr>
-      </p:sp>
-      <p:sp>
-        <p:nvSpPr>
-          <p:cNvPr id="25" name="Text 23"/>
-          <p:cNvSpPr/>
-          <p:nvPr/>
-        </p:nvSpPr>
-        <p:spPr>
-          <a:xfrm>
-            <a:off x="548640" y="4590288"/>
-            <a:ext cx="8046720" cy="237744"/>
-          </a:xfrm>
-          <a:prstGeom prst="rect">
-            <a:avLst/>
-          </a:prstGeom>
-          <a:noFill/>
-          <a:ln/>
-        </p:spPr>
-        <p:txBody>
-          <a:bodyPr wrap="square" lIns="0" tIns="0" rIns="0" bIns="0" rtlCol="0" anchor="ctr"/>
-          <a:lstStyle/>
-          <a:p>
-            <a:pPr marL="0" marR="0" lvl="0" indent="0" algn="l" defTabSz="914400" rtl="0" eaLnBrk="1" fontAlgn="auto" latinLnBrk="0" hangingPunct="1">
-              <a:lnSpc>
-                <a:spcPct val="100000"/>
-              </a:lnSpc>
-              <a:spcBef>
-                <a:spcPts val="0"/>
-              </a:spcBef>
-              <a:spcAft>
-                <a:spcPts val="0"/>
-              </a:spcAft>
-              <a:buClrTx/>
-              <a:buSzTx/>
-              <a:buFontTx/>
-              <a:buNone/>
-              <a:tabLst/>
-              <a:defRPr/>
-            </a:pPr>
-            <a:r>
-              <a:rPr kumimoji="0" lang="en-US" sz="950" b="0" i="1" u="none" strike="noStrike" kern="1200" cap="none" spc="0" normalizeH="0" baseline="0" noProof="0" dirty="0">
-                <a:ln>
-                  <a:noFill/>
-                </a:ln>
-                <a:solidFill>
-                  <a:srgbClr val="64748B"/>
-                </a:solidFill>
-                <a:effectLst/>
-                <a:uLnTx/>
-                <a:uFillTx/>
-                <a:latin typeface="Calibri" pitchFamily="34" charset="0"/>
-                <a:ea typeface="Calibri" pitchFamily="34" charset="-122"/>
-                <a:cs typeface="Calibri" pitchFamily="34" charset="-120"/>
-              </a:rPr>
-              <a:t>TCC follows Bieman &amp; Kang's cohesion interpretation; graph metrics use the recovered directed service dependency graph.</a:t>
-            </a:r>
-            <a:endParaRPr kumimoji="0" lang="en-US" sz="950" b="0" i="0" u="none" strike="noStrike" kern="1200" cap="none" spc="0" normalizeH="0" baseline="0" noProof="0" dirty="0">
-              <a:ln>
-                <a:noFill/>
-              </a:ln>
-              <a:solidFill>
-                <a:prstClr val="black"/>
-              </a:solidFill>
-              <a:effectLst/>
-              <a:uLnTx/>
-              <a:uFillTx/>
-              <a:latin typeface="Calibri" panose="020F0502020204030204"/>
-              <a:ea typeface="+mn-ea"/>
-              <a:cs typeface="+mn-cs"/>
-            </a:endParaRPr>
-          </a:p>
-        </p:txBody>
-      </p:sp>
-      <p:sp>
-        <p:nvSpPr>
           <p:cNvPr id="26" name="Text 24"/>
           <p:cNvSpPr/>
           <p:nvPr/>
@@ -20170,103 +20073,6 @@
       </p:sp>
       <p:sp>
         <p:nvSpPr>
-          <p:cNvPr id="70" name="Shape 68"/>
-          <p:cNvSpPr/>
-          <p:nvPr/>
-        </p:nvSpPr>
-        <p:spPr>
-          <a:xfrm>
-            <a:off x="548640" y="4599432"/>
-            <a:ext cx="457200" cy="36576"/>
-          </a:xfrm>
-          <a:prstGeom prst="rect">
-            <a:avLst/>
-          </a:prstGeom>
-          <a:solidFill>
-            <a:srgbClr val="0D9488"/>
-          </a:solidFill>
-          <a:ln w="12700">
-            <a:solidFill>
-              <a:srgbClr val="0D9488"/>
-            </a:solidFill>
-            <a:prstDash val="solid"/>
-          </a:ln>
-        </p:spPr>
-      </p:sp>
-      <p:sp>
-        <p:nvSpPr>
-          <p:cNvPr id="71" name="Text 69"/>
-          <p:cNvSpPr/>
-          <p:nvPr/>
-        </p:nvSpPr>
-        <p:spPr>
-          <a:xfrm>
-            <a:off x="548640" y="4681728"/>
-            <a:ext cx="8046720" cy="201168"/>
-          </a:xfrm>
-          <a:prstGeom prst="rect">
-            <a:avLst/>
-          </a:prstGeom>
-          <a:noFill/>
-          <a:ln/>
-        </p:spPr>
-        <p:txBody>
-          <a:bodyPr wrap="square" lIns="0" tIns="0" rIns="0" bIns="0" rtlCol="0" anchor="ctr"/>
-          <a:lstStyle/>
-          <a:p>
-            <a:pPr marL="0" marR="0" lvl="0" indent="0" algn="l" defTabSz="914400" rtl="0" eaLnBrk="1" fontAlgn="auto" latinLnBrk="0" hangingPunct="1">
-              <a:lnSpc>
-                <a:spcPct val="100000"/>
-              </a:lnSpc>
-              <a:spcBef>
-                <a:spcPts val="0"/>
-              </a:spcBef>
-              <a:spcAft>
-                <a:spcPts val="0"/>
-              </a:spcAft>
-              <a:buClrTx/>
-              <a:buSzTx/>
-              <a:buFontTx/>
-              <a:buNone/>
-              <a:tabLst/>
-              <a:defRPr/>
-            </a:pPr>
-            <a:r>
-              <a:rPr kumimoji="0" lang="en-US" sz="850" b="0" i="1" u="none" strike="noStrike" kern="1200" cap="none" spc="0" normalizeH="0" baseline="0" noProof="0" dirty="0">
-                <a:ln>
-                  <a:noFill/>
-                </a:ln>
-                <a:solidFill>
-                  <a:srgbClr val="64748B"/>
-                </a:solidFill>
-                <a:effectLst/>
-                <a:uLnTx/>
-                <a:uFillTx/>
-                <a:latin typeface="Calibri" pitchFamily="34" charset="0"/>
-                <a:ea typeface="Calibri" pitchFamily="34" charset="-122"/>
-                <a:cs typeface="Calibri" pitchFamily="34" charset="-120"/>
-              </a:rPr>
-              <a:t>Thresholds are configurable and intentionally conservative for a prototype; production use should calibrate them per organisation.</a:t>
-            </a:r>
-            <a:endParaRPr kumimoji="0" lang="en-US" sz="850" b="0" i="0" u="none" strike="noStrike" kern="1200" cap="none" spc="0" normalizeH="0" baseline="0" noProof="0" dirty="0">
-              <a:ln>
-                <a:noFill/>
-              </a:ln>
-              <a:solidFill>
-                <a:prstClr val="black"/>
-              </a:solidFill>
-              <a:effectLst/>
-              <a:uLnTx/>
-              <a:uFillTx/>
-              <a:latin typeface="Calibri" panose="020F0502020204030204"/>
-              <a:ea typeface="+mn-ea"/>
-              <a:cs typeface="+mn-cs"/>
-            </a:endParaRPr>
-          </a:p>
-        </p:txBody>
-      </p:sp>
-      <p:sp>
-        <p:nvSpPr>
           <p:cNvPr id="72" name="Text 70"/>
           <p:cNvSpPr/>
           <p:nvPr/>
@@ -21834,103 +21640,6 @@
             <a:prstDash val="solid"/>
           </a:ln>
         </p:spPr>
-      </p:sp>
-      <p:sp>
-        <p:nvSpPr>
-          <p:cNvPr id="28" name="Shape 26"/>
-          <p:cNvSpPr/>
-          <p:nvPr/>
-        </p:nvSpPr>
-        <p:spPr>
-          <a:xfrm>
-            <a:off x="548640" y="4498848"/>
-            <a:ext cx="457200" cy="36576"/>
-          </a:xfrm>
-          <a:prstGeom prst="rect">
-            <a:avLst/>
-          </a:prstGeom>
-          <a:solidFill>
-            <a:srgbClr val="0D9488"/>
-          </a:solidFill>
-          <a:ln w="12700">
-            <a:solidFill>
-              <a:srgbClr val="0D9488"/>
-            </a:solidFill>
-            <a:prstDash val="solid"/>
-          </a:ln>
-        </p:spPr>
-      </p:sp>
-      <p:sp>
-        <p:nvSpPr>
-          <p:cNvPr id="29" name="Text 27"/>
-          <p:cNvSpPr/>
-          <p:nvPr/>
-        </p:nvSpPr>
-        <p:spPr>
-          <a:xfrm>
-            <a:off x="548640" y="4590288"/>
-            <a:ext cx="8046720" cy="237744"/>
-          </a:xfrm>
-          <a:prstGeom prst="rect">
-            <a:avLst/>
-          </a:prstGeom>
-          <a:noFill/>
-          <a:ln/>
-        </p:spPr>
-        <p:txBody>
-          <a:bodyPr wrap="square" lIns="0" tIns="0" rIns="0" bIns="0" rtlCol="0" anchor="ctr"/>
-          <a:lstStyle/>
-          <a:p>
-            <a:pPr marL="0" marR="0" lvl="0" indent="0" algn="l" defTabSz="914400" rtl="0" eaLnBrk="1" fontAlgn="auto" latinLnBrk="0" hangingPunct="1">
-              <a:lnSpc>
-                <a:spcPct val="100000"/>
-              </a:lnSpc>
-              <a:spcBef>
-                <a:spcPts val="0"/>
-              </a:spcBef>
-              <a:spcAft>
-                <a:spcPts val="0"/>
-              </a:spcAft>
-              <a:buClrTx/>
-              <a:buSzTx/>
-              <a:buFontTx/>
-              <a:buNone/>
-              <a:tabLst/>
-              <a:defRPr/>
-            </a:pPr>
-            <a:r>
-              <a:rPr kumimoji="0" lang="en-US" sz="950" b="0" i="1" u="none" strike="noStrike" kern="1200" cap="none" spc="0" normalizeH="0" baseline="0" noProof="0" dirty="0">
-                <a:ln>
-                  <a:noFill/>
-                </a:ln>
-                <a:solidFill>
-                  <a:srgbClr val="64748B"/>
-                </a:solidFill>
-                <a:effectLst/>
-                <a:uLnTx/>
-                <a:uFillTx/>
-                <a:latin typeface="Calibri" pitchFamily="34" charset="0"/>
-                <a:ea typeface="Calibri" pitchFamily="34" charset="-122"/>
-                <a:cs typeface="Calibri" pitchFamily="34" charset="-120"/>
-              </a:rPr>
-              <a:t>Graph algorithms are deterministic over the recovered service dependency graph; uncertainty comes mainly from static call resolution.</a:t>
-            </a:r>
-            <a:endParaRPr kumimoji="0" lang="en-US" sz="950" b="0" i="0" u="none" strike="noStrike" kern="1200" cap="none" spc="0" normalizeH="0" baseline="0" noProof="0" dirty="0">
-              <a:ln>
-                <a:noFill/>
-              </a:ln>
-              <a:solidFill>
-                <a:prstClr val="black"/>
-              </a:solidFill>
-              <a:effectLst/>
-              <a:uLnTx/>
-              <a:uFillTx/>
-              <a:latin typeface="Calibri" panose="020F0502020204030204"/>
-              <a:ea typeface="+mn-ea"/>
-              <a:cs typeface="+mn-cs"/>
-            </a:endParaRPr>
-          </a:p>
-        </p:txBody>
       </p:sp>
       <p:sp>
         <p:nvSpPr>

--- a/thesis/presentation/MSA_Detector_Defense_v2.pptx
+++ b/thesis/presentation/MSA_Detector_Defense_v2.pptx
@@ -5,7 +5,7 @@
     <p:sldMasterId id="2147483648" r:id="rId1"/>
   </p:sldMasterIdLst>
   <p:notesMasterIdLst>
-    <p:notesMasterId r:id="rId28"/>
+    <p:notesMasterId r:id="rId29"/>
   </p:notesMasterIdLst>
   <p:sldIdLst>
     <p:sldId id="256" r:id="rId2"/>
@@ -29,11 +29,12 @@
     <p:sldId id="275" r:id="rId20"/>
     <p:sldId id="283" r:id="rId21"/>
     <p:sldId id="276" r:id="rId22"/>
-    <p:sldId id="277" r:id="rId23"/>
-    <p:sldId id="278" r:id="rId24"/>
-    <p:sldId id="279" r:id="rId25"/>
-    <p:sldId id="280" r:id="rId26"/>
-    <p:sldId id="281" r:id="rId27"/>
+    <p:sldId id="284" r:id="rId23"/>
+    <p:sldId id="277" r:id="rId24"/>
+    <p:sldId id="278" r:id="rId25"/>
+    <p:sldId id="279" r:id="rId26"/>
+    <p:sldId id="280" r:id="rId27"/>
+    <p:sldId id="281" r:id="rId28"/>
   </p:sldIdLst>
   <p:sldSz cx="9144000" cy="5143500" type="screen16x9"/>
   <p:notesSz cx="5143500" cy="9144000"/>
@@ -2252,7 +2253,7 @@
             <a:r>
               <a:rPr lang="en-US" dirty="0"/>
               <a:t>Backup slide only.
-Use this if someone asks about Tarjan, cycles, graph construction, or why graph analysis is relevant. The concise answer is that microservice anti-patterns are often not visible inside one service; they emerge from the shape of dependencies between services.</a:t>
+Use this if someone asks for more detail than the threshold table but does not need a full detector walkthrough. Read only the row they asked about: signal, rule, evidence. If they ask for deeper implementation detail, go to the graph, service-boundary, or architecture-internals annex.</a:t>
             </a:r>
           </a:p>
         </p:txBody>
@@ -2400,7 +2401,7 @@
             <a:r>
               <a:rPr lang="en-US" dirty="0"/>
               <a:t>Backup slide only.
-Use this if someone asks how services are identified automatically. The core answer: the tool first finds candidate build modules, then applies a deployability gate with HIGH, MEDIUM, and LOW confidence signals.</a:t>
+Use this if someone asks about Tarjan, cycles, graph construction, or why graph analysis is relevant. The concise answer is that microservice anti-patterns are often not visible inside one service; they emerge from the shape of dependencies between services.</a:t>
             </a:r>
           </a:p>
         </p:txBody>
@@ -2548,7 +2549,7 @@
             <a:r>
               <a:rPr lang="en-US" dirty="0"/>
               <a:t>Backup slide only.
-Use this if someone asks why you did not use distributed tracing. The concise answer is: dynamic analysis is more precise for runtime behaviour, but static analysis works before deployment and gives source-level evidence.</a:t>
+Use this if someone asks how services are identified automatically. The core answer: the tool first finds candidate build modules, then applies a deployability gate with HIGH, MEDIUM, and LOW confidence signals.</a:t>
             </a:r>
           </a:p>
         </p:txBody>
@@ -2696,7 +2697,7 @@
             <a:r>
               <a:rPr lang="en-US" dirty="0"/>
               <a:t>Backup slide only.
-Use this if someone challenges the evaluation. Do not overclaim. Say clearly that the work demonstrates feasibility over heterogeneous repositories, while labelled benchmark validation and threshold calibration are future work.</a:t>
+Use this if someone asks why you did not use distributed tracing. The concise answer is: dynamic analysis is more precise for runtime behaviour, but static analysis works before deployment and gives source-level evidence.</a:t>
             </a:r>
           </a:p>
         </p:txBody>
@@ -2844,7 +2845,7 @@
             <a:r>
               <a:rPr lang="en-US" dirty="0"/>
               <a:t>Backup slide only.
-Use this if someone asks about implementation architecture. Walk left-to-right conceptually: API creates a job, async worker analyses the workspace, engines collect metrics, detectors create findings, scoring and persistence feed the UI.</a:t>
+Use this if someone challenges the evaluation. Do not overclaim. Say clearly that the work demonstrates feasibility over heterogeneous repositories, while labelled benchmark validation and threshold calibration are future work.</a:t>
             </a:r>
           </a:p>
         </p:txBody>
@@ -2914,6 +2915,154 @@
                 <a:defRPr/>
               </a:pPr>
               <a:t>26</a:t>
+            </a:fld>
+            <a:endParaRPr kumimoji="0" lang="en-US" sz="1800" b="0" i="0" u="none" strike="noStrike" kern="1200" cap="none" spc="0" normalizeH="0" baseline="0" noProof="0">
+              <a:ln>
+                <a:noFill/>
+              </a:ln>
+              <a:solidFill>
+                <a:prstClr val="black"/>
+              </a:solidFill>
+              <a:effectLst/>
+              <a:uLnTx/>
+              <a:uFillTx/>
+              <a:latin typeface="Calibri" panose="020F0502020204030204"/>
+              <a:ea typeface="+mn-ea"/>
+              <a:cs typeface="+mn-cs"/>
+            </a:endParaRPr>
+          </a:p>
+        </p:txBody>
+      </p:sp>
+    </p:spTree>
+    <p:extLst>
+      <p:ext uri="{BB962C8B-B14F-4D97-AF65-F5344CB8AC3E}">
+        <p14:creationId xmlns:p14="http://schemas.microsoft.com/office/powerpoint/2010/main" val="1024086991"/>
+      </p:ext>
+    </p:extLst>
+  </p:cSld>
+  <p:clrMapOvr>
+    <a:masterClrMapping/>
+  </p:clrMapOvr>
+</p:notes>
+</file>
+
+<file path=ppt/notesSlides/notesSlide26.xml><?xml version="1.0" encoding="utf-8"?>
+<p:notes xmlns:a="http://schemas.openxmlformats.org/drawingml/2006/main" xmlns:r="http://schemas.openxmlformats.org/officeDocument/2006/relationships" xmlns:p="http://schemas.openxmlformats.org/presentationml/2006/main">
+  <p:cSld>
+    <p:spTree>
+      <p:nvGrpSpPr>
+        <p:cNvPr id="1" name=""/>
+        <p:cNvGrpSpPr/>
+        <p:nvPr/>
+      </p:nvGrpSpPr>
+      <p:grpSpPr>
+        <a:xfrm>
+          <a:off x="0" y="0"/>
+          <a:ext cx="0" cy="0"/>
+          <a:chOff x="0" y="0"/>
+          <a:chExt cx="0" cy="0"/>
+        </a:xfrm>
+      </p:grpSpPr>
+      <p:sp>
+        <p:nvSpPr>
+          <p:cNvPr id="2" name="Slide Image Placeholder 1"/>
+          <p:cNvSpPr>
+            <a:spLocks noGrp="1" noRot="1" noChangeAspect="1"/>
+          </p:cNvSpPr>
+          <p:nvPr>
+            <p:ph type="sldImg"/>
+          </p:nvPr>
+        </p:nvSpPr>
+        <p:spPr/>
+      </p:sp>
+      <p:sp>
+        <p:nvSpPr>
+          <p:cNvPr id="3" name="Notes Placeholder 2"/>
+          <p:cNvSpPr>
+            <a:spLocks noGrp="1"/>
+          </p:cNvSpPr>
+          <p:nvPr>
+            <p:ph type="body" idx="1"/>
+          </p:nvPr>
+        </p:nvSpPr>
+        <p:spPr/>
+        <p:txBody>
+          <a:bodyPr/>
+          <a:lstStyle/>
+          <a:p>
+            <a:r>
+              <a:rPr lang="en-US" dirty="0"/>
+              <a:t>Backup slide only.
+Use this if someone asks about implementation architecture. Walk left-to-right conceptually: API creates a job, async worker analyses the workspace, engines collect metrics, detectors create findings, scoring and persistence feed the UI.</a:t>
+            </a:r>
+          </a:p>
+        </p:txBody>
+      </p:sp>
+      <p:sp>
+        <p:nvSpPr>
+          <p:cNvPr id="4" name="Slide Number Placeholder 3"/>
+          <p:cNvSpPr>
+            <a:spLocks noGrp="1"/>
+          </p:cNvSpPr>
+          <p:nvPr>
+            <p:ph type="sldNum" sz="quarter" idx="10"/>
+          </p:nvPr>
+        </p:nvSpPr>
+        <p:spPr/>
+        <p:txBody>
+          <a:bodyPr/>
+          <a:lstStyle/>
+          <a:p>
+            <a:pPr marL="0" marR="0" lvl="0" indent="0" algn="l" defTabSz="914400" rtl="0" eaLnBrk="1" fontAlgn="auto" latinLnBrk="0" hangingPunct="1">
+              <a:lnSpc>
+                <a:spcPct val="100000"/>
+              </a:lnSpc>
+              <a:spcBef>
+                <a:spcPts val="0"/>
+              </a:spcBef>
+              <a:spcAft>
+                <a:spcPts val="0"/>
+              </a:spcAft>
+              <a:buClrTx/>
+              <a:buSzTx/>
+              <a:buFontTx/>
+              <a:buNone/>
+              <a:tabLst/>
+              <a:defRPr/>
+            </a:pPr>
+            <a:fld id="{F7021451-1387-4CA6-816F-3879F97B5CBC}" type="slidenum">
+              <a:rPr kumimoji="0" lang="en-US" sz="1800" b="0" i="0" u="none" strike="noStrike" kern="1200" cap="none" spc="0" normalizeH="0" baseline="0" noProof="0">
+                <a:ln>
+                  <a:noFill/>
+                </a:ln>
+                <a:solidFill>
+                  <a:prstClr val="black"/>
+                </a:solidFill>
+                <a:effectLst/>
+                <a:uLnTx/>
+                <a:uFillTx/>
+                <a:latin typeface="Calibri" panose="020F0502020204030204"/>
+                <a:ea typeface="+mn-ea"/>
+                <a:cs typeface="+mn-cs"/>
+              </a:rPr>
+              <a:pPr marL="0" marR="0" lvl="0" indent="0" algn="l" defTabSz="914400" rtl="0" eaLnBrk="1" fontAlgn="auto" latinLnBrk="0" hangingPunct="1">
+                <a:lnSpc>
+                  <a:spcPct val="100000"/>
+                </a:lnSpc>
+                <a:spcBef>
+                  <a:spcPts val="0"/>
+                </a:spcBef>
+                <a:spcAft>
+                  <a:spcPts val="0"/>
+                </a:spcAft>
+                <a:buClrTx/>
+                <a:buSzTx/>
+                <a:buFontTx/>
+                <a:buNone/>
+                <a:tabLst/>
+                <a:defRPr/>
+              </a:pPr>
+              <a:t>27</a:t>
             </a:fld>
             <a:endParaRPr kumimoji="0" lang="en-US" sz="1800" b="0" i="0" u="none" strike="noStrike" kern="1200" cap="none" spc="0" normalizeH="0" baseline="0" noProof="0">
               <a:ln>
@@ -23950,7 +24099,7 @@
                 <a:ea typeface="Calibri" pitchFamily="34" charset="-122"/>
                 <a:cs typeface="Calibri" pitchFamily="34" charset="-120"/>
               </a:rPr>
-              <a:t>Annex: graph analysis terms</a:t>
+              <a:t>Annex: how each detector works</a:t>
             </a:r>
             <a:endParaRPr kumimoji="0" lang="en-US" sz="2500" b="0" i="0" u="none" strike="noStrike" kern="1200" cap="none" spc="0" normalizeH="0" baseline="0" noProof="0" dirty="0">
               <a:ln>
@@ -24002,8 +24151,8 @@
         </p:nvSpPr>
         <p:spPr>
           <a:xfrm>
-            <a:off x="548640" y="1024128"/>
-            <a:ext cx="3703320" cy="228600"/>
+            <a:off x="548640" y="1005840"/>
+            <a:ext cx="1234440" cy="228600"/>
           </a:xfrm>
           <a:prstGeom prst="rect">
             <a:avLst/>
@@ -24033,7 +24182,7 @@
               <a:defRPr/>
             </a:pPr>
             <a:r>
-              <a:rPr kumimoji="0" lang="en-US" sz="1070" b="1" i="0" u="none" strike="noStrike" kern="1200" cap="none" spc="0" normalizeH="0" baseline="0" noProof="0" dirty="0">
+              <a:rPr kumimoji="0" lang="en-US" sz="780" b="1" i="0" u="none" strike="noStrike" kern="0" cap="none" spc="110" normalizeH="0" baseline="0" noProof="0" dirty="0">
                 <a:ln>
                   <a:noFill/>
                 </a:ln>
@@ -24047,9 +24196,9 @@
                 <a:ea typeface="Calibri" pitchFamily="34" charset="-122"/>
                 <a:cs typeface="Calibri" pitchFamily="34" charset="-120"/>
               </a:rPr>
-              <a:t>Directed dependency graph</a:t>
-            </a:r>
-            <a:endParaRPr kumimoji="0" lang="en-US" sz="1070" b="0" i="0" u="none" strike="noStrike" kern="1200" cap="none" spc="0" normalizeH="0" baseline="0" noProof="0" dirty="0">
+              <a:t>DETECTOR</a:t>
+            </a:r>
+            <a:endParaRPr kumimoji="0" lang="en-US" sz="780" b="0" i="0" u="none" strike="noStrike" kern="1200" cap="none" spc="0" normalizeH="0" baseline="0" noProof="0" dirty="0">
               <a:ln>
                 <a:noFill/>
               </a:ln>
@@ -24074,19 +24223,17 @@
         </p:nvSpPr>
         <p:spPr>
           <a:xfrm>
-            <a:off x="548640" y="1280160"/>
-            <a:ext cx="3703320" cy="384048"/>
-          </a:xfrm>
-          <a:prstGeom prst="rect">
-            <a:avLst/>
-          </a:prstGeom>
-          <a:noFill/>
-          <a:ln/>
-        </p:spPr>
-        <p:txBody>
-          <a:bodyPr wrap="square" lIns="0" tIns="0" rIns="0" bIns="0" rtlCol="0" anchor="ctr">
-            <a:normAutofit/>
-          </a:bodyPr>
+            <a:off x="1664208" y="1005840"/>
+            <a:ext cx="4846320" cy="228600"/>
+          </a:xfrm>
+          <a:prstGeom prst="rect">
+            <a:avLst/>
+          </a:prstGeom>
+          <a:noFill/>
+          <a:ln/>
+        </p:spPr>
+        <p:txBody>
+          <a:bodyPr wrap="square" lIns="0" tIns="0" rIns="0" bIns="0" rtlCol="0" anchor="ctr"/>
           <a:lstStyle/>
           <a:p>
             <a:pPr marL="0" marR="0" lvl="0" indent="0" algn="l" defTabSz="914400" rtl="0" eaLnBrk="1" fontAlgn="auto" latinLnBrk="0" hangingPunct="1">
@@ -24107,12 +24254,12 @@
               <a:defRPr/>
             </a:pPr>
             <a:r>
-              <a:rPr kumimoji="0" lang="en-US" sz="880" b="0" i="0" u="none" strike="noStrike" kern="1200" cap="none" spc="0" normalizeH="0" baseline="0" noProof="0" dirty="0">
+              <a:rPr kumimoji="0" lang="en-US" sz="780" b="1" i="0" u="none" strike="noStrike" kern="0" cap="none" spc="110" normalizeH="0" baseline="0" noProof="0" dirty="0">
                 <a:ln>
                   <a:noFill/>
                 </a:ln>
                 <a:solidFill>
-                  <a:srgbClr val="1E293B"/>
+                  <a:srgbClr val="0F2A44"/>
                 </a:solidFill>
                 <a:effectLst/>
                 <a:uLnTx/>
@@ -24121,9 +24268,9 @@
                 <a:ea typeface="Calibri" pitchFamily="34" charset="-122"/>
                 <a:cs typeface="Calibri" pitchFamily="34" charset="-120"/>
               </a:rPr>
-              <a:t>G = (V, E), where V is the set of detected services and E contains directed calls between services.</a:t>
-            </a:r>
-            <a:endParaRPr kumimoji="0" lang="en-US" sz="880" b="0" i="0" u="none" strike="noStrike" kern="1200" cap="none" spc="0" normalizeH="0" baseline="0" noProof="0" dirty="0">
+              <a:t>DETECTION LOGIC</a:t>
+            </a:r>
+            <a:endParaRPr kumimoji="0" lang="en-US" sz="780" b="0" i="0" u="none" strike="noStrike" kern="1200" cap="none" spc="0" normalizeH="0" baseline="0" noProof="0" dirty="0">
               <a:ln>
                 <a:noFill/>
               </a:ln>
@@ -24142,39 +24289,14 @@
       </p:sp>
       <p:sp>
         <p:nvSpPr>
-          <p:cNvPr id="6" name="Shape 4"/>
-          <p:cNvSpPr/>
-          <p:nvPr/>
-        </p:nvSpPr>
-        <p:spPr>
-          <a:xfrm>
-            <a:off x="548640" y="1737360"/>
-            <a:ext cx="3703320" cy="9144"/>
-          </a:xfrm>
-          <a:prstGeom prst="rect">
-            <a:avLst/>
-          </a:prstGeom>
-          <a:solidFill>
-            <a:srgbClr val="D8DEE6"/>
-          </a:solidFill>
-          <a:ln w="12700">
-            <a:solidFill>
-              <a:srgbClr val="D8DEE6"/>
-            </a:solidFill>
-            <a:prstDash val="solid"/>
-          </a:ln>
-        </p:spPr>
-      </p:sp>
-      <p:sp>
-        <p:nvSpPr>
-          <p:cNvPr id="7" name="Text 5"/>
-          <p:cNvSpPr/>
-          <p:nvPr/>
-        </p:nvSpPr>
-        <p:spPr>
-          <a:xfrm>
-            <a:off x="548640" y="1865376"/>
-            <a:ext cx="3703320" cy="228600"/>
+          <p:cNvPr id="6" name="Text 4"/>
+          <p:cNvSpPr/>
+          <p:nvPr/>
+        </p:nvSpPr>
+        <p:spPr>
+          <a:xfrm>
+            <a:off x="6720840" y="1005840"/>
+            <a:ext cx="1874520" cy="228600"/>
           </a:xfrm>
           <a:prstGeom prst="rect">
             <a:avLst/>
@@ -24204,7 +24326,7 @@
               <a:defRPr/>
             </a:pPr>
             <a:r>
-              <a:rPr kumimoji="0" lang="en-US" sz="1070" b="1" i="0" u="none" strike="noStrike" kern="1200" cap="none" spc="0" normalizeH="0" baseline="0" noProof="0" dirty="0">
+              <a:rPr kumimoji="0" lang="en-US" sz="780" b="1" i="0" u="none" strike="noStrike" kern="0" cap="none" spc="110" normalizeH="0" baseline="0" noProof="0" dirty="0">
                 <a:ln>
                   <a:noFill/>
                 </a:ln>
@@ -24218,9 +24340,9 @@
                 <a:ea typeface="Calibri" pitchFamily="34" charset="-122"/>
                 <a:cs typeface="Calibri" pitchFamily="34" charset="-120"/>
               </a:rPr>
-              <a:t>Edge weight</a:t>
-            </a:r>
-            <a:endParaRPr kumimoji="0" lang="en-US" sz="1070" b="0" i="0" u="none" strike="noStrike" kern="1200" cap="none" spc="0" normalizeH="0" baseline="0" noProof="0" dirty="0">
+              <a:t>EVIDENCE</a:t>
+            </a:r>
+            <a:endParaRPr kumimoji="0" lang="en-US" sz="780" b="0" i="0" u="none" strike="noStrike" kern="1200" cap="none" spc="0" normalizeH="0" baseline="0" noProof="0" dirty="0">
               <a:ln>
                 <a:noFill/>
               </a:ln>
@@ -24239,14 +24361,64 @@
       </p:sp>
       <p:sp>
         <p:nvSpPr>
-          <p:cNvPr id="8" name="Text 6"/>
-          <p:cNvSpPr/>
-          <p:nvPr/>
-        </p:nvSpPr>
-        <p:spPr>
-          <a:xfrm>
-            <a:off x="548640" y="2121408"/>
-            <a:ext cx="3703320" cy="384048"/>
+          <p:cNvPr id="7" name="Shape 5"/>
+          <p:cNvSpPr/>
+          <p:nvPr/>
+        </p:nvSpPr>
+        <p:spPr>
+          <a:xfrm>
+            <a:off x="548640" y="1298448"/>
+            <a:ext cx="8046720" cy="13716"/>
+          </a:xfrm>
+          <a:prstGeom prst="rect">
+            <a:avLst/>
+          </a:prstGeom>
+          <a:solidFill>
+            <a:srgbClr val="D8DEE6"/>
+          </a:solidFill>
+          <a:ln w="12700">
+            <a:solidFill>
+              <a:srgbClr val="D8DEE6"/>
+            </a:solidFill>
+            <a:prstDash val="solid"/>
+          </a:ln>
+        </p:spPr>
+      </p:sp>
+      <p:sp>
+        <p:nvSpPr>
+          <p:cNvPr id="8" name="Shape 6"/>
+          <p:cNvSpPr/>
+          <p:nvPr/>
+        </p:nvSpPr>
+        <p:spPr>
+          <a:xfrm>
+            <a:off x="548640" y="1444752"/>
+            <a:ext cx="219456" cy="27432"/>
+          </a:xfrm>
+          <a:prstGeom prst="rect">
+            <a:avLst/>
+          </a:prstGeom>
+          <a:solidFill>
+            <a:srgbClr val="0D9488"/>
+          </a:solidFill>
+          <a:ln w="12700">
+            <a:solidFill>
+              <a:srgbClr val="0D9488"/>
+            </a:solidFill>
+            <a:prstDash val="solid"/>
+          </a:ln>
+        </p:spPr>
+      </p:sp>
+      <p:sp>
+        <p:nvSpPr>
+          <p:cNvPr id="9" name="Text 7"/>
+          <p:cNvSpPr/>
+          <p:nvPr/>
+        </p:nvSpPr>
+        <p:spPr>
+          <a:xfrm>
+            <a:off x="841248" y="1408176"/>
+            <a:ext cx="941832" cy="228600"/>
           </a:xfrm>
           <a:prstGeom prst="rect">
             <a:avLst/>
@@ -24278,12 +24450,12 @@
               <a:defRPr/>
             </a:pPr>
             <a:r>
-              <a:rPr kumimoji="0" lang="en-US" sz="880" b="0" i="0" u="none" strike="noStrike" kern="1200" cap="none" spc="0" normalizeH="0" baseline="0" noProof="0" dirty="0">
+              <a:rPr kumimoji="0" lang="en-US" sz="830" b="1" i="0" u="none" strike="noStrike" kern="1200" cap="none" spc="0" normalizeH="0" baseline="0" noProof="0" dirty="0">
                 <a:ln>
                   <a:noFill/>
                 </a:ln>
                 <a:solidFill>
-                  <a:srgbClr val="1E293B"/>
+                  <a:srgbClr val="0F2A44"/>
                 </a:solidFill>
                 <a:effectLst/>
                 <a:uLnTx/>
@@ -24292,9 +24464,9 @@
                 <a:ea typeface="Calibri" pitchFamily="34" charset="-122"/>
                 <a:cs typeface="Calibri" pitchFamily="34" charset="-120"/>
               </a:rPr>
-              <a:t>The number of distinct source-level call sites from one service to another.</a:t>
-            </a:r>
-            <a:endParaRPr kumimoji="0" lang="en-US" sz="880" b="0" i="0" u="none" strike="noStrike" kern="1200" cap="none" spc="0" normalizeH="0" baseline="0" noProof="0" dirty="0">
+              <a:t>Shared DB</a:t>
+            </a:r>
+            <a:endParaRPr kumimoji="0" lang="en-US" sz="830" b="0" i="0" u="none" strike="noStrike" kern="1200" cap="none" spc="0" normalizeH="0" baseline="0" noProof="0" dirty="0">
               <a:ln>
                 <a:noFill/>
               </a:ln>
@@ -24313,48 +24485,25 @@
       </p:sp>
       <p:sp>
         <p:nvSpPr>
-          <p:cNvPr id="9" name="Shape 7"/>
-          <p:cNvSpPr/>
-          <p:nvPr/>
-        </p:nvSpPr>
-        <p:spPr>
-          <a:xfrm>
-            <a:off x="548640" y="2578608"/>
-            <a:ext cx="3703320" cy="9144"/>
-          </a:xfrm>
-          <a:prstGeom prst="rect">
-            <a:avLst/>
-          </a:prstGeom>
-          <a:solidFill>
-            <a:srgbClr val="D8DEE6"/>
-          </a:solidFill>
-          <a:ln w="12700">
-            <a:solidFill>
-              <a:srgbClr val="D8DEE6"/>
-            </a:solidFill>
-            <a:prstDash val="solid"/>
-          </a:ln>
-        </p:spPr>
-      </p:sp>
-      <p:sp>
-        <p:nvSpPr>
           <p:cNvPr id="10" name="Text 8"/>
           <p:cNvSpPr/>
           <p:nvPr/>
         </p:nvSpPr>
         <p:spPr>
           <a:xfrm>
-            <a:off x="548640" y="2706624"/>
-            <a:ext cx="3703320" cy="228600"/>
-          </a:xfrm>
-          <a:prstGeom prst="rect">
-            <a:avLst/>
-          </a:prstGeom>
-          <a:noFill/>
-          <a:ln/>
-        </p:spPr>
-        <p:txBody>
-          <a:bodyPr wrap="square" lIns="0" tIns="0" rIns="0" bIns="0" rtlCol="0" anchor="ctr"/>
+            <a:off x="1664208" y="1408176"/>
+            <a:ext cx="4846320" cy="228600"/>
+          </a:xfrm>
+          <a:prstGeom prst="rect">
+            <a:avLst/>
+          </a:prstGeom>
+          <a:noFill/>
+          <a:ln/>
+        </p:spPr>
+        <p:txBody>
+          <a:bodyPr wrap="square" lIns="0" tIns="0" rIns="0" bIns="0" rtlCol="0" anchor="ctr">
+            <a:normAutofit/>
+          </a:bodyPr>
           <a:lstStyle/>
           <a:p>
             <a:pPr marL="0" marR="0" lvl="0" indent="0" algn="l" defTabSz="914400" rtl="0" eaLnBrk="1" fontAlgn="auto" latinLnBrk="0" hangingPunct="1">
@@ -24375,12 +24524,12 @@
               <a:defRPr/>
             </a:pPr>
             <a:r>
-              <a:rPr kumimoji="0" lang="en-US" sz="1070" b="1" i="0" u="none" strike="noStrike" kern="1200" cap="none" spc="0" normalizeH="0" baseline="0" noProof="0" dirty="0">
+              <a:rPr kumimoji="0" lang="en-US" sz="745" b="0" i="0" u="none" strike="noStrike" kern="1200" cap="none" spc="0" normalizeH="0" baseline="0" noProof="0" dirty="0">
                 <a:ln>
                   <a:noFill/>
                 </a:ln>
                 <a:solidFill>
-                  <a:srgbClr val="0F2A44"/>
+                  <a:srgbClr val="1E293B"/>
                 </a:solidFill>
                 <a:effectLst/>
                 <a:uLnTx/>
@@ -24389,9 +24538,9 @@
                 <a:ea typeface="Calibri" pitchFamily="34" charset="-122"/>
                 <a:cs typeface="Calibri" pitchFamily="34" charset="-120"/>
               </a:rPr>
-              <a:t>Strongly connected component</a:t>
-            </a:r>
-            <a:endParaRPr kumimoji="0" lang="en-US" sz="1070" b="0" i="0" u="none" strike="noStrike" kern="1200" cap="none" spc="0" normalizeH="0" baseline="0" noProof="0" dirty="0">
+              <a:t>Parse Spring datasource config and group services by resolved database URL.</a:t>
+            </a:r>
+            <a:endParaRPr kumimoji="0" lang="en-US" sz="745" b="0" i="0" u="none" strike="noStrike" kern="1200" cap="none" spc="0" normalizeH="0" baseline="0" noProof="0" dirty="0">
               <a:ln>
                 <a:noFill/>
               </a:ln>
@@ -24416,8 +24565,8 @@
         </p:nvSpPr>
         <p:spPr>
           <a:xfrm>
-            <a:off x="548640" y="2962656"/>
-            <a:ext cx="3703320" cy="384048"/>
+            <a:off x="6720840" y="1408176"/>
+            <a:ext cx="1874520" cy="228600"/>
           </a:xfrm>
           <a:prstGeom prst="rect">
             <a:avLst/>
@@ -24449,7 +24598,7 @@
               <a:defRPr/>
             </a:pPr>
             <a:r>
-              <a:rPr kumimoji="0" lang="en-US" sz="880" b="0" i="0" u="none" strike="noStrike" kern="1200" cap="none" spc="0" normalizeH="0" baseline="0" noProof="0" dirty="0">
+              <a:rPr kumimoji="0" lang="en-US" sz="745" b="0" i="0" u="none" strike="noStrike" kern="1200" cap="none" spc="0" normalizeH="0" baseline="0" noProof="0" dirty="0">
                 <a:ln>
                   <a:noFill/>
                 </a:ln>
@@ -24463,9 +24612,9 @@
                 <a:ea typeface="Calibri" pitchFamily="34" charset="-122"/>
                 <a:cs typeface="Calibri" pitchFamily="34" charset="-120"/>
               </a:rPr>
-              <a:t>A maximal service set where each service can reach every other service through directed paths.</a:t>
-            </a:r>
-            <a:endParaRPr kumimoji="0" lang="en-US" sz="880" b="0" i="0" u="none" strike="noStrike" kern="1200" cap="none" spc="0" normalizeH="0" baseline="0" noProof="0" dirty="0">
+              <a:t>Datasource line</a:t>
+            </a:r>
+            <a:endParaRPr kumimoji="0" lang="en-US" sz="745" b="0" i="0" u="none" strike="noStrike" kern="1200" cap="none" spc="0" normalizeH="0" baseline="0" noProof="0" dirty="0">
               <a:ln>
                 <a:noFill/>
               </a:ln>
@@ -24490,8 +24639,8 @@
         </p:nvSpPr>
         <p:spPr>
           <a:xfrm>
-            <a:off x="548640" y="3419856"/>
-            <a:ext cx="3703320" cy="9144"/>
+            <a:off x="548640" y="1655064"/>
+            <a:ext cx="8046720" cy="7315"/>
           </a:xfrm>
           <a:prstGeom prst="rect">
             <a:avLst/>
@@ -24509,23 +24658,50 @@
       </p:sp>
       <p:sp>
         <p:nvSpPr>
-          <p:cNvPr id="13" name="Text 11"/>
-          <p:cNvSpPr/>
-          <p:nvPr/>
-        </p:nvSpPr>
-        <p:spPr>
-          <a:xfrm>
-            <a:off x="548640" y="3547872"/>
-            <a:ext cx="3703320" cy="228600"/>
-          </a:xfrm>
-          <a:prstGeom prst="rect">
-            <a:avLst/>
-          </a:prstGeom>
-          <a:noFill/>
-          <a:ln/>
-        </p:spPr>
-        <p:txBody>
-          <a:bodyPr wrap="square" lIns="0" tIns="0" rIns="0" bIns="0" rtlCol="0" anchor="ctr"/>
+          <p:cNvPr id="13" name="Shape 11"/>
+          <p:cNvSpPr/>
+          <p:nvPr/>
+        </p:nvSpPr>
+        <p:spPr>
+          <a:xfrm>
+            <a:off x="548640" y="1755648"/>
+            <a:ext cx="219456" cy="27432"/>
+          </a:xfrm>
+          <a:prstGeom prst="rect">
+            <a:avLst/>
+          </a:prstGeom>
+          <a:solidFill>
+            <a:srgbClr val="0D9488"/>
+          </a:solidFill>
+          <a:ln w="12700">
+            <a:solidFill>
+              <a:srgbClr val="0D9488"/>
+            </a:solidFill>
+            <a:prstDash val="solid"/>
+          </a:ln>
+        </p:spPr>
+      </p:sp>
+      <p:sp>
+        <p:nvSpPr>
+          <p:cNvPr id="14" name="Text 12"/>
+          <p:cNvSpPr/>
+          <p:nvPr/>
+        </p:nvSpPr>
+        <p:spPr>
+          <a:xfrm>
+            <a:off x="841248" y="1719072"/>
+            <a:ext cx="941832" cy="228600"/>
+          </a:xfrm>
+          <a:prstGeom prst="rect">
+            <a:avLst/>
+          </a:prstGeom>
+          <a:noFill/>
+          <a:ln/>
+        </p:spPr>
+        <p:txBody>
+          <a:bodyPr wrap="square" lIns="0" tIns="0" rIns="0" bIns="0" rtlCol="0" anchor="ctr">
+            <a:normAutofit/>
+          </a:bodyPr>
           <a:lstStyle/>
           <a:p>
             <a:pPr marL="0" marR="0" lvl="0" indent="0" algn="l" defTabSz="914400" rtl="0" eaLnBrk="1" fontAlgn="auto" latinLnBrk="0" hangingPunct="1">
@@ -24546,7 +24722,7 @@
               <a:defRPr/>
             </a:pPr>
             <a:r>
-              <a:rPr kumimoji="0" lang="en-US" sz="1070" b="1" i="0" u="none" strike="noStrike" kern="1200" cap="none" spc="0" normalizeH="0" baseline="0" noProof="0" dirty="0">
+              <a:rPr kumimoji="0" lang="en-US" sz="830" b="1" i="0" u="none" strike="noStrike" kern="1200" cap="none" spc="0" normalizeH="0" baseline="0" noProof="0" dirty="0">
                 <a:ln>
                   <a:noFill/>
                 </a:ln>
@@ -24560,9 +24736,9 @@
                 <a:ea typeface="Calibri" pitchFamily="34" charset="-122"/>
                 <a:cs typeface="Calibri" pitchFamily="34" charset="-120"/>
               </a:rPr>
-              <a:t>Cycle</a:t>
-            </a:r>
-            <a:endParaRPr kumimoji="0" lang="en-US" sz="1070" b="0" i="0" u="none" strike="noStrike" kern="1200" cap="none" spc="0" normalizeH="0" baseline="0" noProof="0" dirty="0">
+              <a:t>Cyclic Dep.</a:t>
+            </a:r>
+            <a:endParaRPr kumimoji="0" lang="en-US" sz="830" b="0" i="0" u="none" strike="noStrike" kern="1200" cap="none" spc="0" normalizeH="0" baseline="0" noProof="0" dirty="0">
               <a:ln>
                 <a:noFill/>
               </a:ln>
@@ -24581,14 +24757,14 @@
       </p:sp>
       <p:sp>
         <p:nvSpPr>
-          <p:cNvPr id="14" name="Text 12"/>
-          <p:cNvSpPr/>
-          <p:nvPr/>
-        </p:nvSpPr>
-        <p:spPr>
-          <a:xfrm>
-            <a:off x="548640" y="3803904"/>
-            <a:ext cx="3703320" cy="384048"/>
+          <p:cNvPr id="15" name="Text 13"/>
+          <p:cNvSpPr/>
+          <p:nvPr/>
+        </p:nvSpPr>
+        <p:spPr>
+          <a:xfrm>
+            <a:off x="1664208" y="1719072"/>
+            <a:ext cx="4846320" cy="228600"/>
           </a:xfrm>
           <a:prstGeom prst="rect">
             <a:avLst/>
@@ -24620,7 +24796,7 @@
               <a:defRPr/>
             </a:pPr>
             <a:r>
-              <a:rPr kumimoji="0" lang="en-US" sz="880" b="0" i="0" u="none" strike="noStrike" kern="1200" cap="none" spc="0" normalizeH="0" baseline="0" noProof="0" dirty="0">
+              <a:rPr kumimoji="0" lang="en-US" sz="745" b="0" i="0" u="none" strike="noStrike" kern="1200" cap="none" spc="0" normalizeH="0" baseline="0" noProof="0" dirty="0">
                 <a:ln>
                   <a:noFill/>
                 </a:ln>
@@ -24634,9 +24810,9 @@
                 <a:ea typeface="Calibri" pitchFamily="34" charset="-122"/>
                 <a:cs typeface="Calibri" pitchFamily="34" charset="-120"/>
               </a:rPr>
-              <a:t>An SCC with more than one service; used as evidence for Cyclic Dependency.</a:t>
-            </a:r>
-            <a:endParaRPr kumimoji="0" lang="en-US" sz="880" b="0" i="0" u="none" strike="noStrike" kern="1200" cap="none" spc="0" normalizeH="0" baseline="0" noProof="0" dirty="0">
+              <a:t>Run Tarjan SCC over the directed service dependency graph; SCC size &gt; 1 is a cycle.</a:t>
+            </a:r>
+            <a:endParaRPr kumimoji="0" lang="en-US" sz="745" b="0" i="0" u="none" strike="noStrike" kern="1200" cap="none" spc="0" normalizeH="0" baseline="0" noProof="0" dirty="0">
               <a:ln>
                 <a:noFill/>
               </a:ln>
@@ -24655,48 +24831,25 @@
       </p:sp>
       <p:sp>
         <p:nvSpPr>
-          <p:cNvPr id="15" name="Shape 13"/>
-          <p:cNvSpPr/>
-          <p:nvPr/>
-        </p:nvSpPr>
-        <p:spPr>
-          <a:xfrm>
-            <a:off x="548640" y="4261104"/>
-            <a:ext cx="3703320" cy="9144"/>
-          </a:xfrm>
-          <a:prstGeom prst="rect">
-            <a:avLst/>
-          </a:prstGeom>
-          <a:solidFill>
-            <a:srgbClr val="D8DEE6"/>
-          </a:solidFill>
-          <a:ln w="12700">
-            <a:solidFill>
-              <a:srgbClr val="D8DEE6"/>
-            </a:solidFill>
-            <a:prstDash val="solid"/>
-          </a:ln>
-        </p:spPr>
-      </p:sp>
-      <p:sp>
-        <p:nvSpPr>
           <p:cNvPr id="16" name="Text 14"/>
           <p:cNvSpPr/>
           <p:nvPr/>
         </p:nvSpPr>
         <p:spPr>
           <a:xfrm>
-            <a:off x="4617720" y="1024128"/>
-            <a:ext cx="3703320" cy="228600"/>
-          </a:xfrm>
-          <a:prstGeom prst="rect">
-            <a:avLst/>
-          </a:prstGeom>
-          <a:noFill/>
-          <a:ln/>
-        </p:spPr>
-        <p:txBody>
-          <a:bodyPr wrap="square" lIns="0" tIns="0" rIns="0" bIns="0" rtlCol="0" anchor="ctr"/>
+            <a:off x="6720840" y="1719072"/>
+            <a:ext cx="1874520" cy="228600"/>
+          </a:xfrm>
+          <a:prstGeom prst="rect">
+            <a:avLst/>
+          </a:prstGeom>
+          <a:noFill/>
+          <a:ln/>
+        </p:spPr>
+        <p:txBody>
+          <a:bodyPr wrap="square" lIns="0" tIns="0" rIns="0" bIns="0" rtlCol="0" anchor="ctr">
+            <a:normAutofit/>
+          </a:bodyPr>
           <a:lstStyle/>
           <a:p>
             <a:pPr marL="0" marR="0" lvl="0" indent="0" algn="l" defTabSz="914400" rtl="0" eaLnBrk="1" fontAlgn="auto" latinLnBrk="0" hangingPunct="1">
@@ -24717,12 +24870,12 @@
               <a:defRPr/>
             </a:pPr>
             <a:r>
-              <a:rPr kumimoji="0" lang="en-US" sz="1070" b="1" i="0" u="none" strike="noStrike" kern="1200" cap="none" spc="0" normalizeH="0" baseline="0" noProof="0" dirty="0">
+              <a:rPr kumimoji="0" lang="en-US" sz="745" b="0" i="0" u="none" strike="noStrike" kern="1200" cap="none" spc="0" normalizeH="0" baseline="0" noProof="0" dirty="0">
                 <a:ln>
                   <a:noFill/>
                 </a:ln>
                 <a:solidFill>
-                  <a:srgbClr val="0F2A44"/>
+                  <a:srgbClr val="1E293B"/>
                 </a:solidFill>
                 <a:effectLst/>
                 <a:uLnTx/>
@@ -24731,9 +24884,9 @@
                 <a:ea typeface="Calibri" pitchFamily="34" charset="-122"/>
                 <a:cs typeface="Calibri" pitchFamily="34" charset="-120"/>
               </a:rPr>
-              <a:t>Fan-in / fan-out</a:t>
-            </a:r>
-            <a:endParaRPr kumimoji="0" lang="en-US" sz="1070" b="0" i="0" u="none" strike="noStrike" kern="1200" cap="none" spc="0" normalizeH="0" baseline="0" noProof="0" dirty="0">
+              <a:t>Call edge snippet</a:t>
+            </a:r>
+            <a:endParaRPr kumimoji="0" lang="en-US" sz="745" b="0" i="0" u="none" strike="noStrike" kern="1200" cap="none" spc="0" normalizeH="0" baseline="0" noProof="0" dirty="0">
               <a:ln>
                 <a:noFill/>
               </a:ln>
@@ -24752,14 +24905,64 @@
       </p:sp>
       <p:sp>
         <p:nvSpPr>
-          <p:cNvPr id="17" name="Text 15"/>
-          <p:cNvSpPr/>
-          <p:nvPr/>
-        </p:nvSpPr>
-        <p:spPr>
-          <a:xfrm>
-            <a:off x="4617720" y="1280160"/>
-            <a:ext cx="3703320" cy="384048"/>
+          <p:cNvPr id="17" name="Shape 15"/>
+          <p:cNvSpPr/>
+          <p:nvPr/>
+        </p:nvSpPr>
+        <p:spPr>
+          <a:xfrm>
+            <a:off x="548640" y="1965960"/>
+            <a:ext cx="8046720" cy="7315"/>
+          </a:xfrm>
+          <a:prstGeom prst="rect">
+            <a:avLst/>
+          </a:prstGeom>
+          <a:solidFill>
+            <a:srgbClr val="D8DEE6"/>
+          </a:solidFill>
+          <a:ln w="12700">
+            <a:solidFill>
+              <a:srgbClr val="D8DEE6"/>
+            </a:solidFill>
+            <a:prstDash val="solid"/>
+          </a:ln>
+        </p:spPr>
+      </p:sp>
+      <p:sp>
+        <p:nvSpPr>
+          <p:cNvPr id="18" name="Shape 16"/>
+          <p:cNvSpPr/>
+          <p:nvPr/>
+        </p:nvSpPr>
+        <p:spPr>
+          <a:xfrm>
+            <a:off x="548640" y="2066544"/>
+            <a:ext cx="219456" cy="27432"/>
+          </a:xfrm>
+          <a:prstGeom prst="rect">
+            <a:avLst/>
+          </a:prstGeom>
+          <a:solidFill>
+            <a:srgbClr val="0D9488"/>
+          </a:solidFill>
+          <a:ln w="12700">
+            <a:solidFill>
+              <a:srgbClr val="0D9488"/>
+            </a:solidFill>
+            <a:prstDash val="solid"/>
+          </a:ln>
+        </p:spPr>
+      </p:sp>
+      <p:sp>
+        <p:nvSpPr>
+          <p:cNvPr id="19" name="Text 17"/>
+          <p:cNvSpPr/>
+          <p:nvPr/>
+        </p:nvSpPr>
+        <p:spPr>
+          <a:xfrm>
+            <a:off x="841248" y="2029968"/>
+            <a:ext cx="941832" cy="228600"/>
           </a:xfrm>
           <a:prstGeom prst="rect">
             <a:avLst/>
@@ -24791,12 +24994,12 @@
               <a:defRPr/>
             </a:pPr>
             <a:r>
-              <a:rPr kumimoji="0" lang="en-US" sz="880" b="0" i="0" u="none" strike="noStrike" kern="1200" cap="none" spc="0" normalizeH="0" baseline="0" noProof="0" dirty="0">
+              <a:rPr kumimoji="0" lang="en-US" sz="830" b="1" i="0" u="none" strike="noStrike" kern="1200" cap="none" spc="0" normalizeH="0" baseline="0" noProof="0" dirty="0">
                 <a:ln>
                   <a:noFill/>
                 </a:ln>
                 <a:solidFill>
-                  <a:srgbClr val="1E293B"/>
+                  <a:srgbClr val="0F2A44"/>
                 </a:solidFill>
                 <a:effectLst/>
                 <a:uLnTx/>
@@ -24805,9 +25008,9 @@
                 <a:ea typeface="Calibri" pitchFamily="34" charset="-122"/>
                 <a:cs typeface="Calibri" pitchFamily="34" charset="-120"/>
               </a:rPr>
-              <a:t>Incoming and outgoing service dependency counts; useful for spotting central services and mediator behaviour.</a:t>
-            </a:r>
-            <a:endParaRPr kumimoji="0" lang="en-US" sz="880" b="0" i="0" u="none" strike="noStrike" kern="1200" cap="none" spc="0" normalizeH="0" baseline="0" noProof="0" dirty="0">
+              <a:t>Chatty Service</a:t>
+            </a:r>
+            <a:endParaRPr kumimoji="0" lang="en-US" sz="830" b="0" i="0" u="none" strike="noStrike" kern="1200" cap="none" spc="0" normalizeH="0" baseline="0" noProof="0" dirty="0">
               <a:ln>
                 <a:noFill/>
               </a:ln>
@@ -24826,48 +25029,25 @@
       </p:sp>
       <p:sp>
         <p:nvSpPr>
-          <p:cNvPr id="18" name="Shape 16"/>
-          <p:cNvSpPr/>
-          <p:nvPr/>
-        </p:nvSpPr>
-        <p:spPr>
-          <a:xfrm>
-            <a:off x="4617720" y="1737360"/>
-            <a:ext cx="3703320" cy="9144"/>
-          </a:xfrm>
-          <a:prstGeom prst="rect">
-            <a:avLst/>
-          </a:prstGeom>
-          <a:solidFill>
-            <a:srgbClr val="D8DEE6"/>
-          </a:solidFill>
-          <a:ln w="12700">
-            <a:solidFill>
-              <a:srgbClr val="D8DEE6"/>
-            </a:solidFill>
-            <a:prstDash val="solid"/>
-          </a:ln>
-        </p:spPr>
-      </p:sp>
-      <p:sp>
-        <p:nvSpPr>
-          <p:cNvPr id="19" name="Text 17"/>
-          <p:cNvSpPr/>
-          <p:nvPr/>
-        </p:nvSpPr>
-        <p:spPr>
-          <a:xfrm>
-            <a:off x="4617720" y="1865376"/>
-            <a:ext cx="3703320" cy="228600"/>
-          </a:xfrm>
-          <a:prstGeom prst="rect">
-            <a:avLst/>
-          </a:prstGeom>
-          <a:noFill/>
-          <a:ln/>
-        </p:spPr>
-        <p:txBody>
-          <a:bodyPr wrap="square" lIns="0" tIns="0" rIns="0" bIns="0" rtlCol="0" anchor="ctr"/>
+          <p:cNvPr id="20" name="Text 18"/>
+          <p:cNvSpPr/>
+          <p:nvPr/>
+        </p:nvSpPr>
+        <p:spPr>
+          <a:xfrm>
+            <a:off x="1664208" y="2029968"/>
+            <a:ext cx="4846320" cy="228600"/>
+          </a:xfrm>
+          <a:prstGeom prst="rect">
+            <a:avLst/>
+          </a:prstGeom>
+          <a:noFill/>
+          <a:ln/>
+        </p:spPr>
+        <p:txBody>
+          <a:bodyPr wrap="square" lIns="0" tIns="0" rIns="0" bIns="0" rtlCol="0" anchor="ctr">
+            <a:normAutofit/>
+          </a:bodyPr>
           <a:lstStyle/>
           <a:p>
             <a:pPr marL="0" marR="0" lvl="0" indent="0" algn="l" defTabSz="914400" rtl="0" eaLnBrk="1" fontAlgn="auto" latinLnBrk="0" hangingPunct="1">
@@ -24888,12 +25068,12 @@
               <a:defRPr/>
             </a:pPr>
             <a:r>
-              <a:rPr kumimoji="0" lang="en-US" sz="1070" b="1" i="0" u="none" strike="noStrike" kern="1200" cap="none" spc="0" normalizeH="0" baseline="0" noProof="0" dirty="0">
+              <a:rPr kumimoji="0" lang="en-US" sz="745" b="0" i="0" u="none" strike="noStrike" kern="1200" cap="none" spc="0" normalizeH="0" baseline="0" noProof="0" dirty="0">
                 <a:ln>
                   <a:noFill/>
                 </a:ln>
                 <a:solidFill>
-                  <a:srgbClr val="0F2A44"/>
+                  <a:srgbClr val="1E293B"/>
                 </a:solidFill>
                 <a:effectLst/>
                 <a:uLnTx/>
@@ -24902,9 +25082,9 @@
                 <a:ea typeface="Calibri" pitchFamily="34" charset="-122"/>
                 <a:cs typeface="Calibri" pitchFamily="34" charset="-120"/>
               </a:rPr>
-              <a:t>Bidirectional dependency</a:t>
-            </a:r>
-            <a:endParaRPr kumimoji="0" lang="en-US" sz="1070" b="0" i="0" u="none" strike="noStrike" kern="1200" cap="none" spc="0" normalizeH="0" baseline="0" noProof="0" dirty="0">
+              <a:t>Combine high edge call count with source scan for wide Feign/client interfaces.</a:t>
+            </a:r>
+            <a:endParaRPr kumimoji="0" lang="en-US" sz="745" b="0" i="0" u="none" strike="noStrike" kern="1200" cap="none" spc="0" normalizeH="0" baseline="0" noProof="0" dirty="0">
               <a:ln>
                 <a:noFill/>
               </a:ln>
@@ -24923,14 +25103,14 @@
       </p:sp>
       <p:sp>
         <p:nvSpPr>
-          <p:cNvPr id="20" name="Text 18"/>
-          <p:cNvSpPr/>
-          <p:nvPr/>
-        </p:nvSpPr>
-        <p:spPr>
-          <a:xfrm>
-            <a:off x="4617720" y="2121408"/>
-            <a:ext cx="3703320" cy="384048"/>
+          <p:cNvPr id="21" name="Text 19"/>
+          <p:cNvSpPr/>
+          <p:nvPr/>
+        </p:nvSpPr>
+        <p:spPr>
+          <a:xfrm>
+            <a:off x="6720840" y="2029968"/>
+            <a:ext cx="1874520" cy="228600"/>
           </a:xfrm>
           <a:prstGeom prst="rect">
             <a:avLst/>
@@ -24962,7 +25142,7 @@
               <a:defRPr/>
             </a:pPr>
             <a:r>
-              <a:rPr kumimoji="0" lang="en-US" sz="880" b="0" i="0" u="none" strike="noStrike" kern="1200" cap="none" spc="0" normalizeH="0" baseline="0" noProof="0" dirty="0">
+              <a:rPr kumimoji="0" lang="en-US" sz="745" b="0" i="0" u="none" strike="noStrike" kern="1200" cap="none" spc="0" normalizeH="0" baseline="0" noProof="0" dirty="0">
                 <a:ln>
                   <a:noFill/>
                 </a:ln>
@@ -24976,9 +25156,9 @@
                 <a:ea typeface="Calibri" pitchFamily="34" charset="-122"/>
                 <a:cs typeface="Calibri" pitchFamily="34" charset="-120"/>
               </a:rPr>
-              <a:t>A pair A-&gt;B and B-&gt;A; used as evidence for Wrong Cuts and poor service boundaries.</a:t>
-            </a:r>
-            <a:endParaRPr kumimoji="0" lang="en-US" sz="880" b="0" i="0" u="none" strike="noStrike" kern="1200" cap="none" spc="0" normalizeH="0" baseline="0" noProof="0" dirty="0">
+              <a:t>Client method/call</a:t>
+            </a:r>
+            <a:endParaRPr kumimoji="0" lang="en-US" sz="745" b="0" i="0" u="none" strike="noStrike" kern="1200" cap="none" spc="0" normalizeH="0" baseline="0" noProof="0" dirty="0">
               <a:ln>
                 <a:noFill/>
               </a:ln>
@@ -24997,14 +25177,14 @@
       </p:sp>
       <p:sp>
         <p:nvSpPr>
-          <p:cNvPr id="21" name="Shape 19"/>
-          <p:cNvSpPr/>
-          <p:nvPr/>
-        </p:nvSpPr>
-        <p:spPr>
-          <a:xfrm>
-            <a:off x="4617720" y="2578608"/>
-            <a:ext cx="3703320" cy="9144"/>
+          <p:cNvPr id="22" name="Shape 20"/>
+          <p:cNvSpPr/>
+          <p:nvPr/>
+        </p:nvSpPr>
+        <p:spPr>
+          <a:xfrm>
+            <a:off x="548640" y="2276856"/>
+            <a:ext cx="8046720" cy="7315"/>
           </a:xfrm>
           <a:prstGeom prst="rect">
             <a:avLst/>
@@ -25022,23 +25202,50 @@
       </p:sp>
       <p:sp>
         <p:nvSpPr>
-          <p:cNvPr id="22" name="Text 20"/>
-          <p:cNvSpPr/>
-          <p:nvPr/>
-        </p:nvSpPr>
-        <p:spPr>
-          <a:xfrm>
-            <a:off x="4617720" y="2706624"/>
-            <a:ext cx="3703320" cy="228600"/>
-          </a:xfrm>
-          <a:prstGeom prst="rect">
-            <a:avLst/>
-          </a:prstGeom>
-          <a:noFill/>
-          <a:ln/>
-        </p:spPr>
-        <p:txBody>
-          <a:bodyPr wrap="square" lIns="0" tIns="0" rIns="0" bIns="0" rtlCol="0" anchor="ctr"/>
+          <p:cNvPr id="23" name="Shape 21"/>
+          <p:cNvSpPr/>
+          <p:nvPr/>
+        </p:nvSpPr>
+        <p:spPr>
+          <a:xfrm>
+            <a:off x="548640" y="2377440"/>
+            <a:ext cx="219456" cy="27432"/>
+          </a:xfrm>
+          <a:prstGeom prst="rect">
+            <a:avLst/>
+          </a:prstGeom>
+          <a:solidFill>
+            <a:srgbClr val="0D9488"/>
+          </a:solidFill>
+          <a:ln w="12700">
+            <a:solidFill>
+              <a:srgbClr val="0D9488"/>
+            </a:solidFill>
+            <a:prstDash val="solid"/>
+          </a:ln>
+        </p:spPr>
+      </p:sp>
+      <p:sp>
+        <p:nvSpPr>
+          <p:cNvPr id="24" name="Text 22"/>
+          <p:cNvSpPr/>
+          <p:nvPr/>
+        </p:nvSpPr>
+        <p:spPr>
+          <a:xfrm>
+            <a:off x="841248" y="2340864"/>
+            <a:ext cx="941832" cy="228600"/>
+          </a:xfrm>
+          <a:prstGeom prst="rect">
+            <a:avLst/>
+          </a:prstGeom>
+          <a:noFill/>
+          <a:ln/>
+        </p:spPr>
+        <p:txBody>
+          <a:bodyPr wrap="square" lIns="0" tIns="0" rIns="0" bIns="0" rtlCol="0" anchor="ctr">
+            <a:normAutofit/>
+          </a:bodyPr>
           <a:lstStyle/>
           <a:p>
             <a:pPr marL="0" marR="0" lvl="0" indent="0" algn="l" defTabSz="914400" rtl="0" eaLnBrk="1" fontAlgn="auto" latinLnBrk="0" hangingPunct="1">
@@ -25059,7 +25266,7 @@
               <a:defRPr/>
             </a:pPr>
             <a:r>
-              <a:rPr kumimoji="0" lang="en-US" sz="1070" b="1" i="0" u="none" strike="noStrike" kern="1200" cap="none" spc="0" normalizeH="0" baseline="0" noProof="0" dirty="0">
+              <a:rPr kumimoji="0" lang="en-US" sz="830" b="1" i="0" u="none" strike="noStrike" kern="1200" cap="none" spc="0" normalizeH="0" baseline="0" noProof="0" dirty="0">
                 <a:ln>
                   <a:noFill/>
                 </a:ln>
@@ -25073,9 +25280,9 @@
                 <a:ea typeface="Calibri" pitchFamily="34" charset="-122"/>
                 <a:cs typeface="Calibri" pitchFamily="34" charset="-120"/>
               </a:rPr>
-              <a:t>Connected ratio</a:t>
-            </a:r>
-            <a:endParaRPr kumimoji="0" lang="en-US" sz="1070" b="0" i="0" u="none" strike="noStrike" kern="1200" cap="none" spc="0" normalizeH="0" baseline="0" noProof="0" dirty="0">
+              <a:t>Hardcoded EP</a:t>
+            </a:r>
+            <a:endParaRPr kumimoji="0" lang="en-US" sz="830" b="0" i="0" u="none" strike="noStrike" kern="1200" cap="none" spc="0" normalizeH="0" baseline="0" noProof="0" dirty="0">
               <a:ln>
                 <a:noFill/>
               </a:ln>
@@ -25094,14 +25301,14 @@
       </p:sp>
       <p:sp>
         <p:nvSpPr>
-          <p:cNvPr id="23" name="Text 21"/>
-          <p:cNvSpPr/>
-          <p:nvPr/>
-        </p:nvSpPr>
-        <p:spPr>
-          <a:xfrm>
-            <a:off x="4617720" y="2962656"/>
-            <a:ext cx="3703320" cy="384048"/>
+          <p:cNvPr id="25" name="Text 23"/>
+          <p:cNvSpPr/>
+          <p:nvPr/>
+        </p:nvSpPr>
+        <p:spPr>
+          <a:xfrm>
+            <a:off x="1664208" y="2340864"/>
+            <a:ext cx="4846320" cy="228600"/>
           </a:xfrm>
           <a:prstGeom prst="rect">
             <a:avLst/>
@@ -25133,7 +25340,7 @@
               <a:defRPr/>
             </a:pPr>
             <a:r>
-              <a:rPr kumimoji="0" lang="en-US" sz="880" b="0" i="0" u="none" strike="noStrike" kern="1200" cap="none" spc="0" normalizeH="0" baseline="0" noProof="0" dirty="0">
+              <a:rPr kumimoji="0" lang="en-US" sz="745" b="0" i="0" u="none" strike="noStrike" kern="1200" cap="none" spc="0" normalizeH="0" baseline="0" noProof="0" dirty="0">
                 <a:ln>
                   <a:noFill/>
                 </a:ln>
@@ -25147,9 +25354,9 @@
                 <a:ea typeface="Calibri" pitchFamily="34" charset="-122"/>
                 <a:cs typeface="Calibri" pitchFamily="34" charset="-120"/>
               </a:rPr>
-              <a:t>Fraction of services participating in dependencies; used as part of Distributed Monolith evidence.</a:t>
-            </a:r>
-            <a:endParaRPr kumimoji="0" lang="en-US" sz="880" b="0" i="0" u="none" strike="noStrike" kern="1200" cap="none" spc="0" normalizeH="0" baseline="0" noProof="0" dirty="0">
+              <a:t>Scan Java string literals for http, localhost, IP, or port-based URL constants.</a:t>
+            </a:r>
+            <a:endParaRPr kumimoji="0" lang="en-US" sz="745" b="0" i="0" u="none" strike="noStrike" kern="1200" cap="none" spc="0" normalizeH="0" baseline="0" noProof="0" dirty="0">
               <a:ln>
                 <a:noFill/>
               </a:ln>
@@ -25168,48 +25375,25 @@
       </p:sp>
       <p:sp>
         <p:nvSpPr>
-          <p:cNvPr id="24" name="Shape 22"/>
-          <p:cNvSpPr/>
-          <p:nvPr/>
-        </p:nvSpPr>
-        <p:spPr>
-          <a:xfrm>
-            <a:off x="4617720" y="3419856"/>
-            <a:ext cx="3703320" cy="9144"/>
-          </a:xfrm>
-          <a:prstGeom prst="rect">
-            <a:avLst/>
-          </a:prstGeom>
-          <a:solidFill>
-            <a:srgbClr val="D8DEE6"/>
-          </a:solidFill>
-          <a:ln w="12700">
-            <a:solidFill>
-              <a:srgbClr val="D8DEE6"/>
-            </a:solidFill>
-            <a:prstDash val="solid"/>
-          </a:ln>
-        </p:spPr>
-      </p:sp>
-      <p:sp>
-        <p:nvSpPr>
-          <p:cNvPr id="25" name="Text 23"/>
-          <p:cNvSpPr/>
-          <p:nvPr/>
-        </p:nvSpPr>
-        <p:spPr>
-          <a:xfrm>
-            <a:off x="4617720" y="3547872"/>
-            <a:ext cx="3703320" cy="228600"/>
-          </a:xfrm>
-          <a:prstGeom prst="rect">
-            <a:avLst/>
-          </a:prstGeom>
-          <a:noFill/>
-          <a:ln/>
-        </p:spPr>
-        <p:txBody>
-          <a:bodyPr wrap="square" lIns="0" tIns="0" rIns="0" bIns="0" rtlCol="0" anchor="ctr"/>
+          <p:cNvPr id="26" name="Text 24"/>
+          <p:cNvSpPr/>
+          <p:nvPr/>
+        </p:nvSpPr>
+        <p:spPr>
+          <a:xfrm>
+            <a:off x="6720840" y="2340864"/>
+            <a:ext cx="1874520" cy="228600"/>
+          </a:xfrm>
+          <a:prstGeom prst="rect">
+            <a:avLst/>
+          </a:prstGeom>
+          <a:noFill/>
+          <a:ln/>
+        </p:spPr>
+        <p:txBody>
+          <a:bodyPr wrap="square" lIns="0" tIns="0" rIns="0" bIns="0" rtlCol="0" anchor="ctr">
+            <a:normAutofit/>
+          </a:bodyPr>
           <a:lstStyle/>
           <a:p>
             <a:pPr marL="0" marR="0" lvl="0" indent="0" algn="l" defTabSz="914400" rtl="0" eaLnBrk="1" fontAlgn="auto" latinLnBrk="0" hangingPunct="1">
@@ -25230,12 +25414,12 @@
               <a:defRPr/>
             </a:pPr>
             <a:r>
-              <a:rPr kumimoji="0" lang="en-US" sz="1070" b="1" i="0" u="none" strike="noStrike" kern="1200" cap="none" spc="0" normalizeH="0" baseline="0" noProof="0" dirty="0">
+              <a:rPr kumimoji="0" lang="en-US" sz="745" b="0" i="0" u="none" strike="noStrike" kern="1200" cap="none" spc="0" normalizeH="0" baseline="0" noProof="0" dirty="0">
                 <a:ln>
                   <a:noFill/>
                 </a:ln>
                 <a:solidFill>
-                  <a:srgbClr val="0F2A44"/>
+                  <a:srgbClr val="1E293B"/>
                 </a:solidFill>
                 <a:effectLst/>
                 <a:uLnTx/>
@@ -25244,9 +25428,9 @@
                 <a:ea typeface="Calibri" pitchFamily="34" charset="-122"/>
                 <a:cs typeface="Calibri" pitchFamily="34" charset="-120"/>
               </a:rPr>
-              <a:t>Betweenness centrality</a:t>
-            </a:r>
-            <a:endParaRPr kumimoji="0" lang="en-US" sz="1070" b="0" i="0" u="none" strike="noStrike" kern="1200" cap="none" spc="0" normalizeH="0" baseline="0" noProof="0" dirty="0">
+              <a:t>URL literal</a:t>
+            </a:r>
+            <a:endParaRPr kumimoji="0" lang="en-US" sz="745" b="0" i="0" u="none" strike="noStrike" kern="1200" cap="none" spc="0" normalizeH="0" baseline="0" noProof="0" dirty="0">
               <a:ln>
                 <a:noFill/>
               </a:ln>
@@ -25265,14 +25449,64 @@
       </p:sp>
       <p:sp>
         <p:nvSpPr>
-          <p:cNvPr id="26" name="Text 24"/>
-          <p:cNvSpPr/>
-          <p:nvPr/>
-        </p:nvSpPr>
-        <p:spPr>
-          <a:xfrm>
-            <a:off x="4617720" y="3803904"/>
-            <a:ext cx="3703320" cy="384048"/>
+          <p:cNvPr id="27" name="Shape 25"/>
+          <p:cNvSpPr/>
+          <p:nvPr/>
+        </p:nvSpPr>
+        <p:spPr>
+          <a:xfrm>
+            <a:off x="548640" y="2587752"/>
+            <a:ext cx="8046720" cy="7315"/>
+          </a:xfrm>
+          <a:prstGeom prst="rect">
+            <a:avLst/>
+          </a:prstGeom>
+          <a:solidFill>
+            <a:srgbClr val="D8DEE6"/>
+          </a:solidFill>
+          <a:ln w="12700">
+            <a:solidFill>
+              <a:srgbClr val="D8DEE6"/>
+            </a:solidFill>
+            <a:prstDash val="solid"/>
+          </a:ln>
+        </p:spPr>
+      </p:sp>
+      <p:sp>
+        <p:nvSpPr>
+          <p:cNvPr id="28" name="Shape 26"/>
+          <p:cNvSpPr/>
+          <p:nvPr/>
+        </p:nvSpPr>
+        <p:spPr>
+          <a:xfrm>
+            <a:off x="548640" y="2688336"/>
+            <a:ext cx="219456" cy="27432"/>
+          </a:xfrm>
+          <a:prstGeom prst="rect">
+            <a:avLst/>
+          </a:prstGeom>
+          <a:solidFill>
+            <a:srgbClr val="0D9488"/>
+          </a:solidFill>
+          <a:ln w="12700">
+            <a:solidFill>
+              <a:srgbClr val="0D9488"/>
+            </a:solidFill>
+            <a:prstDash val="solid"/>
+          </a:ln>
+        </p:spPr>
+      </p:sp>
+      <p:sp>
+        <p:nvSpPr>
+          <p:cNvPr id="29" name="Text 27"/>
+          <p:cNvSpPr/>
+          <p:nvPr/>
+        </p:nvSpPr>
+        <p:spPr>
+          <a:xfrm>
+            <a:off x="841248" y="2651760"/>
+            <a:ext cx="941832" cy="228600"/>
           </a:xfrm>
           <a:prstGeom prst="rect">
             <a:avLst/>
@@ -25304,12 +25538,12 @@
               <a:defRPr/>
             </a:pPr>
             <a:r>
-              <a:rPr kumimoji="0" lang="en-US" sz="880" b="0" i="0" u="none" strike="noStrike" kern="1200" cap="none" spc="0" normalizeH="0" baseline="0" noProof="0" dirty="0">
+              <a:rPr kumimoji="0" lang="en-US" sz="830" b="1" i="0" u="none" strike="noStrike" kern="1200" cap="none" spc="0" normalizeH="0" baseline="0" noProof="0" dirty="0">
                 <a:ln>
                   <a:noFill/>
                 </a:ln>
                 <a:solidFill>
-                  <a:srgbClr val="1E293B"/>
+                  <a:srgbClr val="0F2A44"/>
                 </a:solidFill>
                 <a:effectLst/>
                 <a:uLnTx/>
@@ -25318,9 +25552,9 @@
                 <a:ea typeface="Calibri" pitchFamily="34" charset="-122"/>
                 <a:cs typeface="Calibri" pitchFamily="34" charset="-120"/>
               </a:rPr>
-              <a:t>How often a service lies on shortest paths between other services; useful for identifying broker-like nodes.</a:t>
-            </a:r>
-            <a:endParaRPr kumimoji="0" lang="en-US" sz="880" b="0" i="0" u="none" strike="noStrike" kern="1200" cap="none" spc="0" normalizeH="0" baseline="0" noProof="0" dirty="0">
+              <a:t>ESB Misuse</a:t>
+            </a:r>
+            <a:endParaRPr kumimoji="0" lang="en-US" sz="830" b="0" i="0" u="none" strike="noStrike" kern="1200" cap="none" spc="0" normalizeH="0" baseline="0" noProof="0" dirty="0">
               <a:ln>
                 <a:noFill/>
               </a:ln>
@@ -25339,14 +25573,162 @@
       </p:sp>
       <p:sp>
         <p:nvSpPr>
-          <p:cNvPr id="27" name="Shape 25"/>
-          <p:cNvSpPr/>
-          <p:nvPr/>
-        </p:nvSpPr>
-        <p:spPr>
-          <a:xfrm>
-            <a:off x="4617720" y="4261104"/>
-            <a:ext cx="3703320" cy="9144"/>
+          <p:cNvPr id="30" name="Text 28"/>
+          <p:cNvSpPr/>
+          <p:nvPr/>
+        </p:nvSpPr>
+        <p:spPr>
+          <a:xfrm>
+            <a:off x="1664208" y="2651760"/>
+            <a:ext cx="4846320" cy="228600"/>
+          </a:xfrm>
+          <a:prstGeom prst="rect">
+            <a:avLst/>
+          </a:prstGeom>
+          <a:noFill/>
+          <a:ln/>
+        </p:spPr>
+        <p:txBody>
+          <a:bodyPr wrap="square" lIns="0" tIns="0" rIns="0" bIns="0" rtlCol="0" anchor="ctr">
+            <a:normAutofit/>
+          </a:bodyPr>
+          <a:lstStyle/>
+          <a:p>
+            <a:pPr marL="0" marR="0" lvl="0" indent="0" algn="l" defTabSz="914400" rtl="0" eaLnBrk="1" fontAlgn="auto" latinLnBrk="0" hangingPunct="1">
+              <a:lnSpc>
+                <a:spcPct val="100000"/>
+              </a:lnSpc>
+              <a:spcBef>
+                <a:spcPts val="0"/>
+              </a:spcBef>
+              <a:spcAft>
+                <a:spcPts val="0"/>
+              </a:spcAft>
+              <a:buClrTx/>
+              <a:buSzTx/>
+              <a:buFontTx/>
+              <a:buNone/>
+              <a:tabLst/>
+              <a:defRPr/>
+            </a:pPr>
+            <a:r>
+              <a:rPr kumimoji="0" lang="en-US" sz="745" b="0" i="0" u="none" strike="noStrike" kern="1200" cap="none" spc="0" normalizeH="0" baseline="0" noProof="0" dirty="0">
+                <a:ln>
+                  <a:noFill/>
+                </a:ln>
+                <a:solidFill>
+                  <a:srgbClr val="1E293B"/>
+                </a:solidFill>
+                <a:effectLst/>
+                <a:uLnTx/>
+                <a:uFillTx/>
+                <a:latin typeface="Calibri" pitchFamily="34" charset="0"/>
+                <a:ea typeface="Calibri" pitchFamily="34" charset="-122"/>
+                <a:cs typeface="Calibri" pitchFamily="34" charset="-120"/>
+              </a:rPr>
+              <a:t>Compute caller/callee ratios, mediator volume, and betweenness centrality; exclude gateways.</a:t>
+            </a:r>
+            <a:endParaRPr kumimoji="0" lang="en-US" sz="745" b="0" i="0" u="none" strike="noStrike" kern="1200" cap="none" spc="0" normalizeH="0" baseline="0" noProof="0" dirty="0">
+              <a:ln>
+                <a:noFill/>
+              </a:ln>
+              <a:solidFill>
+                <a:prstClr val="black"/>
+              </a:solidFill>
+              <a:effectLst/>
+              <a:uLnTx/>
+              <a:uFillTx/>
+              <a:latin typeface="Calibri" panose="020F0502020204030204"/>
+              <a:ea typeface="+mn-ea"/>
+              <a:cs typeface="+mn-cs"/>
+            </a:endParaRPr>
+          </a:p>
+        </p:txBody>
+      </p:sp>
+      <p:sp>
+        <p:nvSpPr>
+          <p:cNvPr id="31" name="Text 29"/>
+          <p:cNvSpPr/>
+          <p:nvPr/>
+        </p:nvSpPr>
+        <p:spPr>
+          <a:xfrm>
+            <a:off x="6720840" y="2651760"/>
+            <a:ext cx="1874520" cy="228600"/>
+          </a:xfrm>
+          <a:prstGeom prst="rect">
+            <a:avLst/>
+          </a:prstGeom>
+          <a:noFill/>
+          <a:ln/>
+        </p:spPr>
+        <p:txBody>
+          <a:bodyPr wrap="square" lIns="0" tIns="0" rIns="0" bIns="0" rtlCol="0" anchor="ctr">
+            <a:normAutofit/>
+          </a:bodyPr>
+          <a:lstStyle/>
+          <a:p>
+            <a:pPr marL="0" marR="0" lvl="0" indent="0" algn="l" defTabSz="914400" rtl="0" eaLnBrk="1" fontAlgn="auto" latinLnBrk="0" hangingPunct="1">
+              <a:lnSpc>
+                <a:spcPct val="100000"/>
+              </a:lnSpc>
+              <a:spcBef>
+                <a:spcPts val="0"/>
+              </a:spcBef>
+              <a:spcAft>
+                <a:spcPts val="0"/>
+              </a:spcAft>
+              <a:buClrTx/>
+              <a:buSzTx/>
+              <a:buFontTx/>
+              <a:buNone/>
+              <a:tabLst/>
+              <a:defRPr/>
+            </a:pPr>
+            <a:r>
+              <a:rPr kumimoji="0" lang="en-US" sz="745" b="0" i="0" u="none" strike="noStrike" kern="1200" cap="none" spc="0" normalizeH="0" baseline="0" noProof="0" dirty="0">
+                <a:ln>
+                  <a:noFill/>
+                </a:ln>
+                <a:solidFill>
+                  <a:srgbClr val="1E293B"/>
+                </a:solidFill>
+                <a:effectLst/>
+                <a:uLnTx/>
+                <a:uFillTx/>
+                <a:latin typeface="Calibri" pitchFamily="34" charset="0"/>
+                <a:ea typeface="Calibri" pitchFamily="34" charset="-122"/>
+                <a:cs typeface="Calibri" pitchFamily="34" charset="-120"/>
+              </a:rPr>
+              <a:t>Central edges</a:t>
+            </a:r>
+            <a:endParaRPr kumimoji="0" lang="en-US" sz="745" b="0" i="0" u="none" strike="noStrike" kern="1200" cap="none" spc="0" normalizeH="0" baseline="0" noProof="0" dirty="0">
+              <a:ln>
+                <a:noFill/>
+              </a:ln>
+              <a:solidFill>
+                <a:prstClr val="black"/>
+              </a:solidFill>
+              <a:effectLst/>
+              <a:uLnTx/>
+              <a:uFillTx/>
+              <a:latin typeface="Calibri" panose="020F0502020204030204"/>
+              <a:ea typeface="+mn-ea"/>
+              <a:cs typeface="+mn-cs"/>
+            </a:endParaRPr>
+          </a:p>
+        </p:txBody>
+      </p:sp>
+      <p:sp>
+        <p:nvSpPr>
+          <p:cNvPr id="32" name="Shape 30"/>
+          <p:cNvSpPr/>
+          <p:nvPr/>
+        </p:nvSpPr>
+        <p:spPr>
+          <a:xfrm>
+            <a:off x="548640" y="2898648"/>
+            <a:ext cx="8046720" cy="7315"/>
           </a:xfrm>
           <a:prstGeom prst="rect">
             <a:avLst/>
@@ -25364,7 +25746,1367 @@
       </p:sp>
       <p:sp>
         <p:nvSpPr>
-          <p:cNvPr id="30" name="Text 28"/>
+          <p:cNvPr id="33" name="Shape 31"/>
+          <p:cNvSpPr/>
+          <p:nvPr/>
+        </p:nvSpPr>
+        <p:spPr>
+          <a:xfrm>
+            <a:off x="548640" y="2999232"/>
+            <a:ext cx="219456" cy="27432"/>
+          </a:xfrm>
+          <a:prstGeom prst="rect">
+            <a:avLst/>
+          </a:prstGeom>
+          <a:solidFill>
+            <a:srgbClr val="1C4E80"/>
+          </a:solidFill>
+          <a:ln w="12700">
+            <a:solidFill>
+              <a:srgbClr val="1C4E80"/>
+            </a:solidFill>
+            <a:prstDash val="solid"/>
+          </a:ln>
+        </p:spPr>
+      </p:sp>
+      <p:sp>
+        <p:nvSpPr>
+          <p:cNvPr id="34" name="Text 32"/>
+          <p:cNvSpPr/>
+          <p:nvPr/>
+        </p:nvSpPr>
+        <p:spPr>
+          <a:xfrm>
+            <a:off x="841248" y="2962656"/>
+            <a:ext cx="941832" cy="228600"/>
+          </a:xfrm>
+          <a:prstGeom prst="rect">
+            <a:avLst/>
+          </a:prstGeom>
+          <a:noFill/>
+          <a:ln/>
+        </p:spPr>
+        <p:txBody>
+          <a:bodyPr wrap="square" lIns="0" tIns="0" rIns="0" bIns="0" rtlCol="0" anchor="ctr">
+            <a:normAutofit/>
+          </a:bodyPr>
+          <a:lstStyle/>
+          <a:p>
+            <a:pPr marL="0" marR="0" lvl="0" indent="0" algn="l" defTabSz="914400" rtl="0" eaLnBrk="1" fontAlgn="auto" latinLnBrk="0" hangingPunct="1">
+              <a:lnSpc>
+                <a:spcPct val="100000"/>
+              </a:lnSpc>
+              <a:spcBef>
+                <a:spcPts val="0"/>
+              </a:spcBef>
+              <a:spcAft>
+                <a:spcPts val="0"/>
+              </a:spcAft>
+              <a:buClrTx/>
+              <a:buSzTx/>
+              <a:buFontTx/>
+              <a:buNone/>
+              <a:tabLst/>
+              <a:defRPr/>
+            </a:pPr>
+            <a:r>
+              <a:rPr kumimoji="0" lang="en-US" sz="830" b="1" i="0" u="none" strike="noStrike" kern="1200" cap="none" spc="0" normalizeH="0" baseline="0" noProof="0" dirty="0">
+                <a:ln>
+                  <a:noFill/>
+                </a:ln>
+                <a:solidFill>
+                  <a:srgbClr val="0F2A44"/>
+                </a:solidFill>
+                <a:effectLst/>
+                <a:uLnTx/>
+                <a:uFillTx/>
+                <a:latin typeface="Calibri" pitchFamily="34" charset="0"/>
+                <a:ea typeface="Calibri" pitchFamily="34" charset="-122"/>
+                <a:cs typeface="Calibri" pitchFamily="34" charset="-120"/>
+              </a:rPr>
+              <a:t>Distributed Mono.</a:t>
+            </a:r>
+            <a:endParaRPr kumimoji="0" lang="en-US" sz="830" b="0" i="0" u="none" strike="noStrike" kern="1200" cap="none" spc="0" normalizeH="0" baseline="0" noProof="0" dirty="0">
+              <a:ln>
+                <a:noFill/>
+              </a:ln>
+              <a:solidFill>
+                <a:prstClr val="black"/>
+              </a:solidFill>
+              <a:effectLst/>
+              <a:uLnTx/>
+              <a:uFillTx/>
+              <a:latin typeface="Calibri" panose="020F0502020204030204"/>
+              <a:ea typeface="+mn-ea"/>
+              <a:cs typeface="+mn-cs"/>
+            </a:endParaRPr>
+          </a:p>
+        </p:txBody>
+      </p:sp>
+      <p:sp>
+        <p:nvSpPr>
+          <p:cNvPr id="35" name="Text 33"/>
+          <p:cNvSpPr/>
+          <p:nvPr/>
+        </p:nvSpPr>
+        <p:spPr>
+          <a:xfrm>
+            <a:off x="1664208" y="2962656"/>
+            <a:ext cx="4846320" cy="228600"/>
+          </a:xfrm>
+          <a:prstGeom prst="rect">
+            <a:avLst/>
+          </a:prstGeom>
+          <a:noFill/>
+          <a:ln/>
+        </p:spPr>
+        <p:txBody>
+          <a:bodyPr wrap="square" lIns="0" tIns="0" rIns="0" bIns="0" rtlCol="0" anchor="ctr">
+            <a:normAutofit/>
+          </a:bodyPr>
+          <a:lstStyle/>
+          <a:p>
+            <a:pPr marL="0" marR="0" lvl="0" indent="0" algn="l" defTabSz="914400" rtl="0" eaLnBrk="1" fontAlgn="auto" latinLnBrk="0" hangingPunct="1">
+              <a:lnSpc>
+                <a:spcPct val="100000"/>
+              </a:lnSpc>
+              <a:spcBef>
+                <a:spcPts val="0"/>
+              </a:spcBef>
+              <a:spcAft>
+                <a:spcPts val="0"/>
+              </a:spcAft>
+              <a:buClrTx/>
+              <a:buSzTx/>
+              <a:buFontTx/>
+              <a:buNone/>
+              <a:tabLst/>
+              <a:defRPr/>
+            </a:pPr>
+            <a:r>
+              <a:rPr kumimoji="0" lang="en-US" sz="745" b="0" i="0" u="none" strike="noStrike" kern="1200" cap="none" spc="0" normalizeH="0" baseline="0" noProof="0" dirty="0">
+                <a:ln>
+                  <a:noFill/>
+                </a:ln>
+                <a:solidFill>
+                  <a:srgbClr val="1E293B"/>
+                </a:solidFill>
+                <a:effectLst/>
+                <a:uLnTx/>
+                <a:uFillTx/>
+                <a:latin typeface="Calibri" pitchFamily="34" charset="0"/>
+                <a:ea typeface="Calibri" pitchFamily="34" charset="-122"/>
+                <a:cs typeface="Calibri" pitchFamily="34" charset="-120"/>
+              </a:rPr>
+              <a:t>Evaluate system coupling coefficient, connected-service ratio, and shared database count.</a:t>
+            </a:r>
+            <a:endParaRPr kumimoji="0" lang="en-US" sz="745" b="0" i="0" u="none" strike="noStrike" kern="1200" cap="none" spc="0" normalizeH="0" baseline="0" noProof="0" dirty="0">
+              <a:ln>
+                <a:noFill/>
+              </a:ln>
+              <a:solidFill>
+                <a:prstClr val="black"/>
+              </a:solidFill>
+              <a:effectLst/>
+              <a:uLnTx/>
+              <a:uFillTx/>
+              <a:latin typeface="Calibri" panose="020F0502020204030204"/>
+              <a:ea typeface="+mn-ea"/>
+              <a:cs typeface="+mn-cs"/>
+            </a:endParaRPr>
+          </a:p>
+        </p:txBody>
+      </p:sp>
+      <p:sp>
+        <p:nvSpPr>
+          <p:cNvPr id="36" name="Text 34"/>
+          <p:cNvSpPr/>
+          <p:nvPr/>
+        </p:nvSpPr>
+        <p:spPr>
+          <a:xfrm>
+            <a:off x="6720840" y="2962656"/>
+            <a:ext cx="1874520" cy="228600"/>
+          </a:xfrm>
+          <a:prstGeom prst="rect">
+            <a:avLst/>
+          </a:prstGeom>
+          <a:noFill/>
+          <a:ln/>
+        </p:spPr>
+        <p:txBody>
+          <a:bodyPr wrap="square" lIns="0" tIns="0" rIns="0" bIns="0" rtlCol="0" anchor="ctr">
+            <a:normAutofit/>
+          </a:bodyPr>
+          <a:lstStyle/>
+          <a:p>
+            <a:pPr marL="0" marR="0" lvl="0" indent="0" algn="l" defTabSz="914400" rtl="0" eaLnBrk="1" fontAlgn="auto" latinLnBrk="0" hangingPunct="1">
+              <a:lnSpc>
+                <a:spcPct val="100000"/>
+              </a:lnSpc>
+              <a:spcBef>
+                <a:spcPts val="0"/>
+              </a:spcBef>
+              <a:spcAft>
+                <a:spcPts val="0"/>
+              </a:spcAft>
+              <a:buClrTx/>
+              <a:buSzTx/>
+              <a:buFontTx/>
+              <a:buNone/>
+              <a:tabLst/>
+              <a:defRPr/>
+            </a:pPr>
+            <a:r>
+              <a:rPr kumimoji="0" lang="en-US" sz="745" b="0" i="0" u="none" strike="noStrike" kern="1200" cap="none" spc="0" normalizeH="0" baseline="0" noProof="0" dirty="0">
+                <a:ln>
+                  <a:noFill/>
+                </a:ln>
+                <a:solidFill>
+                  <a:srgbClr val="1E293B"/>
+                </a:solidFill>
+                <a:effectLst/>
+                <a:uLnTx/>
+                <a:uFillTx/>
+                <a:latin typeface="Calibri" pitchFamily="34" charset="0"/>
+                <a:ea typeface="Calibri" pitchFamily="34" charset="-122"/>
+                <a:cs typeface="Calibri" pitchFamily="34" charset="-120"/>
+              </a:rPr>
+              <a:t>Graph metrics</a:t>
+            </a:r>
+            <a:endParaRPr kumimoji="0" lang="en-US" sz="745" b="0" i="0" u="none" strike="noStrike" kern="1200" cap="none" spc="0" normalizeH="0" baseline="0" noProof="0" dirty="0">
+              <a:ln>
+                <a:noFill/>
+              </a:ln>
+              <a:solidFill>
+                <a:prstClr val="black"/>
+              </a:solidFill>
+              <a:effectLst/>
+              <a:uLnTx/>
+              <a:uFillTx/>
+              <a:latin typeface="Calibri" panose="020F0502020204030204"/>
+              <a:ea typeface="+mn-ea"/>
+              <a:cs typeface="+mn-cs"/>
+            </a:endParaRPr>
+          </a:p>
+        </p:txBody>
+      </p:sp>
+      <p:sp>
+        <p:nvSpPr>
+          <p:cNvPr id="37" name="Shape 35"/>
+          <p:cNvSpPr/>
+          <p:nvPr/>
+        </p:nvSpPr>
+        <p:spPr>
+          <a:xfrm>
+            <a:off x="548640" y="3209544"/>
+            <a:ext cx="8046720" cy="7315"/>
+          </a:xfrm>
+          <a:prstGeom prst="rect">
+            <a:avLst/>
+          </a:prstGeom>
+          <a:solidFill>
+            <a:srgbClr val="D8DEE6"/>
+          </a:solidFill>
+          <a:ln w="12700">
+            <a:solidFill>
+              <a:srgbClr val="D8DEE6"/>
+            </a:solidFill>
+            <a:prstDash val="solid"/>
+          </a:ln>
+        </p:spPr>
+      </p:sp>
+      <p:sp>
+        <p:nvSpPr>
+          <p:cNvPr id="38" name="Shape 36"/>
+          <p:cNvSpPr/>
+          <p:nvPr/>
+        </p:nvSpPr>
+        <p:spPr>
+          <a:xfrm>
+            <a:off x="548640" y="3310128"/>
+            <a:ext cx="219456" cy="27432"/>
+          </a:xfrm>
+          <a:prstGeom prst="rect">
+            <a:avLst/>
+          </a:prstGeom>
+          <a:solidFill>
+            <a:srgbClr val="1C4E80"/>
+          </a:solidFill>
+          <a:ln w="12700">
+            <a:solidFill>
+              <a:srgbClr val="1C4E80"/>
+            </a:solidFill>
+            <a:prstDash val="solid"/>
+          </a:ln>
+        </p:spPr>
+      </p:sp>
+      <p:sp>
+        <p:nvSpPr>
+          <p:cNvPr id="39" name="Text 37"/>
+          <p:cNvSpPr/>
+          <p:nvPr/>
+        </p:nvSpPr>
+        <p:spPr>
+          <a:xfrm>
+            <a:off x="841248" y="3273552"/>
+            <a:ext cx="941832" cy="228600"/>
+          </a:xfrm>
+          <a:prstGeom prst="rect">
+            <a:avLst/>
+          </a:prstGeom>
+          <a:noFill/>
+          <a:ln/>
+        </p:spPr>
+        <p:txBody>
+          <a:bodyPr wrap="square" lIns="0" tIns="0" rIns="0" bIns="0" rtlCol="0" anchor="ctr">
+            <a:normAutofit/>
+          </a:bodyPr>
+          <a:lstStyle/>
+          <a:p>
+            <a:pPr marL="0" marR="0" lvl="0" indent="0" algn="l" defTabSz="914400" rtl="0" eaLnBrk="1" fontAlgn="auto" latinLnBrk="0" hangingPunct="1">
+              <a:lnSpc>
+                <a:spcPct val="100000"/>
+              </a:lnSpc>
+              <a:spcBef>
+                <a:spcPts val="0"/>
+              </a:spcBef>
+              <a:spcAft>
+                <a:spcPts val="0"/>
+              </a:spcAft>
+              <a:buClrTx/>
+              <a:buSzTx/>
+              <a:buFontTx/>
+              <a:buNone/>
+              <a:tabLst/>
+              <a:defRPr/>
+            </a:pPr>
+            <a:r>
+              <a:rPr kumimoji="0" lang="en-US" sz="830" b="1" i="0" u="none" strike="noStrike" kern="1200" cap="none" spc="0" normalizeH="0" baseline="0" noProof="0" dirty="0">
+                <a:ln>
+                  <a:noFill/>
+                </a:ln>
+                <a:solidFill>
+                  <a:srgbClr val="0F2A44"/>
+                </a:solidFill>
+                <a:effectLst/>
+                <a:uLnTx/>
+                <a:uFillTx/>
+                <a:latin typeface="Calibri" pitchFamily="34" charset="0"/>
+                <a:ea typeface="Calibri" pitchFamily="34" charset="-122"/>
+                <a:cs typeface="Calibri" pitchFamily="34" charset="-120"/>
+              </a:rPr>
+              <a:t>API Versioning</a:t>
+            </a:r>
+            <a:endParaRPr kumimoji="0" lang="en-US" sz="830" b="0" i="0" u="none" strike="noStrike" kern="1200" cap="none" spc="0" normalizeH="0" baseline="0" noProof="0" dirty="0">
+              <a:ln>
+                <a:noFill/>
+              </a:ln>
+              <a:solidFill>
+                <a:prstClr val="black"/>
+              </a:solidFill>
+              <a:effectLst/>
+              <a:uLnTx/>
+              <a:uFillTx/>
+              <a:latin typeface="Calibri" panose="020F0502020204030204"/>
+              <a:ea typeface="+mn-ea"/>
+              <a:cs typeface="+mn-cs"/>
+            </a:endParaRPr>
+          </a:p>
+        </p:txBody>
+      </p:sp>
+      <p:sp>
+        <p:nvSpPr>
+          <p:cNvPr id="40" name="Text 38"/>
+          <p:cNvSpPr/>
+          <p:nvPr/>
+        </p:nvSpPr>
+        <p:spPr>
+          <a:xfrm>
+            <a:off x="1664208" y="3273552"/>
+            <a:ext cx="4846320" cy="228600"/>
+          </a:xfrm>
+          <a:prstGeom prst="rect">
+            <a:avLst/>
+          </a:prstGeom>
+          <a:noFill/>
+          <a:ln/>
+        </p:spPr>
+        <p:txBody>
+          <a:bodyPr wrap="square" lIns="0" tIns="0" rIns="0" bIns="0" rtlCol="0" anchor="ctr">
+            <a:normAutofit/>
+          </a:bodyPr>
+          <a:lstStyle/>
+          <a:p>
+            <a:pPr marL="0" marR="0" lvl="0" indent="0" algn="l" defTabSz="914400" rtl="0" eaLnBrk="1" fontAlgn="auto" latinLnBrk="0" hangingPunct="1">
+              <a:lnSpc>
+                <a:spcPct val="100000"/>
+              </a:lnSpc>
+              <a:spcBef>
+                <a:spcPts val="0"/>
+              </a:spcBef>
+              <a:spcAft>
+                <a:spcPts val="0"/>
+              </a:spcAft>
+              <a:buClrTx/>
+              <a:buSzTx/>
+              <a:buFontTx/>
+              <a:buNone/>
+              <a:tabLst/>
+              <a:defRPr/>
+            </a:pPr>
+            <a:r>
+              <a:rPr kumimoji="0" lang="en-US" sz="745" b="0" i="0" u="none" strike="noStrike" kern="1200" cap="none" spc="0" normalizeH="0" baseline="0" noProof="0" dirty="0">
+                <a:ln>
+                  <a:noFill/>
+                </a:ln>
+                <a:solidFill>
+                  <a:srgbClr val="1E293B"/>
+                </a:solidFill>
+                <a:effectLst/>
+                <a:uLnTx/>
+                <a:uFillTx/>
+                <a:latin typeface="Calibri" pitchFamily="34" charset="0"/>
+                <a:ea typeface="Calibri" pitchFamily="34" charset="-122"/>
+                <a:cs typeface="Calibri" pitchFamily="34" charset="-120"/>
+              </a:rPr>
+              <a:t>Extract endpoints with Spoon and flag services where no endpoint has path/header/media/query versioning.</a:t>
+            </a:r>
+            <a:endParaRPr kumimoji="0" lang="en-US" sz="745" b="0" i="0" u="none" strike="noStrike" kern="1200" cap="none" spc="0" normalizeH="0" baseline="0" noProof="0" dirty="0">
+              <a:ln>
+                <a:noFill/>
+              </a:ln>
+              <a:solidFill>
+                <a:prstClr val="black"/>
+              </a:solidFill>
+              <a:effectLst/>
+              <a:uLnTx/>
+              <a:uFillTx/>
+              <a:latin typeface="Calibri" panose="020F0502020204030204"/>
+              <a:ea typeface="+mn-ea"/>
+              <a:cs typeface="+mn-cs"/>
+            </a:endParaRPr>
+          </a:p>
+        </p:txBody>
+      </p:sp>
+      <p:sp>
+        <p:nvSpPr>
+          <p:cNvPr id="41" name="Text 39"/>
+          <p:cNvSpPr/>
+          <p:nvPr/>
+        </p:nvSpPr>
+        <p:spPr>
+          <a:xfrm>
+            <a:off x="6720840" y="3273552"/>
+            <a:ext cx="1874520" cy="228600"/>
+          </a:xfrm>
+          <a:prstGeom prst="rect">
+            <a:avLst/>
+          </a:prstGeom>
+          <a:noFill/>
+          <a:ln/>
+        </p:spPr>
+        <p:txBody>
+          <a:bodyPr wrap="square" lIns="0" tIns="0" rIns="0" bIns="0" rtlCol="0" anchor="ctr">
+            <a:normAutofit/>
+          </a:bodyPr>
+          <a:lstStyle/>
+          <a:p>
+            <a:pPr marL="0" marR="0" lvl="0" indent="0" algn="l" defTabSz="914400" rtl="0" eaLnBrk="1" fontAlgn="auto" latinLnBrk="0" hangingPunct="1">
+              <a:lnSpc>
+                <a:spcPct val="100000"/>
+              </a:lnSpc>
+              <a:spcBef>
+                <a:spcPts val="0"/>
+              </a:spcBef>
+              <a:spcAft>
+                <a:spcPts val="0"/>
+              </a:spcAft>
+              <a:buClrTx/>
+              <a:buSzTx/>
+              <a:buFontTx/>
+              <a:buNone/>
+              <a:tabLst/>
+              <a:defRPr/>
+            </a:pPr>
+            <a:r>
+              <a:rPr kumimoji="0" lang="en-US" sz="745" b="0" i="0" u="none" strike="noStrike" kern="1200" cap="none" spc="0" normalizeH="0" baseline="0" noProof="0" dirty="0">
+                <a:ln>
+                  <a:noFill/>
+                </a:ln>
+                <a:solidFill>
+                  <a:srgbClr val="1E293B"/>
+                </a:solidFill>
+                <a:effectLst/>
+                <a:uLnTx/>
+                <a:uFillTx/>
+                <a:latin typeface="Calibri" pitchFamily="34" charset="0"/>
+                <a:ea typeface="Calibri" pitchFamily="34" charset="-122"/>
+                <a:cs typeface="Calibri" pitchFamily="34" charset="-120"/>
+              </a:rPr>
+              <a:t>Controller mapping</a:t>
+            </a:r>
+            <a:endParaRPr kumimoji="0" lang="en-US" sz="745" b="0" i="0" u="none" strike="noStrike" kern="1200" cap="none" spc="0" normalizeH="0" baseline="0" noProof="0" dirty="0">
+              <a:ln>
+                <a:noFill/>
+              </a:ln>
+              <a:solidFill>
+                <a:prstClr val="black"/>
+              </a:solidFill>
+              <a:effectLst/>
+              <a:uLnTx/>
+              <a:uFillTx/>
+              <a:latin typeface="Calibri" panose="020F0502020204030204"/>
+              <a:ea typeface="+mn-ea"/>
+              <a:cs typeface="+mn-cs"/>
+            </a:endParaRPr>
+          </a:p>
+        </p:txBody>
+      </p:sp>
+      <p:sp>
+        <p:nvSpPr>
+          <p:cNvPr id="42" name="Shape 40"/>
+          <p:cNvSpPr/>
+          <p:nvPr/>
+        </p:nvSpPr>
+        <p:spPr>
+          <a:xfrm>
+            <a:off x="548640" y="3520440"/>
+            <a:ext cx="8046720" cy="7315"/>
+          </a:xfrm>
+          <a:prstGeom prst="rect">
+            <a:avLst/>
+          </a:prstGeom>
+          <a:solidFill>
+            <a:srgbClr val="D8DEE6"/>
+          </a:solidFill>
+          <a:ln w="12700">
+            <a:solidFill>
+              <a:srgbClr val="D8DEE6"/>
+            </a:solidFill>
+            <a:prstDash val="solid"/>
+          </a:ln>
+        </p:spPr>
+      </p:sp>
+      <p:sp>
+        <p:nvSpPr>
+          <p:cNvPr id="43" name="Shape 41"/>
+          <p:cNvSpPr/>
+          <p:nvPr/>
+        </p:nvSpPr>
+        <p:spPr>
+          <a:xfrm>
+            <a:off x="548640" y="3621024"/>
+            <a:ext cx="219456" cy="27432"/>
+          </a:xfrm>
+          <a:prstGeom prst="rect">
+            <a:avLst/>
+          </a:prstGeom>
+          <a:solidFill>
+            <a:srgbClr val="1C4E80"/>
+          </a:solidFill>
+          <a:ln w="12700">
+            <a:solidFill>
+              <a:srgbClr val="1C4E80"/>
+            </a:solidFill>
+            <a:prstDash val="solid"/>
+          </a:ln>
+        </p:spPr>
+      </p:sp>
+      <p:sp>
+        <p:nvSpPr>
+          <p:cNvPr id="44" name="Text 42"/>
+          <p:cNvSpPr/>
+          <p:nvPr/>
+        </p:nvSpPr>
+        <p:spPr>
+          <a:xfrm>
+            <a:off x="841248" y="3584448"/>
+            <a:ext cx="941832" cy="228600"/>
+          </a:xfrm>
+          <a:prstGeom prst="rect">
+            <a:avLst/>
+          </a:prstGeom>
+          <a:noFill/>
+          <a:ln/>
+        </p:spPr>
+        <p:txBody>
+          <a:bodyPr wrap="square" lIns="0" tIns="0" rIns="0" bIns="0" rtlCol="0" anchor="ctr">
+            <a:normAutofit/>
+          </a:bodyPr>
+          <a:lstStyle/>
+          <a:p>
+            <a:pPr marL="0" marR="0" lvl="0" indent="0" algn="l" defTabSz="914400" rtl="0" eaLnBrk="1" fontAlgn="auto" latinLnBrk="0" hangingPunct="1">
+              <a:lnSpc>
+                <a:spcPct val="100000"/>
+              </a:lnSpc>
+              <a:spcBef>
+                <a:spcPts val="0"/>
+              </a:spcBef>
+              <a:spcAft>
+                <a:spcPts val="0"/>
+              </a:spcAft>
+              <a:buClrTx/>
+              <a:buSzTx/>
+              <a:buFontTx/>
+              <a:buNone/>
+              <a:tabLst/>
+              <a:defRPr/>
+            </a:pPr>
+            <a:r>
+              <a:rPr kumimoji="0" lang="en-US" sz="830" b="1" i="0" u="none" strike="noStrike" kern="1200" cap="none" spc="0" normalizeH="0" baseline="0" noProof="0" dirty="0">
+                <a:ln>
+                  <a:noFill/>
+                </a:ln>
+                <a:solidFill>
+                  <a:srgbClr val="0F2A44"/>
+                </a:solidFill>
+                <a:effectLst/>
+                <a:uLnTx/>
+                <a:uFillTx/>
+                <a:latin typeface="Calibri" pitchFamily="34" charset="0"/>
+                <a:ea typeface="Calibri" pitchFamily="34" charset="-122"/>
+                <a:cs typeface="Calibri" pitchFamily="34" charset="-120"/>
+              </a:rPr>
+              <a:t>Wrong Cuts</a:t>
+            </a:r>
+            <a:endParaRPr kumimoji="0" lang="en-US" sz="830" b="0" i="0" u="none" strike="noStrike" kern="1200" cap="none" spc="0" normalizeH="0" baseline="0" noProof="0" dirty="0">
+              <a:ln>
+                <a:noFill/>
+              </a:ln>
+              <a:solidFill>
+                <a:prstClr val="black"/>
+              </a:solidFill>
+              <a:effectLst/>
+              <a:uLnTx/>
+              <a:uFillTx/>
+              <a:latin typeface="Calibri" panose="020F0502020204030204"/>
+              <a:ea typeface="+mn-ea"/>
+              <a:cs typeface="+mn-cs"/>
+            </a:endParaRPr>
+          </a:p>
+        </p:txBody>
+      </p:sp>
+      <p:sp>
+        <p:nvSpPr>
+          <p:cNvPr id="45" name="Text 43"/>
+          <p:cNvSpPr/>
+          <p:nvPr/>
+        </p:nvSpPr>
+        <p:spPr>
+          <a:xfrm>
+            <a:off x="1664208" y="3584448"/>
+            <a:ext cx="4846320" cy="228600"/>
+          </a:xfrm>
+          <a:prstGeom prst="rect">
+            <a:avLst/>
+          </a:prstGeom>
+          <a:noFill/>
+          <a:ln/>
+        </p:spPr>
+        <p:txBody>
+          <a:bodyPr wrap="square" lIns="0" tIns="0" rIns="0" bIns="0" rtlCol="0" anchor="ctr">
+            <a:normAutofit/>
+          </a:bodyPr>
+          <a:lstStyle/>
+          <a:p>
+            <a:pPr marL="0" marR="0" lvl="0" indent="0" algn="l" defTabSz="914400" rtl="0" eaLnBrk="1" fontAlgn="auto" latinLnBrk="0" hangingPunct="1">
+              <a:lnSpc>
+                <a:spcPct val="100000"/>
+              </a:lnSpc>
+              <a:spcBef>
+                <a:spcPts val="0"/>
+              </a:spcBef>
+              <a:spcAft>
+                <a:spcPts val="0"/>
+              </a:spcAft>
+              <a:buClrTx/>
+              <a:buSzTx/>
+              <a:buFontTx/>
+              <a:buNone/>
+              <a:tabLst/>
+              <a:defRPr/>
+            </a:pPr>
+            <a:r>
+              <a:rPr kumimoji="0" lang="en-US" sz="745" b="0" i="0" u="none" strike="noStrike" kern="1200" cap="none" spc="0" normalizeH="0" baseline="0" noProof="0" dirty="0">
+                <a:ln>
+                  <a:noFill/>
+                </a:ln>
+                <a:solidFill>
+                  <a:srgbClr val="1E293B"/>
+                </a:solidFill>
+                <a:effectLst/>
+                <a:uLnTx/>
+                <a:uFillTx/>
+                <a:latin typeface="Calibri" pitchFamily="34" charset="0"/>
+                <a:ea typeface="Calibri" pitchFamily="34" charset="-122"/>
+                <a:cs typeface="Calibri" pitchFamily="34" charset="-120"/>
+              </a:rPr>
+              <a:t>Find bidirectional service pairs in the dependency graph: A calls B and B calls A.</a:t>
+            </a:r>
+            <a:endParaRPr kumimoji="0" lang="en-US" sz="745" b="0" i="0" u="none" strike="noStrike" kern="1200" cap="none" spc="0" normalizeH="0" baseline="0" noProof="0" dirty="0">
+              <a:ln>
+                <a:noFill/>
+              </a:ln>
+              <a:solidFill>
+                <a:prstClr val="black"/>
+              </a:solidFill>
+              <a:effectLst/>
+              <a:uLnTx/>
+              <a:uFillTx/>
+              <a:latin typeface="Calibri" panose="020F0502020204030204"/>
+              <a:ea typeface="+mn-ea"/>
+              <a:cs typeface="+mn-cs"/>
+            </a:endParaRPr>
+          </a:p>
+        </p:txBody>
+      </p:sp>
+      <p:sp>
+        <p:nvSpPr>
+          <p:cNvPr id="46" name="Text 44"/>
+          <p:cNvSpPr/>
+          <p:nvPr/>
+        </p:nvSpPr>
+        <p:spPr>
+          <a:xfrm>
+            <a:off x="6720840" y="3584448"/>
+            <a:ext cx="1874520" cy="228600"/>
+          </a:xfrm>
+          <a:prstGeom prst="rect">
+            <a:avLst/>
+          </a:prstGeom>
+          <a:noFill/>
+          <a:ln/>
+        </p:spPr>
+        <p:txBody>
+          <a:bodyPr wrap="square" lIns="0" tIns="0" rIns="0" bIns="0" rtlCol="0" anchor="ctr">
+            <a:normAutofit/>
+          </a:bodyPr>
+          <a:lstStyle/>
+          <a:p>
+            <a:pPr marL="0" marR="0" lvl="0" indent="0" algn="l" defTabSz="914400" rtl="0" eaLnBrk="1" fontAlgn="auto" latinLnBrk="0" hangingPunct="1">
+              <a:lnSpc>
+                <a:spcPct val="100000"/>
+              </a:lnSpc>
+              <a:spcBef>
+                <a:spcPts val="0"/>
+              </a:spcBef>
+              <a:spcAft>
+                <a:spcPts val="0"/>
+              </a:spcAft>
+              <a:buClrTx/>
+              <a:buSzTx/>
+              <a:buFontTx/>
+              <a:buNone/>
+              <a:tabLst/>
+              <a:defRPr/>
+            </a:pPr>
+            <a:r>
+              <a:rPr kumimoji="0" lang="en-US" sz="745" b="0" i="0" u="none" strike="noStrike" kern="1200" cap="none" spc="0" normalizeH="0" baseline="0" noProof="0" dirty="0">
+                <a:ln>
+                  <a:noFill/>
+                </a:ln>
+                <a:solidFill>
+                  <a:srgbClr val="1E293B"/>
+                </a:solidFill>
+                <a:effectLst/>
+                <a:uLnTx/>
+                <a:uFillTx/>
+                <a:latin typeface="Calibri" pitchFamily="34" charset="0"/>
+                <a:ea typeface="Calibri" pitchFamily="34" charset="-122"/>
+                <a:cs typeface="Calibri" pitchFamily="34" charset="-120"/>
+              </a:rPr>
+              <a:t>Both directions</a:t>
+            </a:r>
+            <a:endParaRPr kumimoji="0" lang="en-US" sz="745" b="0" i="0" u="none" strike="noStrike" kern="1200" cap="none" spc="0" normalizeH="0" baseline="0" noProof="0" dirty="0">
+              <a:ln>
+                <a:noFill/>
+              </a:ln>
+              <a:solidFill>
+                <a:prstClr val="black"/>
+              </a:solidFill>
+              <a:effectLst/>
+              <a:uLnTx/>
+              <a:uFillTx/>
+              <a:latin typeface="Calibri" panose="020F0502020204030204"/>
+              <a:ea typeface="+mn-ea"/>
+              <a:cs typeface="+mn-cs"/>
+            </a:endParaRPr>
+          </a:p>
+        </p:txBody>
+      </p:sp>
+      <p:sp>
+        <p:nvSpPr>
+          <p:cNvPr id="47" name="Shape 45"/>
+          <p:cNvSpPr/>
+          <p:nvPr/>
+        </p:nvSpPr>
+        <p:spPr>
+          <a:xfrm>
+            <a:off x="548640" y="3831336"/>
+            <a:ext cx="8046720" cy="7315"/>
+          </a:xfrm>
+          <a:prstGeom prst="rect">
+            <a:avLst/>
+          </a:prstGeom>
+          <a:solidFill>
+            <a:srgbClr val="D8DEE6"/>
+          </a:solidFill>
+          <a:ln w="12700">
+            <a:solidFill>
+              <a:srgbClr val="D8DEE6"/>
+            </a:solidFill>
+            <a:prstDash val="solid"/>
+          </a:ln>
+        </p:spPr>
+      </p:sp>
+      <p:sp>
+        <p:nvSpPr>
+          <p:cNvPr id="48" name="Shape 46"/>
+          <p:cNvSpPr/>
+          <p:nvPr/>
+        </p:nvSpPr>
+        <p:spPr>
+          <a:xfrm>
+            <a:off x="548640" y="3931920"/>
+            <a:ext cx="219456" cy="27432"/>
+          </a:xfrm>
+          <a:prstGeom prst="rect">
+            <a:avLst/>
+          </a:prstGeom>
+          <a:solidFill>
+            <a:srgbClr val="1C4E80"/>
+          </a:solidFill>
+          <a:ln w="12700">
+            <a:solidFill>
+              <a:srgbClr val="1C4E80"/>
+            </a:solidFill>
+            <a:prstDash val="solid"/>
+          </a:ln>
+        </p:spPr>
+      </p:sp>
+      <p:sp>
+        <p:nvSpPr>
+          <p:cNvPr id="49" name="Text 47"/>
+          <p:cNvSpPr/>
+          <p:nvPr/>
+        </p:nvSpPr>
+        <p:spPr>
+          <a:xfrm>
+            <a:off x="841248" y="3895344"/>
+            <a:ext cx="941832" cy="228600"/>
+          </a:xfrm>
+          <a:prstGeom prst="rect">
+            <a:avLst/>
+          </a:prstGeom>
+          <a:noFill/>
+          <a:ln/>
+        </p:spPr>
+        <p:txBody>
+          <a:bodyPr wrap="square" lIns="0" tIns="0" rIns="0" bIns="0" rtlCol="0" anchor="ctr">
+            <a:normAutofit/>
+          </a:bodyPr>
+          <a:lstStyle/>
+          <a:p>
+            <a:pPr marL="0" marR="0" lvl="0" indent="0" algn="l" defTabSz="914400" rtl="0" eaLnBrk="1" fontAlgn="auto" latinLnBrk="0" hangingPunct="1">
+              <a:lnSpc>
+                <a:spcPct val="100000"/>
+              </a:lnSpc>
+              <a:spcBef>
+                <a:spcPts val="0"/>
+              </a:spcBef>
+              <a:spcAft>
+                <a:spcPts val="0"/>
+              </a:spcAft>
+              <a:buClrTx/>
+              <a:buSzTx/>
+              <a:buFontTx/>
+              <a:buNone/>
+              <a:tabLst/>
+              <a:defRPr/>
+            </a:pPr>
+            <a:r>
+              <a:rPr kumimoji="0" lang="en-US" sz="830" b="1" i="0" u="none" strike="noStrike" kern="1200" cap="none" spc="0" normalizeH="0" baseline="0" noProof="0" dirty="0">
+                <a:ln>
+                  <a:noFill/>
+                </a:ln>
+                <a:solidFill>
+                  <a:srgbClr val="0F2A44"/>
+                </a:solidFill>
+                <a:effectLst/>
+                <a:uLnTx/>
+                <a:uFillTx/>
+                <a:latin typeface="Calibri" pitchFamily="34" charset="0"/>
+                <a:ea typeface="Calibri" pitchFamily="34" charset="-122"/>
+                <a:cs typeface="Calibri" pitchFamily="34" charset="-120"/>
+              </a:rPr>
+              <a:t>Nano Service</a:t>
+            </a:r>
+            <a:endParaRPr kumimoji="0" lang="en-US" sz="830" b="0" i="0" u="none" strike="noStrike" kern="1200" cap="none" spc="0" normalizeH="0" baseline="0" noProof="0" dirty="0">
+              <a:ln>
+                <a:noFill/>
+              </a:ln>
+              <a:solidFill>
+                <a:prstClr val="black"/>
+              </a:solidFill>
+              <a:effectLst/>
+              <a:uLnTx/>
+              <a:uFillTx/>
+              <a:latin typeface="Calibri" panose="020F0502020204030204"/>
+              <a:ea typeface="+mn-ea"/>
+              <a:cs typeface="+mn-cs"/>
+            </a:endParaRPr>
+          </a:p>
+        </p:txBody>
+      </p:sp>
+      <p:sp>
+        <p:nvSpPr>
+          <p:cNvPr id="50" name="Text 48"/>
+          <p:cNvSpPr/>
+          <p:nvPr/>
+        </p:nvSpPr>
+        <p:spPr>
+          <a:xfrm>
+            <a:off x="1664208" y="3895344"/>
+            <a:ext cx="4846320" cy="228600"/>
+          </a:xfrm>
+          <a:prstGeom prst="rect">
+            <a:avLst/>
+          </a:prstGeom>
+          <a:noFill/>
+          <a:ln/>
+        </p:spPr>
+        <p:txBody>
+          <a:bodyPr wrap="square" lIns="0" tIns="0" rIns="0" bIns="0" rtlCol="0" anchor="ctr">
+            <a:normAutofit/>
+          </a:bodyPr>
+          <a:lstStyle/>
+          <a:p>
+            <a:pPr marL="0" marR="0" lvl="0" indent="0" algn="l" defTabSz="914400" rtl="0" eaLnBrk="1" fontAlgn="auto" latinLnBrk="0" hangingPunct="1">
+              <a:lnSpc>
+                <a:spcPct val="100000"/>
+              </a:lnSpc>
+              <a:spcBef>
+                <a:spcPts val="0"/>
+              </a:spcBef>
+              <a:spcAft>
+                <a:spcPts val="0"/>
+              </a:spcAft>
+              <a:buClrTx/>
+              <a:buSzTx/>
+              <a:buFontTx/>
+              <a:buNone/>
+              <a:tabLst/>
+              <a:defRPr/>
+            </a:pPr>
+            <a:r>
+              <a:rPr kumimoji="0" lang="en-US" sz="745" b="0" i="0" u="none" strike="noStrike" kern="1200" cap="none" spc="0" normalizeH="0" baseline="0" noProof="0" dirty="0">
+                <a:ln>
+                  <a:noFill/>
+                </a:ln>
+                <a:solidFill>
+                  <a:srgbClr val="1E293B"/>
+                </a:solidFill>
+                <a:effectLst/>
+                <a:uLnTx/>
+                <a:uFillTx/>
+                <a:latin typeface="Calibri" pitchFamily="34" charset="0"/>
+                <a:ea typeface="Calibri" pitchFamily="34" charset="-122"/>
+                <a:cs typeface="Calibri" pitchFamily="34" charset="-120"/>
+              </a:rPr>
+              <a:t>Flag services below both size thresholds: low Java LOC and very few endpoints.</a:t>
+            </a:r>
+            <a:endParaRPr kumimoji="0" lang="en-US" sz="745" b="0" i="0" u="none" strike="noStrike" kern="1200" cap="none" spc="0" normalizeH="0" baseline="0" noProof="0" dirty="0">
+              <a:ln>
+                <a:noFill/>
+              </a:ln>
+              <a:solidFill>
+                <a:prstClr val="black"/>
+              </a:solidFill>
+              <a:effectLst/>
+              <a:uLnTx/>
+              <a:uFillTx/>
+              <a:latin typeface="Calibri" panose="020F0502020204030204"/>
+              <a:ea typeface="+mn-ea"/>
+              <a:cs typeface="+mn-cs"/>
+            </a:endParaRPr>
+          </a:p>
+        </p:txBody>
+      </p:sp>
+      <p:sp>
+        <p:nvSpPr>
+          <p:cNvPr id="51" name="Text 49"/>
+          <p:cNvSpPr/>
+          <p:nvPr/>
+        </p:nvSpPr>
+        <p:spPr>
+          <a:xfrm>
+            <a:off x="6720840" y="3895344"/>
+            <a:ext cx="1874520" cy="228600"/>
+          </a:xfrm>
+          <a:prstGeom prst="rect">
+            <a:avLst/>
+          </a:prstGeom>
+          <a:noFill/>
+          <a:ln/>
+        </p:spPr>
+        <p:txBody>
+          <a:bodyPr wrap="square" lIns="0" tIns="0" rIns="0" bIns="0" rtlCol="0" anchor="ctr">
+            <a:normAutofit/>
+          </a:bodyPr>
+          <a:lstStyle/>
+          <a:p>
+            <a:pPr marL="0" marR="0" lvl="0" indent="0" algn="l" defTabSz="914400" rtl="0" eaLnBrk="1" fontAlgn="auto" latinLnBrk="0" hangingPunct="1">
+              <a:lnSpc>
+                <a:spcPct val="100000"/>
+              </a:lnSpc>
+              <a:spcBef>
+                <a:spcPts val="0"/>
+              </a:spcBef>
+              <a:spcAft>
+                <a:spcPts val="0"/>
+              </a:spcAft>
+              <a:buClrTx/>
+              <a:buSzTx/>
+              <a:buFontTx/>
+              <a:buNone/>
+              <a:tabLst/>
+              <a:defRPr/>
+            </a:pPr>
+            <a:r>
+              <a:rPr kumimoji="0" lang="en-US" sz="745" b="0" i="0" u="none" strike="noStrike" kern="1200" cap="none" spc="0" normalizeH="0" baseline="0" noProof="0" dirty="0">
+                <a:ln>
+                  <a:noFill/>
+                </a:ln>
+                <a:solidFill>
+                  <a:srgbClr val="1E293B"/>
+                </a:solidFill>
+                <a:effectLst/>
+                <a:uLnTx/>
+                <a:uFillTx/>
+                <a:latin typeface="Calibri" pitchFamily="34" charset="0"/>
+                <a:ea typeface="Calibri" pitchFamily="34" charset="-122"/>
+                <a:cs typeface="Calibri" pitchFamily="34" charset="-120"/>
+              </a:rPr>
+              <a:t>Main class</a:t>
+            </a:r>
+            <a:endParaRPr kumimoji="0" lang="en-US" sz="745" b="0" i="0" u="none" strike="noStrike" kern="1200" cap="none" spc="0" normalizeH="0" baseline="0" noProof="0" dirty="0">
+              <a:ln>
+                <a:noFill/>
+              </a:ln>
+              <a:solidFill>
+                <a:prstClr val="black"/>
+              </a:solidFill>
+              <a:effectLst/>
+              <a:uLnTx/>
+              <a:uFillTx/>
+              <a:latin typeface="Calibri" panose="020F0502020204030204"/>
+              <a:ea typeface="+mn-ea"/>
+              <a:cs typeface="+mn-cs"/>
+            </a:endParaRPr>
+          </a:p>
+        </p:txBody>
+      </p:sp>
+      <p:sp>
+        <p:nvSpPr>
+          <p:cNvPr id="52" name="Shape 50"/>
+          <p:cNvSpPr/>
+          <p:nvPr/>
+        </p:nvSpPr>
+        <p:spPr>
+          <a:xfrm>
+            <a:off x="548640" y="4142232"/>
+            <a:ext cx="8046720" cy="7315"/>
+          </a:xfrm>
+          <a:prstGeom prst="rect">
+            <a:avLst/>
+          </a:prstGeom>
+          <a:solidFill>
+            <a:srgbClr val="D8DEE6"/>
+          </a:solidFill>
+          <a:ln w="12700">
+            <a:solidFill>
+              <a:srgbClr val="D8DEE6"/>
+            </a:solidFill>
+            <a:prstDash val="solid"/>
+          </a:ln>
+        </p:spPr>
+      </p:sp>
+      <p:sp>
+        <p:nvSpPr>
+          <p:cNvPr id="53" name="Shape 51"/>
+          <p:cNvSpPr/>
+          <p:nvPr/>
+        </p:nvSpPr>
+        <p:spPr>
+          <a:xfrm>
+            <a:off x="548640" y="4242816"/>
+            <a:ext cx="219456" cy="27432"/>
+          </a:xfrm>
+          <a:prstGeom prst="rect">
+            <a:avLst/>
+          </a:prstGeom>
+          <a:solidFill>
+            <a:srgbClr val="1C4E80"/>
+          </a:solidFill>
+          <a:ln w="12700">
+            <a:solidFill>
+              <a:srgbClr val="1C4E80"/>
+            </a:solidFill>
+            <a:prstDash val="solid"/>
+          </a:ln>
+        </p:spPr>
+      </p:sp>
+      <p:sp>
+        <p:nvSpPr>
+          <p:cNvPr id="54" name="Text 52"/>
+          <p:cNvSpPr/>
+          <p:nvPr/>
+        </p:nvSpPr>
+        <p:spPr>
+          <a:xfrm>
+            <a:off x="841248" y="4206240"/>
+            <a:ext cx="941832" cy="228600"/>
+          </a:xfrm>
+          <a:prstGeom prst="rect">
+            <a:avLst/>
+          </a:prstGeom>
+          <a:noFill/>
+          <a:ln/>
+        </p:spPr>
+        <p:txBody>
+          <a:bodyPr wrap="square" lIns="0" tIns="0" rIns="0" bIns="0" rtlCol="0" anchor="ctr">
+            <a:normAutofit/>
+          </a:bodyPr>
+          <a:lstStyle/>
+          <a:p>
+            <a:pPr marL="0" marR="0" lvl="0" indent="0" algn="l" defTabSz="914400" rtl="0" eaLnBrk="1" fontAlgn="auto" latinLnBrk="0" hangingPunct="1">
+              <a:lnSpc>
+                <a:spcPct val="100000"/>
+              </a:lnSpc>
+              <a:spcBef>
+                <a:spcPts val="0"/>
+              </a:spcBef>
+              <a:spcAft>
+                <a:spcPts val="0"/>
+              </a:spcAft>
+              <a:buClrTx/>
+              <a:buSzTx/>
+              <a:buFontTx/>
+              <a:buNone/>
+              <a:tabLst/>
+              <a:defRPr/>
+            </a:pPr>
+            <a:r>
+              <a:rPr kumimoji="0" lang="en-US" sz="830" b="1" i="0" u="none" strike="noStrike" kern="1200" cap="none" spc="0" normalizeH="0" baseline="0" noProof="0" dirty="0">
+                <a:ln>
+                  <a:noFill/>
+                </a:ln>
+                <a:solidFill>
+                  <a:srgbClr val="0F2A44"/>
+                </a:solidFill>
+                <a:effectLst/>
+                <a:uLnTx/>
+                <a:uFillTx/>
+                <a:latin typeface="Calibri" pitchFamily="34" charset="0"/>
+                <a:ea typeface="Calibri" pitchFamily="34" charset="-122"/>
+                <a:cs typeface="Calibri" pitchFamily="34" charset="-120"/>
+              </a:rPr>
+              <a:t>God Service</a:t>
+            </a:r>
+            <a:endParaRPr kumimoji="0" lang="en-US" sz="830" b="0" i="0" u="none" strike="noStrike" kern="1200" cap="none" spc="0" normalizeH="0" baseline="0" noProof="0" dirty="0">
+              <a:ln>
+                <a:noFill/>
+              </a:ln>
+              <a:solidFill>
+                <a:prstClr val="black"/>
+              </a:solidFill>
+              <a:effectLst/>
+              <a:uLnTx/>
+              <a:uFillTx/>
+              <a:latin typeface="Calibri" panose="020F0502020204030204"/>
+              <a:ea typeface="+mn-ea"/>
+              <a:cs typeface="+mn-cs"/>
+            </a:endParaRPr>
+          </a:p>
+        </p:txBody>
+      </p:sp>
+      <p:sp>
+        <p:nvSpPr>
+          <p:cNvPr id="55" name="Text 53"/>
+          <p:cNvSpPr/>
+          <p:nvPr/>
+        </p:nvSpPr>
+        <p:spPr>
+          <a:xfrm>
+            <a:off x="1664208" y="4206240"/>
+            <a:ext cx="4846320" cy="228600"/>
+          </a:xfrm>
+          <a:prstGeom prst="rect">
+            <a:avLst/>
+          </a:prstGeom>
+          <a:noFill/>
+          <a:ln/>
+        </p:spPr>
+        <p:txBody>
+          <a:bodyPr wrap="square" lIns="0" tIns="0" rIns="0" bIns="0" rtlCol="0" anchor="ctr">
+            <a:normAutofit/>
+          </a:bodyPr>
+          <a:lstStyle/>
+          <a:p>
+            <a:pPr marL="0" marR="0" lvl="0" indent="0" algn="l" defTabSz="914400" rtl="0" eaLnBrk="1" fontAlgn="auto" latinLnBrk="0" hangingPunct="1">
+              <a:lnSpc>
+                <a:spcPct val="100000"/>
+              </a:lnSpc>
+              <a:spcBef>
+                <a:spcPts val="0"/>
+              </a:spcBef>
+              <a:spcAft>
+                <a:spcPts val="0"/>
+              </a:spcAft>
+              <a:buClrTx/>
+              <a:buSzTx/>
+              <a:buFontTx/>
+              <a:buNone/>
+              <a:tabLst/>
+              <a:defRPr/>
+            </a:pPr>
+            <a:r>
+              <a:rPr kumimoji="0" lang="en-US" sz="745" b="0" i="0" u="none" strike="noStrike" kern="1200" cap="none" spc="0" normalizeH="0" baseline="0" noProof="0" dirty="0">
+                <a:ln>
+                  <a:noFill/>
+                </a:ln>
+                <a:solidFill>
+                  <a:srgbClr val="1E293B"/>
+                </a:solidFill>
+                <a:effectLst/>
+                <a:uLnTx/>
+                <a:uFillTx/>
+                <a:latin typeface="Calibri" pitchFamily="34" charset="0"/>
+                <a:ea typeface="Calibri" pitchFamily="34" charset="-122"/>
+                <a:cs typeface="Calibri" pitchFamily="34" charset="-120"/>
+              </a:rPr>
+              <a:t>Use Spoon class metrics; one class exceeding at least 3 of 6 God-Class thresholds flags the service.</a:t>
+            </a:r>
+            <a:endParaRPr kumimoji="0" lang="en-US" sz="745" b="0" i="0" u="none" strike="noStrike" kern="1200" cap="none" spc="0" normalizeH="0" baseline="0" noProof="0" dirty="0">
+              <a:ln>
+                <a:noFill/>
+              </a:ln>
+              <a:solidFill>
+                <a:prstClr val="black"/>
+              </a:solidFill>
+              <a:effectLst/>
+              <a:uLnTx/>
+              <a:uFillTx/>
+              <a:latin typeface="Calibri" panose="020F0502020204030204"/>
+              <a:ea typeface="+mn-ea"/>
+              <a:cs typeface="+mn-cs"/>
+            </a:endParaRPr>
+          </a:p>
+        </p:txBody>
+      </p:sp>
+      <p:sp>
+        <p:nvSpPr>
+          <p:cNvPr id="56" name="Text 54"/>
+          <p:cNvSpPr/>
+          <p:nvPr/>
+        </p:nvSpPr>
+        <p:spPr>
+          <a:xfrm>
+            <a:off x="6720840" y="4206240"/>
+            <a:ext cx="1874520" cy="228600"/>
+          </a:xfrm>
+          <a:prstGeom prst="rect">
+            <a:avLst/>
+          </a:prstGeom>
+          <a:noFill/>
+          <a:ln/>
+        </p:spPr>
+        <p:txBody>
+          <a:bodyPr wrap="square" lIns="0" tIns="0" rIns="0" bIns="0" rtlCol="0" anchor="ctr">
+            <a:normAutofit/>
+          </a:bodyPr>
+          <a:lstStyle/>
+          <a:p>
+            <a:pPr marL="0" marR="0" lvl="0" indent="0" algn="l" defTabSz="914400" rtl="0" eaLnBrk="1" fontAlgn="auto" latinLnBrk="0" hangingPunct="1">
+              <a:lnSpc>
+                <a:spcPct val="100000"/>
+              </a:lnSpc>
+              <a:spcBef>
+                <a:spcPts val="0"/>
+              </a:spcBef>
+              <a:spcAft>
+                <a:spcPts val="0"/>
+              </a:spcAft>
+              <a:buClrTx/>
+              <a:buSzTx/>
+              <a:buFontTx/>
+              <a:buNone/>
+              <a:tabLst/>
+              <a:defRPr/>
+            </a:pPr>
+            <a:r>
+              <a:rPr kumimoji="0" lang="en-US" sz="745" b="0" i="0" u="none" strike="noStrike" kern="1200" cap="none" spc="0" normalizeH="0" baseline="0" noProof="0" dirty="0">
+                <a:ln>
+                  <a:noFill/>
+                </a:ln>
+                <a:solidFill>
+                  <a:srgbClr val="1E293B"/>
+                </a:solidFill>
+                <a:effectLst/>
+                <a:uLnTx/>
+                <a:uFillTx/>
+                <a:latin typeface="Calibri" pitchFamily="34" charset="0"/>
+                <a:ea typeface="Calibri" pitchFamily="34" charset="-122"/>
+                <a:cs typeface="Calibri" pitchFamily="34" charset="-120"/>
+              </a:rPr>
+              <a:t>Class metrics</a:t>
+            </a:r>
+            <a:endParaRPr kumimoji="0" lang="en-US" sz="745" b="0" i="0" u="none" strike="noStrike" kern="1200" cap="none" spc="0" normalizeH="0" baseline="0" noProof="0" dirty="0">
+              <a:ln>
+                <a:noFill/>
+              </a:ln>
+              <a:solidFill>
+                <a:prstClr val="black"/>
+              </a:solidFill>
+              <a:effectLst/>
+              <a:uLnTx/>
+              <a:uFillTx/>
+              <a:latin typeface="Calibri" panose="020F0502020204030204"/>
+              <a:ea typeface="+mn-ea"/>
+              <a:cs typeface="+mn-cs"/>
+            </a:endParaRPr>
+          </a:p>
+        </p:txBody>
+      </p:sp>
+      <p:sp>
+        <p:nvSpPr>
+          <p:cNvPr id="57" name="Shape 55"/>
+          <p:cNvSpPr/>
+          <p:nvPr/>
+        </p:nvSpPr>
+        <p:spPr>
+          <a:xfrm>
+            <a:off x="548640" y="4453128"/>
+            <a:ext cx="8046720" cy="7315"/>
+          </a:xfrm>
+          <a:prstGeom prst="rect">
+            <a:avLst/>
+          </a:prstGeom>
+          <a:solidFill>
+            <a:srgbClr val="D8DEE6"/>
+          </a:solidFill>
+          <a:ln w="12700">
+            <a:solidFill>
+              <a:srgbClr val="D8DEE6"/>
+            </a:solidFill>
+            <a:prstDash val="solid"/>
+          </a:ln>
+        </p:spPr>
+      </p:sp>
+      <p:sp>
+        <p:nvSpPr>
+          <p:cNvPr id="60" name="Text 58"/>
           <p:cNvSpPr/>
           <p:nvPr/>
         </p:nvSpPr>
@@ -25415,7 +27157,24 @@
                 <a:ea typeface="Calibri" pitchFamily="34" charset="-122"/>
                 <a:cs typeface="Calibri" pitchFamily="34" charset="-120"/>
               </a:rPr>
-              <a:t>Appendix J</a:t>
+              <a:t>Appendix </a:t>
+            </a:r>
+            <a:r>
+              <a:rPr kumimoji="0" lang="ro-RO" sz="900" b="0" i="0" u="none" strike="noStrike" kern="1200" cap="none" spc="0" normalizeH="0" baseline="0" noProof="0" dirty="0">
+                <a:ln>
+                  <a:noFill/>
+                </a:ln>
+                <a:solidFill>
+                  <a:srgbClr val="64748B"/>
+                </a:solidFill>
+                <a:effectLst/>
+                <a:uLnTx/>
+                <a:uFillTx/>
+                <a:latin typeface="Calibri" pitchFamily="34" charset="0"/>
+                <a:ea typeface="Calibri" pitchFamily="34" charset="-122"/>
+                <a:cs typeface="Calibri" pitchFamily="34" charset="-120"/>
+              </a:rPr>
+              <a:t>I</a:t>
             </a:r>
             <a:endParaRPr kumimoji="0" lang="en-US" sz="900" b="0" i="0" u="none" strike="noStrike" kern="1200" cap="none" spc="0" normalizeH="0" baseline="0" noProof="0" dirty="0">
               <a:ln>
@@ -25520,7 +27279,7 @@
                 <a:ea typeface="Calibri" pitchFamily="34" charset="-122"/>
                 <a:cs typeface="Calibri" pitchFamily="34" charset="-120"/>
               </a:rPr>
-              <a:t>Annex: service boundary detection</a:t>
+              <a:t>Annex: graph analysis terms</a:t>
             </a:r>
             <a:endParaRPr kumimoji="0" lang="en-US" sz="2500" b="0" i="0" u="none" strike="noStrike" kern="1200" cap="none" spc="0" normalizeH="0" baseline="0" noProof="0" dirty="0">
               <a:ln>
@@ -25572,8 +27331,8 @@
         </p:nvSpPr>
         <p:spPr>
           <a:xfrm>
-            <a:off x="548640" y="987552"/>
-            <a:ext cx="3749040" cy="274320"/>
+            <a:off x="548640" y="1024128"/>
+            <a:ext cx="3703320" cy="228600"/>
           </a:xfrm>
           <a:prstGeom prst="rect">
             <a:avLst/>
@@ -25603,7 +27362,7 @@
               <a:defRPr/>
             </a:pPr>
             <a:r>
-              <a:rPr kumimoji="0" lang="en-US" sz="1300" b="1" i="0" u="none" strike="noStrike" kern="1200" cap="none" spc="0" normalizeH="0" baseline="0" noProof="0" dirty="0">
+              <a:rPr kumimoji="0" lang="en-US" sz="1070" b="1" i="0" u="none" strike="noStrike" kern="1200" cap="none" spc="0" normalizeH="0" baseline="0" noProof="0" dirty="0">
                 <a:ln>
                   <a:noFill/>
                 </a:ln>
@@ -25617,9 +27376,9 @@
                 <a:ea typeface="Calibri" pitchFamily="34" charset="-122"/>
                 <a:cs typeface="Calibri" pitchFamily="34" charset="-120"/>
               </a:rPr>
-              <a:t>Candidate modules</a:t>
-            </a:r>
-            <a:endParaRPr kumimoji="0" lang="en-US" sz="1300" b="0" i="0" u="none" strike="noStrike" kern="1200" cap="none" spc="0" normalizeH="0" baseline="0" noProof="0" dirty="0">
+              <a:t>Directed dependency graph</a:t>
+            </a:r>
+            <a:endParaRPr kumimoji="0" lang="en-US" sz="1070" b="0" i="0" u="none" strike="noStrike" kern="1200" cap="none" spc="0" normalizeH="0" baseline="0" noProof="0" dirty="0">
               <a:ln>
                 <a:noFill/>
               </a:ln>
@@ -25644,189 +27403,19 @@
         </p:nvSpPr>
         <p:spPr>
           <a:xfrm>
-            <a:off x="713232" y="1371600"/>
-            <a:ext cx="3657600" cy="1051560"/>
-          </a:xfrm>
-          <a:prstGeom prst="rect">
-            <a:avLst/>
-          </a:prstGeom>
-          <a:noFill/>
-          <a:ln/>
-        </p:spPr>
-        <p:txBody>
-          <a:bodyPr wrap="square" lIns="0" tIns="0" rIns="0" bIns="0" rtlCol="0" anchor="ctr"/>
-          <a:lstStyle/>
-          <a:p>
-            <a:pPr marL="342900" marR="0" lvl="0" indent="-342900" algn="l" defTabSz="914400" rtl="0" eaLnBrk="1" fontAlgn="auto" latinLnBrk="0" hangingPunct="1">
-              <a:lnSpc>
-                <a:spcPct val="100000"/>
-              </a:lnSpc>
-              <a:spcBef>
-                <a:spcPts val="0"/>
-              </a:spcBef>
-              <a:spcAft>
-                <a:spcPts val="400"/>
-              </a:spcAft>
-              <a:buClrTx/>
-              <a:buSzPct val="100000"/>
-              <a:buFontTx/>
-              <a:buChar char="•"/>
-              <a:tabLst/>
-              <a:defRPr/>
-            </a:pPr>
-            <a:r>
-              <a:rPr kumimoji="0" lang="en-US" sz="1050" b="0" i="0" u="none" strike="noStrike" kern="1200" cap="none" spc="0" normalizeH="0" baseline="0" noProof="0" dirty="0">
-                <a:ln>
-                  <a:noFill/>
-                </a:ln>
-                <a:solidFill>
-                  <a:srgbClr val="1E293B"/>
-                </a:solidFill>
-                <a:effectLst/>
-                <a:uLnTx/>
-                <a:uFillTx/>
-                <a:latin typeface="Calibri" pitchFamily="34" charset="0"/>
-                <a:ea typeface="Calibri" pitchFamily="34" charset="-122"/>
-                <a:cs typeface="Calibri" pitchFamily="34" charset="-120"/>
-              </a:rPr>
-              <a:t>Scan repository for Maven/Gradle build files</a:t>
-            </a:r>
-            <a:endParaRPr kumimoji="0" lang="en-US" sz="1050" b="0" i="0" u="none" strike="noStrike" kern="1200" cap="none" spc="0" normalizeH="0" baseline="0" noProof="0" dirty="0">
-              <a:ln>
-                <a:noFill/>
-              </a:ln>
-              <a:solidFill>
-                <a:prstClr val="black"/>
-              </a:solidFill>
-              <a:effectLst/>
-              <a:uLnTx/>
-              <a:uFillTx/>
-              <a:latin typeface="Calibri" panose="020F0502020204030204"/>
-              <a:ea typeface="+mn-ea"/>
-              <a:cs typeface="+mn-cs"/>
-            </a:endParaRPr>
-          </a:p>
-          <a:p>
-            <a:pPr marL="342900" marR="0" lvl="0" indent="-342900" algn="l" defTabSz="914400" rtl="0" eaLnBrk="1" fontAlgn="auto" latinLnBrk="0" hangingPunct="1">
-              <a:lnSpc>
-                <a:spcPct val="100000"/>
-              </a:lnSpc>
-              <a:spcBef>
-                <a:spcPts val="0"/>
-              </a:spcBef>
-              <a:spcAft>
-                <a:spcPts val="400"/>
-              </a:spcAft>
-              <a:buClrTx/>
-              <a:buSzPct val="100000"/>
-              <a:buFontTx/>
-              <a:buChar char="•"/>
-              <a:tabLst/>
-              <a:defRPr/>
-            </a:pPr>
-            <a:r>
-              <a:rPr kumimoji="0" lang="en-US" sz="1050" b="0" i="0" u="none" strike="noStrike" kern="1200" cap="none" spc="0" normalizeH="0" baseline="0" noProof="0" dirty="0">
-                <a:ln>
-                  <a:noFill/>
-                </a:ln>
-                <a:solidFill>
-                  <a:srgbClr val="1E293B"/>
-                </a:solidFill>
-                <a:effectLst/>
-                <a:uLnTx/>
-                <a:uFillTx/>
-                <a:latin typeface="Calibri" pitchFamily="34" charset="0"/>
-                <a:ea typeface="Calibri" pitchFamily="34" charset="-122"/>
-                <a:cs typeface="Calibri" pitchFamily="34" charset="-120"/>
-              </a:rPr>
-              <a:t>Exclude aggregators, generated modules, examples, docs, and tests</a:t>
-            </a:r>
-            <a:endParaRPr kumimoji="0" lang="en-US" sz="1050" b="0" i="0" u="none" strike="noStrike" kern="1200" cap="none" spc="0" normalizeH="0" baseline="0" noProof="0" dirty="0">
-              <a:ln>
-                <a:noFill/>
-              </a:ln>
-              <a:solidFill>
-                <a:prstClr val="black"/>
-              </a:solidFill>
-              <a:effectLst/>
-              <a:uLnTx/>
-              <a:uFillTx/>
-              <a:latin typeface="Calibri" panose="020F0502020204030204"/>
-              <a:ea typeface="+mn-ea"/>
-              <a:cs typeface="+mn-cs"/>
-            </a:endParaRPr>
-          </a:p>
-          <a:p>
-            <a:pPr marL="342900" marR="0" lvl="0" indent="-342900" algn="l" defTabSz="914400" rtl="0" eaLnBrk="1" fontAlgn="auto" latinLnBrk="0" hangingPunct="1">
-              <a:lnSpc>
-                <a:spcPct val="100000"/>
-              </a:lnSpc>
-              <a:spcBef>
-                <a:spcPts val="0"/>
-              </a:spcBef>
-              <a:spcAft>
-                <a:spcPts val="400"/>
-              </a:spcAft>
-              <a:buClrTx/>
-              <a:buSzPct val="100000"/>
-              <a:buFontTx/>
-              <a:buChar char="•"/>
-              <a:tabLst/>
-              <a:defRPr/>
-            </a:pPr>
-            <a:r>
-              <a:rPr kumimoji="0" lang="en-US" sz="1050" b="0" i="0" u="none" strike="noStrike" kern="1200" cap="none" spc="0" normalizeH="0" baseline="0" noProof="0" dirty="0">
-                <a:ln>
-                  <a:noFill/>
-                </a:ln>
-                <a:solidFill>
-                  <a:srgbClr val="1E293B"/>
-                </a:solidFill>
-                <a:effectLst/>
-                <a:uLnTx/>
-                <a:uFillTx/>
-                <a:latin typeface="Calibri" pitchFamily="34" charset="0"/>
-                <a:ea typeface="Calibri" pitchFamily="34" charset="-122"/>
-                <a:cs typeface="Calibri" pitchFamily="34" charset="-120"/>
-              </a:rPr>
-              <a:t>Keep modules with at least one deployability signal</a:t>
-            </a:r>
-            <a:endParaRPr kumimoji="0" lang="en-US" sz="1050" b="0" i="0" u="none" strike="noStrike" kern="1200" cap="none" spc="0" normalizeH="0" baseline="0" noProof="0" dirty="0">
-              <a:ln>
-                <a:noFill/>
-              </a:ln>
-              <a:solidFill>
-                <a:prstClr val="black"/>
-              </a:solidFill>
-              <a:effectLst/>
-              <a:uLnTx/>
-              <a:uFillTx/>
-              <a:latin typeface="Calibri" panose="020F0502020204030204"/>
-              <a:ea typeface="+mn-ea"/>
-              <a:cs typeface="+mn-cs"/>
-            </a:endParaRPr>
-          </a:p>
-        </p:txBody>
-      </p:sp>
-      <p:sp>
-        <p:nvSpPr>
-          <p:cNvPr id="6" name="Text 4"/>
-          <p:cNvSpPr/>
-          <p:nvPr/>
-        </p:nvSpPr>
-        <p:spPr>
-          <a:xfrm>
-            <a:off x="4617720" y="987552"/>
-            <a:ext cx="3977640" cy="274320"/>
-          </a:xfrm>
-          <a:prstGeom prst="rect">
-            <a:avLst/>
-          </a:prstGeom>
-          <a:noFill/>
-          <a:ln/>
-        </p:spPr>
-        <p:txBody>
-          <a:bodyPr wrap="square" lIns="0" tIns="0" rIns="0" bIns="0" rtlCol="0" anchor="ctr"/>
+            <a:off x="548640" y="1280160"/>
+            <a:ext cx="3703320" cy="384048"/>
+          </a:xfrm>
+          <a:prstGeom prst="rect">
+            <a:avLst/>
+          </a:prstGeom>
+          <a:noFill/>
+          <a:ln/>
+        </p:spPr>
+        <p:txBody>
+          <a:bodyPr wrap="square" lIns="0" tIns="0" rIns="0" bIns="0" rtlCol="0" anchor="ctr">
+            <a:normAutofit/>
+          </a:bodyPr>
           <a:lstStyle/>
           <a:p>
             <a:pPr marL="0" marR="0" lvl="0" indent="0" algn="l" defTabSz="914400" rtl="0" eaLnBrk="1" fontAlgn="auto" latinLnBrk="0" hangingPunct="1">
@@ -25847,12 +27436,12 @@
               <a:defRPr/>
             </a:pPr>
             <a:r>
-              <a:rPr kumimoji="0" lang="en-US" sz="1300" b="1" i="0" u="none" strike="noStrike" kern="1200" cap="none" spc="0" normalizeH="0" baseline="0" noProof="0" dirty="0">
+              <a:rPr kumimoji="0" lang="en-US" sz="880" b="0" i="0" u="none" strike="noStrike" kern="1200" cap="none" spc="0" normalizeH="0" baseline="0" noProof="0" dirty="0">
                 <a:ln>
                   <a:noFill/>
                 </a:ln>
                 <a:solidFill>
-                  <a:srgbClr val="0F2A44"/>
+                  <a:srgbClr val="1E293B"/>
                 </a:solidFill>
                 <a:effectLst/>
                 <a:uLnTx/>
@@ -25861,104 +27450,7 @@
                 <a:ea typeface="Calibri" pitchFamily="34" charset="-122"/>
                 <a:cs typeface="Calibri" pitchFamily="34" charset="-120"/>
               </a:rPr>
-              <a:t>Deployability gate</a:t>
-            </a:r>
-            <a:endParaRPr kumimoji="0" lang="en-US" sz="1300" b="0" i="0" u="none" strike="noStrike" kern="1200" cap="none" spc="0" normalizeH="0" baseline="0" noProof="0" dirty="0">
-              <a:ln>
-                <a:noFill/>
-              </a:ln>
-              <a:solidFill>
-                <a:prstClr val="black"/>
-              </a:solidFill>
-              <a:effectLst/>
-              <a:uLnTx/>
-              <a:uFillTx/>
-              <a:latin typeface="Calibri" panose="020F0502020204030204"/>
-              <a:ea typeface="+mn-ea"/>
-              <a:cs typeface="+mn-cs"/>
-            </a:endParaRPr>
-          </a:p>
-        </p:txBody>
-      </p:sp>
-      <p:sp>
-        <p:nvSpPr>
-          <p:cNvPr id="7" name="Shape 5"/>
-          <p:cNvSpPr/>
-          <p:nvPr/>
-        </p:nvSpPr>
-        <p:spPr>
-          <a:xfrm>
-            <a:off x="4617720" y="1399032"/>
-            <a:ext cx="347472" cy="36576"/>
-          </a:xfrm>
-          <a:prstGeom prst="rect">
-            <a:avLst/>
-          </a:prstGeom>
-          <a:solidFill>
-            <a:srgbClr val="059669"/>
-          </a:solidFill>
-          <a:ln w="12700">
-            <a:solidFill>
-              <a:srgbClr val="059669"/>
-            </a:solidFill>
-            <a:prstDash val="solid"/>
-          </a:ln>
-        </p:spPr>
-      </p:sp>
-      <p:sp>
-        <p:nvSpPr>
-          <p:cNvPr id="8" name="Text 6"/>
-          <p:cNvSpPr/>
-          <p:nvPr/>
-        </p:nvSpPr>
-        <p:spPr>
-          <a:xfrm>
-            <a:off x="4617720" y="1517904"/>
-            <a:ext cx="731520" cy="219456"/>
-          </a:xfrm>
-          <a:prstGeom prst="rect">
-            <a:avLst/>
-          </a:prstGeom>
-          <a:noFill/>
-          <a:ln/>
-        </p:spPr>
-        <p:txBody>
-          <a:bodyPr wrap="square" lIns="0" tIns="0" rIns="0" bIns="0" rtlCol="0" anchor="ctr"/>
-          <a:lstStyle/>
-          <a:p>
-            <a:pPr marL="0" marR="0" lvl="0" indent="0" algn="l" defTabSz="914400" rtl="0" eaLnBrk="1" fontAlgn="auto" latinLnBrk="0" hangingPunct="1">
-              <a:lnSpc>
-                <a:spcPct val="100000"/>
-              </a:lnSpc>
-              <a:spcBef>
-                <a:spcPts val="0"/>
-              </a:spcBef>
-              <a:spcAft>
-                <a:spcPts val="0"/>
-              </a:spcAft>
-              <a:buClrTx/>
-              <a:buSzTx/>
-              <a:buFontTx/>
-              <a:buNone/>
-              <a:tabLst/>
-              <a:defRPr/>
-            </a:pPr>
-            <a:r>
-              <a:rPr kumimoji="0" lang="en-US" sz="880" b="1" i="0" u="none" strike="noStrike" kern="1200" cap="none" spc="0" normalizeH="0" baseline="0" noProof="0" dirty="0">
-                <a:ln>
-                  <a:noFill/>
-                </a:ln>
-                <a:solidFill>
-                  <a:srgbClr val="059669"/>
-                </a:solidFill>
-                <a:effectLst/>
-                <a:uLnTx/>
-                <a:uFillTx/>
-                <a:latin typeface="Calibri" pitchFamily="34" charset="0"/>
-                <a:ea typeface="Calibri" pitchFamily="34" charset="-122"/>
-                <a:cs typeface="Calibri" pitchFamily="34" charset="-120"/>
-              </a:rPr>
-              <a:t>HIGH</a:t>
+              <a:t>G = (V, E), where V is the set of detected services and E contains directed calls between services.</a:t>
             </a:r>
             <a:endParaRPr kumimoji="0" lang="en-US" sz="880" b="0" i="0" u="none" strike="noStrike" kern="1200" cap="none" spc="0" normalizeH="0" baseline="0" noProof="0" dirty="0">
               <a:ln>
@@ -25979,14 +27471,39 @@
       </p:sp>
       <p:sp>
         <p:nvSpPr>
-          <p:cNvPr id="9" name="Text 7"/>
-          <p:cNvSpPr/>
-          <p:nvPr/>
-        </p:nvSpPr>
-        <p:spPr>
-          <a:xfrm>
-            <a:off x="5440680" y="1371600"/>
-            <a:ext cx="3154680" cy="228600"/>
+          <p:cNvPr id="6" name="Shape 4"/>
+          <p:cNvSpPr/>
+          <p:nvPr/>
+        </p:nvSpPr>
+        <p:spPr>
+          <a:xfrm>
+            <a:off x="548640" y="1737360"/>
+            <a:ext cx="3703320" cy="9144"/>
+          </a:xfrm>
+          <a:prstGeom prst="rect">
+            <a:avLst/>
+          </a:prstGeom>
+          <a:solidFill>
+            <a:srgbClr val="D8DEE6"/>
+          </a:solidFill>
+          <a:ln w="12700">
+            <a:solidFill>
+              <a:srgbClr val="D8DEE6"/>
+            </a:solidFill>
+            <a:prstDash val="solid"/>
+          </a:ln>
+        </p:spPr>
+      </p:sp>
+      <p:sp>
+        <p:nvSpPr>
+          <p:cNvPr id="7" name="Text 5"/>
+          <p:cNvSpPr/>
+          <p:nvPr/>
+        </p:nvSpPr>
+        <p:spPr>
+          <a:xfrm>
+            <a:off x="548640" y="1865376"/>
+            <a:ext cx="3703320" cy="228600"/>
           </a:xfrm>
           <a:prstGeom prst="rect">
             <a:avLst/>
@@ -26016,7 +27533,7 @@
               <a:defRPr/>
             </a:pPr>
             <a:r>
-              <a:rPr kumimoji="0" lang="en-US" sz="1050" b="1" i="0" u="none" strike="noStrike" kern="1200" cap="none" spc="0" normalizeH="0" baseline="0" noProof="0" dirty="0">
+              <a:rPr kumimoji="0" lang="en-US" sz="1070" b="1" i="0" u="none" strike="noStrike" kern="1200" cap="none" spc="0" normalizeH="0" baseline="0" noProof="0" dirty="0">
                 <a:ln>
                   <a:noFill/>
                 </a:ln>
@@ -26030,9 +27547,9 @@
                 <a:ea typeface="Calibri" pitchFamily="34" charset="-122"/>
                 <a:cs typeface="Calibri" pitchFamily="34" charset="-120"/>
               </a:rPr>
-              <a:t>Spring Boot entry point</a:t>
-            </a:r>
-            <a:endParaRPr kumimoji="0" lang="en-US" sz="1050" b="0" i="0" u="none" strike="noStrike" kern="1200" cap="none" spc="0" normalizeH="0" baseline="0" noProof="0" dirty="0">
+              <a:t>Edge weight</a:t>
+            </a:r>
+            <a:endParaRPr kumimoji="0" lang="en-US" sz="1070" b="0" i="0" u="none" strike="noStrike" kern="1200" cap="none" spc="0" normalizeH="0" baseline="0" noProof="0" dirty="0">
               <a:ln>
                 <a:noFill/>
               </a:ln>
@@ -26051,14 +27568,14 @@
       </p:sp>
       <p:sp>
         <p:nvSpPr>
-          <p:cNvPr id="10" name="Text 8"/>
-          <p:cNvSpPr/>
-          <p:nvPr/>
-        </p:nvSpPr>
-        <p:spPr>
-          <a:xfrm>
-            <a:off x="5440680" y="1618488"/>
-            <a:ext cx="3154680" cy="292608"/>
+          <p:cNvPr id="8" name="Text 6"/>
+          <p:cNvSpPr/>
+          <p:nvPr/>
+        </p:nvSpPr>
+        <p:spPr>
+          <a:xfrm>
+            <a:off x="548640" y="2121408"/>
+            <a:ext cx="3703320" cy="384048"/>
           </a:xfrm>
           <a:prstGeom prst="rect">
             <a:avLst/>
@@ -26090,7 +27607,7 @@
               <a:defRPr/>
             </a:pPr>
             <a:r>
-              <a:rPr kumimoji="0" lang="en-US" sz="890" b="0" i="0" u="none" strike="noStrike" kern="1200" cap="none" spc="0" normalizeH="0" baseline="0" noProof="0" dirty="0">
+              <a:rPr kumimoji="0" lang="en-US" sz="880" b="0" i="0" u="none" strike="noStrike" kern="1200" cap="none" spc="0" normalizeH="0" baseline="0" noProof="0" dirty="0">
                 <a:ln>
                   <a:noFill/>
                 </a:ln>
@@ -26104,129 +27621,7 @@
                 <a:ea typeface="Calibri" pitchFamily="34" charset="-122"/>
                 <a:cs typeface="Calibri" pitchFamily="34" charset="-120"/>
               </a:rPr>
-              <a:t>@SpringBootApplication / framework annotation</a:t>
-            </a:r>
-            <a:endParaRPr kumimoji="0" lang="en-US" sz="890" b="0" i="0" u="none" strike="noStrike" kern="1200" cap="none" spc="0" normalizeH="0" baseline="0" noProof="0" dirty="0">
-              <a:ln>
-                <a:noFill/>
-              </a:ln>
-              <a:solidFill>
-                <a:prstClr val="black"/>
-              </a:solidFill>
-              <a:effectLst/>
-              <a:uLnTx/>
-              <a:uFillTx/>
-              <a:latin typeface="Calibri" panose="020F0502020204030204"/>
-              <a:ea typeface="+mn-ea"/>
-              <a:cs typeface="+mn-cs"/>
-            </a:endParaRPr>
-          </a:p>
-        </p:txBody>
-      </p:sp>
-      <p:sp>
-        <p:nvSpPr>
-          <p:cNvPr id="11" name="Shape 9"/>
-          <p:cNvSpPr/>
-          <p:nvPr/>
-        </p:nvSpPr>
-        <p:spPr>
-          <a:xfrm>
-            <a:off x="4617720" y="1938528"/>
-            <a:ext cx="3977640" cy="9144"/>
-          </a:xfrm>
-          <a:prstGeom prst="rect">
-            <a:avLst/>
-          </a:prstGeom>
-          <a:solidFill>
-            <a:srgbClr val="D8DEE6"/>
-          </a:solidFill>
-          <a:ln w="12700">
-            <a:solidFill>
-              <a:srgbClr val="D8DEE6"/>
-            </a:solidFill>
-            <a:prstDash val="solid"/>
-          </a:ln>
-        </p:spPr>
-      </p:sp>
-      <p:sp>
-        <p:nvSpPr>
-          <p:cNvPr id="12" name="Shape 10"/>
-          <p:cNvSpPr/>
-          <p:nvPr/>
-        </p:nvSpPr>
-        <p:spPr>
-          <a:xfrm>
-            <a:off x="4617720" y="2057400"/>
-            <a:ext cx="347472" cy="36576"/>
-          </a:xfrm>
-          <a:prstGeom prst="rect">
-            <a:avLst/>
-          </a:prstGeom>
-          <a:solidFill>
-            <a:srgbClr val="0D9488"/>
-          </a:solidFill>
-          <a:ln w="12700">
-            <a:solidFill>
-              <a:srgbClr val="0D9488"/>
-            </a:solidFill>
-            <a:prstDash val="solid"/>
-          </a:ln>
-        </p:spPr>
-      </p:sp>
-      <p:sp>
-        <p:nvSpPr>
-          <p:cNvPr id="13" name="Text 11"/>
-          <p:cNvSpPr/>
-          <p:nvPr/>
-        </p:nvSpPr>
-        <p:spPr>
-          <a:xfrm>
-            <a:off x="4617720" y="2176272"/>
-            <a:ext cx="731520" cy="219456"/>
-          </a:xfrm>
-          <a:prstGeom prst="rect">
-            <a:avLst/>
-          </a:prstGeom>
-          <a:noFill/>
-          <a:ln/>
-        </p:spPr>
-        <p:txBody>
-          <a:bodyPr wrap="square" lIns="0" tIns="0" rIns="0" bIns="0" rtlCol="0" anchor="ctr"/>
-          <a:lstStyle/>
-          <a:p>
-            <a:pPr marL="0" marR="0" lvl="0" indent="0" algn="l" defTabSz="914400" rtl="0" eaLnBrk="1" fontAlgn="auto" latinLnBrk="0" hangingPunct="1">
-              <a:lnSpc>
-                <a:spcPct val="100000"/>
-              </a:lnSpc>
-              <a:spcBef>
-                <a:spcPts val="0"/>
-              </a:spcBef>
-              <a:spcAft>
-                <a:spcPts val="0"/>
-              </a:spcAft>
-              <a:buClrTx/>
-              <a:buSzTx/>
-              <a:buFontTx/>
-              <a:buNone/>
-              <a:tabLst/>
-              <a:defRPr/>
-            </a:pPr>
-            <a:r>
-              <a:rPr kumimoji="0" lang="en-US" sz="880" b="1" i="0" u="none" strike="noStrike" kern="1200" cap="none" spc="0" normalizeH="0" baseline="0" noProof="0" dirty="0">
-                <a:ln>
-                  <a:noFill/>
-                </a:ln>
-                <a:solidFill>
-                  <a:srgbClr val="0D9488"/>
-                </a:solidFill>
-                <a:effectLst/>
-                <a:uLnTx/>
-                <a:uFillTx/>
-                <a:latin typeface="Calibri" pitchFamily="34" charset="0"/>
-                <a:ea typeface="Calibri" pitchFamily="34" charset="-122"/>
-                <a:cs typeface="Calibri" pitchFamily="34" charset="-120"/>
-              </a:rPr>
-              <a:t>MEDIUM</a:t>
+              <a:t>The number of distinct source-level call sites from one service to another.</a:t>
             </a:r>
             <a:endParaRPr kumimoji="0" lang="en-US" sz="880" b="0" i="0" u="none" strike="noStrike" kern="1200" cap="none" spc="0" normalizeH="0" baseline="0" noProof="0" dirty="0">
               <a:ln>
@@ -26247,14 +27642,39 @@
       </p:sp>
       <p:sp>
         <p:nvSpPr>
-          <p:cNvPr id="14" name="Text 12"/>
-          <p:cNvSpPr/>
-          <p:nvPr/>
-        </p:nvSpPr>
-        <p:spPr>
-          <a:xfrm>
-            <a:off x="5440680" y="2029968"/>
-            <a:ext cx="3154680" cy="228600"/>
+          <p:cNvPr id="9" name="Shape 7"/>
+          <p:cNvSpPr/>
+          <p:nvPr/>
+        </p:nvSpPr>
+        <p:spPr>
+          <a:xfrm>
+            <a:off x="548640" y="2578608"/>
+            <a:ext cx="3703320" cy="9144"/>
+          </a:xfrm>
+          <a:prstGeom prst="rect">
+            <a:avLst/>
+          </a:prstGeom>
+          <a:solidFill>
+            <a:srgbClr val="D8DEE6"/>
+          </a:solidFill>
+          <a:ln w="12700">
+            <a:solidFill>
+              <a:srgbClr val="D8DEE6"/>
+            </a:solidFill>
+            <a:prstDash val="solid"/>
+          </a:ln>
+        </p:spPr>
+      </p:sp>
+      <p:sp>
+        <p:nvSpPr>
+          <p:cNvPr id="10" name="Text 8"/>
+          <p:cNvSpPr/>
+          <p:nvPr/>
+        </p:nvSpPr>
+        <p:spPr>
+          <a:xfrm>
+            <a:off x="548640" y="2706624"/>
+            <a:ext cx="3703320" cy="228600"/>
           </a:xfrm>
           <a:prstGeom prst="rect">
             <a:avLst/>
@@ -26284,7 +27704,7 @@
               <a:defRPr/>
             </a:pPr>
             <a:r>
-              <a:rPr kumimoji="0" lang="en-US" sz="1050" b="1" i="0" u="none" strike="noStrike" kern="1200" cap="none" spc="0" normalizeH="0" baseline="0" noProof="0" dirty="0">
+              <a:rPr kumimoji="0" lang="en-US" sz="1070" b="1" i="0" u="none" strike="noStrike" kern="1200" cap="none" spc="0" normalizeH="0" baseline="0" noProof="0" dirty="0">
                 <a:ln>
                   <a:noFill/>
                 </a:ln>
@@ -26298,9 +27718,9 @@
                 <a:ea typeface="Calibri" pitchFamily="34" charset="-122"/>
                 <a:cs typeface="Calibri" pitchFamily="34" charset="-120"/>
               </a:rPr>
-              <a:t>Dockerfile</a:t>
-            </a:r>
-            <a:endParaRPr kumimoji="0" lang="en-US" sz="1050" b="0" i="0" u="none" strike="noStrike" kern="1200" cap="none" spc="0" normalizeH="0" baseline="0" noProof="0" dirty="0">
+              <a:t>Strongly connected component</a:t>
+            </a:r>
+            <a:endParaRPr kumimoji="0" lang="en-US" sz="1070" b="0" i="0" u="none" strike="noStrike" kern="1200" cap="none" spc="0" normalizeH="0" baseline="0" noProof="0" dirty="0">
               <a:ln>
                 <a:noFill/>
               </a:ln>
@@ -26319,14 +27739,14 @@
       </p:sp>
       <p:sp>
         <p:nvSpPr>
-          <p:cNvPr id="15" name="Text 13"/>
-          <p:cNvSpPr/>
-          <p:nvPr/>
-        </p:nvSpPr>
-        <p:spPr>
-          <a:xfrm>
-            <a:off x="5440680" y="2276856"/>
-            <a:ext cx="3154680" cy="292608"/>
+          <p:cNvPr id="11" name="Text 9"/>
+          <p:cNvSpPr/>
+          <p:nvPr/>
+        </p:nvSpPr>
+        <p:spPr>
+          <a:xfrm>
+            <a:off x="548640" y="2962656"/>
+            <a:ext cx="3703320" cy="384048"/>
           </a:xfrm>
           <a:prstGeom prst="rect">
             <a:avLst/>
@@ -26358,7 +27778,7 @@
               <a:defRPr/>
             </a:pPr>
             <a:r>
-              <a:rPr kumimoji="0" lang="en-US" sz="890" b="0" i="0" u="none" strike="noStrike" kern="1200" cap="none" spc="0" normalizeH="0" baseline="0" noProof="0" dirty="0">
+              <a:rPr kumimoji="0" lang="en-US" sz="880" b="0" i="0" u="none" strike="noStrike" kern="1200" cap="none" spc="0" normalizeH="0" baseline="0" noProof="0" dirty="0">
                 <a:ln>
                   <a:noFill/>
                 </a:ln>
@@ -26372,129 +27792,7 @@
                 <a:ea typeface="Calibri" pitchFamily="34" charset="-122"/>
                 <a:cs typeface="Calibri" pitchFamily="34" charset="-120"/>
               </a:rPr>
-              <a:t>Module has its own deployment container</a:t>
-            </a:r>
-            <a:endParaRPr kumimoji="0" lang="en-US" sz="890" b="0" i="0" u="none" strike="noStrike" kern="1200" cap="none" spc="0" normalizeH="0" baseline="0" noProof="0" dirty="0">
-              <a:ln>
-                <a:noFill/>
-              </a:ln>
-              <a:solidFill>
-                <a:prstClr val="black"/>
-              </a:solidFill>
-              <a:effectLst/>
-              <a:uLnTx/>
-              <a:uFillTx/>
-              <a:latin typeface="Calibri" panose="020F0502020204030204"/>
-              <a:ea typeface="+mn-ea"/>
-              <a:cs typeface="+mn-cs"/>
-            </a:endParaRPr>
-          </a:p>
-        </p:txBody>
-      </p:sp>
-      <p:sp>
-        <p:nvSpPr>
-          <p:cNvPr id="16" name="Shape 14"/>
-          <p:cNvSpPr/>
-          <p:nvPr/>
-        </p:nvSpPr>
-        <p:spPr>
-          <a:xfrm>
-            <a:off x="4617720" y="2596896"/>
-            <a:ext cx="3977640" cy="9144"/>
-          </a:xfrm>
-          <a:prstGeom prst="rect">
-            <a:avLst/>
-          </a:prstGeom>
-          <a:solidFill>
-            <a:srgbClr val="D8DEE6"/>
-          </a:solidFill>
-          <a:ln w="12700">
-            <a:solidFill>
-              <a:srgbClr val="D8DEE6"/>
-            </a:solidFill>
-            <a:prstDash val="solid"/>
-          </a:ln>
-        </p:spPr>
-      </p:sp>
-      <p:sp>
-        <p:nvSpPr>
-          <p:cNvPr id="17" name="Shape 15"/>
-          <p:cNvSpPr/>
-          <p:nvPr/>
-        </p:nvSpPr>
-        <p:spPr>
-          <a:xfrm>
-            <a:off x="4617720" y="2715768"/>
-            <a:ext cx="347472" cy="36576"/>
-          </a:xfrm>
-          <a:prstGeom prst="rect">
-            <a:avLst/>
-          </a:prstGeom>
-          <a:solidFill>
-            <a:srgbClr val="D97706"/>
-          </a:solidFill>
-          <a:ln w="12700">
-            <a:solidFill>
-              <a:srgbClr val="D97706"/>
-            </a:solidFill>
-            <a:prstDash val="solid"/>
-          </a:ln>
-        </p:spPr>
-      </p:sp>
-      <p:sp>
-        <p:nvSpPr>
-          <p:cNvPr id="18" name="Text 16"/>
-          <p:cNvSpPr/>
-          <p:nvPr/>
-        </p:nvSpPr>
-        <p:spPr>
-          <a:xfrm>
-            <a:off x="4617720" y="2834640"/>
-            <a:ext cx="731520" cy="219456"/>
-          </a:xfrm>
-          <a:prstGeom prst="rect">
-            <a:avLst/>
-          </a:prstGeom>
-          <a:noFill/>
-          <a:ln/>
-        </p:spPr>
-        <p:txBody>
-          <a:bodyPr wrap="square" lIns="0" tIns="0" rIns="0" bIns="0" rtlCol="0" anchor="ctr"/>
-          <a:lstStyle/>
-          <a:p>
-            <a:pPr marL="0" marR="0" lvl="0" indent="0" algn="l" defTabSz="914400" rtl="0" eaLnBrk="1" fontAlgn="auto" latinLnBrk="0" hangingPunct="1">
-              <a:lnSpc>
-                <a:spcPct val="100000"/>
-              </a:lnSpc>
-              <a:spcBef>
-                <a:spcPts val="0"/>
-              </a:spcBef>
-              <a:spcAft>
-                <a:spcPts val="0"/>
-              </a:spcAft>
-              <a:buClrTx/>
-              <a:buSzTx/>
-              <a:buFontTx/>
-              <a:buNone/>
-              <a:tabLst/>
-              <a:defRPr/>
-            </a:pPr>
-            <a:r>
-              <a:rPr kumimoji="0" lang="en-US" sz="880" b="1" i="0" u="none" strike="noStrike" kern="1200" cap="none" spc="0" normalizeH="0" baseline="0" noProof="0" dirty="0">
-                <a:ln>
-                  <a:noFill/>
-                </a:ln>
-                <a:solidFill>
-                  <a:srgbClr val="D97706"/>
-                </a:solidFill>
-                <a:effectLst/>
-                <a:uLnTx/>
-                <a:uFillTx/>
-                <a:latin typeface="Calibri" pitchFamily="34" charset="0"/>
-                <a:ea typeface="Calibri" pitchFamily="34" charset="-122"/>
-                <a:cs typeface="Calibri" pitchFamily="34" charset="-120"/>
-              </a:rPr>
-              <a:t>LOW</a:t>
+              <a:t>A maximal service set where each service can reach every other service through directed paths.</a:t>
             </a:r>
             <a:endParaRPr kumimoji="0" lang="en-US" sz="880" b="0" i="0" u="none" strike="noStrike" kern="1200" cap="none" spc="0" normalizeH="0" baseline="0" noProof="0" dirty="0">
               <a:ln>
@@ -26515,14 +27813,39 @@
       </p:sp>
       <p:sp>
         <p:nvSpPr>
-          <p:cNvPr id="19" name="Text 17"/>
-          <p:cNvSpPr/>
-          <p:nvPr/>
-        </p:nvSpPr>
-        <p:spPr>
-          <a:xfrm>
-            <a:off x="5440680" y="2688336"/>
-            <a:ext cx="3154680" cy="228600"/>
+          <p:cNvPr id="12" name="Shape 10"/>
+          <p:cNvSpPr/>
+          <p:nvPr/>
+        </p:nvSpPr>
+        <p:spPr>
+          <a:xfrm>
+            <a:off x="548640" y="3419856"/>
+            <a:ext cx="3703320" cy="9144"/>
+          </a:xfrm>
+          <a:prstGeom prst="rect">
+            <a:avLst/>
+          </a:prstGeom>
+          <a:solidFill>
+            <a:srgbClr val="D8DEE6"/>
+          </a:solidFill>
+          <a:ln w="12700">
+            <a:solidFill>
+              <a:srgbClr val="D8DEE6"/>
+            </a:solidFill>
+            <a:prstDash val="solid"/>
+          </a:ln>
+        </p:spPr>
+      </p:sp>
+      <p:sp>
+        <p:nvSpPr>
+          <p:cNvPr id="13" name="Text 11"/>
+          <p:cNvSpPr/>
+          <p:nvPr/>
+        </p:nvSpPr>
+        <p:spPr>
+          <a:xfrm>
+            <a:off x="548640" y="3547872"/>
+            <a:ext cx="3703320" cy="228600"/>
           </a:xfrm>
           <a:prstGeom prst="rect">
             <a:avLst/>
@@ -26552,7 +27875,7 @@
               <a:defRPr/>
             </a:pPr>
             <a:r>
-              <a:rPr kumimoji="0" lang="en-US" sz="1050" b="1" i="0" u="none" strike="noStrike" kern="1200" cap="none" spc="0" normalizeH="0" baseline="0" noProof="0" dirty="0">
+              <a:rPr kumimoji="0" lang="en-US" sz="1070" b="1" i="0" u="none" strike="noStrike" kern="1200" cap="none" spc="0" normalizeH="0" baseline="0" noProof="0" dirty="0">
                 <a:ln>
                   <a:noFill/>
                 </a:ln>
@@ -26566,9 +27889,9 @@
                 <a:ea typeface="Calibri" pitchFamily="34" charset="-122"/>
                 <a:cs typeface="Calibri" pitchFamily="34" charset="-120"/>
               </a:rPr>
-              <a:t>main() method</a:t>
-            </a:r>
-            <a:endParaRPr kumimoji="0" lang="en-US" sz="1050" b="0" i="0" u="none" strike="noStrike" kern="1200" cap="none" spc="0" normalizeH="0" baseline="0" noProof="0" dirty="0">
+              <a:t>Cycle</a:t>
+            </a:r>
+            <a:endParaRPr kumimoji="0" lang="en-US" sz="1070" b="0" i="0" u="none" strike="noStrike" kern="1200" cap="none" spc="0" normalizeH="0" baseline="0" noProof="0" dirty="0">
               <a:ln>
                 <a:noFill/>
               </a:ln>
@@ -26587,14 +27910,14 @@
       </p:sp>
       <p:sp>
         <p:nvSpPr>
-          <p:cNvPr id="20" name="Text 18"/>
-          <p:cNvSpPr/>
-          <p:nvPr/>
-        </p:nvSpPr>
-        <p:spPr>
-          <a:xfrm>
-            <a:off x="5440680" y="2935224"/>
-            <a:ext cx="3154680" cy="292608"/>
+          <p:cNvPr id="14" name="Text 12"/>
+          <p:cNvSpPr/>
+          <p:nvPr/>
+        </p:nvSpPr>
+        <p:spPr>
+          <a:xfrm>
+            <a:off x="548640" y="3803904"/>
+            <a:ext cx="3703320" cy="384048"/>
           </a:xfrm>
           <a:prstGeom prst="rect">
             <a:avLst/>
@@ -26626,7 +27949,7 @@
               <a:defRPr/>
             </a:pPr>
             <a:r>
-              <a:rPr kumimoji="0" lang="en-US" sz="890" b="0" i="0" u="none" strike="noStrike" kern="1200" cap="none" spc="0" normalizeH="0" baseline="0" noProof="0" dirty="0">
+              <a:rPr kumimoji="0" lang="en-US" sz="880" b="0" i="0" u="none" strike="noStrike" kern="1200" cap="none" spc="0" normalizeH="0" baseline="0" noProof="0" dirty="0">
                 <a:ln>
                   <a:noFill/>
                 </a:ln>
@@ -26640,9 +27963,9 @@
                 <a:ea typeface="Calibri" pitchFamily="34" charset="-122"/>
                 <a:cs typeface="Calibri" pitchFamily="34" charset="-120"/>
               </a:rPr>
-              <a:t>Executable Java entry point without stronger framework signal</a:t>
-            </a:r>
-            <a:endParaRPr kumimoji="0" lang="en-US" sz="890" b="0" i="0" u="none" strike="noStrike" kern="1200" cap="none" spc="0" normalizeH="0" baseline="0" noProof="0" dirty="0">
+              <a:t>An SCC with more than one service; used as evidence for Cyclic Dependency.</a:t>
+            </a:r>
+            <a:endParaRPr kumimoji="0" lang="en-US" sz="880" b="0" i="0" u="none" strike="noStrike" kern="1200" cap="none" spc="0" normalizeH="0" baseline="0" noProof="0" dirty="0">
               <a:ln>
                 <a:noFill/>
               </a:ln>
@@ -26661,14 +27984,14 @@
       </p:sp>
       <p:sp>
         <p:nvSpPr>
-          <p:cNvPr id="21" name="Shape 19"/>
-          <p:cNvSpPr/>
-          <p:nvPr/>
-        </p:nvSpPr>
-        <p:spPr>
-          <a:xfrm>
-            <a:off x="4617720" y="3255264"/>
-            <a:ext cx="3977640" cy="9144"/>
+          <p:cNvPr id="15" name="Shape 13"/>
+          <p:cNvSpPr/>
+          <p:nvPr/>
+        </p:nvSpPr>
+        <p:spPr>
+          <a:xfrm>
+            <a:off x="548640" y="4261104"/>
+            <a:ext cx="3703320" cy="9144"/>
           </a:xfrm>
           <a:prstGeom prst="rect">
             <a:avLst/>
@@ -26686,39 +28009,14 @@
       </p:sp>
       <p:sp>
         <p:nvSpPr>
-          <p:cNvPr id="22" name="Shape 20"/>
-          <p:cNvSpPr/>
-          <p:nvPr/>
-        </p:nvSpPr>
-        <p:spPr>
-          <a:xfrm>
-            <a:off x="548640" y="3401568"/>
-            <a:ext cx="457200" cy="36576"/>
-          </a:xfrm>
-          <a:prstGeom prst="rect">
-            <a:avLst/>
-          </a:prstGeom>
-          <a:solidFill>
-            <a:srgbClr val="0D9488"/>
-          </a:solidFill>
-          <a:ln w="12700">
-            <a:solidFill>
-              <a:srgbClr val="0D9488"/>
-            </a:solidFill>
-            <a:prstDash val="solid"/>
-          </a:ln>
-        </p:spPr>
-      </p:sp>
-      <p:sp>
-        <p:nvSpPr>
-          <p:cNvPr id="23" name="Text 21"/>
-          <p:cNvSpPr/>
-          <p:nvPr/>
-        </p:nvSpPr>
-        <p:spPr>
-          <a:xfrm>
-            <a:off x="548640" y="3511296"/>
-            <a:ext cx="8046720" cy="274320"/>
+          <p:cNvPr id="16" name="Text 14"/>
+          <p:cNvSpPr/>
+          <p:nvPr/>
+        </p:nvSpPr>
+        <p:spPr>
+          <a:xfrm>
+            <a:off x="4617720" y="1024128"/>
+            <a:ext cx="3703320" cy="228600"/>
           </a:xfrm>
           <a:prstGeom prst="rect">
             <a:avLst/>
@@ -26748,7 +28046,7 @@
               <a:defRPr/>
             </a:pPr>
             <a:r>
-              <a:rPr kumimoji="0" lang="en-US" sz="1250" b="1" i="0" u="none" strike="noStrike" kern="1200" cap="none" spc="0" normalizeH="0" baseline="0" noProof="0" dirty="0">
+              <a:rPr kumimoji="0" lang="en-US" sz="1070" b="1" i="0" u="none" strike="noStrike" kern="1200" cap="none" spc="0" normalizeH="0" baseline="0" noProof="0" dirty="0">
                 <a:ln>
                   <a:noFill/>
                 </a:ln>
@@ -26762,9 +28060,9 @@
                 <a:ea typeface="Calibri" pitchFamily="34" charset="-122"/>
                 <a:cs typeface="Calibri" pitchFamily="34" charset="-120"/>
               </a:rPr>
-              <a:t>Why this matters</a:t>
-            </a:r>
-            <a:endParaRPr kumimoji="0" lang="en-US" sz="1250" b="0" i="0" u="none" strike="noStrike" kern="1200" cap="none" spc="0" normalizeH="0" baseline="0" noProof="0" dirty="0">
+              <a:t>Fan-in / fan-out</a:t>
+            </a:r>
+            <a:endParaRPr kumimoji="0" lang="en-US" sz="1070" b="0" i="0" u="none" strike="noStrike" kern="1200" cap="none" spc="0" normalizeH="0" baseline="0" noProof="0" dirty="0">
               <a:ln>
                 <a:noFill/>
               </a:ln>
@@ -26783,23 +28081,25 @@
       </p:sp>
       <p:sp>
         <p:nvSpPr>
-          <p:cNvPr id="24" name="Text 22"/>
-          <p:cNvSpPr/>
-          <p:nvPr/>
-        </p:nvSpPr>
-        <p:spPr>
-          <a:xfrm>
-            <a:off x="548640" y="3822192"/>
-            <a:ext cx="8046720" cy="566928"/>
-          </a:xfrm>
-          <a:prstGeom prst="rect">
-            <a:avLst/>
-          </a:prstGeom>
-          <a:noFill/>
-          <a:ln/>
-        </p:spPr>
-        <p:txBody>
-          <a:bodyPr wrap="square" lIns="0" tIns="0" rIns="0" bIns="0" rtlCol="0" anchor="ctr"/>
+          <p:cNvPr id="17" name="Text 15"/>
+          <p:cNvSpPr/>
+          <p:nvPr/>
+        </p:nvSpPr>
+        <p:spPr>
+          <a:xfrm>
+            <a:off x="4617720" y="1280160"/>
+            <a:ext cx="3703320" cy="384048"/>
+          </a:xfrm>
+          <a:prstGeom prst="rect">
+            <a:avLst/>
+          </a:prstGeom>
+          <a:noFill/>
+          <a:ln/>
+        </p:spPr>
+        <p:txBody>
+          <a:bodyPr wrap="square" lIns="0" tIns="0" rIns="0" bIns="0" rtlCol="0" anchor="ctr">
+            <a:normAutofit/>
+          </a:bodyPr>
           <a:lstStyle/>
           <a:p>
             <a:pPr marL="0" marR="0" lvl="0" indent="0" algn="l" defTabSz="914400" rtl="0" eaLnBrk="1" fontAlgn="auto" latinLnBrk="0" hangingPunct="1">
@@ -26820,7 +28120,7 @@
               <a:defRPr/>
             </a:pPr>
             <a:r>
-              <a:rPr kumimoji="0" lang="en-US" sz="1050" b="0" i="0" u="none" strike="noStrike" kern="1200" cap="none" spc="0" normalizeH="0" baseline="0" noProof="0" dirty="0">
+              <a:rPr kumimoji="0" lang="en-US" sz="880" b="0" i="0" u="none" strike="noStrike" kern="1200" cap="none" spc="0" normalizeH="0" baseline="0" noProof="0" dirty="0">
                 <a:ln>
                   <a:noFill/>
                 </a:ln>
@@ -26834,9 +28134,9 @@
                 <a:ea typeface="Calibri" pitchFamily="34" charset="-122"/>
                 <a:cs typeface="Calibri" pitchFamily="34" charset="-120"/>
               </a:rPr>
-              <a:t>The tool does not require a manually supplied service list. It recovers likely deployable services from source structure, then attaches a confidence level so uncertain boundaries can be inspected instead of hidden.</a:t>
-            </a:r>
-            <a:endParaRPr kumimoji="0" lang="en-US" sz="1050" b="0" i="0" u="none" strike="noStrike" kern="1200" cap="none" spc="0" normalizeH="0" baseline="0" noProof="0" dirty="0">
+              <a:t>Incoming and outgoing service dependency counts; useful for spotting central services and mediator behaviour.</a:t>
+            </a:r>
+            <a:endParaRPr kumimoji="0" lang="en-US" sz="880" b="0" i="0" u="none" strike="noStrike" kern="1200" cap="none" spc="0" normalizeH="0" baseline="0" noProof="0" dirty="0">
               <a:ln>
                 <a:noFill/>
               </a:ln>
@@ -26855,7 +28155,545 @@
       </p:sp>
       <p:sp>
         <p:nvSpPr>
+          <p:cNvPr id="18" name="Shape 16"/>
+          <p:cNvSpPr/>
+          <p:nvPr/>
+        </p:nvSpPr>
+        <p:spPr>
+          <a:xfrm>
+            <a:off x="4617720" y="1737360"/>
+            <a:ext cx="3703320" cy="9144"/>
+          </a:xfrm>
+          <a:prstGeom prst="rect">
+            <a:avLst/>
+          </a:prstGeom>
+          <a:solidFill>
+            <a:srgbClr val="D8DEE6"/>
+          </a:solidFill>
+          <a:ln w="12700">
+            <a:solidFill>
+              <a:srgbClr val="D8DEE6"/>
+            </a:solidFill>
+            <a:prstDash val="solid"/>
+          </a:ln>
+        </p:spPr>
+      </p:sp>
+      <p:sp>
+        <p:nvSpPr>
+          <p:cNvPr id="19" name="Text 17"/>
+          <p:cNvSpPr/>
+          <p:nvPr/>
+        </p:nvSpPr>
+        <p:spPr>
+          <a:xfrm>
+            <a:off x="4617720" y="1865376"/>
+            <a:ext cx="3703320" cy="228600"/>
+          </a:xfrm>
+          <a:prstGeom prst="rect">
+            <a:avLst/>
+          </a:prstGeom>
+          <a:noFill/>
+          <a:ln/>
+        </p:spPr>
+        <p:txBody>
+          <a:bodyPr wrap="square" lIns="0" tIns="0" rIns="0" bIns="0" rtlCol="0" anchor="ctr"/>
+          <a:lstStyle/>
+          <a:p>
+            <a:pPr marL="0" marR="0" lvl="0" indent="0" algn="l" defTabSz="914400" rtl="0" eaLnBrk="1" fontAlgn="auto" latinLnBrk="0" hangingPunct="1">
+              <a:lnSpc>
+                <a:spcPct val="100000"/>
+              </a:lnSpc>
+              <a:spcBef>
+                <a:spcPts val="0"/>
+              </a:spcBef>
+              <a:spcAft>
+                <a:spcPts val="0"/>
+              </a:spcAft>
+              <a:buClrTx/>
+              <a:buSzTx/>
+              <a:buFontTx/>
+              <a:buNone/>
+              <a:tabLst/>
+              <a:defRPr/>
+            </a:pPr>
+            <a:r>
+              <a:rPr kumimoji="0" lang="en-US" sz="1070" b="1" i="0" u="none" strike="noStrike" kern="1200" cap="none" spc="0" normalizeH="0" baseline="0" noProof="0" dirty="0">
+                <a:ln>
+                  <a:noFill/>
+                </a:ln>
+                <a:solidFill>
+                  <a:srgbClr val="0F2A44"/>
+                </a:solidFill>
+                <a:effectLst/>
+                <a:uLnTx/>
+                <a:uFillTx/>
+                <a:latin typeface="Calibri" pitchFamily="34" charset="0"/>
+                <a:ea typeface="Calibri" pitchFamily="34" charset="-122"/>
+                <a:cs typeface="Calibri" pitchFamily="34" charset="-120"/>
+              </a:rPr>
+              <a:t>Bidirectional dependency</a:t>
+            </a:r>
+            <a:endParaRPr kumimoji="0" lang="en-US" sz="1070" b="0" i="0" u="none" strike="noStrike" kern="1200" cap="none" spc="0" normalizeH="0" baseline="0" noProof="0" dirty="0">
+              <a:ln>
+                <a:noFill/>
+              </a:ln>
+              <a:solidFill>
+                <a:prstClr val="black"/>
+              </a:solidFill>
+              <a:effectLst/>
+              <a:uLnTx/>
+              <a:uFillTx/>
+              <a:latin typeface="Calibri" panose="020F0502020204030204"/>
+              <a:ea typeface="+mn-ea"/>
+              <a:cs typeface="+mn-cs"/>
+            </a:endParaRPr>
+          </a:p>
+        </p:txBody>
+      </p:sp>
+      <p:sp>
+        <p:nvSpPr>
+          <p:cNvPr id="20" name="Text 18"/>
+          <p:cNvSpPr/>
+          <p:nvPr/>
+        </p:nvSpPr>
+        <p:spPr>
+          <a:xfrm>
+            <a:off x="4617720" y="2121408"/>
+            <a:ext cx="3703320" cy="384048"/>
+          </a:xfrm>
+          <a:prstGeom prst="rect">
+            <a:avLst/>
+          </a:prstGeom>
+          <a:noFill/>
+          <a:ln/>
+        </p:spPr>
+        <p:txBody>
+          <a:bodyPr wrap="square" lIns="0" tIns="0" rIns="0" bIns="0" rtlCol="0" anchor="ctr">
+            <a:normAutofit/>
+          </a:bodyPr>
+          <a:lstStyle/>
+          <a:p>
+            <a:pPr marL="0" marR="0" lvl="0" indent="0" algn="l" defTabSz="914400" rtl="0" eaLnBrk="1" fontAlgn="auto" latinLnBrk="0" hangingPunct="1">
+              <a:lnSpc>
+                <a:spcPct val="100000"/>
+              </a:lnSpc>
+              <a:spcBef>
+                <a:spcPts val="0"/>
+              </a:spcBef>
+              <a:spcAft>
+                <a:spcPts val="0"/>
+              </a:spcAft>
+              <a:buClrTx/>
+              <a:buSzTx/>
+              <a:buFontTx/>
+              <a:buNone/>
+              <a:tabLst/>
+              <a:defRPr/>
+            </a:pPr>
+            <a:r>
+              <a:rPr kumimoji="0" lang="en-US" sz="880" b="0" i="0" u="none" strike="noStrike" kern="1200" cap="none" spc="0" normalizeH="0" baseline="0" noProof="0" dirty="0">
+                <a:ln>
+                  <a:noFill/>
+                </a:ln>
+                <a:solidFill>
+                  <a:srgbClr val="1E293B"/>
+                </a:solidFill>
+                <a:effectLst/>
+                <a:uLnTx/>
+                <a:uFillTx/>
+                <a:latin typeface="Calibri" pitchFamily="34" charset="0"/>
+                <a:ea typeface="Calibri" pitchFamily="34" charset="-122"/>
+                <a:cs typeface="Calibri" pitchFamily="34" charset="-120"/>
+              </a:rPr>
+              <a:t>A pair A-&gt;B and B-&gt;A; used as evidence for Wrong Cuts and poor service boundaries.</a:t>
+            </a:r>
+            <a:endParaRPr kumimoji="0" lang="en-US" sz="880" b="0" i="0" u="none" strike="noStrike" kern="1200" cap="none" spc="0" normalizeH="0" baseline="0" noProof="0" dirty="0">
+              <a:ln>
+                <a:noFill/>
+              </a:ln>
+              <a:solidFill>
+                <a:prstClr val="black"/>
+              </a:solidFill>
+              <a:effectLst/>
+              <a:uLnTx/>
+              <a:uFillTx/>
+              <a:latin typeface="Calibri" panose="020F0502020204030204"/>
+              <a:ea typeface="+mn-ea"/>
+              <a:cs typeface="+mn-cs"/>
+            </a:endParaRPr>
+          </a:p>
+        </p:txBody>
+      </p:sp>
+      <p:sp>
+        <p:nvSpPr>
+          <p:cNvPr id="21" name="Shape 19"/>
+          <p:cNvSpPr/>
+          <p:nvPr/>
+        </p:nvSpPr>
+        <p:spPr>
+          <a:xfrm>
+            <a:off x="4617720" y="2578608"/>
+            <a:ext cx="3703320" cy="9144"/>
+          </a:xfrm>
+          <a:prstGeom prst="rect">
+            <a:avLst/>
+          </a:prstGeom>
+          <a:solidFill>
+            <a:srgbClr val="D8DEE6"/>
+          </a:solidFill>
+          <a:ln w="12700">
+            <a:solidFill>
+              <a:srgbClr val="D8DEE6"/>
+            </a:solidFill>
+            <a:prstDash val="solid"/>
+          </a:ln>
+        </p:spPr>
+      </p:sp>
+      <p:sp>
+        <p:nvSpPr>
+          <p:cNvPr id="22" name="Text 20"/>
+          <p:cNvSpPr/>
+          <p:nvPr/>
+        </p:nvSpPr>
+        <p:spPr>
+          <a:xfrm>
+            <a:off x="4617720" y="2706624"/>
+            <a:ext cx="3703320" cy="228600"/>
+          </a:xfrm>
+          <a:prstGeom prst="rect">
+            <a:avLst/>
+          </a:prstGeom>
+          <a:noFill/>
+          <a:ln/>
+        </p:spPr>
+        <p:txBody>
+          <a:bodyPr wrap="square" lIns="0" tIns="0" rIns="0" bIns="0" rtlCol="0" anchor="ctr"/>
+          <a:lstStyle/>
+          <a:p>
+            <a:pPr marL="0" marR="0" lvl="0" indent="0" algn="l" defTabSz="914400" rtl="0" eaLnBrk="1" fontAlgn="auto" latinLnBrk="0" hangingPunct="1">
+              <a:lnSpc>
+                <a:spcPct val="100000"/>
+              </a:lnSpc>
+              <a:spcBef>
+                <a:spcPts val="0"/>
+              </a:spcBef>
+              <a:spcAft>
+                <a:spcPts val="0"/>
+              </a:spcAft>
+              <a:buClrTx/>
+              <a:buSzTx/>
+              <a:buFontTx/>
+              <a:buNone/>
+              <a:tabLst/>
+              <a:defRPr/>
+            </a:pPr>
+            <a:r>
+              <a:rPr kumimoji="0" lang="en-US" sz="1070" b="1" i="0" u="none" strike="noStrike" kern="1200" cap="none" spc="0" normalizeH="0" baseline="0" noProof="0" dirty="0">
+                <a:ln>
+                  <a:noFill/>
+                </a:ln>
+                <a:solidFill>
+                  <a:srgbClr val="0F2A44"/>
+                </a:solidFill>
+                <a:effectLst/>
+                <a:uLnTx/>
+                <a:uFillTx/>
+                <a:latin typeface="Calibri" pitchFamily="34" charset="0"/>
+                <a:ea typeface="Calibri" pitchFamily="34" charset="-122"/>
+                <a:cs typeface="Calibri" pitchFamily="34" charset="-120"/>
+              </a:rPr>
+              <a:t>Connected ratio</a:t>
+            </a:r>
+            <a:endParaRPr kumimoji="0" lang="en-US" sz="1070" b="0" i="0" u="none" strike="noStrike" kern="1200" cap="none" spc="0" normalizeH="0" baseline="0" noProof="0" dirty="0">
+              <a:ln>
+                <a:noFill/>
+              </a:ln>
+              <a:solidFill>
+                <a:prstClr val="black"/>
+              </a:solidFill>
+              <a:effectLst/>
+              <a:uLnTx/>
+              <a:uFillTx/>
+              <a:latin typeface="Calibri" panose="020F0502020204030204"/>
+              <a:ea typeface="+mn-ea"/>
+              <a:cs typeface="+mn-cs"/>
+            </a:endParaRPr>
+          </a:p>
+        </p:txBody>
+      </p:sp>
+      <p:sp>
+        <p:nvSpPr>
+          <p:cNvPr id="23" name="Text 21"/>
+          <p:cNvSpPr/>
+          <p:nvPr/>
+        </p:nvSpPr>
+        <p:spPr>
+          <a:xfrm>
+            <a:off x="4617720" y="2962656"/>
+            <a:ext cx="3703320" cy="384048"/>
+          </a:xfrm>
+          <a:prstGeom prst="rect">
+            <a:avLst/>
+          </a:prstGeom>
+          <a:noFill/>
+          <a:ln/>
+        </p:spPr>
+        <p:txBody>
+          <a:bodyPr wrap="square" lIns="0" tIns="0" rIns="0" bIns="0" rtlCol="0" anchor="ctr">
+            <a:normAutofit/>
+          </a:bodyPr>
+          <a:lstStyle/>
+          <a:p>
+            <a:pPr marL="0" marR="0" lvl="0" indent="0" algn="l" defTabSz="914400" rtl="0" eaLnBrk="1" fontAlgn="auto" latinLnBrk="0" hangingPunct="1">
+              <a:lnSpc>
+                <a:spcPct val="100000"/>
+              </a:lnSpc>
+              <a:spcBef>
+                <a:spcPts val="0"/>
+              </a:spcBef>
+              <a:spcAft>
+                <a:spcPts val="0"/>
+              </a:spcAft>
+              <a:buClrTx/>
+              <a:buSzTx/>
+              <a:buFontTx/>
+              <a:buNone/>
+              <a:tabLst/>
+              <a:defRPr/>
+            </a:pPr>
+            <a:r>
+              <a:rPr kumimoji="0" lang="en-US" sz="880" b="0" i="0" u="none" strike="noStrike" kern="1200" cap="none" spc="0" normalizeH="0" baseline="0" noProof="0" dirty="0">
+                <a:ln>
+                  <a:noFill/>
+                </a:ln>
+                <a:solidFill>
+                  <a:srgbClr val="1E293B"/>
+                </a:solidFill>
+                <a:effectLst/>
+                <a:uLnTx/>
+                <a:uFillTx/>
+                <a:latin typeface="Calibri" pitchFamily="34" charset="0"/>
+                <a:ea typeface="Calibri" pitchFamily="34" charset="-122"/>
+                <a:cs typeface="Calibri" pitchFamily="34" charset="-120"/>
+              </a:rPr>
+              <a:t>Fraction of services participating in dependencies; used as part of Distributed Monolith evidence.</a:t>
+            </a:r>
+            <a:endParaRPr kumimoji="0" lang="en-US" sz="880" b="0" i="0" u="none" strike="noStrike" kern="1200" cap="none" spc="0" normalizeH="0" baseline="0" noProof="0" dirty="0">
+              <a:ln>
+                <a:noFill/>
+              </a:ln>
+              <a:solidFill>
+                <a:prstClr val="black"/>
+              </a:solidFill>
+              <a:effectLst/>
+              <a:uLnTx/>
+              <a:uFillTx/>
+              <a:latin typeface="Calibri" panose="020F0502020204030204"/>
+              <a:ea typeface="+mn-ea"/>
+              <a:cs typeface="+mn-cs"/>
+            </a:endParaRPr>
+          </a:p>
+        </p:txBody>
+      </p:sp>
+      <p:sp>
+        <p:nvSpPr>
+          <p:cNvPr id="24" name="Shape 22"/>
+          <p:cNvSpPr/>
+          <p:nvPr/>
+        </p:nvSpPr>
+        <p:spPr>
+          <a:xfrm>
+            <a:off x="4617720" y="3419856"/>
+            <a:ext cx="3703320" cy="9144"/>
+          </a:xfrm>
+          <a:prstGeom prst="rect">
+            <a:avLst/>
+          </a:prstGeom>
+          <a:solidFill>
+            <a:srgbClr val="D8DEE6"/>
+          </a:solidFill>
+          <a:ln w="12700">
+            <a:solidFill>
+              <a:srgbClr val="D8DEE6"/>
+            </a:solidFill>
+            <a:prstDash val="solid"/>
+          </a:ln>
+        </p:spPr>
+      </p:sp>
+      <p:sp>
+        <p:nvSpPr>
+          <p:cNvPr id="25" name="Text 23"/>
+          <p:cNvSpPr/>
+          <p:nvPr/>
+        </p:nvSpPr>
+        <p:spPr>
+          <a:xfrm>
+            <a:off x="4617720" y="3547872"/>
+            <a:ext cx="3703320" cy="228600"/>
+          </a:xfrm>
+          <a:prstGeom prst="rect">
+            <a:avLst/>
+          </a:prstGeom>
+          <a:noFill/>
+          <a:ln/>
+        </p:spPr>
+        <p:txBody>
+          <a:bodyPr wrap="square" lIns="0" tIns="0" rIns="0" bIns="0" rtlCol="0" anchor="ctr"/>
+          <a:lstStyle/>
+          <a:p>
+            <a:pPr marL="0" marR="0" lvl="0" indent="0" algn="l" defTabSz="914400" rtl="0" eaLnBrk="1" fontAlgn="auto" latinLnBrk="0" hangingPunct="1">
+              <a:lnSpc>
+                <a:spcPct val="100000"/>
+              </a:lnSpc>
+              <a:spcBef>
+                <a:spcPts val="0"/>
+              </a:spcBef>
+              <a:spcAft>
+                <a:spcPts val="0"/>
+              </a:spcAft>
+              <a:buClrTx/>
+              <a:buSzTx/>
+              <a:buFontTx/>
+              <a:buNone/>
+              <a:tabLst/>
+              <a:defRPr/>
+            </a:pPr>
+            <a:r>
+              <a:rPr kumimoji="0" lang="en-US" sz="1070" b="1" i="0" u="none" strike="noStrike" kern="1200" cap="none" spc="0" normalizeH="0" baseline="0" noProof="0" dirty="0">
+                <a:ln>
+                  <a:noFill/>
+                </a:ln>
+                <a:solidFill>
+                  <a:srgbClr val="0F2A44"/>
+                </a:solidFill>
+                <a:effectLst/>
+                <a:uLnTx/>
+                <a:uFillTx/>
+                <a:latin typeface="Calibri" pitchFamily="34" charset="0"/>
+                <a:ea typeface="Calibri" pitchFamily="34" charset="-122"/>
+                <a:cs typeface="Calibri" pitchFamily="34" charset="-120"/>
+              </a:rPr>
+              <a:t>Betweenness centrality</a:t>
+            </a:r>
+            <a:endParaRPr kumimoji="0" lang="en-US" sz="1070" b="0" i="0" u="none" strike="noStrike" kern="1200" cap="none" spc="0" normalizeH="0" baseline="0" noProof="0" dirty="0">
+              <a:ln>
+                <a:noFill/>
+              </a:ln>
+              <a:solidFill>
+                <a:prstClr val="black"/>
+              </a:solidFill>
+              <a:effectLst/>
+              <a:uLnTx/>
+              <a:uFillTx/>
+              <a:latin typeface="Calibri" panose="020F0502020204030204"/>
+              <a:ea typeface="+mn-ea"/>
+              <a:cs typeface="+mn-cs"/>
+            </a:endParaRPr>
+          </a:p>
+        </p:txBody>
+      </p:sp>
+      <p:sp>
+        <p:nvSpPr>
           <p:cNvPr id="26" name="Text 24"/>
+          <p:cNvSpPr/>
+          <p:nvPr/>
+        </p:nvSpPr>
+        <p:spPr>
+          <a:xfrm>
+            <a:off x="4617720" y="3803904"/>
+            <a:ext cx="3703320" cy="384048"/>
+          </a:xfrm>
+          <a:prstGeom prst="rect">
+            <a:avLst/>
+          </a:prstGeom>
+          <a:noFill/>
+          <a:ln/>
+        </p:spPr>
+        <p:txBody>
+          <a:bodyPr wrap="square" lIns="0" tIns="0" rIns="0" bIns="0" rtlCol="0" anchor="ctr">
+            <a:normAutofit/>
+          </a:bodyPr>
+          <a:lstStyle/>
+          <a:p>
+            <a:pPr marL="0" marR="0" lvl="0" indent="0" algn="l" defTabSz="914400" rtl="0" eaLnBrk="1" fontAlgn="auto" latinLnBrk="0" hangingPunct="1">
+              <a:lnSpc>
+                <a:spcPct val="100000"/>
+              </a:lnSpc>
+              <a:spcBef>
+                <a:spcPts val="0"/>
+              </a:spcBef>
+              <a:spcAft>
+                <a:spcPts val="0"/>
+              </a:spcAft>
+              <a:buClrTx/>
+              <a:buSzTx/>
+              <a:buFontTx/>
+              <a:buNone/>
+              <a:tabLst/>
+              <a:defRPr/>
+            </a:pPr>
+            <a:r>
+              <a:rPr kumimoji="0" lang="en-US" sz="880" b="0" i="0" u="none" strike="noStrike" kern="1200" cap="none" spc="0" normalizeH="0" baseline="0" noProof="0" dirty="0">
+                <a:ln>
+                  <a:noFill/>
+                </a:ln>
+                <a:solidFill>
+                  <a:srgbClr val="1E293B"/>
+                </a:solidFill>
+                <a:effectLst/>
+                <a:uLnTx/>
+                <a:uFillTx/>
+                <a:latin typeface="Calibri" pitchFamily="34" charset="0"/>
+                <a:ea typeface="Calibri" pitchFamily="34" charset="-122"/>
+                <a:cs typeface="Calibri" pitchFamily="34" charset="-120"/>
+              </a:rPr>
+              <a:t>How often a service lies on shortest paths between other services; useful for identifying broker-like nodes.</a:t>
+            </a:r>
+            <a:endParaRPr kumimoji="0" lang="en-US" sz="880" b="0" i="0" u="none" strike="noStrike" kern="1200" cap="none" spc="0" normalizeH="0" baseline="0" noProof="0" dirty="0">
+              <a:ln>
+                <a:noFill/>
+              </a:ln>
+              <a:solidFill>
+                <a:prstClr val="black"/>
+              </a:solidFill>
+              <a:effectLst/>
+              <a:uLnTx/>
+              <a:uFillTx/>
+              <a:latin typeface="Calibri" panose="020F0502020204030204"/>
+              <a:ea typeface="+mn-ea"/>
+              <a:cs typeface="+mn-cs"/>
+            </a:endParaRPr>
+          </a:p>
+        </p:txBody>
+      </p:sp>
+      <p:sp>
+        <p:nvSpPr>
+          <p:cNvPr id="27" name="Shape 25"/>
+          <p:cNvSpPr/>
+          <p:nvPr/>
+        </p:nvSpPr>
+        <p:spPr>
+          <a:xfrm>
+            <a:off x="4617720" y="4261104"/>
+            <a:ext cx="3703320" cy="9144"/>
+          </a:xfrm>
+          <a:prstGeom prst="rect">
+            <a:avLst/>
+          </a:prstGeom>
+          <a:solidFill>
+            <a:srgbClr val="D8DEE6"/>
+          </a:solidFill>
+          <a:ln w="12700">
+            <a:solidFill>
+              <a:srgbClr val="D8DEE6"/>
+            </a:solidFill>
+            <a:prstDash val="solid"/>
+          </a:ln>
+        </p:spPr>
+      </p:sp>
+      <p:sp>
+        <p:nvSpPr>
+          <p:cNvPr id="30" name="Text 28"/>
           <p:cNvSpPr/>
           <p:nvPr/>
         </p:nvSpPr>
@@ -26906,7 +28744,7 @@
                 <a:ea typeface="Calibri" pitchFamily="34" charset="-122"/>
                 <a:cs typeface="Calibri" pitchFamily="34" charset="-120"/>
               </a:rPr>
-              <a:t>Appendix K</a:t>
+              <a:t>Appendix J</a:t>
             </a:r>
             <a:endParaRPr kumimoji="0" lang="en-US" sz="900" b="0" i="0" u="none" strike="noStrike" kern="1200" cap="none" spc="0" normalizeH="0" baseline="0" noProof="0" dirty="0">
               <a:ln>
@@ -27011,7 +28849,7 @@
                 <a:ea typeface="Calibri" pitchFamily="34" charset="-122"/>
                 <a:cs typeface="Calibri" pitchFamily="34" charset="-120"/>
               </a:rPr>
-              <a:t>Annex: static vs dynamic analysis</a:t>
+              <a:t>Annex: service boundary detection</a:t>
             </a:r>
             <a:endParaRPr kumimoji="0" lang="en-US" sz="2500" b="0" i="0" u="none" strike="noStrike" kern="1200" cap="none" spc="0" normalizeH="0" baseline="0" noProof="0" dirty="0">
               <a:ln>
@@ -27057,39 +28895,14 @@
       </p:sp>
       <p:sp>
         <p:nvSpPr>
-          <p:cNvPr id="4" name="Shape 2"/>
-          <p:cNvSpPr/>
-          <p:nvPr/>
-        </p:nvSpPr>
-        <p:spPr>
-          <a:xfrm>
-            <a:off x="548640" y="1024128"/>
-            <a:ext cx="457200" cy="36576"/>
-          </a:xfrm>
-          <a:prstGeom prst="rect">
-            <a:avLst/>
-          </a:prstGeom>
-          <a:solidFill>
-            <a:srgbClr val="0D9488"/>
-          </a:solidFill>
-          <a:ln w="12700">
-            <a:solidFill>
-              <a:srgbClr val="0D9488"/>
-            </a:solidFill>
-            <a:prstDash val="solid"/>
-          </a:ln>
-        </p:spPr>
-      </p:sp>
-      <p:sp>
-        <p:nvSpPr>
-          <p:cNvPr id="5" name="Text 3"/>
-          <p:cNvSpPr/>
-          <p:nvPr/>
-        </p:nvSpPr>
-        <p:spPr>
-          <a:xfrm>
-            <a:off x="548640" y="1143000"/>
-            <a:ext cx="3749040" cy="292608"/>
+          <p:cNvPr id="4" name="Text 2"/>
+          <p:cNvSpPr/>
+          <p:nvPr/>
+        </p:nvSpPr>
+        <p:spPr>
+          <a:xfrm>
+            <a:off x="548640" y="987552"/>
+            <a:ext cx="3749040" cy="274320"/>
           </a:xfrm>
           <a:prstGeom prst="rect">
             <a:avLst/>
@@ -27119,619 +28932,6 @@
               <a:defRPr/>
             </a:pPr>
             <a:r>
-              <a:rPr kumimoji="0" lang="en-US" sz="1400" b="1" i="0" u="none" strike="noStrike" kern="1200" cap="none" spc="0" normalizeH="0" baseline="0" noProof="0" dirty="0">
-                <a:ln>
-                  <a:noFill/>
-                </a:ln>
-                <a:solidFill>
-                  <a:srgbClr val="0F2A44"/>
-                </a:solidFill>
-                <a:effectLst/>
-                <a:uLnTx/>
-                <a:uFillTx/>
-                <a:latin typeface="Calibri" pitchFamily="34" charset="0"/>
-                <a:ea typeface="Calibri" pitchFamily="34" charset="-122"/>
-                <a:cs typeface="Calibri" pitchFamily="34" charset="-120"/>
-              </a:rPr>
-              <a:t>Static analysis</a:t>
-            </a:r>
-            <a:endParaRPr kumimoji="0" lang="en-US" sz="1400" b="0" i="0" u="none" strike="noStrike" kern="1200" cap="none" spc="0" normalizeH="0" baseline="0" noProof="0" dirty="0">
-              <a:ln>
-                <a:noFill/>
-              </a:ln>
-              <a:solidFill>
-                <a:prstClr val="black"/>
-              </a:solidFill>
-              <a:effectLst/>
-              <a:uLnTx/>
-              <a:uFillTx/>
-              <a:latin typeface="Calibri" panose="020F0502020204030204"/>
-              <a:ea typeface="+mn-ea"/>
-              <a:cs typeface="+mn-cs"/>
-            </a:endParaRPr>
-          </a:p>
-        </p:txBody>
-      </p:sp>
-      <p:sp>
-        <p:nvSpPr>
-          <p:cNvPr id="6" name="Text 4"/>
-          <p:cNvSpPr/>
-          <p:nvPr/>
-        </p:nvSpPr>
-        <p:spPr>
-          <a:xfrm>
-            <a:off x="713232" y="1600200"/>
-            <a:ext cx="3657600" cy="1417320"/>
-          </a:xfrm>
-          <a:prstGeom prst="rect">
-            <a:avLst/>
-          </a:prstGeom>
-          <a:noFill/>
-          <a:ln/>
-        </p:spPr>
-        <p:txBody>
-          <a:bodyPr wrap="square" lIns="0" tIns="0" rIns="0" bIns="0" rtlCol="0" anchor="ctr"/>
-          <a:lstStyle/>
-          <a:p>
-            <a:pPr marL="342900" marR="0" lvl="0" indent="-342900" algn="l" defTabSz="914400" rtl="0" eaLnBrk="1" fontAlgn="auto" latinLnBrk="0" hangingPunct="1">
-              <a:lnSpc>
-                <a:spcPct val="100000"/>
-              </a:lnSpc>
-              <a:spcBef>
-                <a:spcPts val="0"/>
-              </a:spcBef>
-              <a:spcAft>
-                <a:spcPts val="500"/>
-              </a:spcAft>
-              <a:buClrTx/>
-              <a:buSzPct val="100000"/>
-              <a:buFontTx/>
-              <a:buChar char="•"/>
-              <a:tabLst/>
-              <a:defRPr/>
-            </a:pPr>
-            <a:r>
-              <a:rPr kumimoji="0" lang="en-US" sz="1030" b="0" i="0" u="none" strike="noStrike" kern="1200" cap="none" spc="0" normalizeH="0" baseline="0" noProof="0" dirty="0">
-                <a:ln>
-                  <a:noFill/>
-                </a:ln>
-                <a:solidFill>
-                  <a:srgbClr val="1E293B"/>
-                </a:solidFill>
-                <a:effectLst/>
-                <a:uLnTx/>
-                <a:uFillTx/>
-                <a:latin typeface="Calibri" pitchFamily="34" charset="0"/>
-                <a:ea typeface="Calibri" pitchFamily="34" charset="-122"/>
-                <a:cs typeface="Calibri" pitchFamily="34" charset="-120"/>
-              </a:rPr>
-              <a:t>Runs on a fresh repository checkout</a:t>
-            </a:r>
-            <a:endParaRPr kumimoji="0" lang="en-US" sz="1030" b="0" i="0" u="none" strike="noStrike" kern="1200" cap="none" spc="0" normalizeH="0" baseline="0" noProof="0" dirty="0">
-              <a:ln>
-                <a:noFill/>
-              </a:ln>
-              <a:solidFill>
-                <a:prstClr val="black"/>
-              </a:solidFill>
-              <a:effectLst/>
-              <a:uLnTx/>
-              <a:uFillTx/>
-              <a:latin typeface="Calibri" panose="020F0502020204030204"/>
-              <a:ea typeface="+mn-ea"/>
-              <a:cs typeface="+mn-cs"/>
-            </a:endParaRPr>
-          </a:p>
-          <a:p>
-            <a:pPr marL="342900" marR="0" lvl="0" indent="-342900" algn="l" defTabSz="914400" rtl="0" eaLnBrk="1" fontAlgn="auto" latinLnBrk="0" hangingPunct="1">
-              <a:lnSpc>
-                <a:spcPct val="100000"/>
-              </a:lnSpc>
-              <a:spcBef>
-                <a:spcPts val="0"/>
-              </a:spcBef>
-              <a:spcAft>
-                <a:spcPts val="500"/>
-              </a:spcAft>
-              <a:buClrTx/>
-              <a:buSzPct val="100000"/>
-              <a:buFontTx/>
-              <a:buChar char="•"/>
-              <a:tabLst/>
-              <a:defRPr/>
-            </a:pPr>
-            <a:r>
-              <a:rPr kumimoji="0" lang="en-US" sz="1030" b="0" i="0" u="none" strike="noStrike" kern="1200" cap="none" spc="0" normalizeH="0" baseline="0" noProof="0" dirty="0">
-                <a:ln>
-                  <a:noFill/>
-                </a:ln>
-                <a:solidFill>
-                  <a:srgbClr val="1E293B"/>
-                </a:solidFill>
-                <a:effectLst/>
-                <a:uLnTx/>
-                <a:uFillTx/>
-                <a:latin typeface="Calibri" pitchFamily="34" charset="0"/>
-                <a:ea typeface="Calibri" pitchFamily="34" charset="-122"/>
-                <a:cs typeface="Calibri" pitchFamily="34" charset="-120"/>
-              </a:rPr>
-              <a:t>No deployment, traffic, credentials, or tracing setup needed</a:t>
-            </a:r>
-            <a:endParaRPr kumimoji="0" lang="en-US" sz="1030" b="0" i="0" u="none" strike="noStrike" kern="1200" cap="none" spc="0" normalizeH="0" baseline="0" noProof="0" dirty="0">
-              <a:ln>
-                <a:noFill/>
-              </a:ln>
-              <a:solidFill>
-                <a:prstClr val="black"/>
-              </a:solidFill>
-              <a:effectLst/>
-              <a:uLnTx/>
-              <a:uFillTx/>
-              <a:latin typeface="Calibri" panose="020F0502020204030204"/>
-              <a:ea typeface="+mn-ea"/>
-              <a:cs typeface="+mn-cs"/>
-            </a:endParaRPr>
-          </a:p>
-          <a:p>
-            <a:pPr marL="342900" marR="0" lvl="0" indent="-342900" algn="l" defTabSz="914400" rtl="0" eaLnBrk="1" fontAlgn="auto" latinLnBrk="0" hangingPunct="1">
-              <a:lnSpc>
-                <a:spcPct val="100000"/>
-              </a:lnSpc>
-              <a:spcBef>
-                <a:spcPts val="0"/>
-              </a:spcBef>
-              <a:spcAft>
-                <a:spcPts val="500"/>
-              </a:spcAft>
-              <a:buClrTx/>
-              <a:buSzPct val="100000"/>
-              <a:buFontTx/>
-              <a:buChar char="•"/>
-              <a:tabLst/>
-              <a:defRPr/>
-            </a:pPr>
-            <a:r>
-              <a:rPr kumimoji="0" lang="en-US" sz="1030" b="0" i="0" u="none" strike="noStrike" kern="1200" cap="none" spc="0" normalizeH="0" baseline="0" noProof="0" dirty="0">
-                <a:ln>
-                  <a:noFill/>
-                </a:ln>
-                <a:solidFill>
-                  <a:srgbClr val="1E293B"/>
-                </a:solidFill>
-                <a:effectLst/>
-                <a:uLnTx/>
-                <a:uFillTx/>
-                <a:latin typeface="Calibri" pitchFamily="34" charset="0"/>
-                <a:ea typeface="Calibri" pitchFamily="34" charset="-122"/>
-                <a:cs typeface="Calibri" pitchFamily="34" charset="-120"/>
-              </a:rPr>
-              <a:t>Finds source-level evidence and configuration issues</a:t>
-            </a:r>
-            <a:endParaRPr kumimoji="0" lang="en-US" sz="1030" b="0" i="0" u="none" strike="noStrike" kern="1200" cap="none" spc="0" normalizeH="0" baseline="0" noProof="0" dirty="0">
-              <a:ln>
-                <a:noFill/>
-              </a:ln>
-              <a:solidFill>
-                <a:prstClr val="black"/>
-              </a:solidFill>
-              <a:effectLst/>
-              <a:uLnTx/>
-              <a:uFillTx/>
-              <a:latin typeface="Calibri" panose="020F0502020204030204"/>
-              <a:ea typeface="+mn-ea"/>
-              <a:cs typeface="+mn-cs"/>
-            </a:endParaRPr>
-          </a:p>
-          <a:p>
-            <a:pPr marL="342900" marR="0" lvl="0" indent="-342900" algn="l" defTabSz="914400" rtl="0" eaLnBrk="1" fontAlgn="auto" latinLnBrk="0" hangingPunct="1">
-              <a:lnSpc>
-                <a:spcPct val="100000"/>
-              </a:lnSpc>
-              <a:spcBef>
-                <a:spcPts val="0"/>
-              </a:spcBef>
-              <a:spcAft>
-                <a:spcPts val="500"/>
-              </a:spcAft>
-              <a:buClrTx/>
-              <a:buSzPct val="100000"/>
-              <a:buFontTx/>
-              <a:buChar char="•"/>
-              <a:tabLst/>
-              <a:defRPr/>
-            </a:pPr>
-            <a:r>
-              <a:rPr kumimoji="0" lang="en-US" sz="1030" b="0" i="0" u="none" strike="noStrike" kern="1200" cap="none" spc="0" normalizeH="0" baseline="0" noProof="0" dirty="0">
-                <a:ln>
-                  <a:noFill/>
-                </a:ln>
-                <a:solidFill>
-                  <a:srgbClr val="1E293B"/>
-                </a:solidFill>
-                <a:effectLst/>
-                <a:uLnTx/>
-                <a:uFillTx/>
-                <a:latin typeface="Calibri" pitchFamily="34" charset="0"/>
-                <a:ea typeface="Calibri" pitchFamily="34" charset="-122"/>
-                <a:cs typeface="Calibri" pitchFamily="34" charset="-120"/>
-              </a:rPr>
-              <a:t>Good fit for CI/CD and early design feedback</a:t>
-            </a:r>
-            <a:endParaRPr kumimoji="0" lang="en-US" sz="1030" b="0" i="0" u="none" strike="noStrike" kern="1200" cap="none" spc="0" normalizeH="0" baseline="0" noProof="0" dirty="0">
-              <a:ln>
-                <a:noFill/>
-              </a:ln>
-              <a:solidFill>
-                <a:prstClr val="black"/>
-              </a:solidFill>
-              <a:effectLst/>
-              <a:uLnTx/>
-              <a:uFillTx/>
-              <a:latin typeface="Calibri" panose="020F0502020204030204"/>
-              <a:ea typeface="+mn-ea"/>
-              <a:cs typeface="+mn-cs"/>
-            </a:endParaRPr>
-          </a:p>
-        </p:txBody>
-      </p:sp>
-      <p:sp>
-        <p:nvSpPr>
-          <p:cNvPr id="7" name="Shape 5"/>
-          <p:cNvSpPr/>
-          <p:nvPr/>
-        </p:nvSpPr>
-        <p:spPr>
-          <a:xfrm>
-            <a:off x="4617720" y="1024128"/>
-            <a:ext cx="457200" cy="36576"/>
-          </a:xfrm>
-          <a:prstGeom prst="rect">
-            <a:avLst/>
-          </a:prstGeom>
-          <a:solidFill>
-            <a:srgbClr val="1C4E80"/>
-          </a:solidFill>
-          <a:ln w="12700">
-            <a:solidFill>
-              <a:srgbClr val="1C4E80"/>
-            </a:solidFill>
-            <a:prstDash val="solid"/>
-          </a:ln>
-        </p:spPr>
-      </p:sp>
-      <p:sp>
-        <p:nvSpPr>
-          <p:cNvPr id="8" name="Text 6"/>
-          <p:cNvSpPr/>
-          <p:nvPr/>
-        </p:nvSpPr>
-        <p:spPr>
-          <a:xfrm>
-            <a:off x="4617720" y="1143000"/>
-            <a:ext cx="3749040" cy="292608"/>
-          </a:xfrm>
-          <a:prstGeom prst="rect">
-            <a:avLst/>
-          </a:prstGeom>
-          <a:noFill/>
-          <a:ln/>
-        </p:spPr>
-        <p:txBody>
-          <a:bodyPr wrap="square" lIns="0" tIns="0" rIns="0" bIns="0" rtlCol="0" anchor="ctr"/>
-          <a:lstStyle/>
-          <a:p>
-            <a:pPr marL="0" marR="0" lvl="0" indent="0" algn="l" defTabSz="914400" rtl="0" eaLnBrk="1" fontAlgn="auto" latinLnBrk="0" hangingPunct="1">
-              <a:lnSpc>
-                <a:spcPct val="100000"/>
-              </a:lnSpc>
-              <a:spcBef>
-                <a:spcPts val="0"/>
-              </a:spcBef>
-              <a:spcAft>
-                <a:spcPts val="0"/>
-              </a:spcAft>
-              <a:buClrTx/>
-              <a:buSzTx/>
-              <a:buFontTx/>
-              <a:buNone/>
-              <a:tabLst/>
-              <a:defRPr/>
-            </a:pPr>
-            <a:r>
-              <a:rPr kumimoji="0" lang="en-US" sz="1400" b="1" i="0" u="none" strike="noStrike" kern="1200" cap="none" spc="0" normalizeH="0" baseline="0" noProof="0" dirty="0">
-                <a:ln>
-                  <a:noFill/>
-                </a:ln>
-                <a:solidFill>
-                  <a:srgbClr val="0F2A44"/>
-                </a:solidFill>
-                <a:effectLst/>
-                <a:uLnTx/>
-                <a:uFillTx/>
-                <a:latin typeface="Calibri" pitchFamily="34" charset="0"/>
-                <a:ea typeface="Calibri" pitchFamily="34" charset="-122"/>
-                <a:cs typeface="Calibri" pitchFamily="34" charset="-120"/>
-              </a:rPr>
-              <a:t>Dynamic analysis</a:t>
-            </a:r>
-            <a:endParaRPr kumimoji="0" lang="en-US" sz="1400" b="0" i="0" u="none" strike="noStrike" kern="1200" cap="none" spc="0" normalizeH="0" baseline="0" noProof="0" dirty="0">
-              <a:ln>
-                <a:noFill/>
-              </a:ln>
-              <a:solidFill>
-                <a:prstClr val="black"/>
-              </a:solidFill>
-              <a:effectLst/>
-              <a:uLnTx/>
-              <a:uFillTx/>
-              <a:latin typeface="Calibri" panose="020F0502020204030204"/>
-              <a:ea typeface="+mn-ea"/>
-              <a:cs typeface="+mn-cs"/>
-            </a:endParaRPr>
-          </a:p>
-        </p:txBody>
-      </p:sp>
-      <p:sp>
-        <p:nvSpPr>
-          <p:cNvPr id="9" name="Text 7"/>
-          <p:cNvSpPr/>
-          <p:nvPr/>
-        </p:nvSpPr>
-        <p:spPr>
-          <a:xfrm>
-            <a:off x="4782312" y="1600200"/>
-            <a:ext cx="3657600" cy="1417320"/>
-          </a:xfrm>
-          <a:prstGeom prst="rect">
-            <a:avLst/>
-          </a:prstGeom>
-          <a:noFill/>
-          <a:ln/>
-        </p:spPr>
-        <p:txBody>
-          <a:bodyPr wrap="square" lIns="0" tIns="0" rIns="0" bIns="0" rtlCol="0" anchor="ctr"/>
-          <a:lstStyle/>
-          <a:p>
-            <a:pPr marL="342900" marR="0" lvl="0" indent="-342900" algn="l" defTabSz="914400" rtl="0" eaLnBrk="1" fontAlgn="auto" latinLnBrk="0" hangingPunct="1">
-              <a:lnSpc>
-                <a:spcPct val="100000"/>
-              </a:lnSpc>
-              <a:spcBef>
-                <a:spcPts val="0"/>
-              </a:spcBef>
-              <a:spcAft>
-                <a:spcPts val="500"/>
-              </a:spcAft>
-              <a:buClrTx/>
-              <a:buSzPct val="100000"/>
-              <a:buFontTx/>
-              <a:buChar char="•"/>
-              <a:tabLst/>
-              <a:defRPr/>
-            </a:pPr>
-            <a:r>
-              <a:rPr kumimoji="0" lang="en-US" sz="1030" b="0" i="0" u="none" strike="noStrike" kern="1200" cap="none" spc="0" normalizeH="0" baseline="0" noProof="0" dirty="0">
-                <a:ln>
-                  <a:noFill/>
-                </a:ln>
-                <a:solidFill>
-                  <a:srgbClr val="1E293B"/>
-                </a:solidFill>
-                <a:effectLst/>
-                <a:uLnTx/>
-                <a:uFillTx/>
-                <a:latin typeface="Calibri" pitchFamily="34" charset="0"/>
-                <a:ea typeface="Calibri" pitchFamily="34" charset="-122"/>
-                <a:cs typeface="Calibri" pitchFamily="34" charset="-120"/>
-              </a:rPr>
-              <a:t>Observes real runtime calls and frequencies</a:t>
-            </a:r>
-            <a:endParaRPr kumimoji="0" lang="en-US" sz="1030" b="0" i="0" u="none" strike="noStrike" kern="1200" cap="none" spc="0" normalizeH="0" baseline="0" noProof="0" dirty="0">
-              <a:ln>
-                <a:noFill/>
-              </a:ln>
-              <a:solidFill>
-                <a:prstClr val="black"/>
-              </a:solidFill>
-              <a:effectLst/>
-              <a:uLnTx/>
-              <a:uFillTx/>
-              <a:latin typeface="Calibri" panose="020F0502020204030204"/>
-              <a:ea typeface="+mn-ea"/>
-              <a:cs typeface="+mn-cs"/>
-            </a:endParaRPr>
-          </a:p>
-          <a:p>
-            <a:pPr marL="342900" marR="0" lvl="0" indent="-342900" algn="l" defTabSz="914400" rtl="0" eaLnBrk="1" fontAlgn="auto" latinLnBrk="0" hangingPunct="1">
-              <a:lnSpc>
-                <a:spcPct val="100000"/>
-              </a:lnSpc>
-              <a:spcBef>
-                <a:spcPts val="0"/>
-              </a:spcBef>
-              <a:spcAft>
-                <a:spcPts val="500"/>
-              </a:spcAft>
-              <a:buClrTx/>
-              <a:buSzPct val="100000"/>
-              <a:buFontTx/>
-              <a:buChar char="•"/>
-              <a:tabLst/>
-              <a:defRPr/>
-            </a:pPr>
-            <a:r>
-              <a:rPr kumimoji="0" lang="en-US" sz="1030" b="0" i="0" u="none" strike="noStrike" kern="1200" cap="none" spc="0" normalizeH="0" baseline="0" noProof="0" dirty="0">
-                <a:ln>
-                  <a:noFill/>
-                </a:ln>
-                <a:solidFill>
-                  <a:srgbClr val="1E293B"/>
-                </a:solidFill>
-                <a:effectLst/>
-                <a:uLnTx/>
-                <a:uFillTx/>
-                <a:latin typeface="Calibri" pitchFamily="34" charset="0"/>
-                <a:ea typeface="Calibri" pitchFamily="34" charset="-122"/>
-                <a:cs typeface="Calibri" pitchFamily="34" charset="-120"/>
-              </a:rPr>
-              <a:t>Requires deployed system and representative workload</a:t>
-            </a:r>
-            <a:endParaRPr kumimoji="0" lang="en-US" sz="1030" b="0" i="0" u="none" strike="noStrike" kern="1200" cap="none" spc="0" normalizeH="0" baseline="0" noProof="0" dirty="0">
-              <a:ln>
-                <a:noFill/>
-              </a:ln>
-              <a:solidFill>
-                <a:prstClr val="black"/>
-              </a:solidFill>
-              <a:effectLst/>
-              <a:uLnTx/>
-              <a:uFillTx/>
-              <a:latin typeface="Calibri" panose="020F0502020204030204"/>
-              <a:ea typeface="+mn-ea"/>
-              <a:cs typeface="+mn-cs"/>
-            </a:endParaRPr>
-          </a:p>
-          <a:p>
-            <a:pPr marL="342900" marR="0" lvl="0" indent="-342900" algn="l" defTabSz="914400" rtl="0" eaLnBrk="1" fontAlgn="auto" latinLnBrk="0" hangingPunct="1">
-              <a:lnSpc>
-                <a:spcPct val="100000"/>
-              </a:lnSpc>
-              <a:spcBef>
-                <a:spcPts val="0"/>
-              </a:spcBef>
-              <a:spcAft>
-                <a:spcPts val="500"/>
-              </a:spcAft>
-              <a:buClrTx/>
-              <a:buSzPct val="100000"/>
-              <a:buFontTx/>
-              <a:buChar char="•"/>
-              <a:tabLst/>
-              <a:defRPr/>
-            </a:pPr>
-            <a:r>
-              <a:rPr kumimoji="0" lang="en-US" sz="1030" b="0" i="0" u="none" strike="noStrike" kern="1200" cap="none" spc="0" normalizeH="0" baseline="0" noProof="0" dirty="0">
-                <a:ln>
-                  <a:noFill/>
-                </a:ln>
-                <a:solidFill>
-                  <a:srgbClr val="1E293B"/>
-                </a:solidFill>
-                <a:effectLst/>
-                <a:uLnTx/>
-                <a:uFillTx/>
-                <a:latin typeface="Calibri" pitchFamily="34" charset="0"/>
-                <a:ea typeface="Calibri" pitchFamily="34" charset="-122"/>
-                <a:cs typeface="Calibri" pitchFamily="34" charset="-120"/>
-              </a:rPr>
-              <a:t>Captures dynamic routing and production behaviour</a:t>
-            </a:r>
-            <a:endParaRPr kumimoji="0" lang="en-US" sz="1030" b="0" i="0" u="none" strike="noStrike" kern="1200" cap="none" spc="0" normalizeH="0" baseline="0" noProof="0" dirty="0">
-              <a:ln>
-                <a:noFill/>
-              </a:ln>
-              <a:solidFill>
-                <a:prstClr val="black"/>
-              </a:solidFill>
-              <a:effectLst/>
-              <a:uLnTx/>
-              <a:uFillTx/>
-              <a:latin typeface="Calibri" panose="020F0502020204030204"/>
-              <a:ea typeface="+mn-ea"/>
-              <a:cs typeface="+mn-cs"/>
-            </a:endParaRPr>
-          </a:p>
-          <a:p>
-            <a:pPr marL="342900" marR="0" lvl="0" indent="-342900" algn="l" defTabSz="914400" rtl="0" eaLnBrk="1" fontAlgn="auto" latinLnBrk="0" hangingPunct="1">
-              <a:lnSpc>
-                <a:spcPct val="100000"/>
-              </a:lnSpc>
-              <a:spcBef>
-                <a:spcPts val="0"/>
-              </a:spcBef>
-              <a:spcAft>
-                <a:spcPts val="500"/>
-              </a:spcAft>
-              <a:buClrTx/>
-              <a:buSzPct val="100000"/>
-              <a:buFontTx/>
-              <a:buChar char="•"/>
-              <a:tabLst/>
-              <a:defRPr/>
-            </a:pPr>
-            <a:r>
-              <a:rPr kumimoji="0" lang="en-US" sz="1030" b="0" i="0" u="none" strike="noStrike" kern="1200" cap="none" spc="0" normalizeH="0" baseline="0" noProof="0" dirty="0">
-                <a:ln>
-                  <a:noFill/>
-                </a:ln>
-                <a:solidFill>
-                  <a:srgbClr val="1E293B"/>
-                </a:solidFill>
-                <a:effectLst/>
-                <a:uLnTx/>
-                <a:uFillTx/>
-                <a:latin typeface="Calibri" pitchFamily="34" charset="0"/>
-                <a:ea typeface="Calibri" pitchFamily="34" charset="-122"/>
-                <a:cs typeface="Calibri" pitchFamily="34" charset="-120"/>
-              </a:rPr>
-              <a:t>Useful for validating or calibrating static findings</a:t>
-            </a:r>
-            <a:endParaRPr kumimoji="0" lang="en-US" sz="1030" b="0" i="0" u="none" strike="noStrike" kern="1200" cap="none" spc="0" normalizeH="0" baseline="0" noProof="0" dirty="0">
-              <a:ln>
-                <a:noFill/>
-              </a:ln>
-              <a:solidFill>
-                <a:prstClr val="black"/>
-              </a:solidFill>
-              <a:effectLst/>
-              <a:uLnTx/>
-              <a:uFillTx/>
-              <a:latin typeface="Calibri" panose="020F0502020204030204"/>
-              <a:ea typeface="+mn-ea"/>
-              <a:cs typeface="+mn-cs"/>
-            </a:endParaRPr>
-          </a:p>
-        </p:txBody>
-      </p:sp>
-      <p:sp>
-        <p:nvSpPr>
-          <p:cNvPr id="10" name="Text 8"/>
-          <p:cNvSpPr/>
-          <p:nvPr/>
-        </p:nvSpPr>
-        <p:spPr>
-          <a:xfrm>
-            <a:off x="548640" y="3429000"/>
-            <a:ext cx="8046720" cy="292608"/>
-          </a:xfrm>
-          <a:prstGeom prst="rect">
-            <a:avLst/>
-          </a:prstGeom>
-          <a:noFill/>
-          <a:ln/>
-        </p:spPr>
-        <p:txBody>
-          <a:bodyPr wrap="square" lIns="0" tIns="0" rIns="0" bIns="0" rtlCol="0" anchor="ctr"/>
-          <a:lstStyle/>
-          <a:p>
-            <a:pPr marL="0" marR="0" lvl="0" indent="0" algn="l" defTabSz="914400" rtl="0" eaLnBrk="1" fontAlgn="auto" latinLnBrk="0" hangingPunct="1">
-              <a:lnSpc>
-                <a:spcPct val="100000"/>
-              </a:lnSpc>
-              <a:spcBef>
-                <a:spcPts val="0"/>
-              </a:spcBef>
-              <a:spcAft>
-                <a:spcPts val="0"/>
-              </a:spcAft>
-              <a:buClrTx/>
-              <a:buSzTx/>
-              <a:buFontTx/>
-              <a:buNone/>
-              <a:tabLst/>
-              <a:defRPr/>
-            </a:pPr>
-            <a:r>
               <a:rPr kumimoji="0" lang="en-US" sz="1300" b="1" i="0" u="none" strike="noStrike" kern="1200" cap="none" spc="0" normalizeH="0" baseline="0" noProof="0" dirty="0">
                 <a:ln>
                   <a:noFill/>
@@ -27746,7 +28946,7 @@
                 <a:ea typeface="Calibri" pitchFamily="34" charset="-122"/>
                 <a:cs typeface="Calibri" pitchFamily="34" charset="-120"/>
               </a:rPr>
-              <a:t>Chosen tradeoff</a:t>
+              <a:t>Candidate modules</a:t>
             </a:r>
             <a:endParaRPr kumimoji="0" lang="en-US" sz="1300" b="0" i="0" u="none" strike="noStrike" kern="1200" cap="none" spc="0" normalizeH="0" baseline="0" noProof="0" dirty="0">
               <a:ln>
@@ -27767,14 +28967,14 @@
       </p:sp>
       <p:sp>
         <p:nvSpPr>
-          <p:cNvPr id="11" name="Text 9"/>
-          <p:cNvSpPr/>
-          <p:nvPr/>
-        </p:nvSpPr>
-        <p:spPr>
-          <a:xfrm>
-            <a:off x="548640" y="3767328"/>
-            <a:ext cx="8046720" cy="658368"/>
+          <p:cNvPr id="5" name="Text 3"/>
+          <p:cNvSpPr/>
+          <p:nvPr/>
+        </p:nvSpPr>
+        <p:spPr>
+          <a:xfrm>
+            <a:off x="713232" y="1371600"/>
+            <a:ext cx="3657600" cy="1051560"/>
           </a:xfrm>
           <a:prstGeom prst="rect">
             <a:avLst/>
@@ -27786,7 +28986,7 @@
           <a:bodyPr wrap="square" lIns="0" tIns="0" rIns="0" bIns="0" rtlCol="0" anchor="ctr"/>
           <a:lstStyle/>
           <a:p>
-            <a:pPr marL="0" marR="0" lvl="0" indent="0" algn="l" defTabSz="914400" rtl="0" eaLnBrk="1" fontAlgn="auto" latinLnBrk="0" hangingPunct="1">
+            <a:pPr marL="342900" marR="0" lvl="0" indent="-342900" algn="l" defTabSz="914400" rtl="0" eaLnBrk="1" fontAlgn="auto" latinLnBrk="0" hangingPunct="1">
               <a:lnSpc>
                 <a:spcPct val="100000"/>
               </a:lnSpc>
@@ -27794,12 +28994,12 @@
                 <a:spcPts val="0"/>
               </a:spcBef>
               <a:spcAft>
-                <a:spcPts val="0"/>
+                <a:spcPts val="400"/>
               </a:spcAft>
               <a:buClrTx/>
-              <a:buSzTx/>
+              <a:buSzPct val="100000"/>
               <a:buFontTx/>
-              <a:buNone/>
+              <a:buChar char="•"/>
               <a:tabLst/>
               <a:defRPr/>
             </a:pPr>
@@ -27818,7 +29018,7 @@
                 <a:ea typeface="Calibri" pitchFamily="34" charset="-122"/>
                 <a:cs typeface="Calibri" pitchFamily="34" charset="-120"/>
               </a:rPr>
-              <a:t>MSA Detector prioritises applicability over runtime precision: it can analyse systems before they are running, making it useful during development, review, and CI. Runtime traces would improve call-frequency accuracy, but would reduce portability and require operational setup.</a:t>
+              <a:t>Scan repository for Maven/Gradle build files</a:t>
             </a:r>
             <a:endParaRPr kumimoji="0" lang="en-US" sz="1050" b="0" i="0" u="none" strike="noStrike" kern="1200" cap="none" spc="0" normalizeH="0" baseline="0" noProof="0" dirty="0">
               <a:ln>
@@ -27835,11 +29035,1156 @@
               <a:cs typeface="+mn-cs"/>
             </a:endParaRPr>
           </a:p>
-        </p:txBody>
-      </p:sp>
-      <p:sp>
-        <p:nvSpPr>
-          <p:cNvPr id="12" name="Text 10"/>
+          <a:p>
+            <a:pPr marL="342900" marR="0" lvl="0" indent="-342900" algn="l" defTabSz="914400" rtl="0" eaLnBrk="1" fontAlgn="auto" latinLnBrk="0" hangingPunct="1">
+              <a:lnSpc>
+                <a:spcPct val="100000"/>
+              </a:lnSpc>
+              <a:spcBef>
+                <a:spcPts val="0"/>
+              </a:spcBef>
+              <a:spcAft>
+                <a:spcPts val="400"/>
+              </a:spcAft>
+              <a:buClrTx/>
+              <a:buSzPct val="100000"/>
+              <a:buFontTx/>
+              <a:buChar char="•"/>
+              <a:tabLst/>
+              <a:defRPr/>
+            </a:pPr>
+            <a:r>
+              <a:rPr kumimoji="0" lang="en-US" sz="1050" b="0" i="0" u="none" strike="noStrike" kern="1200" cap="none" spc="0" normalizeH="0" baseline="0" noProof="0" dirty="0">
+                <a:ln>
+                  <a:noFill/>
+                </a:ln>
+                <a:solidFill>
+                  <a:srgbClr val="1E293B"/>
+                </a:solidFill>
+                <a:effectLst/>
+                <a:uLnTx/>
+                <a:uFillTx/>
+                <a:latin typeface="Calibri" pitchFamily="34" charset="0"/>
+                <a:ea typeface="Calibri" pitchFamily="34" charset="-122"/>
+                <a:cs typeface="Calibri" pitchFamily="34" charset="-120"/>
+              </a:rPr>
+              <a:t>Exclude aggregators, generated modules, examples, docs, and tests</a:t>
+            </a:r>
+            <a:endParaRPr kumimoji="0" lang="en-US" sz="1050" b="0" i="0" u="none" strike="noStrike" kern="1200" cap="none" spc="0" normalizeH="0" baseline="0" noProof="0" dirty="0">
+              <a:ln>
+                <a:noFill/>
+              </a:ln>
+              <a:solidFill>
+                <a:prstClr val="black"/>
+              </a:solidFill>
+              <a:effectLst/>
+              <a:uLnTx/>
+              <a:uFillTx/>
+              <a:latin typeface="Calibri" panose="020F0502020204030204"/>
+              <a:ea typeface="+mn-ea"/>
+              <a:cs typeface="+mn-cs"/>
+            </a:endParaRPr>
+          </a:p>
+          <a:p>
+            <a:pPr marL="342900" marR="0" lvl="0" indent="-342900" algn="l" defTabSz="914400" rtl="0" eaLnBrk="1" fontAlgn="auto" latinLnBrk="0" hangingPunct="1">
+              <a:lnSpc>
+                <a:spcPct val="100000"/>
+              </a:lnSpc>
+              <a:spcBef>
+                <a:spcPts val="0"/>
+              </a:spcBef>
+              <a:spcAft>
+                <a:spcPts val="400"/>
+              </a:spcAft>
+              <a:buClrTx/>
+              <a:buSzPct val="100000"/>
+              <a:buFontTx/>
+              <a:buChar char="•"/>
+              <a:tabLst/>
+              <a:defRPr/>
+            </a:pPr>
+            <a:r>
+              <a:rPr kumimoji="0" lang="en-US" sz="1050" b="0" i="0" u="none" strike="noStrike" kern="1200" cap="none" spc="0" normalizeH="0" baseline="0" noProof="0" dirty="0">
+                <a:ln>
+                  <a:noFill/>
+                </a:ln>
+                <a:solidFill>
+                  <a:srgbClr val="1E293B"/>
+                </a:solidFill>
+                <a:effectLst/>
+                <a:uLnTx/>
+                <a:uFillTx/>
+                <a:latin typeface="Calibri" pitchFamily="34" charset="0"/>
+                <a:ea typeface="Calibri" pitchFamily="34" charset="-122"/>
+                <a:cs typeface="Calibri" pitchFamily="34" charset="-120"/>
+              </a:rPr>
+              <a:t>Keep modules with at least one deployability signal</a:t>
+            </a:r>
+            <a:endParaRPr kumimoji="0" lang="en-US" sz="1050" b="0" i="0" u="none" strike="noStrike" kern="1200" cap="none" spc="0" normalizeH="0" baseline="0" noProof="0" dirty="0">
+              <a:ln>
+                <a:noFill/>
+              </a:ln>
+              <a:solidFill>
+                <a:prstClr val="black"/>
+              </a:solidFill>
+              <a:effectLst/>
+              <a:uLnTx/>
+              <a:uFillTx/>
+              <a:latin typeface="Calibri" panose="020F0502020204030204"/>
+              <a:ea typeface="+mn-ea"/>
+              <a:cs typeface="+mn-cs"/>
+            </a:endParaRPr>
+          </a:p>
+        </p:txBody>
+      </p:sp>
+      <p:sp>
+        <p:nvSpPr>
+          <p:cNvPr id="6" name="Text 4"/>
+          <p:cNvSpPr/>
+          <p:nvPr/>
+        </p:nvSpPr>
+        <p:spPr>
+          <a:xfrm>
+            <a:off x="4617720" y="987552"/>
+            <a:ext cx="3977640" cy="274320"/>
+          </a:xfrm>
+          <a:prstGeom prst="rect">
+            <a:avLst/>
+          </a:prstGeom>
+          <a:noFill/>
+          <a:ln/>
+        </p:spPr>
+        <p:txBody>
+          <a:bodyPr wrap="square" lIns="0" tIns="0" rIns="0" bIns="0" rtlCol="0" anchor="ctr"/>
+          <a:lstStyle/>
+          <a:p>
+            <a:pPr marL="0" marR="0" lvl="0" indent="0" algn="l" defTabSz="914400" rtl="0" eaLnBrk="1" fontAlgn="auto" latinLnBrk="0" hangingPunct="1">
+              <a:lnSpc>
+                <a:spcPct val="100000"/>
+              </a:lnSpc>
+              <a:spcBef>
+                <a:spcPts val="0"/>
+              </a:spcBef>
+              <a:spcAft>
+                <a:spcPts val="0"/>
+              </a:spcAft>
+              <a:buClrTx/>
+              <a:buSzTx/>
+              <a:buFontTx/>
+              <a:buNone/>
+              <a:tabLst/>
+              <a:defRPr/>
+            </a:pPr>
+            <a:r>
+              <a:rPr kumimoji="0" lang="en-US" sz="1300" b="1" i="0" u="none" strike="noStrike" kern="1200" cap="none" spc="0" normalizeH="0" baseline="0" noProof="0" dirty="0">
+                <a:ln>
+                  <a:noFill/>
+                </a:ln>
+                <a:solidFill>
+                  <a:srgbClr val="0F2A44"/>
+                </a:solidFill>
+                <a:effectLst/>
+                <a:uLnTx/>
+                <a:uFillTx/>
+                <a:latin typeface="Calibri" pitchFamily="34" charset="0"/>
+                <a:ea typeface="Calibri" pitchFamily="34" charset="-122"/>
+                <a:cs typeface="Calibri" pitchFamily="34" charset="-120"/>
+              </a:rPr>
+              <a:t>Deployability gate</a:t>
+            </a:r>
+            <a:endParaRPr kumimoji="0" lang="en-US" sz="1300" b="0" i="0" u="none" strike="noStrike" kern="1200" cap="none" spc="0" normalizeH="0" baseline="0" noProof="0" dirty="0">
+              <a:ln>
+                <a:noFill/>
+              </a:ln>
+              <a:solidFill>
+                <a:prstClr val="black"/>
+              </a:solidFill>
+              <a:effectLst/>
+              <a:uLnTx/>
+              <a:uFillTx/>
+              <a:latin typeface="Calibri" panose="020F0502020204030204"/>
+              <a:ea typeface="+mn-ea"/>
+              <a:cs typeface="+mn-cs"/>
+            </a:endParaRPr>
+          </a:p>
+        </p:txBody>
+      </p:sp>
+      <p:sp>
+        <p:nvSpPr>
+          <p:cNvPr id="7" name="Shape 5"/>
+          <p:cNvSpPr/>
+          <p:nvPr/>
+        </p:nvSpPr>
+        <p:spPr>
+          <a:xfrm>
+            <a:off x="4617720" y="1399032"/>
+            <a:ext cx="347472" cy="36576"/>
+          </a:xfrm>
+          <a:prstGeom prst="rect">
+            <a:avLst/>
+          </a:prstGeom>
+          <a:solidFill>
+            <a:srgbClr val="059669"/>
+          </a:solidFill>
+          <a:ln w="12700">
+            <a:solidFill>
+              <a:srgbClr val="059669"/>
+            </a:solidFill>
+            <a:prstDash val="solid"/>
+          </a:ln>
+        </p:spPr>
+      </p:sp>
+      <p:sp>
+        <p:nvSpPr>
+          <p:cNvPr id="8" name="Text 6"/>
+          <p:cNvSpPr/>
+          <p:nvPr/>
+        </p:nvSpPr>
+        <p:spPr>
+          <a:xfrm>
+            <a:off x="4617720" y="1517904"/>
+            <a:ext cx="731520" cy="219456"/>
+          </a:xfrm>
+          <a:prstGeom prst="rect">
+            <a:avLst/>
+          </a:prstGeom>
+          <a:noFill/>
+          <a:ln/>
+        </p:spPr>
+        <p:txBody>
+          <a:bodyPr wrap="square" lIns="0" tIns="0" rIns="0" bIns="0" rtlCol="0" anchor="ctr"/>
+          <a:lstStyle/>
+          <a:p>
+            <a:pPr marL="0" marR="0" lvl="0" indent="0" algn="l" defTabSz="914400" rtl="0" eaLnBrk="1" fontAlgn="auto" latinLnBrk="0" hangingPunct="1">
+              <a:lnSpc>
+                <a:spcPct val="100000"/>
+              </a:lnSpc>
+              <a:spcBef>
+                <a:spcPts val="0"/>
+              </a:spcBef>
+              <a:spcAft>
+                <a:spcPts val="0"/>
+              </a:spcAft>
+              <a:buClrTx/>
+              <a:buSzTx/>
+              <a:buFontTx/>
+              <a:buNone/>
+              <a:tabLst/>
+              <a:defRPr/>
+            </a:pPr>
+            <a:r>
+              <a:rPr kumimoji="0" lang="en-US" sz="880" b="1" i="0" u="none" strike="noStrike" kern="1200" cap="none" spc="0" normalizeH="0" baseline="0" noProof="0" dirty="0">
+                <a:ln>
+                  <a:noFill/>
+                </a:ln>
+                <a:solidFill>
+                  <a:srgbClr val="059669"/>
+                </a:solidFill>
+                <a:effectLst/>
+                <a:uLnTx/>
+                <a:uFillTx/>
+                <a:latin typeface="Calibri" pitchFamily="34" charset="0"/>
+                <a:ea typeface="Calibri" pitchFamily="34" charset="-122"/>
+                <a:cs typeface="Calibri" pitchFamily="34" charset="-120"/>
+              </a:rPr>
+              <a:t>HIGH</a:t>
+            </a:r>
+            <a:endParaRPr kumimoji="0" lang="en-US" sz="880" b="0" i="0" u="none" strike="noStrike" kern="1200" cap="none" spc="0" normalizeH="0" baseline="0" noProof="0" dirty="0">
+              <a:ln>
+                <a:noFill/>
+              </a:ln>
+              <a:solidFill>
+                <a:prstClr val="black"/>
+              </a:solidFill>
+              <a:effectLst/>
+              <a:uLnTx/>
+              <a:uFillTx/>
+              <a:latin typeface="Calibri" panose="020F0502020204030204"/>
+              <a:ea typeface="+mn-ea"/>
+              <a:cs typeface="+mn-cs"/>
+            </a:endParaRPr>
+          </a:p>
+        </p:txBody>
+      </p:sp>
+      <p:sp>
+        <p:nvSpPr>
+          <p:cNvPr id="9" name="Text 7"/>
+          <p:cNvSpPr/>
+          <p:nvPr/>
+        </p:nvSpPr>
+        <p:spPr>
+          <a:xfrm>
+            <a:off x="5440680" y="1371600"/>
+            <a:ext cx="3154680" cy="228600"/>
+          </a:xfrm>
+          <a:prstGeom prst="rect">
+            <a:avLst/>
+          </a:prstGeom>
+          <a:noFill/>
+          <a:ln/>
+        </p:spPr>
+        <p:txBody>
+          <a:bodyPr wrap="square" lIns="0" tIns="0" rIns="0" bIns="0" rtlCol="0" anchor="ctr"/>
+          <a:lstStyle/>
+          <a:p>
+            <a:pPr marL="0" marR="0" lvl="0" indent="0" algn="l" defTabSz="914400" rtl="0" eaLnBrk="1" fontAlgn="auto" latinLnBrk="0" hangingPunct="1">
+              <a:lnSpc>
+                <a:spcPct val="100000"/>
+              </a:lnSpc>
+              <a:spcBef>
+                <a:spcPts val="0"/>
+              </a:spcBef>
+              <a:spcAft>
+                <a:spcPts val="0"/>
+              </a:spcAft>
+              <a:buClrTx/>
+              <a:buSzTx/>
+              <a:buFontTx/>
+              <a:buNone/>
+              <a:tabLst/>
+              <a:defRPr/>
+            </a:pPr>
+            <a:r>
+              <a:rPr kumimoji="0" lang="en-US" sz="1050" b="1" i="0" u="none" strike="noStrike" kern="1200" cap="none" spc="0" normalizeH="0" baseline="0" noProof="0" dirty="0">
+                <a:ln>
+                  <a:noFill/>
+                </a:ln>
+                <a:solidFill>
+                  <a:srgbClr val="0F2A44"/>
+                </a:solidFill>
+                <a:effectLst/>
+                <a:uLnTx/>
+                <a:uFillTx/>
+                <a:latin typeface="Calibri" pitchFamily="34" charset="0"/>
+                <a:ea typeface="Calibri" pitchFamily="34" charset="-122"/>
+                <a:cs typeface="Calibri" pitchFamily="34" charset="-120"/>
+              </a:rPr>
+              <a:t>Spring Boot entry point</a:t>
+            </a:r>
+            <a:endParaRPr kumimoji="0" lang="en-US" sz="1050" b="0" i="0" u="none" strike="noStrike" kern="1200" cap="none" spc="0" normalizeH="0" baseline="0" noProof="0" dirty="0">
+              <a:ln>
+                <a:noFill/>
+              </a:ln>
+              <a:solidFill>
+                <a:prstClr val="black"/>
+              </a:solidFill>
+              <a:effectLst/>
+              <a:uLnTx/>
+              <a:uFillTx/>
+              <a:latin typeface="Calibri" panose="020F0502020204030204"/>
+              <a:ea typeface="+mn-ea"/>
+              <a:cs typeface="+mn-cs"/>
+            </a:endParaRPr>
+          </a:p>
+        </p:txBody>
+      </p:sp>
+      <p:sp>
+        <p:nvSpPr>
+          <p:cNvPr id="10" name="Text 8"/>
+          <p:cNvSpPr/>
+          <p:nvPr/>
+        </p:nvSpPr>
+        <p:spPr>
+          <a:xfrm>
+            <a:off x="5440680" y="1618488"/>
+            <a:ext cx="3154680" cy="292608"/>
+          </a:xfrm>
+          <a:prstGeom prst="rect">
+            <a:avLst/>
+          </a:prstGeom>
+          <a:noFill/>
+          <a:ln/>
+        </p:spPr>
+        <p:txBody>
+          <a:bodyPr wrap="square" lIns="0" tIns="0" rIns="0" bIns="0" rtlCol="0" anchor="ctr">
+            <a:normAutofit/>
+          </a:bodyPr>
+          <a:lstStyle/>
+          <a:p>
+            <a:pPr marL="0" marR="0" lvl="0" indent="0" algn="l" defTabSz="914400" rtl="0" eaLnBrk="1" fontAlgn="auto" latinLnBrk="0" hangingPunct="1">
+              <a:lnSpc>
+                <a:spcPct val="100000"/>
+              </a:lnSpc>
+              <a:spcBef>
+                <a:spcPts val="0"/>
+              </a:spcBef>
+              <a:spcAft>
+                <a:spcPts val="0"/>
+              </a:spcAft>
+              <a:buClrTx/>
+              <a:buSzTx/>
+              <a:buFontTx/>
+              <a:buNone/>
+              <a:tabLst/>
+              <a:defRPr/>
+            </a:pPr>
+            <a:r>
+              <a:rPr kumimoji="0" lang="en-US" sz="890" b="0" i="0" u="none" strike="noStrike" kern="1200" cap="none" spc="0" normalizeH="0" baseline="0" noProof="0" dirty="0">
+                <a:ln>
+                  <a:noFill/>
+                </a:ln>
+                <a:solidFill>
+                  <a:srgbClr val="1E293B"/>
+                </a:solidFill>
+                <a:effectLst/>
+                <a:uLnTx/>
+                <a:uFillTx/>
+                <a:latin typeface="Calibri" pitchFamily="34" charset="0"/>
+                <a:ea typeface="Calibri" pitchFamily="34" charset="-122"/>
+                <a:cs typeface="Calibri" pitchFamily="34" charset="-120"/>
+              </a:rPr>
+              <a:t>@SpringBootApplication / framework annotation</a:t>
+            </a:r>
+            <a:endParaRPr kumimoji="0" lang="en-US" sz="890" b="0" i="0" u="none" strike="noStrike" kern="1200" cap="none" spc="0" normalizeH="0" baseline="0" noProof="0" dirty="0">
+              <a:ln>
+                <a:noFill/>
+              </a:ln>
+              <a:solidFill>
+                <a:prstClr val="black"/>
+              </a:solidFill>
+              <a:effectLst/>
+              <a:uLnTx/>
+              <a:uFillTx/>
+              <a:latin typeface="Calibri" panose="020F0502020204030204"/>
+              <a:ea typeface="+mn-ea"/>
+              <a:cs typeface="+mn-cs"/>
+            </a:endParaRPr>
+          </a:p>
+        </p:txBody>
+      </p:sp>
+      <p:sp>
+        <p:nvSpPr>
+          <p:cNvPr id="11" name="Shape 9"/>
+          <p:cNvSpPr/>
+          <p:nvPr/>
+        </p:nvSpPr>
+        <p:spPr>
+          <a:xfrm>
+            <a:off x="4617720" y="1938528"/>
+            <a:ext cx="3977640" cy="9144"/>
+          </a:xfrm>
+          <a:prstGeom prst="rect">
+            <a:avLst/>
+          </a:prstGeom>
+          <a:solidFill>
+            <a:srgbClr val="D8DEE6"/>
+          </a:solidFill>
+          <a:ln w="12700">
+            <a:solidFill>
+              <a:srgbClr val="D8DEE6"/>
+            </a:solidFill>
+            <a:prstDash val="solid"/>
+          </a:ln>
+        </p:spPr>
+      </p:sp>
+      <p:sp>
+        <p:nvSpPr>
+          <p:cNvPr id="12" name="Shape 10"/>
+          <p:cNvSpPr/>
+          <p:nvPr/>
+        </p:nvSpPr>
+        <p:spPr>
+          <a:xfrm>
+            <a:off x="4617720" y="2057400"/>
+            <a:ext cx="347472" cy="36576"/>
+          </a:xfrm>
+          <a:prstGeom prst="rect">
+            <a:avLst/>
+          </a:prstGeom>
+          <a:solidFill>
+            <a:srgbClr val="0D9488"/>
+          </a:solidFill>
+          <a:ln w="12700">
+            <a:solidFill>
+              <a:srgbClr val="0D9488"/>
+            </a:solidFill>
+            <a:prstDash val="solid"/>
+          </a:ln>
+        </p:spPr>
+      </p:sp>
+      <p:sp>
+        <p:nvSpPr>
+          <p:cNvPr id="13" name="Text 11"/>
+          <p:cNvSpPr/>
+          <p:nvPr/>
+        </p:nvSpPr>
+        <p:spPr>
+          <a:xfrm>
+            <a:off x="4617720" y="2176272"/>
+            <a:ext cx="731520" cy="219456"/>
+          </a:xfrm>
+          <a:prstGeom prst="rect">
+            <a:avLst/>
+          </a:prstGeom>
+          <a:noFill/>
+          <a:ln/>
+        </p:spPr>
+        <p:txBody>
+          <a:bodyPr wrap="square" lIns="0" tIns="0" rIns="0" bIns="0" rtlCol="0" anchor="ctr"/>
+          <a:lstStyle/>
+          <a:p>
+            <a:pPr marL="0" marR="0" lvl="0" indent="0" algn="l" defTabSz="914400" rtl="0" eaLnBrk="1" fontAlgn="auto" latinLnBrk="0" hangingPunct="1">
+              <a:lnSpc>
+                <a:spcPct val="100000"/>
+              </a:lnSpc>
+              <a:spcBef>
+                <a:spcPts val="0"/>
+              </a:spcBef>
+              <a:spcAft>
+                <a:spcPts val="0"/>
+              </a:spcAft>
+              <a:buClrTx/>
+              <a:buSzTx/>
+              <a:buFontTx/>
+              <a:buNone/>
+              <a:tabLst/>
+              <a:defRPr/>
+            </a:pPr>
+            <a:r>
+              <a:rPr kumimoji="0" lang="en-US" sz="880" b="1" i="0" u="none" strike="noStrike" kern="1200" cap="none" spc="0" normalizeH="0" baseline="0" noProof="0" dirty="0">
+                <a:ln>
+                  <a:noFill/>
+                </a:ln>
+                <a:solidFill>
+                  <a:srgbClr val="0D9488"/>
+                </a:solidFill>
+                <a:effectLst/>
+                <a:uLnTx/>
+                <a:uFillTx/>
+                <a:latin typeface="Calibri" pitchFamily="34" charset="0"/>
+                <a:ea typeface="Calibri" pitchFamily="34" charset="-122"/>
+                <a:cs typeface="Calibri" pitchFamily="34" charset="-120"/>
+              </a:rPr>
+              <a:t>MEDIUM</a:t>
+            </a:r>
+            <a:endParaRPr kumimoji="0" lang="en-US" sz="880" b="0" i="0" u="none" strike="noStrike" kern="1200" cap="none" spc="0" normalizeH="0" baseline="0" noProof="0" dirty="0">
+              <a:ln>
+                <a:noFill/>
+              </a:ln>
+              <a:solidFill>
+                <a:prstClr val="black"/>
+              </a:solidFill>
+              <a:effectLst/>
+              <a:uLnTx/>
+              <a:uFillTx/>
+              <a:latin typeface="Calibri" panose="020F0502020204030204"/>
+              <a:ea typeface="+mn-ea"/>
+              <a:cs typeface="+mn-cs"/>
+            </a:endParaRPr>
+          </a:p>
+        </p:txBody>
+      </p:sp>
+      <p:sp>
+        <p:nvSpPr>
+          <p:cNvPr id="14" name="Text 12"/>
+          <p:cNvSpPr/>
+          <p:nvPr/>
+        </p:nvSpPr>
+        <p:spPr>
+          <a:xfrm>
+            <a:off x="5440680" y="2029968"/>
+            <a:ext cx="3154680" cy="228600"/>
+          </a:xfrm>
+          <a:prstGeom prst="rect">
+            <a:avLst/>
+          </a:prstGeom>
+          <a:noFill/>
+          <a:ln/>
+        </p:spPr>
+        <p:txBody>
+          <a:bodyPr wrap="square" lIns="0" tIns="0" rIns="0" bIns="0" rtlCol="0" anchor="ctr"/>
+          <a:lstStyle/>
+          <a:p>
+            <a:pPr marL="0" marR="0" lvl="0" indent="0" algn="l" defTabSz="914400" rtl="0" eaLnBrk="1" fontAlgn="auto" latinLnBrk="0" hangingPunct="1">
+              <a:lnSpc>
+                <a:spcPct val="100000"/>
+              </a:lnSpc>
+              <a:spcBef>
+                <a:spcPts val="0"/>
+              </a:spcBef>
+              <a:spcAft>
+                <a:spcPts val="0"/>
+              </a:spcAft>
+              <a:buClrTx/>
+              <a:buSzTx/>
+              <a:buFontTx/>
+              <a:buNone/>
+              <a:tabLst/>
+              <a:defRPr/>
+            </a:pPr>
+            <a:r>
+              <a:rPr kumimoji="0" lang="en-US" sz="1050" b="1" i="0" u="none" strike="noStrike" kern="1200" cap="none" spc="0" normalizeH="0" baseline="0" noProof="0" dirty="0">
+                <a:ln>
+                  <a:noFill/>
+                </a:ln>
+                <a:solidFill>
+                  <a:srgbClr val="0F2A44"/>
+                </a:solidFill>
+                <a:effectLst/>
+                <a:uLnTx/>
+                <a:uFillTx/>
+                <a:latin typeface="Calibri" pitchFamily="34" charset="0"/>
+                <a:ea typeface="Calibri" pitchFamily="34" charset="-122"/>
+                <a:cs typeface="Calibri" pitchFamily="34" charset="-120"/>
+              </a:rPr>
+              <a:t>Dockerfile</a:t>
+            </a:r>
+            <a:endParaRPr kumimoji="0" lang="en-US" sz="1050" b="0" i="0" u="none" strike="noStrike" kern="1200" cap="none" spc="0" normalizeH="0" baseline="0" noProof="0" dirty="0">
+              <a:ln>
+                <a:noFill/>
+              </a:ln>
+              <a:solidFill>
+                <a:prstClr val="black"/>
+              </a:solidFill>
+              <a:effectLst/>
+              <a:uLnTx/>
+              <a:uFillTx/>
+              <a:latin typeface="Calibri" panose="020F0502020204030204"/>
+              <a:ea typeface="+mn-ea"/>
+              <a:cs typeface="+mn-cs"/>
+            </a:endParaRPr>
+          </a:p>
+        </p:txBody>
+      </p:sp>
+      <p:sp>
+        <p:nvSpPr>
+          <p:cNvPr id="15" name="Text 13"/>
+          <p:cNvSpPr/>
+          <p:nvPr/>
+        </p:nvSpPr>
+        <p:spPr>
+          <a:xfrm>
+            <a:off x="5440680" y="2276856"/>
+            <a:ext cx="3154680" cy="292608"/>
+          </a:xfrm>
+          <a:prstGeom prst="rect">
+            <a:avLst/>
+          </a:prstGeom>
+          <a:noFill/>
+          <a:ln/>
+        </p:spPr>
+        <p:txBody>
+          <a:bodyPr wrap="square" lIns="0" tIns="0" rIns="0" bIns="0" rtlCol="0" anchor="ctr">
+            <a:normAutofit/>
+          </a:bodyPr>
+          <a:lstStyle/>
+          <a:p>
+            <a:pPr marL="0" marR="0" lvl="0" indent="0" algn="l" defTabSz="914400" rtl="0" eaLnBrk="1" fontAlgn="auto" latinLnBrk="0" hangingPunct="1">
+              <a:lnSpc>
+                <a:spcPct val="100000"/>
+              </a:lnSpc>
+              <a:spcBef>
+                <a:spcPts val="0"/>
+              </a:spcBef>
+              <a:spcAft>
+                <a:spcPts val="0"/>
+              </a:spcAft>
+              <a:buClrTx/>
+              <a:buSzTx/>
+              <a:buFontTx/>
+              <a:buNone/>
+              <a:tabLst/>
+              <a:defRPr/>
+            </a:pPr>
+            <a:r>
+              <a:rPr kumimoji="0" lang="en-US" sz="890" b="0" i="0" u="none" strike="noStrike" kern="1200" cap="none" spc="0" normalizeH="0" baseline="0" noProof="0" dirty="0">
+                <a:ln>
+                  <a:noFill/>
+                </a:ln>
+                <a:solidFill>
+                  <a:srgbClr val="1E293B"/>
+                </a:solidFill>
+                <a:effectLst/>
+                <a:uLnTx/>
+                <a:uFillTx/>
+                <a:latin typeface="Calibri" pitchFamily="34" charset="0"/>
+                <a:ea typeface="Calibri" pitchFamily="34" charset="-122"/>
+                <a:cs typeface="Calibri" pitchFamily="34" charset="-120"/>
+              </a:rPr>
+              <a:t>Module has its own deployment container</a:t>
+            </a:r>
+            <a:endParaRPr kumimoji="0" lang="en-US" sz="890" b="0" i="0" u="none" strike="noStrike" kern="1200" cap="none" spc="0" normalizeH="0" baseline="0" noProof="0" dirty="0">
+              <a:ln>
+                <a:noFill/>
+              </a:ln>
+              <a:solidFill>
+                <a:prstClr val="black"/>
+              </a:solidFill>
+              <a:effectLst/>
+              <a:uLnTx/>
+              <a:uFillTx/>
+              <a:latin typeface="Calibri" panose="020F0502020204030204"/>
+              <a:ea typeface="+mn-ea"/>
+              <a:cs typeface="+mn-cs"/>
+            </a:endParaRPr>
+          </a:p>
+        </p:txBody>
+      </p:sp>
+      <p:sp>
+        <p:nvSpPr>
+          <p:cNvPr id="16" name="Shape 14"/>
+          <p:cNvSpPr/>
+          <p:nvPr/>
+        </p:nvSpPr>
+        <p:spPr>
+          <a:xfrm>
+            <a:off x="4617720" y="2596896"/>
+            <a:ext cx="3977640" cy="9144"/>
+          </a:xfrm>
+          <a:prstGeom prst="rect">
+            <a:avLst/>
+          </a:prstGeom>
+          <a:solidFill>
+            <a:srgbClr val="D8DEE6"/>
+          </a:solidFill>
+          <a:ln w="12700">
+            <a:solidFill>
+              <a:srgbClr val="D8DEE6"/>
+            </a:solidFill>
+            <a:prstDash val="solid"/>
+          </a:ln>
+        </p:spPr>
+      </p:sp>
+      <p:sp>
+        <p:nvSpPr>
+          <p:cNvPr id="17" name="Shape 15"/>
+          <p:cNvSpPr/>
+          <p:nvPr/>
+        </p:nvSpPr>
+        <p:spPr>
+          <a:xfrm>
+            <a:off x="4617720" y="2715768"/>
+            <a:ext cx="347472" cy="36576"/>
+          </a:xfrm>
+          <a:prstGeom prst="rect">
+            <a:avLst/>
+          </a:prstGeom>
+          <a:solidFill>
+            <a:srgbClr val="D97706"/>
+          </a:solidFill>
+          <a:ln w="12700">
+            <a:solidFill>
+              <a:srgbClr val="D97706"/>
+            </a:solidFill>
+            <a:prstDash val="solid"/>
+          </a:ln>
+        </p:spPr>
+      </p:sp>
+      <p:sp>
+        <p:nvSpPr>
+          <p:cNvPr id="18" name="Text 16"/>
+          <p:cNvSpPr/>
+          <p:nvPr/>
+        </p:nvSpPr>
+        <p:spPr>
+          <a:xfrm>
+            <a:off x="4617720" y="2834640"/>
+            <a:ext cx="731520" cy="219456"/>
+          </a:xfrm>
+          <a:prstGeom prst="rect">
+            <a:avLst/>
+          </a:prstGeom>
+          <a:noFill/>
+          <a:ln/>
+        </p:spPr>
+        <p:txBody>
+          <a:bodyPr wrap="square" lIns="0" tIns="0" rIns="0" bIns="0" rtlCol="0" anchor="ctr"/>
+          <a:lstStyle/>
+          <a:p>
+            <a:pPr marL="0" marR="0" lvl="0" indent="0" algn="l" defTabSz="914400" rtl="0" eaLnBrk="1" fontAlgn="auto" latinLnBrk="0" hangingPunct="1">
+              <a:lnSpc>
+                <a:spcPct val="100000"/>
+              </a:lnSpc>
+              <a:spcBef>
+                <a:spcPts val="0"/>
+              </a:spcBef>
+              <a:spcAft>
+                <a:spcPts val="0"/>
+              </a:spcAft>
+              <a:buClrTx/>
+              <a:buSzTx/>
+              <a:buFontTx/>
+              <a:buNone/>
+              <a:tabLst/>
+              <a:defRPr/>
+            </a:pPr>
+            <a:r>
+              <a:rPr kumimoji="0" lang="en-US" sz="880" b="1" i="0" u="none" strike="noStrike" kern="1200" cap="none" spc="0" normalizeH="0" baseline="0" noProof="0" dirty="0">
+                <a:ln>
+                  <a:noFill/>
+                </a:ln>
+                <a:solidFill>
+                  <a:srgbClr val="D97706"/>
+                </a:solidFill>
+                <a:effectLst/>
+                <a:uLnTx/>
+                <a:uFillTx/>
+                <a:latin typeface="Calibri" pitchFamily="34" charset="0"/>
+                <a:ea typeface="Calibri" pitchFamily="34" charset="-122"/>
+                <a:cs typeface="Calibri" pitchFamily="34" charset="-120"/>
+              </a:rPr>
+              <a:t>LOW</a:t>
+            </a:r>
+            <a:endParaRPr kumimoji="0" lang="en-US" sz="880" b="0" i="0" u="none" strike="noStrike" kern="1200" cap="none" spc="0" normalizeH="0" baseline="0" noProof="0" dirty="0">
+              <a:ln>
+                <a:noFill/>
+              </a:ln>
+              <a:solidFill>
+                <a:prstClr val="black"/>
+              </a:solidFill>
+              <a:effectLst/>
+              <a:uLnTx/>
+              <a:uFillTx/>
+              <a:latin typeface="Calibri" panose="020F0502020204030204"/>
+              <a:ea typeface="+mn-ea"/>
+              <a:cs typeface="+mn-cs"/>
+            </a:endParaRPr>
+          </a:p>
+        </p:txBody>
+      </p:sp>
+      <p:sp>
+        <p:nvSpPr>
+          <p:cNvPr id="19" name="Text 17"/>
+          <p:cNvSpPr/>
+          <p:nvPr/>
+        </p:nvSpPr>
+        <p:spPr>
+          <a:xfrm>
+            <a:off x="5440680" y="2688336"/>
+            <a:ext cx="3154680" cy="228600"/>
+          </a:xfrm>
+          <a:prstGeom prst="rect">
+            <a:avLst/>
+          </a:prstGeom>
+          <a:noFill/>
+          <a:ln/>
+        </p:spPr>
+        <p:txBody>
+          <a:bodyPr wrap="square" lIns="0" tIns="0" rIns="0" bIns="0" rtlCol="0" anchor="ctr"/>
+          <a:lstStyle/>
+          <a:p>
+            <a:pPr marL="0" marR="0" lvl="0" indent="0" algn="l" defTabSz="914400" rtl="0" eaLnBrk="1" fontAlgn="auto" latinLnBrk="0" hangingPunct="1">
+              <a:lnSpc>
+                <a:spcPct val="100000"/>
+              </a:lnSpc>
+              <a:spcBef>
+                <a:spcPts val="0"/>
+              </a:spcBef>
+              <a:spcAft>
+                <a:spcPts val="0"/>
+              </a:spcAft>
+              <a:buClrTx/>
+              <a:buSzTx/>
+              <a:buFontTx/>
+              <a:buNone/>
+              <a:tabLst/>
+              <a:defRPr/>
+            </a:pPr>
+            <a:r>
+              <a:rPr kumimoji="0" lang="en-US" sz="1050" b="1" i="0" u="none" strike="noStrike" kern="1200" cap="none" spc="0" normalizeH="0" baseline="0" noProof="0" dirty="0">
+                <a:ln>
+                  <a:noFill/>
+                </a:ln>
+                <a:solidFill>
+                  <a:srgbClr val="0F2A44"/>
+                </a:solidFill>
+                <a:effectLst/>
+                <a:uLnTx/>
+                <a:uFillTx/>
+                <a:latin typeface="Calibri" pitchFamily="34" charset="0"/>
+                <a:ea typeface="Calibri" pitchFamily="34" charset="-122"/>
+                <a:cs typeface="Calibri" pitchFamily="34" charset="-120"/>
+              </a:rPr>
+              <a:t>main() method</a:t>
+            </a:r>
+            <a:endParaRPr kumimoji="0" lang="en-US" sz="1050" b="0" i="0" u="none" strike="noStrike" kern="1200" cap="none" spc="0" normalizeH="0" baseline="0" noProof="0" dirty="0">
+              <a:ln>
+                <a:noFill/>
+              </a:ln>
+              <a:solidFill>
+                <a:prstClr val="black"/>
+              </a:solidFill>
+              <a:effectLst/>
+              <a:uLnTx/>
+              <a:uFillTx/>
+              <a:latin typeface="Calibri" panose="020F0502020204030204"/>
+              <a:ea typeface="+mn-ea"/>
+              <a:cs typeface="+mn-cs"/>
+            </a:endParaRPr>
+          </a:p>
+        </p:txBody>
+      </p:sp>
+      <p:sp>
+        <p:nvSpPr>
+          <p:cNvPr id="20" name="Text 18"/>
+          <p:cNvSpPr/>
+          <p:nvPr/>
+        </p:nvSpPr>
+        <p:spPr>
+          <a:xfrm>
+            <a:off x="5440680" y="2935224"/>
+            <a:ext cx="3154680" cy="292608"/>
+          </a:xfrm>
+          <a:prstGeom prst="rect">
+            <a:avLst/>
+          </a:prstGeom>
+          <a:noFill/>
+          <a:ln/>
+        </p:spPr>
+        <p:txBody>
+          <a:bodyPr wrap="square" lIns="0" tIns="0" rIns="0" bIns="0" rtlCol="0" anchor="ctr">
+            <a:normAutofit/>
+          </a:bodyPr>
+          <a:lstStyle/>
+          <a:p>
+            <a:pPr marL="0" marR="0" lvl="0" indent="0" algn="l" defTabSz="914400" rtl="0" eaLnBrk="1" fontAlgn="auto" latinLnBrk="0" hangingPunct="1">
+              <a:lnSpc>
+                <a:spcPct val="100000"/>
+              </a:lnSpc>
+              <a:spcBef>
+                <a:spcPts val="0"/>
+              </a:spcBef>
+              <a:spcAft>
+                <a:spcPts val="0"/>
+              </a:spcAft>
+              <a:buClrTx/>
+              <a:buSzTx/>
+              <a:buFontTx/>
+              <a:buNone/>
+              <a:tabLst/>
+              <a:defRPr/>
+            </a:pPr>
+            <a:r>
+              <a:rPr kumimoji="0" lang="en-US" sz="890" b="0" i="0" u="none" strike="noStrike" kern="1200" cap="none" spc="0" normalizeH="0" baseline="0" noProof="0" dirty="0">
+                <a:ln>
+                  <a:noFill/>
+                </a:ln>
+                <a:solidFill>
+                  <a:srgbClr val="1E293B"/>
+                </a:solidFill>
+                <a:effectLst/>
+                <a:uLnTx/>
+                <a:uFillTx/>
+                <a:latin typeface="Calibri" pitchFamily="34" charset="0"/>
+                <a:ea typeface="Calibri" pitchFamily="34" charset="-122"/>
+                <a:cs typeface="Calibri" pitchFamily="34" charset="-120"/>
+              </a:rPr>
+              <a:t>Executable Java entry point without stronger framework signal</a:t>
+            </a:r>
+            <a:endParaRPr kumimoji="0" lang="en-US" sz="890" b="0" i="0" u="none" strike="noStrike" kern="1200" cap="none" spc="0" normalizeH="0" baseline="0" noProof="0" dirty="0">
+              <a:ln>
+                <a:noFill/>
+              </a:ln>
+              <a:solidFill>
+                <a:prstClr val="black"/>
+              </a:solidFill>
+              <a:effectLst/>
+              <a:uLnTx/>
+              <a:uFillTx/>
+              <a:latin typeface="Calibri" panose="020F0502020204030204"/>
+              <a:ea typeface="+mn-ea"/>
+              <a:cs typeface="+mn-cs"/>
+            </a:endParaRPr>
+          </a:p>
+        </p:txBody>
+      </p:sp>
+      <p:sp>
+        <p:nvSpPr>
+          <p:cNvPr id="21" name="Shape 19"/>
+          <p:cNvSpPr/>
+          <p:nvPr/>
+        </p:nvSpPr>
+        <p:spPr>
+          <a:xfrm>
+            <a:off x="4617720" y="3255264"/>
+            <a:ext cx="3977640" cy="9144"/>
+          </a:xfrm>
+          <a:prstGeom prst="rect">
+            <a:avLst/>
+          </a:prstGeom>
+          <a:solidFill>
+            <a:srgbClr val="D8DEE6"/>
+          </a:solidFill>
+          <a:ln w="12700">
+            <a:solidFill>
+              <a:srgbClr val="D8DEE6"/>
+            </a:solidFill>
+            <a:prstDash val="solid"/>
+          </a:ln>
+        </p:spPr>
+      </p:sp>
+      <p:sp>
+        <p:nvSpPr>
+          <p:cNvPr id="22" name="Shape 20"/>
+          <p:cNvSpPr/>
+          <p:nvPr/>
+        </p:nvSpPr>
+        <p:spPr>
+          <a:xfrm>
+            <a:off x="548640" y="3401568"/>
+            <a:ext cx="457200" cy="36576"/>
+          </a:xfrm>
+          <a:prstGeom prst="rect">
+            <a:avLst/>
+          </a:prstGeom>
+          <a:solidFill>
+            <a:srgbClr val="0D9488"/>
+          </a:solidFill>
+          <a:ln w="12700">
+            <a:solidFill>
+              <a:srgbClr val="0D9488"/>
+            </a:solidFill>
+            <a:prstDash val="solid"/>
+          </a:ln>
+        </p:spPr>
+      </p:sp>
+      <p:sp>
+        <p:nvSpPr>
+          <p:cNvPr id="23" name="Text 21"/>
+          <p:cNvSpPr/>
+          <p:nvPr/>
+        </p:nvSpPr>
+        <p:spPr>
+          <a:xfrm>
+            <a:off x="548640" y="3511296"/>
+            <a:ext cx="8046720" cy="274320"/>
+          </a:xfrm>
+          <a:prstGeom prst="rect">
+            <a:avLst/>
+          </a:prstGeom>
+          <a:noFill/>
+          <a:ln/>
+        </p:spPr>
+        <p:txBody>
+          <a:bodyPr wrap="square" lIns="0" tIns="0" rIns="0" bIns="0" rtlCol="0" anchor="ctr"/>
+          <a:lstStyle/>
+          <a:p>
+            <a:pPr marL="0" marR="0" lvl="0" indent="0" algn="l" defTabSz="914400" rtl="0" eaLnBrk="1" fontAlgn="auto" latinLnBrk="0" hangingPunct="1">
+              <a:lnSpc>
+                <a:spcPct val="100000"/>
+              </a:lnSpc>
+              <a:spcBef>
+                <a:spcPts val="0"/>
+              </a:spcBef>
+              <a:spcAft>
+                <a:spcPts val="0"/>
+              </a:spcAft>
+              <a:buClrTx/>
+              <a:buSzTx/>
+              <a:buFontTx/>
+              <a:buNone/>
+              <a:tabLst/>
+              <a:defRPr/>
+            </a:pPr>
+            <a:r>
+              <a:rPr kumimoji="0" lang="en-US" sz="1250" b="1" i="0" u="none" strike="noStrike" kern="1200" cap="none" spc="0" normalizeH="0" baseline="0" noProof="0" dirty="0">
+                <a:ln>
+                  <a:noFill/>
+                </a:ln>
+                <a:solidFill>
+                  <a:srgbClr val="0F2A44"/>
+                </a:solidFill>
+                <a:effectLst/>
+                <a:uLnTx/>
+                <a:uFillTx/>
+                <a:latin typeface="Calibri" pitchFamily="34" charset="0"/>
+                <a:ea typeface="Calibri" pitchFamily="34" charset="-122"/>
+                <a:cs typeface="Calibri" pitchFamily="34" charset="-120"/>
+              </a:rPr>
+              <a:t>Why this matters</a:t>
+            </a:r>
+            <a:endParaRPr kumimoji="0" lang="en-US" sz="1250" b="0" i="0" u="none" strike="noStrike" kern="1200" cap="none" spc="0" normalizeH="0" baseline="0" noProof="0" dirty="0">
+              <a:ln>
+                <a:noFill/>
+              </a:ln>
+              <a:solidFill>
+                <a:prstClr val="black"/>
+              </a:solidFill>
+              <a:effectLst/>
+              <a:uLnTx/>
+              <a:uFillTx/>
+              <a:latin typeface="Calibri" panose="020F0502020204030204"/>
+              <a:ea typeface="+mn-ea"/>
+              <a:cs typeface="+mn-cs"/>
+            </a:endParaRPr>
+          </a:p>
+        </p:txBody>
+      </p:sp>
+      <p:sp>
+        <p:nvSpPr>
+          <p:cNvPr id="24" name="Text 22"/>
+          <p:cNvSpPr/>
+          <p:nvPr/>
+        </p:nvSpPr>
+        <p:spPr>
+          <a:xfrm>
+            <a:off x="548640" y="3822192"/>
+            <a:ext cx="8046720" cy="566928"/>
+          </a:xfrm>
+          <a:prstGeom prst="rect">
+            <a:avLst/>
+          </a:prstGeom>
+          <a:noFill/>
+          <a:ln/>
+        </p:spPr>
+        <p:txBody>
+          <a:bodyPr wrap="square" lIns="0" tIns="0" rIns="0" bIns="0" rtlCol="0" anchor="ctr"/>
+          <a:lstStyle/>
+          <a:p>
+            <a:pPr marL="0" marR="0" lvl="0" indent="0" algn="l" defTabSz="914400" rtl="0" eaLnBrk="1" fontAlgn="auto" latinLnBrk="0" hangingPunct="1">
+              <a:lnSpc>
+                <a:spcPct val="100000"/>
+              </a:lnSpc>
+              <a:spcBef>
+                <a:spcPts val="0"/>
+              </a:spcBef>
+              <a:spcAft>
+                <a:spcPts val="0"/>
+              </a:spcAft>
+              <a:buClrTx/>
+              <a:buSzTx/>
+              <a:buFontTx/>
+              <a:buNone/>
+              <a:tabLst/>
+              <a:defRPr/>
+            </a:pPr>
+            <a:r>
+              <a:rPr kumimoji="0" lang="en-US" sz="1050" b="0" i="0" u="none" strike="noStrike" kern="1200" cap="none" spc="0" normalizeH="0" baseline="0" noProof="0" dirty="0">
+                <a:ln>
+                  <a:noFill/>
+                </a:ln>
+                <a:solidFill>
+                  <a:srgbClr val="1E293B"/>
+                </a:solidFill>
+                <a:effectLst/>
+                <a:uLnTx/>
+                <a:uFillTx/>
+                <a:latin typeface="Calibri" pitchFamily="34" charset="0"/>
+                <a:ea typeface="Calibri" pitchFamily="34" charset="-122"/>
+                <a:cs typeface="Calibri" pitchFamily="34" charset="-120"/>
+              </a:rPr>
+              <a:t>The tool does not require a manually supplied service list. It recovers likely deployable services from source structure, then attaches a confidence level so uncertain boundaries can be inspected instead of hidden.</a:t>
+            </a:r>
+            <a:endParaRPr kumimoji="0" lang="en-US" sz="1050" b="0" i="0" u="none" strike="noStrike" kern="1200" cap="none" spc="0" normalizeH="0" baseline="0" noProof="0" dirty="0">
+              <a:ln>
+                <a:noFill/>
+              </a:ln>
+              <a:solidFill>
+                <a:prstClr val="black"/>
+              </a:solidFill>
+              <a:effectLst/>
+              <a:uLnTx/>
+              <a:uFillTx/>
+              <a:latin typeface="Calibri" panose="020F0502020204030204"/>
+              <a:ea typeface="+mn-ea"/>
+              <a:cs typeface="+mn-cs"/>
+            </a:endParaRPr>
+          </a:p>
+        </p:txBody>
+      </p:sp>
+      <p:sp>
+        <p:nvSpPr>
+          <p:cNvPr id="26" name="Text 24"/>
           <p:cNvSpPr/>
           <p:nvPr/>
         </p:nvSpPr>
@@ -27890,7 +30235,7 @@
                 <a:ea typeface="Calibri" pitchFamily="34" charset="-122"/>
                 <a:cs typeface="Calibri" pitchFamily="34" charset="-120"/>
               </a:rPr>
-              <a:t>Appendix L</a:t>
+              <a:t>Appendix K</a:t>
             </a:r>
             <a:endParaRPr kumimoji="0" lang="en-US" sz="900" b="0" i="0" u="none" strike="noStrike" kern="1200" cap="none" spc="0" normalizeH="0" baseline="0" noProof="0" dirty="0">
               <a:ln>
@@ -27995,7 +30340,7 @@
                 <a:ea typeface="Calibri" pitchFamily="34" charset="-122"/>
                 <a:cs typeface="Calibri" pitchFamily="34" charset="-120"/>
               </a:rPr>
-              <a:t>Annex: threats to validity</a:t>
+              <a:t>Annex: static vs dynamic analysis</a:t>
             </a:r>
             <a:endParaRPr kumimoji="0" lang="en-US" sz="2500" b="0" i="0" u="none" strike="noStrike" kern="1200" cap="none" spc="0" normalizeH="0" baseline="0" noProof="0" dirty="0">
               <a:ln>
@@ -28047,6 +30392,990 @@
         </p:nvSpPr>
         <p:spPr>
           <a:xfrm>
+            <a:off x="548640" y="1024128"/>
+            <a:ext cx="457200" cy="36576"/>
+          </a:xfrm>
+          <a:prstGeom prst="rect">
+            <a:avLst/>
+          </a:prstGeom>
+          <a:solidFill>
+            <a:srgbClr val="0D9488"/>
+          </a:solidFill>
+          <a:ln w="12700">
+            <a:solidFill>
+              <a:srgbClr val="0D9488"/>
+            </a:solidFill>
+            <a:prstDash val="solid"/>
+          </a:ln>
+        </p:spPr>
+      </p:sp>
+      <p:sp>
+        <p:nvSpPr>
+          <p:cNvPr id="5" name="Text 3"/>
+          <p:cNvSpPr/>
+          <p:nvPr/>
+        </p:nvSpPr>
+        <p:spPr>
+          <a:xfrm>
+            <a:off x="548640" y="1143000"/>
+            <a:ext cx="3749040" cy="292608"/>
+          </a:xfrm>
+          <a:prstGeom prst="rect">
+            <a:avLst/>
+          </a:prstGeom>
+          <a:noFill/>
+          <a:ln/>
+        </p:spPr>
+        <p:txBody>
+          <a:bodyPr wrap="square" lIns="0" tIns="0" rIns="0" bIns="0" rtlCol="0" anchor="ctr"/>
+          <a:lstStyle/>
+          <a:p>
+            <a:pPr marL="0" marR="0" lvl="0" indent="0" algn="l" defTabSz="914400" rtl="0" eaLnBrk="1" fontAlgn="auto" latinLnBrk="0" hangingPunct="1">
+              <a:lnSpc>
+                <a:spcPct val="100000"/>
+              </a:lnSpc>
+              <a:spcBef>
+                <a:spcPts val="0"/>
+              </a:spcBef>
+              <a:spcAft>
+                <a:spcPts val="0"/>
+              </a:spcAft>
+              <a:buClrTx/>
+              <a:buSzTx/>
+              <a:buFontTx/>
+              <a:buNone/>
+              <a:tabLst/>
+              <a:defRPr/>
+            </a:pPr>
+            <a:r>
+              <a:rPr kumimoji="0" lang="en-US" sz="1400" b="1" i="0" u="none" strike="noStrike" kern="1200" cap="none" spc="0" normalizeH="0" baseline="0" noProof="0" dirty="0">
+                <a:ln>
+                  <a:noFill/>
+                </a:ln>
+                <a:solidFill>
+                  <a:srgbClr val="0F2A44"/>
+                </a:solidFill>
+                <a:effectLst/>
+                <a:uLnTx/>
+                <a:uFillTx/>
+                <a:latin typeface="Calibri" pitchFamily="34" charset="0"/>
+                <a:ea typeface="Calibri" pitchFamily="34" charset="-122"/>
+                <a:cs typeface="Calibri" pitchFamily="34" charset="-120"/>
+              </a:rPr>
+              <a:t>Static analysis</a:t>
+            </a:r>
+            <a:endParaRPr kumimoji="0" lang="en-US" sz="1400" b="0" i="0" u="none" strike="noStrike" kern="1200" cap="none" spc="0" normalizeH="0" baseline="0" noProof="0" dirty="0">
+              <a:ln>
+                <a:noFill/>
+              </a:ln>
+              <a:solidFill>
+                <a:prstClr val="black"/>
+              </a:solidFill>
+              <a:effectLst/>
+              <a:uLnTx/>
+              <a:uFillTx/>
+              <a:latin typeface="Calibri" panose="020F0502020204030204"/>
+              <a:ea typeface="+mn-ea"/>
+              <a:cs typeface="+mn-cs"/>
+            </a:endParaRPr>
+          </a:p>
+        </p:txBody>
+      </p:sp>
+      <p:sp>
+        <p:nvSpPr>
+          <p:cNvPr id="6" name="Text 4"/>
+          <p:cNvSpPr/>
+          <p:nvPr/>
+        </p:nvSpPr>
+        <p:spPr>
+          <a:xfrm>
+            <a:off x="713232" y="1600200"/>
+            <a:ext cx="3657600" cy="1417320"/>
+          </a:xfrm>
+          <a:prstGeom prst="rect">
+            <a:avLst/>
+          </a:prstGeom>
+          <a:noFill/>
+          <a:ln/>
+        </p:spPr>
+        <p:txBody>
+          <a:bodyPr wrap="square" lIns="0" tIns="0" rIns="0" bIns="0" rtlCol="0" anchor="ctr"/>
+          <a:lstStyle/>
+          <a:p>
+            <a:pPr marL="342900" marR="0" lvl="0" indent="-342900" algn="l" defTabSz="914400" rtl="0" eaLnBrk="1" fontAlgn="auto" latinLnBrk="0" hangingPunct="1">
+              <a:lnSpc>
+                <a:spcPct val="100000"/>
+              </a:lnSpc>
+              <a:spcBef>
+                <a:spcPts val="0"/>
+              </a:spcBef>
+              <a:spcAft>
+                <a:spcPts val="500"/>
+              </a:spcAft>
+              <a:buClrTx/>
+              <a:buSzPct val="100000"/>
+              <a:buFontTx/>
+              <a:buChar char="•"/>
+              <a:tabLst/>
+              <a:defRPr/>
+            </a:pPr>
+            <a:r>
+              <a:rPr kumimoji="0" lang="en-US" sz="1030" b="0" i="0" u="none" strike="noStrike" kern="1200" cap="none" spc="0" normalizeH="0" baseline="0" noProof="0" dirty="0">
+                <a:ln>
+                  <a:noFill/>
+                </a:ln>
+                <a:solidFill>
+                  <a:srgbClr val="1E293B"/>
+                </a:solidFill>
+                <a:effectLst/>
+                <a:uLnTx/>
+                <a:uFillTx/>
+                <a:latin typeface="Calibri" pitchFamily="34" charset="0"/>
+                <a:ea typeface="Calibri" pitchFamily="34" charset="-122"/>
+                <a:cs typeface="Calibri" pitchFamily="34" charset="-120"/>
+              </a:rPr>
+              <a:t>Runs on a fresh repository checkout</a:t>
+            </a:r>
+            <a:endParaRPr kumimoji="0" lang="en-US" sz="1030" b="0" i="0" u="none" strike="noStrike" kern="1200" cap="none" spc="0" normalizeH="0" baseline="0" noProof="0" dirty="0">
+              <a:ln>
+                <a:noFill/>
+              </a:ln>
+              <a:solidFill>
+                <a:prstClr val="black"/>
+              </a:solidFill>
+              <a:effectLst/>
+              <a:uLnTx/>
+              <a:uFillTx/>
+              <a:latin typeface="Calibri" panose="020F0502020204030204"/>
+              <a:ea typeface="+mn-ea"/>
+              <a:cs typeface="+mn-cs"/>
+            </a:endParaRPr>
+          </a:p>
+          <a:p>
+            <a:pPr marL="342900" marR="0" lvl="0" indent="-342900" algn="l" defTabSz="914400" rtl="0" eaLnBrk="1" fontAlgn="auto" latinLnBrk="0" hangingPunct="1">
+              <a:lnSpc>
+                <a:spcPct val="100000"/>
+              </a:lnSpc>
+              <a:spcBef>
+                <a:spcPts val="0"/>
+              </a:spcBef>
+              <a:spcAft>
+                <a:spcPts val="500"/>
+              </a:spcAft>
+              <a:buClrTx/>
+              <a:buSzPct val="100000"/>
+              <a:buFontTx/>
+              <a:buChar char="•"/>
+              <a:tabLst/>
+              <a:defRPr/>
+            </a:pPr>
+            <a:r>
+              <a:rPr kumimoji="0" lang="en-US" sz="1030" b="0" i="0" u="none" strike="noStrike" kern="1200" cap="none" spc="0" normalizeH="0" baseline="0" noProof="0" dirty="0">
+                <a:ln>
+                  <a:noFill/>
+                </a:ln>
+                <a:solidFill>
+                  <a:srgbClr val="1E293B"/>
+                </a:solidFill>
+                <a:effectLst/>
+                <a:uLnTx/>
+                <a:uFillTx/>
+                <a:latin typeface="Calibri" pitchFamily="34" charset="0"/>
+                <a:ea typeface="Calibri" pitchFamily="34" charset="-122"/>
+                <a:cs typeface="Calibri" pitchFamily="34" charset="-120"/>
+              </a:rPr>
+              <a:t>No deployment, traffic, credentials, or tracing setup needed</a:t>
+            </a:r>
+            <a:endParaRPr kumimoji="0" lang="en-US" sz="1030" b="0" i="0" u="none" strike="noStrike" kern="1200" cap="none" spc="0" normalizeH="0" baseline="0" noProof="0" dirty="0">
+              <a:ln>
+                <a:noFill/>
+              </a:ln>
+              <a:solidFill>
+                <a:prstClr val="black"/>
+              </a:solidFill>
+              <a:effectLst/>
+              <a:uLnTx/>
+              <a:uFillTx/>
+              <a:latin typeface="Calibri" panose="020F0502020204030204"/>
+              <a:ea typeface="+mn-ea"/>
+              <a:cs typeface="+mn-cs"/>
+            </a:endParaRPr>
+          </a:p>
+          <a:p>
+            <a:pPr marL="342900" marR="0" lvl="0" indent="-342900" algn="l" defTabSz="914400" rtl="0" eaLnBrk="1" fontAlgn="auto" latinLnBrk="0" hangingPunct="1">
+              <a:lnSpc>
+                <a:spcPct val="100000"/>
+              </a:lnSpc>
+              <a:spcBef>
+                <a:spcPts val="0"/>
+              </a:spcBef>
+              <a:spcAft>
+                <a:spcPts val="500"/>
+              </a:spcAft>
+              <a:buClrTx/>
+              <a:buSzPct val="100000"/>
+              <a:buFontTx/>
+              <a:buChar char="•"/>
+              <a:tabLst/>
+              <a:defRPr/>
+            </a:pPr>
+            <a:r>
+              <a:rPr kumimoji="0" lang="en-US" sz="1030" b="0" i="0" u="none" strike="noStrike" kern="1200" cap="none" spc="0" normalizeH="0" baseline="0" noProof="0" dirty="0">
+                <a:ln>
+                  <a:noFill/>
+                </a:ln>
+                <a:solidFill>
+                  <a:srgbClr val="1E293B"/>
+                </a:solidFill>
+                <a:effectLst/>
+                <a:uLnTx/>
+                <a:uFillTx/>
+                <a:latin typeface="Calibri" pitchFamily="34" charset="0"/>
+                <a:ea typeface="Calibri" pitchFamily="34" charset="-122"/>
+                <a:cs typeface="Calibri" pitchFamily="34" charset="-120"/>
+              </a:rPr>
+              <a:t>Finds source-level evidence and configuration issues</a:t>
+            </a:r>
+            <a:endParaRPr kumimoji="0" lang="en-US" sz="1030" b="0" i="0" u="none" strike="noStrike" kern="1200" cap="none" spc="0" normalizeH="0" baseline="0" noProof="0" dirty="0">
+              <a:ln>
+                <a:noFill/>
+              </a:ln>
+              <a:solidFill>
+                <a:prstClr val="black"/>
+              </a:solidFill>
+              <a:effectLst/>
+              <a:uLnTx/>
+              <a:uFillTx/>
+              <a:latin typeface="Calibri" panose="020F0502020204030204"/>
+              <a:ea typeface="+mn-ea"/>
+              <a:cs typeface="+mn-cs"/>
+            </a:endParaRPr>
+          </a:p>
+          <a:p>
+            <a:pPr marL="342900" marR="0" lvl="0" indent="-342900" algn="l" defTabSz="914400" rtl="0" eaLnBrk="1" fontAlgn="auto" latinLnBrk="0" hangingPunct="1">
+              <a:lnSpc>
+                <a:spcPct val="100000"/>
+              </a:lnSpc>
+              <a:spcBef>
+                <a:spcPts val="0"/>
+              </a:spcBef>
+              <a:spcAft>
+                <a:spcPts val="500"/>
+              </a:spcAft>
+              <a:buClrTx/>
+              <a:buSzPct val="100000"/>
+              <a:buFontTx/>
+              <a:buChar char="•"/>
+              <a:tabLst/>
+              <a:defRPr/>
+            </a:pPr>
+            <a:r>
+              <a:rPr kumimoji="0" lang="en-US" sz="1030" b="0" i="0" u="none" strike="noStrike" kern="1200" cap="none" spc="0" normalizeH="0" baseline="0" noProof="0" dirty="0">
+                <a:ln>
+                  <a:noFill/>
+                </a:ln>
+                <a:solidFill>
+                  <a:srgbClr val="1E293B"/>
+                </a:solidFill>
+                <a:effectLst/>
+                <a:uLnTx/>
+                <a:uFillTx/>
+                <a:latin typeface="Calibri" pitchFamily="34" charset="0"/>
+                <a:ea typeface="Calibri" pitchFamily="34" charset="-122"/>
+                <a:cs typeface="Calibri" pitchFamily="34" charset="-120"/>
+              </a:rPr>
+              <a:t>Good fit for CI/CD and early design feedback</a:t>
+            </a:r>
+            <a:endParaRPr kumimoji="0" lang="en-US" sz="1030" b="0" i="0" u="none" strike="noStrike" kern="1200" cap="none" spc="0" normalizeH="0" baseline="0" noProof="0" dirty="0">
+              <a:ln>
+                <a:noFill/>
+              </a:ln>
+              <a:solidFill>
+                <a:prstClr val="black"/>
+              </a:solidFill>
+              <a:effectLst/>
+              <a:uLnTx/>
+              <a:uFillTx/>
+              <a:latin typeface="Calibri" panose="020F0502020204030204"/>
+              <a:ea typeface="+mn-ea"/>
+              <a:cs typeface="+mn-cs"/>
+            </a:endParaRPr>
+          </a:p>
+        </p:txBody>
+      </p:sp>
+      <p:sp>
+        <p:nvSpPr>
+          <p:cNvPr id="7" name="Shape 5"/>
+          <p:cNvSpPr/>
+          <p:nvPr/>
+        </p:nvSpPr>
+        <p:spPr>
+          <a:xfrm>
+            <a:off x="4617720" y="1024128"/>
+            <a:ext cx="457200" cy="36576"/>
+          </a:xfrm>
+          <a:prstGeom prst="rect">
+            <a:avLst/>
+          </a:prstGeom>
+          <a:solidFill>
+            <a:srgbClr val="1C4E80"/>
+          </a:solidFill>
+          <a:ln w="12700">
+            <a:solidFill>
+              <a:srgbClr val="1C4E80"/>
+            </a:solidFill>
+            <a:prstDash val="solid"/>
+          </a:ln>
+        </p:spPr>
+      </p:sp>
+      <p:sp>
+        <p:nvSpPr>
+          <p:cNvPr id="8" name="Text 6"/>
+          <p:cNvSpPr/>
+          <p:nvPr/>
+        </p:nvSpPr>
+        <p:spPr>
+          <a:xfrm>
+            <a:off x="4617720" y="1143000"/>
+            <a:ext cx="3749040" cy="292608"/>
+          </a:xfrm>
+          <a:prstGeom prst="rect">
+            <a:avLst/>
+          </a:prstGeom>
+          <a:noFill/>
+          <a:ln/>
+        </p:spPr>
+        <p:txBody>
+          <a:bodyPr wrap="square" lIns="0" tIns="0" rIns="0" bIns="0" rtlCol="0" anchor="ctr"/>
+          <a:lstStyle/>
+          <a:p>
+            <a:pPr marL="0" marR="0" lvl="0" indent="0" algn="l" defTabSz="914400" rtl="0" eaLnBrk="1" fontAlgn="auto" latinLnBrk="0" hangingPunct="1">
+              <a:lnSpc>
+                <a:spcPct val="100000"/>
+              </a:lnSpc>
+              <a:spcBef>
+                <a:spcPts val="0"/>
+              </a:spcBef>
+              <a:spcAft>
+                <a:spcPts val="0"/>
+              </a:spcAft>
+              <a:buClrTx/>
+              <a:buSzTx/>
+              <a:buFontTx/>
+              <a:buNone/>
+              <a:tabLst/>
+              <a:defRPr/>
+            </a:pPr>
+            <a:r>
+              <a:rPr kumimoji="0" lang="en-US" sz="1400" b="1" i="0" u="none" strike="noStrike" kern="1200" cap="none" spc="0" normalizeH="0" baseline="0" noProof="0" dirty="0">
+                <a:ln>
+                  <a:noFill/>
+                </a:ln>
+                <a:solidFill>
+                  <a:srgbClr val="0F2A44"/>
+                </a:solidFill>
+                <a:effectLst/>
+                <a:uLnTx/>
+                <a:uFillTx/>
+                <a:latin typeface="Calibri" pitchFamily="34" charset="0"/>
+                <a:ea typeface="Calibri" pitchFamily="34" charset="-122"/>
+                <a:cs typeface="Calibri" pitchFamily="34" charset="-120"/>
+              </a:rPr>
+              <a:t>Dynamic analysis</a:t>
+            </a:r>
+            <a:endParaRPr kumimoji="0" lang="en-US" sz="1400" b="0" i="0" u="none" strike="noStrike" kern="1200" cap="none" spc="0" normalizeH="0" baseline="0" noProof="0" dirty="0">
+              <a:ln>
+                <a:noFill/>
+              </a:ln>
+              <a:solidFill>
+                <a:prstClr val="black"/>
+              </a:solidFill>
+              <a:effectLst/>
+              <a:uLnTx/>
+              <a:uFillTx/>
+              <a:latin typeface="Calibri" panose="020F0502020204030204"/>
+              <a:ea typeface="+mn-ea"/>
+              <a:cs typeface="+mn-cs"/>
+            </a:endParaRPr>
+          </a:p>
+        </p:txBody>
+      </p:sp>
+      <p:sp>
+        <p:nvSpPr>
+          <p:cNvPr id="9" name="Text 7"/>
+          <p:cNvSpPr/>
+          <p:nvPr/>
+        </p:nvSpPr>
+        <p:spPr>
+          <a:xfrm>
+            <a:off x="4782312" y="1600200"/>
+            <a:ext cx="3657600" cy="1417320"/>
+          </a:xfrm>
+          <a:prstGeom prst="rect">
+            <a:avLst/>
+          </a:prstGeom>
+          <a:noFill/>
+          <a:ln/>
+        </p:spPr>
+        <p:txBody>
+          <a:bodyPr wrap="square" lIns="0" tIns="0" rIns="0" bIns="0" rtlCol="0" anchor="ctr"/>
+          <a:lstStyle/>
+          <a:p>
+            <a:pPr marL="342900" marR="0" lvl="0" indent="-342900" algn="l" defTabSz="914400" rtl="0" eaLnBrk="1" fontAlgn="auto" latinLnBrk="0" hangingPunct="1">
+              <a:lnSpc>
+                <a:spcPct val="100000"/>
+              </a:lnSpc>
+              <a:spcBef>
+                <a:spcPts val="0"/>
+              </a:spcBef>
+              <a:spcAft>
+                <a:spcPts val="500"/>
+              </a:spcAft>
+              <a:buClrTx/>
+              <a:buSzPct val="100000"/>
+              <a:buFontTx/>
+              <a:buChar char="•"/>
+              <a:tabLst/>
+              <a:defRPr/>
+            </a:pPr>
+            <a:r>
+              <a:rPr kumimoji="0" lang="en-US" sz="1030" b="0" i="0" u="none" strike="noStrike" kern="1200" cap="none" spc="0" normalizeH="0" baseline="0" noProof="0" dirty="0">
+                <a:ln>
+                  <a:noFill/>
+                </a:ln>
+                <a:solidFill>
+                  <a:srgbClr val="1E293B"/>
+                </a:solidFill>
+                <a:effectLst/>
+                <a:uLnTx/>
+                <a:uFillTx/>
+                <a:latin typeface="Calibri" pitchFamily="34" charset="0"/>
+                <a:ea typeface="Calibri" pitchFamily="34" charset="-122"/>
+                <a:cs typeface="Calibri" pitchFamily="34" charset="-120"/>
+              </a:rPr>
+              <a:t>Observes real runtime calls and frequencies</a:t>
+            </a:r>
+            <a:endParaRPr kumimoji="0" lang="en-US" sz="1030" b="0" i="0" u="none" strike="noStrike" kern="1200" cap="none" spc="0" normalizeH="0" baseline="0" noProof="0" dirty="0">
+              <a:ln>
+                <a:noFill/>
+              </a:ln>
+              <a:solidFill>
+                <a:prstClr val="black"/>
+              </a:solidFill>
+              <a:effectLst/>
+              <a:uLnTx/>
+              <a:uFillTx/>
+              <a:latin typeface="Calibri" panose="020F0502020204030204"/>
+              <a:ea typeface="+mn-ea"/>
+              <a:cs typeface="+mn-cs"/>
+            </a:endParaRPr>
+          </a:p>
+          <a:p>
+            <a:pPr marL="342900" marR="0" lvl="0" indent="-342900" algn="l" defTabSz="914400" rtl="0" eaLnBrk="1" fontAlgn="auto" latinLnBrk="0" hangingPunct="1">
+              <a:lnSpc>
+                <a:spcPct val="100000"/>
+              </a:lnSpc>
+              <a:spcBef>
+                <a:spcPts val="0"/>
+              </a:spcBef>
+              <a:spcAft>
+                <a:spcPts val="500"/>
+              </a:spcAft>
+              <a:buClrTx/>
+              <a:buSzPct val="100000"/>
+              <a:buFontTx/>
+              <a:buChar char="•"/>
+              <a:tabLst/>
+              <a:defRPr/>
+            </a:pPr>
+            <a:r>
+              <a:rPr kumimoji="0" lang="en-US" sz="1030" b="0" i="0" u="none" strike="noStrike" kern="1200" cap="none" spc="0" normalizeH="0" baseline="0" noProof="0" dirty="0">
+                <a:ln>
+                  <a:noFill/>
+                </a:ln>
+                <a:solidFill>
+                  <a:srgbClr val="1E293B"/>
+                </a:solidFill>
+                <a:effectLst/>
+                <a:uLnTx/>
+                <a:uFillTx/>
+                <a:latin typeface="Calibri" pitchFamily="34" charset="0"/>
+                <a:ea typeface="Calibri" pitchFamily="34" charset="-122"/>
+                <a:cs typeface="Calibri" pitchFamily="34" charset="-120"/>
+              </a:rPr>
+              <a:t>Requires deployed system and representative workload</a:t>
+            </a:r>
+            <a:endParaRPr kumimoji="0" lang="en-US" sz="1030" b="0" i="0" u="none" strike="noStrike" kern="1200" cap="none" spc="0" normalizeH="0" baseline="0" noProof="0" dirty="0">
+              <a:ln>
+                <a:noFill/>
+              </a:ln>
+              <a:solidFill>
+                <a:prstClr val="black"/>
+              </a:solidFill>
+              <a:effectLst/>
+              <a:uLnTx/>
+              <a:uFillTx/>
+              <a:latin typeface="Calibri" panose="020F0502020204030204"/>
+              <a:ea typeface="+mn-ea"/>
+              <a:cs typeface="+mn-cs"/>
+            </a:endParaRPr>
+          </a:p>
+          <a:p>
+            <a:pPr marL="342900" marR="0" lvl="0" indent="-342900" algn="l" defTabSz="914400" rtl="0" eaLnBrk="1" fontAlgn="auto" latinLnBrk="0" hangingPunct="1">
+              <a:lnSpc>
+                <a:spcPct val="100000"/>
+              </a:lnSpc>
+              <a:spcBef>
+                <a:spcPts val="0"/>
+              </a:spcBef>
+              <a:spcAft>
+                <a:spcPts val="500"/>
+              </a:spcAft>
+              <a:buClrTx/>
+              <a:buSzPct val="100000"/>
+              <a:buFontTx/>
+              <a:buChar char="•"/>
+              <a:tabLst/>
+              <a:defRPr/>
+            </a:pPr>
+            <a:r>
+              <a:rPr kumimoji="0" lang="en-US" sz="1030" b="0" i="0" u="none" strike="noStrike" kern="1200" cap="none" spc="0" normalizeH="0" baseline="0" noProof="0" dirty="0">
+                <a:ln>
+                  <a:noFill/>
+                </a:ln>
+                <a:solidFill>
+                  <a:srgbClr val="1E293B"/>
+                </a:solidFill>
+                <a:effectLst/>
+                <a:uLnTx/>
+                <a:uFillTx/>
+                <a:latin typeface="Calibri" pitchFamily="34" charset="0"/>
+                <a:ea typeface="Calibri" pitchFamily="34" charset="-122"/>
+                <a:cs typeface="Calibri" pitchFamily="34" charset="-120"/>
+              </a:rPr>
+              <a:t>Captures dynamic routing and production behaviour</a:t>
+            </a:r>
+            <a:endParaRPr kumimoji="0" lang="en-US" sz="1030" b="0" i="0" u="none" strike="noStrike" kern="1200" cap="none" spc="0" normalizeH="0" baseline="0" noProof="0" dirty="0">
+              <a:ln>
+                <a:noFill/>
+              </a:ln>
+              <a:solidFill>
+                <a:prstClr val="black"/>
+              </a:solidFill>
+              <a:effectLst/>
+              <a:uLnTx/>
+              <a:uFillTx/>
+              <a:latin typeface="Calibri" panose="020F0502020204030204"/>
+              <a:ea typeface="+mn-ea"/>
+              <a:cs typeface="+mn-cs"/>
+            </a:endParaRPr>
+          </a:p>
+          <a:p>
+            <a:pPr marL="342900" marR="0" lvl="0" indent="-342900" algn="l" defTabSz="914400" rtl="0" eaLnBrk="1" fontAlgn="auto" latinLnBrk="0" hangingPunct="1">
+              <a:lnSpc>
+                <a:spcPct val="100000"/>
+              </a:lnSpc>
+              <a:spcBef>
+                <a:spcPts val="0"/>
+              </a:spcBef>
+              <a:spcAft>
+                <a:spcPts val="500"/>
+              </a:spcAft>
+              <a:buClrTx/>
+              <a:buSzPct val="100000"/>
+              <a:buFontTx/>
+              <a:buChar char="•"/>
+              <a:tabLst/>
+              <a:defRPr/>
+            </a:pPr>
+            <a:r>
+              <a:rPr kumimoji="0" lang="en-US" sz="1030" b="0" i="0" u="none" strike="noStrike" kern="1200" cap="none" spc="0" normalizeH="0" baseline="0" noProof="0" dirty="0">
+                <a:ln>
+                  <a:noFill/>
+                </a:ln>
+                <a:solidFill>
+                  <a:srgbClr val="1E293B"/>
+                </a:solidFill>
+                <a:effectLst/>
+                <a:uLnTx/>
+                <a:uFillTx/>
+                <a:latin typeface="Calibri" pitchFamily="34" charset="0"/>
+                <a:ea typeface="Calibri" pitchFamily="34" charset="-122"/>
+                <a:cs typeface="Calibri" pitchFamily="34" charset="-120"/>
+              </a:rPr>
+              <a:t>Useful for validating or calibrating static findings</a:t>
+            </a:r>
+            <a:endParaRPr kumimoji="0" lang="en-US" sz="1030" b="0" i="0" u="none" strike="noStrike" kern="1200" cap="none" spc="0" normalizeH="0" baseline="0" noProof="0" dirty="0">
+              <a:ln>
+                <a:noFill/>
+              </a:ln>
+              <a:solidFill>
+                <a:prstClr val="black"/>
+              </a:solidFill>
+              <a:effectLst/>
+              <a:uLnTx/>
+              <a:uFillTx/>
+              <a:latin typeface="Calibri" panose="020F0502020204030204"/>
+              <a:ea typeface="+mn-ea"/>
+              <a:cs typeface="+mn-cs"/>
+            </a:endParaRPr>
+          </a:p>
+        </p:txBody>
+      </p:sp>
+      <p:sp>
+        <p:nvSpPr>
+          <p:cNvPr id="10" name="Text 8"/>
+          <p:cNvSpPr/>
+          <p:nvPr/>
+        </p:nvSpPr>
+        <p:spPr>
+          <a:xfrm>
+            <a:off x="548640" y="3429000"/>
+            <a:ext cx="8046720" cy="292608"/>
+          </a:xfrm>
+          <a:prstGeom prst="rect">
+            <a:avLst/>
+          </a:prstGeom>
+          <a:noFill/>
+          <a:ln/>
+        </p:spPr>
+        <p:txBody>
+          <a:bodyPr wrap="square" lIns="0" tIns="0" rIns="0" bIns="0" rtlCol="0" anchor="ctr"/>
+          <a:lstStyle/>
+          <a:p>
+            <a:pPr marL="0" marR="0" lvl="0" indent="0" algn="l" defTabSz="914400" rtl="0" eaLnBrk="1" fontAlgn="auto" latinLnBrk="0" hangingPunct="1">
+              <a:lnSpc>
+                <a:spcPct val="100000"/>
+              </a:lnSpc>
+              <a:spcBef>
+                <a:spcPts val="0"/>
+              </a:spcBef>
+              <a:spcAft>
+                <a:spcPts val="0"/>
+              </a:spcAft>
+              <a:buClrTx/>
+              <a:buSzTx/>
+              <a:buFontTx/>
+              <a:buNone/>
+              <a:tabLst/>
+              <a:defRPr/>
+            </a:pPr>
+            <a:r>
+              <a:rPr kumimoji="0" lang="en-US" sz="1300" b="1" i="0" u="none" strike="noStrike" kern="1200" cap="none" spc="0" normalizeH="0" baseline="0" noProof="0" dirty="0">
+                <a:ln>
+                  <a:noFill/>
+                </a:ln>
+                <a:solidFill>
+                  <a:srgbClr val="0F2A44"/>
+                </a:solidFill>
+                <a:effectLst/>
+                <a:uLnTx/>
+                <a:uFillTx/>
+                <a:latin typeface="Calibri" pitchFamily="34" charset="0"/>
+                <a:ea typeface="Calibri" pitchFamily="34" charset="-122"/>
+                <a:cs typeface="Calibri" pitchFamily="34" charset="-120"/>
+              </a:rPr>
+              <a:t>Chosen tradeoff</a:t>
+            </a:r>
+            <a:endParaRPr kumimoji="0" lang="en-US" sz="1300" b="0" i="0" u="none" strike="noStrike" kern="1200" cap="none" spc="0" normalizeH="0" baseline="0" noProof="0" dirty="0">
+              <a:ln>
+                <a:noFill/>
+              </a:ln>
+              <a:solidFill>
+                <a:prstClr val="black"/>
+              </a:solidFill>
+              <a:effectLst/>
+              <a:uLnTx/>
+              <a:uFillTx/>
+              <a:latin typeface="Calibri" panose="020F0502020204030204"/>
+              <a:ea typeface="+mn-ea"/>
+              <a:cs typeface="+mn-cs"/>
+            </a:endParaRPr>
+          </a:p>
+        </p:txBody>
+      </p:sp>
+      <p:sp>
+        <p:nvSpPr>
+          <p:cNvPr id="11" name="Text 9"/>
+          <p:cNvSpPr/>
+          <p:nvPr/>
+        </p:nvSpPr>
+        <p:spPr>
+          <a:xfrm>
+            <a:off x="548640" y="3767328"/>
+            <a:ext cx="8046720" cy="658368"/>
+          </a:xfrm>
+          <a:prstGeom prst="rect">
+            <a:avLst/>
+          </a:prstGeom>
+          <a:noFill/>
+          <a:ln/>
+        </p:spPr>
+        <p:txBody>
+          <a:bodyPr wrap="square" lIns="0" tIns="0" rIns="0" bIns="0" rtlCol="0" anchor="ctr"/>
+          <a:lstStyle/>
+          <a:p>
+            <a:pPr marL="0" marR="0" lvl="0" indent="0" algn="l" defTabSz="914400" rtl="0" eaLnBrk="1" fontAlgn="auto" latinLnBrk="0" hangingPunct="1">
+              <a:lnSpc>
+                <a:spcPct val="100000"/>
+              </a:lnSpc>
+              <a:spcBef>
+                <a:spcPts val="0"/>
+              </a:spcBef>
+              <a:spcAft>
+                <a:spcPts val="0"/>
+              </a:spcAft>
+              <a:buClrTx/>
+              <a:buSzTx/>
+              <a:buFontTx/>
+              <a:buNone/>
+              <a:tabLst/>
+              <a:defRPr/>
+            </a:pPr>
+            <a:r>
+              <a:rPr kumimoji="0" lang="en-US" sz="1050" b="0" i="0" u="none" strike="noStrike" kern="1200" cap="none" spc="0" normalizeH="0" baseline="0" noProof="0" dirty="0">
+                <a:ln>
+                  <a:noFill/>
+                </a:ln>
+                <a:solidFill>
+                  <a:srgbClr val="1E293B"/>
+                </a:solidFill>
+                <a:effectLst/>
+                <a:uLnTx/>
+                <a:uFillTx/>
+                <a:latin typeface="Calibri" pitchFamily="34" charset="0"/>
+                <a:ea typeface="Calibri" pitchFamily="34" charset="-122"/>
+                <a:cs typeface="Calibri" pitchFamily="34" charset="-120"/>
+              </a:rPr>
+              <a:t>MSA Detector prioritises applicability over runtime precision: it can analyse systems before they are running, making it useful during development, review, and CI. Runtime traces would improve call-frequency accuracy, but would reduce portability and require operational setup.</a:t>
+            </a:r>
+            <a:endParaRPr kumimoji="0" lang="en-US" sz="1050" b="0" i="0" u="none" strike="noStrike" kern="1200" cap="none" spc="0" normalizeH="0" baseline="0" noProof="0" dirty="0">
+              <a:ln>
+                <a:noFill/>
+              </a:ln>
+              <a:solidFill>
+                <a:prstClr val="black"/>
+              </a:solidFill>
+              <a:effectLst/>
+              <a:uLnTx/>
+              <a:uFillTx/>
+              <a:latin typeface="Calibri" panose="020F0502020204030204"/>
+              <a:ea typeface="+mn-ea"/>
+              <a:cs typeface="+mn-cs"/>
+            </a:endParaRPr>
+          </a:p>
+        </p:txBody>
+      </p:sp>
+      <p:sp>
+        <p:nvSpPr>
+          <p:cNvPr id="12" name="Text 10"/>
+          <p:cNvSpPr/>
+          <p:nvPr/>
+        </p:nvSpPr>
+        <p:spPr>
+          <a:xfrm>
+            <a:off x="7452360" y="4864608"/>
+            <a:ext cx="1143000" cy="228600"/>
+          </a:xfrm>
+          <a:prstGeom prst="rect">
+            <a:avLst/>
+          </a:prstGeom>
+          <a:noFill/>
+          <a:ln/>
+        </p:spPr>
+        <p:txBody>
+          <a:bodyPr wrap="square" lIns="0" tIns="0" rIns="0" bIns="0" rtlCol="0" anchor="ctr"/>
+          <a:lstStyle/>
+          <a:p>
+            <a:pPr marL="0" marR="0" lvl="0" indent="0" algn="r" defTabSz="914400" rtl="0" eaLnBrk="1" fontAlgn="auto" latinLnBrk="0" hangingPunct="1">
+              <a:lnSpc>
+                <a:spcPct val="100000"/>
+              </a:lnSpc>
+              <a:spcBef>
+                <a:spcPts val="0"/>
+              </a:spcBef>
+              <a:spcAft>
+                <a:spcPts val="0"/>
+              </a:spcAft>
+              <a:buClrTx/>
+              <a:buSzTx/>
+              <a:buFontTx/>
+              <a:buNone/>
+              <a:tabLst/>
+              <a:defRPr/>
+            </a:pPr>
+            <a:r>
+              <a:rPr kumimoji="0" lang="en-US" sz="900" b="0" i="0" u="none" strike="noStrike" kern="1200" cap="none" spc="0" normalizeH="0" baseline="0" noProof="0" dirty="0">
+                <a:ln>
+                  <a:noFill/>
+                </a:ln>
+                <a:solidFill>
+                  <a:srgbClr val="64748B"/>
+                </a:solidFill>
+                <a:effectLst/>
+                <a:uLnTx/>
+                <a:uFillTx/>
+                <a:latin typeface="Calibri" pitchFamily="34" charset="0"/>
+                <a:ea typeface="Calibri" pitchFamily="34" charset="-122"/>
+                <a:cs typeface="Calibri" pitchFamily="34" charset="-120"/>
+              </a:rPr>
+              <a:t>Appendix L</a:t>
+            </a:r>
+            <a:endParaRPr kumimoji="0" lang="en-US" sz="900" b="0" i="0" u="none" strike="noStrike" kern="1200" cap="none" spc="0" normalizeH="0" baseline="0" noProof="0" dirty="0">
+              <a:ln>
+                <a:noFill/>
+              </a:ln>
+              <a:solidFill>
+                <a:prstClr val="black"/>
+              </a:solidFill>
+              <a:effectLst/>
+              <a:uLnTx/>
+              <a:uFillTx/>
+              <a:latin typeface="Calibri" panose="020F0502020204030204"/>
+              <a:ea typeface="+mn-ea"/>
+              <a:cs typeface="+mn-cs"/>
+            </a:endParaRPr>
+          </a:p>
+        </p:txBody>
+      </p:sp>
+    </p:spTree>
+  </p:cSld>
+  <p:clrMapOvr>
+    <a:masterClrMapping/>
+  </p:clrMapOvr>
+</p:sld>
+</file>
+
+<file path=ppt/slides/slide26.xml><?xml version="1.0" encoding="utf-8"?>
+<p:sld xmlns:a="http://schemas.openxmlformats.org/drawingml/2006/main" xmlns:r="http://schemas.openxmlformats.org/officeDocument/2006/relationships" xmlns:p="http://schemas.openxmlformats.org/presentationml/2006/main">
+  <p:cSld>
+    <p:bg>
+      <p:bgPr>
+        <a:solidFill>
+          <a:srgbClr val="FFFFFF"/>
+        </a:solidFill>
+        <a:effectLst/>
+      </p:bgPr>
+    </p:bg>
+    <p:spTree>
+      <p:nvGrpSpPr>
+        <p:cNvPr id="1" name=""/>
+        <p:cNvGrpSpPr/>
+        <p:nvPr/>
+      </p:nvGrpSpPr>
+      <p:grpSpPr>
+        <a:xfrm>
+          <a:off x="0" y="0"/>
+          <a:ext cx="0" cy="0"/>
+          <a:chOff x="0" y="0"/>
+          <a:chExt cx="0" cy="0"/>
+        </a:xfrm>
+      </p:grpSpPr>
+      <p:sp>
+        <p:nvSpPr>
+          <p:cNvPr id="2" name="Text 0"/>
+          <p:cNvSpPr/>
+          <p:nvPr/>
+        </p:nvSpPr>
+        <p:spPr>
+          <a:xfrm>
+            <a:off x="548640" y="256032"/>
+            <a:ext cx="8046720" cy="502920"/>
+          </a:xfrm>
+          <a:prstGeom prst="rect">
+            <a:avLst/>
+          </a:prstGeom>
+          <a:noFill/>
+          <a:ln/>
+        </p:spPr>
+        <p:txBody>
+          <a:bodyPr wrap="square" lIns="0" tIns="0" rIns="0" bIns="0" rtlCol="0" anchor="ctr"/>
+          <a:lstStyle/>
+          <a:p>
+            <a:pPr marL="0" marR="0" lvl="0" indent="0" algn="l" defTabSz="914400" rtl="0" eaLnBrk="1" fontAlgn="auto" latinLnBrk="0" hangingPunct="1">
+              <a:lnSpc>
+                <a:spcPct val="100000"/>
+              </a:lnSpc>
+              <a:spcBef>
+                <a:spcPts val="0"/>
+              </a:spcBef>
+              <a:spcAft>
+                <a:spcPts val="0"/>
+              </a:spcAft>
+              <a:buClrTx/>
+              <a:buSzTx/>
+              <a:buFontTx/>
+              <a:buNone/>
+              <a:tabLst/>
+              <a:defRPr/>
+            </a:pPr>
+            <a:r>
+              <a:rPr kumimoji="0" lang="en-US" sz="2500" b="1" i="0" u="none" strike="noStrike" kern="1200" cap="none" spc="0" normalizeH="0" baseline="0" noProof="0" dirty="0">
+                <a:ln>
+                  <a:noFill/>
+                </a:ln>
+                <a:solidFill>
+                  <a:srgbClr val="0F2A44"/>
+                </a:solidFill>
+                <a:effectLst/>
+                <a:uLnTx/>
+                <a:uFillTx/>
+                <a:latin typeface="Calibri" pitchFamily="34" charset="0"/>
+                <a:ea typeface="Calibri" pitchFamily="34" charset="-122"/>
+                <a:cs typeface="Calibri" pitchFamily="34" charset="-120"/>
+              </a:rPr>
+              <a:t>Annex: threats to validity</a:t>
+            </a:r>
+            <a:endParaRPr kumimoji="0" lang="en-US" sz="2500" b="0" i="0" u="none" strike="noStrike" kern="1200" cap="none" spc="0" normalizeH="0" baseline="0" noProof="0" dirty="0">
+              <a:ln>
+                <a:noFill/>
+              </a:ln>
+              <a:solidFill>
+                <a:prstClr val="black"/>
+              </a:solidFill>
+              <a:effectLst/>
+              <a:uLnTx/>
+              <a:uFillTx/>
+              <a:latin typeface="Calibri" panose="020F0502020204030204"/>
+              <a:ea typeface="+mn-ea"/>
+              <a:cs typeface="+mn-cs"/>
+            </a:endParaRPr>
+          </a:p>
+        </p:txBody>
+      </p:sp>
+      <p:sp>
+        <p:nvSpPr>
+          <p:cNvPr id="3" name="Shape 1"/>
+          <p:cNvSpPr/>
+          <p:nvPr/>
+        </p:nvSpPr>
+        <p:spPr>
+          <a:xfrm>
+            <a:off x="548640" y="841248"/>
+            <a:ext cx="8046720" cy="13716"/>
+          </a:xfrm>
+          <a:prstGeom prst="rect">
+            <a:avLst/>
+          </a:prstGeom>
+          <a:solidFill>
+            <a:srgbClr val="D8DEE6"/>
+          </a:solidFill>
+          <a:ln w="12700">
+            <a:solidFill>
+              <a:srgbClr val="D8DEE6"/>
+            </a:solidFill>
+            <a:prstDash val="solid"/>
+          </a:ln>
+        </p:spPr>
+      </p:sp>
+      <p:sp>
+        <p:nvSpPr>
+          <p:cNvPr id="4" name="Shape 2"/>
+          <p:cNvSpPr/>
+          <p:nvPr/>
+        </p:nvSpPr>
+        <p:spPr>
+          <a:xfrm>
             <a:off x="548640" y="1005840"/>
             <a:ext cx="384048" cy="36576"/>
           </a:xfrm>
@@ -29099,7 +32428,7 @@
 </p:sld>
 </file>
 
-<file path=ppt/slides/slide26.xml><?xml version="1.0" encoding="utf-8"?>
+<file path=ppt/slides/slide27.xml><?xml version="1.0" encoding="utf-8"?>
 <p:sld xmlns:a="http://schemas.openxmlformats.org/drawingml/2006/main" xmlns:r="http://schemas.openxmlformats.org/officeDocument/2006/relationships" xmlns:p="http://schemas.openxmlformats.org/presentationml/2006/main">
   <p:cSld>
     <p:bg>
